--- a/presentation/NBU_University_Challenge_2026.pptx
+++ b/presentation/NBU_University_Challenge_2026.pptx
@@ -137,13 +137,13 @@
   <p:extLst>
     <p:ext uri="{521415D9-36F7-43E2-AB2F-B90AF26B5E84}">
       <p14:sectionLst xmlns:p14="http://schemas.microsoft.com/office/powerpoint/2010/main">
-        <p14:section name="Вступ" id="{3717dd92-6d15-21fb-9129-e393464eb74c}">
+        <p14:section name="Вступ" id="{6449807e-f509-6aed-5a0b-bab0d5b34ede}">
           <p14:sldIdLst>
             <p14:sldId id="256"/>
             <p14:sldId id="257"/>
           </p14:sldIdLst>
         </p14:section>
-        <p14:section name="Огляд" id="{5bcc0684-9182-6c4f-fe01-b01958bbf023}">
+        <p14:section name="Огляд" id="{7bcb1d96-743c-345f-faba-55f2f5a8a338}">
           <p14:sldIdLst>
             <p14:sldId id="258"/>
             <p14:sldId id="259"/>
@@ -154,7 +154,7 @@
             <p14:sldId id="264"/>
           </p14:sldIdLst>
         </p14:section>
-        <p14:section name="Прогноз" id="{631b49a7-f6e7-0b13-6459-621924db645e}">
+        <p14:section name="Прогноз" id="{259437ac-5ff9-e821-8ddd-f03b606b644e}">
           <p14:sldIdLst>
             <p14:sldId id="265"/>
             <p14:sldId id="266"/>
@@ -167,7 +167,7 @@
             <p14:sldId id="273"/>
           </p14:sldIdLst>
         </p14:section>
-        <p14:section name="Рекомендації" id="{de210542-b2a5-a0fe-0ac6-7b42b70e1c87}">
+        <p14:section name="Рекомендації" id="{bd1a6ba2-f1b8-1094-bdf7-4e2075d2e26c}">
           <p14:sldIdLst>
             <p14:sldId id="274"/>
             <p14:sldId id="275"/>
@@ -178,7 +178,7 @@
             <p14:sldId id="280"/>
           </p14:sldIdLst>
         </p14:section>
-        <p14:section name="Додатки" id="{24fdfb6a-82de-7d92-b4cd-07abf3fa7578}">
+        <p14:section name="Додатки" id="{cde132c7-fb3c-cae4-4d16-3e7d6a59bbc1}">
           <p14:sldIdLst>
             <p14:sldId id="281"/>
             <p14:sldId id="282"/>
@@ -768,7 +768,7 @@
           <a:p>
             <a:r>
               <a:rPr lang="en-US" dirty="0"/>
-              <a:t>Ми використали шаблон QPM від НБУ, але переписали його на Python: це дало змогу автоматизувати дані, додати віялові графіки, оптимальну політику та бектест. Коректність перевірена: функції відгуку збігаються з MATLAB-версією.</a:t>
+              <a:t>Ми використали шаблон QPM від НБУ, але переписали його на Python: це дало змогу автоматизувати дані, додати віялові графіки, оптимальну політику та бектест. Коректність перевірена: на тих самих даних фільтр і прогноз збігаються з оригінальною MATLAB/IRIS-версією до п'ятого знака.</a:t>
             </a:r>
             <a:endParaRPr lang="en-US" dirty="0"/>
           </a:p>
@@ -5915,7 +5915,7 @@
                 <a:ea typeface="Cambria" pitchFamily="34" charset="-122"/>
                 <a:cs typeface="Cambria" pitchFamily="34" charset="-120"/>
               </a:rPr>
-              <a:t>= MATLAB</a:t>
+              <a:t>~1e−5</a:t>
             </a:r>
             <a:endParaRPr lang="en-US" sz="3400" dirty="0"/>
           </a:p>
@@ -5951,7 +5951,7 @@
                   <a:schemeClr val="tx1"/>
                 </a:solidFill>
               </a:rPr>
-              <a:t>функції відгуку збігаються з шаблоном НБУ (IRIS)</a:t>
+              <a:t>розбіжність з оригінальною моделлю НБУ в MATLAB/IRIS (фільтр і прогноз)</a:t>
             </a:r>
             <a:endParaRPr lang="en-US" sz="1400" dirty="0"/>
           </a:p>
@@ -7466,7 +7466,7 @@
                             <a:schemeClr val="tx1"/>
                           </a:solidFill>
                         </a:rPr>
-                        <a:t>Бюджетний імпульс: локалізація оборонного виробництва коштом Ukraine Support Loan</a:t>
+                        <a:t>Локалізація оборонного виробництва коштом Ukraine Support Loan</a:t>
                       </a:r>
                       <a:endParaRPr lang="en-US" sz="1300" dirty="0"/>
                     </a:p>
@@ -10929,7 +10929,7 @@
                 <a:ea typeface="Cambria" pitchFamily="34" charset="-122"/>
                 <a:cs typeface="Cambria" pitchFamily="34" charset="-120"/>
               </a:rPr>
-              <a:t>Ми бачимо слабший попит, ніж НБУ: розрив ВВП у 2027 близький до нуля</a:t>
+              <a:t>Ми бачимо слабший попит, ніж НБУ: розрив ВВП у 2027 ≈0,3% проти 1,4%</a:t>
             </a:r>
             <a:endParaRPr lang="en-US" sz="2600" dirty="0"/>
           </a:p>
@@ -13337,7 +13337,7 @@
                   <a:schemeClr val="tx1"/>
                 </a:solidFill>
               </a:rPr>
-              <a:t>Дефіцит фінансування: послаблення гривні ≈9% → ставка до ≈18%</a:t>
+              <a:t>Дефіцит фінансування: гривня на ≈6% слабша за базовий (≈55 грн/€) → ставка до ≈18%</a:t>
             </a:r>
             <a:endParaRPr lang="en-US" sz="1300" dirty="0"/>
           </a:p>
@@ -19444,7 +19444,7 @@
                   <a:schemeClr val="tx1"/>
                 </a:solidFill>
               </a:rPr>
-              <a:t>Продаж НБУ ≈$5,0 млрд/міс, надходження ≈$3,6 млрд/міс (липень–вересень)</a:t>
+              <a:t>Продаж НБУ ≈$5,0 млрд/міс, надходження ≈$3,7 млрд/міс (липень–вересень)</a:t>
             </a:r>
             <a:endParaRPr lang="en-US" sz="1400" dirty="0"/>
           </a:p>

--- a/presentation/NBU_University_Challenge_2026.pptx
+++ b/presentation/NBU_University_Challenge_2026.pptx
@@ -140,13 +140,13 @@
   <p:extLst>
     <p:ext uri="{521415D9-36F7-43E2-AB2F-B90AF26B5E84}">
       <p14:sectionLst xmlns:p14="http://schemas.microsoft.com/office/powerpoint/2010/main">
-        <p14:section name="Вступ" id="{dbf9fb21-67d0-edb0-a457-627dd607d7d8}">
+        <p14:section name="Вступ" id="{bb164bcc-21a9-f9f6-a7bd-8cedde432857}">
           <p14:sldIdLst>
             <p14:sldId id="256"/>
             <p14:sldId id="257"/>
           </p14:sldIdLst>
         </p14:section>
-        <p14:section name="Огляд" id="{007d126a-5526-4af1-cdff-ea87c99cbbf7}">
+        <p14:section name="Огляд" id="{71cfdcdc-7afd-7172-3635-abba2fe08ac7}">
           <p14:sldIdLst>
             <p14:sldId id="258"/>
             <p14:sldId id="259"/>
@@ -157,7 +157,7 @@
             <p14:sldId id="264"/>
           </p14:sldIdLst>
         </p14:section>
-        <p14:section name="Прогноз" id="{2b3f64af-904b-7ad4-d173-9a4aec54842d}">
+        <p14:section name="Прогноз" id="{6753de2a-170e-4106-7c95-6a1fa83a0c50}">
           <p14:sldIdLst>
             <p14:sldId id="265"/>
             <p14:sldId id="266"/>
@@ -172,7 +172,7 @@
             <p14:sldId id="275"/>
           </p14:sldIdLst>
         </p14:section>
-        <p14:section name="Рекомендації" id="{e6c80b16-6fe9-1bdc-a769-510eb1362c67}">
+        <p14:section name="Рекомендації" id="{a5a7aaae-5321-f558-773f-0c4e74d94b0e}">
           <p14:sldIdLst>
             <p14:sldId id="276"/>
             <p14:sldId id="277"/>
@@ -183,7 +183,7 @@
             <p14:sldId id="282"/>
           </p14:sldIdLst>
         </p14:section>
-        <p14:section name="Додатки" id="{79b50ac0-ed20-4d5c-218c-352fb930701c}">
+        <p14:section name="Додатки" id="{6634529d-e749-f80a-00da-0112548b5b8d}">
           <p14:sldIdLst>
             <p14:sldId id="283"/>
             <p14:sldId id="284"/>

--- a/presentation/NBU_University_Challenge_2026.pptx
+++ b/presentation/NBU_University_Challenge_2026.pptx
@@ -140,13 +140,13 @@
   <p:extLst>
     <p:ext uri="{521415D9-36F7-43E2-AB2F-B90AF26B5E84}">
       <p14:sectionLst xmlns:p14="http://schemas.microsoft.com/office/powerpoint/2010/main">
-        <p14:section name="Вступ" id="{bb164bcc-21a9-f9f6-a7bd-8cedde432857}">
+        <p14:section name="Вступ" id="{985d0f5f-7928-f7df-4da1-1bdd8abbc78f}">
           <p14:sldIdLst>
             <p14:sldId id="256"/>
             <p14:sldId id="257"/>
           </p14:sldIdLst>
         </p14:section>
-        <p14:section name="Огляд" id="{71cfdcdc-7afd-7172-3635-abba2fe08ac7}">
+        <p14:section name="Огляд" id="{5b347846-5063-9620-6e27-98a678dd1736}">
           <p14:sldIdLst>
             <p14:sldId id="258"/>
             <p14:sldId id="259"/>
@@ -157,7 +157,7 @@
             <p14:sldId id="264"/>
           </p14:sldIdLst>
         </p14:section>
-        <p14:section name="Прогноз" id="{6753de2a-170e-4106-7c95-6a1fa83a0c50}">
+        <p14:section name="Прогноз" id="{6f0e1377-3bb9-7840-e4c1-69f886296b4b}">
           <p14:sldIdLst>
             <p14:sldId id="265"/>
             <p14:sldId id="266"/>
@@ -172,7 +172,7 @@
             <p14:sldId id="275"/>
           </p14:sldIdLst>
         </p14:section>
-        <p14:section name="Рекомендації" id="{a5a7aaae-5321-f558-773f-0c4e74d94b0e}">
+        <p14:section name="Рекомендації" id="{08d1bb86-a358-f41e-6ba8-6b0b1bffa03b}">
           <p14:sldIdLst>
             <p14:sldId id="276"/>
             <p14:sldId id="277"/>
@@ -183,7 +183,7 @@
             <p14:sldId id="282"/>
           </p14:sldIdLst>
         </p14:section>
-        <p14:section name="Додатки" id="{6634529d-e749-f80a-00da-0112548b5b8d}">
+        <p14:section name="Додатки" id="{028fa3c1-f935-c08f-8ab4-1b203d42dfb3}">
           <p14:sldIdLst>
             <p14:sldId id="283"/>
             <p14:sldId id="284"/>
@@ -598,7 +598,7 @@
           <a:p>
             <a:r>
               <a:rPr lang="en-US" dirty="0"/>
-              <a:t>Ми — Команда [назва]. Наша рекомендація — для засідання Правління НБУ 29 жовтня 2026 року, на якому НБУ оновить макропрогноз. Дані — станом на 7 жовтня 2026 року.</a:t>
+              <a:t>Добрий день, шановні члени журі. Ми — Команда [назва]. Сьогодні представимо наші рекомендації для засідання Правління НБУ 29 жовтня 2026 року. Усі дані — станом на 7 жовтня.</a:t>
             </a:r>
             <a:endParaRPr lang="en-US" dirty="0"/>
           </a:p>
@@ -774,7 +774,7 @@
           <a:p>
             <a:r>
               <a:rPr lang="en-US" dirty="0"/>
-              <a:t>Ми взяли шаблон QPM від НБУ, переписали його на Python і розширили: окремо базова й небазова інфляція та канал світових цін на нафту. Python дав автоматизацію даних, віяла, оптимальну політику й бектест. Той самий файл моделі ми проганяємо в MATLAB/IRIS: фільтр і всі сценарії збігаються до п'ятого знака, а графіки сценаріїв і функцій відгуку в презентації побудовані саме в MATLAB.</a:t>
+              <a:t>Тепер — прогноз. Ми взяли квартальну прогнозну модель НБУ, переписали її на Python і розширили. Дані автоматично завантажуються з API НБУ, Держстату, ЄЦБ і Eurostat; фільтр Калмана оцінює розриви й тренди; далі — прогноз із судженнями й аналіз політики. Щоб бути впевненими в результатах, той самий файл моделі ми проганяємо в MATLAB з IRIS, як у НБУ: розбіжність — у п'ятому знаку після коми, а графіки сценаріїв у презентації побудовані в MATLAB. На історії модель прогнозує інфляцію на рік уперед значно точніше за наївний прогноз.</a:t>
             </a:r>
             <a:endParaRPr lang="en-US" dirty="0"/>
           </a:p>
@@ -862,7 +862,7 @@
           <a:p>
             <a:r>
               <a:rPr lang="en-US" dirty="0"/>
-              <a:t>Ми розділили інфляцію на базову і небазову: крива Філіпса з шаблону НБУ тепер описує базову інфляцію (дані Держстату про базовий ІСЦ), а небазові ціни реагують на реальну ціну нафти в євро і на курс. Вагу 0,016 відкалібровано так, щоб +20% ціни нафти давали ≈+0,3 в. п. до ІСЦ: пальне ≈4% кошика, частка нафти в його ціні ≈40%, плюс непрямі ефекти. Графік побудовано в MATLAB/IRIS.</a:t>
+              <a:t>Що ми змінили в моделі НБУ. У шаблоні одна крива Філіпса для всієї інфляції, тож нафтовий шок або не впливає на ціни, або дає хибні коливання через курс. Ми розділили інфляцію на базову і небазову: крива Філіпса описує базову, а небазові ціни реагують на світову ціну нафти та курс. На графіку видно: нафта на 20% дорожча — це плюс 0,3 пункта до інфляції впродовж року, ставка зростає лише на 0,2 пункта, а базова інфляція не прискорюється. Якщо вимкнути цей канал, модель точно збігається з шаблоном НБУ.</a:t>
             </a:r>
             <a:endParaRPr lang="en-US" dirty="0"/>
           </a:p>
@@ -950,7 +950,7 @@
           <a:p>
             <a:r>
               <a:rPr lang="en-US" dirty="0"/>
-              <a:t>Модель має лише кілька основних рівнянь, тому все, чого в ній немає — енергетика, бюджет, допомога, тарифи, — входить через явні судження. Кожне судження має кількісне обґрунтування та джерело. Адмінціни: у середньому за 2016–2026 роки загальна інфляція перевищувала базову на 1,7 в. п. на рік, і НБУ закладає таку саму різницю на 2027–2028 роки.</a:t>
+              <a:t>Модель не описує все — енергетику, бюджет, допомогу, тарифи. Тому ці чинники входять через явні судження, і кожне має кількісне обґрунтування та джерело. Наприклад, вторинні ефекти атак в опалювальний сезон ми калібруємо за оцінкою НБУ. Окремо закладаємо адмінціни й акцизи: у 2016–2026 роках загальна інфляція в середньому перевищувала базову на 1,7 пункта на рік, і НБУ закладає таку саму різницю на 2027–2028 роки.</a:t>
             </a:r>
             <a:endParaRPr lang="en-US" dirty="0"/>
           </a:p>
@@ -1038,7 +1038,7 @@
           <a:p>
             <a:r>
               <a:rPr lang="en-US" dirty="0"/>
-              <a:t>Для поточного кварталу модель не потрібна: беремо трендовий темп і сезонність, поправка −0,1 в. п. — наше судження щодо продовольства. Після публікації вересневого ІСЦ (9–10 жовтня) прогноз оновиться автоматично.</a:t>
+              <a:t>Для найближчих місяців ми будуємо короткостроковий прогноз: трендовий темп цін, сезонність і поправка на дешевше продовольство. Тренд — 0,65% на місяць, тобто близько 8% у річному вимірі. До того ж діє ефект бази: у вересні–грудні 2025 року ціни зросли лише на 1,8%. Тому річна інфляція механічно підніметься до 9,9% у грудні — близько до прогнозу НБУ.</a:t>
             </a:r>
             <a:endParaRPr lang="en-US" dirty="0"/>
           </a:p>
@@ -1126,7 +1126,7 @@
           <a:p>
             <a:r>
               <a:rPr lang="en-US" dirty="0"/>
-              <a:t>Віяло побудоване стохастичними симуляціями з волатильністю шоків, оціненою на 2023–2026 роках. Широке віяло — чесне відображення воєнної невизначеності.</a:t>
+              <a:t>Базовий прогноз. Інфляція досягне піку — близько 8,9% — на початку 2027 року, знизиться до 6,9% наприкінці 2027-го і досягне цілі у другому кварталі 2028 року. Ставка — 16,5% зараз, близько 14,5% наприкінці 2027-го і 11,2% наприкінці 2028-го. Віяло показує, наскільки велика невизначеність: імовірність, що наприкінці 2027 року інфляція буде в діапазоні 5 плюс-мінус 1%, — лише 17%. Це чесне відображення воєнних ризиків.</a:t>
             </a:r>
             <a:endParaRPr lang="en-US" dirty="0"/>
           </a:p>
@@ -1214,7 +1214,7 @@
           <a:p>
             <a:r>
               <a:rPr lang="en-US" dirty="0"/>
-              <a:t>Наша базова інфляція наприкінці 2027 вища, ніж у НБУ, бо ринок праці перегрітий, а атаки на енергетику підвищують витрати. Загальна інфляція близька до НБУ, бо дешевша за ф'ючерсами нафта частково компенсує тарифи й акцизи. У 2028 базова інфляція опускається нижче цілі — як і в прогнозі НБУ, — тому орієнтир на зниження ставки з II кварталу 2027 року.</a:t>
+              <a:t>Важлива відмінність від НБУ — базова інфляція. Ми вважаємо, що вона буде стійкішою: 5,9% наприкінці 2027 року проти 5,1% у НБУ. Причина — перегрітий ринок праці, дорожчі послуги й наслідки атак. Загальна інфляція при цьому близька до НБУ: тарифи й акцизи додають близько 1,7 пункта на рік, а дешевша нафта частково це компенсує. У 2028 році базова інфляція опускається нижче цілі — як і в НБУ. Висновок: підвищити ставку зараз, щоб швидше пом'якшити її пізніше.</a:t>
             </a:r>
             <a:endParaRPr lang="en-US" dirty="0"/>
           </a:p>
@@ -1302,7 +1302,7 @@
           <a:p>
             <a:r>
               <a:rPr lang="en-US" dirty="0"/>
-              <a:t>Наша оцінка розриву ВВП близька до НБУ в історії, але на 2027 рік ми консервативніші: бюджетний імпульс частково нівелюється атаками і нестачею працівників.</a:t>
+              <a:t>Попит ми бачимо слабшим, ніж НБУ: фактично нульове зростання цього року, 1,1% у 2027-му і 0,9% у 2028-му проти 1,8, 2,8 і 3,0% у НБУ. Причини — слабкий третій квартал, атаки, блокада портів і дефіцит кадрів. Реальна ставка вже вища за нейтральну, тобто політика стримувальна, — тому ми не пропонуємо різкого посилення.</a:t>
             </a:r>
             <a:endParaRPr lang="en-US" dirty="0"/>
           </a:p>
@@ -1390,7 +1390,7 @@
           <a:p>
             <a:r>
               <a:rPr lang="en-US" dirty="0"/>
-              <a:t>Графік показує, на скільки ставка має бути вищою за нейтральну за правилом Тейлора і чому.</a:t>
+              <a:t>Що каже правило Тейлора. Головна причина тримати ставку високою — прогноз інфляції на три квартали вперед, на 3–4 пункти вищий за ціль. Розрив ВВП майже не тисне на ставку: це не перегрів попиту, а шоки витрат. З 2027 року внесок інфляції зменшується — з'являється простір для зниження ставки.</a:t>
             </a:r>
             <a:endParaRPr lang="en-US" dirty="0"/>
           </a:p>
@@ -1478,7 +1478,7 @@
           <a:p>
             <a:r>
               <a:rPr lang="en-US" dirty="0"/>
-              <a:t>Сценарії побудовано поверх базового: однакове рішення в жовтні, далі ставка за правилом. Графік розраховано в MATLAB/IRIS за тими самими планами, що й у Python. Висновок: головний ризик для інфляції — курс і резерви; нафтовий шок — це перший раунд для цін пального, він майже не потребує реакції ставки.</a:t>
+              <a:t>Ми розглянули чотири ризикові сценарії, розраховані в MATLAB. Найнебезпечніший — дефіцит фінансування: якщо допомога затримається, гривня буде приблизно на 6% слабшою, інфляція зросте до 11,6%, а ставку доведеться підняти до 18,6%. Важка зима з ударами по енергетиці підніме інфляцію до 10,5% і майже зупинить зростання ВВП. Натомість нафта по 120 доларів додає лише 0,5 пункта до піку інфляції, і ставка майже не реагує — це шок першого раунду. Висновок: головний ризик для інфляції — курс і резерви.</a:t>
             </a:r>
             <a:endParaRPr lang="en-US" dirty="0"/>
           </a:p>
@@ -1566,7 +1566,7 @@
           <a:p>
             <a:r>
               <a:rPr lang="en-US" dirty="0"/>
-              <a:t>Три рішення. Перше — підвищити облікову ставку на 0,5 в. п. до 16,5%: інфляція прискорюється, ризики зміщені вгору, а оптимальна ставка за моделлю — 16,5%, якщо не реагувати на перший раунд підвищення адмінцін, і 16,9% — якщо реагувати. Друге — дозволити гривні поступово слабшати, щоб не витрачати ~5 млрд дол. резервів щомісяця. Третє — поставити на паузу наступні кроки валютної лібералізації, доки не відновляться резерви й ритм міжнародної допомоги.</a:t>
+              <a:t>Почнемо з головного. Ми пропонуємо три рішення, які працюють як єдиний пакет. Перше — підвищити облікову ставку на 0,5 пункта, до 16,5%, і утримувати її щонайменше до кінця першого кварталу 2027 року. Інфляція знову прискорюється: у грудні вона сягне майже 10%, а ризики зміщені вгору. Друге — керована гнучкість курсу: дозволити гривні поступово послаблюватися до євро, приблизно на 4% у 2027 році, замість того щоб витрачати близько 5 мільярдів доларів резервів щомісяця. Третє — поставити на паузу наступні кроки валютної лібералізації, доки не відновляться резерви і ритм допомоги. За такої політики інфляція знизиться до 6,9% наприкінці 2027 року і досягне цілі 5% у другому кварталі 2028 року. Далі — як ми дійшли до цих висновків.</a:t>
             </a:r>
             <a:endParaRPr lang="en-US" dirty="0"/>
           </a:p>
@@ -1654,7 +1654,7 @@
           <a:p>
             <a:r>
               <a:rPr lang="en-US" dirty="0"/>
-              <a:t>↑ — ризик вищої інфляції, ↓ — нижчої. Більшість сильних і ймовірних ризиків — проінфляційні; це аргумент на користь превентивного підвищення ставки.</a:t>
+              <a:t>Матриця ризиків підсумовує: більшість імовірних і сильних ризиків — проінфляційні. Це атаки на енергетику, затримки допомоги, розбалансування очікувань і зарплатна спіраль. Дезінфляційних менше — блокада портів, охолодження попиту, можливе перемир'я. Баланс зміщений угору.</a:t>
             </a:r>
             <a:endParaRPr lang="en-US" dirty="0"/>
           </a:p>
@@ -1830,7 +1830,7 @@
           <a:p>
             <a:r>
               <a:rPr lang="en-US" dirty="0"/>
-              <a:t>Втрати = сума квадратів відхилень інфляції від цілі плюс половина квадрата розриву ВВП за 2027–2028. Оптимальна траєкторія — розв'язок задачі найменших квадратів у лінійній моделі. Частина інфляції 2027–2028 — заплановане підвищення адмінцін; центробанки зазвичай не реагують на перший раунд таких змін, тому орієнтуємося на оптимум без них.</a:t>
+              <a:t>Переходимо до рекомендацій. Ми порівняли чотири варіанти рішення 29 жовтня — від зниження до 15,5% до підвищення до 17%; далі ставка в усіх варіантах іде за правилом. Критерій — втрати: відхилення інфляції від цілі та розрив ВВП у 2027–2028 роках. Кожні 0,5 пункта підвищення зменшують втрати. І зверніть увагу: якщо зараз утримати 16%, правило саме підніме ставку до 16,3% на початку 2027 року. Тобто питання не «чи підвищувати», а «зараз чи із запізненням». Оптимальна ставка за моделлю — 16,5%, якщо не реагувати на перший раунд підвищення адмінцін, як і належить за інфляційного таргетування.</a:t>
             </a:r>
             <a:endParaRPr lang="en-US" dirty="0"/>
           </a:p>
@@ -1918,7 +1918,7 @@
           <a:p>
             <a:r>
               <a:rPr lang="en-US" dirty="0"/>
-              <a:t>Рекомендація — помірне превентивне підвищення з чіткими умовами подальших дій.</a:t>
+              <a:t>Тому перша рекомендація — підвищити облікову ставку до 16,5%. Чому підвищити: інфляція в грудні сягне майже 10%, базова інфляція стійкіша, ніж очікує НБУ, резерви знижуються, а гнучкіший курс потребує сильного якоря для очікувань. Чому не більше: економіка слабка, реальна ставка вже вища за нейтральну, а шоки здебільшого з боку пропозиції. Орієнтир для ринку: утримувати 16,5% щонайменше до кінця першого кварталу 2027 року, далі — поступове зниження до близько 14,5% наприкінці року. Якщо резерви впадуть нижче 43 мільярдів — готові підвищувати далі; якщо базова інфляція опуститься нижче 7% — знижувати швидше.</a:t>
             </a:r>
             <a:endParaRPr lang="en-US" dirty="0"/>
           </a:p>
@@ -2006,7 +2006,7 @@
           <a:p>
             <a:r>
               <a:rPr lang="en-US" dirty="0"/>
-              <a:t>Простий балансовий розрахунок: резерви = попередні + офіційні надходження − продаж валюти НБУ. Регресія інтервенцій на модельну змінну не дала значущого зв'язку, тому ми не використовували підхід «1% курсу = X млрд».</a:t>
+              <a:t>Друга рекомендація — щодо курсу. НБУ продає близько 5,0 мільярда доларів на місяць, а надходить близько 3,7. Якщо так триватиме, наприкінці року резерви становитимуть 43 мільярди — 3,6 місяця імпорту, а за затримки допомоги — 38 мільярдів. Тому ми пропонуємо керовану гнучкість: дозволити гривні поступово послаблюватися — приблизно на 4% до євро у 2027 році, — а інтервенції використовувати лише для згладжування коливань. Захищати певний рівень курсу — прямий шлях до втрати резервів.</a:t>
             </a:r>
             <a:endParaRPr lang="en-US" dirty="0"/>
           </a:p>
@@ -2094,7 +2094,7 @@
           <a:p>
             <a:r>
               <a:rPr lang="en-US" dirty="0"/>
-              <a:t>Рекомендація спирається на Стратегію пом'якшення валютних обмежень (2023): пріоритет поточних операцій над капітальними і можливість призупинення кроків за несприятливих умов.</a:t>
+              <a:t>Третя рекомендація — валютні обмеження. Серпневий пакет варто зберегти: після підвищення ліміту купівля валюти населенням зросла з 0,39 до 0,58 мільярда доларів на місяць — помітно, але керовано. Стратегія НБУ передбачає, що кроки лібералізації робляться за передумовами, а не за календарем. Тому наступний етап — капітальні операції та операції населення — пропонуємо поставити на паузу, доки резерви не повернуться до 50 мільярдів доларів, а допомога не надходитиме ритмічно. Лібералізацію, яка залучає валюту, — продовжувати, а нових обмежень не запроваджувати.</a:t>
             </a:r>
             <a:endParaRPr lang="en-US" dirty="0"/>
           </a:p>
@@ -2182,7 +2182,7 @@
           <a:p>
             <a:r>
               <a:rPr lang="en-US" dirty="0"/>
-              <a:t>Комунікація має пояснити логіку пакета: вища ставка дозволяє не витрачати резерви на утримання курсу.</a:t>
+              <a:t>Усе це має пояснити комунікація. Ключова формула — «ставка — якір, курс — амортизатор»: НБУ підвищує ставку превентивно, гнучкий курс захищає резерви, а гривневі заощадження залишаються вигіднішими за валютні. Чого уникати — обіцянок конкретного курсу і сигналів про швидке зниження ставки. На слайді — наш проєкт пресрелізу.</a:t>
             </a:r>
             <a:endParaRPr lang="en-US" dirty="0"/>
           </a:p>
@@ -2270,7 +2270,7 @@
           <a:p>
             <a:r>
               <a:rPr lang="en-US" dirty="0"/>
-              <a:t>Дякуємо! Готові до запитань.</a:t>
+              <a:t>Підсумуємо. Перше — підвищити облікову ставку до 16,5% і утримувати щонайменше до кінця першого кварталу 2027 року. Друге — керована гнучкість курсу замість витрачання резервів. Третє — пауза в лібералізації валютних обмежень. За такої політики інфляція повернеться до цілі у другому кварталі 2028 року. Дякуємо за увагу! Будемо раді відповісти на ваші запитання.</a:t>
             </a:r>
             <a:endParaRPr lang="en-US" dirty="0"/>
           </a:p>
@@ -3062,7 +3062,7 @@
           <a:p>
             <a:r>
               <a:rPr lang="en-US" dirty="0"/>
-              <a:t>Зовнішній фон гірший, ніж у липневому прогнозі НБУ: дорожча нафта підживлює ціни на пальне в Україні, а підвищення ставок у світі зменшує простір для пом'якшення. У прогнозі ми беремо ф'ючерсну криву Brent: ринок очікує поступового здешевлення нафти (до $76 наприкінці 2028), і це дезінфляційний чинник.</a:t>
+              <a:t>Зовнішнє середовище стало помітно проінфляційним. Через війну на Близькому Сході нафта Brent у квітні сягала 117 доларів за барель і у вересні знову перевищила 100 — тоді як НБУ в липні закладав 80–85. Ринок очікує здешевлення: ф'ючерси вказують на 83 долари наприкінці 2027 року, і саме цю криву ми беремо в прогноз. Водночас ЄЦБ підвищує ставку, тож простору для пом'якшення в Україні менше.</a:t>
             </a:r>
             <a:endParaRPr lang="en-US" dirty="0"/>
           </a:p>
@@ -3150,7 +3150,7 @@
           <a:p>
             <a:r>
               <a:rPr lang="en-US" dirty="0"/>
-              <a:t>Інфляція в серпні — 8,1% р/р, трохи вище траєкторії НБУ. Шоки пропозиції (пальне, тарифи) поширюються на послуги через витрати бізнесу. Продовольство — дезінфляційний чинник.</a:t>
+              <a:t>Інфляція в серпні прискорилася до 8,1%. Головні рушії — пальне, яке подорожчало майже на 39% за рік, і адмінрегульовані ціни. Але більше нас турбує базова інфляція: вона тримається на рівні 8,1% три місяці поспіль, а послуги дорожчають на 13% через зарплати, оренду й логістику. Стримує лише продовольство: через блокаду Чорного моря зерно й овочі залишаються на внутрішньому ринку.</a:t>
             </a:r>
             <a:endParaRPr lang="en-US" dirty="0"/>
           </a:p>
@@ -3238,7 +3238,7 @@
           <a:p>
             <a:r>
               <a:rPr lang="en-US" dirty="0"/>
-              <a:t>Ризик — розбалансування очікувань: домогосподарства очікують інфляцію вище фактичної, а члени КМП звертають увагу на зростання очікувань фінансових аналітиків.</a:t>
+              <a:t>Інфляційні очікування підвищені: домогосподарства чекають 10–14% — більше, ніж фактична інфляція, а фінансові аналітики підвищили свої очікування до 7,9%. Реальна облікова ставка — близько 7%, тому гривневі депозити й ОВДП поки привабливі. Але депозитні ставки реагують із запізненням, і ризик розбалансування очікувань реальний.</a:t>
             </a:r>
             <a:endParaRPr lang="en-US" dirty="0"/>
           </a:p>
@@ -3326,7 +3326,7 @@
           <a:p>
             <a:r>
               <a:rPr lang="en-US" dirty="0"/>
-              <a:t>Ринок праці перегрітий через дефіцит працівників, тому навіть за слабкого ВВП фундаментальний ціновий тиск зберігається.</a:t>
+              <a:t>Економіка тим часом сповільнюється. ВВП у другому кварталі зріс лише на 0,4% за рік, а у третьому, за оцінкою КМП, — суттєво гірше прогнозу НБУ. Атаки на енергетику, логістику й порти забирають близько 0,9 пункта зростання. Водночас ринок праці перегрітий: через дефіцит кадрів номінальні зарплати зростають на 25%, реальні — на 17%. Тож навіть за слабкого ВВП тиск на ціни послуг зберігається.</a:t>
             </a:r>
             <a:endParaRPr lang="en-US" dirty="0"/>
           </a:p>
@@ -3414,7 +3414,7 @@
           <a:p>
             <a:r>
               <a:rPr lang="en-US" dirty="0"/>
-              <a:t>Стабільність курсу зараз забезпечується інтервенціями, а надходження допомоги в липні–вересні були меншими за очікувані. Це ключовий аргумент для нашої курсової рекомендації.</a:t>
+              <a:t>Найгостріша проблема — валютний ринок. НБУ продає в середньому близько 5,0 мільярда доларів на місяць, у вересні — рекордні 5,5 мільярда. Резерви за два місяці скоротилися з 51,2 до 47,1 мільярда, тоді як НБУ очікував 53,8. Курс стабільний — близько 51,5 гривні за євро, — але ця стабільність купується резервами.</a:t>
             </a:r>
             <a:endParaRPr lang="en-US" dirty="0"/>
           </a:p>
@@ -3502,7 +3502,7 @@
           <a:p>
             <a:r>
               <a:rPr lang="en-US" dirty="0"/>
-              <a:t>Локалізація оборонного виробництва коштом USL — це водночас бюджетний імпульс (інфляційний) і додатковий попит на валюту для імпорту компонентів.</a:t>
+              <a:t>Причина — залежність бюджету від допомоги. Дефіцит без грантів — близько 35% ВВП, потреба у зовнішньому фінансуванні — 87 мільярдів доларів, а влітку надходження затрималися. Оборонний кредит USL — водночас бюджетний імпульс для попиту і додатковий попит на валюту для імпорту компонентів.</a:t>
             </a:r>
             <a:endParaRPr lang="en-US" dirty="0"/>
           </a:p>

--- a/presentation/NBU_University_Challenge_2026.pptx
+++ b/presentation/NBU_University_Challenge_2026.pptx
@@ -140,13 +140,13 @@
   <p:extLst>
     <p:ext uri="{521415D9-36F7-43E2-AB2F-B90AF26B5E84}">
       <p14:sectionLst xmlns:p14="http://schemas.microsoft.com/office/powerpoint/2010/main">
-        <p14:section name="Вступ" id="{985d0f5f-7928-f7df-4da1-1bdd8abbc78f}">
+        <p14:section name="Вступ" id="{27858272-49fe-311f-7b52-e1297f1d4337}">
           <p14:sldIdLst>
             <p14:sldId id="256"/>
             <p14:sldId id="257"/>
           </p14:sldIdLst>
         </p14:section>
-        <p14:section name="Огляд" id="{5b347846-5063-9620-6e27-98a678dd1736}">
+        <p14:section name="Огляд" id="{4afa9a03-6b9f-39b0-a034-c10dcbeef3aa}">
           <p14:sldIdLst>
             <p14:sldId id="258"/>
             <p14:sldId id="259"/>
@@ -157,7 +157,7 @@
             <p14:sldId id="264"/>
           </p14:sldIdLst>
         </p14:section>
-        <p14:section name="Прогноз" id="{6f0e1377-3bb9-7840-e4c1-69f886296b4b}">
+        <p14:section name="Прогноз" id="{4669b9f3-67e1-4770-ac30-b2be63cf071c}">
           <p14:sldIdLst>
             <p14:sldId id="265"/>
             <p14:sldId id="266"/>
@@ -172,7 +172,7 @@
             <p14:sldId id="275"/>
           </p14:sldIdLst>
         </p14:section>
-        <p14:section name="Рекомендації" id="{08d1bb86-a358-f41e-6ba8-6b0b1bffa03b}">
+        <p14:section name="Рекомендації" id="{6edb2c27-02d2-fa46-08c4-ae517b8f0443}">
           <p14:sldIdLst>
             <p14:sldId id="276"/>
             <p14:sldId id="277"/>
@@ -183,7 +183,7 @@
             <p14:sldId id="282"/>
           </p14:sldIdLst>
         </p14:section>
-        <p14:section name="Додатки" id="{028fa3c1-f935-c08f-8ab4-1b203d42dfb3}">
+        <p14:section name="Додатки" id="{432add66-7ecc-7cd9-5c05-701441fbff57}">
           <p14:sldIdLst>
             <p14:sldId id="283"/>
             <p14:sldId id="284"/>
@@ -1126,7 +1126,7 @@
           <a:p>
             <a:r>
               <a:rPr lang="en-US" dirty="0"/>
-              <a:t>Базовий прогноз. Інфляція досягне піку — близько 8,9% — на початку 2027 року, знизиться до 6,9% наприкінці 2027-го і досягне цілі у другому кварталі 2028 року. Ставка — 16,5% зараз, близько 14,5% наприкінці 2027-го і 11,2% наприкінці 2028-го. Віяло показує, наскільки велика невизначеність: імовірність, що наприкінці 2027 року інфляція буде в діапазоні 5 плюс-мінус 1%, — лише 17%. Це чесне відображення воєнних ризиків.</a:t>
+              <a:t>Базовий прогноз. Нагадаю: ціль НБУ — 5% без діапазону відхилень, і повернути інфляцію до неї треба на горизонті до трьох років. Інфляція досягне піку — близько 8,9% — на початку 2027 року, знизиться до 6,7% наприкінці 2027-го, у 2028-му тимчасово опуститься до 4,3% через дешевшу нафту і з третьому кварталі 2029 року стабілізується на 5%. Ставка — 16,5% до середини 2027 року, далі поступово знижується до 10,4% наприкінці 2028-го. Віяло показує, наскільки велика невизначеність: з імовірністю 70% інфляція наприкінці 2027 року буде між 2 і 11%.</a:t>
             </a:r>
             <a:endParaRPr lang="en-US" dirty="0"/>
           </a:p>
@@ -1214,7 +1214,7 @@
           <a:p>
             <a:r>
               <a:rPr lang="en-US" dirty="0"/>
-              <a:t>Важлива відмінність від НБУ — базова інфляція. Ми вважаємо, що вона буде стійкішою: 5,9% наприкінці 2027 року проти 5,1% у НБУ. Причина — перегрітий ринок праці, дорожчі послуги й наслідки атак. Загальна інфляція при цьому близька до НБУ: тарифи й акцизи додають близько 1,7 пункта на рік, а дешевша нафта частково це компенсує. У 2028 році базова інфляція опускається нижче цілі — як і в НБУ. Висновок: підвищити ставку зараз, щоб швидше пом'якшити її пізніше.</a:t>
+              <a:t>Важлива відмінність від НБУ — базова інфляція. Ми вважаємо, що вона буде стійкішою: 5,7% наприкінці 2027 року проти 5,1% у НБУ. Причина — перегрітий ринок праці, дорожчі послуги й наслідки атак. Загальна інфляція при цьому близька до НБУ: тарифи й акцизи додають близько 1,7 пункта на рік, а дешевша нафта частково це компенсує. У 2028 році базова інфляція опускається нижче цілі — як і в НБУ. Висновок: підвищити ставку зараз, щоб швидше пом'якшити її пізніше.</a:t>
             </a:r>
             <a:endParaRPr lang="en-US" dirty="0"/>
           </a:p>
@@ -1302,7 +1302,7 @@
           <a:p>
             <a:r>
               <a:rPr lang="en-US" dirty="0"/>
-              <a:t>Попит ми бачимо слабшим, ніж НБУ: фактично нульове зростання цього року, 1,1% у 2027-му і 0,9% у 2028-му проти 1,8, 2,8 і 3,0% у НБУ. Причини — слабкий третій квартал, атаки, блокада портів і дефіцит кадрів. Реальна ставка вже вища за нейтральну, тобто політика стримувальна, — тому ми не пропонуємо різкого посилення.</a:t>
+              <a:t>Попит ми бачимо слабшим, ніж НБУ: фактично нульове зростання цього року, 1,0% у 2027-му і 0,9% у 2028-му проти 1,8, 2,8 і 3,0% у НБУ. Причини — слабкий третій квартал, атаки, блокада портів і дефіцит кадрів. Реальна ставка вже вища за нейтральну, тобто політика стримувальна, — тому ми не пропонуємо різкого посилення.</a:t>
             </a:r>
             <a:endParaRPr lang="en-US" dirty="0"/>
           </a:p>
@@ -1390,7 +1390,7 @@
           <a:p>
             <a:r>
               <a:rPr lang="en-US" dirty="0"/>
-              <a:t>Що каже правило Тейлора. Головна причина тримати ставку високою — прогноз інфляції на три квартали вперед, на 3–4 пункти вищий за ціль. Розрив ВВП майже не тисне на ставку: це не перегрів попиту, а шоки витрат. З 2027 року внесок інфляції зменшується — з'являється простір для зниження ставки.</a:t>
+              <a:t>Що каже правило Тейлора. Головна причина тримати ставку високою — прогноз інфляції на три квартали вперед, на 3–4 пункти вищий за ціль. Розрив ВВП майже не тисне на ставку: це не перегрів попиту, а шоки витрат. З другого півріччя 2027 року внесок інфляції зменшується — з'являється простір для зниження ставки.</a:t>
             </a:r>
             <a:endParaRPr lang="en-US" dirty="0"/>
           </a:p>
@@ -1478,7 +1478,7 @@
           <a:p>
             <a:r>
               <a:rPr lang="en-US" dirty="0"/>
-              <a:t>Ми розглянули чотири ризикові сценарії, розраховані в MATLAB. Найнебезпечніший — дефіцит фінансування: якщо допомога затримається, гривня буде приблизно на 6% слабшою, інфляція зросте до 11,6%, а ставку доведеться підняти до 18,6%. Важка зима з ударами по енергетиці підніме інфляцію до 10,5% і майже зупинить зростання ВВП. Натомість нафта по 120 доларів додає лише 0,5 пункта до піку інфляції, і ставка майже не реагує — це шок першого раунду. Висновок: головний ризик для інфляції — курс і резерви.</a:t>
+              <a:t>Ми розглянули чотири ризикові сценарії, розраховані в MATLAB. Найнебезпечніший — дефіцит фінансування: якщо допомога затримається, гривня буде приблизно на 6% слабшою, інфляція зросте до 11,5%, а ставку доведеться підняти до 19,3%. Важка зима з ударами по енергетиці підніме інфляцію до 10,4% і майже зупинить зростання ВВП. Натомість нафта по 120 доларів додає лише 0,5 пункта до піку інфляції, і ставка майже не реагує — це шок першого раунду. Висновок: головний ризик для інфляції — курс і резерви.</a:t>
             </a:r>
             <a:endParaRPr lang="en-US" dirty="0"/>
           </a:p>
@@ -1566,7 +1566,7 @@
           <a:p>
             <a:r>
               <a:rPr lang="en-US" dirty="0"/>
-              <a:t>Почнемо з головного. Ми пропонуємо три рішення, які працюють як єдиний пакет. Перше — підвищити облікову ставку на 0,5 пункта, до 16,5%, і утримувати її щонайменше до кінця першого кварталу 2027 року. Інфляція знову прискорюється: у грудні вона сягне майже 10%, а ризики зміщені вгору. Друге — керована гнучкість курсу: дозволити гривні поступово послаблюватися до євро, приблизно на 4% у 2027 році, замість того щоб витрачати близько 5 мільярдів доларів резервів щомісяця. Третє — поставити на паузу наступні кроки валютної лібералізації, доки не відновляться резерви і ритм допомоги. За такої політики інфляція знизиться до 6,9% наприкінці 2027 року і досягне цілі 5% у другому кварталі 2028 року. Далі — як ми дійшли до цих висновків.</a:t>
+              <a:t>Почнемо з головного. Ми пропонуємо три рішення, які працюють як єдиний пакет. Перше — підвищити облікову ставку на 0,5 пункта, до 16,5%, і утримувати її щонайменше до середини 2027 року. Інфляція знову прискорюється: у грудні вона сягне майже 10%, а ризики зміщені вгору. Друге — керована гнучкість курсу: дозволити гривні поступово послаблюватися до євро, приблизно на 4% у 2027 році, замість того щоб витрачати близько 5 мільярдів доларів резервів щомісяця. Третє — поставити на паузу наступні кроки валютної лібералізації, доки не відновляться резерви і ритм допомоги. За такої політики інфляція знизиться до 6,7% наприкінці 2027 року і повернеться до цілі 5% у третьому кварталі 2029 року — у межах трирічного горизонту політики НБУ. Далі — як ми дійшли до цих висновків.</a:t>
             </a:r>
             <a:endParaRPr lang="en-US" dirty="0"/>
           </a:p>
@@ -1830,7 +1830,7 @@
           <a:p>
             <a:r>
               <a:rPr lang="en-US" dirty="0"/>
-              <a:t>Переходимо до рекомендацій. Ми порівняли чотири варіанти рішення 29 жовтня — від зниження до 15,5% до підвищення до 17%; далі ставка в усіх варіантах іде за правилом. Критерій — втрати: відхилення інфляції від цілі та розрив ВВП у 2027–2028 роках. Кожні 0,5 пункта підвищення зменшують втрати. І зверніть увагу: якщо зараз утримати 16%, правило саме підніме ставку до 16,3% на початку 2027 року. Тобто питання не «чи підвищувати», а «зараз чи із запізненням». Оптимальна ставка за моделлю — 16,5%, якщо не реагувати на перший раунд підвищення адмінцін, як і належить за інфляційного таргетування.</a:t>
+              <a:t>Переходимо до рекомендацій. Ми порівняли чотири варіанти рішення 29 жовтня — від зниження до 15,5% до підвищення до 17%. У кожному ставка утримується до середини 2027 року, а далі знижується так, щоб інфляція повернулася до 5% на горизонті політики. Механічне правило Тейлора для цього не годиться: з ним інфляція наприкінці 2029 року була б лише 4,3%. Критерій вибору — втрати: відхилення інфляції від цілі та розрив ВВП у 2027–2029 роках. Кожні 0,5 пункта підвищення зменшують втрати. Оптимальна ставка за моделлю — 16,6%, якщо не реагувати на перший раунд підвищення адмінцін, як і належить за інфляційного таргетування.</a:t>
             </a:r>
             <a:endParaRPr lang="en-US" dirty="0"/>
           </a:p>
@@ -1918,7 +1918,7 @@
           <a:p>
             <a:r>
               <a:rPr lang="en-US" dirty="0"/>
-              <a:t>Тому перша рекомендація — підвищити облікову ставку до 16,5%. Чому підвищити: інфляція в грудні сягне майже 10%, базова інфляція стійкіша, ніж очікує НБУ, резерви знижуються, а гнучкіший курс потребує сильного якоря для очікувань. Чому не більше: економіка слабка, реальна ставка вже вища за нейтральну, а шоки здебільшого з боку пропозиції. Орієнтир для ринку: утримувати 16,5% щонайменше до кінця першого кварталу 2027 року, далі — поступове зниження до близько 14,5% наприкінці року. Якщо резерви впадуть нижче 43 мільярдів — готові підвищувати далі; якщо базова інфляція опуститься нижче 7% — знижувати швидше.</a:t>
+              <a:t>Тому перша рекомендація — підвищити облікову ставку до 16,5%. Чому підвищити: інфляція в грудні сягне майже 10%, базова інфляція стійкіша, ніж очікує НБУ, резерви знижуються, а гнучкіший курс потребує сильного якоря для очікувань. Чому не більше: економіка слабка, реальна ставка вже вища за нейтральну, а шоки здебільшого з боку пропозиції. Орієнтир для ринку: утримувати 16,5% щонайменше до середини 2027 року, далі — поступове зниження: близько 15,5% наприкінці 2027-го і 10,5% наприкінці 2028-го. Якщо резерви впадуть нижче 43 мільярдів — готові підвищувати далі; якщо базова інфляція опуститься нижче 7% — знижувати швидше.</a:t>
             </a:r>
             <a:endParaRPr lang="en-US" dirty="0"/>
           </a:p>
@@ -2270,7 +2270,7 @@
           <a:p>
             <a:r>
               <a:rPr lang="en-US" dirty="0"/>
-              <a:t>Підсумуємо. Перше — підвищити облікову ставку до 16,5% і утримувати щонайменше до кінця першого кварталу 2027 року. Друге — керована гнучкість курсу замість витрачання резервів. Третє — пауза в лібералізації валютних обмежень. За такої політики інфляція повернеться до цілі у другому кварталі 2028 року. Дякуємо за увагу! Будемо раді відповісти на ваші запитання.</a:t>
+              <a:t>Підсумуємо. Перше — підвищити облікову ставку до 16,5% і утримувати щонайменше до середини 2027 року. Друге — керована гнучкість курсу замість витрачання резервів. Третє — пауза в лібералізації валютних обмежень. За такої політики інфляція повернеться до цілі 5% у третьому кварталі 2029 року. Дякуємо за увагу! Будемо раді відповісти на ваші запитання.</a:t>
             </a:r>
             <a:endParaRPr lang="en-US" dirty="0"/>
           </a:p>
@@ -2886,7 +2886,7 @@
           <a:p>
             <a:r>
               <a:rPr lang="en-US" dirty="0"/>
-              <a:t>Квартальні значення базового сценарію (рішення 16,5% у жовтні, далі — правило).</a:t>
+              <a:t>Значення базового сценарію в II і IV кварталах (рішення 16,5% у жовтні з утриманням до середини 2027, далі — траєкторія повернення до цілі). Усі квартали — results/tables/baseline_quarterly.csv.</a:t>
             </a:r>
             <a:endParaRPr lang="en-US" dirty="0"/>
           </a:p>
@@ -11695,7 +11695,7 @@
                 <a:ea typeface="Cambria" pitchFamily="34" charset="-122"/>
                 <a:cs typeface="Cambria" pitchFamily="34" charset="-120"/>
               </a:rPr>
-              <a:t>Інфляція досягне піку на початку 2027 і повернеться до цілі у II кв. 2028</a:t>
+              <a:t>Інфляція досягне піку на початку 2027 і повернеться до цілі 5% у 2029 — у межах горизонту політики</a:t>
             </a:r>
             <a:endParaRPr lang="en-US" sz="2600" dirty="0"/>
           </a:p>
@@ -11811,7 +11811,7 @@
                   <a:schemeClr val="tx1"/>
                 </a:solidFill>
               </a:rPr>
-              <a:t>Пік ≈8,9% у I кв. 2027; 6,9% наприкінці 2027 (НБУ, липень: 6,9% на грудень)</a:t>
+              <a:t>Пік ≈8,9% у I кв. 2027; 6,7% наприкінці 2027 (НБУ: 6,9%); у 2028 — тимчасово ≈4,3% (дешевша нафта); 5% — з III кв. 2029</a:t>
             </a:r>
             <a:endParaRPr lang="en-US" sz="1300" dirty="0"/>
           </a:p>
@@ -11903,7 +11903,7 @@
                   <a:schemeClr val="tx1"/>
                 </a:solidFill>
               </a:rPr>
-              <a:t>Ставка: 16,5% → 14,7% наприкінці 2027 → 11,2% наприкінці 2028</a:t>
+              <a:t>Ставка: 16,5% до середини 2027 → 15,5% наприкінці 2027 → 10,4% — 2028 → 8,9% — 2029</a:t>
             </a:r>
             <a:endParaRPr lang="en-US" sz="1300" dirty="0"/>
           </a:p>
@@ -11995,7 +11995,7 @@
                   <a:schemeClr val="tx1"/>
                 </a:solidFill>
               </a:rPr>
-              <a:t>Невизначеність велика: імовірність потрапити в 5±1% — 17% наприкінці 2027 і 18% — 2028</a:t>
+              <a:t>Невизначеність велика: з імовірністю 70% інфляція наприкінці 2027 — від 2,4 до 11,0%</a:t>
             </a:r>
             <a:endParaRPr lang="en-US" sz="1300" dirty="0"/>
           </a:p>
@@ -12109,7 +12109,7 @@
                 <a:ea typeface="Cambria" pitchFamily="34" charset="-122"/>
                 <a:cs typeface="Cambria" pitchFamily="34" charset="-120"/>
               </a:rPr>
-              <a:t>Базова інфляція в 2027 стійкіша, ніж у НБУ: 5,9% наприкінці року проти 5,1%</a:t>
+              <a:t>Базова інфляція в 2027 стійкіша, ніж у НБУ: 5,7% наприкінці року проти 5,1%</a:t>
             </a:r>
             <a:endParaRPr lang="en-US" sz="2600" dirty="0"/>
           </a:p>
@@ -12191,7 +12191,7 @@
                   <a:schemeClr val="tx1"/>
                 </a:solidFill>
               </a:rPr>
-              <a:t>Загальна: 6,9% наприкінці 2027 (НБУ 6,9%) — тарифи й акцизи додають ≈1,7 в. п. на рік, дешевша нафта (ф'ючерси) — віднімає</a:t>
+              <a:t>Загальна: 6,7% наприкінці 2027 (НБУ 6,9%) — тарифи й акцизи додають ≈1,7 в. п. на рік, дешевша нафта (ф'ючерси) — віднімає</a:t>
             </a:r>
             <a:endParaRPr lang="en-US" sz="1400" dirty="0"/>
           </a:p>
@@ -12209,7 +12209,7 @@
                   <a:schemeClr val="tx1"/>
                 </a:solidFill>
               </a:rPr>
-              <a:t>2028: базова 2,9% (НБУ 3,3%) — слабкий попит → простір для зниження ставки з II кв. 2027</a:t>
+              <a:t>2028: базова 3,1% (НБУ 3,3%) — слабкий попит → простір для зниження ставки з II пів. 2027</a:t>
             </a:r>
             <a:endParaRPr lang="en-US" sz="1400" dirty="0"/>
           </a:p>
@@ -12341,7 +12341,7 @@
                 <a:ea typeface="Cambria" pitchFamily="34" charset="-122"/>
                 <a:cs typeface="Cambria" pitchFamily="34" charset="-120"/>
               </a:rPr>
-              <a:t>Ми бачимо слабший попит, ніж НБУ: розрив ВВП у 2027 ≈0,4% проти 1,4%</a:t>
+              <a:t>Ми бачимо слабший попит, ніж НБУ: розрив ВВП у 2027 ≈0,3% проти 1,4%</a:t>
             </a:r>
             <a:endParaRPr lang="en-US" sz="2600" dirty="0"/>
           </a:p>
@@ -12429,7 +12429,7 @@
                   <a:schemeClr val="tx1"/>
                 </a:solidFill>
               </a:rPr>
-              <a:t>ВВП: 0,0% / 1,1% / 0,9% у 2026–2028 (НБУ: 1,8 / 2,8 / 3,0%)</a:t>
+              <a:t>ВВП: 0,0% / 1,0% / 0,9% у 2026–2028 (НБУ: 1,8 / 2,8 / 3,0%)</a:t>
             </a:r>
             <a:endParaRPr lang="en-US" sz="1400" dirty="0"/>
           </a:p>
@@ -12579,7 +12579,7 @@
                 <a:ea typeface="Cambria" pitchFamily="34" charset="-122"/>
                 <a:cs typeface="Cambria" pitchFamily="34" charset="-120"/>
               </a:rPr>
-              <a:t>За правилом ставка має лишатися ≈16,5% до весни: інфляція вище цілі на 3–4 в. п.</a:t>
+              <a:t>Ставка має лишатися високою, доки прогноз інфляції вищий за ціль на 3–4 в. п.</a:t>
             </a:r>
             <a:endParaRPr lang="en-US" sz="2600" dirty="0"/>
           </a:p>
@@ -12679,7 +12679,7 @@
                   <a:schemeClr val="tx1"/>
                 </a:solidFill>
               </a:rPr>
-              <a:t>З 2027 внесок інфляції зменшується → простір для зниження ставки</a:t>
+              <a:t>З другого півріччя 2027 внесок інфляції зменшується → простір для зниження ставки</a:t>
             </a:r>
             <a:endParaRPr lang="en-US" sz="1400" dirty="0"/>
           </a:p>
@@ -13358,7 +13358,7 @@
                             <a:schemeClr val="tx1"/>
                           </a:solidFill>
                         </a:rPr>
-                        <a:t>6,9</a:t>
+                        <a:t>6,7</a:t>
                       </a:r>
                       <a:endParaRPr lang="en-US" sz="1200" dirty="0"/>
                     </a:p>
@@ -13419,7 +13419,7 @@
                             <a:schemeClr val="tx1"/>
                           </a:solidFill>
                         </a:rPr>
-                        <a:t>16,7</a:t>
+                        <a:t>16,5</a:t>
                       </a:r>
                       <a:endParaRPr lang="en-US" sz="1200" dirty="0"/>
                     </a:p>
@@ -13480,7 +13480,7 @@
                             <a:schemeClr val="tx1"/>
                           </a:solidFill>
                         </a:rPr>
-                        <a:t>52,0</a:t>
+                        <a:t>51,9</a:t>
                       </a:r>
                       <a:endParaRPr lang="en-US" sz="1200" dirty="0"/>
                     </a:p>
@@ -13541,7 +13541,7 @@
                             <a:schemeClr val="tx1"/>
                           </a:solidFill>
                         </a:rPr>
-                        <a:t>1,1</a:t>
+                        <a:t>1,0</a:t>
                       </a:r>
                       <a:endParaRPr lang="en-US" sz="1200" dirty="0"/>
                     </a:p>
@@ -13665,7 +13665,7 @@
                             <a:schemeClr val="tx1"/>
                           </a:solidFill>
                         </a:rPr>
-                        <a:t>10,5</a:t>
+                        <a:t>10,4</a:t>
                       </a:r>
                       <a:endParaRPr lang="en-US" sz="1200" dirty="0"/>
                     </a:p>
@@ -13726,7 +13726,7 @@
                             <a:schemeClr val="tx1"/>
                           </a:solidFill>
                         </a:rPr>
-                        <a:t>8,5</a:t>
+                        <a:t>8,4</a:t>
                       </a:r>
                       <a:endParaRPr lang="en-US" sz="1200" dirty="0"/>
                     </a:p>
@@ -13787,7 +13787,7 @@
                             <a:schemeClr val="tx1"/>
                           </a:solidFill>
                         </a:rPr>
-                        <a:t>17,2</a:t>
+                        <a:t>17,3</a:t>
                       </a:r>
                       <a:endParaRPr lang="en-US" sz="1200" dirty="0"/>
                     </a:p>
@@ -13848,7 +13848,7 @@
                             <a:schemeClr val="tx1"/>
                           </a:solidFill>
                         </a:rPr>
-                        <a:t>52,2</a:t>
+                        <a:t>52,0</a:t>
                       </a:r>
                       <a:endParaRPr lang="en-US" sz="1200" dirty="0"/>
                     </a:p>
@@ -13909,7 +13909,7 @@
                             <a:schemeClr val="tx1"/>
                           </a:solidFill>
                         </a:rPr>
-                        <a:t>0,2</a:t>
+                        <a:t>0,1</a:t>
                       </a:r>
                       <a:endParaRPr lang="en-US" sz="1200" dirty="0"/>
                     </a:p>
@@ -14033,7 +14033,7 @@
                             <a:schemeClr val="tx1"/>
                           </a:solidFill>
                         </a:rPr>
-                        <a:t>11,6</a:t>
+                        <a:t>11,5</a:t>
                       </a:r>
                       <a:endParaRPr lang="en-US" sz="1200" dirty="0"/>
                     </a:p>
@@ -14094,7 +14094,7 @@
                             <a:schemeClr val="tx1"/>
                           </a:solidFill>
                         </a:rPr>
-                        <a:t>10,3</a:t>
+                        <a:t>10,2</a:t>
                       </a:r>
                       <a:endParaRPr lang="en-US" sz="1200" dirty="0"/>
                     </a:p>
@@ -14155,7 +14155,7 @@
                             <a:schemeClr val="tx1"/>
                           </a:solidFill>
                         </a:rPr>
-                        <a:t>18,6</a:t>
+                        <a:t>19,3</a:t>
                       </a:r>
                       <a:endParaRPr lang="en-US" sz="1200" dirty="0"/>
                     </a:p>
@@ -14216,7 +14216,7 @@
                             <a:schemeClr val="tx1"/>
                           </a:solidFill>
                         </a:rPr>
-                        <a:t>55,3</a:t>
+                        <a:t>55,2</a:t>
                       </a:r>
                       <a:endParaRPr lang="en-US" sz="1200" dirty="0"/>
                     </a:p>
@@ -14462,7 +14462,7 @@
                             <a:schemeClr val="tx1"/>
                           </a:solidFill>
                         </a:rPr>
-                        <a:t>5,7</a:t>
+                        <a:t>5,6</a:t>
                       </a:r>
                       <a:endParaRPr lang="en-US" sz="1200" dirty="0"/>
                     </a:p>
@@ -14584,7 +14584,7 @@
                             <a:schemeClr val="tx1"/>
                           </a:solidFill>
                         </a:rPr>
-                        <a:t>51,5</a:t>
+                        <a:t>51,3</a:t>
                       </a:r>
                       <a:endParaRPr lang="en-US" sz="1200" dirty="0"/>
                     </a:p>
@@ -14645,7 +14645,7 @@
                             <a:schemeClr val="tx1"/>
                           </a:solidFill>
                         </a:rPr>
-                        <a:t>1,9</a:t>
+                        <a:t>1,8</a:t>
                       </a:r>
                       <a:endParaRPr lang="en-US" sz="1200" dirty="0"/>
                     </a:p>
@@ -14830,7 +14830,7 @@
                             <a:schemeClr val="tx1"/>
                           </a:solidFill>
                         </a:rPr>
-                        <a:t>6,9</a:t>
+                        <a:t>6,8</a:t>
                       </a:r>
                       <a:endParaRPr lang="en-US" sz="1200" dirty="0"/>
                     </a:p>
@@ -14891,7 +14891,7 @@
                             <a:schemeClr val="tx1"/>
                           </a:solidFill>
                         </a:rPr>
-                        <a:t>16,8</a:t>
+                        <a:t>16,6</a:t>
                       </a:r>
                       <a:endParaRPr lang="en-US" sz="1200" dirty="0"/>
                     </a:p>
@@ -14952,7 +14952,7 @@
                             <a:schemeClr val="tx1"/>
                           </a:solidFill>
                         </a:rPr>
-                        <a:t>52,0</a:t>
+                        <a:t>51,9</a:t>
                       </a:r>
                       <a:endParaRPr lang="en-US" sz="1200" dirty="0"/>
                     </a:p>
@@ -15013,7 +15013,7 @@
                             <a:schemeClr val="tx1"/>
                           </a:solidFill>
                         </a:rPr>
-                        <a:t>1,1</a:t>
+                        <a:t>1,0</a:t>
                       </a:r>
                       <a:endParaRPr lang="en-US" sz="1200" dirty="0"/>
                     </a:p>
@@ -15099,7 +15099,7 @@
                   <a:schemeClr val="tx1"/>
                 </a:solidFill>
               </a:rPr>
-              <a:t>Дефіцит фінансування: гривня на ≈6% слабша (≈55 грн/€) → інфляція до 12%, ставка до ≈19%</a:t>
+              <a:t>Дефіцит фінансування: гривня на ≈6% слабша (≈55 грн/€) → інфляція до 11%, ставка до ≈19%</a:t>
             </a:r>
             <a:endParaRPr lang="en-US" sz="1300" dirty="0"/>
           </a:p>
@@ -15117,7 +15117,7 @@
                   <a:schemeClr val="tx1"/>
                 </a:solidFill>
               </a:rPr>
-              <a:t>Важка зима: інфляція до 10,5%, ставка ≈17,0%, ВВП 2027 — 0,2%</a:t>
+              <a:t>Важка зима: інфляція до 10,4%, ставка ≈17,5%, ВВП 2027 — 0,1%</a:t>
             </a:r>
             <a:endParaRPr lang="en-US" sz="1300" dirty="0"/>
           </a:p>
@@ -15411,7 +15411,7 @@
                   <a:schemeClr val="tx1"/>
                 </a:solidFill>
               </a:rPr>
-              <a:t>утримувати щонайменше до кінця I кв. 2027; зниження — з II кв. 2027 за базового сценарію</a:t>
+              <a:t>утримувати щонайменше до середини 2027; далі — зниження, що повертає інфляцію до 5% у 2029</a:t>
             </a:r>
             <a:endParaRPr lang="en-US" sz="1300" dirty="0"/>
           </a:p>
@@ -15729,9 +15729,10 @@
               <a:tblPr/>
               <a:tblGrid>
                 <a:gridCol w="3291840"/>
-                <a:gridCol w="2661818"/>
-                <a:gridCol w="2661818"/>
-                <a:gridCol w="2661818"/>
+                <a:gridCol w="1996364"/>
+                <a:gridCol w="1996364"/>
+                <a:gridCol w="1996364"/>
+                <a:gridCol w="1996364"/>
               </a:tblGrid>
               <a:tr h="384048">
                 <a:tc>
@@ -15924,6 +15925,67 @@
                           </a:solidFill>
                         </a:rPr>
                         <a:t>IV кв. 2028</a:t>
+                      </a:r>
+                      <a:endParaRPr lang="en-US" sz="1500" dirty="0"/>
+                    </a:p>
+                  </a:txBody>
+                  <a:tcPr marL="63500" marR="63500" marT="38100" marB="38100" anchor="ctr">
+                    <a:lnL w="6350" cap="flat" cmpd="sng" algn="ctr">
+                      <a:solidFill>
+                        <a:srgbClr val="C9D6D3"/>
+                      </a:solidFill>
+                      <a:prstDash val="solid"/>
+                      <a:round/>
+                      <a:headEnd type="none" w="med" len="med"/>
+                      <a:tailEnd type="none" w="med" len="med"/>
+                    </a:lnL>
+                    <a:lnR w="6350" cap="flat" cmpd="sng" algn="ctr">
+                      <a:solidFill>
+                        <a:srgbClr val="C9D6D3"/>
+                      </a:solidFill>
+                      <a:prstDash val="solid"/>
+                      <a:round/>
+                      <a:headEnd type="none" w="med" len="med"/>
+                      <a:tailEnd type="none" w="med" len="med"/>
+                    </a:lnR>
+                    <a:lnT w="6350" cap="flat" cmpd="sng" algn="ctr">
+                      <a:solidFill>
+                        <a:srgbClr val="C9D6D3"/>
+                      </a:solidFill>
+                      <a:prstDash val="solid"/>
+                      <a:round/>
+                      <a:headEnd type="none" w="med" len="med"/>
+                      <a:tailEnd type="none" w="med" len="med"/>
+                    </a:lnT>
+                    <a:lnB w="6350" cap="flat" cmpd="sng" algn="ctr">
+                      <a:solidFill>
+                        <a:srgbClr val="C9D6D3"/>
+                      </a:solidFill>
+                      <a:prstDash val="solid"/>
+                      <a:round/>
+                      <a:headEnd type="none" w="med" len="med"/>
+                      <a:tailEnd type="none" w="med" len="med"/>
+                    </a:lnB>
+                    <a:solidFill>
+                      <a:srgbClr val="0E3B43"/>
+                    </a:solidFill>
+                  </a:tcPr>
+                </a:tc>
+                <a:tc>
+                  <a:txBody>
+                    <a:bodyPr/>
+                    <a:lstStyle/>
+                    <a:p>
+                      <a:pPr indent="0" marL="0">
+                        <a:buNone/>
+                      </a:pPr>
+                      <a:r>
+                        <a:rPr lang="en-US" sz="1500" b="1" dirty="0">
+                          <a:solidFill>
+                            <a:schemeClr val="bg1"/>
+                          </a:solidFill>
+                        </a:rPr>
+                        <a:t>IV кв. 2029</a:t>
                       </a:r>
                       <a:endParaRPr lang="en-US" sz="1500" dirty="0"/>
                     </a:p>
@@ -16108,7 +16170,7 @@
                             <a:schemeClr val="tx1"/>
                           </a:solidFill>
                         </a:rPr>
-                        <a:t>6,9</a:t>
+                        <a:t>6,7</a:t>
                       </a:r>
                       <a:endParaRPr lang="en-US" sz="1500" dirty="0"/>
                     </a:p>
@@ -16169,7 +16231,68 @@
                             <a:schemeClr val="tx1"/>
                           </a:solidFill>
                         </a:rPr>
-                        <a:t>4,2</a:t>
+                        <a:t>4,4</a:t>
+                      </a:r>
+                      <a:endParaRPr lang="en-US" sz="1500" dirty="0"/>
+                    </a:p>
+                  </a:txBody>
+                  <a:tcPr marL="63500" marR="63500" marT="38100" marB="38100" anchor="ctr">
+                    <a:lnL w="6350" cap="flat" cmpd="sng" algn="ctr">
+                      <a:solidFill>
+                        <a:srgbClr val="C9D6D3"/>
+                      </a:solidFill>
+                      <a:prstDash val="solid"/>
+                      <a:round/>
+                      <a:headEnd type="none" w="med" len="med"/>
+                      <a:tailEnd type="none" w="med" len="med"/>
+                    </a:lnL>
+                    <a:lnR w="6350" cap="flat" cmpd="sng" algn="ctr">
+                      <a:solidFill>
+                        <a:srgbClr val="C9D6D3"/>
+                      </a:solidFill>
+                      <a:prstDash val="solid"/>
+                      <a:round/>
+                      <a:headEnd type="none" w="med" len="med"/>
+                      <a:tailEnd type="none" w="med" len="med"/>
+                    </a:lnR>
+                    <a:lnT w="6350" cap="flat" cmpd="sng" algn="ctr">
+                      <a:solidFill>
+                        <a:srgbClr val="C9D6D3"/>
+                      </a:solidFill>
+                      <a:prstDash val="solid"/>
+                      <a:round/>
+                      <a:headEnd type="none" w="med" len="med"/>
+                      <a:tailEnd type="none" w="med" len="med"/>
+                    </a:lnT>
+                    <a:lnB w="6350" cap="flat" cmpd="sng" algn="ctr">
+                      <a:solidFill>
+                        <a:srgbClr val="C9D6D3"/>
+                      </a:solidFill>
+                      <a:prstDash val="solid"/>
+                      <a:round/>
+                      <a:headEnd type="none" w="med" len="med"/>
+                      <a:tailEnd type="none" w="med" len="med"/>
+                    </a:lnB>
+                    <a:solidFill>
+                      <a:srgbClr val="FFFFFF"/>
+                    </a:solidFill>
+                  </a:tcPr>
+                </a:tc>
+                <a:tc>
+                  <a:txBody>
+                    <a:bodyPr/>
+                    <a:lstStyle/>
+                    <a:p>
+                      <a:pPr algn="ctr" indent="0" marL="0">
+                        <a:buNone/>
+                      </a:pPr>
+                      <a:r>
+                        <a:rPr lang="en-US" sz="1500" dirty="0">
+                          <a:solidFill>
+                            <a:schemeClr val="tx1"/>
+                          </a:solidFill>
+                        </a:rPr>
+                        <a:t>5,0</a:t>
                       </a:r>
                       <a:endParaRPr lang="en-US" sz="1500" dirty="0"/>
                     </a:p>
@@ -16354,7 +16477,7 @@
                             <a:schemeClr val="tx1"/>
                           </a:solidFill>
                         </a:rPr>
-                        <a:t>5,9</a:t>
+                        <a:t>5,7</a:t>
                       </a:r>
                       <a:endParaRPr lang="en-US" sz="1500" dirty="0"/>
                     </a:p>
@@ -16415,7 +16538,68 @@
                             <a:schemeClr val="tx1"/>
                           </a:solidFill>
                         </a:rPr>
-                        <a:t>2,9</a:t>
+                        <a:t>3,1</a:t>
+                      </a:r>
+                      <a:endParaRPr lang="en-US" sz="1500" dirty="0"/>
+                    </a:p>
+                  </a:txBody>
+                  <a:tcPr marL="63500" marR="63500" marT="38100" marB="38100" anchor="ctr">
+                    <a:lnL w="6350" cap="flat" cmpd="sng" algn="ctr">
+                      <a:solidFill>
+                        <a:srgbClr val="C9D6D3"/>
+                      </a:solidFill>
+                      <a:prstDash val="solid"/>
+                      <a:round/>
+                      <a:headEnd type="none" w="med" len="med"/>
+                      <a:tailEnd type="none" w="med" len="med"/>
+                    </a:lnL>
+                    <a:lnR w="6350" cap="flat" cmpd="sng" algn="ctr">
+                      <a:solidFill>
+                        <a:srgbClr val="C9D6D3"/>
+                      </a:solidFill>
+                      <a:prstDash val="solid"/>
+                      <a:round/>
+                      <a:headEnd type="none" w="med" len="med"/>
+                      <a:tailEnd type="none" w="med" len="med"/>
+                    </a:lnR>
+                    <a:lnT w="6350" cap="flat" cmpd="sng" algn="ctr">
+                      <a:solidFill>
+                        <a:srgbClr val="C9D6D3"/>
+                      </a:solidFill>
+                      <a:prstDash val="solid"/>
+                      <a:round/>
+                      <a:headEnd type="none" w="med" len="med"/>
+                      <a:tailEnd type="none" w="med" len="med"/>
+                    </a:lnT>
+                    <a:lnB w="6350" cap="flat" cmpd="sng" algn="ctr">
+                      <a:solidFill>
+                        <a:srgbClr val="C9D6D3"/>
+                      </a:solidFill>
+                      <a:prstDash val="solid"/>
+                      <a:round/>
+                      <a:headEnd type="none" w="med" len="med"/>
+                      <a:tailEnd type="none" w="med" len="med"/>
+                    </a:lnB>
+                    <a:solidFill>
+                      <a:srgbClr val="EAF1EF"/>
+                    </a:solidFill>
+                  </a:tcPr>
+                </a:tc>
+                <a:tc>
+                  <a:txBody>
+                    <a:bodyPr/>
+                    <a:lstStyle/>
+                    <a:p>
+                      <a:pPr algn="ctr" indent="0" marL="0">
+                        <a:buNone/>
+                      </a:pPr>
+                      <a:r>
+                        <a:rPr lang="en-US" sz="1500" dirty="0">
+                          <a:solidFill>
+                            <a:schemeClr val="tx1"/>
+                          </a:solidFill>
+                        </a:rPr>
+                        <a:t>4,9</a:t>
                       </a:r>
                       <a:endParaRPr lang="en-US" sz="1500" dirty="0"/>
                     </a:p>
@@ -16600,7 +16784,7 @@
                             <a:schemeClr val="tx1"/>
                           </a:solidFill>
                         </a:rPr>
-                        <a:t>1,1</a:t>
+                        <a:t>1,0</a:t>
                       </a:r>
                       <a:endParaRPr lang="en-US" sz="1500" dirty="0"/>
                     </a:p>
@@ -16662,6 +16846,67 @@
                           </a:solidFill>
                         </a:rPr>
                         <a:t>0,9</a:t>
+                      </a:r>
+                      <a:endParaRPr lang="en-US" sz="1500" dirty="0"/>
+                    </a:p>
+                  </a:txBody>
+                  <a:tcPr marL="63500" marR="63500" marT="38100" marB="38100" anchor="ctr">
+                    <a:lnL w="6350" cap="flat" cmpd="sng" algn="ctr">
+                      <a:solidFill>
+                        <a:srgbClr val="C9D6D3"/>
+                      </a:solidFill>
+                      <a:prstDash val="solid"/>
+                      <a:round/>
+                      <a:headEnd type="none" w="med" len="med"/>
+                      <a:tailEnd type="none" w="med" len="med"/>
+                    </a:lnL>
+                    <a:lnR w="6350" cap="flat" cmpd="sng" algn="ctr">
+                      <a:solidFill>
+                        <a:srgbClr val="C9D6D3"/>
+                      </a:solidFill>
+                      <a:prstDash val="solid"/>
+                      <a:round/>
+                      <a:headEnd type="none" w="med" len="med"/>
+                      <a:tailEnd type="none" w="med" len="med"/>
+                    </a:lnR>
+                    <a:lnT w="6350" cap="flat" cmpd="sng" algn="ctr">
+                      <a:solidFill>
+                        <a:srgbClr val="C9D6D3"/>
+                      </a:solidFill>
+                      <a:prstDash val="solid"/>
+                      <a:round/>
+                      <a:headEnd type="none" w="med" len="med"/>
+                      <a:tailEnd type="none" w="med" len="med"/>
+                    </a:lnT>
+                    <a:lnB w="6350" cap="flat" cmpd="sng" algn="ctr">
+                      <a:solidFill>
+                        <a:srgbClr val="C9D6D3"/>
+                      </a:solidFill>
+                      <a:prstDash val="solid"/>
+                      <a:round/>
+                      <a:headEnd type="none" w="med" len="med"/>
+                      <a:tailEnd type="none" w="med" len="med"/>
+                    </a:lnB>
+                    <a:solidFill>
+                      <a:srgbClr val="FFFFFF"/>
+                    </a:solidFill>
+                  </a:tcPr>
+                </a:tc>
+                <a:tc>
+                  <a:txBody>
+                    <a:bodyPr/>
+                    <a:lstStyle/>
+                    <a:p>
+                      <a:pPr algn="ctr" indent="0" marL="0">
+                        <a:buNone/>
+                      </a:pPr>
+                      <a:r>
+                        <a:rPr lang="en-US" sz="1500" dirty="0">
+                          <a:solidFill>
+                            <a:schemeClr val="tx1"/>
+                          </a:solidFill>
+                        </a:rPr>
+                        <a:t>3,1</a:t>
                       </a:r>
                       <a:endParaRPr lang="en-US" sz="1500" dirty="0"/>
                     </a:p>
@@ -16846,7 +17091,7 @@
                             <a:schemeClr val="tx1"/>
                           </a:solidFill>
                         </a:rPr>
-                        <a:t>14,7</a:t>
+                        <a:t>15,5</a:t>
                       </a:r>
                       <a:endParaRPr lang="en-US" sz="1500" dirty="0"/>
                     </a:p>
@@ -16907,7 +17152,68 @@
                             <a:schemeClr val="tx1"/>
                           </a:solidFill>
                         </a:rPr>
-                        <a:t>11,2</a:t>
+                        <a:t>10,4</a:t>
+                      </a:r>
+                      <a:endParaRPr lang="en-US" sz="1500" dirty="0"/>
+                    </a:p>
+                  </a:txBody>
+                  <a:tcPr marL="63500" marR="63500" marT="38100" marB="38100" anchor="ctr">
+                    <a:lnL w="6350" cap="flat" cmpd="sng" algn="ctr">
+                      <a:solidFill>
+                        <a:srgbClr val="C9D6D3"/>
+                      </a:solidFill>
+                      <a:prstDash val="solid"/>
+                      <a:round/>
+                      <a:headEnd type="none" w="med" len="med"/>
+                      <a:tailEnd type="none" w="med" len="med"/>
+                    </a:lnL>
+                    <a:lnR w="6350" cap="flat" cmpd="sng" algn="ctr">
+                      <a:solidFill>
+                        <a:srgbClr val="C9D6D3"/>
+                      </a:solidFill>
+                      <a:prstDash val="solid"/>
+                      <a:round/>
+                      <a:headEnd type="none" w="med" len="med"/>
+                      <a:tailEnd type="none" w="med" len="med"/>
+                    </a:lnR>
+                    <a:lnT w="6350" cap="flat" cmpd="sng" algn="ctr">
+                      <a:solidFill>
+                        <a:srgbClr val="C9D6D3"/>
+                      </a:solidFill>
+                      <a:prstDash val="solid"/>
+                      <a:round/>
+                      <a:headEnd type="none" w="med" len="med"/>
+                      <a:tailEnd type="none" w="med" len="med"/>
+                    </a:lnT>
+                    <a:lnB w="6350" cap="flat" cmpd="sng" algn="ctr">
+                      <a:solidFill>
+                        <a:srgbClr val="C9D6D3"/>
+                      </a:solidFill>
+                      <a:prstDash val="solid"/>
+                      <a:round/>
+                      <a:headEnd type="none" w="med" len="med"/>
+                      <a:tailEnd type="none" w="med" len="med"/>
+                    </a:lnB>
+                    <a:solidFill>
+                      <a:srgbClr val="EAF1EF"/>
+                    </a:solidFill>
+                  </a:tcPr>
+                </a:tc>
+                <a:tc>
+                  <a:txBody>
+                    <a:bodyPr/>
+                    <a:lstStyle/>
+                    <a:p>
+                      <a:pPr algn="ctr" indent="0" marL="0">
+                        <a:buNone/>
+                      </a:pPr>
+                      <a:r>
+                        <a:rPr lang="en-US" sz="1500" dirty="0">
+                          <a:solidFill>
+                            <a:schemeClr val="tx1"/>
+                          </a:solidFill>
+                        </a:rPr>
+                        <a:t>8,9</a:t>
                       </a:r>
                       <a:endParaRPr lang="en-US" sz="1500" dirty="0"/>
                     </a:p>
@@ -17092,7 +17398,7 @@
                             <a:schemeClr val="tx1"/>
                           </a:solidFill>
                         </a:rPr>
-                        <a:t>52,0</a:t>
+                        <a:t>51,9</a:t>
                       </a:r>
                       <a:endParaRPr lang="en-US" sz="1500" dirty="0"/>
                     </a:p>
@@ -17200,6 +17506,67 @@
                     </a:solidFill>
                   </a:tcPr>
                 </a:tc>
+                <a:tc>
+                  <a:txBody>
+                    <a:bodyPr/>
+                    <a:lstStyle/>
+                    <a:p>
+                      <a:pPr algn="ctr" indent="0" marL="0">
+                        <a:buNone/>
+                      </a:pPr>
+                      <a:r>
+                        <a:rPr lang="en-US" sz="1500" dirty="0">
+                          <a:solidFill>
+                            <a:schemeClr val="tx1"/>
+                          </a:solidFill>
+                        </a:rPr>
+                        <a:t>53,6</a:t>
+                      </a:r>
+                      <a:endParaRPr lang="en-US" sz="1500" dirty="0"/>
+                    </a:p>
+                  </a:txBody>
+                  <a:tcPr marL="63500" marR="63500" marT="38100" marB="38100" anchor="ctr">
+                    <a:lnL w="6350" cap="flat" cmpd="sng" algn="ctr">
+                      <a:solidFill>
+                        <a:srgbClr val="C9D6D3"/>
+                      </a:solidFill>
+                      <a:prstDash val="solid"/>
+                      <a:round/>
+                      <a:headEnd type="none" w="med" len="med"/>
+                      <a:tailEnd type="none" w="med" len="med"/>
+                    </a:lnL>
+                    <a:lnR w="6350" cap="flat" cmpd="sng" algn="ctr">
+                      <a:solidFill>
+                        <a:srgbClr val="C9D6D3"/>
+                      </a:solidFill>
+                      <a:prstDash val="solid"/>
+                      <a:round/>
+                      <a:headEnd type="none" w="med" len="med"/>
+                      <a:tailEnd type="none" w="med" len="med"/>
+                    </a:lnR>
+                    <a:lnT w="6350" cap="flat" cmpd="sng" algn="ctr">
+                      <a:solidFill>
+                        <a:srgbClr val="C9D6D3"/>
+                      </a:solidFill>
+                      <a:prstDash val="solid"/>
+                      <a:round/>
+                      <a:headEnd type="none" w="med" len="med"/>
+                      <a:tailEnd type="none" w="med" len="med"/>
+                    </a:lnT>
+                    <a:lnB w="6350" cap="flat" cmpd="sng" algn="ctr">
+                      <a:solidFill>
+                        <a:srgbClr val="C9D6D3"/>
+                      </a:solidFill>
+                      <a:prstDash val="solid"/>
+                      <a:round/>
+                      <a:headEnd type="none" w="med" len="med"/>
+                      <a:tailEnd type="none" w="med" len="med"/>
+                    </a:lnB>
+                    <a:solidFill>
+                      <a:srgbClr val="FFFFFF"/>
+                    </a:solidFill>
+                  </a:tcPr>
+                </a:tc>
               </a:tr>
             </a:tbl>
           </a:graphicData>
@@ -17235,7 +17602,7 @@
                   <a:schemeClr val="accent6"/>
                 </a:solidFill>
               </a:rPr>
-              <a:t>* Середнє за квартал, з урахуванням сезонності; на кінець грудня 2026 — 9,9% (наш короткостроковий прогноз). Повернення до цілі 5% — II кв. 2028. Дані станом на 07.10.2026.</a:t>
+              <a:t>* Середнє за квартал (SA); грудень 2026 — 9,9% (наукаст). Ціль НБУ — 5% на горизонті до 3 років; повернення до цілі — III кв. 2029. Дані на 07.10.2026.</a:t>
             </a:r>
             <a:endParaRPr lang="en-US" sz="1100" dirty="0"/>
           </a:p>
@@ -18469,7 +18836,7 @@
                             <a:schemeClr val="bg1"/>
                           </a:solidFill>
                         </a:rPr>
-                        <a:t>Варіант (далі — правило)</a:t>
+                        <a:t>Рішення (до середини 2027)</a:t>
                       </a:r>
                       <a:endParaRPr lang="en-US" sz="1200" dirty="0"/>
                     </a:p>
@@ -18959,7 +19326,7 @@
                             <a:schemeClr val="tx1"/>
                           </a:solidFill>
                         </a:rPr>
-                        <a:t>14,6</a:t>
+                        <a:t>15,5</a:t>
                       </a:r>
                       <a:endParaRPr lang="en-US" sz="1200" dirty="0"/>
                     </a:p>
@@ -19020,7 +19387,7 @@
                             <a:schemeClr val="tx1"/>
                           </a:solidFill>
                         </a:rPr>
-                        <a:t>7,2</a:t>
+                        <a:t>7,1</a:t>
                       </a:r>
                       <a:endParaRPr lang="en-US" sz="1200" dirty="0"/>
                     </a:p>
@@ -19142,7 +19509,7 @@
                             <a:schemeClr val="tx1"/>
                           </a:solidFill>
                         </a:rPr>
-                        <a:t>48,6</a:t>
+                        <a:t>48,7</a:t>
                       </a:r>
                       <a:endParaRPr lang="en-US" sz="1200" dirty="0"/>
                     </a:p>
@@ -19327,7 +19694,7 @@
                             <a:schemeClr val="tx1"/>
                           </a:solidFill>
                         </a:rPr>
-                        <a:t>14,6</a:t>
+                        <a:t>15,5</a:t>
                       </a:r>
                       <a:endParaRPr lang="en-US" sz="1200" dirty="0"/>
                     </a:p>
@@ -19388,7 +19755,7 @@
                             <a:schemeClr val="tx1"/>
                           </a:solidFill>
                         </a:rPr>
-                        <a:t>7,0</a:t>
+                        <a:t>6,9</a:t>
                       </a:r>
                       <a:endParaRPr lang="en-US" sz="1200" dirty="0"/>
                     </a:p>
@@ -19510,7 +19877,7 @@
                             <a:schemeClr val="tx1"/>
                           </a:solidFill>
                         </a:rPr>
-                        <a:t>45,8</a:t>
+                        <a:t>44,9</a:t>
                       </a:r>
                       <a:endParaRPr lang="en-US" sz="1200" dirty="0"/>
                     </a:p>
@@ -19695,7 +20062,7 @@
                             <a:schemeClr val="tx1"/>
                           </a:solidFill>
                         </a:rPr>
-                        <a:t>14,7</a:t>
+                        <a:t>15,5</a:t>
                       </a:r>
                       <a:endParaRPr lang="en-US" sz="1200" dirty="0"/>
                     </a:p>
@@ -19756,7 +20123,7 @@
                             <a:schemeClr val="tx1"/>
                           </a:solidFill>
                         </a:rPr>
-                        <a:t>6,9</a:t>
+                        <a:t>6,7</a:t>
                       </a:r>
                       <a:endParaRPr lang="en-US" sz="1200" dirty="0"/>
                     </a:p>
@@ -19817,7 +20184,7 @@
                             <a:schemeClr val="tx1"/>
                           </a:solidFill>
                         </a:rPr>
-                        <a:t>1,1</a:t>
+                        <a:t>1,0</a:t>
                       </a:r>
                       <a:endParaRPr lang="en-US" sz="1200" dirty="0"/>
                     </a:p>
@@ -19878,7 +20245,7 @@
                             <a:schemeClr val="tx1"/>
                           </a:solidFill>
                         </a:rPr>
-                        <a:t>43,3</a:t>
+                        <a:t>41,5</a:t>
                       </a:r>
                       <a:endParaRPr lang="en-US" sz="1200" dirty="0"/>
                     </a:p>
@@ -20063,7 +20430,7 @@
                             <a:schemeClr val="tx1"/>
                           </a:solidFill>
                         </a:rPr>
-                        <a:t>14,7</a:t>
+                        <a:t>15,4</a:t>
                       </a:r>
                       <a:endParaRPr lang="en-US" sz="1200" dirty="0"/>
                     </a:p>
@@ -20124,7 +20491,7 @@
                             <a:schemeClr val="tx1"/>
                           </a:solidFill>
                         </a:rPr>
-                        <a:t>6,7</a:t>
+                        <a:t>6,5</a:t>
                       </a:r>
                       <a:endParaRPr lang="en-US" sz="1200" dirty="0"/>
                     </a:p>
@@ -20185,7 +20552,7 @@
                             <a:schemeClr val="tx1"/>
                           </a:solidFill>
                         </a:rPr>
-                        <a:t>1,0</a:t>
+                        <a:t>0,8</a:t>
                       </a:r>
                       <a:endParaRPr lang="en-US" sz="1200" dirty="0"/>
                     </a:p>
@@ -20246,7 +20613,7 @@
                             <a:schemeClr val="tx1"/>
                           </a:solidFill>
                         </a:rPr>
-                        <a:t>41,0</a:t>
+                        <a:t>38,4</a:t>
                       </a:r>
                       <a:endParaRPr lang="en-US" sz="1200" dirty="0"/>
                     </a:p>
@@ -20370,7 +20737,7 @@
                             <a:schemeClr val="tx1"/>
                           </a:solidFill>
                         </a:rPr>
-                        <a:t>16,9</a:t>
+                        <a:t>17,1</a:t>
                       </a:r>
                       <a:endParaRPr lang="en-US" sz="1200" dirty="0"/>
                     </a:p>
@@ -20431,7 +20798,7 @@
                             <a:schemeClr val="tx1"/>
                           </a:solidFill>
                         </a:rPr>
-                        <a:t>15,2</a:t>
+                        <a:t>15,4</a:t>
                       </a:r>
                       <a:endParaRPr lang="en-US" sz="1200" dirty="0"/>
                     </a:p>
@@ -20553,7 +20920,7 @@
                             <a:schemeClr val="tx1"/>
                           </a:solidFill>
                         </a:rPr>
-                        <a:t>0,8</a:t>
+                        <a:t>0,6</a:t>
                       </a:r>
                       <a:endParaRPr lang="en-US" sz="1200" dirty="0"/>
                     </a:p>
@@ -20614,7 +20981,7 @@
                             <a:schemeClr val="tx1"/>
                           </a:solidFill>
                         </a:rPr>
-                        <a:t>38,2</a:t>
+                        <a:t>35,3</a:t>
                       </a:r>
                       <a:endParaRPr lang="en-US" sz="1200" dirty="0"/>
                     </a:p>
@@ -20700,7 +21067,7 @@
                   <a:schemeClr val="tx1"/>
                 </a:solidFill>
               </a:rPr>
-              <a:t>Оптимальна ставка: 16,5%, якщо не реагувати на перший раунд підвищення адмінцін (практика ІТ); 16,9% — якщо реагувати на весь ІСЦ</a:t>
+              <a:t>Після утримання — траєкторія, що повертає інфляцію до 5% на горизонті; за чистим правилом у 2029 було б лише 4,3%</a:t>
             </a:r>
             <a:endParaRPr lang="en-US" sz="1300" dirty="0"/>
           </a:p>
@@ -20718,7 +21085,7 @@
                   <a:schemeClr val="tx1"/>
                 </a:solidFill>
               </a:rPr>
-              <a:t>Чутливість до згладжування ставки: 16,3–17,6%</a:t>
+              <a:t>Оптимальна ставка зараз: 16,6% без реакції на перший раунд адмінцін (практика ІТ), 16,6–17,1% — залежно від згладжування</a:t>
             </a:r>
             <a:endParaRPr lang="en-US" sz="1300" dirty="0"/>
           </a:p>
@@ -20850,7 +21217,7 @@
                 <a:ea typeface="Cambria" pitchFamily="34" charset="-122"/>
                 <a:cs typeface="Cambria" pitchFamily="34" charset="-120"/>
               </a:rPr>
-              <a:t>Облікова ставка: підвищити до 16,5% і утримувати до весни</a:t>
+              <a:t>Облікова ставка: підвищити до 16,5% і утримувати до середини 2027</a:t>
             </a:r>
             <a:endParaRPr lang="en-US" sz="2600" dirty="0"/>
           </a:p>
@@ -21037,7 +21404,7 @@
         <p:spPr>
           <a:xfrm>
             <a:off x="3931920" y="1709928"/>
-            <a:ext cx="7802575" cy="1463040"/>
+            <a:ext cx="7802575" cy="1336687"/>
           </a:xfrm>
           <a:prstGeom prst="rect">
             <a:avLst/>
@@ -21080,7 +21447,7 @@
                   <a:schemeClr val="tx1"/>
                 </a:solidFill>
               </a:rPr>
-              <a:t>Базова інфляція наприкінці 2027 — 5,9% (НБУ: 5,1%): ринок праці перегрітий</a:t>
+              <a:t>Базова інфляція наприкінці 2027 — 5,7% (НБУ: 5,1%): ринок праці перегрітий</a:t>
             </a:r>
             <a:endParaRPr lang="en-US" sz="1400" dirty="0"/>
           </a:p>
@@ -21130,7 +21497,7 @@
         </p:nvSpPr>
         <p:spPr>
           <a:xfrm>
-            <a:off x="3931920" y="3218688"/>
+            <a:off x="3931920" y="3092335"/>
             <a:ext cx="7802575" cy="347472"/>
           </a:xfrm>
           <a:prstGeom prst="rect">
@@ -21169,8 +21536,8 @@
         </p:nvSpPr>
         <p:spPr>
           <a:xfrm>
-            <a:off x="3931920" y="3602736"/>
-            <a:ext cx="7802575" cy="1115568"/>
+            <a:off x="3931920" y="3476383"/>
+            <a:ext cx="7802575" cy="1020803"/>
           </a:xfrm>
           <a:prstGeom prst="rect">
             <a:avLst/>
@@ -21231,7 +21598,7 @@
                   <a:schemeClr val="tx1"/>
                 </a:solidFill>
               </a:rPr>
-              <a:t>Без реакції на перший раунд адмінцін оптимум моделі — 16,5%</a:t>
+              <a:t>Без реакції на перший раунд адмінцін оптимум моделі — 16,6%</a:t>
             </a:r>
             <a:endParaRPr lang="en-US" sz="1400" dirty="0"/>
           </a:p>
@@ -21245,7 +21612,7 @@
         </p:nvSpPr>
         <p:spPr>
           <a:xfrm>
-            <a:off x="3931920" y="4764024"/>
+            <a:off x="3931920" y="4542905"/>
             <a:ext cx="7802575" cy="347472"/>
           </a:xfrm>
           <a:prstGeom prst="rect">
@@ -21284,8 +21651,8 @@
         </p:nvSpPr>
         <p:spPr>
           <a:xfrm>
-            <a:off x="3931920" y="5148072"/>
-            <a:ext cx="7802575" cy="1115568"/>
+            <a:off x="3931920" y="4926953"/>
+            <a:ext cx="7802575" cy="1336687"/>
           </a:xfrm>
           <a:prstGeom prst="rect">
             <a:avLst/>
@@ -21310,7 +21677,7 @@
                   <a:schemeClr val="tx1"/>
                 </a:solidFill>
               </a:rPr>
-              <a:t>Утримання 16,5% щонайменше до кінця I кв. 2027; зниження з II кв. 2027 до ≈14,5% наприкінці року</a:t>
+              <a:t>Утримання 16,5% щонайменше до середини 2027; далі зниження до ≈15,5% наприкінці 2027 і ≈10,5% — 2028: інфляція 5% у 2029</a:t>
             </a:r>
             <a:endParaRPr lang="en-US" sz="1400" dirty="0"/>
           </a:p>
@@ -21984,7 +22351,7 @@
                   <a:schemeClr val="accent1"/>
                 </a:solidFill>
               </a:rPr>
-              <a:t>Проєкт пресрелізу: «Правління НБУ ухвалило рішення підвищити облікову ставку до 16,5% з огляду на прискорення інфляції, зміщення ризиків угору та зниження міжнародних резервів. НБУ утримуватиме ставку щонайменше до кінця I кварталу 2027 року та допускатиме більшу гнучкість курсу, згладжуючи надмірні коливання».</a:t>
+              <a:t>Проєкт пресрелізу: «Правління НБУ ухвалило рішення підвищити облікову ставку до 16,5% з огляду на прискорення інфляції, зміщення ризиків угору та зниження міжнародних резервів. НБУ утримуватиме ставку щонайменше до середини 2027 року та допускатиме більшу гнучкість курсу, згладжуючи надмірні коливання».</a:t>
             </a:r>
             <a:endParaRPr lang="en-US" sz="1400" dirty="0"/>
           </a:p>
@@ -22141,7 +22508,7 @@
                   <a:schemeClr val="tx1"/>
                 </a:solidFill>
               </a:rPr>
-              <a:t>НБУ підвищує ставку превентивно, щоб інфляція повернулася до 5% у 2028 році</a:t>
+              <a:t>НБУ підвищує ставку превентивно, щоб інфляція повернулася до 5% у 2029 році</a:t>
             </a:r>
             <a:endParaRPr lang="en-US" sz="1400" dirty="0"/>
           </a:p>
@@ -22334,7 +22701,7 @@
                   <a:schemeClr val="tx1"/>
                 </a:solidFill>
               </a:rPr>
-              <a:t>Утримання 16,5% щонайменше до кінця I кв. 2027</a:t>
+              <a:t>Утримання 16,5% щонайменше до середини 2027</a:t>
             </a:r>
             <a:endParaRPr lang="en-US" sz="1400" dirty="0"/>
           </a:p>
@@ -22352,7 +22719,7 @@
                   <a:schemeClr val="tx1"/>
                 </a:solidFill>
               </a:rPr>
-              <a:t>Пом'якшення — з II кв. 2027, якщо інфляція й очікування знижуватимуться</a:t>
+              <a:t>Пом'якшення — з другого півріччя 2027, якщо інфляція й очікування знижуватимуться</a:t>
             </a:r>
             <a:endParaRPr lang="en-US" sz="1400" dirty="0"/>
           </a:p>
@@ -22749,7 +23116,7 @@
                   <a:schemeClr val="bg1"/>
                 </a:solidFill>
               </a:rPr>
-              <a:t>Підвищити облікову ставку до 16,5% та утримувати щонайменше до кінця I кв. 2027</a:t>
+              <a:t>Підвищити облікову ставку до 16,5% та утримувати щонайменше до середини 2027</a:t>
             </a:r>
             <a:endParaRPr lang="en-US" sz="2000" dirty="0"/>
           </a:p>
@@ -23025,7 +23392,7 @@
                   <a:schemeClr val="bg1"/>
                 </a:solidFill>
               </a:rPr>
-              <a:t>Базовий прогноз: інфляція ≈9,9% у грудні 2026, 6,9% наприкінці 2027, ціль — II кв. 2028</a:t>
+              <a:t>Базовий прогноз: інфляція ≈9,9% у грудні 2026, 6,7% наприкінці 2027, ціль 5% — III кв. 2029</a:t>
             </a:r>
             <a:endParaRPr lang="en-US" sz="2000" dirty="0"/>
           </a:p>
@@ -24482,7 +24849,7 @@
                   <a:schemeClr val="tx1"/>
                 </a:solidFill>
               </a:rPr>
-              <a:t>Фільтр Калмана 2016–2026 і прогнози до 2028 збігаються з точністю до округлення</a:t>
+              <a:t>Фільтр Калмана 2016–2026 і прогнози до 2029 збігаються з точністю до округлення</a:t>
             </a:r>
             <a:endParaRPr lang="en-US" sz="1300" dirty="0"/>
           </a:p>
@@ -25102,7 +25469,7 @@
                 <a:ea typeface="Cambria" pitchFamily="34" charset="-122"/>
                 <a:cs typeface="Cambria" pitchFamily="34" charset="-120"/>
               </a:rPr>
-              <a:t>Додаток 5. Базовий прогноз по кварталах</a:t>
+              <a:t>Додаток 5. Базовий прогноз по півріччях</a:t>
             </a:r>
             <a:endParaRPr lang="en-US" sz="2600" dirty="0"/>
           </a:p>
@@ -25132,15 +25499,13 @@
               <a:tblPr/>
               <a:tblGrid>
                 <a:gridCol w="2926080"/>
-                <a:gridCol w="927913"/>
-                <a:gridCol w="927913"/>
-                <a:gridCol w="927913"/>
-                <a:gridCol w="927913"/>
-                <a:gridCol w="927913"/>
-                <a:gridCol w="927913"/>
-                <a:gridCol w="927913"/>
-                <a:gridCol w="927913"/>
-                <a:gridCol w="927913"/>
+                <a:gridCol w="1193031"/>
+                <a:gridCol w="1193031"/>
+                <a:gridCol w="1193031"/>
+                <a:gridCol w="1193031"/>
+                <a:gridCol w="1193031"/>
+                <a:gridCol w="1193031"/>
+                <a:gridCol w="1193031"/>
               </a:tblGrid>
               <a:tr h="457200">
                 <a:tc>
@@ -25152,14 +25517,14 @@
                         <a:buNone/>
                       </a:pPr>
                       <a:r>
-                        <a:rPr lang="en-US" sz="1300" b="1" dirty="0">
+                        <a:rPr lang="en-US" sz="1200" b="1" dirty="0">
                           <a:solidFill>
                             <a:schemeClr val="bg1"/>
                           </a:solidFill>
                         </a:rPr>
                         <a:t>Показник</a:t>
                       </a:r>
-                      <a:endParaRPr lang="en-US" sz="1300" dirty="0"/>
+                      <a:endParaRPr lang="en-US" sz="1200" dirty="0"/>
                     </a:p>
                   </a:txBody>
                   <a:tcPr marL="63500" marR="63500" marT="38100" marB="38100" anchor="ctr">
@@ -25213,14 +25578,14 @@
                         <a:buNone/>
                       </a:pPr>
                       <a:r>
-                        <a:rPr lang="en-US" sz="1300" b="1" dirty="0">
+                        <a:rPr lang="en-US" sz="1200" b="1" dirty="0">
                           <a:solidFill>
                             <a:schemeClr val="bg1"/>
                           </a:solidFill>
                         </a:rPr>
-                        <a:t>2026 Q4</a:t>
+                        <a:t>IV кв. 2026</a:t>
                       </a:r>
-                      <a:endParaRPr lang="en-US" sz="1300" dirty="0"/>
+                      <a:endParaRPr lang="en-US" sz="1200" dirty="0"/>
                     </a:p>
                   </a:txBody>
                   <a:tcPr marL="63500" marR="63500" marT="38100" marB="38100" anchor="ctr">
@@ -25274,14 +25639,14 @@
                         <a:buNone/>
                       </a:pPr>
                       <a:r>
-                        <a:rPr lang="en-US" sz="1300" b="1" dirty="0">
+                        <a:rPr lang="en-US" sz="1200" b="1" dirty="0">
                           <a:solidFill>
                             <a:schemeClr val="bg1"/>
                           </a:solidFill>
                         </a:rPr>
-                        <a:t>2027 Q1</a:t>
+                        <a:t>II кв. 2027</a:t>
                       </a:r>
-                      <a:endParaRPr lang="en-US" sz="1300" dirty="0"/>
+                      <a:endParaRPr lang="en-US" sz="1200" dirty="0"/>
                     </a:p>
                   </a:txBody>
                   <a:tcPr marL="63500" marR="63500" marT="38100" marB="38100" anchor="ctr">
@@ -25335,14 +25700,14 @@
                         <a:buNone/>
                       </a:pPr>
                       <a:r>
-                        <a:rPr lang="en-US" sz="1300" b="1" dirty="0">
+                        <a:rPr lang="en-US" sz="1200" b="1" dirty="0">
                           <a:solidFill>
                             <a:schemeClr val="bg1"/>
                           </a:solidFill>
                         </a:rPr>
-                        <a:t>2027 Q2</a:t>
+                        <a:t>IV кв. 2027</a:t>
                       </a:r>
-                      <a:endParaRPr lang="en-US" sz="1300" dirty="0"/>
+                      <a:endParaRPr lang="en-US" sz="1200" dirty="0"/>
                     </a:p>
                   </a:txBody>
                   <a:tcPr marL="63500" marR="63500" marT="38100" marB="38100" anchor="ctr">
@@ -25396,14 +25761,14 @@
                         <a:buNone/>
                       </a:pPr>
                       <a:r>
-                        <a:rPr lang="en-US" sz="1300" b="1" dirty="0">
+                        <a:rPr lang="en-US" sz="1200" b="1" dirty="0">
                           <a:solidFill>
                             <a:schemeClr val="bg1"/>
                           </a:solidFill>
                         </a:rPr>
-                        <a:t>2027 Q3</a:t>
+                        <a:t>II кв. 2028</a:t>
                       </a:r>
-                      <a:endParaRPr lang="en-US" sz="1300" dirty="0"/>
+                      <a:endParaRPr lang="en-US" sz="1200" dirty="0"/>
                     </a:p>
                   </a:txBody>
                   <a:tcPr marL="63500" marR="63500" marT="38100" marB="38100" anchor="ctr">
@@ -25457,14 +25822,14 @@
                         <a:buNone/>
                       </a:pPr>
                       <a:r>
-                        <a:rPr lang="en-US" sz="1300" b="1" dirty="0">
+                        <a:rPr lang="en-US" sz="1200" b="1" dirty="0">
                           <a:solidFill>
                             <a:schemeClr val="bg1"/>
                           </a:solidFill>
                         </a:rPr>
-                        <a:t>2027 Q4</a:t>
+                        <a:t>IV кв. 2028</a:t>
                       </a:r>
-                      <a:endParaRPr lang="en-US" sz="1300" dirty="0"/>
+                      <a:endParaRPr lang="en-US" sz="1200" dirty="0"/>
                     </a:p>
                   </a:txBody>
                   <a:tcPr marL="63500" marR="63500" marT="38100" marB="38100" anchor="ctr">
@@ -25518,14 +25883,14 @@
                         <a:buNone/>
                       </a:pPr>
                       <a:r>
-                        <a:rPr lang="en-US" sz="1300" b="1" dirty="0">
+                        <a:rPr lang="en-US" sz="1200" b="1" dirty="0">
                           <a:solidFill>
                             <a:schemeClr val="bg1"/>
                           </a:solidFill>
                         </a:rPr>
-                        <a:t>2028 Q1</a:t>
+                        <a:t>II кв. 2029</a:t>
                       </a:r>
-                      <a:endParaRPr lang="en-US" sz="1300" dirty="0"/>
+                      <a:endParaRPr lang="en-US" sz="1200" dirty="0"/>
                     </a:p>
                   </a:txBody>
                   <a:tcPr marL="63500" marR="63500" marT="38100" marB="38100" anchor="ctr">
@@ -25579,136 +25944,14 @@
                         <a:buNone/>
                       </a:pPr>
                       <a:r>
-                        <a:rPr lang="en-US" sz="1300" b="1" dirty="0">
+                        <a:rPr lang="en-US" sz="1200" b="1" dirty="0">
                           <a:solidFill>
                             <a:schemeClr val="bg1"/>
                           </a:solidFill>
                         </a:rPr>
-                        <a:t>2028 Q2</a:t>
+                        <a:t>IV кв. 2029</a:t>
                       </a:r>
-                      <a:endParaRPr lang="en-US" sz="1300" dirty="0"/>
-                    </a:p>
-                  </a:txBody>
-                  <a:tcPr marL="63500" marR="63500" marT="38100" marB="38100" anchor="ctr">
-                    <a:lnL w="6350" cap="flat" cmpd="sng" algn="ctr">
-                      <a:solidFill>
-                        <a:srgbClr val="C9D6D3"/>
-                      </a:solidFill>
-                      <a:prstDash val="solid"/>
-                      <a:round/>
-                      <a:headEnd type="none" w="med" len="med"/>
-                      <a:tailEnd type="none" w="med" len="med"/>
-                    </a:lnL>
-                    <a:lnR w="6350" cap="flat" cmpd="sng" algn="ctr">
-                      <a:solidFill>
-                        <a:srgbClr val="C9D6D3"/>
-                      </a:solidFill>
-                      <a:prstDash val="solid"/>
-                      <a:round/>
-                      <a:headEnd type="none" w="med" len="med"/>
-                      <a:tailEnd type="none" w="med" len="med"/>
-                    </a:lnR>
-                    <a:lnT w="6350" cap="flat" cmpd="sng" algn="ctr">
-                      <a:solidFill>
-                        <a:srgbClr val="C9D6D3"/>
-                      </a:solidFill>
-                      <a:prstDash val="solid"/>
-                      <a:round/>
-                      <a:headEnd type="none" w="med" len="med"/>
-                      <a:tailEnd type="none" w="med" len="med"/>
-                    </a:lnT>
-                    <a:lnB w="6350" cap="flat" cmpd="sng" algn="ctr">
-                      <a:solidFill>
-                        <a:srgbClr val="C9D6D3"/>
-                      </a:solidFill>
-                      <a:prstDash val="solid"/>
-                      <a:round/>
-                      <a:headEnd type="none" w="med" len="med"/>
-                      <a:tailEnd type="none" w="med" len="med"/>
-                    </a:lnB>
-                    <a:solidFill>
-                      <a:srgbClr val="0E3B43"/>
-                    </a:solidFill>
-                  </a:tcPr>
-                </a:tc>
-                <a:tc>
-                  <a:txBody>
-                    <a:bodyPr/>
-                    <a:lstStyle/>
-                    <a:p>
-                      <a:pPr indent="0" marL="0">
-                        <a:buNone/>
-                      </a:pPr>
-                      <a:r>
-                        <a:rPr lang="en-US" sz="1300" b="1" dirty="0">
-                          <a:solidFill>
-                            <a:schemeClr val="bg1"/>
-                          </a:solidFill>
-                        </a:rPr>
-                        <a:t>2028 Q3</a:t>
-                      </a:r>
-                      <a:endParaRPr lang="en-US" sz="1300" dirty="0"/>
-                    </a:p>
-                  </a:txBody>
-                  <a:tcPr marL="63500" marR="63500" marT="38100" marB="38100" anchor="ctr">
-                    <a:lnL w="6350" cap="flat" cmpd="sng" algn="ctr">
-                      <a:solidFill>
-                        <a:srgbClr val="C9D6D3"/>
-                      </a:solidFill>
-                      <a:prstDash val="solid"/>
-                      <a:round/>
-                      <a:headEnd type="none" w="med" len="med"/>
-                      <a:tailEnd type="none" w="med" len="med"/>
-                    </a:lnL>
-                    <a:lnR w="6350" cap="flat" cmpd="sng" algn="ctr">
-                      <a:solidFill>
-                        <a:srgbClr val="C9D6D3"/>
-                      </a:solidFill>
-                      <a:prstDash val="solid"/>
-                      <a:round/>
-                      <a:headEnd type="none" w="med" len="med"/>
-                      <a:tailEnd type="none" w="med" len="med"/>
-                    </a:lnR>
-                    <a:lnT w="6350" cap="flat" cmpd="sng" algn="ctr">
-                      <a:solidFill>
-                        <a:srgbClr val="C9D6D3"/>
-                      </a:solidFill>
-                      <a:prstDash val="solid"/>
-                      <a:round/>
-                      <a:headEnd type="none" w="med" len="med"/>
-                      <a:tailEnd type="none" w="med" len="med"/>
-                    </a:lnT>
-                    <a:lnB w="6350" cap="flat" cmpd="sng" algn="ctr">
-                      <a:solidFill>
-                        <a:srgbClr val="C9D6D3"/>
-                      </a:solidFill>
-                      <a:prstDash val="solid"/>
-                      <a:round/>
-                      <a:headEnd type="none" w="med" len="med"/>
-                      <a:tailEnd type="none" w="med" len="med"/>
-                    </a:lnB>
-                    <a:solidFill>
-                      <a:srgbClr val="0E3B43"/>
-                    </a:solidFill>
-                  </a:tcPr>
-                </a:tc>
-                <a:tc>
-                  <a:txBody>
-                    <a:bodyPr/>
-                    <a:lstStyle/>
-                    <a:p>
-                      <a:pPr indent="0" marL="0">
-                        <a:buNone/>
-                      </a:pPr>
-                      <a:r>
-                        <a:rPr lang="en-US" sz="1300" b="1" dirty="0">
-                          <a:solidFill>
-                            <a:schemeClr val="bg1"/>
-                          </a:solidFill>
-                        </a:rPr>
-                        <a:t>2028 Q4</a:t>
-                      </a:r>
-                      <a:endParaRPr lang="en-US" sz="1300" dirty="0"/>
+                      <a:endParaRPr lang="en-US" sz="1200" dirty="0"/>
                     </a:p>
                   </a:txBody>
                   <a:tcPr marL="63500" marR="63500" marT="38100" marB="38100" anchor="ctr">
@@ -25764,14 +26007,14 @@
                         <a:buNone/>
                       </a:pPr>
                       <a:r>
-                        <a:rPr lang="en-US" sz="1300" b="1" dirty="0">
+                        <a:rPr lang="en-US" sz="1200" b="1" dirty="0">
                           <a:solidFill>
                             <a:schemeClr val="tx1"/>
                           </a:solidFill>
                         </a:rPr>
                         <a:t>ІСЦ, % р/р (сер. за кв.)</a:t>
                       </a:r>
-                      <a:endParaRPr lang="en-US" sz="1300" dirty="0"/>
+                      <a:endParaRPr lang="en-US" sz="1200" dirty="0"/>
                     </a:p>
                   </a:txBody>
                   <a:tcPr marL="63500" marR="63500" marT="38100" marB="38100" anchor="ctr">
@@ -25825,14 +26068,14 @@
                         <a:buNone/>
                       </a:pPr>
                       <a:r>
-                        <a:rPr lang="en-US" sz="1300" dirty="0">
+                        <a:rPr lang="en-US" sz="1200" dirty="0">
                           <a:solidFill>
                             <a:schemeClr val="tx1"/>
                           </a:solidFill>
                         </a:rPr>
                         <a:t>8,7</a:t>
                       </a:r>
-                      <a:endParaRPr lang="en-US" sz="1300" dirty="0"/>
+                      <a:endParaRPr lang="en-US" sz="1200" dirty="0"/>
                     </a:p>
                   </a:txBody>
                   <a:tcPr marL="63500" marR="63500" marT="38100" marB="38100" anchor="ctr">
@@ -25886,14 +26129,14 @@
                         <a:buNone/>
                       </a:pPr>
                       <a:r>
-                        <a:rPr lang="en-US" sz="1300" dirty="0">
+                        <a:rPr lang="en-US" sz="1200" dirty="0">
                           <a:solidFill>
                             <a:schemeClr val="tx1"/>
                           </a:solidFill>
                         </a:rPr>
-                        <a:t>8,9</a:t>
+                        <a:t>8,5</a:t>
                       </a:r>
-                      <a:endParaRPr lang="en-US" sz="1300" dirty="0"/>
+                      <a:endParaRPr lang="en-US" sz="1200" dirty="0"/>
                     </a:p>
                   </a:txBody>
                   <a:tcPr marL="63500" marR="63500" marT="38100" marB="38100" anchor="ctr">
@@ -25947,14 +26190,14 @@
                         <a:buNone/>
                       </a:pPr>
                       <a:r>
-                        <a:rPr lang="en-US" sz="1300" dirty="0">
+                        <a:rPr lang="en-US" sz="1200" dirty="0">
                           <a:solidFill>
                             <a:schemeClr val="tx1"/>
                           </a:solidFill>
                         </a:rPr>
-                        <a:t>8,6</a:t>
+                        <a:t>6,7</a:t>
                       </a:r>
-                      <a:endParaRPr lang="en-US" sz="1300" dirty="0"/>
+                      <a:endParaRPr lang="en-US" sz="1200" dirty="0"/>
                     </a:p>
                   </a:txBody>
                   <a:tcPr marL="63500" marR="63500" marT="38100" marB="38100" anchor="ctr">
@@ -26008,14 +26251,14 @@
                         <a:buNone/>
                       </a:pPr>
                       <a:r>
-                        <a:rPr lang="en-US" sz="1300" dirty="0">
+                        <a:rPr lang="en-US" sz="1200" dirty="0">
                           <a:solidFill>
                             <a:schemeClr val="tx1"/>
                           </a:solidFill>
                         </a:rPr>
-                        <a:t>8,0</a:t>
+                        <a:t>4,5</a:t>
                       </a:r>
-                      <a:endParaRPr lang="en-US" sz="1300" dirty="0"/>
+                      <a:endParaRPr lang="en-US" sz="1200" dirty="0"/>
                     </a:p>
                   </a:txBody>
                   <a:tcPr marL="63500" marR="63500" marT="38100" marB="38100" anchor="ctr">
@@ -26069,14 +26312,14 @@
                         <a:buNone/>
                       </a:pPr>
                       <a:r>
-                        <a:rPr lang="en-US" sz="1300" dirty="0">
+                        <a:rPr lang="en-US" sz="1200" dirty="0">
                           <a:solidFill>
                             <a:schemeClr val="tx1"/>
                           </a:solidFill>
                         </a:rPr>
-                        <a:t>6,9</a:t>
+                        <a:t>4,4</a:t>
                       </a:r>
-                      <a:endParaRPr lang="en-US" sz="1300" dirty="0"/>
+                      <a:endParaRPr lang="en-US" sz="1200" dirty="0"/>
                     </a:p>
                   </a:txBody>
                   <a:tcPr marL="63500" marR="63500" marT="38100" marB="38100" anchor="ctr">
@@ -26130,14 +26373,14 @@
                         <a:buNone/>
                       </a:pPr>
                       <a:r>
-                        <a:rPr lang="en-US" sz="1300" dirty="0">
+                        <a:rPr lang="en-US" sz="1200" dirty="0">
                           <a:solidFill>
                             <a:schemeClr val="tx1"/>
                           </a:solidFill>
                         </a:rPr>
-                        <a:t>5,6</a:t>
+                        <a:t>4,9</a:t>
                       </a:r>
-                      <a:endParaRPr lang="en-US" sz="1300" dirty="0"/>
+                      <a:endParaRPr lang="en-US" sz="1200" dirty="0"/>
                     </a:p>
                   </a:txBody>
                   <a:tcPr marL="63500" marR="63500" marT="38100" marB="38100" anchor="ctr">
@@ -26191,136 +26434,14 @@
                         <a:buNone/>
                       </a:pPr>
                       <a:r>
-                        <a:rPr lang="en-US" sz="1300" dirty="0">
+                        <a:rPr lang="en-US" sz="1200" dirty="0">
                           <a:solidFill>
                             <a:schemeClr val="tx1"/>
                           </a:solidFill>
                         </a:rPr>
-                        <a:t>4,6</a:t>
+                        <a:t>5,0</a:t>
                       </a:r>
-                      <a:endParaRPr lang="en-US" sz="1300" dirty="0"/>
-                    </a:p>
-                  </a:txBody>
-                  <a:tcPr marL="63500" marR="63500" marT="38100" marB="38100" anchor="ctr">
-                    <a:lnL w="6350" cap="flat" cmpd="sng" algn="ctr">
-                      <a:solidFill>
-                        <a:srgbClr val="C9D6D3"/>
-                      </a:solidFill>
-                      <a:prstDash val="solid"/>
-                      <a:round/>
-                      <a:headEnd type="none" w="med" len="med"/>
-                      <a:tailEnd type="none" w="med" len="med"/>
-                    </a:lnL>
-                    <a:lnR w="6350" cap="flat" cmpd="sng" algn="ctr">
-                      <a:solidFill>
-                        <a:srgbClr val="C9D6D3"/>
-                      </a:solidFill>
-                      <a:prstDash val="solid"/>
-                      <a:round/>
-                      <a:headEnd type="none" w="med" len="med"/>
-                      <a:tailEnd type="none" w="med" len="med"/>
-                    </a:lnR>
-                    <a:lnT w="6350" cap="flat" cmpd="sng" algn="ctr">
-                      <a:solidFill>
-                        <a:srgbClr val="C9D6D3"/>
-                      </a:solidFill>
-                      <a:prstDash val="solid"/>
-                      <a:round/>
-                      <a:headEnd type="none" w="med" len="med"/>
-                      <a:tailEnd type="none" w="med" len="med"/>
-                    </a:lnT>
-                    <a:lnB w="6350" cap="flat" cmpd="sng" algn="ctr">
-                      <a:solidFill>
-                        <a:srgbClr val="C9D6D3"/>
-                      </a:solidFill>
-                      <a:prstDash val="solid"/>
-                      <a:round/>
-                      <a:headEnd type="none" w="med" len="med"/>
-                      <a:tailEnd type="none" w="med" len="med"/>
-                    </a:lnB>
-                    <a:solidFill>
-                      <a:srgbClr val="FFFFFF"/>
-                    </a:solidFill>
-                  </a:tcPr>
-                </a:tc>
-                <a:tc>
-                  <a:txBody>
-                    <a:bodyPr/>
-                    <a:lstStyle/>
-                    <a:p>
-                      <a:pPr algn="l" indent="0" marL="0">
-                        <a:buNone/>
-                      </a:pPr>
-                      <a:r>
-                        <a:rPr lang="en-US" sz="1300" dirty="0">
-                          <a:solidFill>
-                            <a:schemeClr val="tx1"/>
-                          </a:solidFill>
-                        </a:rPr>
-                        <a:t>4,2</a:t>
-                      </a:r>
-                      <a:endParaRPr lang="en-US" sz="1300" dirty="0"/>
-                    </a:p>
-                  </a:txBody>
-                  <a:tcPr marL="63500" marR="63500" marT="38100" marB="38100" anchor="ctr">
-                    <a:lnL w="6350" cap="flat" cmpd="sng" algn="ctr">
-                      <a:solidFill>
-                        <a:srgbClr val="C9D6D3"/>
-                      </a:solidFill>
-                      <a:prstDash val="solid"/>
-                      <a:round/>
-                      <a:headEnd type="none" w="med" len="med"/>
-                      <a:tailEnd type="none" w="med" len="med"/>
-                    </a:lnL>
-                    <a:lnR w="6350" cap="flat" cmpd="sng" algn="ctr">
-                      <a:solidFill>
-                        <a:srgbClr val="C9D6D3"/>
-                      </a:solidFill>
-                      <a:prstDash val="solid"/>
-                      <a:round/>
-                      <a:headEnd type="none" w="med" len="med"/>
-                      <a:tailEnd type="none" w="med" len="med"/>
-                    </a:lnR>
-                    <a:lnT w="6350" cap="flat" cmpd="sng" algn="ctr">
-                      <a:solidFill>
-                        <a:srgbClr val="C9D6D3"/>
-                      </a:solidFill>
-                      <a:prstDash val="solid"/>
-                      <a:round/>
-                      <a:headEnd type="none" w="med" len="med"/>
-                      <a:tailEnd type="none" w="med" len="med"/>
-                    </a:lnT>
-                    <a:lnB w="6350" cap="flat" cmpd="sng" algn="ctr">
-                      <a:solidFill>
-                        <a:srgbClr val="C9D6D3"/>
-                      </a:solidFill>
-                      <a:prstDash val="solid"/>
-                      <a:round/>
-                      <a:headEnd type="none" w="med" len="med"/>
-                      <a:tailEnd type="none" w="med" len="med"/>
-                    </a:lnB>
-                    <a:solidFill>
-                      <a:srgbClr val="FFFFFF"/>
-                    </a:solidFill>
-                  </a:tcPr>
-                </a:tc>
-                <a:tc>
-                  <a:txBody>
-                    <a:bodyPr/>
-                    <a:lstStyle/>
-                    <a:p>
-                      <a:pPr algn="l" indent="0" marL="0">
-                        <a:buNone/>
-                      </a:pPr>
-                      <a:r>
-                        <a:rPr lang="en-US" sz="1300" dirty="0">
-                          <a:solidFill>
-                            <a:schemeClr val="tx1"/>
-                          </a:solidFill>
-                        </a:rPr>
-                        <a:t>4,2</a:t>
-                      </a:r>
-                      <a:endParaRPr lang="en-US" sz="1300" dirty="0"/>
+                      <a:endParaRPr lang="en-US" sz="1200" dirty="0"/>
                     </a:p>
                   </a:txBody>
                   <a:tcPr marL="63500" marR="63500" marT="38100" marB="38100" anchor="ctr">
@@ -26376,14 +26497,14 @@
                         <a:buNone/>
                       </a:pPr>
                       <a:r>
-                        <a:rPr lang="en-US" sz="1300" b="1" dirty="0">
+                        <a:rPr lang="en-US" sz="1200" b="1" dirty="0">
                           <a:solidFill>
                             <a:schemeClr val="tx1"/>
                           </a:solidFill>
                         </a:rPr>
                         <a:t>Базова інфляція, % р/р</a:t>
                       </a:r>
-                      <a:endParaRPr lang="en-US" sz="1300" dirty="0"/>
+                      <a:endParaRPr lang="en-US" sz="1200" dirty="0"/>
                     </a:p>
                   </a:txBody>
                   <a:tcPr marL="63500" marR="63500" marT="38100" marB="38100" anchor="ctr">
@@ -26437,14 +26558,14 @@
                         <a:buNone/>
                       </a:pPr>
                       <a:r>
-                        <a:rPr lang="en-US" sz="1300" dirty="0">
+                        <a:rPr lang="en-US" sz="1200" dirty="0">
                           <a:solidFill>
                             <a:schemeClr val="tx1"/>
                           </a:solidFill>
                         </a:rPr>
                         <a:t>7,9</a:t>
                       </a:r>
-                      <a:endParaRPr lang="en-US" sz="1300" dirty="0"/>
+                      <a:endParaRPr lang="en-US" sz="1200" dirty="0"/>
                     </a:p>
                   </a:txBody>
                   <a:tcPr marL="63500" marR="63500" marT="38100" marB="38100" anchor="ctr">
@@ -26498,14 +26619,14 @@
                         <a:buNone/>
                       </a:pPr>
                       <a:r>
-                        <a:rPr lang="en-US" sz="1300" dirty="0">
+                        <a:rPr lang="en-US" sz="1200" dirty="0">
                           <a:solidFill>
                             <a:schemeClr val="tx1"/>
                           </a:solidFill>
                         </a:rPr>
                         <a:t>8,0</a:t>
                       </a:r>
-                      <a:endParaRPr lang="en-US" sz="1300" dirty="0"/>
+                      <a:endParaRPr lang="en-US" sz="1200" dirty="0"/>
                     </a:p>
                   </a:txBody>
                   <a:tcPr marL="63500" marR="63500" marT="38100" marB="38100" anchor="ctr">
@@ -26559,14 +26680,14 @@
                         <a:buNone/>
                       </a:pPr>
                       <a:r>
-                        <a:rPr lang="en-US" sz="1300" dirty="0">
+                        <a:rPr lang="en-US" sz="1200" dirty="0">
                           <a:solidFill>
                             <a:schemeClr val="tx1"/>
                           </a:solidFill>
                         </a:rPr>
-                        <a:t>8,1</a:t>
+                        <a:t>5,7</a:t>
                       </a:r>
-                      <a:endParaRPr lang="en-US" sz="1300" dirty="0"/>
+                      <a:endParaRPr lang="en-US" sz="1200" dirty="0"/>
                     </a:p>
                   </a:txBody>
                   <a:tcPr marL="63500" marR="63500" marT="38100" marB="38100" anchor="ctr">
@@ -26620,14 +26741,14 @@
                         <a:buNone/>
                       </a:pPr>
                       <a:r>
-                        <a:rPr lang="en-US" sz="1300" dirty="0">
+                        <a:rPr lang="en-US" sz="1200" dirty="0">
                           <a:solidFill>
                             <a:schemeClr val="tx1"/>
                           </a:solidFill>
                         </a:rPr>
-                        <a:t>7,2</a:t>
+                        <a:t>3,3</a:t>
                       </a:r>
-                      <a:endParaRPr lang="en-US" sz="1300" dirty="0"/>
+                      <a:endParaRPr lang="en-US" sz="1200" dirty="0"/>
                     </a:p>
                   </a:txBody>
                   <a:tcPr marL="63500" marR="63500" marT="38100" marB="38100" anchor="ctr">
@@ -26681,14 +26802,14 @@
                         <a:buNone/>
                       </a:pPr>
                       <a:r>
-                        <a:rPr lang="en-US" sz="1300" dirty="0">
+                        <a:rPr lang="en-US" sz="1200" dirty="0">
                           <a:solidFill>
                             <a:schemeClr val="tx1"/>
                           </a:solidFill>
                         </a:rPr>
-                        <a:t>5,9</a:t>
+                        <a:t>3,1</a:t>
                       </a:r>
-                      <a:endParaRPr lang="en-US" sz="1300" dirty="0"/>
+                      <a:endParaRPr lang="en-US" sz="1200" dirty="0"/>
                     </a:p>
                   </a:txBody>
                   <a:tcPr marL="63500" marR="63500" marT="38100" marB="38100" anchor="ctr">
@@ -26742,14 +26863,14 @@
                         <a:buNone/>
                       </a:pPr>
                       <a:r>
-                        <a:rPr lang="en-US" sz="1300" dirty="0">
+                        <a:rPr lang="en-US" sz="1200" dirty="0">
                           <a:solidFill>
                             <a:schemeClr val="tx1"/>
                           </a:solidFill>
                         </a:rPr>
-                        <a:t>4,4</a:t>
+                        <a:t>4,1</a:t>
                       </a:r>
-                      <a:endParaRPr lang="en-US" sz="1300" dirty="0"/>
+                      <a:endParaRPr lang="en-US" sz="1200" dirty="0"/>
                     </a:p>
                   </a:txBody>
                   <a:tcPr marL="63500" marR="63500" marT="38100" marB="38100" anchor="ctr">
@@ -26803,136 +26924,14 @@
                         <a:buNone/>
                       </a:pPr>
                       <a:r>
-                        <a:rPr lang="en-US" sz="1300" dirty="0">
+                        <a:rPr lang="en-US" sz="1200" dirty="0">
                           <a:solidFill>
                             <a:schemeClr val="tx1"/>
                           </a:solidFill>
                         </a:rPr>
-                        <a:t>3,4</a:t>
+                        <a:t>4,9</a:t>
                       </a:r>
-                      <a:endParaRPr lang="en-US" sz="1300" dirty="0"/>
-                    </a:p>
-                  </a:txBody>
-                  <a:tcPr marL="63500" marR="63500" marT="38100" marB="38100" anchor="ctr">
-                    <a:lnL w="6350" cap="flat" cmpd="sng" algn="ctr">
-                      <a:solidFill>
-                        <a:srgbClr val="C9D6D3"/>
-                      </a:solidFill>
-                      <a:prstDash val="solid"/>
-                      <a:round/>
-                      <a:headEnd type="none" w="med" len="med"/>
-                      <a:tailEnd type="none" w="med" len="med"/>
-                    </a:lnL>
-                    <a:lnR w="6350" cap="flat" cmpd="sng" algn="ctr">
-                      <a:solidFill>
-                        <a:srgbClr val="C9D6D3"/>
-                      </a:solidFill>
-                      <a:prstDash val="solid"/>
-                      <a:round/>
-                      <a:headEnd type="none" w="med" len="med"/>
-                      <a:tailEnd type="none" w="med" len="med"/>
-                    </a:lnR>
-                    <a:lnT w="6350" cap="flat" cmpd="sng" algn="ctr">
-                      <a:solidFill>
-                        <a:srgbClr val="C9D6D3"/>
-                      </a:solidFill>
-                      <a:prstDash val="solid"/>
-                      <a:round/>
-                      <a:headEnd type="none" w="med" len="med"/>
-                      <a:tailEnd type="none" w="med" len="med"/>
-                    </a:lnT>
-                    <a:lnB w="6350" cap="flat" cmpd="sng" algn="ctr">
-                      <a:solidFill>
-                        <a:srgbClr val="C9D6D3"/>
-                      </a:solidFill>
-                      <a:prstDash val="solid"/>
-                      <a:round/>
-                      <a:headEnd type="none" w="med" len="med"/>
-                      <a:tailEnd type="none" w="med" len="med"/>
-                    </a:lnB>
-                    <a:solidFill>
-                      <a:srgbClr val="EAF1EF"/>
-                    </a:solidFill>
-                  </a:tcPr>
-                </a:tc>
-                <a:tc>
-                  <a:txBody>
-                    <a:bodyPr/>
-                    <a:lstStyle/>
-                    <a:p>
-                      <a:pPr algn="l" indent="0" marL="0">
-                        <a:buNone/>
-                      </a:pPr>
-                      <a:r>
-                        <a:rPr lang="en-US" sz="1300" dirty="0">
-                          <a:solidFill>
-                            <a:schemeClr val="tx1"/>
-                          </a:solidFill>
-                        </a:rPr>
-                        <a:t>2,9</a:t>
-                      </a:r>
-                      <a:endParaRPr lang="en-US" sz="1300" dirty="0"/>
-                    </a:p>
-                  </a:txBody>
-                  <a:tcPr marL="63500" marR="63500" marT="38100" marB="38100" anchor="ctr">
-                    <a:lnL w="6350" cap="flat" cmpd="sng" algn="ctr">
-                      <a:solidFill>
-                        <a:srgbClr val="C9D6D3"/>
-                      </a:solidFill>
-                      <a:prstDash val="solid"/>
-                      <a:round/>
-                      <a:headEnd type="none" w="med" len="med"/>
-                      <a:tailEnd type="none" w="med" len="med"/>
-                    </a:lnL>
-                    <a:lnR w="6350" cap="flat" cmpd="sng" algn="ctr">
-                      <a:solidFill>
-                        <a:srgbClr val="C9D6D3"/>
-                      </a:solidFill>
-                      <a:prstDash val="solid"/>
-                      <a:round/>
-                      <a:headEnd type="none" w="med" len="med"/>
-                      <a:tailEnd type="none" w="med" len="med"/>
-                    </a:lnR>
-                    <a:lnT w="6350" cap="flat" cmpd="sng" algn="ctr">
-                      <a:solidFill>
-                        <a:srgbClr val="C9D6D3"/>
-                      </a:solidFill>
-                      <a:prstDash val="solid"/>
-                      <a:round/>
-                      <a:headEnd type="none" w="med" len="med"/>
-                      <a:tailEnd type="none" w="med" len="med"/>
-                    </a:lnT>
-                    <a:lnB w="6350" cap="flat" cmpd="sng" algn="ctr">
-                      <a:solidFill>
-                        <a:srgbClr val="C9D6D3"/>
-                      </a:solidFill>
-                      <a:prstDash val="solid"/>
-                      <a:round/>
-                      <a:headEnd type="none" w="med" len="med"/>
-                      <a:tailEnd type="none" w="med" len="med"/>
-                    </a:lnB>
-                    <a:solidFill>
-                      <a:srgbClr val="EAF1EF"/>
-                    </a:solidFill>
-                  </a:tcPr>
-                </a:tc>
-                <a:tc>
-                  <a:txBody>
-                    <a:bodyPr/>
-                    <a:lstStyle/>
-                    <a:p>
-                      <a:pPr algn="l" indent="0" marL="0">
-                        <a:buNone/>
-                      </a:pPr>
-                      <a:r>
-                        <a:rPr lang="en-US" sz="1300" dirty="0">
-                          <a:solidFill>
-                            <a:schemeClr val="tx1"/>
-                          </a:solidFill>
-                        </a:rPr>
-                        <a:t>2,9</a:t>
-                      </a:r>
-                      <a:endParaRPr lang="en-US" sz="1300" dirty="0"/>
+                      <a:endParaRPr lang="en-US" sz="1200" dirty="0"/>
                     </a:p>
                   </a:txBody>
                   <a:tcPr marL="63500" marR="63500" marT="38100" marB="38100" anchor="ctr">
@@ -26988,14 +26987,14 @@
                         <a:buNone/>
                       </a:pPr>
                       <a:r>
-                        <a:rPr lang="en-US" sz="1300" b="1" dirty="0">
+                        <a:rPr lang="en-US" sz="1200" b="1" dirty="0">
                           <a:solidFill>
                             <a:schemeClr val="tx1"/>
                           </a:solidFill>
                         </a:rPr>
                         <a:t>ВВП, % р/р</a:t>
                       </a:r>
-                      <a:endParaRPr lang="en-US" sz="1300" dirty="0"/>
+                      <a:endParaRPr lang="en-US" sz="1200" dirty="0"/>
                     </a:p>
                   </a:txBody>
                   <a:tcPr marL="63500" marR="63500" marT="38100" marB="38100" anchor="ctr">
@@ -27049,14 +27048,14 @@
                         <a:buNone/>
                       </a:pPr>
                       <a:r>
-                        <a:rPr lang="en-US" sz="1300" dirty="0">
+                        <a:rPr lang="en-US" sz="1200" dirty="0">
                           <a:solidFill>
                             <a:schemeClr val="tx1"/>
                           </a:solidFill>
                         </a:rPr>
                         <a:t>−0,3</a:t>
                       </a:r>
-                      <a:endParaRPr lang="en-US" sz="1300" dirty="0"/>
+                      <a:endParaRPr lang="en-US" sz="1200" dirty="0"/>
                     </a:p>
                   </a:txBody>
                   <a:tcPr marL="63500" marR="63500" marT="38100" marB="38100" anchor="ctr">
@@ -27110,14 +27109,14 @@
                         <a:buNone/>
                       </a:pPr>
                       <a:r>
-                        <a:rPr lang="en-US" sz="1300" dirty="0">
+                        <a:rPr lang="en-US" sz="1200" dirty="0">
                           <a:solidFill>
                             <a:schemeClr val="tx1"/>
                           </a:solidFill>
                         </a:rPr>
-                        <a:t>1,0</a:t>
+                        <a:t>0,9</a:t>
                       </a:r>
-                      <a:endParaRPr lang="en-US" sz="1300" dirty="0"/>
+                      <a:endParaRPr lang="en-US" sz="1200" dirty="0"/>
                     </a:p>
                   </a:txBody>
                   <a:tcPr marL="63500" marR="63500" marT="38100" marB="38100" anchor="ctr">
@@ -27171,14 +27170,14 @@
                         <a:buNone/>
                       </a:pPr>
                       <a:r>
-                        <a:rPr lang="en-US" sz="1300" dirty="0">
+                        <a:rPr lang="en-US" sz="1200" dirty="0">
                           <a:solidFill>
                             <a:schemeClr val="tx1"/>
                           </a:solidFill>
                         </a:rPr>
-                        <a:t>0,9</a:t>
+                        <a:t>0,8</a:t>
                       </a:r>
-                      <a:endParaRPr lang="en-US" sz="1300" dirty="0"/>
+                      <a:endParaRPr lang="en-US" sz="1200" dirty="0"/>
                     </a:p>
                   </a:txBody>
                   <a:tcPr marL="63500" marR="63500" marT="38100" marB="38100" anchor="ctr">
@@ -27232,14 +27231,14 @@
                         <a:buNone/>
                       </a:pPr>
                       <a:r>
-                        <a:rPr lang="en-US" sz="1300" dirty="0">
+                        <a:rPr lang="en-US" sz="1200" dirty="0">
                           <a:solidFill>
                             <a:schemeClr val="tx1"/>
                           </a:solidFill>
                         </a:rPr>
-                        <a:t>1,3</a:t>
+                        <a:t>0,4</a:t>
                       </a:r>
-                      <a:endParaRPr lang="en-US" sz="1300" dirty="0"/>
+                      <a:endParaRPr lang="en-US" sz="1200" dirty="0"/>
                     </a:p>
                   </a:txBody>
                   <a:tcPr marL="63500" marR="63500" marT="38100" marB="38100" anchor="ctr">
@@ -27293,14 +27292,14 @@
                         <a:buNone/>
                       </a:pPr>
                       <a:r>
-                        <a:rPr lang="en-US" sz="1300" dirty="0">
+                        <a:rPr lang="en-US" sz="1200" dirty="0">
                           <a:solidFill>
                             <a:schemeClr val="tx1"/>
                           </a:solidFill>
                         </a:rPr>
-                        <a:t>1,1</a:t>
+                        <a:t>1,8</a:t>
                       </a:r>
-                      <a:endParaRPr lang="en-US" sz="1300" dirty="0"/>
+                      <a:endParaRPr lang="en-US" sz="1200" dirty="0"/>
                     </a:p>
                   </a:txBody>
                   <a:tcPr marL="63500" marR="63500" marT="38100" marB="38100" anchor="ctr">
@@ -27354,14 +27353,14 @@
                         <a:buNone/>
                       </a:pPr>
                       <a:r>
-                        <a:rPr lang="en-US" sz="1300" dirty="0">
+                        <a:rPr lang="en-US" sz="1200" dirty="0">
                           <a:solidFill>
                             <a:schemeClr val="tx1"/>
                           </a:solidFill>
                         </a:rPr>
-                        <a:t>0,5</a:t>
+                        <a:t>3,1</a:t>
                       </a:r>
-                      <a:endParaRPr lang="en-US" sz="1300" dirty="0"/>
+                      <a:endParaRPr lang="en-US" sz="1200" dirty="0"/>
                     </a:p>
                   </a:txBody>
                   <a:tcPr marL="63500" marR="63500" marT="38100" marB="38100" anchor="ctr">
@@ -27415,136 +27414,14 @@
                         <a:buNone/>
                       </a:pPr>
                       <a:r>
-                        <a:rPr lang="en-US" sz="1300" dirty="0">
+                        <a:rPr lang="en-US" sz="1200" dirty="0">
                           <a:solidFill>
                             <a:schemeClr val="tx1"/>
                           </a:solidFill>
                         </a:rPr>
-                        <a:t>0,6</a:t>
+                        <a:t>3,0</a:t>
                       </a:r>
-                      <a:endParaRPr lang="en-US" sz="1300" dirty="0"/>
-                    </a:p>
-                  </a:txBody>
-                  <a:tcPr marL="63500" marR="63500" marT="38100" marB="38100" anchor="ctr">
-                    <a:lnL w="6350" cap="flat" cmpd="sng" algn="ctr">
-                      <a:solidFill>
-                        <a:srgbClr val="C9D6D3"/>
-                      </a:solidFill>
-                      <a:prstDash val="solid"/>
-                      <a:round/>
-                      <a:headEnd type="none" w="med" len="med"/>
-                      <a:tailEnd type="none" w="med" len="med"/>
-                    </a:lnL>
-                    <a:lnR w="6350" cap="flat" cmpd="sng" algn="ctr">
-                      <a:solidFill>
-                        <a:srgbClr val="C9D6D3"/>
-                      </a:solidFill>
-                      <a:prstDash val="solid"/>
-                      <a:round/>
-                      <a:headEnd type="none" w="med" len="med"/>
-                      <a:tailEnd type="none" w="med" len="med"/>
-                    </a:lnR>
-                    <a:lnT w="6350" cap="flat" cmpd="sng" algn="ctr">
-                      <a:solidFill>
-                        <a:srgbClr val="C9D6D3"/>
-                      </a:solidFill>
-                      <a:prstDash val="solid"/>
-                      <a:round/>
-                      <a:headEnd type="none" w="med" len="med"/>
-                      <a:tailEnd type="none" w="med" len="med"/>
-                    </a:lnT>
-                    <a:lnB w="6350" cap="flat" cmpd="sng" algn="ctr">
-                      <a:solidFill>
-                        <a:srgbClr val="C9D6D3"/>
-                      </a:solidFill>
-                      <a:prstDash val="solid"/>
-                      <a:round/>
-                      <a:headEnd type="none" w="med" len="med"/>
-                      <a:tailEnd type="none" w="med" len="med"/>
-                    </a:lnB>
-                    <a:solidFill>
-                      <a:srgbClr val="FFFFFF"/>
-                    </a:solidFill>
-                  </a:tcPr>
-                </a:tc>
-                <a:tc>
-                  <a:txBody>
-                    <a:bodyPr/>
-                    <a:lstStyle/>
-                    <a:p>
-                      <a:pPr algn="l" indent="0" marL="0">
-                        <a:buNone/>
-                      </a:pPr>
-                      <a:r>
-                        <a:rPr lang="en-US" sz="1300" dirty="0">
-                          <a:solidFill>
-                            <a:schemeClr val="tx1"/>
-                          </a:solidFill>
-                        </a:rPr>
-                        <a:t>1,0</a:t>
-                      </a:r>
-                      <a:endParaRPr lang="en-US" sz="1300" dirty="0"/>
-                    </a:p>
-                  </a:txBody>
-                  <a:tcPr marL="63500" marR="63500" marT="38100" marB="38100" anchor="ctr">
-                    <a:lnL w="6350" cap="flat" cmpd="sng" algn="ctr">
-                      <a:solidFill>
-                        <a:srgbClr val="C9D6D3"/>
-                      </a:solidFill>
-                      <a:prstDash val="solid"/>
-                      <a:round/>
-                      <a:headEnd type="none" w="med" len="med"/>
-                      <a:tailEnd type="none" w="med" len="med"/>
-                    </a:lnL>
-                    <a:lnR w="6350" cap="flat" cmpd="sng" algn="ctr">
-                      <a:solidFill>
-                        <a:srgbClr val="C9D6D3"/>
-                      </a:solidFill>
-                      <a:prstDash val="solid"/>
-                      <a:round/>
-                      <a:headEnd type="none" w="med" len="med"/>
-                      <a:tailEnd type="none" w="med" len="med"/>
-                    </a:lnR>
-                    <a:lnT w="6350" cap="flat" cmpd="sng" algn="ctr">
-                      <a:solidFill>
-                        <a:srgbClr val="C9D6D3"/>
-                      </a:solidFill>
-                      <a:prstDash val="solid"/>
-                      <a:round/>
-                      <a:headEnd type="none" w="med" len="med"/>
-                      <a:tailEnd type="none" w="med" len="med"/>
-                    </a:lnT>
-                    <a:lnB w="6350" cap="flat" cmpd="sng" algn="ctr">
-                      <a:solidFill>
-                        <a:srgbClr val="C9D6D3"/>
-                      </a:solidFill>
-                      <a:prstDash val="solid"/>
-                      <a:round/>
-                      <a:headEnd type="none" w="med" len="med"/>
-                      <a:tailEnd type="none" w="med" len="med"/>
-                    </a:lnB>
-                    <a:solidFill>
-                      <a:srgbClr val="FFFFFF"/>
-                    </a:solidFill>
-                  </a:tcPr>
-                </a:tc>
-                <a:tc>
-                  <a:txBody>
-                    <a:bodyPr/>
-                    <a:lstStyle/>
-                    <a:p>
-                      <a:pPr algn="l" indent="0" marL="0">
-                        <a:buNone/>
-                      </a:pPr>
-                      <a:r>
-                        <a:rPr lang="en-US" sz="1300" dirty="0">
-                          <a:solidFill>
-                            <a:schemeClr val="tx1"/>
-                          </a:solidFill>
-                        </a:rPr>
-                        <a:t>1,5</a:t>
-                      </a:r>
-                      <a:endParaRPr lang="en-US" sz="1300" dirty="0"/>
+                      <a:endParaRPr lang="en-US" sz="1200" dirty="0"/>
                     </a:p>
                   </a:txBody>
                   <a:tcPr marL="63500" marR="63500" marT="38100" marB="38100" anchor="ctr">
@@ -27600,14 +27477,14 @@
                         <a:buNone/>
                       </a:pPr>
                       <a:r>
-                        <a:rPr lang="en-US" sz="1300" b="1" dirty="0">
+                        <a:rPr lang="en-US" sz="1200" b="1" dirty="0">
                           <a:solidFill>
                             <a:schemeClr val="tx1"/>
                           </a:solidFill>
                         </a:rPr>
                         <a:t>Облікова ставка, % (сер. за кв.)</a:t>
                       </a:r>
-                      <a:endParaRPr lang="en-US" sz="1300" dirty="0"/>
+                      <a:endParaRPr lang="en-US" sz="1200" dirty="0"/>
                     </a:p>
                   </a:txBody>
                   <a:tcPr marL="63500" marR="63500" marT="38100" marB="38100" anchor="ctr">
@@ -27661,14 +27538,14 @@
                         <a:buNone/>
                       </a:pPr>
                       <a:r>
-                        <a:rPr lang="en-US" sz="1300" dirty="0">
+                        <a:rPr lang="en-US" sz="1200" dirty="0">
                           <a:solidFill>
                             <a:schemeClr val="tx1"/>
                           </a:solidFill>
                         </a:rPr>
                         <a:t>16,5</a:t>
                       </a:r>
-                      <a:endParaRPr lang="en-US" sz="1300" dirty="0"/>
+                      <a:endParaRPr lang="en-US" sz="1200" dirty="0"/>
                     </a:p>
                   </a:txBody>
                   <a:tcPr marL="63500" marR="63500" marT="38100" marB="38100" anchor="ctr">
@@ -27722,14 +27599,14 @@
                         <a:buNone/>
                       </a:pPr>
                       <a:r>
-                        <a:rPr lang="en-US" sz="1300" dirty="0">
+                        <a:rPr lang="en-US" sz="1200" dirty="0">
                           <a:solidFill>
                             <a:schemeClr val="tx1"/>
                           </a:solidFill>
                         </a:rPr>
-                        <a:t>16,7</a:t>
+                        <a:t>16,5</a:t>
                       </a:r>
-                      <a:endParaRPr lang="en-US" sz="1300" dirty="0"/>
+                      <a:endParaRPr lang="en-US" sz="1200" dirty="0"/>
                     </a:p>
                   </a:txBody>
                   <a:tcPr marL="63500" marR="63500" marT="38100" marB="38100" anchor="ctr">
@@ -27783,14 +27660,14 @@
                         <a:buNone/>
                       </a:pPr>
                       <a:r>
-                        <a:rPr lang="en-US" sz="1300" dirty="0">
+                        <a:rPr lang="en-US" sz="1200" dirty="0">
                           <a:solidFill>
                             <a:schemeClr val="tx1"/>
                           </a:solidFill>
                         </a:rPr>
-                        <a:t>16,4</a:t>
+                        <a:t>15,5</a:t>
                       </a:r>
-                      <a:endParaRPr lang="en-US" sz="1300" dirty="0"/>
+                      <a:endParaRPr lang="en-US" sz="1200" dirty="0"/>
                     </a:p>
                   </a:txBody>
                   <a:tcPr marL="63500" marR="63500" marT="38100" marB="38100" anchor="ctr">
@@ -27844,14 +27721,14 @@
                         <a:buNone/>
                       </a:pPr>
                       <a:r>
-                        <a:rPr lang="en-US" sz="1300" dirty="0">
+                        <a:rPr lang="en-US" sz="1200" dirty="0">
                           <a:solidFill>
                             <a:schemeClr val="tx1"/>
                           </a:solidFill>
                         </a:rPr>
-                        <a:t>15,6</a:t>
+                        <a:t>12,7</a:t>
                       </a:r>
-                      <a:endParaRPr lang="en-US" sz="1300" dirty="0"/>
+                      <a:endParaRPr lang="en-US" sz="1200" dirty="0"/>
                     </a:p>
                   </a:txBody>
                   <a:tcPr marL="63500" marR="63500" marT="38100" marB="38100" anchor="ctr">
@@ -27905,14 +27782,14 @@
                         <a:buNone/>
                       </a:pPr>
                       <a:r>
-                        <a:rPr lang="en-US" sz="1300" dirty="0">
+                        <a:rPr lang="en-US" sz="1200" dirty="0">
                           <a:solidFill>
                             <a:schemeClr val="tx1"/>
                           </a:solidFill>
                         </a:rPr>
-                        <a:t>14,7</a:t>
+                        <a:t>10,4</a:t>
                       </a:r>
-                      <a:endParaRPr lang="en-US" sz="1300" dirty="0"/>
+                      <a:endParaRPr lang="en-US" sz="1200" dirty="0"/>
                     </a:p>
                   </a:txBody>
                   <a:tcPr marL="63500" marR="63500" marT="38100" marB="38100" anchor="ctr">
@@ -27966,14 +27843,14 @@
                         <a:buNone/>
                       </a:pPr>
                       <a:r>
-                        <a:rPr lang="en-US" sz="1300" dirty="0">
+                        <a:rPr lang="en-US" sz="1200" dirty="0">
                           <a:solidFill>
                             <a:schemeClr val="tx1"/>
                           </a:solidFill>
                         </a:rPr>
-                        <a:t>13,6</a:t>
+                        <a:t>9,3</a:t>
                       </a:r>
-                      <a:endParaRPr lang="en-US" sz="1300" dirty="0"/>
+                      <a:endParaRPr lang="en-US" sz="1200" dirty="0"/>
                     </a:p>
                   </a:txBody>
                   <a:tcPr marL="63500" marR="63500" marT="38100" marB="38100" anchor="ctr">
@@ -28027,136 +27904,14 @@
                         <a:buNone/>
                       </a:pPr>
                       <a:r>
-                        <a:rPr lang="en-US" sz="1300" dirty="0">
+                        <a:rPr lang="en-US" sz="1200" dirty="0">
                           <a:solidFill>
                             <a:schemeClr val="tx1"/>
                           </a:solidFill>
                         </a:rPr>
-                        <a:t>12,6</a:t>
+                        <a:t>8,9</a:t>
                       </a:r>
-                      <a:endParaRPr lang="en-US" sz="1300" dirty="0"/>
-                    </a:p>
-                  </a:txBody>
-                  <a:tcPr marL="63500" marR="63500" marT="38100" marB="38100" anchor="ctr">
-                    <a:lnL w="6350" cap="flat" cmpd="sng" algn="ctr">
-                      <a:solidFill>
-                        <a:srgbClr val="C9D6D3"/>
-                      </a:solidFill>
-                      <a:prstDash val="solid"/>
-                      <a:round/>
-                      <a:headEnd type="none" w="med" len="med"/>
-                      <a:tailEnd type="none" w="med" len="med"/>
-                    </a:lnL>
-                    <a:lnR w="6350" cap="flat" cmpd="sng" algn="ctr">
-                      <a:solidFill>
-                        <a:srgbClr val="C9D6D3"/>
-                      </a:solidFill>
-                      <a:prstDash val="solid"/>
-                      <a:round/>
-                      <a:headEnd type="none" w="med" len="med"/>
-                      <a:tailEnd type="none" w="med" len="med"/>
-                    </a:lnR>
-                    <a:lnT w="6350" cap="flat" cmpd="sng" algn="ctr">
-                      <a:solidFill>
-                        <a:srgbClr val="C9D6D3"/>
-                      </a:solidFill>
-                      <a:prstDash val="solid"/>
-                      <a:round/>
-                      <a:headEnd type="none" w="med" len="med"/>
-                      <a:tailEnd type="none" w="med" len="med"/>
-                    </a:lnT>
-                    <a:lnB w="6350" cap="flat" cmpd="sng" algn="ctr">
-                      <a:solidFill>
-                        <a:srgbClr val="C9D6D3"/>
-                      </a:solidFill>
-                      <a:prstDash val="solid"/>
-                      <a:round/>
-                      <a:headEnd type="none" w="med" len="med"/>
-                      <a:tailEnd type="none" w="med" len="med"/>
-                    </a:lnB>
-                    <a:solidFill>
-                      <a:srgbClr val="EAF1EF"/>
-                    </a:solidFill>
-                  </a:tcPr>
-                </a:tc>
-                <a:tc>
-                  <a:txBody>
-                    <a:bodyPr/>
-                    <a:lstStyle/>
-                    <a:p>
-                      <a:pPr algn="l" indent="0" marL="0">
-                        <a:buNone/>
-                      </a:pPr>
-                      <a:r>
-                        <a:rPr lang="en-US" sz="1300" dirty="0">
-                          <a:solidFill>
-                            <a:schemeClr val="tx1"/>
-                          </a:solidFill>
-                        </a:rPr>
-                        <a:t>11,8</a:t>
-                      </a:r>
-                      <a:endParaRPr lang="en-US" sz="1300" dirty="0"/>
-                    </a:p>
-                  </a:txBody>
-                  <a:tcPr marL="63500" marR="63500" marT="38100" marB="38100" anchor="ctr">
-                    <a:lnL w="6350" cap="flat" cmpd="sng" algn="ctr">
-                      <a:solidFill>
-                        <a:srgbClr val="C9D6D3"/>
-                      </a:solidFill>
-                      <a:prstDash val="solid"/>
-                      <a:round/>
-                      <a:headEnd type="none" w="med" len="med"/>
-                      <a:tailEnd type="none" w="med" len="med"/>
-                    </a:lnL>
-                    <a:lnR w="6350" cap="flat" cmpd="sng" algn="ctr">
-                      <a:solidFill>
-                        <a:srgbClr val="C9D6D3"/>
-                      </a:solidFill>
-                      <a:prstDash val="solid"/>
-                      <a:round/>
-                      <a:headEnd type="none" w="med" len="med"/>
-                      <a:tailEnd type="none" w="med" len="med"/>
-                    </a:lnR>
-                    <a:lnT w="6350" cap="flat" cmpd="sng" algn="ctr">
-                      <a:solidFill>
-                        <a:srgbClr val="C9D6D3"/>
-                      </a:solidFill>
-                      <a:prstDash val="solid"/>
-                      <a:round/>
-                      <a:headEnd type="none" w="med" len="med"/>
-                      <a:tailEnd type="none" w="med" len="med"/>
-                    </a:lnT>
-                    <a:lnB w="6350" cap="flat" cmpd="sng" algn="ctr">
-                      <a:solidFill>
-                        <a:srgbClr val="C9D6D3"/>
-                      </a:solidFill>
-                      <a:prstDash val="solid"/>
-                      <a:round/>
-                      <a:headEnd type="none" w="med" len="med"/>
-                      <a:tailEnd type="none" w="med" len="med"/>
-                    </a:lnB>
-                    <a:solidFill>
-                      <a:srgbClr val="EAF1EF"/>
-                    </a:solidFill>
-                  </a:tcPr>
-                </a:tc>
-                <a:tc>
-                  <a:txBody>
-                    <a:bodyPr/>
-                    <a:lstStyle/>
-                    <a:p>
-                      <a:pPr algn="l" indent="0" marL="0">
-                        <a:buNone/>
-                      </a:pPr>
-                      <a:r>
-                        <a:rPr lang="en-US" sz="1300" dirty="0">
-                          <a:solidFill>
-                            <a:schemeClr val="tx1"/>
-                          </a:solidFill>
-                        </a:rPr>
-                        <a:t>11,2</a:t>
-                      </a:r>
-                      <a:endParaRPr lang="en-US" sz="1300" dirty="0"/>
+                      <a:endParaRPr lang="en-US" sz="1200" dirty="0"/>
                     </a:p>
                   </a:txBody>
                   <a:tcPr marL="63500" marR="63500" marT="38100" marB="38100" anchor="ctr">
@@ -28212,14 +27967,14 @@
                         <a:buNone/>
                       </a:pPr>
                       <a:r>
-                        <a:rPr lang="en-US" sz="1300" b="1" dirty="0">
+                        <a:rPr lang="en-US" sz="1200" b="1" dirty="0">
                           <a:solidFill>
                             <a:schemeClr val="tx1"/>
                           </a:solidFill>
                         </a:rPr>
                         <a:t>Курс, грн/€ (сер. за кв.)</a:t>
                       </a:r>
-                      <a:endParaRPr lang="en-US" sz="1300" dirty="0"/>
+                      <a:endParaRPr lang="en-US" sz="1200" dirty="0"/>
                     </a:p>
                   </a:txBody>
                   <a:tcPr marL="63500" marR="63500" marT="38100" marB="38100" anchor="ctr">
@@ -28273,14 +28028,14 @@
                         <a:buNone/>
                       </a:pPr>
                       <a:r>
-                        <a:rPr lang="en-US" sz="1300" dirty="0">
+                        <a:rPr lang="en-US" sz="1200" dirty="0">
                           <a:solidFill>
                             <a:schemeClr val="tx1"/>
                           </a:solidFill>
                         </a:rPr>
                         <a:t>51,6</a:t>
                       </a:r>
-                      <a:endParaRPr lang="en-US" sz="1300" dirty="0"/>
+                      <a:endParaRPr lang="en-US" sz="1200" dirty="0"/>
                     </a:p>
                   </a:txBody>
                   <a:tcPr marL="63500" marR="63500" marT="38100" marB="38100" anchor="ctr">
@@ -28334,14 +28089,14 @@
                         <a:buNone/>
                       </a:pPr>
                       <a:r>
-                        <a:rPr lang="en-US" sz="1300" dirty="0">
+                        <a:rPr lang="en-US" sz="1200" dirty="0">
                           <a:solidFill>
                             <a:schemeClr val="tx1"/>
                           </a:solidFill>
                         </a:rPr>
                         <a:t>51,7</a:t>
                       </a:r>
-                      <a:endParaRPr lang="en-US" sz="1300" dirty="0"/>
+                      <a:endParaRPr lang="en-US" sz="1200" dirty="0"/>
                     </a:p>
                   </a:txBody>
                   <a:tcPr marL="63500" marR="63500" marT="38100" marB="38100" anchor="ctr">
@@ -28395,14 +28150,14 @@
                         <a:buNone/>
                       </a:pPr>
                       <a:r>
-                        <a:rPr lang="en-US" sz="1300" dirty="0">
+                        <a:rPr lang="en-US" sz="1200" dirty="0">
                           <a:solidFill>
                             <a:schemeClr val="tx1"/>
                           </a:solidFill>
                         </a:rPr>
-                        <a:t>51,8</a:t>
+                        <a:t>51,9</a:t>
                       </a:r>
-                      <a:endParaRPr lang="en-US" sz="1300" dirty="0"/>
+                      <a:endParaRPr lang="en-US" sz="1200" dirty="0"/>
                     </a:p>
                   </a:txBody>
                   <a:tcPr marL="63500" marR="63500" marT="38100" marB="38100" anchor="ctr">
@@ -28456,14 +28211,14 @@
                         <a:buNone/>
                       </a:pPr>
                       <a:r>
-                        <a:rPr lang="en-US" sz="1300" dirty="0">
+                        <a:rPr lang="en-US" sz="1200" dirty="0">
                           <a:solidFill>
                             <a:schemeClr val="tx1"/>
                           </a:solidFill>
                         </a:rPr>
-                        <a:t>51,9</a:t>
+                        <a:t>52,1</a:t>
                       </a:r>
-                      <a:endParaRPr lang="en-US" sz="1300" dirty="0"/>
+                      <a:endParaRPr lang="en-US" sz="1200" dirty="0"/>
                     </a:p>
                   </a:txBody>
                   <a:tcPr marL="63500" marR="63500" marT="38100" marB="38100" anchor="ctr">
@@ -28517,14 +28272,14 @@
                         <a:buNone/>
                       </a:pPr>
                       <a:r>
-                        <a:rPr lang="en-US" sz="1300" dirty="0">
+                        <a:rPr lang="en-US" sz="1200" dirty="0">
                           <a:solidFill>
                             <a:schemeClr val="tx1"/>
                           </a:solidFill>
                         </a:rPr>
-                        <a:t>52,0</a:t>
+                        <a:t>52,6</a:t>
                       </a:r>
-                      <a:endParaRPr lang="en-US" sz="1300" dirty="0"/>
+                      <a:endParaRPr lang="en-US" sz="1200" dirty="0"/>
                     </a:p>
                   </a:txBody>
                   <a:tcPr marL="63500" marR="63500" marT="38100" marB="38100" anchor="ctr">
@@ -28578,14 +28333,14 @@
                         <a:buNone/>
                       </a:pPr>
                       <a:r>
-                        <a:rPr lang="en-US" sz="1300" dirty="0">
+                        <a:rPr lang="en-US" sz="1200" dirty="0">
                           <a:solidFill>
                             <a:schemeClr val="tx1"/>
                           </a:solidFill>
                         </a:rPr>
-                        <a:t>52,1</a:t>
+                        <a:t>53,2</a:t>
                       </a:r>
-                      <a:endParaRPr lang="en-US" sz="1300" dirty="0"/>
+                      <a:endParaRPr lang="en-US" sz="1200" dirty="0"/>
                     </a:p>
                   </a:txBody>
                   <a:tcPr marL="63500" marR="63500" marT="38100" marB="38100" anchor="ctr">
@@ -28639,136 +28394,14 @@
                         <a:buNone/>
                       </a:pPr>
                       <a:r>
-                        <a:rPr lang="en-US" sz="1300" dirty="0">
+                        <a:rPr lang="en-US" sz="1200" dirty="0">
                           <a:solidFill>
                             <a:schemeClr val="tx1"/>
                           </a:solidFill>
                         </a:rPr>
-                        <a:t>52,3</a:t>
+                        <a:t>53,6</a:t>
                       </a:r>
-                      <a:endParaRPr lang="en-US" sz="1300" dirty="0"/>
-                    </a:p>
-                  </a:txBody>
-                  <a:tcPr marL="63500" marR="63500" marT="38100" marB="38100" anchor="ctr">
-                    <a:lnL w="6350" cap="flat" cmpd="sng" algn="ctr">
-                      <a:solidFill>
-                        <a:srgbClr val="C9D6D3"/>
-                      </a:solidFill>
-                      <a:prstDash val="solid"/>
-                      <a:round/>
-                      <a:headEnd type="none" w="med" len="med"/>
-                      <a:tailEnd type="none" w="med" len="med"/>
-                    </a:lnL>
-                    <a:lnR w="6350" cap="flat" cmpd="sng" algn="ctr">
-                      <a:solidFill>
-                        <a:srgbClr val="C9D6D3"/>
-                      </a:solidFill>
-                      <a:prstDash val="solid"/>
-                      <a:round/>
-                      <a:headEnd type="none" w="med" len="med"/>
-                      <a:tailEnd type="none" w="med" len="med"/>
-                    </a:lnR>
-                    <a:lnT w="6350" cap="flat" cmpd="sng" algn="ctr">
-                      <a:solidFill>
-                        <a:srgbClr val="C9D6D3"/>
-                      </a:solidFill>
-                      <a:prstDash val="solid"/>
-                      <a:round/>
-                      <a:headEnd type="none" w="med" len="med"/>
-                      <a:tailEnd type="none" w="med" len="med"/>
-                    </a:lnT>
-                    <a:lnB w="6350" cap="flat" cmpd="sng" algn="ctr">
-                      <a:solidFill>
-                        <a:srgbClr val="C9D6D3"/>
-                      </a:solidFill>
-                      <a:prstDash val="solid"/>
-                      <a:round/>
-                      <a:headEnd type="none" w="med" len="med"/>
-                      <a:tailEnd type="none" w="med" len="med"/>
-                    </a:lnB>
-                    <a:solidFill>
-                      <a:srgbClr val="FFFFFF"/>
-                    </a:solidFill>
-                  </a:tcPr>
-                </a:tc>
-                <a:tc>
-                  <a:txBody>
-                    <a:bodyPr/>
-                    <a:lstStyle/>
-                    <a:p>
-                      <a:pPr algn="l" indent="0" marL="0">
-                        <a:buNone/>
-                      </a:pPr>
-                      <a:r>
-                        <a:rPr lang="en-US" sz="1300" dirty="0">
-                          <a:solidFill>
-                            <a:schemeClr val="tx1"/>
-                          </a:solidFill>
-                        </a:rPr>
-                        <a:t>52,4</a:t>
-                      </a:r>
-                      <a:endParaRPr lang="en-US" sz="1300" dirty="0"/>
-                    </a:p>
-                  </a:txBody>
-                  <a:tcPr marL="63500" marR="63500" marT="38100" marB="38100" anchor="ctr">
-                    <a:lnL w="6350" cap="flat" cmpd="sng" algn="ctr">
-                      <a:solidFill>
-                        <a:srgbClr val="C9D6D3"/>
-                      </a:solidFill>
-                      <a:prstDash val="solid"/>
-                      <a:round/>
-                      <a:headEnd type="none" w="med" len="med"/>
-                      <a:tailEnd type="none" w="med" len="med"/>
-                    </a:lnL>
-                    <a:lnR w="6350" cap="flat" cmpd="sng" algn="ctr">
-                      <a:solidFill>
-                        <a:srgbClr val="C9D6D3"/>
-                      </a:solidFill>
-                      <a:prstDash val="solid"/>
-                      <a:round/>
-                      <a:headEnd type="none" w="med" len="med"/>
-                      <a:tailEnd type="none" w="med" len="med"/>
-                    </a:lnR>
-                    <a:lnT w="6350" cap="flat" cmpd="sng" algn="ctr">
-                      <a:solidFill>
-                        <a:srgbClr val="C9D6D3"/>
-                      </a:solidFill>
-                      <a:prstDash val="solid"/>
-                      <a:round/>
-                      <a:headEnd type="none" w="med" len="med"/>
-                      <a:tailEnd type="none" w="med" len="med"/>
-                    </a:lnT>
-                    <a:lnB w="6350" cap="flat" cmpd="sng" algn="ctr">
-                      <a:solidFill>
-                        <a:srgbClr val="C9D6D3"/>
-                      </a:solidFill>
-                      <a:prstDash val="solid"/>
-                      <a:round/>
-                      <a:headEnd type="none" w="med" len="med"/>
-                      <a:tailEnd type="none" w="med" len="med"/>
-                    </a:lnB>
-                    <a:solidFill>
-                      <a:srgbClr val="FFFFFF"/>
-                    </a:solidFill>
-                  </a:tcPr>
-                </a:tc>
-                <a:tc>
-                  <a:txBody>
-                    <a:bodyPr/>
-                    <a:lstStyle/>
-                    <a:p>
-                      <a:pPr algn="l" indent="0" marL="0">
-                        <a:buNone/>
-                      </a:pPr>
-                      <a:r>
-                        <a:rPr lang="en-US" sz="1300" dirty="0">
-                          <a:solidFill>
-                            <a:schemeClr val="tx1"/>
-                          </a:solidFill>
-                        </a:rPr>
-                        <a:t>52,6</a:t>
-                      </a:r>
-                      <a:endParaRPr lang="en-US" sz="1300" dirty="0"/>
+                      <a:endParaRPr lang="en-US" sz="1200" dirty="0"/>
                     </a:p>
                   </a:txBody>
                   <a:tcPr marL="63500" marR="63500" marT="38100" marB="38100" anchor="ctr">
@@ -28824,14 +28457,14 @@
                         <a:buNone/>
                       </a:pPr>
                       <a:r>
-                        <a:rPr lang="en-US" sz="1300" b="1" dirty="0">
+                        <a:rPr lang="en-US" sz="1200" b="1" dirty="0">
                           <a:solidFill>
                             <a:schemeClr val="tx1"/>
                           </a:solidFill>
                         </a:rPr>
                         <a:t>Розрив ВВП, %</a:t>
                       </a:r>
-                      <a:endParaRPr lang="en-US" sz="1300" dirty="0"/>
+                      <a:endParaRPr lang="en-US" sz="1200" dirty="0"/>
                     </a:p>
                   </a:txBody>
                   <a:tcPr marL="63500" marR="63500" marT="38100" marB="38100" anchor="ctr">
@@ -28885,14 +28518,14 @@
                         <a:buNone/>
                       </a:pPr>
                       <a:r>
-                        <a:rPr lang="en-US" sz="1300" dirty="0">
+                        <a:rPr lang="en-US" sz="1200" dirty="0">
                           <a:solidFill>
                             <a:schemeClr val="tx1"/>
                           </a:solidFill>
                         </a:rPr>
                         <a:t>0,6</a:t>
                       </a:r>
-                      <a:endParaRPr lang="en-US" sz="1300" dirty="0"/>
+                      <a:endParaRPr lang="en-US" sz="1200" dirty="0"/>
                     </a:p>
                   </a:txBody>
                   <a:tcPr marL="63500" marR="63500" marT="38100" marB="38100" anchor="ctr">
@@ -28946,14 +28579,14 @@
                         <a:buNone/>
                       </a:pPr>
                       <a:r>
-                        <a:rPr lang="en-US" sz="1300" dirty="0">
+                        <a:rPr lang="en-US" sz="1200" dirty="0">
                           <a:solidFill>
                             <a:schemeClr val="tx1"/>
                           </a:solidFill>
                         </a:rPr>
-                        <a:t>0,8</a:t>
+                        <a:t>0,6</a:t>
                       </a:r>
-                      <a:endParaRPr lang="en-US" sz="1300" dirty="0"/>
+                      <a:endParaRPr lang="en-US" sz="1200" dirty="0"/>
                     </a:p>
                   </a:txBody>
                   <a:tcPr marL="63500" marR="63500" marT="38100" marB="38100" anchor="ctr">
@@ -29007,14 +28640,14 @@
                         <a:buNone/>
                       </a:pPr>
                       <a:r>
-                        <a:rPr lang="en-US" sz="1300" dirty="0">
+                        <a:rPr lang="en-US" sz="1200" dirty="0">
                           <a:solidFill>
                             <a:schemeClr val="tx1"/>
                           </a:solidFill>
                         </a:rPr>
-                        <a:t>0,6</a:t>
+                        <a:t>−0,3</a:t>
                       </a:r>
-                      <a:endParaRPr lang="en-US" sz="1300" dirty="0"/>
+                      <a:endParaRPr lang="en-US" sz="1200" dirty="0"/>
                     </a:p>
                   </a:txBody>
                   <a:tcPr marL="63500" marR="63500" marT="38100" marB="38100" anchor="ctr">
@@ -29068,14 +28701,14 @@
                         <a:buNone/>
                       </a:pPr>
                       <a:r>
-                        <a:rPr lang="en-US" sz="1300" dirty="0">
+                        <a:rPr lang="en-US" sz="1200" dirty="0">
                           <a:solidFill>
                             <a:schemeClr val="tx1"/>
                           </a:solidFill>
                         </a:rPr>
-                        <a:t>0,3</a:t>
+                        <a:t>−1,0</a:t>
                       </a:r>
-                      <a:endParaRPr lang="en-US" sz="1300" dirty="0"/>
+                      <a:endParaRPr lang="en-US" sz="1200" dirty="0"/>
                     </a:p>
                   </a:txBody>
                   <a:tcPr marL="63500" marR="63500" marT="38100" marB="38100" anchor="ctr">
@@ -29129,14 +28762,14 @@
                         <a:buNone/>
                       </a:pPr>
                       <a:r>
-                        <a:rPr lang="en-US" sz="1300" dirty="0">
+                        <a:rPr lang="en-US" sz="1200" dirty="0">
                           <a:solidFill>
                             <a:schemeClr val="tx1"/>
                           </a:solidFill>
                         </a:rPr>
-                        <a:t>−0,0</a:t>
+                        <a:t>−0,6</a:t>
                       </a:r>
-                      <a:endParaRPr lang="en-US" sz="1300" dirty="0"/>
+                      <a:endParaRPr lang="en-US" sz="1200" dirty="0"/>
                     </a:p>
                   </a:txBody>
                   <a:tcPr marL="63500" marR="63500" marT="38100" marB="38100" anchor="ctr">
@@ -29190,14 +28823,14 @@
                         <a:buNone/>
                       </a:pPr>
                       <a:r>
-                        <a:rPr lang="en-US" sz="1300" dirty="0">
+                        <a:rPr lang="en-US" sz="1200" dirty="0">
                           <a:solidFill>
                             <a:schemeClr val="tx1"/>
                           </a:solidFill>
                         </a:rPr>
-                        <a:t>−0,6</a:t>
+                        <a:t>−0,1</a:t>
                       </a:r>
-                      <a:endParaRPr lang="en-US" sz="1300" dirty="0"/>
+                      <a:endParaRPr lang="en-US" sz="1200" dirty="0"/>
                     </a:p>
                   </a:txBody>
                   <a:tcPr marL="63500" marR="63500" marT="38100" marB="38100" anchor="ctr">
@@ -29251,136 +28884,14 @@
                         <a:buNone/>
                       </a:pPr>
                       <a:r>
-                        <a:rPr lang="en-US" sz="1300" dirty="0">
+                        <a:rPr lang="en-US" sz="1200" dirty="0">
                           <a:solidFill>
                             <a:schemeClr val="tx1"/>
                           </a:solidFill>
                         </a:rPr>
-                        <a:t>−0,8</a:t>
+                        <a:t>0,3</a:t>
                       </a:r>
-                      <a:endParaRPr lang="en-US" sz="1300" dirty="0"/>
-                    </a:p>
-                  </a:txBody>
-                  <a:tcPr marL="63500" marR="63500" marT="38100" marB="38100" anchor="ctr">
-                    <a:lnL w="6350" cap="flat" cmpd="sng" algn="ctr">
-                      <a:solidFill>
-                        <a:srgbClr val="C9D6D3"/>
-                      </a:solidFill>
-                      <a:prstDash val="solid"/>
-                      <a:round/>
-                      <a:headEnd type="none" w="med" len="med"/>
-                      <a:tailEnd type="none" w="med" len="med"/>
-                    </a:lnL>
-                    <a:lnR w="6350" cap="flat" cmpd="sng" algn="ctr">
-                      <a:solidFill>
-                        <a:srgbClr val="C9D6D3"/>
-                      </a:solidFill>
-                      <a:prstDash val="solid"/>
-                      <a:round/>
-                      <a:headEnd type="none" w="med" len="med"/>
-                      <a:tailEnd type="none" w="med" len="med"/>
-                    </a:lnR>
-                    <a:lnT w="6350" cap="flat" cmpd="sng" algn="ctr">
-                      <a:solidFill>
-                        <a:srgbClr val="C9D6D3"/>
-                      </a:solidFill>
-                      <a:prstDash val="solid"/>
-                      <a:round/>
-                      <a:headEnd type="none" w="med" len="med"/>
-                      <a:tailEnd type="none" w="med" len="med"/>
-                    </a:lnT>
-                    <a:lnB w="6350" cap="flat" cmpd="sng" algn="ctr">
-                      <a:solidFill>
-                        <a:srgbClr val="C9D6D3"/>
-                      </a:solidFill>
-                      <a:prstDash val="solid"/>
-                      <a:round/>
-                      <a:headEnd type="none" w="med" len="med"/>
-                      <a:tailEnd type="none" w="med" len="med"/>
-                    </a:lnB>
-                    <a:solidFill>
-                      <a:srgbClr val="EAF1EF"/>
-                    </a:solidFill>
-                  </a:tcPr>
-                </a:tc>
-                <a:tc>
-                  <a:txBody>
-                    <a:bodyPr/>
-                    <a:lstStyle/>
-                    <a:p>
-                      <a:pPr algn="l" indent="0" marL="0">
-                        <a:buNone/>
-                      </a:pPr>
-                      <a:r>
-                        <a:rPr lang="en-US" sz="1300" dirty="0">
-                          <a:solidFill>
-                            <a:schemeClr val="tx1"/>
-                          </a:solidFill>
-                        </a:rPr>
-                        <a:t>−0,8</a:t>
-                      </a:r>
-                      <a:endParaRPr lang="en-US" sz="1300" dirty="0"/>
-                    </a:p>
-                  </a:txBody>
-                  <a:tcPr marL="63500" marR="63500" marT="38100" marB="38100" anchor="ctr">
-                    <a:lnL w="6350" cap="flat" cmpd="sng" algn="ctr">
-                      <a:solidFill>
-                        <a:srgbClr val="C9D6D3"/>
-                      </a:solidFill>
-                      <a:prstDash val="solid"/>
-                      <a:round/>
-                      <a:headEnd type="none" w="med" len="med"/>
-                      <a:tailEnd type="none" w="med" len="med"/>
-                    </a:lnL>
-                    <a:lnR w="6350" cap="flat" cmpd="sng" algn="ctr">
-                      <a:solidFill>
-                        <a:srgbClr val="C9D6D3"/>
-                      </a:solidFill>
-                      <a:prstDash val="solid"/>
-                      <a:round/>
-                      <a:headEnd type="none" w="med" len="med"/>
-                      <a:tailEnd type="none" w="med" len="med"/>
-                    </a:lnR>
-                    <a:lnT w="6350" cap="flat" cmpd="sng" algn="ctr">
-                      <a:solidFill>
-                        <a:srgbClr val="C9D6D3"/>
-                      </a:solidFill>
-                      <a:prstDash val="solid"/>
-                      <a:round/>
-                      <a:headEnd type="none" w="med" len="med"/>
-                      <a:tailEnd type="none" w="med" len="med"/>
-                    </a:lnT>
-                    <a:lnB w="6350" cap="flat" cmpd="sng" algn="ctr">
-                      <a:solidFill>
-                        <a:srgbClr val="C9D6D3"/>
-                      </a:solidFill>
-                      <a:prstDash val="solid"/>
-                      <a:round/>
-                      <a:headEnd type="none" w="med" len="med"/>
-                      <a:tailEnd type="none" w="med" len="med"/>
-                    </a:lnB>
-                    <a:solidFill>
-                      <a:srgbClr val="EAF1EF"/>
-                    </a:solidFill>
-                  </a:tcPr>
-                </a:tc>
-                <a:tc>
-                  <a:txBody>
-                    <a:bodyPr/>
-                    <a:lstStyle/>
-                    <a:p>
-                      <a:pPr algn="l" indent="0" marL="0">
-                        <a:buNone/>
-                      </a:pPr>
-                      <a:r>
-                        <a:rPr lang="en-US" sz="1300" dirty="0">
-                          <a:solidFill>
-                            <a:schemeClr val="tx1"/>
-                          </a:solidFill>
-                        </a:rPr>
-                        <a:t>−0,7</a:t>
-                      </a:r>
-                      <a:endParaRPr lang="en-US" sz="1300" dirty="0"/>
+                      <a:endParaRPr lang="en-US" sz="1200" dirty="0"/>
                     </a:p>
                   </a:txBody>
                   <a:tcPr marL="63500" marR="63500" marT="38100" marB="38100" anchor="ctr">

--- a/presentation/NBU_University_Challenge_2026.pptx
+++ b/presentation/NBU_University_Challenge_2026.pptx
@@ -140,13 +140,13 @@
   <p:extLst>
     <p:ext uri="{521415D9-36F7-43E2-AB2F-B90AF26B5E84}">
       <p14:sectionLst xmlns:p14="http://schemas.microsoft.com/office/powerpoint/2010/main">
-        <p14:section name="Вступ" id="{27858272-49fe-311f-7b52-e1297f1d4337}">
+        <p14:section name="Вступ" id="{13572c52-9942-476d-c42b-50b80fe868e3}">
           <p14:sldIdLst>
             <p14:sldId id="256"/>
             <p14:sldId id="257"/>
           </p14:sldIdLst>
         </p14:section>
-        <p14:section name="Огляд" id="{4afa9a03-6b9f-39b0-a034-c10dcbeef3aa}">
+        <p14:section name="Огляд" id="{0db517e7-777e-9dde-7880-56207ccf15ad}">
           <p14:sldIdLst>
             <p14:sldId id="258"/>
             <p14:sldId id="259"/>
@@ -157,7 +157,7 @@
             <p14:sldId id="264"/>
           </p14:sldIdLst>
         </p14:section>
-        <p14:section name="Прогноз" id="{4669b9f3-67e1-4770-ac30-b2be63cf071c}">
+        <p14:section name="Прогноз" id="{956c848c-d249-b600-7b99-f4d0248bf6b6}">
           <p14:sldIdLst>
             <p14:sldId id="265"/>
             <p14:sldId id="266"/>
@@ -172,7 +172,7 @@
             <p14:sldId id="275"/>
           </p14:sldIdLst>
         </p14:section>
-        <p14:section name="Рекомендації" id="{6edb2c27-02d2-fa46-08c4-ae517b8f0443}">
+        <p14:section name="Рекомендації" id="{ea4fe3bb-c4d8-4ba1-3ade-f183bf3e0670}">
           <p14:sldIdLst>
             <p14:sldId id="276"/>
             <p14:sldId id="277"/>
@@ -183,7 +183,7 @@
             <p14:sldId id="282"/>
           </p14:sldIdLst>
         </p14:section>
-        <p14:section name="Додатки" id="{432add66-7ecc-7cd9-5c05-701441fbff57}">
+        <p14:section name="Додатки" id="{de75bea0-f4aa-6405-fb6b-a1b891ac47a8}">
           <p14:sldIdLst>
             <p14:sldId id="283"/>
             <p14:sldId id="284"/>
@@ -1566,7 +1566,7 @@
           <a:p>
             <a:r>
               <a:rPr lang="en-US" dirty="0"/>
-              <a:t>Почнемо з головного. Ми пропонуємо три рішення, які працюють як єдиний пакет. Перше — підвищити облікову ставку на 0,5 пункта, до 16,5%, і утримувати її щонайменше до середини 2027 року. Інфляція знову прискорюється: у грудні вона сягне майже 10%, а ризики зміщені вгору. Друге — керована гнучкість курсу: дозволити гривні поступово послаблюватися до євро, приблизно на 4% у 2027 році, замість того щоб витрачати близько 5 мільярдів доларів резервів щомісяця. Третє — поставити на паузу наступні кроки валютної лібералізації, доки не відновляться резерви і ритм допомоги. За такої політики інфляція знизиться до 6,7% наприкінці 2027 року і повернеться до цілі 5% у третьому кварталі 2029 року — у межах трирічного горизонту політики НБУ. Далі — як ми дійшли до цих висновків.</a:t>
+              <a:t>Почнемо з головного. Ми пропонуємо три рішення, які працюють як єдиний пакет. Перше — підвищити облікову ставку на 0,5 пункта, до 16,5%, і утримувати її щонайменше до середини 2027 року. Інфляція знову прискорюється: у грудні вона сягне майже 10%, а ризики зміщені вгору. Друге — керована гнучкість курсу: допускати поступове послаблення гривні до євро, до 4% на рік, замість того щоб витрачати близько 5 мільярдів доларів резервів щомісяця; за вищої ставки фактичне послаблення буде помірним — близько 1% на рік. Третє — поставити на паузу наступні кроки валютної лібералізації, доки не відновляться резерви і ритм допомоги. За такої політики інфляція знизиться до 6,7% наприкінці 2027 року і повернеться до цілі 5% у третьому кварталі 2029 року — у межах трирічного горизонту політики НБУ. Далі — як ми дійшли до цих висновків.</a:t>
             </a:r>
             <a:endParaRPr lang="en-US" dirty="0"/>
           </a:p>
@@ -2006,7 +2006,7 @@
           <a:p>
             <a:r>
               <a:rPr lang="en-US" dirty="0"/>
-              <a:t>Друга рекомендація — щодо курсу. НБУ продає близько 5,0 мільярда доларів на місяць, а надходить близько 3,7. Якщо так триватиме, наприкінці року резерви становитимуть 43 мільярди — 3,6 місяця імпорту, а за затримки допомоги — 38 мільярдів. Тому ми пропонуємо керовану гнучкість: дозволити гривні поступово послаблюватися — приблизно на 4% до євро у 2027 році, — а інтервенції використовувати лише для згладжування коливань. Захищати певний рівень курсу — прямий шлях до втрати резервів.</a:t>
+              <a:t>Друга рекомендація — щодо курсу. НБУ продає близько 5,0 мільярда доларів на місяць, а надходить близько 3,7. Якщо так триватиме, наприкінці року резерви становитимуть 43 мільярди — 3,6 місяця імпорту, а за затримки допомоги — 38 мільярдів. Тому ми пропонуємо керовану гнучкість: допускати поступове послаблення гривні — до 4% на рік до євро, — а інтервенції використовувати лише для згладжування коливань. За ставки 16,5% модель показує фактичне послаблення лише близько 1% на рік: висока ставка підтримує гривню без витрачання резервів. Захищати певний рівень курсу — прямий шлях до втрати резервів.</a:t>
             </a:r>
             <a:endParaRPr lang="en-US" dirty="0"/>
           </a:p>
@@ -5631,7 +5631,148 @@
       </p:sp>
       <p:sp>
         <p:nvSpPr>
-          <p:cNvPr id="4" name="step1"/>
+          <p:cNvPr id="4" name="sources"/>
+          <p:cNvSpPr txBox="1"/>
+          <p:nvPr/>
+        </p:nvSpPr>
+        <p:spPr>
+          <a:xfrm>
+            <a:off x="4937760" y="6455664"/>
+            <a:ext cx="6110935" cy="292608"/>
+          </a:xfrm>
+          <a:prstGeom prst="rect">
+            <a:avLst/>
+          </a:prstGeom>
+          <a:noFill/>
+          <a:ln/>
+        </p:spPr>
+        <p:txBody>
+          <a:bodyPr wrap="square" lIns="0" tIns="0" rIns="0" bIns="0" rtlCol="0" anchor="ctr"/>
+          <a:lstStyle/>
+          <a:p>
+            <a:pPr indent="0" marL="0">
+              <a:buNone/>
+            </a:pPr>
+            <a:r>
+              <a:rPr lang="en-US" sz="900" dirty="0">
+                <a:solidFill>
+                  <a:srgbClr val="5F6B6D"/>
+                </a:solidFill>
+              </a:rPr>
+              <a:t>Джерела: </a:t>
+            </a:r>
+            <a:pPr indent="0" marL="0">
+              <a:buNone/>
+            </a:pPr>
+            <a:r>
+              <a:rPr lang="en-US" sz="900" u="sng" dirty="0">
+                <a:solidFill>
+                  <a:srgbClr val="5F6B6D"/>
+                </a:solidFill>
+                <a:hlinkClick r:id="rId1" invalidUrl="" action="" tgtFrame="" tooltip="https://events.bank.gov.ua/uchallenge2026/files/nbu_challenge_model_2026.zip" history="1" highlightClick="0" endSnd="0">
+                  <a:extLst>
+                    <a:ext uri="{A12FA001-AC4F-418D-AE19-62706E023703}">
+                      <ahyp:hlinkClr xmlns:ahyp="http://schemas.microsoft.com/office/drawing/2018/hyperlinkcolor" val="tx"/>
+                    </a:ext>
+                  </a:extLst>
+                </a:hlinkClick>
+              </a:rPr>
+              <a:t>модель-шаблон НБУ</a:t>
+            </a:r>
+            <a:pPr indent="0" marL="0">
+              <a:buNone/>
+            </a:pPr>
+            <a:r>
+              <a:rPr lang="en-US" sz="900" dirty="0">
+                <a:solidFill>
+                  <a:srgbClr val="5F6B6D"/>
+                </a:solidFill>
+              </a:rPr>
+              <a:t> · </a:t>
+            </a:r>
+            <a:pPr indent="0" marL="0">
+              <a:buNone/>
+            </a:pPr>
+            <a:r>
+              <a:rPr lang="en-US" sz="900" u="sng" dirty="0">
+                <a:solidFill>
+                  <a:srgbClr val="5F6B6D"/>
+                </a:solidFill>
+                <a:hlinkClick r:id="rId2" invalidUrl="" action="" tgtFrame="" tooltip="https://bank.gov.ua/ua/open-data/api-dev" history="1" highlightClick="0" endSnd="0">
+                  <a:extLst>
+                    <a:ext uri="{A12FA001-AC4F-418D-AE19-62706E023703}">
+                      <ahyp:hlinkClr xmlns:ahyp="http://schemas.microsoft.com/office/drawing/2018/hyperlinkcolor" val="tx"/>
+                    </a:ext>
+                  </a:extLst>
+                </a:hlinkClick>
+              </a:rPr>
+              <a:t>API НБУ</a:t>
+            </a:r>
+            <a:pPr indent="0" marL="0">
+              <a:buNone/>
+            </a:pPr>
+            <a:r>
+              <a:rPr lang="en-US" sz="900" dirty="0">
+                <a:solidFill>
+                  <a:srgbClr val="5F6B6D"/>
+                </a:solidFill>
+              </a:rPr>
+              <a:t> · </a:t>
+            </a:r>
+            <a:pPr indent="0" marL="0">
+              <a:buNone/>
+            </a:pPr>
+            <a:r>
+              <a:rPr lang="en-US" sz="900" u="sng" dirty="0">
+                <a:solidFill>
+                  <a:srgbClr val="5F6B6D"/>
+                </a:solidFill>
+                <a:hlinkClick r:id="rId3" invalidUrl="" action="" tgtFrame="" tooltip="https://data.ecb.europa.eu/" history="1" highlightClick="0" endSnd="0">
+                  <a:extLst>
+                    <a:ext uri="{A12FA001-AC4F-418D-AE19-62706E023703}">
+                      <ahyp:hlinkClr xmlns:ahyp="http://schemas.microsoft.com/office/drawing/2018/hyperlinkcolor" val="tx"/>
+                    </a:ext>
+                  </a:extLst>
+                </a:hlinkClick>
+              </a:rPr>
+              <a:t>ЄЦБ Data Portal</a:t>
+            </a:r>
+            <a:pPr indent="0" marL="0">
+              <a:buNone/>
+            </a:pPr>
+            <a:r>
+              <a:rPr lang="en-US" sz="900" dirty="0">
+                <a:solidFill>
+                  <a:srgbClr val="5F6B6D"/>
+                </a:solidFill>
+              </a:rPr>
+              <a:t> · </a:t>
+            </a:r>
+            <a:pPr indent="0" marL="0">
+              <a:buNone/>
+            </a:pPr>
+            <a:r>
+              <a:rPr lang="en-US" sz="900" u="sng" dirty="0">
+                <a:solidFill>
+                  <a:srgbClr val="5F6B6D"/>
+                </a:solidFill>
+                <a:hlinkClick r:id="rId4" invalidUrl="" action="" tgtFrame="" tooltip="https://ec.europa.eu/eurostat/databrowser/view/prc_hicp_minr/default/table" history="1" highlightClick="0" endSnd="0">
+                  <a:extLst>
+                    <a:ext uri="{A12FA001-AC4F-418D-AE19-62706E023703}">
+                      <ahyp:hlinkClr xmlns:ahyp="http://schemas.microsoft.com/office/drawing/2018/hyperlinkcolor" val="tx"/>
+                    </a:ext>
+                  </a:extLst>
+                </a:hlinkClick>
+              </a:rPr>
+              <a:t>Eurostat HICP</a:t>
+            </a:r>
+            <a:endParaRPr lang="en-US" sz="900" dirty="0"/>
+          </a:p>
+        </p:txBody>
+      </p:sp>
+      <p:sp>
+        <p:nvSpPr>
+          <p:cNvPr id="5" name="step1"/>
           <p:cNvSpPr/>
           <p:nvPr/>
         </p:nvSpPr>
@@ -5653,7 +5794,7 @@
       </p:sp>
       <p:sp>
         <p:nvSpPr>
-          <p:cNvPr id="5" name="Text 2"/>
+          <p:cNvPr id="6" name="Text 3"/>
           <p:cNvSpPr txBox="1"/>
           <p:nvPr/>
         </p:nvSpPr>
@@ -5692,7 +5833,7 @@
       </p:sp>
       <p:sp>
         <p:nvSpPr>
-          <p:cNvPr id="6" name="Text 3"/>
+          <p:cNvPr id="7" name="Text 4"/>
           <p:cNvSpPr txBox="1"/>
           <p:nvPr/>
         </p:nvSpPr>
@@ -5728,7 +5869,7 @@
       </p:sp>
       <p:sp>
         <p:nvSpPr>
-          <p:cNvPr id="7" name="arrow1"/>
+          <p:cNvPr id="8" name="arrow1"/>
           <p:cNvSpPr/>
           <p:nvPr/>
         </p:nvSpPr>
@@ -5748,7 +5889,7 @@
       </p:sp>
       <p:sp>
         <p:nvSpPr>
-          <p:cNvPr id="8" name="step2"/>
+          <p:cNvPr id="9" name="step2"/>
           <p:cNvSpPr/>
           <p:nvPr/>
         </p:nvSpPr>
@@ -5770,7 +5911,7 @@
       </p:sp>
       <p:sp>
         <p:nvSpPr>
-          <p:cNvPr id="9" name="Text 6"/>
+          <p:cNvPr id="10" name="Text 7"/>
           <p:cNvSpPr txBox="1"/>
           <p:nvPr/>
         </p:nvSpPr>
@@ -5809,7 +5950,7 @@
       </p:sp>
       <p:sp>
         <p:nvSpPr>
-          <p:cNvPr id="10" name="Text 7"/>
+          <p:cNvPr id="11" name="Text 8"/>
           <p:cNvSpPr txBox="1"/>
           <p:nvPr/>
         </p:nvSpPr>
@@ -5845,7 +5986,7 @@
       </p:sp>
       <p:sp>
         <p:nvSpPr>
-          <p:cNvPr id="11" name="arrow2"/>
+          <p:cNvPr id="12" name="arrow2"/>
           <p:cNvSpPr/>
           <p:nvPr/>
         </p:nvSpPr>
@@ -5865,7 +6006,7 @@
       </p:sp>
       <p:sp>
         <p:nvSpPr>
-          <p:cNvPr id="12" name="step3"/>
+          <p:cNvPr id="13" name="step3"/>
           <p:cNvSpPr/>
           <p:nvPr/>
         </p:nvSpPr>
@@ -5887,7 +6028,7 @@
       </p:sp>
       <p:sp>
         <p:nvSpPr>
-          <p:cNvPr id="13" name="Text 10"/>
+          <p:cNvPr id="14" name="Text 11"/>
           <p:cNvSpPr txBox="1"/>
           <p:nvPr/>
         </p:nvSpPr>
@@ -5926,7 +6067,7 @@
       </p:sp>
       <p:sp>
         <p:nvSpPr>
-          <p:cNvPr id="14" name="Text 11"/>
+          <p:cNvPr id="15" name="Text 12"/>
           <p:cNvSpPr txBox="1"/>
           <p:nvPr/>
         </p:nvSpPr>
@@ -5962,7 +6103,7 @@
       </p:sp>
       <p:sp>
         <p:nvSpPr>
-          <p:cNvPr id="15" name="arrow3"/>
+          <p:cNvPr id="16" name="arrow3"/>
           <p:cNvSpPr/>
           <p:nvPr/>
         </p:nvSpPr>
@@ -5982,7 +6123,7 @@
       </p:sp>
       <p:sp>
         <p:nvSpPr>
-          <p:cNvPr id="16" name="step4"/>
+          <p:cNvPr id="17" name="step4"/>
           <p:cNvSpPr/>
           <p:nvPr/>
         </p:nvSpPr>
@@ -6004,7 +6145,7 @@
       </p:sp>
       <p:sp>
         <p:nvSpPr>
-          <p:cNvPr id="17" name="Text 14"/>
+          <p:cNvPr id="18" name="Text 15"/>
           <p:cNvSpPr txBox="1"/>
           <p:nvPr/>
         </p:nvSpPr>
@@ -6043,7 +6184,7 @@
       </p:sp>
       <p:sp>
         <p:nvSpPr>
-          <p:cNvPr id="18" name="Text 15"/>
+          <p:cNvPr id="19" name="Text 16"/>
           <p:cNvSpPr txBox="1"/>
           <p:nvPr/>
         </p:nvSpPr>
@@ -6079,7 +6220,7 @@
       </p:sp>
       <p:sp>
         <p:nvSpPr>
-          <p:cNvPr id="19" name="Text 16"/>
+          <p:cNvPr id="20" name="Text 17"/>
           <p:cNvSpPr txBox="1"/>
           <p:nvPr/>
         </p:nvSpPr>
@@ -6118,7 +6259,7 @@
       </p:sp>
       <p:sp>
         <p:nvSpPr>
-          <p:cNvPr id="20" name="Text 17"/>
+          <p:cNvPr id="21" name="Text 18"/>
           <p:cNvSpPr txBox="1"/>
           <p:nvPr/>
         </p:nvSpPr>
@@ -6154,7 +6295,7 @@
       </p:sp>
       <p:sp>
         <p:nvSpPr>
-          <p:cNvPr id="21" name="Text 18"/>
+          <p:cNvPr id="22" name="Text 19"/>
           <p:cNvSpPr txBox="1"/>
           <p:nvPr/>
         </p:nvSpPr>
@@ -6193,7 +6334,7 @@
       </p:sp>
       <p:sp>
         <p:nvSpPr>
-          <p:cNvPr id="22" name="Text 19"/>
+          <p:cNvPr id="23" name="Text 20"/>
           <p:cNvSpPr txBox="1"/>
           <p:nvPr/>
         </p:nvSpPr>
@@ -6229,7 +6370,7 @@
       </p:sp>
       <p:sp>
         <p:nvSpPr>
-          <p:cNvPr id="23" name="Text 20"/>
+          <p:cNvPr id="24" name="Text 21"/>
           <p:cNvSpPr txBox="1"/>
           <p:nvPr/>
         </p:nvSpPr>
@@ -6268,7 +6409,7 @@
       </p:sp>
       <p:sp>
         <p:nvSpPr>
-          <p:cNvPr id="24" name="Text 21"/>
+          <p:cNvPr id="25" name="Text 22"/>
           <p:cNvSpPr txBox="1"/>
           <p:nvPr/>
         </p:nvSpPr>
@@ -6304,7 +6445,7 @@
       </p:sp>
       <p:sp>
         <p:nvSpPr>
-          <p:cNvPr id="25" name="Text 22"/>
+          <p:cNvPr id="26" name="Text 23"/>
           <p:cNvSpPr txBox="1"/>
           <p:nvPr/>
         </p:nvSpPr>
@@ -6340,7 +6481,7 @@
       </p:sp>
       <p:sp>
         <p:nvSpPr>
-          <p:cNvPr id="26" name="chip1"/>
+          <p:cNvPr id="27" name="chip1"/>
           <p:cNvSpPr/>
           <p:nvPr/>
         </p:nvSpPr>
@@ -6367,7 +6508,7 @@
       </p:sp>
       <p:sp>
         <p:nvSpPr>
-          <p:cNvPr id="27" name="Text 24"/>
+          <p:cNvPr id="28" name="Text 25"/>
           <p:cNvSpPr txBox="1"/>
           <p:nvPr/>
         </p:nvSpPr>
@@ -6403,7 +6544,7 @@
       </p:sp>
       <p:sp>
         <p:nvSpPr>
-          <p:cNvPr id="28" name="chip2"/>
+          <p:cNvPr id="29" name="chip2"/>
           <p:cNvSpPr/>
           <p:nvPr/>
         </p:nvSpPr>
@@ -6430,7 +6571,7 @@
       </p:sp>
       <p:sp>
         <p:nvSpPr>
-          <p:cNvPr id="29" name="Text 26"/>
+          <p:cNvPr id="30" name="Text 27"/>
           <p:cNvSpPr txBox="1"/>
           <p:nvPr/>
         </p:nvSpPr>
@@ -6466,7 +6607,7 @@
       </p:sp>
       <p:sp>
         <p:nvSpPr>
-          <p:cNvPr id="30" name="chip3"/>
+          <p:cNvPr id="31" name="chip3"/>
           <p:cNvSpPr/>
           <p:nvPr/>
         </p:nvSpPr>
@@ -6493,7 +6634,7 @@
       </p:sp>
       <p:sp>
         <p:nvSpPr>
-          <p:cNvPr id="31" name="Text 28"/>
+          <p:cNvPr id="32" name="Text 29"/>
           <p:cNvSpPr txBox="1"/>
           <p:nvPr/>
         </p:nvSpPr>
@@ -6529,7 +6670,7 @@
       </p:sp>
       <p:sp>
         <p:nvSpPr>
-          <p:cNvPr id="32" name="chip4"/>
+          <p:cNvPr id="33" name="chip4"/>
           <p:cNvSpPr/>
           <p:nvPr/>
         </p:nvSpPr>
@@ -6556,7 +6697,7 @@
       </p:sp>
       <p:sp>
         <p:nvSpPr>
-          <p:cNvPr id="33" name="Text 30"/>
+          <p:cNvPr id="34" name="Text 31"/>
           <p:cNvSpPr txBox="1"/>
           <p:nvPr/>
         </p:nvSpPr>
@@ -6592,7 +6733,7 @@
       </p:sp>
       <p:sp>
         <p:nvSpPr>
-          <p:cNvPr id="34" name="chip5"/>
+          <p:cNvPr id="35" name="chip5"/>
           <p:cNvSpPr/>
           <p:nvPr/>
         </p:nvSpPr>
@@ -6619,7 +6760,7 @@
       </p:sp>
       <p:sp>
         <p:nvSpPr>
-          <p:cNvPr id="35" name="Text 32"/>
+          <p:cNvPr id="36" name="Text 33"/>
           <p:cNvSpPr txBox="1"/>
           <p:nvPr/>
         </p:nvSpPr>
@@ -6655,7 +6796,7 @@
       </p:sp>
       <p:sp>
         <p:nvSpPr>
-          <p:cNvPr id="36" name="chip6"/>
+          <p:cNvPr id="37" name="chip6"/>
           <p:cNvSpPr/>
           <p:nvPr/>
         </p:nvSpPr>
@@ -6682,7 +6823,7 @@
       </p:sp>
       <p:sp>
         <p:nvSpPr>
-          <p:cNvPr id="37" name="Text 34"/>
+          <p:cNvPr id="38" name="Text 35"/>
           <p:cNvSpPr txBox="1"/>
           <p:nvPr/>
         </p:nvSpPr>
@@ -6718,7 +6859,7 @@
       </p:sp>
       <p:sp>
         <p:nvSpPr>
-          <p:cNvPr id="38" name="chip7"/>
+          <p:cNvPr id="39" name="chip7"/>
           <p:cNvSpPr/>
           <p:nvPr/>
         </p:nvSpPr>
@@ -6745,7 +6886,7 @@
       </p:sp>
       <p:sp>
         <p:nvSpPr>
-          <p:cNvPr id="39" name="Text 36"/>
+          <p:cNvPr id="40" name="Text 37"/>
           <p:cNvSpPr txBox="1"/>
           <p:nvPr/>
         </p:nvSpPr>
@@ -6781,7 +6922,7 @@
       </p:sp>
       <p:sp>
         <p:nvSpPr>
-          <p:cNvPr id="40" name="chip8"/>
+          <p:cNvPr id="41" name="chip8"/>
           <p:cNvSpPr/>
           <p:nvPr/>
         </p:nvSpPr>
@@ -6808,7 +6949,7 @@
       </p:sp>
       <p:sp>
         <p:nvSpPr>
-          <p:cNvPr id="41" name="Text 38"/>
+          <p:cNvPr id="42" name="Text 39"/>
           <p:cNvSpPr txBox="1"/>
           <p:nvPr/>
         </p:nvSpPr>
@@ -6844,7 +6985,7 @@
       </p:sp>
       <p:sp>
         <p:nvSpPr>
-          <p:cNvPr id="42" name="chip9"/>
+          <p:cNvPr id="43" name="chip9"/>
           <p:cNvSpPr/>
           <p:nvPr/>
         </p:nvSpPr>
@@ -6871,7 +7012,7 @@
       </p:sp>
       <p:sp>
         <p:nvSpPr>
-          <p:cNvPr id="43" name="Text 40"/>
+          <p:cNvPr id="44" name="Text 41"/>
           <p:cNvSpPr txBox="1"/>
           <p:nvPr/>
         </p:nvSpPr>
@@ -7019,16 +7160,128 @@
           </a:p>
         </p:txBody>
       </p:sp>
+      <p:sp>
+        <p:nvSpPr>
+          <p:cNvPr id="4" name="sources"/>
+          <p:cNvSpPr txBox="1"/>
+          <p:nvPr/>
+        </p:nvSpPr>
+        <p:spPr>
+          <a:xfrm>
+            <a:off x="4937760" y="6455664"/>
+            <a:ext cx="6110935" cy="292608"/>
+          </a:xfrm>
+          <a:prstGeom prst="rect">
+            <a:avLst/>
+          </a:prstGeom>
+          <a:noFill/>
+          <a:ln/>
+        </p:spPr>
+        <p:txBody>
+          <a:bodyPr wrap="square" lIns="0" tIns="0" rIns="0" bIns="0" rtlCol="0" anchor="ctr"/>
+          <a:lstStyle/>
+          <a:p>
+            <a:pPr indent="0" marL="0">
+              <a:buNone/>
+            </a:pPr>
+            <a:r>
+              <a:rPr lang="en-US" sz="900" dirty="0">
+                <a:solidFill>
+                  <a:srgbClr val="5F6B6D"/>
+                </a:solidFill>
+              </a:rPr>
+              <a:t>Джерела: </a:t>
+            </a:r>
+            <a:pPr indent="0" marL="0">
+              <a:buNone/>
+            </a:pPr>
+            <a:r>
+              <a:rPr lang="en-US" sz="900" u="sng" dirty="0">
+                <a:solidFill>
+                  <a:srgbClr val="5F6B6D"/>
+                </a:solidFill>
+                <a:hlinkClick r:id="rId1" invalidUrl="" action="" tgtFrame="" tooltip="https://bank.gov.ua/files/macro/CCPI_m.xlsx" history="1" highlightClick="0" endSnd="0">
+                  <a:extLst>
+                    <a:ext uri="{A12FA001-AC4F-418D-AE19-62706E023703}">
+                      <ahyp:hlinkClr xmlns:ahyp="http://schemas.microsoft.com/office/drawing/2018/hyperlinkcolor" val="tx"/>
+                    </a:ext>
+                  </a:extLst>
+                </a:hlinkClick>
+              </a:rPr>
+              <a:t>базовий ІСЦ (НБУ)</a:t>
+            </a:r>
+            <a:pPr indent="0" marL="0">
+              <a:buNone/>
+            </a:pPr>
+            <a:r>
+              <a:rPr lang="en-US" sz="900" dirty="0">
+                <a:solidFill>
+                  <a:srgbClr val="5F6B6D"/>
+                </a:solidFill>
+              </a:rPr>
+              <a:t> · </a:t>
+            </a:r>
+            <a:pPr indent="0" marL="0">
+              <a:buNone/>
+            </a:pPr>
+            <a:r>
+              <a:rPr lang="en-US" sz="900" u="sng" dirty="0">
+                <a:solidFill>
+                  <a:srgbClr val="5F6B6D"/>
+                </a:solidFill>
+                <a:hlinkClick r:id="rId2" invalidUrl="" action="" tgtFrame="" tooltip="https://db.nomics.world/EIA/PET/RBRTE.M" history="1" highlightClick="0" endSnd="0">
+                  <a:extLst>
+                    <a:ext uri="{A12FA001-AC4F-418D-AE19-62706E023703}">
+                      <ahyp:hlinkClr xmlns:ahyp="http://schemas.microsoft.com/office/drawing/2018/hyperlinkcolor" val="tx"/>
+                    </a:ext>
+                  </a:extLst>
+                </a:hlinkClick>
+              </a:rPr>
+              <a:t>EIA Brent</a:t>
+            </a:r>
+            <a:pPr indent="0" marL="0">
+              <a:buNone/>
+            </a:pPr>
+            <a:r>
+              <a:rPr lang="en-US" sz="900" dirty="0">
+                <a:solidFill>
+                  <a:srgbClr val="5F6B6D"/>
+                </a:solidFill>
+              </a:rPr>
+              <a:t> · </a:t>
+            </a:r>
+            <a:pPr indent="0" marL="0">
+              <a:buNone/>
+            </a:pPr>
+            <a:r>
+              <a:rPr lang="en-US" sz="900" u="sng" dirty="0">
+                <a:solidFill>
+                  <a:srgbClr val="5F6B6D"/>
+                </a:solidFill>
+                <a:hlinkClick r:id="rId3" invalidUrl="" action="" tgtFrame="" tooltip="https://finance.yahoo.com/quote/BZ%3DF/" history="1" highlightClick="0" endSnd="0">
+                  <a:extLst>
+                    <a:ext uri="{A12FA001-AC4F-418D-AE19-62706E023703}">
+                      <ahyp:hlinkClr xmlns:ahyp="http://schemas.microsoft.com/office/drawing/2018/hyperlinkcolor" val="tx"/>
+                    </a:ext>
+                  </a:extLst>
+                </a:hlinkClick>
+              </a:rPr>
+              <a:t>ф'ючерси Brent</a:t>
+            </a:r>
+            <a:endParaRPr lang="en-US" sz="900" dirty="0"/>
+          </a:p>
+        </p:txBody>
+      </p:sp>
       <p:pic>
         <p:nvPicPr>
-          <p:cNvPr id="4" name="chart" descr="C:\Users\Lenovo\Documents\GitHub\nbu-challenge-2026\results\figures\ml_irf_oil.png">    </p:cNvPr>
+          <p:cNvPr id="5" name="chart" descr="C:\Users\Lenovo\Documents\GitHub\nbu-challenge-2026\results\figures\ml_irf_oil.png">    </p:cNvPr>
           <p:cNvPicPr>
             <a:picLocks noChangeAspect="1"/>
           </p:cNvPicPr>
           <p:nvPr/>
         </p:nvPicPr>
         <p:blipFill>
-          <a:blip r:embed="rId1"/>
+          <a:blip r:embed="rId4"/>
           <a:stretch>
             <a:fillRect/>
           </a:stretch>
@@ -7045,7 +7298,7 @@
       </p:pic>
       <p:sp>
         <p:nvSpPr>
-          <p:cNvPr id="5" name="num1"/>
+          <p:cNvPr id="6" name="num1"/>
           <p:cNvSpPr/>
           <p:nvPr/>
         </p:nvSpPr>
@@ -7065,7 +7318,7 @@
       </p:sp>
       <p:sp>
         <p:nvSpPr>
-          <p:cNvPr id="6" name="Text 2"/>
+          <p:cNvPr id="7" name="Text 3"/>
           <p:cNvSpPr txBox="1"/>
           <p:nvPr/>
         </p:nvSpPr>
@@ -7101,7 +7354,7 @@
       </p:sp>
       <p:sp>
         <p:nvSpPr>
-          <p:cNvPr id="7" name="point1"/>
+          <p:cNvPr id="8" name="point1"/>
           <p:cNvSpPr txBox="1"/>
           <p:nvPr/>
         </p:nvSpPr>
@@ -7137,7 +7390,7 @@
       </p:sp>
       <p:sp>
         <p:nvSpPr>
-          <p:cNvPr id="8" name="num2"/>
+          <p:cNvPr id="9" name="num2"/>
           <p:cNvSpPr/>
           <p:nvPr/>
         </p:nvSpPr>
@@ -7157,7 +7410,7 @@
       </p:sp>
       <p:sp>
         <p:nvSpPr>
-          <p:cNvPr id="9" name="Text 5"/>
+          <p:cNvPr id="10" name="Text 6"/>
           <p:cNvSpPr txBox="1"/>
           <p:nvPr/>
         </p:nvSpPr>
@@ -7193,7 +7446,7 @@
       </p:sp>
       <p:sp>
         <p:nvSpPr>
-          <p:cNvPr id="10" name="point2"/>
+          <p:cNvPr id="11" name="point2"/>
           <p:cNvSpPr txBox="1"/>
           <p:nvPr/>
         </p:nvSpPr>
@@ -7229,7 +7482,7 @@
       </p:sp>
       <p:sp>
         <p:nvSpPr>
-          <p:cNvPr id="11" name="num3"/>
+          <p:cNvPr id="12" name="num3"/>
           <p:cNvSpPr/>
           <p:nvPr/>
         </p:nvSpPr>
@@ -7249,7 +7502,7 @@
       </p:sp>
       <p:sp>
         <p:nvSpPr>
-          <p:cNvPr id="12" name="Text 8"/>
+          <p:cNvPr id="13" name="Text 9"/>
           <p:cNvSpPr txBox="1"/>
           <p:nvPr/>
         </p:nvSpPr>
@@ -7285,7 +7538,7 @@
       </p:sp>
       <p:sp>
         <p:nvSpPr>
-          <p:cNvPr id="13" name="point3"/>
+          <p:cNvPr id="14" name="point3"/>
           <p:cNvSpPr txBox="1"/>
           <p:nvPr/>
         </p:nvSpPr>
@@ -7430,6 +7683,118 @@
               <a:t>Припущення та судження базового сценарію — кожне з джерелом</a:t>
             </a:r>
             <a:endParaRPr lang="en-US" sz="2600" dirty="0"/>
+          </a:p>
+        </p:txBody>
+      </p:sp>
+      <p:sp>
+        <p:nvSpPr>
+          <p:cNvPr id="4" name="sources"/>
+          <p:cNvSpPr txBox="1"/>
+          <p:nvPr/>
+        </p:nvSpPr>
+        <p:spPr>
+          <a:xfrm>
+            <a:off x="4937760" y="6455664"/>
+            <a:ext cx="6110935" cy="292608"/>
+          </a:xfrm>
+          <a:prstGeom prst="rect">
+            <a:avLst/>
+          </a:prstGeom>
+          <a:noFill/>
+          <a:ln/>
+        </p:spPr>
+        <p:txBody>
+          <a:bodyPr wrap="square" lIns="0" tIns="0" rIns="0" bIns="0" rtlCol="0" anchor="ctr"/>
+          <a:lstStyle/>
+          <a:p>
+            <a:pPr indent="0" marL="0">
+              <a:buNone/>
+            </a:pPr>
+            <a:r>
+              <a:rPr lang="en-US" sz="900" dirty="0">
+                <a:solidFill>
+                  <a:srgbClr val="5F6B6D"/>
+                </a:solidFill>
+              </a:rPr>
+              <a:t>Джерела: </a:t>
+            </a:r>
+            <a:pPr indent="0" marL="0">
+              <a:buNone/>
+            </a:pPr>
+            <a:r>
+              <a:rPr lang="en-US" sz="900" u="sng" dirty="0">
+                <a:solidFill>
+                  <a:srgbClr val="5F6B6D"/>
+                </a:solidFill>
+                <a:hlinkClick r:id="rId1" invalidUrl="" action="" tgtFrame="" tooltip="https://bank.gov.ua/ua/news/all/inflyatsiya-prishvidshitsya-u-drugomu-pivrichchi-ale-povernetsya-do-znijennya-nastupnogo-roku--inflyatsiyniy-zvit" history="1" highlightClick="0" endSnd="0">
+                  <a:extLst>
+                    <a:ext uri="{A12FA001-AC4F-418D-AE19-62706E023703}">
+                      <ahyp:hlinkClr xmlns:ahyp="http://schemas.microsoft.com/office/drawing/2018/hyperlinkcolor" val="tx"/>
+                    </a:ext>
+                  </a:extLst>
+                </a:hlinkClick>
+              </a:rPr>
+              <a:t>НБУ, Інфляційний звіт (липень 2026)</a:t>
+            </a:r>
+            <a:pPr indent="0" marL="0">
+              <a:buNone/>
+            </a:pPr>
+            <a:r>
+              <a:rPr lang="en-US" sz="900" dirty="0">
+                <a:solidFill>
+                  <a:srgbClr val="5F6B6D"/>
+                </a:solidFill>
+              </a:rPr>
+              <a:t> · </a:t>
+            </a:r>
+            <a:pPr indent="0" marL="0">
+              <a:buNone/>
+            </a:pPr>
+            <a:r>
+              <a:rPr lang="en-US" sz="900" u="sng" dirty="0">
+                <a:solidFill>
+                  <a:srgbClr val="5F6B6D"/>
+                </a:solidFill>
+                <a:hlinkClick r:id="rId2" invalidUrl="" action="" tgtFrame="" tooltip="https://bank.gov.ua/admin_uploads/article/Macroeconomic_Forecast_table_2026_07.xlsx?v=19" history="1" highlightClick="0" endSnd="0">
+                  <a:extLst>
+                    <a:ext uri="{A12FA001-AC4F-418D-AE19-62706E023703}">
+                      <ahyp:hlinkClr xmlns:ahyp="http://schemas.microsoft.com/office/drawing/2018/hyperlinkcolor" val="tx"/>
+                    </a:ext>
+                  </a:extLst>
+                </a:hlinkClick>
+              </a:rPr>
+              <a:t>макропрогноз НБУ</a:t>
+            </a:r>
+            <a:pPr indent="0" marL="0">
+              <a:buNone/>
+            </a:pPr>
+            <a:r>
+              <a:rPr lang="en-US" sz="900" dirty="0">
+                <a:solidFill>
+                  <a:srgbClr val="5F6B6D"/>
+                </a:solidFill>
+              </a:rPr>
+              <a:t> · </a:t>
+            </a:r>
+            <a:pPr indent="0" marL="0">
+              <a:buNone/>
+            </a:pPr>
+            <a:r>
+              <a:rPr lang="en-US" sz="900" u="sng" dirty="0">
+                <a:solidFill>
+                  <a:srgbClr val="5F6B6D"/>
+                </a:solidFill>
+                <a:hlinkClick r:id="rId3" invalidUrl="" action="" tgtFrame="" tooltip="https://bank.gov.ua/ua/news/all/pidsumki-diskusiyi-chleniv-komitetu-z-monetarnoyi-politiki-natsionalnogo-banku-schodo-rivnya-oblikovoyi-stavki-16-veresnya-2026-roku" history="1" highlightClick="0" endSnd="0">
+                  <a:extLst>
+                    <a:ext uri="{A12FA001-AC4F-418D-AE19-62706E023703}">
+                      <ahyp:hlinkClr xmlns:ahyp="http://schemas.microsoft.com/office/drawing/2018/hyperlinkcolor" val="tx"/>
+                    </a:ext>
+                  </a:extLst>
+                </a:hlinkClick>
+              </a:rPr>
+              <a:t>підсумки дискусії КМП</a:t>
+            </a:r>
+            <a:endParaRPr lang="en-US" sz="900" dirty="0"/>
           </a:p>
         </p:txBody>
       </p:sp>
@@ -7777,12 +8142,10 @@
                         <a:buNone/>
                       </a:pPr>
                       <a:r>
-                        <a:rPr lang="en-US" sz="1200" dirty="0">
-                          <a:solidFill>
-                            <a:schemeClr val="tx1"/>
-                          </a:solidFill>
+                        <a:rPr lang="en-US" sz="1200" u="sng" dirty="0">
+                          <a:hlinkClick r:id="rId4" invalidUrl="" action="" tgtFrame="" tooltip="https://bank.gov.ua/ua/open-data/api-dev" history="1" highlightClick="0" endSnd="0"/>
                         </a:rPr>
-                        <a:t>Держстат, НБУ</a:t>
+                        <a:t>Держстат, API НБУ</a:t>
                       </a:r>
                       <a:endParaRPr lang="en-US" sz="1200" dirty="0"/>
                     </a:p>
@@ -7962,10 +8325,8 @@
                         <a:buNone/>
                       </a:pPr>
                       <a:r>
-                        <a:rPr lang="en-US" sz="1200" dirty="0">
-                          <a:solidFill>
-                            <a:schemeClr val="tx1"/>
-                          </a:solidFill>
+                        <a:rPr lang="en-US" sz="1200" u="sng" dirty="0">
+                          <a:hlinkClick r:id="rId5" invalidUrl="" action="" tgtFrame="" tooltip="https://bank.gov.ua/ua/news/all/pidsumki-diskusiyi-chleniv-komitetu-z-monetarnoyi-politiki-natsionalnogo-banku-schodo-rivnya-oblikovoyi-stavki-16-veresnya-2026-roku" history="1" highlightClick="0" endSnd="0"/>
                         </a:rPr>
                         <a:t>Підсумки КМП 28.09</a:t>
                       </a:r>
@@ -8147,10 +8508,8 @@
                         <a:buNone/>
                       </a:pPr>
                       <a:r>
-                        <a:rPr lang="en-US" sz="1200" dirty="0">
-                          <a:solidFill>
-                            <a:schemeClr val="tx1"/>
-                          </a:solidFill>
+                        <a:rPr lang="en-US" sz="1200" u="sng" dirty="0">
+                          <a:hlinkClick r:id="rId6" invalidUrl="" action="" tgtFrame="" tooltip="https://bank.gov.ua/ua/news/all/pidsumki-diskusiyi-chleniv-komitetu-z-monetarnoyi-politiki-natsionalnogo-banku-schodo-rivnya-oblikovoyi-stavki-16-veresnya-2026-roku" history="1" highlightClick="0" endSnd="0"/>
                         </a:rPr>
                         <a:t>Підсумки дискусії КМП, 28.09.2026</a:t>
                       </a:r>
@@ -8332,12 +8691,10 @@
                         <a:buNone/>
                       </a:pPr>
                       <a:r>
-                        <a:rPr lang="en-US" sz="1200" dirty="0">
-                          <a:solidFill>
-                            <a:schemeClr val="tx1"/>
-                          </a:solidFill>
+                        <a:rPr lang="en-US" sz="1200" u="sng" dirty="0">
+                          <a:hlinkClick r:id="rId7" invalidUrl="" action="" tgtFrame="" tooltip="https://bank.gov.ua/admin_uploads/article/Macroeconomic_Forecast_table_2026_07.xlsx?v=19" history="1" highlightClick="0" endSnd="0"/>
                         </a:rPr>
-                        <a:t>НБУ, макропрогноз липень 2026 (адмінціни +14,0% / +11,3%)</a:t>
+                        <a:t>НБУ, макропрогноз липень 2026</a:t>
                       </a:r>
                       <a:endParaRPr lang="en-US" sz="1200" dirty="0"/>
                     </a:p>
@@ -8517,10 +8874,8 @@
                         <a:buNone/>
                       </a:pPr>
                       <a:r>
-                        <a:rPr lang="en-US" sz="1200" dirty="0">
-                          <a:solidFill>
-                            <a:schemeClr val="tx1"/>
-                          </a:solidFill>
+                        <a:rPr lang="en-US" sz="1200" u="sng" dirty="0">
+                          <a:hlinkClick r:id="rId8" invalidUrl="" action="" tgtFrame="" tooltip="https://bank.gov.ua/ua/news/all/inflyatsiya-prishvidshitsya-u-drugomu-pivrichchi-ale-povernetsya-do-znijennya-nastupnogo-roku--inflyatsiyniy-zvit" history="1" highlightClick="0" endSnd="0"/>
                         </a:rPr>
                         <a:t>НБУ, Інфляційний звіт і макропрогноз, липень 2026</a:t>
                       </a:r>
@@ -8702,10 +9057,8 @@
                         <a:buNone/>
                       </a:pPr>
                       <a:r>
-                        <a:rPr lang="en-US" sz="1200" dirty="0">
-                          <a:solidFill>
-                            <a:schemeClr val="tx1"/>
-                          </a:solidFill>
+                        <a:rPr lang="en-US" sz="1200" u="sng" dirty="0">
+                          <a:hlinkClick r:id="rId9" invalidUrl="" action="" tgtFrame="" tooltip="https://bank.gov.ua/ua/news/all/natsionalniy-bank-ukrayini-pidvischiv-oblikovu-stavku-do-16" history="1" highlightClick="0" endSnd="0"/>
                         </a:rPr>
                         <a:t>Рішення НБУ 17.09.2026</a:t>
                       </a:r>
@@ -8887,10 +9240,8 @@
                         <a:buNone/>
                       </a:pPr>
                       <a:r>
-                        <a:rPr lang="en-US" sz="1200" dirty="0">
-                          <a:solidFill>
-                            <a:schemeClr val="tx1"/>
-                          </a:solidFill>
+                        <a:rPr lang="en-US" sz="1200" u="sng" dirty="0">
+                          <a:hlinkClick r:id="rId10" invalidUrl="" action="" tgtFrame="" tooltip="https://bank.gov.ua/admin_uploads/article/Macroeconomic_Forecast_table_2026_07.xlsx?v=19" history="1" highlightClick="0" endSnd="0"/>
                         </a:rPr>
                         <a:t>НБУ, припущення макропрогнозу, липень 2026</a:t>
                       </a:r>
@@ -9016,7 +9367,7 @@
                             <a:schemeClr val="tx1"/>
                           </a:solidFill>
                         </a:rPr>
-                        <a:t>Поступове послаблення ≈4% (2027) і 3% (2028): EUR/USD за НБУ + керована гнучкість</a:t>
+                        <a:t>Допустиме послаблення (цільовий темп): 4% у 2027, 3% у 2028; фактичний курс — з моделі (≈1% на рік)</a:t>
                       </a:r>
                       <a:endParaRPr lang="en-US" sz="1200" dirty="0"/>
                     </a:p>
@@ -9072,12 +9423,10 @@
                         <a:buNone/>
                       </a:pPr>
                       <a:r>
-                        <a:rPr lang="en-US" sz="1200" dirty="0">
-                          <a:solidFill>
-                            <a:schemeClr val="tx1"/>
-                          </a:solidFill>
+                        <a:rPr lang="en-US" sz="1200" u="sng" dirty="0">
+                          <a:hlinkClick r:id="rId11" invalidUrl="" action="" tgtFrame="" tooltip="https://bank.gov.ua/admin_uploads/article/Macroeconomic_Forecast_table_2026_07.xlsx?v=19" history="1" highlightClick="0" endSnd="0"/>
                         </a:rPr>
-                        <a:t>Припущення НБУ</a:t>
+                        <a:t>Макропрогноз НБУ (EUR/USD)</a:t>
                       </a:r>
                       <a:endParaRPr lang="en-US" sz="1200" dirty="0"/>
                     </a:p>
@@ -9257,12 +9606,30 @@
                         <a:buNone/>
                       </a:pPr>
                       <a:r>
+                        <a:rPr lang="en-US" sz="1200" u="sng" dirty="0">
+                          <a:hlinkClick r:id="rId12" invalidUrl="" action="" tgtFrame="" tooltip="https://db.nomics.world/EIA/PET/RBRTE.M" history="1" highlightClick="0" endSnd="0"/>
+                        </a:rPr>
+                        <a:t>EIA Brent</a:t>
+                      </a:r>
+                      <a:pPr algn="l" indent="0" marL="0">
+                        <a:buNone/>
+                      </a:pPr>
+                      <a:r>
                         <a:rPr lang="en-US" sz="1200" dirty="0">
                           <a:solidFill>
                             <a:schemeClr val="tx1"/>
                           </a:solidFill>
                         </a:rPr>
-                        <a:t>EIA, NYMEX</a:t>
+                        <a:t>, </a:t>
+                      </a:r>
+                      <a:pPr algn="l" indent="0" marL="0">
+                        <a:buNone/>
+                      </a:pPr>
+                      <a:r>
+                        <a:rPr lang="en-US" sz="1200" u="sng" dirty="0">
+                          <a:hlinkClick r:id="rId13" invalidUrl="" action="" tgtFrame="" tooltip="https://finance.yahoo.com/quote/BZ%3DF/" history="1" highlightClick="0" endSnd="0"/>
+                        </a:rPr>
+                        <a:t>NYMEX</a:t>
                       </a:r>
                       <a:endParaRPr lang="en-US" sz="1200" dirty="0"/>
                     </a:p>
@@ -9442,10 +9809,8 @@
                         <a:buNone/>
                       </a:pPr>
                       <a:r>
-                        <a:rPr lang="en-US" sz="1200" dirty="0">
-                          <a:solidFill>
-                            <a:schemeClr val="tx1"/>
-                          </a:solidFill>
+                        <a:rPr lang="en-US" sz="1200" u="sng" dirty="0">
+                          <a:hlinkClick r:id="rId14" invalidUrl="" action="" tgtFrame="" tooltip="https://www.ecb.europa.eu/press/projections/html/index.en.html" history="1" highlightClick="0" endSnd="0"/>
                         </a:rPr>
                         <a:t>ЄЦБ, вер. 2026</a:t>
                       </a:r>
@@ -9613,16 +9978,99 @@
           </a:p>
         </p:txBody>
       </p:sp>
+      <p:sp>
+        <p:nvSpPr>
+          <p:cNvPr id="4" name="sources"/>
+          <p:cNvSpPr txBox="1"/>
+          <p:nvPr/>
+        </p:nvSpPr>
+        <p:spPr>
+          <a:xfrm>
+            <a:off x="4937760" y="6455664"/>
+            <a:ext cx="6110935" cy="292608"/>
+          </a:xfrm>
+          <a:prstGeom prst="rect">
+            <a:avLst/>
+          </a:prstGeom>
+          <a:noFill/>
+          <a:ln/>
+        </p:spPr>
+        <p:txBody>
+          <a:bodyPr wrap="square" lIns="0" tIns="0" rIns="0" bIns="0" rtlCol="0" anchor="ctr"/>
+          <a:lstStyle/>
+          <a:p>
+            <a:pPr indent="0" marL="0">
+              <a:buNone/>
+            </a:pPr>
+            <a:r>
+              <a:rPr lang="en-US" sz="900" dirty="0">
+                <a:solidFill>
+                  <a:srgbClr val="5F6B6D"/>
+                </a:solidFill>
+              </a:rPr>
+              <a:t>Джерела: </a:t>
+            </a:r>
+            <a:pPr indent="0" marL="0">
+              <a:buNone/>
+            </a:pPr>
+            <a:r>
+              <a:rPr lang="en-US" sz="900" u="sng" dirty="0">
+                <a:solidFill>
+                  <a:srgbClr val="5F6B6D"/>
+                </a:solidFill>
+                <a:hlinkClick r:id="rId1" invalidUrl="" action="" tgtFrame="" tooltip="https://bank.gov.ua/ua/open-data/api-dev" history="1" highlightClick="0" endSnd="0">
+                  <a:extLst>
+                    <a:ext uri="{A12FA001-AC4F-418D-AE19-62706E023703}">
+                      <ahyp:hlinkClr xmlns:ahyp="http://schemas.microsoft.com/office/drawing/2018/hyperlinkcolor" val="tx"/>
+                    </a:ext>
+                  </a:extLst>
+                </a:hlinkClick>
+              </a:rPr>
+              <a:t>API НБУ</a:t>
+            </a:r>
+            <a:pPr indent="0" marL="0">
+              <a:buNone/>
+            </a:pPr>
+            <a:r>
+              <a:rPr lang="en-US" sz="900" dirty="0">
+                <a:solidFill>
+                  <a:srgbClr val="5F6B6D"/>
+                </a:solidFill>
+              </a:rPr>
+              <a:t> · </a:t>
+            </a:r>
+            <a:pPr indent="0" marL="0">
+              <a:buNone/>
+            </a:pPr>
+            <a:r>
+              <a:rPr lang="en-US" sz="900" u="sng" dirty="0">
+                <a:solidFill>
+                  <a:srgbClr val="5F6B6D"/>
+                </a:solidFill>
+                <a:hlinkClick r:id="rId2" invalidUrl="" action="" tgtFrame="" tooltip="https://bank.gov.ua/ua/news/all/komentar-natsionalnogo-banku-schodo-rivnya-inflyatsiyi-v-serpni-2026-roku" history="1" highlightClick="0" endSnd="0">
+                  <a:extLst>
+                    <a:ext uri="{A12FA001-AC4F-418D-AE19-62706E023703}">
+                      <ahyp:hlinkClr xmlns:ahyp="http://schemas.microsoft.com/office/drawing/2018/hyperlinkcolor" val="tx"/>
+                    </a:ext>
+                  </a:extLst>
+                </a:hlinkClick>
+              </a:rPr>
+              <a:t>коментар НБУ: інфляція в серпні</a:t>
+            </a:r>
+            <a:endParaRPr lang="en-US" sz="900" dirty="0"/>
+          </a:p>
+        </p:txBody>
+      </p:sp>
       <p:pic>
         <p:nvPicPr>
-          <p:cNvPr id="4" name="chart" descr="C:\Users\Lenovo\Documents\GitHub\nbu-challenge-2026\results\figures\fc_nowcast.png">    </p:cNvPr>
+          <p:cNvPr id="5" name="chart" descr="C:\Users\Lenovo\Documents\GitHub\nbu-challenge-2026\results\figures\fc_nowcast.png">    </p:cNvPr>
           <p:cNvPicPr>
             <a:picLocks noChangeAspect="1"/>
           </p:cNvPicPr>
           <p:nvPr/>
         </p:nvPicPr>
         <p:blipFill>
-          <a:blip r:embed="rId1"/>
+          <a:blip r:embed="rId3"/>
           <a:stretch>
             <a:fillRect/>
           </a:stretch>
@@ -11513,7 +11961,7 @@
       </p:graphicFrame>
       <p:sp>
         <p:nvSpPr>
-          <p:cNvPr id="6" name="bullets"/>
+          <p:cNvPr id="7" name="bullets"/>
           <p:cNvSpPr txBox="1"/>
           <p:nvPr/>
         </p:nvSpPr>
@@ -11701,16 +12149,99 @@
           </a:p>
         </p:txBody>
       </p:sp>
+      <p:sp>
+        <p:nvSpPr>
+          <p:cNvPr id="4" name="sources"/>
+          <p:cNvSpPr txBox="1"/>
+          <p:nvPr/>
+        </p:nvSpPr>
+        <p:spPr>
+          <a:xfrm>
+            <a:off x="4937760" y="6455664"/>
+            <a:ext cx="6110935" cy="292608"/>
+          </a:xfrm>
+          <a:prstGeom prst="rect">
+            <a:avLst/>
+          </a:prstGeom>
+          <a:noFill/>
+          <a:ln/>
+        </p:spPr>
+        <p:txBody>
+          <a:bodyPr wrap="square" lIns="0" tIns="0" rIns="0" bIns="0" rtlCol="0" anchor="ctr"/>
+          <a:lstStyle/>
+          <a:p>
+            <a:pPr indent="0" marL="0">
+              <a:buNone/>
+            </a:pPr>
+            <a:r>
+              <a:rPr lang="en-US" sz="900" dirty="0">
+                <a:solidFill>
+                  <a:srgbClr val="5F6B6D"/>
+                </a:solidFill>
+              </a:rPr>
+              <a:t>Джерела: </a:t>
+            </a:r>
+            <a:pPr indent="0" marL="0">
+              <a:buNone/>
+            </a:pPr>
+            <a:r>
+              <a:rPr lang="en-US" sz="900" u="sng" dirty="0">
+                <a:solidFill>
+                  <a:srgbClr val="5F6B6D"/>
+                </a:solidFill>
+                <a:hlinkClick r:id="rId1" invalidUrl="" action="" tgtFrame="" tooltip="https://p4.bank.gov.ua/admin_uploads/article/MPG_2024-mt_eng.pdf" history="1" highlightClick="0" endSnd="0">
+                  <a:extLst>
+                    <a:ext uri="{A12FA001-AC4F-418D-AE19-62706E023703}">
+                      <ahyp:hlinkClr xmlns:ahyp="http://schemas.microsoft.com/office/drawing/2018/hyperlinkcolor" val="tx"/>
+                    </a:ext>
+                  </a:extLst>
+                </a:hlinkClick>
+              </a:rPr>
+              <a:t>Основні засади ГКП (2024)</a:t>
+            </a:r>
+            <a:pPr indent="0" marL="0">
+              <a:buNone/>
+            </a:pPr>
+            <a:r>
+              <a:rPr lang="en-US" sz="900" dirty="0">
+                <a:solidFill>
+                  <a:srgbClr val="5F6B6D"/>
+                </a:solidFill>
+              </a:rPr>
+              <a:t> · </a:t>
+            </a:r>
+            <a:pPr indent="0" marL="0">
+              <a:buNone/>
+            </a:pPr>
+            <a:r>
+              <a:rPr lang="en-US" sz="900" u="sng" dirty="0">
+                <a:solidFill>
+                  <a:srgbClr val="5F6B6D"/>
+                </a:solidFill>
+                <a:hlinkClick r:id="rId2" invalidUrl="" action="" tgtFrame="" tooltip="https://bank.gov.ua/admin_uploads/article/Macroeconomic_Forecast_table_2026_07.xlsx?v=19" history="1" highlightClick="0" endSnd="0">
+                  <a:extLst>
+                    <a:ext uri="{A12FA001-AC4F-418D-AE19-62706E023703}">
+                      <ahyp:hlinkClr xmlns:ahyp="http://schemas.microsoft.com/office/drawing/2018/hyperlinkcolor" val="tx"/>
+                    </a:ext>
+                  </a:extLst>
+                </a:hlinkClick>
+              </a:rPr>
+              <a:t>макропрогноз НБУ</a:t>
+            </a:r>
+            <a:endParaRPr lang="en-US" sz="900" dirty="0"/>
+          </a:p>
+        </p:txBody>
+      </p:sp>
       <p:pic>
         <p:nvPicPr>
-          <p:cNvPr id="4" name="chart" descr="C:\Users\Lenovo\Documents\GitHub\nbu-challenge-2026\results\figures\fc_fan.png">    </p:cNvPr>
+          <p:cNvPr id="5" name="chart" descr="C:\Users\Lenovo\Documents\GitHub\nbu-challenge-2026\results\figures\fc_fan.png">    </p:cNvPr>
           <p:cNvPicPr>
             <a:picLocks noChangeAspect="1"/>
           </p:cNvPicPr>
           <p:nvPr/>
         </p:nvPicPr>
         <p:blipFill>
-          <a:blip r:embed="rId1"/>
+          <a:blip r:embed="rId3"/>
           <a:stretch>
             <a:fillRect/>
           </a:stretch>
@@ -11727,7 +12258,7 @@
       </p:pic>
       <p:sp>
         <p:nvSpPr>
-          <p:cNvPr id="5" name="num1"/>
+          <p:cNvPr id="6" name="num1"/>
           <p:cNvSpPr/>
           <p:nvPr/>
         </p:nvSpPr>
@@ -11747,7 +12278,7 @@
       </p:sp>
       <p:sp>
         <p:nvSpPr>
-          <p:cNvPr id="6" name="Text 2"/>
+          <p:cNvPr id="7" name="Text 3"/>
           <p:cNvSpPr txBox="1"/>
           <p:nvPr/>
         </p:nvSpPr>
@@ -11783,7 +12314,7 @@
       </p:sp>
       <p:sp>
         <p:nvSpPr>
-          <p:cNvPr id="7" name="point1"/>
+          <p:cNvPr id="8" name="point1"/>
           <p:cNvSpPr txBox="1"/>
           <p:nvPr/>
         </p:nvSpPr>
@@ -11819,7 +12350,7 @@
       </p:sp>
       <p:sp>
         <p:nvSpPr>
-          <p:cNvPr id="8" name="num2"/>
+          <p:cNvPr id="9" name="num2"/>
           <p:cNvSpPr/>
           <p:nvPr/>
         </p:nvSpPr>
@@ -11839,7 +12370,7 @@
       </p:sp>
       <p:sp>
         <p:nvSpPr>
-          <p:cNvPr id="9" name="Text 5"/>
+          <p:cNvPr id="10" name="Text 6"/>
           <p:cNvSpPr txBox="1"/>
           <p:nvPr/>
         </p:nvSpPr>
@@ -11875,7 +12406,7 @@
       </p:sp>
       <p:sp>
         <p:nvSpPr>
-          <p:cNvPr id="10" name="point2"/>
+          <p:cNvPr id="11" name="point2"/>
           <p:cNvSpPr txBox="1"/>
           <p:nvPr/>
         </p:nvSpPr>
@@ -11911,7 +12442,7 @@
       </p:sp>
       <p:sp>
         <p:nvSpPr>
-          <p:cNvPr id="11" name="num3"/>
+          <p:cNvPr id="12" name="num3"/>
           <p:cNvSpPr/>
           <p:nvPr/>
         </p:nvSpPr>
@@ -11931,7 +12462,7 @@
       </p:sp>
       <p:sp>
         <p:nvSpPr>
-          <p:cNvPr id="12" name="Text 8"/>
+          <p:cNvPr id="13" name="Text 9"/>
           <p:cNvSpPr txBox="1"/>
           <p:nvPr/>
         </p:nvSpPr>
@@ -11967,7 +12498,7 @@
       </p:sp>
       <p:sp>
         <p:nvSpPr>
-          <p:cNvPr id="13" name="point3"/>
+          <p:cNvPr id="14" name="point3"/>
           <p:cNvSpPr txBox="1"/>
           <p:nvPr/>
         </p:nvSpPr>
@@ -12115,16 +12646,99 @@
           </a:p>
         </p:txBody>
       </p:sp>
+      <p:sp>
+        <p:nvSpPr>
+          <p:cNvPr id="4" name="sources"/>
+          <p:cNvSpPr txBox="1"/>
+          <p:nvPr/>
+        </p:nvSpPr>
+        <p:spPr>
+          <a:xfrm>
+            <a:off x="4937760" y="6455664"/>
+            <a:ext cx="6110935" cy="292608"/>
+          </a:xfrm>
+          <a:prstGeom prst="rect">
+            <a:avLst/>
+          </a:prstGeom>
+          <a:noFill/>
+          <a:ln/>
+        </p:spPr>
+        <p:txBody>
+          <a:bodyPr wrap="square" lIns="0" tIns="0" rIns="0" bIns="0" rtlCol="0" anchor="ctr"/>
+          <a:lstStyle/>
+          <a:p>
+            <a:pPr indent="0" marL="0">
+              <a:buNone/>
+            </a:pPr>
+            <a:r>
+              <a:rPr lang="en-US" sz="900" dirty="0">
+                <a:solidFill>
+                  <a:srgbClr val="5F6B6D"/>
+                </a:solidFill>
+              </a:rPr>
+              <a:t>Джерела: </a:t>
+            </a:r>
+            <a:pPr indent="0" marL="0">
+              <a:buNone/>
+            </a:pPr>
+            <a:r>
+              <a:rPr lang="en-US" sz="900" u="sng" dirty="0">
+                <a:solidFill>
+                  <a:srgbClr val="5F6B6D"/>
+                </a:solidFill>
+                <a:hlinkClick r:id="rId1" invalidUrl="" action="" tgtFrame="" tooltip="https://bank.gov.ua/files/macro/CCPI_m.xlsx" history="1" highlightClick="0" endSnd="0">
+                  <a:extLst>
+                    <a:ext uri="{A12FA001-AC4F-418D-AE19-62706E023703}">
+                      <ahyp:hlinkClr xmlns:ahyp="http://schemas.microsoft.com/office/drawing/2018/hyperlinkcolor" val="tx"/>
+                    </a:ext>
+                  </a:extLst>
+                </a:hlinkClick>
+              </a:rPr>
+              <a:t>базовий ІСЦ (НБУ)</a:t>
+            </a:r>
+            <a:pPr indent="0" marL="0">
+              <a:buNone/>
+            </a:pPr>
+            <a:r>
+              <a:rPr lang="en-US" sz="900" dirty="0">
+                <a:solidFill>
+                  <a:srgbClr val="5F6B6D"/>
+                </a:solidFill>
+              </a:rPr>
+              <a:t> · </a:t>
+            </a:r>
+            <a:pPr indent="0" marL="0">
+              <a:buNone/>
+            </a:pPr>
+            <a:r>
+              <a:rPr lang="en-US" sz="900" u="sng" dirty="0">
+                <a:solidFill>
+                  <a:srgbClr val="5F6B6D"/>
+                </a:solidFill>
+                <a:hlinkClick r:id="rId2" invalidUrl="" action="" tgtFrame="" tooltip="https://bank.gov.ua/admin_uploads/article/Macroeconomic_Forecast_table_2026_07.xlsx?v=19" history="1" highlightClick="0" endSnd="0">
+                  <a:extLst>
+                    <a:ext uri="{A12FA001-AC4F-418D-AE19-62706E023703}">
+                      <ahyp:hlinkClr xmlns:ahyp="http://schemas.microsoft.com/office/drawing/2018/hyperlinkcolor" val="tx"/>
+                    </a:ext>
+                  </a:extLst>
+                </a:hlinkClick>
+              </a:rPr>
+              <a:t>макропрогноз НБУ</a:t>
+            </a:r>
+            <a:endParaRPr lang="en-US" sz="900" dirty="0"/>
+          </a:p>
+        </p:txBody>
+      </p:sp>
       <p:pic>
         <p:nvPicPr>
-          <p:cNvPr id="4" name="chart" descr="C:\Users\Lenovo\Documents\GitHub\nbu-challenge-2026\results\figures\fc_core.png">    </p:cNvPr>
+          <p:cNvPr id="5" name="chart" descr="C:\Users\Lenovo\Documents\GitHub\nbu-challenge-2026\results\figures\fc_core.png">    </p:cNvPr>
           <p:cNvPicPr>
             <a:picLocks noChangeAspect="1"/>
           </p:cNvPicPr>
           <p:nvPr/>
         </p:nvPicPr>
         <p:blipFill>
-          <a:blip r:embed="rId1"/>
+          <a:blip r:embed="rId3"/>
           <a:stretch>
             <a:fillRect/>
           </a:stretch>
@@ -12141,7 +12755,7 @@
       </p:pic>
       <p:sp>
         <p:nvSpPr>
-          <p:cNvPr id="5" name="bullets"/>
+          <p:cNvPr id="6" name="bullets"/>
           <p:cNvSpPr txBox="1"/>
           <p:nvPr/>
         </p:nvSpPr>
@@ -12347,16 +12961,128 @@
           </a:p>
         </p:txBody>
       </p:sp>
+      <p:sp>
+        <p:nvSpPr>
+          <p:cNvPr id="4" name="sources"/>
+          <p:cNvSpPr txBox="1"/>
+          <p:nvPr/>
+        </p:nvSpPr>
+        <p:spPr>
+          <a:xfrm>
+            <a:off x="4937760" y="6455664"/>
+            <a:ext cx="6110935" cy="292608"/>
+          </a:xfrm>
+          <a:prstGeom prst="rect">
+            <a:avLst/>
+          </a:prstGeom>
+          <a:noFill/>
+          <a:ln/>
+        </p:spPr>
+        <p:txBody>
+          <a:bodyPr wrap="square" lIns="0" tIns="0" rIns="0" bIns="0" rtlCol="0" anchor="ctr"/>
+          <a:lstStyle/>
+          <a:p>
+            <a:pPr indent="0" marL="0">
+              <a:buNone/>
+            </a:pPr>
+            <a:r>
+              <a:rPr lang="en-US" sz="900" dirty="0">
+                <a:solidFill>
+                  <a:srgbClr val="5F6B6D"/>
+                </a:solidFill>
+              </a:rPr>
+              <a:t>Джерела: </a:t>
+            </a:r>
+            <a:pPr indent="0" marL="0">
+              <a:buNone/>
+            </a:pPr>
+            <a:r>
+              <a:rPr lang="en-US" sz="900" u="sng" dirty="0">
+                <a:solidFill>
+                  <a:srgbClr val="5F6B6D"/>
+                </a:solidFill>
+                <a:hlinkClick r:id="rId1" invalidUrl="" action="" tgtFrame="" tooltip="https://bank.gov.ua/admin_uploads/article/Tables_Charts_2026-Q3.xlsx?v=19" history="1" highlightClick="0" endSnd="0">
+                  <a:extLst>
+                    <a:ext uri="{A12FA001-AC4F-418D-AE19-62706E023703}">
+                      <ahyp:hlinkClr xmlns:ahyp="http://schemas.microsoft.com/office/drawing/2018/hyperlinkcolor" val="tx"/>
+                    </a:ext>
+                  </a:extLst>
+                </a:hlinkClick>
+              </a:rPr>
+              <a:t>дані графіків ІЗ</a:t>
+            </a:r>
+            <a:pPr indent="0" marL="0">
+              <a:buNone/>
+            </a:pPr>
+            <a:r>
+              <a:rPr lang="en-US" sz="900" dirty="0">
+                <a:solidFill>
+                  <a:srgbClr val="5F6B6D"/>
+                </a:solidFill>
+              </a:rPr>
+              <a:t> · </a:t>
+            </a:r>
+            <a:pPr indent="0" marL="0">
+              <a:buNone/>
+            </a:pPr>
+            <a:r>
+              <a:rPr lang="en-US" sz="900" u="sng" dirty="0">
+                <a:solidFill>
+                  <a:srgbClr val="5F6B6D"/>
+                </a:solidFill>
+                <a:hlinkClick r:id="rId2" invalidUrl="" action="" tgtFrame="" tooltip="https://bank.gov.ua/admin_uploads/article/Macroeconomic_Forecast_table_2026_07.xlsx?v=19" history="1" highlightClick="0" endSnd="0">
+                  <a:extLst>
+                    <a:ext uri="{A12FA001-AC4F-418D-AE19-62706E023703}">
+                      <ahyp:hlinkClr xmlns:ahyp="http://schemas.microsoft.com/office/drawing/2018/hyperlinkcolor" val="tx"/>
+                    </a:ext>
+                  </a:extLst>
+                </a:hlinkClick>
+              </a:rPr>
+              <a:t>макропрогноз НБУ</a:t>
+            </a:r>
+            <a:pPr indent="0" marL="0">
+              <a:buNone/>
+            </a:pPr>
+            <a:r>
+              <a:rPr lang="en-US" sz="900" dirty="0">
+                <a:solidFill>
+                  <a:srgbClr val="5F6B6D"/>
+                </a:solidFill>
+              </a:rPr>
+              <a:t> · </a:t>
+            </a:r>
+            <a:pPr indent="0" marL="0">
+              <a:buNone/>
+            </a:pPr>
+            <a:r>
+              <a:rPr lang="en-US" sz="900" u="sng" dirty="0">
+                <a:solidFill>
+                  <a:srgbClr val="5F6B6D"/>
+                </a:solidFill>
+                <a:hlinkClick r:id="rId3" invalidUrl="" action="" tgtFrame="" tooltip="https://bank.gov.ua/ua/news/all/komentar-natsionalnogo-banku-schodo-zmini-realnogo-vvp-u-ii-kvartali-2026-roku" history="1" highlightClick="0" endSnd="0">
+                  <a:extLst>
+                    <a:ext uri="{A12FA001-AC4F-418D-AE19-62706E023703}">
+                      <ahyp:hlinkClr xmlns:ahyp="http://schemas.microsoft.com/office/drawing/2018/hyperlinkcolor" val="tx"/>
+                    </a:ext>
+                  </a:extLst>
+                </a:hlinkClick>
+              </a:rPr>
+              <a:t>коментар НБУ: ВВП II кв.</a:t>
+            </a:r>
+            <a:endParaRPr lang="en-US" sz="900" dirty="0"/>
+          </a:p>
+        </p:txBody>
+      </p:sp>
       <p:pic>
         <p:nvPicPr>
-          <p:cNvPr id="4" name="chart main" descr="C:\Users\Lenovo\Documents\GitHub\nbu-challenge-2026\results\figures\fc_gap_vs_nbu.png">    </p:cNvPr>
+          <p:cNvPr id="5" name="chart main" descr="C:\Users\Lenovo\Documents\GitHub\nbu-challenge-2026\results\figures\fc_gap_vs_nbu.png">    </p:cNvPr>
           <p:cNvPicPr>
             <a:picLocks noChangeAspect="1"/>
           </p:cNvPicPr>
           <p:nvPr/>
         </p:nvPicPr>
         <p:blipFill>
-          <a:blip r:embed="rId1"/>
+          <a:blip r:embed="rId4"/>
           <a:stretch>
             <a:fillRect/>
           </a:stretch>
@@ -12373,14 +13099,14 @@
       </p:pic>
       <p:pic>
         <p:nvPicPr>
-          <p:cNvPr id="5" name="chart side" descr="C:\Users\Lenovo\Documents\GitHub\nbu-challenge-2026\results\figures\fc_trends.png">    </p:cNvPr>
+          <p:cNvPr id="6" name="chart side" descr="C:\Users\Lenovo\Documents\GitHub\nbu-challenge-2026\results\figures\fc_trends.png">    </p:cNvPr>
           <p:cNvPicPr>
             <a:picLocks noChangeAspect="1"/>
           </p:cNvPicPr>
           <p:nvPr/>
         </p:nvPicPr>
         <p:blipFill>
-          <a:blip r:embed="rId2"/>
+          <a:blip r:embed="rId5"/>
           <a:stretch>
             <a:fillRect/>
           </a:stretch>
@@ -12397,7 +13123,7 @@
       </p:pic>
       <p:sp>
         <p:nvSpPr>
-          <p:cNvPr id="6" name="bullets"/>
+          <p:cNvPr id="7" name="bullets"/>
           <p:cNvSpPr txBox="1"/>
           <p:nvPr/>
         </p:nvSpPr>
@@ -12585,16 +13311,70 @@
           </a:p>
         </p:txBody>
       </p:sp>
+      <p:sp>
+        <p:nvSpPr>
+          <p:cNvPr id="4" name="sources"/>
+          <p:cNvSpPr txBox="1"/>
+          <p:nvPr/>
+        </p:nvSpPr>
+        <p:spPr>
+          <a:xfrm>
+            <a:off x="4937760" y="6455664"/>
+            <a:ext cx="6110935" cy="292608"/>
+          </a:xfrm>
+          <a:prstGeom prst="rect">
+            <a:avLst/>
+          </a:prstGeom>
+          <a:noFill/>
+          <a:ln/>
+        </p:spPr>
+        <p:txBody>
+          <a:bodyPr wrap="square" lIns="0" tIns="0" rIns="0" bIns="0" rtlCol="0" anchor="ctr"/>
+          <a:lstStyle/>
+          <a:p>
+            <a:pPr indent="0" marL="0">
+              <a:buNone/>
+            </a:pPr>
+            <a:r>
+              <a:rPr lang="en-US" sz="900" dirty="0">
+                <a:solidFill>
+                  <a:srgbClr val="5F6B6D"/>
+                </a:solidFill>
+              </a:rPr>
+              <a:t>Джерела: </a:t>
+            </a:r>
+            <a:pPr indent="0" marL="0">
+              <a:buNone/>
+            </a:pPr>
+            <a:r>
+              <a:rPr lang="en-US" sz="900" u="sng" dirty="0">
+                <a:solidFill>
+                  <a:srgbClr val="5F6B6D"/>
+                </a:solidFill>
+                <a:hlinkClick r:id="rId1" invalidUrl="" action="" tgtFrame="" tooltip="https://events.bank.gov.ua/uchallenge2026/files/nbu_challenge_model_2026.zip" history="1" highlightClick="0" endSnd="0">
+                  <a:extLst>
+                    <a:ext uri="{A12FA001-AC4F-418D-AE19-62706E023703}">
+                      <ahyp:hlinkClr xmlns:ahyp="http://schemas.microsoft.com/office/drawing/2018/hyperlinkcolor" val="tx"/>
+                    </a:ext>
+                  </a:extLst>
+                </a:hlinkClick>
+              </a:rPr>
+              <a:t>модель-шаблон НБУ</a:t>
+            </a:r>
+            <a:endParaRPr lang="en-US" sz="900" dirty="0"/>
+          </a:p>
+        </p:txBody>
+      </p:sp>
       <p:pic>
         <p:nvPicPr>
-          <p:cNvPr id="4" name="chart" descr="C:\Users\Lenovo\Documents\GitHub\nbu-challenge-2026\results\figures\fc_rate_drivers.png">    </p:cNvPr>
+          <p:cNvPr id="5" name="chart" descr="C:\Users\Lenovo\Documents\GitHub\nbu-challenge-2026\results\figures\fc_rate_drivers.png">    </p:cNvPr>
           <p:cNvPicPr>
             <a:picLocks noChangeAspect="1"/>
           </p:cNvPicPr>
           <p:nvPr/>
         </p:nvPicPr>
         <p:blipFill>
-          <a:blip r:embed="rId1"/>
+          <a:blip r:embed="rId2"/>
           <a:stretch>
             <a:fillRect/>
           </a:stretch>
@@ -12611,7 +13391,7 @@
       </p:pic>
       <p:sp>
         <p:nvSpPr>
-          <p:cNvPr id="5" name="bullets"/>
+          <p:cNvPr id="6" name="bullets"/>
           <p:cNvSpPr txBox="1"/>
           <p:nvPr/>
         </p:nvSpPr>
@@ -12799,16 +13579,128 @@
           </a:p>
         </p:txBody>
       </p:sp>
+      <p:sp>
+        <p:nvSpPr>
+          <p:cNvPr id="4" name="sources"/>
+          <p:cNvSpPr txBox="1"/>
+          <p:nvPr/>
+        </p:nvSpPr>
+        <p:spPr>
+          <a:xfrm>
+            <a:off x="4937760" y="6455664"/>
+            <a:ext cx="6110935" cy="292608"/>
+          </a:xfrm>
+          <a:prstGeom prst="rect">
+            <a:avLst/>
+          </a:prstGeom>
+          <a:noFill/>
+          <a:ln/>
+        </p:spPr>
+        <p:txBody>
+          <a:bodyPr wrap="square" lIns="0" tIns="0" rIns="0" bIns="0" rtlCol="0" anchor="ctr"/>
+          <a:lstStyle/>
+          <a:p>
+            <a:pPr indent="0" marL="0">
+              <a:buNone/>
+            </a:pPr>
+            <a:r>
+              <a:rPr lang="en-US" sz="900" dirty="0">
+                <a:solidFill>
+                  <a:srgbClr val="5F6B6D"/>
+                </a:solidFill>
+              </a:rPr>
+              <a:t>Джерела: </a:t>
+            </a:r>
+            <a:pPr indent="0" marL="0">
+              <a:buNone/>
+            </a:pPr>
+            <a:r>
+              <a:rPr lang="en-US" sz="900" u="sng" dirty="0">
+                <a:solidFill>
+                  <a:srgbClr val="5F6B6D"/>
+                </a:solidFill>
+                <a:hlinkClick r:id="rId1" invalidUrl="" action="" tgtFrame="" tooltip="https://bank.gov.ua/ua/news/all/pidsumki-diskusiyi-chleniv-komitetu-z-monetarnoyi-politiki-natsionalnogo-banku-schodo-rivnya-oblikovoyi-stavki-16-veresnya-2026-roku" history="1" highlightClick="0" endSnd="0">
+                  <a:extLst>
+                    <a:ext uri="{A12FA001-AC4F-418D-AE19-62706E023703}">
+                      <ahyp:hlinkClr xmlns:ahyp="http://schemas.microsoft.com/office/drawing/2018/hyperlinkcolor" val="tx"/>
+                    </a:ext>
+                  </a:extLst>
+                </a:hlinkClick>
+              </a:rPr>
+              <a:t>підсумки дискусії КМП</a:t>
+            </a:r>
+            <a:pPr indent="0" marL="0">
+              <a:buNone/>
+            </a:pPr>
+            <a:r>
+              <a:rPr lang="en-US" sz="900" dirty="0">
+                <a:solidFill>
+                  <a:srgbClr val="5F6B6D"/>
+                </a:solidFill>
+              </a:rPr>
+              <a:t> · </a:t>
+            </a:r>
+            <a:pPr indent="0" marL="0">
+              <a:buNone/>
+            </a:pPr>
+            <a:r>
+              <a:rPr lang="en-US" sz="900" u="sng" dirty="0">
+                <a:solidFill>
+                  <a:srgbClr val="5F6B6D"/>
+                </a:solidFill>
+                <a:hlinkClick r:id="rId2" invalidUrl="" action="" tgtFrame="" tooltip="https://finance.yahoo.com/quote/BZ%3DF/" history="1" highlightClick="0" endSnd="0">
+                  <a:extLst>
+                    <a:ext uri="{A12FA001-AC4F-418D-AE19-62706E023703}">
+                      <ahyp:hlinkClr xmlns:ahyp="http://schemas.microsoft.com/office/drawing/2018/hyperlinkcolor" val="tx"/>
+                    </a:ext>
+                  </a:extLst>
+                </a:hlinkClick>
+              </a:rPr>
+              <a:t>ф'ючерси Brent</a:t>
+            </a:r>
+            <a:pPr indent="0" marL="0">
+              <a:buNone/>
+            </a:pPr>
+            <a:r>
+              <a:rPr lang="en-US" sz="900" dirty="0">
+                <a:solidFill>
+                  <a:srgbClr val="5F6B6D"/>
+                </a:solidFill>
+              </a:rPr>
+              <a:t> · </a:t>
+            </a:r>
+            <a:pPr indent="0" marL="0">
+              <a:buNone/>
+            </a:pPr>
+            <a:r>
+              <a:rPr lang="en-US" sz="900" u="sng" dirty="0">
+                <a:solidFill>
+                  <a:srgbClr val="5F6B6D"/>
+                </a:solidFill>
+                <a:hlinkClick r:id="rId3" invalidUrl="" action="" tgtFrame="" tooltip="https://bank.gov.ua/admin_uploads/article/Macroeconomic_Forecast_table_2026_07.xlsx?v=19" history="1" highlightClick="0" endSnd="0">
+                  <a:extLst>
+                    <a:ext uri="{A12FA001-AC4F-418D-AE19-62706E023703}">
+                      <ahyp:hlinkClr xmlns:ahyp="http://schemas.microsoft.com/office/drawing/2018/hyperlinkcolor" val="tx"/>
+                    </a:ext>
+                  </a:extLst>
+                </a:hlinkClick>
+              </a:rPr>
+              <a:t>макропрогноз НБУ</a:t>
+            </a:r>
+            <a:endParaRPr lang="en-US" sz="900" dirty="0"/>
+          </a:p>
+        </p:txBody>
+      </p:sp>
       <p:pic>
         <p:nvPicPr>
-          <p:cNvPr id="4" name="chart" descr="C:\Users\Lenovo\Documents\GitHub\nbu-challenge-2026\results\figures\ml_scenarios.png">    </p:cNvPr>
+          <p:cNvPr id="5" name="chart" descr="C:\Users\Lenovo\Documents\GitHub\nbu-challenge-2026\results\figures\ml_scenarios.png">    </p:cNvPr>
           <p:cNvPicPr>
             <a:picLocks noChangeAspect="1"/>
           </p:cNvPicPr>
           <p:nvPr/>
         </p:nvPicPr>
         <p:blipFill>
-          <a:blip r:embed="rId1"/>
+          <a:blip r:embed="rId4"/>
           <a:stretch>
             <a:fillRect/>
           </a:stretch>
@@ -15067,7 +15959,7 @@
       </p:graphicFrame>
       <p:sp>
         <p:nvSpPr>
-          <p:cNvPr id="6" name="bullets"/>
+          <p:cNvPr id="7" name="bullets"/>
           <p:cNvSpPr txBox="1"/>
           <p:nvPr/>
         </p:nvSpPr>
@@ -15275,7 +16167,90 @@
       </p:sp>
       <p:sp>
         <p:nvSpPr>
-          <p:cNvPr id="4" name="card1"/>
+          <p:cNvPr id="4" name="sources"/>
+          <p:cNvSpPr txBox="1"/>
+          <p:nvPr/>
+        </p:nvSpPr>
+        <p:spPr>
+          <a:xfrm>
+            <a:off x="4937760" y="6455664"/>
+            <a:ext cx="6110935" cy="292608"/>
+          </a:xfrm>
+          <a:prstGeom prst="rect">
+            <a:avLst/>
+          </a:prstGeom>
+          <a:noFill/>
+          <a:ln/>
+        </p:spPr>
+        <p:txBody>
+          <a:bodyPr wrap="square" lIns="0" tIns="0" rIns="0" bIns="0" rtlCol="0" anchor="ctr"/>
+          <a:lstStyle/>
+          <a:p>
+            <a:pPr indent="0" marL="0">
+              <a:buNone/>
+            </a:pPr>
+            <a:r>
+              <a:rPr lang="en-US" sz="900" dirty="0">
+                <a:solidFill>
+                  <a:srgbClr val="5F6B6D"/>
+                </a:solidFill>
+              </a:rPr>
+              <a:t>Джерела: </a:t>
+            </a:r>
+            <a:pPr indent="0" marL="0">
+              <a:buNone/>
+            </a:pPr>
+            <a:r>
+              <a:rPr lang="en-US" sz="900" u="sng" dirty="0">
+                <a:solidFill>
+                  <a:srgbClr val="5F6B6D"/>
+                </a:solidFill>
+                <a:hlinkClick r:id="rId1" invalidUrl="" action="" tgtFrame="" tooltip="https://p4.bank.gov.ua/admin_uploads/article/MPG_2024-mt_eng.pdf" history="1" highlightClick="0" endSnd="0">
+                  <a:extLst>
+                    <a:ext uri="{A12FA001-AC4F-418D-AE19-62706E023703}">
+                      <ahyp:hlinkClr xmlns:ahyp="http://schemas.microsoft.com/office/drawing/2018/hyperlinkcolor" val="tx"/>
+                    </a:ext>
+                  </a:extLst>
+                </a:hlinkClick>
+              </a:rPr>
+              <a:t>Основні засади ГКП (2024)</a:t>
+            </a:r>
+            <a:pPr indent="0" marL="0">
+              <a:buNone/>
+            </a:pPr>
+            <a:r>
+              <a:rPr lang="en-US" sz="900" dirty="0">
+                <a:solidFill>
+                  <a:srgbClr val="5F6B6D"/>
+                </a:solidFill>
+              </a:rPr>
+              <a:t> · </a:t>
+            </a:r>
+            <a:pPr indent="0" marL="0">
+              <a:buNone/>
+            </a:pPr>
+            <a:r>
+              <a:rPr lang="en-US" sz="900" u="sng" dirty="0">
+                <a:solidFill>
+                  <a:srgbClr val="5F6B6D"/>
+                </a:solidFill>
+                <a:hlinkClick r:id="rId2" invalidUrl="" action="" tgtFrame="" tooltip="https://bank.gov.ua/ua/news/all/inflyatsiya-prishvidshitsya-u-drugomu-pivrichchi-ale-povernetsya-do-znijennya-nastupnogo-roku--inflyatsiyniy-zvit" history="1" highlightClick="0" endSnd="0">
+                  <a:extLst>
+                    <a:ext uri="{A12FA001-AC4F-418D-AE19-62706E023703}">
+                      <ahyp:hlinkClr xmlns:ahyp="http://schemas.microsoft.com/office/drawing/2018/hyperlinkcolor" val="tx"/>
+                    </a:ext>
+                  </a:extLst>
+                </a:hlinkClick>
+              </a:rPr>
+              <a:t>НБУ, Інфляційний звіт (липень 2026)</a:t>
+            </a:r>
+            <a:endParaRPr lang="en-US" sz="900" dirty="0"/>
+          </a:p>
+        </p:txBody>
+      </p:sp>
+      <p:sp>
+        <p:nvSpPr>
+          <p:cNvPr id="5" name="card1"/>
           <p:cNvSpPr/>
           <p:nvPr/>
         </p:nvSpPr>
@@ -15297,7 +16272,7 @@
       </p:sp>
       <p:sp>
         <p:nvSpPr>
-          <p:cNvPr id="5" name="Text 2"/>
+          <p:cNvPr id="6" name="Text 3"/>
           <p:cNvSpPr txBox="1"/>
           <p:nvPr/>
         </p:nvSpPr>
@@ -15333,7 +16308,7 @@
       </p:sp>
       <p:sp>
         <p:nvSpPr>
-          <p:cNvPr id="6" name="Text 3"/>
+          <p:cNvPr id="7" name="Text 4"/>
           <p:cNvSpPr txBox="1"/>
           <p:nvPr/>
         </p:nvSpPr>
@@ -15383,7 +16358,7 @@
       </p:sp>
       <p:sp>
         <p:nvSpPr>
-          <p:cNvPr id="7" name="Text 4"/>
+          <p:cNvPr id="8" name="Text 5"/>
           <p:cNvSpPr txBox="1"/>
           <p:nvPr/>
         </p:nvSpPr>
@@ -15419,7 +16394,7 @@
       </p:sp>
       <p:sp>
         <p:nvSpPr>
-          <p:cNvPr id="8" name="card2"/>
+          <p:cNvPr id="9" name="card2"/>
           <p:cNvSpPr/>
           <p:nvPr/>
         </p:nvSpPr>
@@ -15441,7 +16416,7 @@
       </p:sp>
       <p:sp>
         <p:nvSpPr>
-          <p:cNvPr id="9" name="Text 6"/>
+          <p:cNvPr id="10" name="Text 7"/>
           <p:cNvSpPr txBox="1"/>
           <p:nvPr/>
         </p:nvSpPr>
@@ -15477,7 +16452,7 @@
       </p:sp>
       <p:sp>
         <p:nvSpPr>
-          <p:cNvPr id="10" name="Text 7"/>
+          <p:cNvPr id="11" name="Text 8"/>
           <p:cNvSpPr txBox="1"/>
           <p:nvPr/>
         </p:nvSpPr>
@@ -15508,7 +16483,7 @@
                 <a:ea typeface="Cambria" pitchFamily="34" charset="-122"/>
                 <a:cs typeface="Cambria" pitchFamily="34" charset="-120"/>
               </a:rPr>
-              <a:t>≈4%</a:t>
+              <a:t>до 4%</a:t>
             </a:r>
             <a:pPr indent="0" marL="0">
               <a:buNone/>
@@ -15519,7 +16494,7 @@
                   <a:srgbClr val="C98A00"/>
                 </a:solidFill>
               </a:rPr>
-              <a:t>  у 2027</a:t>
+              <a:t>  на рік</a:t>
             </a:r>
             <a:endParaRPr lang="en-US" sz="4000" dirty="0"/>
           </a:p>
@@ -15527,7 +16502,7 @@
       </p:sp>
       <p:sp>
         <p:nvSpPr>
-          <p:cNvPr id="11" name="Text 8"/>
+          <p:cNvPr id="12" name="Text 9"/>
           <p:cNvSpPr txBox="1"/>
           <p:nvPr/>
         </p:nvSpPr>
@@ -15555,7 +16530,7 @@
                   <a:schemeClr val="tx1"/>
                 </a:solidFill>
               </a:rPr>
-              <a:t>поступове послаблення, керована гнучкість: курс амортизує шоки, інтервенції лише згладжують коливання</a:t>
+              <a:t>допускати поступове послаблення; за ставки 16,5% фактичне — ≈1% на рік; інтервенції лише згладжують коливання</a:t>
             </a:r>
             <a:endParaRPr lang="en-US" sz="1300" dirty="0"/>
           </a:p>
@@ -15563,7 +16538,7 @@
       </p:sp>
       <p:sp>
         <p:nvSpPr>
-          <p:cNvPr id="12" name="card3"/>
+          <p:cNvPr id="13" name="card3"/>
           <p:cNvSpPr/>
           <p:nvPr/>
         </p:nvSpPr>
@@ -15585,7 +16560,7 @@
       </p:sp>
       <p:sp>
         <p:nvSpPr>
-          <p:cNvPr id="13" name="Text 10"/>
+          <p:cNvPr id="14" name="Text 11"/>
           <p:cNvSpPr txBox="1"/>
           <p:nvPr/>
         </p:nvSpPr>
@@ -15621,7 +16596,7 @@
       </p:sp>
       <p:sp>
         <p:nvSpPr>
-          <p:cNvPr id="14" name="Text 11"/>
+          <p:cNvPr id="15" name="Text 12"/>
           <p:cNvSpPr txBox="1"/>
           <p:nvPr/>
         </p:nvSpPr>
@@ -15671,7 +16646,7 @@
       </p:sp>
       <p:sp>
         <p:nvSpPr>
-          <p:cNvPr id="15" name="Text 12"/>
+          <p:cNvPr id="16" name="Text 13"/>
           <p:cNvSpPr txBox="1"/>
           <p:nvPr/>
         </p:nvSpPr>
@@ -17574,7 +18549,7 @@
       </p:graphicFrame>
       <p:sp>
         <p:nvSpPr>
-          <p:cNvPr id="17" name="Text 13"/>
+          <p:cNvPr id="18" name="Text 14"/>
           <p:cNvSpPr txBox="1"/>
           <p:nvPr/>
         </p:nvSpPr>
@@ -17724,14 +18699,14 @@
       </p:sp>
       <p:sp>
         <p:nvSpPr>
-          <p:cNvPr id="4" name="Text 1"/>
+          <p:cNvPr id="4" name="sources"/>
           <p:cNvSpPr txBox="1"/>
           <p:nvPr/>
         </p:nvSpPr>
         <p:spPr>
           <a:xfrm>
-            <a:off x="457200" y="1371600"/>
-            <a:ext cx="777240" cy="1478280"/>
+            <a:off x="4937760" y="6455664"/>
+            <a:ext cx="6110935" cy="292608"/>
           </a:xfrm>
           <a:prstGeom prst="rect">
             <a:avLst/>
@@ -17743,6 +18718,89 @@
           <a:bodyPr wrap="square" lIns="0" tIns="0" rIns="0" bIns="0" rtlCol="0" anchor="ctr"/>
           <a:lstStyle/>
           <a:p>
+            <a:pPr indent="0" marL="0">
+              <a:buNone/>
+            </a:pPr>
+            <a:r>
+              <a:rPr lang="en-US" sz="900" dirty="0">
+                <a:solidFill>
+                  <a:srgbClr val="5F6B6D"/>
+                </a:solidFill>
+              </a:rPr>
+              <a:t>Джерела: </a:t>
+            </a:r>
+            <a:pPr indent="0" marL="0">
+              <a:buNone/>
+            </a:pPr>
+            <a:r>
+              <a:rPr lang="en-US" sz="900" u="sng" dirty="0">
+                <a:solidFill>
+                  <a:srgbClr val="5F6B6D"/>
+                </a:solidFill>
+                <a:hlinkClick r:id="rId1" invalidUrl="" action="" tgtFrame="" tooltip="https://bank.gov.ua/ua/news/all/pidsumki-diskusiyi-chleniv-komitetu-z-monetarnoyi-politiki-natsionalnogo-banku-schodo-rivnya-oblikovoyi-stavki-16-veresnya-2026-roku" history="1" highlightClick="0" endSnd="0">
+                  <a:extLst>
+                    <a:ext uri="{A12FA001-AC4F-418D-AE19-62706E023703}">
+                      <ahyp:hlinkClr xmlns:ahyp="http://schemas.microsoft.com/office/drawing/2018/hyperlinkcolor" val="tx"/>
+                    </a:ext>
+                  </a:extLst>
+                </a:hlinkClick>
+              </a:rPr>
+              <a:t>підсумки дискусії КМП</a:t>
+            </a:r>
+            <a:pPr indent="0" marL="0">
+              <a:buNone/>
+            </a:pPr>
+            <a:r>
+              <a:rPr lang="en-US" sz="900" dirty="0">
+                <a:solidFill>
+                  <a:srgbClr val="5F6B6D"/>
+                </a:solidFill>
+              </a:rPr>
+              <a:t> · </a:t>
+            </a:r>
+            <a:pPr indent="0" marL="0">
+              <a:buNone/>
+            </a:pPr>
+            <a:r>
+              <a:rPr lang="en-US" sz="900" u="sng" dirty="0">
+                <a:solidFill>
+                  <a:srgbClr val="5F6B6D"/>
+                </a:solidFill>
+                <a:hlinkClick r:id="rId2" invalidUrl="" action="" tgtFrame="" tooltip="https://bank.gov.ua/ua/news/all/inflyatsiya-prishvidshitsya-u-drugomu-pivrichchi-ale-povernetsya-do-znijennya-nastupnogo-roku--inflyatsiyniy-zvit" history="1" highlightClick="0" endSnd="0">
+                  <a:extLst>
+                    <a:ext uri="{A12FA001-AC4F-418D-AE19-62706E023703}">
+                      <ahyp:hlinkClr xmlns:ahyp="http://schemas.microsoft.com/office/drawing/2018/hyperlinkcolor" val="tx"/>
+                    </a:ext>
+                  </a:extLst>
+                </a:hlinkClick>
+              </a:rPr>
+              <a:t>НБУ, Інфляційний звіт (липень 2026)</a:t>
+            </a:r>
+            <a:endParaRPr lang="en-US" sz="900" dirty="0"/>
+          </a:p>
+        </p:txBody>
+      </p:sp>
+      <p:sp>
+        <p:nvSpPr>
+          <p:cNvPr id="5" name="Text 2"/>
+          <p:cNvSpPr txBox="1"/>
+          <p:nvPr/>
+        </p:nvSpPr>
+        <p:spPr>
+          <a:xfrm>
+            <a:off x="457200" y="1371600"/>
+            <a:ext cx="777240" cy="1478280"/>
+          </a:xfrm>
+          <a:prstGeom prst="rect">
+            <a:avLst/>
+          </a:prstGeom>
+          <a:noFill/>
+          <a:ln/>
+        </p:spPr>
+        <p:txBody>
+          <a:bodyPr wrap="square" lIns="0" tIns="0" rIns="0" bIns="0" rtlCol="0" anchor="ctr"/>
+          <a:lstStyle/>
+          <a:p>
             <a:pPr algn="ctr" indent="0" marL="0">
               <a:buNone/>
             </a:pPr>
@@ -17760,7 +18818,7 @@
       </p:sp>
       <p:sp>
         <p:nvSpPr>
-          <p:cNvPr id="5" name="cell Високий/Слабкий"/>
+          <p:cNvPr id="6" name="cell Високий/Слабкий"/>
           <p:cNvSpPr/>
           <p:nvPr/>
         </p:nvSpPr>
@@ -17780,7 +18838,7 @@
       </p:sp>
       <p:sp>
         <p:nvSpPr>
-          <p:cNvPr id="6" name="cell Високий/Помірний"/>
+          <p:cNvPr id="7" name="cell Високий/Помірний"/>
           <p:cNvSpPr/>
           <p:nvPr/>
         </p:nvSpPr>
@@ -17800,7 +18858,7 @@
       </p:sp>
       <p:sp>
         <p:nvSpPr>
-          <p:cNvPr id="7" name="Text 4"/>
+          <p:cNvPr id="8" name="Text 5"/>
           <p:cNvSpPr txBox="1"/>
           <p:nvPr/>
         </p:nvSpPr>
@@ -17856,7 +18914,7 @@
       </p:sp>
       <p:sp>
         <p:nvSpPr>
-          <p:cNvPr id="8" name="cell Високий/Сильний"/>
+          <p:cNvPr id="9" name="cell Високий/Сильний"/>
           <p:cNvSpPr/>
           <p:nvPr/>
         </p:nvSpPr>
@@ -17876,7 +18934,7 @@
       </p:sp>
       <p:sp>
         <p:nvSpPr>
-          <p:cNvPr id="9" name="Text 6"/>
+          <p:cNvPr id="10" name="Text 7"/>
           <p:cNvSpPr txBox="1"/>
           <p:nvPr/>
         </p:nvSpPr>
@@ -17932,7 +18990,7 @@
       </p:sp>
       <p:sp>
         <p:nvSpPr>
-          <p:cNvPr id="10" name="Text 7"/>
+          <p:cNvPr id="11" name="Text 8"/>
           <p:cNvSpPr txBox="1"/>
           <p:nvPr/>
         </p:nvSpPr>
@@ -17968,7 +19026,7 @@
       </p:sp>
       <p:sp>
         <p:nvSpPr>
-          <p:cNvPr id="11" name="cell Середній/Слабкий"/>
+          <p:cNvPr id="12" name="cell Середній/Слабкий"/>
           <p:cNvSpPr/>
           <p:nvPr/>
         </p:nvSpPr>
@@ -17988,7 +19046,7 @@
       </p:sp>
       <p:sp>
         <p:nvSpPr>
-          <p:cNvPr id="12" name="Text 9"/>
+          <p:cNvPr id="13" name="Text 10"/>
           <p:cNvSpPr txBox="1"/>
           <p:nvPr/>
         </p:nvSpPr>
@@ -18027,7 +19085,7 @@
       </p:sp>
       <p:sp>
         <p:nvSpPr>
-          <p:cNvPr id="13" name="cell Середній/Помірний"/>
+          <p:cNvPr id="14" name="cell Середній/Помірний"/>
           <p:cNvSpPr/>
           <p:nvPr/>
         </p:nvSpPr>
@@ -18047,7 +19105,7 @@
       </p:sp>
       <p:sp>
         <p:nvSpPr>
-          <p:cNvPr id="14" name="Text 11"/>
+          <p:cNvPr id="15" name="Text 12"/>
           <p:cNvSpPr txBox="1"/>
           <p:nvPr/>
         </p:nvSpPr>
@@ -18103,7 +19161,7 @@
       </p:sp>
       <p:sp>
         <p:nvSpPr>
-          <p:cNvPr id="15" name="cell Середній/Сильний"/>
+          <p:cNvPr id="16" name="cell Середній/Сильний"/>
           <p:cNvSpPr/>
           <p:nvPr/>
         </p:nvSpPr>
@@ -18123,7 +19181,7 @@
       </p:sp>
       <p:sp>
         <p:nvSpPr>
-          <p:cNvPr id="16" name="Text 13"/>
+          <p:cNvPr id="17" name="Text 14"/>
           <p:cNvSpPr txBox="1"/>
           <p:nvPr/>
         </p:nvSpPr>
@@ -18179,7 +19237,7 @@
       </p:sp>
       <p:sp>
         <p:nvSpPr>
-          <p:cNvPr id="17" name="Text 14"/>
+          <p:cNvPr id="18" name="Text 15"/>
           <p:cNvSpPr txBox="1"/>
           <p:nvPr/>
         </p:nvSpPr>
@@ -18215,7 +19273,7 @@
       </p:sp>
       <p:sp>
         <p:nvSpPr>
-          <p:cNvPr id="18" name="cell Низький/Слабкий"/>
+          <p:cNvPr id="19" name="cell Низький/Слабкий"/>
           <p:cNvSpPr/>
           <p:nvPr/>
         </p:nvSpPr>
@@ -18235,7 +19293,7 @@
       </p:sp>
       <p:sp>
         <p:nvSpPr>
-          <p:cNvPr id="19" name="cell Низький/Помірний"/>
+          <p:cNvPr id="20" name="cell Низький/Помірний"/>
           <p:cNvSpPr/>
           <p:nvPr/>
         </p:nvSpPr>
@@ -18255,7 +19313,7 @@
       </p:sp>
       <p:sp>
         <p:nvSpPr>
-          <p:cNvPr id="20" name="Text 17"/>
+          <p:cNvPr id="21" name="Text 18"/>
           <p:cNvSpPr txBox="1"/>
           <p:nvPr/>
         </p:nvSpPr>
@@ -18294,7 +19352,7 @@
       </p:sp>
       <p:sp>
         <p:nvSpPr>
-          <p:cNvPr id="21" name="cell Низький/Сильний"/>
+          <p:cNvPr id="22" name="cell Низький/Сильний"/>
           <p:cNvSpPr/>
           <p:nvPr/>
         </p:nvSpPr>
@@ -18314,7 +19372,7 @@
       </p:sp>
       <p:sp>
         <p:nvSpPr>
-          <p:cNvPr id="22" name="Text 19"/>
+          <p:cNvPr id="23" name="Text 20"/>
           <p:cNvSpPr txBox="1"/>
           <p:nvPr/>
         </p:nvSpPr>
@@ -18370,7 +19428,7 @@
       </p:sp>
       <p:sp>
         <p:nvSpPr>
-          <p:cNvPr id="23" name="Text 20"/>
+          <p:cNvPr id="24" name="Text 21"/>
           <p:cNvSpPr txBox="1"/>
           <p:nvPr/>
         </p:nvSpPr>
@@ -18406,7 +19464,7 @@
       </p:sp>
       <p:sp>
         <p:nvSpPr>
-          <p:cNvPr id="24" name="Text 21"/>
+          <p:cNvPr id="25" name="Text 22"/>
           <p:cNvSpPr txBox="1"/>
           <p:nvPr/>
         </p:nvSpPr>
@@ -18442,7 +19500,7 @@
       </p:sp>
       <p:sp>
         <p:nvSpPr>
-          <p:cNvPr id="25" name="Text 22"/>
+          <p:cNvPr id="26" name="Text 23"/>
           <p:cNvSpPr txBox="1"/>
           <p:nvPr/>
         </p:nvSpPr>
@@ -18478,7 +19536,7 @@
       </p:sp>
       <p:sp>
         <p:nvSpPr>
-          <p:cNvPr id="26" name="Text 23"/>
+          <p:cNvPr id="27" name="Text 24"/>
           <p:cNvSpPr txBox="1"/>
           <p:nvPr/>
         </p:nvSpPr>
@@ -18767,16 +19825,70 @@
           </a:p>
         </p:txBody>
       </p:sp>
+      <p:sp>
+        <p:nvSpPr>
+          <p:cNvPr id="4" name="sources"/>
+          <p:cNvSpPr txBox="1"/>
+          <p:nvPr/>
+        </p:nvSpPr>
+        <p:spPr>
+          <a:xfrm>
+            <a:off x="4937760" y="6455664"/>
+            <a:ext cx="6110935" cy="292608"/>
+          </a:xfrm>
+          <a:prstGeom prst="rect">
+            <a:avLst/>
+          </a:prstGeom>
+          <a:noFill/>
+          <a:ln/>
+        </p:spPr>
+        <p:txBody>
+          <a:bodyPr wrap="square" lIns="0" tIns="0" rIns="0" bIns="0" rtlCol="0" anchor="ctr"/>
+          <a:lstStyle/>
+          <a:p>
+            <a:pPr indent="0" marL="0">
+              <a:buNone/>
+            </a:pPr>
+            <a:r>
+              <a:rPr lang="en-US" sz="900" dirty="0">
+                <a:solidFill>
+                  <a:srgbClr val="5F6B6D"/>
+                </a:solidFill>
+              </a:rPr>
+              <a:t>Джерела: </a:t>
+            </a:r>
+            <a:pPr indent="0" marL="0">
+              <a:buNone/>
+            </a:pPr>
+            <a:r>
+              <a:rPr lang="en-US" sz="900" u="sng" dirty="0">
+                <a:solidFill>
+                  <a:srgbClr val="5F6B6D"/>
+                </a:solidFill>
+                <a:hlinkClick r:id="rId1" invalidUrl="" action="" tgtFrame="" tooltip="https://p4.bank.gov.ua/admin_uploads/article/MPG_2024-mt_eng.pdf" history="1" highlightClick="0" endSnd="0">
+                  <a:extLst>
+                    <a:ext uri="{A12FA001-AC4F-418D-AE19-62706E023703}">
+                      <ahyp:hlinkClr xmlns:ahyp="http://schemas.microsoft.com/office/drawing/2018/hyperlinkcolor" val="tx"/>
+                    </a:ext>
+                  </a:extLst>
+                </a:hlinkClick>
+              </a:rPr>
+              <a:t>Основні засади ГКП (2024)</a:t>
+            </a:r>
+            <a:endParaRPr lang="en-US" sz="900" dirty="0"/>
+          </a:p>
+        </p:txBody>
+      </p:sp>
       <p:pic>
         <p:nvPicPr>
-          <p:cNvPr id="4" name="chart" descr="C:\Users\Lenovo\Documents\GitHub\nbu-challenge-2026\results\figures\fc_policy.png">    </p:cNvPr>
+          <p:cNvPr id="5" name="chart" descr="C:\Users\Lenovo\Documents\GitHub\nbu-challenge-2026\results\figures\fc_policy.png">    </p:cNvPr>
           <p:cNvPicPr>
             <a:picLocks noChangeAspect="1"/>
           </p:cNvPicPr>
           <p:nvPr/>
         </p:nvPicPr>
         <p:blipFill>
-          <a:blip r:embed="rId1"/>
+          <a:blip r:embed="rId2"/>
           <a:stretch>
             <a:fillRect/>
           </a:stretch>
@@ -21035,7 +22147,7 @@
       </p:graphicFrame>
       <p:sp>
         <p:nvSpPr>
-          <p:cNvPr id="6" name="bullets"/>
+          <p:cNvPr id="7" name="bullets"/>
           <p:cNvSpPr txBox="1"/>
           <p:nvPr/>
         </p:nvSpPr>
@@ -21225,7 +22337,90 @@
       </p:sp>
       <p:sp>
         <p:nvSpPr>
-          <p:cNvPr id="4" name="decision"/>
+          <p:cNvPr id="4" name="sources"/>
+          <p:cNvSpPr txBox="1"/>
+          <p:nvPr/>
+        </p:nvSpPr>
+        <p:spPr>
+          <a:xfrm>
+            <a:off x="4937760" y="6455664"/>
+            <a:ext cx="6110935" cy="292608"/>
+          </a:xfrm>
+          <a:prstGeom prst="rect">
+            <a:avLst/>
+          </a:prstGeom>
+          <a:noFill/>
+          <a:ln/>
+        </p:spPr>
+        <p:txBody>
+          <a:bodyPr wrap="square" lIns="0" tIns="0" rIns="0" bIns="0" rtlCol="0" anchor="ctr"/>
+          <a:lstStyle/>
+          <a:p>
+            <a:pPr indent="0" marL="0">
+              <a:buNone/>
+            </a:pPr>
+            <a:r>
+              <a:rPr lang="en-US" sz="900" dirty="0">
+                <a:solidFill>
+                  <a:srgbClr val="5F6B6D"/>
+                </a:solidFill>
+              </a:rPr>
+              <a:t>Джерела: </a:t>
+            </a:r>
+            <a:pPr indent="0" marL="0">
+              <a:buNone/>
+            </a:pPr>
+            <a:r>
+              <a:rPr lang="en-US" sz="900" u="sng" dirty="0">
+                <a:solidFill>
+                  <a:srgbClr val="5F6B6D"/>
+                </a:solidFill>
+                <a:hlinkClick r:id="rId1" invalidUrl="" action="" tgtFrame="" tooltip="https://bank.gov.ua/ua/news/all/natsionalniy-bank-ukrayini-pidvischiv-oblikovu-stavku-do-16" history="1" highlightClick="0" endSnd="0">
+                  <a:extLst>
+                    <a:ext uri="{A12FA001-AC4F-418D-AE19-62706E023703}">
+                      <ahyp:hlinkClr xmlns:ahyp="http://schemas.microsoft.com/office/drawing/2018/hyperlinkcolor" val="tx"/>
+                    </a:ext>
+                  </a:extLst>
+                </a:hlinkClick>
+              </a:rPr>
+              <a:t>рішення НБУ 17.09.2026</a:t>
+            </a:r>
+            <a:pPr indent="0" marL="0">
+              <a:buNone/>
+            </a:pPr>
+            <a:r>
+              <a:rPr lang="en-US" sz="900" dirty="0">
+                <a:solidFill>
+                  <a:srgbClr val="5F6B6D"/>
+                </a:solidFill>
+              </a:rPr>
+              <a:t> · </a:t>
+            </a:r>
+            <a:pPr indent="0" marL="0">
+              <a:buNone/>
+            </a:pPr>
+            <a:r>
+              <a:rPr lang="en-US" sz="900" u="sng" dirty="0">
+                <a:solidFill>
+                  <a:srgbClr val="5F6B6D"/>
+                </a:solidFill>
+                <a:hlinkClick r:id="rId2" invalidUrl="" action="" tgtFrame="" tooltip="https://bank.gov.ua/ua/news/all/pidsumki-diskusiyi-chleniv-komitetu-z-monetarnoyi-politiki-natsionalnogo-banku-schodo-rivnya-oblikovoyi-stavki-16-veresnya-2026-roku" history="1" highlightClick="0" endSnd="0">
+                  <a:extLst>
+                    <a:ext uri="{A12FA001-AC4F-418D-AE19-62706E023703}">
+                      <ahyp:hlinkClr xmlns:ahyp="http://schemas.microsoft.com/office/drawing/2018/hyperlinkcolor" val="tx"/>
+                    </a:ext>
+                  </a:extLst>
+                </a:hlinkClick>
+              </a:rPr>
+              <a:t>підсумки дискусії КМП</a:t>
+            </a:r>
+            <a:endParaRPr lang="en-US" sz="900" dirty="0"/>
+          </a:p>
+        </p:txBody>
+      </p:sp>
+      <p:sp>
+        <p:nvSpPr>
+          <p:cNvPr id="5" name="decision"/>
           <p:cNvSpPr/>
           <p:nvPr/>
         </p:nvSpPr>
@@ -21247,7 +22442,7 @@
       </p:sp>
       <p:sp>
         <p:nvSpPr>
-          <p:cNvPr id="5" name="Text 2"/>
+          <p:cNvPr id="6" name="Text 3"/>
           <p:cNvSpPr txBox="1"/>
           <p:nvPr/>
         </p:nvSpPr>
@@ -21283,7 +22478,7 @@
       </p:sp>
       <p:sp>
         <p:nvSpPr>
-          <p:cNvPr id="6" name="Text 3"/>
+          <p:cNvPr id="7" name="Text 4"/>
           <p:cNvSpPr txBox="1"/>
           <p:nvPr/>
         </p:nvSpPr>
@@ -21322,7 +22517,7 @@
       </p:sp>
       <p:sp>
         <p:nvSpPr>
-          <p:cNvPr id="7" name="Text 4"/>
+          <p:cNvPr id="8" name="Text 5"/>
           <p:cNvSpPr txBox="1"/>
           <p:nvPr/>
         </p:nvSpPr>
@@ -21358,7 +22553,7 @@
       </p:sp>
       <p:sp>
         <p:nvSpPr>
-          <p:cNvPr id="8" name="Text 5"/>
+          <p:cNvPr id="9" name="Text 6"/>
           <p:cNvSpPr txBox="1"/>
           <p:nvPr/>
         </p:nvSpPr>
@@ -21397,7 +22592,7 @@
       </p:sp>
       <p:sp>
         <p:nvSpPr>
-          <p:cNvPr id="9" name="bullets"/>
+          <p:cNvPr id="10" name="bullets"/>
           <p:cNvSpPr txBox="1"/>
           <p:nvPr/>
         </p:nvSpPr>
@@ -21491,7 +22686,7 @@
       </p:sp>
       <p:sp>
         <p:nvSpPr>
-          <p:cNvPr id="10" name="Text 7"/>
+          <p:cNvPr id="11" name="Text 8"/>
           <p:cNvSpPr txBox="1"/>
           <p:nvPr/>
         </p:nvSpPr>
@@ -21530,7 +22725,7 @@
       </p:sp>
       <p:sp>
         <p:nvSpPr>
-          <p:cNvPr id="11" name="bullets"/>
+          <p:cNvPr id="12" name="bullets"/>
           <p:cNvSpPr txBox="1"/>
           <p:nvPr/>
         </p:nvSpPr>
@@ -21606,7 +22801,7 @@
       </p:sp>
       <p:sp>
         <p:nvSpPr>
-          <p:cNvPr id="12" name="Text 9"/>
+          <p:cNvPr id="13" name="Text 10"/>
           <p:cNvSpPr txBox="1"/>
           <p:nvPr/>
         </p:nvSpPr>
@@ -21645,7 +22840,7 @@
       </p:sp>
       <p:sp>
         <p:nvSpPr>
-          <p:cNvPr id="13" name="bullets"/>
+          <p:cNvPr id="14" name="bullets"/>
           <p:cNvSpPr txBox="1"/>
           <p:nvPr/>
         </p:nvSpPr>
@@ -21833,16 +23028,99 @@
           </a:p>
         </p:txBody>
       </p:sp>
+      <p:sp>
+        <p:nvSpPr>
+          <p:cNvPr id="4" name="sources"/>
+          <p:cNvSpPr txBox="1"/>
+          <p:nvPr/>
+        </p:nvSpPr>
+        <p:spPr>
+          <a:xfrm>
+            <a:off x="4937760" y="6455664"/>
+            <a:ext cx="6110935" cy="292608"/>
+          </a:xfrm>
+          <a:prstGeom prst="rect">
+            <a:avLst/>
+          </a:prstGeom>
+          <a:noFill/>
+          <a:ln/>
+        </p:spPr>
+        <p:txBody>
+          <a:bodyPr wrap="square" lIns="0" tIns="0" rIns="0" bIns="0" rtlCol="0" anchor="ctr"/>
+          <a:lstStyle/>
+          <a:p>
+            <a:pPr indent="0" marL="0">
+              <a:buNone/>
+            </a:pPr>
+            <a:r>
+              <a:rPr lang="en-US" sz="900" dirty="0">
+                <a:solidFill>
+                  <a:srgbClr val="5F6B6D"/>
+                </a:solidFill>
+              </a:rPr>
+              <a:t>Джерела: </a:t>
+            </a:r>
+            <a:pPr indent="0" marL="0">
+              <a:buNone/>
+            </a:pPr>
+            <a:r>
+              <a:rPr lang="en-US" sz="900" u="sng" dirty="0">
+                <a:solidFill>
+                  <a:srgbClr val="5F6B6D"/>
+                </a:solidFill>
+                <a:hlinkClick r:id="rId1" invalidUrl="" action="" tgtFrame="" tooltip="https://bank.gov.ua/ua/open-data/api-dev" history="1" highlightClick="0" endSnd="0">
+                  <a:extLst>
+                    <a:ext uri="{A12FA001-AC4F-418D-AE19-62706E023703}">
+                      <ahyp:hlinkClr xmlns:ahyp="http://schemas.microsoft.com/office/drawing/2018/hyperlinkcolor" val="tx"/>
+                    </a:ext>
+                  </a:extLst>
+                </a:hlinkClick>
+              </a:rPr>
+              <a:t>API НБУ</a:t>
+            </a:r>
+            <a:pPr indent="0" marL="0">
+              <a:buNone/>
+            </a:pPr>
+            <a:r>
+              <a:rPr lang="en-US" sz="900" dirty="0">
+                <a:solidFill>
+                  <a:srgbClr val="5F6B6D"/>
+                </a:solidFill>
+              </a:rPr>
+              <a:t> · </a:t>
+            </a:r>
+            <a:pPr indent="0" marL="0">
+              <a:buNone/>
+            </a:pPr>
+            <a:r>
+              <a:rPr lang="en-US" sz="900" u="sng" dirty="0">
+                <a:solidFill>
+                  <a:srgbClr val="5F6B6D"/>
+                </a:solidFill>
+                <a:hlinkClick r:id="rId2" invalidUrl="" action="" tgtFrame="" tooltip="https://bank.gov.ua/ua/news/all/rada-mvf-shvalila-pershiy-pereglyad-programi-rozshirenogo-finansuvannya-ta-zatverdila-vidilennya-transhu-obsyagom-690-mln-dol-ssha" history="1" highlightClick="0" endSnd="0">
+                  <a:extLst>
+                    <a:ext uri="{A12FA001-AC4F-418D-AE19-62706E023703}">
+                      <ahyp:hlinkClr xmlns:ahyp="http://schemas.microsoft.com/office/drawing/2018/hyperlinkcolor" val="tx"/>
+                    </a:ext>
+                  </a:extLst>
+                </a:hlinkClick>
+              </a:rPr>
+              <a:t>Рада МВФ: перегляд програми</a:t>
+            </a:r>
+            <a:endParaRPr lang="en-US" sz="900" dirty="0"/>
+          </a:p>
+        </p:txBody>
+      </p:sp>
       <p:pic>
         <p:nvPicPr>
-          <p:cNvPr id="4" name="chart" descr="C:\Users\Lenovo\Documents\GitHub\nbu-challenge-2026\results\figures\fc_reserves.png">    </p:cNvPr>
+          <p:cNvPr id="5" name="chart" descr="C:\Users\Lenovo\Documents\GitHub\nbu-challenge-2026\results\figures\fc_reserves.png">    </p:cNvPr>
           <p:cNvPicPr>
             <a:picLocks noChangeAspect="1"/>
           </p:cNvPicPr>
           <p:nvPr/>
         </p:nvPicPr>
         <p:blipFill>
-          <a:blip r:embed="rId1"/>
+          <a:blip r:embed="rId3"/>
           <a:stretch>
             <a:fillRect/>
           </a:stretch>
@@ -21859,7 +23137,7 @@
       </p:pic>
       <p:sp>
         <p:nvSpPr>
-          <p:cNvPr id="5" name="bullets"/>
+          <p:cNvPr id="6" name="bullets"/>
           <p:cNvSpPr txBox="1"/>
           <p:nvPr/>
         </p:nvSpPr>
@@ -21927,7 +23205,7 @@
                   <a:schemeClr val="tx1"/>
                 </a:solidFill>
               </a:rPr>
-              <a:t>Рекомендація: керована гнучкість — поступове послаблення гривні до € ≈4% у 2027, інтервенції лише для згладжування</a:t>
+              <a:t>Рекомендація: керована гнучкість — допускати послаблення гривні до € до ≈4% на рік (за ставки 16,5% фактичне — ≈1%), інтервенції лише для згладжування</a:t>
             </a:r>
             <a:endParaRPr lang="en-US" sz="1400" dirty="0"/>
           </a:p>
@@ -22065,16 +23343,128 @@
           </a:p>
         </p:txBody>
       </p:sp>
+      <p:sp>
+        <p:nvSpPr>
+          <p:cNvPr id="4" name="sources"/>
+          <p:cNvSpPr txBox="1"/>
+          <p:nvPr/>
+        </p:nvSpPr>
+        <p:spPr>
+          <a:xfrm>
+            <a:off x="4937760" y="6455664"/>
+            <a:ext cx="6110935" cy="292608"/>
+          </a:xfrm>
+          <a:prstGeom prst="rect">
+            <a:avLst/>
+          </a:prstGeom>
+          <a:noFill/>
+          <a:ln/>
+        </p:spPr>
+        <p:txBody>
+          <a:bodyPr wrap="square" lIns="0" tIns="0" rIns="0" bIns="0" rtlCol="0" anchor="ctr"/>
+          <a:lstStyle/>
+          <a:p>
+            <a:pPr indent="0" marL="0">
+              <a:buNone/>
+            </a:pPr>
+            <a:r>
+              <a:rPr lang="en-US" sz="900" dirty="0">
+                <a:solidFill>
+                  <a:srgbClr val="5F6B6D"/>
+                </a:solidFill>
+              </a:rPr>
+              <a:t>Джерела: </a:t>
+            </a:r>
+            <a:pPr indent="0" marL="0">
+              <a:buNone/>
+            </a:pPr>
+            <a:r>
+              <a:rPr lang="en-US" sz="900" u="sng" dirty="0">
+                <a:solidFill>
+                  <a:srgbClr val="5F6B6D"/>
+                </a:solidFill>
+                <a:hlinkClick r:id="rId1" invalidUrl="" action="" tgtFrame="" tooltip="https://bank.gov.ua/ua/news/all/nbu-vprovadjuye-paket-pomyakshennya-valyutnih-obmejen-z-osnovnim-fokusom-na-pidtrimtsi-naselennya" history="1" highlightClick="0" endSnd="0">
+                  <a:extLst>
+                    <a:ext uri="{A12FA001-AC4F-418D-AE19-62706E023703}">
+                      <ahyp:hlinkClr xmlns:ahyp="http://schemas.microsoft.com/office/drawing/2018/hyperlinkcolor" val="tx"/>
+                    </a:ext>
+                  </a:extLst>
+                </a:hlinkClick>
+              </a:rPr>
+              <a:t>пакет пом'якшення валютних обмежень</a:t>
+            </a:r>
+            <a:pPr indent="0" marL="0">
+              <a:buNone/>
+            </a:pPr>
+            <a:r>
+              <a:rPr lang="en-US" sz="900" dirty="0">
+                <a:solidFill>
+                  <a:srgbClr val="5F6B6D"/>
+                </a:solidFill>
+              </a:rPr>
+              <a:t> · </a:t>
+            </a:r>
+            <a:pPr indent="0" marL="0">
+              <a:buNone/>
+            </a:pPr>
+            <a:r>
+              <a:rPr lang="en-US" sz="900" u="sng" dirty="0">
+                <a:solidFill>
+                  <a:srgbClr val="5F6B6D"/>
+                </a:solidFill>
+                <a:hlinkClick r:id="rId2" invalidUrl="" action="" tgtFrame="" tooltip="https://bank.gov.ua/admin_uploads/article/Strategy_for_easing_FX_restrictions_07-07-2023.pdf?v=19" history="1" highlightClick="0" endSnd="0">
+                  <a:extLst>
+                    <a:ext uri="{A12FA001-AC4F-418D-AE19-62706E023703}">
+                      <ahyp:hlinkClr xmlns:ahyp="http://schemas.microsoft.com/office/drawing/2018/hyperlinkcolor" val="tx"/>
+                    </a:ext>
+                  </a:extLst>
+                </a:hlinkClick>
+              </a:rPr>
+              <a:t>Стратегія пом'якшення валютних обмежень</a:t>
+            </a:r>
+            <a:pPr indent="0" marL="0">
+              <a:buNone/>
+            </a:pPr>
+            <a:r>
+              <a:rPr lang="en-US" sz="900" dirty="0">
+                <a:solidFill>
+                  <a:srgbClr val="5F6B6D"/>
+                </a:solidFill>
+              </a:rPr>
+              <a:t> · </a:t>
+            </a:r>
+            <a:pPr indent="0" marL="0">
+              <a:buNone/>
+            </a:pPr>
+            <a:r>
+              <a:rPr lang="en-US" sz="900" u="sng" dirty="0">
+                <a:solidFill>
+                  <a:srgbClr val="5F6B6D"/>
+                </a:solidFill>
+                <a:hlinkClick r:id="rId3" invalidUrl="" action="" tgtFrame="" tooltip="https://bank.gov.ua/ua/open-data/api-dev" history="1" highlightClick="0" endSnd="0">
+                  <a:extLst>
+                    <a:ext uri="{A12FA001-AC4F-418D-AE19-62706E023703}">
+                      <ahyp:hlinkClr xmlns:ahyp="http://schemas.microsoft.com/office/drawing/2018/hyperlinkcolor" val="tx"/>
+                    </a:ext>
+                  </a:extLst>
+                </a:hlinkClick>
+              </a:rPr>
+              <a:t>API НБУ</a:t>
+            </a:r>
+            <a:endParaRPr lang="en-US" sz="900" dirty="0"/>
+          </a:p>
+        </p:txBody>
+      </p:sp>
       <p:pic>
         <p:nvPicPr>
-          <p:cNvPr id="4" name="chart" descr="C:\Users\Lenovo\Documents\GitHub\nbu-challenge-2026\results\figures\ov_fx_households.png">    </p:cNvPr>
+          <p:cNvPr id="5" name="chart" descr="C:\Users\Lenovo\Documents\GitHub\nbu-challenge-2026\results\figures\ov_fx_households.png">    </p:cNvPr>
           <p:cNvPicPr>
             <a:picLocks noChangeAspect="1"/>
           </p:cNvPicPr>
           <p:nvPr/>
         </p:nvPicPr>
         <p:blipFill>
-          <a:blip r:embed="rId1"/>
+          <a:blip r:embed="rId4"/>
           <a:stretch>
             <a:fillRect/>
           </a:stretch>
@@ -22091,7 +23481,7 @@
       </p:pic>
       <p:sp>
         <p:nvSpPr>
-          <p:cNvPr id="5" name="bullets"/>
+          <p:cNvPr id="6" name="bullets"/>
           <p:cNvSpPr txBox="1"/>
           <p:nvPr/>
         </p:nvSpPr>
@@ -22317,7 +23707,61 @@
       </p:sp>
       <p:sp>
         <p:nvSpPr>
-          <p:cNvPr id="4" name="press release"/>
+          <p:cNvPr id="4" name="sources"/>
+          <p:cNvSpPr txBox="1"/>
+          <p:nvPr/>
+        </p:nvSpPr>
+        <p:spPr>
+          <a:xfrm>
+            <a:off x="4937760" y="6455664"/>
+            <a:ext cx="6110935" cy="292608"/>
+          </a:xfrm>
+          <a:prstGeom prst="rect">
+            <a:avLst/>
+          </a:prstGeom>
+          <a:noFill/>
+          <a:ln/>
+        </p:spPr>
+        <p:txBody>
+          <a:bodyPr wrap="square" lIns="0" tIns="0" rIns="0" bIns="0" rtlCol="0" anchor="ctr"/>
+          <a:lstStyle/>
+          <a:p>
+            <a:pPr indent="0" marL="0">
+              <a:buNone/>
+            </a:pPr>
+            <a:r>
+              <a:rPr lang="en-US" sz="900" dirty="0">
+                <a:solidFill>
+                  <a:srgbClr val="5F6B6D"/>
+                </a:solidFill>
+              </a:rPr>
+              <a:t>Джерела: </a:t>
+            </a:r>
+            <a:pPr indent="0" marL="0">
+              <a:buNone/>
+            </a:pPr>
+            <a:r>
+              <a:rPr lang="en-US" sz="900" u="sng" dirty="0">
+                <a:solidFill>
+                  <a:srgbClr val="5F6B6D"/>
+                </a:solidFill>
+                <a:hlinkClick r:id="rId1" invalidUrl="" action="" tgtFrame="" tooltip="https://bank.gov.ua/ua/news/all/natsionalniy-bank-ukrayini-pidvischiv-oblikovu-stavku-do-16" history="1" highlightClick="0" endSnd="0">
+                  <a:extLst>
+                    <a:ext uri="{A12FA001-AC4F-418D-AE19-62706E023703}">
+                      <ahyp:hlinkClr xmlns:ahyp="http://schemas.microsoft.com/office/drawing/2018/hyperlinkcolor" val="tx"/>
+                    </a:ext>
+                  </a:extLst>
+                </a:hlinkClick>
+              </a:rPr>
+              <a:t>рішення НБУ 17.09.2026</a:t>
+            </a:r>
+            <a:endParaRPr lang="en-US" sz="900" dirty="0"/>
+          </a:p>
+        </p:txBody>
+      </p:sp>
+      <p:sp>
+        <p:nvSpPr>
+          <p:cNvPr id="5" name="press release"/>
           <p:cNvSpPr txBox="1"/>
           <p:nvPr/>
         </p:nvSpPr>
@@ -22359,7 +23803,7 @@
       </p:sp>
       <p:sp>
         <p:nvSpPr>
-          <p:cNvPr id="5" name="card1"/>
+          <p:cNvPr id="6" name="card1"/>
           <p:cNvSpPr/>
           <p:nvPr/>
         </p:nvSpPr>
@@ -22381,7 +23825,7 @@
       </p:sp>
       <p:sp>
         <p:nvSpPr>
-          <p:cNvPr id="6" name="badge1"/>
+          <p:cNvPr id="7" name="badge1"/>
           <p:cNvSpPr/>
           <p:nvPr/>
         </p:nvSpPr>
@@ -22401,7 +23845,7 @@
       </p:sp>
       <p:sp>
         <p:nvSpPr>
-          <p:cNvPr id="7" name="Text 4"/>
+          <p:cNvPr id="8" name="Text 5"/>
           <p:cNvSpPr txBox="1"/>
           <p:nvPr/>
         </p:nvSpPr>
@@ -22437,7 +23881,7 @@
       </p:sp>
       <p:sp>
         <p:nvSpPr>
-          <p:cNvPr id="8" name="Text 5"/>
+          <p:cNvPr id="9" name="Text 6"/>
           <p:cNvSpPr txBox="1"/>
           <p:nvPr/>
         </p:nvSpPr>
@@ -22476,7 +23920,7 @@
       </p:sp>
       <p:sp>
         <p:nvSpPr>
-          <p:cNvPr id="9" name="bullets"/>
+          <p:cNvPr id="10" name="bullets"/>
           <p:cNvSpPr txBox="1"/>
           <p:nvPr/>
         </p:nvSpPr>
@@ -22552,7 +23996,7 @@
       </p:sp>
       <p:sp>
         <p:nvSpPr>
-          <p:cNvPr id="10" name="card2"/>
+          <p:cNvPr id="11" name="card2"/>
           <p:cNvSpPr/>
           <p:nvPr/>
         </p:nvSpPr>
@@ -22574,7 +24018,7 @@
       </p:sp>
       <p:sp>
         <p:nvSpPr>
-          <p:cNvPr id="11" name="badge2"/>
+          <p:cNvPr id="12" name="badge2"/>
           <p:cNvSpPr/>
           <p:nvPr/>
         </p:nvSpPr>
@@ -22594,7 +24038,7 @@
       </p:sp>
       <p:sp>
         <p:nvSpPr>
-          <p:cNvPr id="12" name="Text 9"/>
+          <p:cNvPr id="13" name="Text 10"/>
           <p:cNvSpPr txBox="1"/>
           <p:nvPr/>
         </p:nvSpPr>
@@ -22630,7 +24074,7 @@
       </p:sp>
       <p:sp>
         <p:nvSpPr>
-          <p:cNvPr id="13" name="Text 10"/>
+          <p:cNvPr id="14" name="Text 11"/>
           <p:cNvSpPr txBox="1"/>
           <p:nvPr/>
         </p:nvSpPr>
@@ -22669,7 +24113,7 @@
       </p:sp>
       <p:sp>
         <p:nvSpPr>
-          <p:cNvPr id="14" name="bullets"/>
+          <p:cNvPr id="15" name="bullets"/>
           <p:cNvSpPr txBox="1"/>
           <p:nvPr/>
         </p:nvSpPr>
@@ -22745,7 +24189,7 @@
       </p:sp>
       <p:sp>
         <p:nvSpPr>
-          <p:cNvPr id="15" name="card3"/>
+          <p:cNvPr id="16" name="card3"/>
           <p:cNvSpPr/>
           <p:nvPr/>
         </p:nvSpPr>
@@ -22767,7 +24211,7 @@
       </p:sp>
       <p:sp>
         <p:nvSpPr>
-          <p:cNvPr id="16" name="badge3"/>
+          <p:cNvPr id="17" name="badge3"/>
           <p:cNvSpPr/>
           <p:nvPr/>
         </p:nvSpPr>
@@ -22787,7 +24231,7 @@
       </p:sp>
       <p:sp>
         <p:nvSpPr>
-          <p:cNvPr id="17" name="Text 14"/>
+          <p:cNvPr id="18" name="Text 15"/>
           <p:cNvSpPr txBox="1"/>
           <p:nvPr/>
         </p:nvSpPr>
@@ -22823,7 +24267,7 @@
       </p:sp>
       <p:sp>
         <p:nvSpPr>
-          <p:cNvPr id="18" name="Text 15"/>
+          <p:cNvPr id="19" name="Text 16"/>
           <p:cNvSpPr txBox="1"/>
           <p:nvPr/>
         </p:nvSpPr>
@@ -22862,7 +24306,7 @@
       </p:sp>
       <p:sp>
         <p:nvSpPr>
-          <p:cNvPr id="19" name="bullets"/>
+          <p:cNvPr id="20" name="bullets"/>
           <p:cNvSpPr txBox="1"/>
           <p:nvPr/>
         </p:nvSpPr>
@@ -23562,7 +25006,148 @@
       </p:sp>
       <p:sp>
         <p:nvSpPr>
-          <p:cNvPr id="4" name="eq1"/>
+          <p:cNvPr id="4" name="sources"/>
+          <p:cNvSpPr txBox="1"/>
+          <p:nvPr/>
+        </p:nvSpPr>
+        <p:spPr>
+          <a:xfrm>
+            <a:off x="4937760" y="6455664"/>
+            <a:ext cx="6110935" cy="292608"/>
+          </a:xfrm>
+          <a:prstGeom prst="rect">
+            <a:avLst/>
+          </a:prstGeom>
+          <a:noFill/>
+          <a:ln/>
+        </p:spPr>
+        <p:txBody>
+          <a:bodyPr wrap="square" lIns="0" tIns="0" rIns="0" bIns="0" rtlCol="0" anchor="ctr"/>
+          <a:lstStyle/>
+          <a:p>
+            <a:pPr indent="0" marL="0">
+              <a:buNone/>
+            </a:pPr>
+            <a:r>
+              <a:rPr lang="en-US" sz="900" dirty="0">
+                <a:solidFill>
+                  <a:srgbClr val="5F6B6D"/>
+                </a:solidFill>
+              </a:rPr>
+              <a:t>Джерела: </a:t>
+            </a:r>
+            <a:pPr indent="0" marL="0">
+              <a:buNone/>
+            </a:pPr>
+            <a:r>
+              <a:rPr lang="en-US" sz="900" u="sng" dirty="0">
+                <a:solidFill>
+                  <a:srgbClr val="5F6B6D"/>
+                </a:solidFill>
+                <a:hlinkClick r:id="rId1" invalidUrl="" action="" tgtFrame="" tooltip="https://events.bank.gov.ua/uchallenge2026/files/nbu_challenge_model_2026.zip" history="1" highlightClick="0" endSnd="0">
+                  <a:extLst>
+                    <a:ext uri="{A12FA001-AC4F-418D-AE19-62706E023703}">
+                      <ahyp:hlinkClr xmlns:ahyp="http://schemas.microsoft.com/office/drawing/2018/hyperlinkcolor" val="tx"/>
+                    </a:ext>
+                  </a:extLst>
+                </a:hlinkClick>
+              </a:rPr>
+              <a:t>модель-шаблон НБУ</a:t>
+            </a:r>
+            <a:pPr indent="0" marL="0">
+              <a:buNone/>
+            </a:pPr>
+            <a:r>
+              <a:rPr lang="en-US" sz="900" dirty="0">
+                <a:solidFill>
+                  <a:srgbClr val="5F6B6D"/>
+                </a:solidFill>
+              </a:rPr>
+              <a:t> · </a:t>
+            </a:r>
+            <a:pPr indent="0" marL="0">
+              <a:buNone/>
+            </a:pPr>
+            <a:r>
+              <a:rPr lang="en-US" sz="900" u="sng" dirty="0">
+                <a:solidFill>
+                  <a:srgbClr val="5F6B6D"/>
+                </a:solidFill>
+                <a:hlinkClick r:id="rId2" invalidUrl="" action="" tgtFrame="" tooltip="https://bank.gov.ua/ua/open-data/api-dev" history="1" highlightClick="0" endSnd="0">
+                  <a:extLst>
+                    <a:ext uri="{A12FA001-AC4F-418D-AE19-62706E023703}">
+                      <ahyp:hlinkClr xmlns:ahyp="http://schemas.microsoft.com/office/drawing/2018/hyperlinkcolor" val="tx"/>
+                    </a:ext>
+                  </a:extLst>
+                </a:hlinkClick>
+              </a:rPr>
+              <a:t>API НБУ</a:t>
+            </a:r>
+            <a:pPr indent="0" marL="0">
+              <a:buNone/>
+            </a:pPr>
+            <a:r>
+              <a:rPr lang="en-US" sz="900" dirty="0">
+                <a:solidFill>
+                  <a:srgbClr val="5F6B6D"/>
+                </a:solidFill>
+              </a:rPr>
+              <a:t> · </a:t>
+            </a:r>
+            <a:pPr indent="0" marL="0">
+              <a:buNone/>
+            </a:pPr>
+            <a:r>
+              <a:rPr lang="en-US" sz="900" u="sng" dirty="0">
+                <a:solidFill>
+                  <a:srgbClr val="5F6B6D"/>
+                </a:solidFill>
+                <a:hlinkClick r:id="rId3" invalidUrl="" action="" tgtFrame="" tooltip="https://data.ecb.europa.eu/" history="1" highlightClick="0" endSnd="0">
+                  <a:extLst>
+                    <a:ext uri="{A12FA001-AC4F-418D-AE19-62706E023703}">
+                      <ahyp:hlinkClr xmlns:ahyp="http://schemas.microsoft.com/office/drawing/2018/hyperlinkcolor" val="tx"/>
+                    </a:ext>
+                  </a:extLst>
+                </a:hlinkClick>
+              </a:rPr>
+              <a:t>ЄЦБ Data Portal</a:t>
+            </a:r>
+            <a:pPr indent="0" marL="0">
+              <a:buNone/>
+            </a:pPr>
+            <a:r>
+              <a:rPr lang="en-US" sz="900" dirty="0">
+                <a:solidFill>
+                  <a:srgbClr val="5F6B6D"/>
+                </a:solidFill>
+              </a:rPr>
+              <a:t> · </a:t>
+            </a:r>
+            <a:pPr indent="0" marL="0">
+              <a:buNone/>
+            </a:pPr>
+            <a:r>
+              <a:rPr lang="en-US" sz="900" u="sng" dirty="0">
+                <a:solidFill>
+                  <a:srgbClr val="5F6B6D"/>
+                </a:solidFill>
+                <a:hlinkClick r:id="rId4" invalidUrl="" action="" tgtFrame="" tooltip="https://ec.europa.eu/eurostat/databrowser/view/prc_hicp_minr/default/table" history="1" highlightClick="0" endSnd="0">
+                  <a:extLst>
+                    <a:ext uri="{A12FA001-AC4F-418D-AE19-62706E023703}">
+                      <ahyp:hlinkClr xmlns:ahyp="http://schemas.microsoft.com/office/drawing/2018/hyperlinkcolor" val="tx"/>
+                    </a:ext>
+                  </a:extLst>
+                </a:hlinkClick>
+              </a:rPr>
+              <a:t>Eurostat HICP</a:t>
+            </a:r>
+            <a:endParaRPr lang="en-US" sz="900" dirty="0"/>
+          </a:p>
+        </p:txBody>
+      </p:sp>
+      <p:sp>
+        <p:nvSpPr>
+          <p:cNvPr id="5" name="eq1"/>
           <p:cNvSpPr/>
           <p:nvPr/>
         </p:nvSpPr>
@@ -23589,7 +25174,7 @@
       </p:sp>
       <p:sp>
         <p:nvSpPr>
-          <p:cNvPr id="5" name="Text 2"/>
+          <p:cNvPr id="6" name="Text 3"/>
           <p:cNvSpPr txBox="1"/>
           <p:nvPr/>
         </p:nvSpPr>
@@ -23625,7 +25210,7 @@
       </p:sp>
       <p:sp>
         <p:nvSpPr>
-          <p:cNvPr id="6" name="Text 3"/>
+          <p:cNvPr id="7" name="Text 4"/>
           <p:cNvSpPr txBox="1"/>
           <p:nvPr/>
         </p:nvSpPr>
@@ -23664,7 +25249,7 @@
       </p:sp>
       <p:sp>
         <p:nvSpPr>
-          <p:cNvPr id="7" name="eq2"/>
+          <p:cNvPr id="8" name="eq2"/>
           <p:cNvSpPr/>
           <p:nvPr/>
         </p:nvSpPr>
@@ -23691,7 +25276,7 @@
       </p:sp>
       <p:sp>
         <p:nvSpPr>
-          <p:cNvPr id="8" name="Text 5"/>
+          <p:cNvPr id="9" name="Text 6"/>
           <p:cNvSpPr txBox="1"/>
           <p:nvPr/>
         </p:nvSpPr>
@@ -23727,7 +25312,7 @@
       </p:sp>
       <p:sp>
         <p:nvSpPr>
-          <p:cNvPr id="9" name="Text 6"/>
+          <p:cNvPr id="10" name="Text 7"/>
           <p:cNvSpPr txBox="1"/>
           <p:nvPr/>
         </p:nvSpPr>
@@ -23766,7 +25351,7 @@
       </p:sp>
       <p:sp>
         <p:nvSpPr>
-          <p:cNvPr id="10" name="eq3"/>
+          <p:cNvPr id="11" name="eq3"/>
           <p:cNvSpPr/>
           <p:nvPr/>
         </p:nvSpPr>
@@ -23793,7 +25378,7 @@
       </p:sp>
       <p:sp>
         <p:nvSpPr>
-          <p:cNvPr id="11" name="Text 8"/>
+          <p:cNvPr id="12" name="Text 9"/>
           <p:cNvSpPr txBox="1"/>
           <p:nvPr/>
         </p:nvSpPr>
@@ -23829,7 +25414,7 @@
       </p:sp>
       <p:sp>
         <p:nvSpPr>
-          <p:cNvPr id="12" name="Text 9"/>
+          <p:cNvPr id="13" name="Text 10"/>
           <p:cNvSpPr txBox="1"/>
           <p:nvPr/>
         </p:nvSpPr>
@@ -23868,7 +25453,7 @@
       </p:sp>
       <p:sp>
         <p:nvSpPr>
-          <p:cNvPr id="13" name="eq4"/>
+          <p:cNvPr id="14" name="eq4"/>
           <p:cNvSpPr/>
           <p:nvPr/>
         </p:nvSpPr>
@@ -23895,7 +25480,7 @@
       </p:sp>
       <p:sp>
         <p:nvSpPr>
-          <p:cNvPr id="14" name="Text 11"/>
+          <p:cNvPr id="15" name="Text 12"/>
           <p:cNvSpPr txBox="1"/>
           <p:nvPr/>
         </p:nvSpPr>
@@ -23931,7 +25516,7 @@
       </p:sp>
       <p:sp>
         <p:nvSpPr>
-          <p:cNvPr id="15" name="Text 12"/>
+          <p:cNvPr id="16" name="Text 13"/>
           <p:cNvSpPr txBox="1"/>
           <p:nvPr/>
         </p:nvSpPr>
@@ -23970,7 +25555,7 @@
       </p:sp>
       <p:sp>
         <p:nvSpPr>
-          <p:cNvPr id="16" name="eq5"/>
+          <p:cNvPr id="17" name="eq5"/>
           <p:cNvSpPr/>
           <p:nvPr/>
         </p:nvSpPr>
@@ -23997,7 +25582,7 @@
       </p:sp>
       <p:sp>
         <p:nvSpPr>
-          <p:cNvPr id="17" name="Text 14"/>
+          <p:cNvPr id="18" name="Text 15"/>
           <p:cNvSpPr txBox="1"/>
           <p:nvPr/>
         </p:nvSpPr>
@@ -24033,7 +25618,7 @@
       </p:sp>
       <p:sp>
         <p:nvSpPr>
-          <p:cNvPr id="18" name="Text 15"/>
+          <p:cNvPr id="19" name="Text 16"/>
           <p:cNvSpPr txBox="1"/>
           <p:nvPr/>
         </p:nvSpPr>
@@ -24072,7 +25657,7 @@
       </p:sp>
       <p:sp>
         <p:nvSpPr>
-          <p:cNvPr id="19" name="num1"/>
+          <p:cNvPr id="20" name="num1"/>
           <p:cNvSpPr/>
           <p:nvPr/>
         </p:nvSpPr>
@@ -24092,7 +25677,7 @@
       </p:sp>
       <p:sp>
         <p:nvSpPr>
-          <p:cNvPr id="20" name="Text 17"/>
+          <p:cNvPr id="21" name="Text 18"/>
           <p:cNvSpPr txBox="1"/>
           <p:nvPr/>
         </p:nvSpPr>
@@ -24128,7 +25713,7 @@
       </p:sp>
       <p:sp>
         <p:nvSpPr>
-          <p:cNvPr id="21" name="point1"/>
+          <p:cNvPr id="22" name="point1"/>
           <p:cNvSpPr txBox="1"/>
           <p:nvPr/>
         </p:nvSpPr>
@@ -24164,7 +25749,7 @@
       </p:sp>
       <p:sp>
         <p:nvSpPr>
-          <p:cNvPr id="22" name="num2"/>
+          <p:cNvPr id="23" name="num2"/>
           <p:cNvSpPr/>
           <p:nvPr/>
         </p:nvSpPr>
@@ -24184,7 +25769,7 @@
       </p:sp>
       <p:sp>
         <p:nvSpPr>
-          <p:cNvPr id="23" name="Text 20"/>
+          <p:cNvPr id="24" name="Text 21"/>
           <p:cNvSpPr txBox="1"/>
           <p:nvPr/>
         </p:nvSpPr>
@@ -24220,7 +25805,7 @@
       </p:sp>
       <p:sp>
         <p:nvSpPr>
-          <p:cNvPr id="24" name="point2"/>
+          <p:cNvPr id="25" name="point2"/>
           <p:cNvSpPr txBox="1"/>
           <p:nvPr/>
         </p:nvSpPr>
@@ -24509,16 +26094,70 @@
           </a:p>
         </p:txBody>
       </p:sp>
+      <p:sp>
+        <p:nvSpPr>
+          <p:cNvPr id="4" name="sources"/>
+          <p:cNvSpPr txBox="1"/>
+          <p:nvPr/>
+        </p:nvSpPr>
+        <p:spPr>
+          <a:xfrm>
+            <a:off x="4937760" y="6455664"/>
+            <a:ext cx="6110935" cy="292608"/>
+          </a:xfrm>
+          <a:prstGeom prst="rect">
+            <a:avLst/>
+          </a:prstGeom>
+          <a:noFill/>
+          <a:ln/>
+        </p:spPr>
+        <p:txBody>
+          <a:bodyPr wrap="square" lIns="0" tIns="0" rIns="0" bIns="0" rtlCol="0" anchor="ctr"/>
+          <a:lstStyle/>
+          <a:p>
+            <a:pPr indent="0" marL="0">
+              <a:buNone/>
+            </a:pPr>
+            <a:r>
+              <a:rPr lang="en-US" sz="900" dirty="0">
+                <a:solidFill>
+                  <a:srgbClr val="5F6B6D"/>
+                </a:solidFill>
+              </a:rPr>
+              <a:t>Джерела: </a:t>
+            </a:r>
+            <a:pPr indent="0" marL="0">
+              <a:buNone/>
+            </a:pPr>
+            <a:r>
+              <a:rPr lang="en-US" sz="900" u="sng" dirty="0">
+                <a:solidFill>
+                  <a:srgbClr val="5F6B6D"/>
+                </a:solidFill>
+                <a:hlinkClick r:id="rId1" invalidUrl="" action="" tgtFrame="" tooltip="https://events.bank.gov.ua/uchallenge2026/files/nbu_challenge_model_2026.zip" history="1" highlightClick="0" endSnd="0">
+                  <a:extLst>
+                    <a:ext uri="{A12FA001-AC4F-418D-AE19-62706E023703}">
+                      <ahyp:hlinkClr xmlns:ahyp="http://schemas.microsoft.com/office/drawing/2018/hyperlinkcolor" val="tx"/>
+                    </a:ext>
+                  </a:extLst>
+                </a:hlinkClick>
+              </a:rPr>
+              <a:t>модель-шаблон НБУ</a:t>
+            </a:r>
+            <a:endParaRPr lang="en-US" sz="900" dirty="0"/>
+          </a:p>
+        </p:txBody>
+      </p:sp>
       <p:pic>
         <p:nvPicPr>
-          <p:cNvPr id="4" name="chart" descr="C:\Users\Lenovo\Documents\GitHub\nbu-challenge-2026\results\figures\ml_irf_rate.png">    </p:cNvPr>
+          <p:cNvPr id="5" name="chart" descr="C:\Users\Lenovo\Documents\GitHub\nbu-challenge-2026\results\figures\ml_irf_rate.png">    </p:cNvPr>
           <p:cNvPicPr>
             <a:picLocks noChangeAspect="1"/>
           </p:cNvPicPr>
           <p:nvPr/>
         </p:nvPicPr>
         <p:blipFill>
-          <a:blip r:embed="rId1"/>
+          <a:blip r:embed="rId2"/>
           <a:stretch>
             <a:fillRect/>
           </a:stretch>
@@ -25061,16 +26700,70 @@
           </a:p>
         </p:txBody>
       </p:sp>
+      <p:sp>
+        <p:nvSpPr>
+          <p:cNvPr id="4" name="sources"/>
+          <p:cNvSpPr txBox="1"/>
+          <p:nvPr/>
+        </p:nvSpPr>
+        <p:spPr>
+          <a:xfrm>
+            <a:off x="4937760" y="6455664"/>
+            <a:ext cx="6110935" cy="292608"/>
+          </a:xfrm>
+          <a:prstGeom prst="rect">
+            <a:avLst/>
+          </a:prstGeom>
+          <a:noFill/>
+          <a:ln/>
+        </p:spPr>
+        <p:txBody>
+          <a:bodyPr wrap="square" lIns="0" tIns="0" rIns="0" bIns="0" rtlCol="0" anchor="ctr"/>
+          <a:lstStyle/>
+          <a:p>
+            <a:pPr indent="0" marL="0">
+              <a:buNone/>
+            </a:pPr>
+            <a:r>
+              <a:rPr lang="en-US" sz="900" dirty="0">
+                <a:solidFill>
+                  <a:srgbClr val="5F6B6D"/>
+                </a:solidFill>
+              </a:rPr>
+              <a:t>Джерела: </a:t>
+            </a:r>
+            <a:pPr indent="0" marL="0">
+              <a:buNone/>
+            </a:pPr>
+            <a:r>
+              <a:rPr lang="en-US" sz="900" u="sng" dirty="0">
+                <a:solidFill>
+                  <a:srgbClr val="5F6B6D"/>
+                </a:solidFill>
+                <a:hlinkClick r:id="rId1" invalidUrl="" action="" tgtFrame="" tooltip="https://bank.gov.ua/ua/open-data/api-dev" history="1" highlightClick="0" endSnd="0">
+                  <a:extLst>
+                    <a:ext uri="{A12FA001-AC4F-418D-AE19-62706E023703}">
+                      <ahyp:hlinkClr xmlns:ahyp="http://schemas.microsoft.com/office/drawing/2018/hyperlinkcolor" val="tx"/>
+                    </a:ext>
+                  </a:extLst>
+                </a:hlinkClick>
+              </a:rPr>
+              <a:t>API НБУ</a:t>
+            </a:r>
+            <a:endParaRPr lang="en-US" sz="900" dirty="0"/>
+          </a:p>
+        </p:txBody>
+      </p:sp>
       <p:pic>
         <p:nvPicPr>
-          <p:cNvPr id="4" name="chart" descr="C:\Users\Lenovo\Documents\GitHub\nbu-challenge-2026\results\figures\fc_backtest.png">    </p:cNvPr>
+          <p:cNvPr id="5" name="chart" descr="C:\Users\Lenovo\Documents\GitHub\nbu-challenge-2026\results\figures\fc_backtest.png">    </p:cNvPr>
           <p:cNvPicPr>
             <a:picLocks noChangeAspect="1"/>
           </p:cNvPicPr>
           <p:nvPr/>
         </p:nvPicPr>
         <p:blipFill>
-          <a:blip r:embed="rId1"/>
+          <a:blip r:embed="rId2"/>
           <a:stretch>
             <a:fillRect/>
           </a:stretch>
@@ -25087,7 +26780,7 @@
       </p:pic>
       <p:sp>
         <p:nvSpPr>
-          <p:cNvPr id="5" name="num1"/>
+          <p:cNvPr id="6" name="num1"/>
           <p:cNvSpPr/>
           <p:nvPr/>
         </p:nvSpPr>
@@ -25107,7 +26800,7 @@
       </p:sp>
       <p:sp>
         <p:nvSpPr>
-          <p:cNvPr id="6" name="Text 2"/>
+          <p:cNvPr id="7" name="Text 3"/>
           <p:cNvSpPr txBox="1"/>
           <p:nvPr/>
         </p:nvSpPr>
@@ -25143,7 +26836,7 @@
       </p:sp>
       <p:sp>
         <p:nvSpPr>
-          <p:cNvPr id="7" name="point1"/>
+          <p:cNvPr id="8" name="point1"/>
           <p:cNvSpPr txBox="1"/>
           <p:nvPr/>
         </p:nvSpPr>
@@ -25179,7 +26872,7 @@
       </p:sp>
       <p:sp>
         <p:nvSpPr>
-          <p:cNvPr id="8" name="num2"/>
+          <p:cNvPr id="9" name="num2"/>
           <p:cNvSpPr/>
           <p:nvPr/>
         </p:nvSpPr>
@@ -25199,7 +26892,7 @@
       </p:sp>
       <p:sp>
         <p:nvSpPr>
-          <p:cNvPr id="9" name="Text 5"/>
+          <p:cNvPr id="10" name="Text 6"/>
           <p:cNvSpPr txBox="1"/>
           <p:nvPr/>
         </p:nvSpPr>
@@ -25235,7 +26928,7 @@
       </p:sp>
       <p:sp>
         <p:nvSpPr>
-          <p:cNvPr id="10" name="point2"/>
+          <p:cNvPr id="11" name="point2"/>
           <p:cNvSpPr txBox="1"/>
           <p:nvPr/>
         </p:nvSpPr>
@@ -25271,7 +26964,7 @@
       </p:sp>
       <p:sp>
         <p:nvSpPr>
-          <p:cNvPr id="11" name="num3"/>
+          <p:cNvPr id="12" name="num3"/>
           <p:cNvSpPr/>
           <p:nvPr/>
         </p:nvSpPr>
@@ -25291,7 +26984,7 @@
       </p:sp>
       <p:sp>
         <p:nvSpPr>
-          <p:cNvPr id="12" name="Text 8"/>
+          <p:cNvPr id="13" name="Text 9"/>
           <p:cNvSpPr txBox="1"/>
           <p:nvPr/>
         </p:nvSpPr>
@@ -25327,7 +27020,7 @@
       </p:sp>
       <p:sp>
         <p:nvSpPr>
-          <p:cNvPr id="13" name="point3"/>
+          <p:cNvPr id="14" name="point3"/>
           <p:cNvSpPr txBox="1"/>
           <p:nvPr/>
         </p:nvSpPr>
@@ -29276,12 +30969,70 @@
                         <a:buNone/>
                       </a:pPr>
                       <a:r>
+                        <a:rPr lang="en-US" sz="1300" u="sng" dirty="0">
+                          <a:hlinkClick r:id="rId1" invalidUrl="" action="" tgtFrame="" tooltip="https://bank.gov.ua/ua/open-data/api-dev" history="1" highlightClick="0" endSnd="0"/>
+                        </a:rPr>
+                        <a:t>API НБУ</a:t>
+                      </a:r>
+                      <a:pPr algn="l" indent="0" marL="0">
+                        <a:buNone/>
+                      </a:pPr>
+                      <a:r>
                         <a:rPr lang="en-US" sz="1300" dirty="0">
                           <a:solidFill>
                             <a:schemeClr val="tx1"/>
                           </a:solidFill>
                         </a:rPr>
-                        <a:t>Держстат через API НБУ; Інфляційний звіт НБУ (липень 2026); коментарі НБУ</a:t>
+                        <a:t> (Держстат); </a:t>
+                      </a:r>
+                      <a:pPr algn="l" indent="0" marL="0">
+                        <a:buNone/>
+                      </a:pPr>
+                      <a:r>
+                        <a:rPr lang="en-US" sz="1300" u="sng" dirty="0">
+                          <a:hlinkClick r:id="rId2" invalidUrl="" action="" tgtFrame="" tooltip="https://bank.gov.ua/files/macro/CCPI_m.xlsx" history="1" highlightClick="0" endSnd="0"/>
+                        </a:rPr>
+                        <a:t>базовий ІСЦ (НБУ)</a:t>
+                      </a:r>
+                      <a:pPr algn="l" indent="0" marL="0">
+                        <a:buNone/>
+                      </a:pPr>
+                      <a:r>
+                        <a:rPr lang="en-US" sz="1300" dirty="0">
+                          <a:solidFill>
+                            <a:schemeClr val="tx1"/>
+                          </a:solidFill>
+                        </a:rPr>
+                        <a:t>; </a:t>
+                      </a:r>
+                      <a:pPr algn="l" indent="0" marL="0">
+                        <a:buNone/>
+                      </a:pPr>
+                      <a:r>
+                        <a:rPr lang="en-US" sz="1300" u="sng" dirty="0">
+                          <a:hlinkClick r:id="rId3" invalidUrl="" action="" tgtFrame="" tooltip="https://bank.gov.ua/admin_uploads/article/Tables_Charts_2026-Q3.xlsx?v=19" history="1" highlightClick="0" endSnd="0"/>
+                        </a:rPr>
+                        <a:t>дані графіків ІЗ</a:t>
+                      </a:r>
+                      <a:pPr algn="l" indent="0" marL="0">
+                        <a:buNone/>
+                      </a:pPr>
+                      <a:r>
+                        <a:rPr lang="en-US" sz="1300" dirty="0">
+                          <a:solidFill>
+                            <a:schemeClr val="tx1"/>
+                          </a:solidFill>
+                        </a:rPr>
+                        <a:t>; </a:t>
+                      </a:r>
+                      <a:pPr algn="l" indent="0" marL="0">
+                        <a:buNone/>
+                      </a:pPr>
+                      <a:r>
+                        <a:rPr lang="en-US" sz="1300" u="sng" dirty="0">
+                          <a:hlinkClick r:id="rId4" invalidUrl="" action="" tgtFrame="" tooltip="https://bank.gov.ua/ua/news/all/komentar-natsionalnogo-banku-schodo-rivnya-inflyatsiyi-v-serpni-2026-roku" history="1" highlightClick="0" endSnd="0"/>
+                        </a:rPr>
+                        <a:t>коментар НБУ: інфляція в серпні</a:t>
                       </a:r>
                       <a:endParaRPr lang="en-US" sz="1300" dirty="0"/>
                     </a:p>
@@ -29400,12 +31151,21 @@
                         <a:buNone/>
                       </a:pPr>
                       <a:r>
+                        <a:rPr lang="en-US" sz="1300" u="sng" dirty="0">
+                          <a:hlinkClick r:id="rId5" invalidUrl="" action="" tgtFrame="" tooltip="https://bank.gov.ua/ua/open-data/api-dev" history="1" highlightClick="0" endSnd="0"/>
+                        </a:rPr>
+                        <a:t>API НБУ</a:t>
+                      </a:r>
+                      <a:pPr algn="l" indent="0" marL="0">
+                        <a:buNone/>
+                      </a:pPr>
+                      <a:r>
                         <a:rPr lang="en-US" sz="1300" dirty="0">
                           <a:solidFill>
                             <a:schemeClr val="tx1"/>
                           </a:solidFill>
                         </a:rPr>
-                        <a:t>API НБУ (statdirectory/key, exchange, kursf, res)</a:t>
+                        <a:t> (statdirectory/key, exchange, kursf, res)</a:t>
                       </a:r>
                       <a:endParaRPr lang="en-US" sz="1300" dirty="0"/>
                     </a:p>
@@ -29468,7 +31228,7 @@
                             <a:schemeClr val="tx1"/>
                           </a:solidFill>
                         </a:rPr>
-                        <a:t>Реальний ВВП</a:t>
+                        <a:t>Реальний ВВП, зарплати, бюджет</a:t>
                       </a:r>
                       <a:endParaRPr lang="en-US" sz="1300" dirty="0"/>
                     </a:p>
@@ -29524,12 +31284,70 @@
                         <a:buNone/>
                       </a:pPr>
                       <a:r>
+                        <a:rPr lang="en-US" sz="1300" u="sng" dirty="0">
+                          <a:hlinkClick r:id="rId6" invalidUrl="" action="" tgtFrame="" tooltip="https://stat.gov.ua/" history="1" highlightClick="0" endSnd="0"/>
+                        </a:rPr>
+                        <a:t>Держстат</a:t>
+                      </a:r>
+                      <a:pPr algn="l" indent="0" marL="0">
+                        <a:buNone/>
+                      </a:pPr>
+                      <a:r>
                         <a:rPr lang="en-US" sz="1300" dirty="0">
                           <a:solidFill>
                             <a:schemeClr val="tx1"/>
                           </a:solidFill>
                         </a:rPr>
-                        <a:t>Держстат (сезонно скоригований), коментар НБУ 17.09.2026</a:t>
+                        <a:t>; </a:t>
+                      </a:r>
+                      <a:pPr algn="l" indent="0" marL="0">
+                        <a:buNone/>
+                      </a:pPr>
+                      <a:r>
+                        <a:rPr lang="en-US" sz="1300" u="sng" dirty="0">
+                          <a:hlinkClick r:id="rId7" invalidUrl="" action="" tgtFrame="" tooltip="https://bank.gov.ua/ua/news/all/komentar-natsionalnogo-banku-schodo-zmini-realnogo-vvp-u-ii-kvartali-2026-roku" history="1" highlightClick="0" endSnd="0"/>
+                        </a:rPr>
+                        <a:t>коментар НБУ: ВВП II кв.</a:t>
+                      </a:r>
+                      <a:pPr algn="l" indent="0" marL="0">
+                        <a:buNone/>
+                      </a:pPr>
+                      <a:r>
+                        <a:rPr lang="en-US" sz="1300" dirty="0">
+                          <a:solidFill>
+                            <a:schemeClr val="tx1"/>
+                          </a:solidFill>
+                        </a:rPr>
+                        <a:t>; </a:t>
+                      </a:r>
+                      <a:pPr algn="l" indent="0" marL="0">
+                        <a:buNone/>
+                      </a:pPr>
+                      <a:r>
+                        <a:rPr lang="en-US" sz="1300" u="sng" dirty="0">
+                          <a:hlinkClick r:id="rId8" invalidUrl="" action="" tgtFrame="" tooltip="https://bank.gov.ua/files/macro/Wages_m.xlsx" history="1" highlightClick="0" endSnd="0"/>
+                        </a:rPr>
+                        <a:t>зарплати (НБУ)</a:t>
+                      </a:r>
+                      <a:pPr algn="l" indent="0" marL="0">
+                        <a:buNone/>
+                      </a:pPr>
+                      <a:r>
+                        <a:rPr lang="en-US" sz="1300" dirty="0">
+                          <a:solidFill>
+                            <a:schemeClr val="tx1"/>
+                          </a:solidFill>
+                        </a:rPr>
+                        <a:t>; </a:t>
+                      </a:r>
+                      <a:pPr algn="l" indent="0" marL="0">
+                        <a:buNone/>
+                      </a:pPr>
+                      <a:r>
+                        <a:rPr lang="en-US" sz="1300" u="sng" dirty="0">
+                          <a:hlinkClick r:id="rId9" invalidUrl="" action="" tgtFrame="" tooltip="https://bank.gov.ua/files/macro/S_budget_m.xlsx" history="1" highlightClick="0" endSnd="0"/>
+                        </a:rPr>
+                        <a:t>бюджет (НБУ)</a:t>
                       </a:r>
                       <a:endParaRPr lang="en-US" sz="1300" dirty="0"/>
                     </a:p>
@@ -29648,12 +31466,50 @@
                         <a:buNone/>
                       </a:pPr>
                       <a:r>
+                        <a:rPr lang="en-US" sz="1300" u="sng" dirty="0">
+                          <a:hlinkClick r:id="rId10" invalidUrl="" action="" tgtFrame="" tooltip="https://bank.gov.ua/ua/news/all/inflyatsiya-prishvidshitsya-u-drugomu-pivrichchi-ale-povernetsya-do-znijennya-nastupnogo-roku--inflyatsiyniy-zvit" history="1" highlightClick="0" endSnd="0"/>
+                        </a:rPr>
+                        <a:t>НБУ, Інфляційний звіт (липень 2026)</a:t>
+                      </a:r>
+                      <a:pPr algn="l" indent="0" marL="0">
+                        <a:buNone/>
+                      </a:pPr>
+                      <a:r>
                         <a:rPr lang="en-US" sz="1300" dirty="0">
                           <a:solidFill>
                             <a:schemeClr val="tx1"/>
                           </a:solidFill>
                         </a:rPr>
-                        <a:t>Інфляційний звіт і таблиця макропрогнозу, липень 2026</a:t>
+                        <a:t>; </a:t>
+                      </a:r>
+                      <a:pPr algn="l" indent="0" marL="0">
+                        <a:buNone/>
+                      </a:pPr>
+                      <a:r>
+                        <a:rPr lang="en-US" sz="1300" u="sng" dirty="0">
+                          <a:hlinkClick r:id="rId11" invalidUrl="" action="" tgtFrame="" tooltip="https://bank.gov.ua/admin_uploads/article/Macroeconomic_Forecast_table_2026_07.xlsx?v=19" history="1" highlightClick="0" endSnd="0"/>
+                        </a:rPr>
+                        <a:t>макропрогноз НБУ</a:t>
+                      </a:r>
+                      <a:pPr algn="l" indent="0" marL="0">
+                        <a:buNone/>
+                      </a:pPr>
+                      <a:r>
+                        <a:rPr lang="en-US" sz="1300" dirty="0">
+                          <a:solidFill>
+                            <a:schemeClr val="tx1"/>
+                          </a:solidFill>
+                        </a:rPr>
+                        <a:t>; </a:t>
+                      </a:r>
+                      <a:pPr algn="l" indent="0" marL="0">
+                        <a:buNone/>
+                      </a:pPr>
+                      <a:r>
+                        <a:rPr lang="en-US" sz="1300" u="sng" dirty="0">
+                          <a:hlinkClick r:id="rId12" invalidUrl="" action="" tgtFrame="" tooltip="https://bank.gov.ua/admin_uploads/article/Tables_Charts_2026-Q3.xlsx?v=19" history="1" highlightClick="0" endSnd="0"/>
+                        </a:rPr>
+                        <a:t>дані графіків ІЗ</a:t>
                       </a:r>
                       <a:endParaRPr lang="en-US" sz="1300" dirty="0"/>
                     </a:p>
@@ -29697,6 +31553,128 @@
                     </a:lnB>
                     <a:solidFill>
                       <a:srgbClr val="EAF1EF"/>
+                    </a:solidFill>
+                  </a:tcPr>
+                </a:tc>
+              </a:tr>
+              <a:tr h="438912">
+                <a:tc>
+                  <a:txBody>
+                    <a:bodyPr/>
+                    <a:lstStyle/>
+                    <a:p>
+                      <a:pPr algn="l" indent="0" marL="0">
+                        <a:buNone/>
+                      </a:pPr>
+                      <a:r>
+                        <a:rPr lang="en-US" sz="1300" b="1" dirty="0">
+                          <a:solidFill>
+                            <a:schemeClr val="tx1"/>
+                          </a:solidFill>
+                        </a:rPr>
+                        <a:t>Ціль і горизонт політики</a:t>
+                      </a:r>
+                      <a:endParaRPr lang="en-US" sz="1300" dirty="0"/>
+                    </a:p>
+                  </a:txBody>
+                  <a:tcPr marL="63500" marR="63500" marT="38100" marB="38100" anchor="ctr">
+                    <a:lnL w="6350" cap="flat" cmpd="sng" algn="ctr">
+                      <a:solidFill>
+                        <a:srgbClr val="C9D6D3"/>
+                      </a:solidFill>
+                      <a:prstDash val="solid"/>
+                      <a:round/>
+                      <a:headEnd type="none" w="med" len="med"/>
+                      <a:tailEnd type="none" w="med" len="med"/>
+                    </a:lnL>
+                    <a:lnR w="6350" cap="flat" cmpd="sng" algn="ctr">
+                      <a:solidFill>
+                        <a:srgbClr val="C9D6D3"/>
+                      </a:solidFill>
+                      <a:prstDash val="solid"/>
+                      <a:round/>
+                      <a:headEnd type="none" w="med" len="med"/>
+                      <a:tailEnd type="none" w="med" len="med"/>
+                    </a:lnR>
+                    <a:lnT w="6350" cap="flat" cmpd="sng" algn="ctr">
+                      <a:solidFill>
+                        <a:srgbClr val="C9D6D3"/>
+                      </a:solidFill>
+                      <a:prstDash val="solid"/>
+                      <a:round/>
+                      <a:headEnd type="none" w="med" len="med"/>
+                      <a:tailEnd type="none" w="med" len="med"/>
+                    </a:lnT>
+                    <a:lnB w="6350" cap="flat" cmpd="sng" algn="ctr">
+                      <a:solidFill>
+                        <a:srgbClr val="C9D6D3"/>
+                      </a:solidFill>
+                      <a:prstDash val="solid"/>
+                      <a:round/>
+                      <a:headEnd type="none" w="med" len="med"/>
+                      <a:tailEnd type="none" w="med" len="med"/>
+                    </a:lnB>
+                    <a:solidFill>
+                      <a:srgbClr val="FFFFFF"/>
+                    </a:solidFill>
+                  </a:tcPr>
+                </a:tc>
+                <a:tc>
+                  <a:txBody>
+                    <a:bodyPr/>
+                    <a:lstStyle/>
+                    <a:p>
+                      <a:pPr algn="l" indent="0" marL="0">
+                        <a:buNone/>
+                      </a:pPr>
+                      <a:r>
+                        <a:rPr lang="en-US" sz="1300" u="sng" dirty="0">
+                          <a:hlinkClick r:id="rId13" invalidUrl="" action="" tgtFrame="" tooltip="https://p4.bank.gov.ua/admin_uploads/article/MPG_2024-mt_eng.pdf" history="1" highlightClick="0" endSnd="0"/>
+                        </a:rPr>
+                        <a:t>Основні засади ГКП (2024)</a:t>
+                      </a:r>
+                      <a:endParaRPr lang="en-US" sz="1300" dirty="0"/>
+                    </a:p>
+                  </a:txBody>
+                  <a:tcPr marL="63500" marR="63500" marT="38100" marB="38100" anchor="ctr">
+                    <a:lnL w="6350" cap="flat" cmpd="sng" algn="ctr">
+                      <a:solidFill>
+                        <a:srgbClr val="C9D6D3"/>
+                      </a:solidFill>
+                      <a:prstDash val="solid"/>
+                      <a:round/>
+                      <a:headEnd type="none" w="med" len="med"/>
+                      <a:tailEnd type="none" w="med" len="med"/>
+                    </a:lnL>
+                    <a:lnR w="6350" cap="flat" cmpd="sng" algn="ctr">
+                      <a:solidFill>
+                        <a:srgbClr val="C9D6D3"/>
+                      </a:solidFill>
+                      <a:prstDash val="solid"/>
+                      <a:round/>
+                      <a:headEnd type="none" w="med" len="med"/>
+                      <a:tailEnd type="none" w="med" len="med"/>
+                    </a:lnR>
+                    <a:lnT w="6350" cap="flat" cmpd="sng" algn="ctr">
+                      <a:solidFill>
+                        <a:srgbClr val="C9D6D3"/>
+                      </a:solidFill>
+                      <a:prstDash val="solid"/>
+                      <a:round/>
+                      <a:headEnd type="none" w="med" len="med"/>
+                      <a:tailEnd type="none" w="med" len="med"/>
+                    </a:lnT>
+                    <a:lnB w="6350" cap="flat" cmpd="sng" algn="ctr">
+                      <a:solidFill>
+                        <a:srgbClr val="C9D6D3"/>
+                      </a:solidFill>
+                      <a:prstDash val="solid"/>
+                      <a:round/>
+                      <a:headEnd type="none" w="med" len="med"/>
+                      <a:tailEnd type="none" w="med" len="med"/>
+                    </a:lnB>
+                    <a:solidFill>
+                      <a:srgbClr val="FFFFFF"/>
                     </a:solidFill>
                   </a:tcPr>
                 </a:tc>
@@ -29759,7 +31737,7 @@
                       <a:tailEnd type="none" w="med" len="med"/>
                     </a:lnB>
                     <a:solidFill>
-                      <a:srgbClr val="FFFFFF"/>
+                      <a:srgbClr val="EAF1EF"/>
                     </a:solidFill>
                   </a:tcPr>
                 </a:tc>
@@ -29772,12 +31750,50 @@
                         <a:buNone/>
                       </a:pPr>
                       <a:r>
+                        <a:rPr lang="en-US" sz="1300" u="sng" dirty="0">
+                          <a:hlinkClick r:id="rId14" invalidUrl="" action="" tgtFrame="" tooltip="https://ec.europa.eu/eurostat/databrowser/view/prc_hicp_minr/default/table" history="1" highlightClick="0" endSnd="0"/>
+                        </a:rPr>
+                        <a:t>Eurostat HICP</a:t>
+                      </a:r>
+                      <a:pPr algn="l" indent="0" marL="0">
+                        <a:buNone/>
+                      </a:pPr>
+                      <a:r>
                         <a:rPr lang="en-US" sz="1300" dirty="0">
                           <a:solidFill>
                             <a:schemeClr val="tx1"/>
                           </a:solidFill>
                         </a:rPr>
-                        <a:t>Eurostat (HICP, prc_hicp_minr), ЄЦБ (ВВП EA21, депозитна ставка), прогноз ЄЦБ вересень 2026</a:t>
+                        <a:t>; </a:t>
+                      </a:r>
+                      <a:pPr algn="l" indent="0" marL="0">
+                        <a:buNone/>
+                      </a:pPr>
+                      <a:r>
+                        <a:rPr lang="en-US" sz="1300" u="sng" dirty="0">
+                          <a:hlinkClick r:id="rId15" invalidUrl="" action="" tgtFrame="" tooltip="https://data.ecb.europa.eu/" history="1" highlightClick="0" endSnd="0"/>
+                        </a:rPr>
+                        <a:t>ЄЦБ Data Portal</a:t>
+                      </a:r>
+                      <a:pPr algn="l" indent="0" marL="0">
+                        <a:buNone/>
+                      </a:pPr>
+                      <a:r>
+                        <a:rPr lang="en-US" sz="1300" dirty="0">
+                          <a:solidFill>
+                            <a:schemeClr val="tx1"/>
+                          </a:solidFill>
+                        </a:rPr>
+                        <a:t>; </a:t>
+                      </a:r>
+                      <a:pPr algn="l" indent="0" marL="0">
+                        <a:buNone/>
+                      </a:pPr>
+                      <a:r>
+                        <a:rPr lang="en-US" sz="1300" u="sng" dirty="0">
+                          <a:hlinkClick r:id="rId16" invalidUrl="" action="" tgtFrame="" tooltip="https://www.ecb.europa.eu/press/projections/html/index.en.html" history="1" highlightClick="0" endSnd="0"/>
+                        </a:rPr>
+                        <a:t>прогноз ЄЦБ (вересень 2026)</a:t>
                       </a:r>
                       <a:endParaRPr lang="en-US" sz="1300" dirty="0"/>
                     </a:p>
@@ -29820,7 +31836,7 @@
                       <a:tailEnd type="none" w="med" len="med"/>
                     </a:lnB>
                     <a:solidFill>
-                      <a:srgbClr val="FFFFFF"/>
+                      <a:srgbClr val="EAF1EF"/>
                     </a:solidFill>
                   </a:tcPr>
                 </a:tc>
@@ -29883,7 +31899,7 @@
                       <a:tailEnd type="none" w="med" len="med"/>
                     </a:lnB>
                     <a:solidFill>
-                      <a:srgbClr val="EAF1EF"/>
+                      <a:srgbClr val="FFFFFF"/>
                     </a:solidFill>
                   </a:tcPr>
                 </a:tc>
@@ -29896,12 +31912,41 @@
                         <a:buNone/>
                       </a:pPr>
                       <a:r>
+                        <a:rPr lang="en-US" sz="1300" u="sng" dirty="0">
+                          <a:hlinkClick r:id="rId17" invalidUrl="" action="" tgtFrame="" tooltip="https://db.nomics.world/EIA/PET/RBRTE.M" history="1" highlightClick="0" endSnd="0"/>
+                        </a:rPr>
+                        <a:t>EIA Brent</a:t>
+                      </a:r>
+                      <a:pPr algn="l" indent="0" marL="0">
+                        <a:buNone/>
+                      </a:pPr>
+                      <a:r>
                         <a:rPr lang="en-US" sz="1300" dirty="0">
                           <a:solidFill>
                             <a:schemeClr val="tx1"/>
                           </a:solidFill>
                         </a:rPr>
-                        <a:t>EIA (через DBnomics), ф'ючерси NYMEX BZ (Yahoo Finance); курс USD/EUR — ЄЦБ</a:t>
+                        <a:t> (DBnomics); </a:t>
+                      </a:r>
+                      <a:pPr algn="l" indent="0" marL="0">
+                        <a:buNone/>
+                      </a:pPr>
+                      <a:r>
+                        <a:rPr lang="en-US" sz="1300" u="sng" dirty="0">
+                          <a:hlinkClick r:id="rId18" invalidUrl="" action="" tgtFrame="" tooltip="https://finance.yahoo.com/quote/BZ%3DF/" history="1" highlightClick="0" endSnd="0"/>
+                        </a:rPr>
+                        <a:t>ф'ючерси Brent</a:t>
+                      </a:r>
+                      <a:pPr algn="l" indent="0" marL="0">
+                        <a:buNone/>
+                      </a:pPr>
+                      <a:r>
+                        <a:rPr lang="en-US" sz="1300" dirty="0">
+                          <a:solidFill>
+                            <a:schemeClr val="tx1"/>
+                          </a:solidFill>
+                        </a:rPr>
+                        <a:t> (NYMEX BZ)</a:t>
                       </a:r>
                       <a:endParaRPr lang="en-US" sz="1300" dirty="0"/>
                     </a:p>
@@ -29944,7 +31989,7 @@
                       <a:tailEnd type="none" w="med" len="med"/>
                     </a:lnB>
                     <a:solidFill>
-                      <a:srgbClr val="EAF1EF"/>
+                      <a:srgbClr val="FFFFFF"/>
                     </a:solidFill>
                   </a:tcPr>
                 </a:tc>
@@ -30007,7 +32052,7 @@
                       <a:tailEnd type="none" w="med" len="med"/>
                     </a:lnB>
                     <a:solidFill>
-                      <a:srgbClr val="FFFFFF"/>
+                      <a:srgbClr val="EAF1EF"/>
                     </a:solidFill>
                   </a:tcPr>
                 </a:tc>
@@ -30020,12 +32065,30 @@
                         <a:buNone/>
                       </a:pPr>
                       <a:r>
+                        <a:rPr lang="en-US" sz="1300" u="sng" dirty="0">
+                          <a:hlinkClick r:id="rId19" invalidUrl="" action="" tgtFrame="" tooltip="https://bank.gov.ua/ua/news/all/natsionalniy-bank-ukrayini-pidvischiv-oblikovu-stavku-do-16" history="1" highlightClick="0" endSnd="0"/>
+                        </a:rPr>
+                        <a:t>рішення НБУ 17.09.2026</a:t>
+                      </a:r>
+                      <a:pPr algn="l" indent="0" marL="0">
+                        <a:buNone/>
+                      </a:pPr>
+                      <a:r>
                         <a:rPr lang="en-US" sz="1300" dirty="0">
                           <a:solidFill>
                             <a:schemeClr val="tx1"/>
                           </a:solidFill>
                         </a:rPr>
-                        <a:t>Пресреліз 17.09.2026, підсумки дискусії КМП 28.09.2026</a:t>
+                        <a:t>; </a:t>
+                      </a:r>
+                      <a:pPr algn="l" indent="0" marL="0">
+                        <a:buNone/>
+                      </a:pPr>
+                      <a:r>
+                        <a:rPr lang="en-US" sz="1300" u="sng" dirty="0">
+                          <a:hlinkClick r:id="rId20" invalidUrl="" action="" tgtFrame="" tooltip="https://bank.gov.ua/ua/news/all/pidsumki-diskusiyi-chleniv-komitetu-z-monetarnoyi-politiki-natsionalnogo-banku-schodo-rivnya-oblikovoyi-stavki-16-veresnya-2026-roku" history="1" highlightClick="0" endSnd="0"/>
+                        </a:rPr>
+                        <a:t>підсумки дискусії КМП</a:t>
                       </a:r>
                       <a:endParaRPr lang="en-US" sz="1300" dirty="0"/>
                     </a:p>
@@ -30068,7 +32131,7 @@
                       <a:tailEnd type="none" w="med" len="med"/>
                     </a:lnB>
                     <a:solidFill>
-                      <a:srgbClr val="FFFFFF"/>
+                      <a:srgbClr val="EAF1EF"/>
                     </a:solidFill>
                   </a:tcPr>
                 </a:tc>
@@ -30088,7 +32151,7 @@
                             <a:schemeClr val="tx1"/>
                           </a:solidFill>
                         </a:rPr>
-                        <a:t>Валютні обмеження</a:t>
+                        <a:t>Валютні обмеження, МВФ</a:t>
                       </a:r>
                       <a:endParaRPr lang="en-US" sz="1300" dirty="0"/>
                     </a:p>
@@ -30131,7 +32194,7 @@
                       <a:tailEnd type="none" w="med" len="med"/>
                     </a:lnB>
                     <a:solidFill>
-                      <a:srgbClr val="EAF1EF"/>
+                      <a:srgbClr val="FFFFFF"/>
                     </a:solidFill>
                   </a:tcPr>
                 </a:tc>
@@ -30144,12 +32207,50 @@
                         <a:buNone/>
                       </a:pPr>
                       <a:r>
+                        <a:rPr lang="en-US" sz="1300" u="sng" dirty="0">
+                          <a:hlinkClick r:id="rId21" invalidUrl="" action="" tgtFrame="" tooltip="https://bank.gov.ua/admin_uploads/article/Strategy_for_easing_FX_restrictions_07-07-2023.pdf?v=19" history="1" highlightClick="0" endSnd="0"/>
+                        </a:rPr>
+                        <a:t>Стратегія пом'якшення валютних обмежень</a:t>
+                      </a:r>
+                      <a:pPr algn="l" indent="0" marL="0">
+                        <a:buNone/>
+                      </a:pPr>
+                      <a:r>
                         <a:rPr lang="en-US" sz="1300" dirty="0">
                           <a:solidFill>
                             <a:schemeClr val="tx1"/>
                           </a:solidFill>
                         </a:rPr>
-                        <a:t>Стратегія НБУ (2023), пакет пом'якшення 10.08.2026</a:t>
+                        <a:t>; </a:t>
+                      </a:r>
+                      <a:pPr algn="l" indent="0" marL="0">
+                        <a:buNone/>
+                      </a:pPr>
+                      <a:r>
+                        <a:rPr lang="en-US" sz="1300" u="sng" dirty="0">
+                          <a:hlinkClick r:id="rId22" invalidUrl="" action="" tgtFrame="" tooltip="https://bank.gov.ua/ua/news/all/nbu-vprovadjuye-paket-pomyakshennya-valyutnih-obmejen-z-osnovnim-fokusom-na-pidtrimtsi-naselennya" history="1" highlightClick="0" endSnd="0"/>
+                        </a:rPr>
+                        <a:t>пакет пом'якшення валютних обмежень</a:t>
+                      </a:r>
+                      <a:pPr algn="l" indent="0" marL="0">
+                        <a:buNone/>
+                      </a:pPr>
+                      <a:r>
+                        <a:rPr lang="en-US" sz="1300" dirty="0">
+                          <a:solidFill>
+                            <a:schemeClr val="tx1"/>
+                          </a:solidFill>
+                        </a:rPr>
+                        <a:t>; </a:t>
+                      </a:r>
+                      <a:pPr algn="l" indent="0" marL="0">
+                        <a:buNone/>
+                      </a:pPr>
+                      <a:r>
+                        <a:rPr lang="en-US" sz="1300" u="sng" dirty="0">
+                          <a:hlinkClick r:id="rId23" invalidUrl="" action="" tgtFrame="" tooltip="https://bank.gov.ua/ua/news/all/rada-mvf-shvalila-pershiy-pereglyad-programi-rozshirenogo-finansuvannya-ta-zatverdila-vidilennya-transhu-obsyagom-690-mln-dol-ssha" history="1" highlightClick="0" endSnd="0"/>
+                        </a:rPr>
+                        <a:t>Рада МВФ: перегляд програми</a:t>
                       </a:r>
                       <a:endParaRPr lang="en-US" sz="1300" dirty="0"/>
                     </a:p>
@@ -30192,7 +32293,7 @@
                       <a:tailEnd type="none" w="med" len="med"/>
                     </a:lnB>
                     <a:solidFill>
-                      <a:srgbClr val="EAF1EF"/>
+                      <a:srgbClr val="FFFFFF"/>
                     </a:solidFill>
                   </a:tcPr>
                 </a:tc>
@@ -30255,7 +32356,7 @@
                       <a:tailEnd type="none" w="med" len="med"/>
                     </a:lnB>
                     <a:solidFill>
-                      <a:srgbClr val="FFFFFF"/>
+                      <a:srgbClr val="EAF1EF"/>
                     </a:solidFill>
                   </a:tcPr>
                 </a:tc>
@@ -30268,12 +32369,21 @@
                         <a:buNone/>
                       </a:pPr>
                       <a:r>
+                        <a:rPr lang="en-US" sz="1300" u="sng" dirty="0">
+                          <a:hlinkClick r:id="rId24" invalidUrl="" action="" tgtFrame="" tooltip="https://events.bank.gov.ua/uchallenge2026/files/nbu_challenge_model_2026.zip" history="1" highlightClick="0" endSnd="0"/>
+                        </a:rPr>
+                        <a:t>модель-шаблон НБУ</a:t>
+                      </a:r>
+                      <a:pPr algn="l" indent="0" marL="0">
+                        <a:buNone/>
+                      </a:pPr>
+                      <a:r>
                         <a:rPr lang="en-US" sz="1300" dirty="0">
                           <a:solidFill>
                             <a:schemeClr val="tx1"/>
                           </a:solidFill>
                         </a:rPr>
-                        <a:t>Шаблон QPM NBU University Challenge 2026 + розширення команди; Python і MATLAB R2026b + IRIS</a:t>
+                        <a:t> + розширення команди; Python і MATLAB R2026b + IRIS</a:t>
                       </a:r>
                       <a:endParaRPr lang="en-US" sz="1300" dirty="0"/>
                     </a:p>
@@ -30316,7 +32426,7 @@
                       <a:tailEnd type="none" w="med" len="med"/>
                     </a:lnB>
                     <a:solidFill>
-                      <a:srgbClr val="FFFFFF"/>
+                      <a:srgbClr val="EAF1EF"/>
                     </a:solidFill>
                   </a:tcPr>
                 </a:tc>
@@ -30439,16 +32549,157 @@
           </a:p>
         </p:txBody>
       </p:sp>
+      <p:sp>
+        <p:nvSpPr>
+          <p:cNvPr id="4" name="sources"/>
+          <p:cNvSpPr txBox="1"/>
+          <p:nvPr/>
+        </p:nvSpPr>
+        <p:spPr>
+          <a:xfrm>
+            <a:off x="4937760" y="6455664"/>
+            <a:ext cx="6110935" cy="292608"/>
+          </a:xfrm>
+          <a:prstGeom prst="rect">
+            <a:avLst/>
+          </a:prstGeom>
+          <a:noFill/>
+          <a:ln/>
+        </p:spPr>
+        <p:txBody>
+          <a:bodyPr wrap="square" lIns="0" tIns="0" rIns="0" bIns="0" rtlCol="0" anchor="ctr"/>
+          <a:lstStyle/>
+          <a:p>
+            <a:pPr indent="0" marL="0">
+              <a:buNone/>
+            </a:pPr>
+            <a:r>
+              <a:rPr lang="en-US" sz="900" dirty="0">
+                <a:solidFill>
+                  <a:srgbClr val="5F6B6D"/>
+                </a:solidFill>
+              </a:rPr>
+              <a:t>Джерела: </a:t>
+            </a:r>
+            <a:pPr indent="0" marL="0">
+              <a:buNone/>
+            </a:pPr>
+            <a:r>
+              <a:rPr lang="en-US" sz="900" u="sng" dirty="0">
+                <a:solidFill>
+                  <a:srgbClr val="5F6B6D"/>
+                </a:solidFill>
+                <a:hlinkClick r:id="rId1" invalidUrl="" action="" tgtFrame="" tooltip="https://www.ecb.europa.eu/press/projections/html/index.en.html" history="1" highlightClick="0" endSnd="0">
+                  <a:extLst>
+                    <a:ext uri="{A12FA001-AC4F-418D-AE19-62706E023703}">
+                      <ahyp:hlinkClr xmlns:ahyp="http://schemas.microsoft.com/office/drawing/2018/hyperlinkcolor" val="tx"/>
+                    </a:ext>
+                  </a:extLst>
+                </a:hlinkClick>
+              </a:rPr>
+              <a:t>прогноз ЄЦБ (вересень 2026)</a:t>
+            </a:r>
+            <a:pPr indent="0" marL="0">
+              <a:buNone/>
+            </a:pPr>
+            <a:r>
+              <a:rPr lang="en-US" sz="900" dirty="0">
+                <a:solidFill>
+                  <a:srgbClr val="5F6B6D"/>
+                </a:solidFill>
+              </a:rPr>
+              <a:t> · </a:t>
+            </a:r>
+            <a:pPr indent="0" marL="0">
+              <a:buNone/>
+            </a:pPr>
+            <a:r>
+              <a:rPr lang="en-US" sz="900" u="sng" dirty="0">
+                <a:solidFill>
+                  <a:srgbClr val="5F6B6D"/>
+                </a:solidFill>
+                <a:hlinkClick r:id="rId2" invalidUrl="" action="" tgtFrame="" tooltip="https://ec.europa.eu/eurostat/databrowser/view/prc_hicp_minr/default/table" history="1" highlightClick="0" endSnd="0">
+                  <a:extLst>
+                    <a:ext uri="{A12FA001-AC4F-418D-AE19-62706E023703}">
+                      <ahyp:hlinkClr xmlns:ahyp="http://schemas.microsoft.com/office/drawing/2018/hyperlinkcolor" val="tx"/>
+                    </a:ext>
+                  </a:extLst>
+                </a:hlinkClick>
+              </a:rPr>
+              <a:t>Eurostat HICP</a:t>
+            </a:r>
+            <a:pPr indent="0" marL="0">
+              <a:buNone/>
+            </a:pPr>
+            <a:r>
+              <a:rPr lang="en-US" sz="900" dirty="0">
+                <a:solidFill>
+                  <a:srgbClr val="5F6B6D"/>
+                </a:solidFill>
+              </a:rPr>
+              <a:t> · </a:t>
+            </a:r>
+            <a:pPr indent="0" marL="0">
+              <a:buNone/>
+            </a:pPr>
+            <a:r>
+              <a:rPr lang="en-US" sz="900" u="sng" dirty="0">
+                <a:solidFill>
+                  <a:srgbClr val="5F6B6D"/>
+                </a:solidFill>
+                <a:hlinkClick r:id="rId3" invalidUrl="" action="" tgtFrame="" tooltip="https://db.nomics.world/EIA/PET/RBRTE.M" history="1" highlightClick="0" endSnd="0">
+                  <a:extLst>
+                    <a:ext uri="{A12FA001-AC4F-418D-AE19-62706E023703}">
+                      <ahyp:hlinkClr xmlns:ahyp="http://schemas.microsoft.com/office/drawing/2018/hyperlinkcolor" val="tx"/>
+                    </a:ext>
+                  </a:extLst>
+                </a:hlinkClick>
+              </a:rPr>
+              <a:t>EIA Brent</a:t>
+            </a:r>
+            <a:pPr indent="0" marL="0">
+              <a:buNone/>
+            </a:pPr>
+            <a:r>
+              <a:rPr lang="en-US" sz="900" dirty="0">
+                <a:solidFill>
+                  <a:srgbClr val="5F6B6D"/>
+                </a:solidFill>
+              </a:rPr>
+              <a:t> · </a:t>
+            </a:r>
+            <a:pPr indent="0" marL="0">
+              <a:buNone/>
+            </a:pPr>
+            <a:r>
+              <a:rPr lang="en-US" sz="900" u="sng" dirty="0">
+                <a:solidFill>
+                  <a:srgbClr val="5F6B6D"/>
+                </a:solidFill>
+                <a:hlinkClick r:id="rId4" invalidUrl="" action="" tgtFrame="" tooltip="https://finance.yahoo.com/quote/BZ%3DF/" history="1" highlightClick="0" endSnd="0">
+                  <a:extLst>
+                    <a:ext uri="{A12FA001-AC4F-418D-AE19-62706E023703}">
+                      <ahyp:hlinkClr xmlns:ahyp="http://schemas.microsoft.com/office/drawing/2018/hyperlinkcolor" val="tx"/>
+                    </a:ext>
+                  </a:extLst>
+                </a:hlinkClick>
+              </a:rPr>
+              <a:t>ф'ючерси Brent</a:t>
+            </a:r>
+            <a:endParaRPr lang="en-US" sz="900" dirty="0"/>
+          </a:p>
+        </p:txBody>
+      </p:sp>
       <p:pic>
         <p:nvPicPr>
-          <p:cNvPr id="4" name="chart" descr="C:\Users\Lenovo\Documents\GitHub\nbu-challenge-2026\results\figures\ov_external.png">    </p:cNvPr>
+          <p:cNvPr id="5" name="chart" descr="C:\Users\Lenovo\Documents\GitHub\nbu-challenge-2026\results\figures\ov_external.png">    </p:cNvPr>
           <p:cNvPicPr>
             <a:picLocks noChangeAspect="1"/>
           </p:cNvPicPr>
           <p:nvPr/>
         </p:nvPicPr>
         <p:blipFill>
-          <a:blip r:embed="rId1"/>
+          <a:blip r:embed="rId5"/>
           <a:stretch>
             <a:fillRect/>
           </a:stretch>
@@ -30465,7 +32716,7 @@
       </p:pic>
       <p:sp>
         <p:nvSpPr>
-          <p:cNvPr id="5" name="num1"/>
+          <p:cNvPr id="6" name="num1"/>
           <p:cNvSpPr/>
           <p:nvPr/>
         </p:nvSpPr>
@@ -30485,7 +32736,7 @@
       </p:sp>
       <p:sp>
         <p:nvSpPr>
-          <p:cNvPr id="6" name="Text 2"/>
+          <p:cNvPr id="7" name="Text 3"/>
           <p:cNvSpPr txBox="1"/>
           <p:nvPr/>
         </p:nvSpPr>
@@ -30521,7 +32772,7 @@
       </p:sp>
       <p:sp>
         <p:nvSpPr>
-          <p:cNvPr id="7" name="point1"/>
+          <p:cNvPr id="8" name="point1"/>
           <p:cNvSpPr txBox="1"/>
           <p:nvPr/>
         </p:nvSpPr>
@@ -30557,7 +32808,7 @@
       </p:sp>
       <p:sp>
         <p:nvSpPr>
-          <p:cNvPr id="8" name="num2"/>
+          <p:cNvPr id="9" name="num2"/>
           <p:cNvSpPr/>
           <p:nvPr/>
         </p:nvSpPr>
@@ -30577,7 +32828,7 @@
       </p:sp>
       <p:sp>
         <p:nvSpPr>
-          <p:cNvPr id="9" name="Text 5"/>
+          <p:cNvPr id="10" name="Text 6"/>
           <p:cNvSpPr txBox="1"/>
           <p:nvPr/>
         </p:nvSpPr>
@@ -30613,7 +32864,7 @@
       </p:sp>
       <p:sp>
         <p:nvSpPr>
-          <p:cNvPr id="10" name="point2"/>
+          <p:cNvPr id="11" name="point2"/>
           <p:cNvSpPr txBox="1"/>
           <p:nvPr/>
         </p:nvSpPr>
@@ -30649,7 +32900,7 @@
       </p:sp>
       <p:sp>
         <p:nvSpPr>
-          <p:cNvPr id="11" name="num3"/>
+          <p:cNvPr id="12" name="num3"/>
           <p:cNvSpPr/>
           <p:nvPr/>
         </p:nvSpPr>
@@ -30669,7 +32920,7 @@
       </p:sp>
       <p:sp>
         <p:nvSpPr>
-          <p:cNvPr id="12" name="Text 8"/>
+          <p:cNvPr id="13" name="Text 9"/>
           <p:cNvSpPr txBox="1"/>
           <p:nvPr/>
         </p:nvSpPr>
@@ -30705,7 +32956,7 @@
       </p:sp>
       <p:sp>
         <p:nvSpPr>
-          <p:cNvPr id="13" name="point3"/>
+          <p:cNvPr id="14" name="point3"/>
           <p:cNvSpPr txBox="1"/>
           <p:nvPr/>
         </p:nvSpPr>
@@ -30853,16 +33104,128 @@
           </a:p>
         </p:txBody>
       </p:sp>
+      <p:sp>
+        <p:nvSpPr>
+          <p:cNvPr id="4" name="sources"/>
+          <p:cNvSpPr txBox="1"/>
+          <p:nvPr/>
+        </p:nvSpPr>
+        <p:spPr>
+          <a:xfrm>
+            <a:off x="4937760" y="6455664"/>
+            <a:ext cx="6110935" cy="292608"/>
+          </a:xfrm>
+          <a:prstGeom prst="rect">
+            <a:avLst/>
+          </a:prstGeom>
+          <a:noFill/>
+          <a:ln/>
+        </p:spPr>
+        <p:txBody>
+          <a:bodyPr wrap="square" lIns="0" tIns="0" rIns="0" bIns="0" rtlCol="0" anchor="ctr"/>
+          <a:lstStyle/>
+          <a:p>
+            <a:pPr indent="0" marL="0">
+              <a:buNone/>
+            </a:pPr>
+            <a:r>
+              <a:rPr lang="en-US" sz="900" dirty="0">
+                <a:solidFill>
+                  <a:srgbClr val="5F6B6D"/>
+                </a:solidFill>
+              </a:rPr>
+              <a:t>Джерела: </a:t>
+            </a:r>
+            <a:pPr indent="0" marL="0">
+              <a:buNone/>
+            </a:pPr>
+            <a:r>
+              <a:rPr lang="en-US" sz="900" u="sng" dirty="0">
+                <a:solidFill>
+                  <a:srgbClr val="5F6B6D"/>
+                </a:solidFill>
+                <a:hlinkClick r:id="rId1" invalidUrl="" action="" tgtFrame="" tooltip="https://bank.gov.ua/ua/news/all/komentar-natsionalnogo-banku-schodo-rivnya-inflyatsiyi-v-serpni-2026-roku" history="1" highlightClick="0" endSnd="0">
+                  <a:extLst>
+                    <a:ext uri="{A12FA001-AC4F-418D-AE19-62706E023703}">
+                      <ahyp:hlinkClr xmlns:ahyp="http://schemas.microsoft.com/office/drawing/2018/hyperlinkcolor" val="tx"/>
+                    </a:ext>
+                  </a:extLst>
+                </a:hlinkClick>
+              </a:rPr>
+              <a:t>коментар НБУ: інфляція в серпні</a:t>
+            </a:r>
+            <a:pPr indent="0" marL="0">
+              <a:buNone/>
+            </a:pPr>
+            <a:r>
+              <a:rPr lang="en-US" sz="900" dirty="0">
+                <a:solidFill>
+                  <a:srgbClr val="5F6B6D"/>
+                </a:solidFill>
+              </a:rPr>
+              <a:t> · </a:t>
+            </a:r>
+            <a:pPr indent="0" marL="0">
+              <a:buNone/>
+            </a:pPr>
+            <a:r>
+              <a:rPr lang="en-US" sz="900" u="sng" dirty="0">
+                <a:solidFill>
+                  <a:srgbClr val="5F6B6D"/>
+                </a:solidFill>
+                <a:hlinkClick r:id="rId2" invalidUrl="" action="" tgtFrame="" tooltip="https://bank.gov.ua/admin_uploads/article/Tables_Charts_2026-Q3.xlsx?v=19" history="1" highlightClick="0" endSnd="0">
+                  <a:extLst>
+                    <a:ext uri="{A12FA001-AC4F-418D-AE19-62706E023703}">
+                      <ahyp:hlinkClr xmlns:ahyp="http://schemas.microsoft.com/office/drawing/2018/hyperlinkcolor" val="tx"/>
+                    </a:ext>
+                  </a:extLst>
+                </a:hlinkClick>
+              </a:rPr>
+              <a:t>дані графіків ІЗ</a:t>
+            </a:r>
+            <a:pPr indent="0" marL="0">
+              <a:buNone/>
+            </a:pPr>
+            <a:r>
+              <a:rPr lang="en-US" sz="900" dirty="0">
+                <a:solidFill>
+                  <a:srgbClr val="5F6B6D"/>
+                </a:solidFill>
+              </a:rPr>
+              <a:t> · </a:t>
+            </a:r>
+            <a:pPr indent="0" marL="0">
+              <a:buNone/>
+            </a:pPr>
+            <a:r>
+              <a:rPr lang="en-US" sz="900" u="sng" dirty="0">
+                <a:solidFill>
+                  <a:srgbClr val="5F6B6D"/>
+                </a:solidFill>
+                <a:hlinkClick r:id="rId3" invalidUrl="" action="" tgtFrame="" tooltip="https://bank.gov.ua/ua/open-data/api-dev" history="1" highlightClick="0" endSnd="0">
+                  <a:extLst>
+                    <a:ext uri="{A12FA001-AC4F-418D-AE19-62706E023703}">
+                      <ahyp:hlinkClr xmlns:ahyp="http://schemas.microsoft.com/office/drawing/2018/hyperlinkcolor" val="tx"/>
+                    </a:ext>
+                  </a:extLst>
+                </a:hlinkClick>
+              </a:rPr>
+              <a:t>API НБУ</a:t>
+            </a:r>
+            <a:endParaRPr lang="en-US" sz="900" dirty="0"/>
+          </a:p>
+        </p:txBody>
+      </p:sp>
       <p:pic>
         <p:nvPicPr>
-          <p:cNvPr id="4" name="chart" descr="C:\Users\Lenovo\Documents\GitHub\nbu-challenge-2026\results\figures\ov_inflation.png">    </p:cNvPr>
+          <p:cNvPr id="5" name="chart" descr="C:\Users\Lenovo\Documents\GitHub\nbu-challenge-2026\results\figures\ov_inflation.png">    </p:cNvPr>
           <p:cNvPicPr>
             <a:picLocks noChangeAspect="1"/>
           </p:cNvPicPr>
           <p:nvPr/>
         </p:nvPicPr>
         <p:blipFill>
-          <a:blip r:embed="rId1"/>
+          <a:blip r:embed="rId4"/>
           <a:stretch>
             <a:fillRect/>
           </a:stretch>
@@ -30879,7 +33242,7 @@
       </p:pic>
       <p:sp>
         <p:nvSpPr>
-          <p:cNvPr id="5" name="num1"/>
+          <p:cNvPr id="6" name="num1"/>
           <p:cNvSpPr/>
           <p:nvPr/>
         </p:nvSpPr>
@@ -30899,7 +33262,7 @@
       </p:sp>
       <p:sp>
         <p:nvSpPr>
-          <p:cNvPr id="6" name="Text 2"/>
+          <p:cNvPr id="7" name="Text 3"/>
           <p:cNvSpPr txBox="1"/>
           <p:nvPr/>
         </p:nvSpPr>
@@ -30935,7 +33298,7 @@
       </p:sp>
       <p:sp>
         <p:nvSpPr>
-          <p:cNvPr id="7" name="point1"/>
+          <p:cNvPr id="8" name="point1"/>
           <p:cNvSpPr txBox="1"/>
           <p:nvPr/>
         </p:nvSpPr>
@@ -30971,7 +33334,7 @@
       </p:sp>
       <p:sp>
         <p:nvSpPr>
-          <p:cNvPr id="8" name="num2"/>
+          <p:cNvPr id="9" name="num2"/>
           <p:cNvSpPr/>
           <p:nvPr/>
         </p:nvSpPr>
@@ -30991,7 +33354,7 @@
       </p:sp>
       <p:sp>
         <p:nvSpPr>
-          <p:cNvPr id="9" name="Text 5"/>
+          <p:cNvPr id="10" name="Text 6"/>
           <p:cNvSpPr txBox="1"/>
           <p:nvPr/>
         </p:nvSpPr>
@@ -31027,7 +33390,7 @@
       </p:sp>
       <p:sp>
         <p:nvSpPr>
-          <p:cNvPr id="10" name="point2"/>
+          <p:cNvPr id="11" name="point2"/>
           <p:cNvSpPr txBox="1"/>
           <p:nvPr/>
         </p:nvSpPr>
@@ -31063,7 +33426,7 @@
       </p:sp>
       <p:sp>
         <p:nvSpPr>
-          <p:cNvPr id="11" name="num3"/>
+          <p:cNvPr id="12" name="num3"/>
           <p:cNvSpPr/>
           <p:nvPr/>
         </p:nvSpPr>
@@ -31083,7 +33446,7 @@
       </p:sp>
       <p:sp>
         <p:nvSpPr>
-          <p:cNvPr id="12" name="Text 8"/>
+          <p:cNvPr id="13" name="Text 9"/>
           <p:cNvSpPr txBox="1"/>
           <p:nvPr/>
         </p:nvSpPr>
@@ -31119,7 +33482,7 @@
       </p:sp>
       <p:sp>
         <p:nvSpPr>
-          <p:cNvPr id="13" name="point3"/>
+          <p:cNvPr id="14" name="point3"/>
           <p:cNvSpPr txBox="1"/>
           <p:nvPr/>
         </p:nvSpPr>
@@ -31267,16 +33630,128 @@
           </a:p>
         </p:txBody>
       </p:sp>
+      <p:sp>
+        <p:nvSpPr>
+          <p:cNvPr id="4" name="sources"/>
+          <p:cNvSpPr txBox="1"/>
+          <p:nvPr/>
+        </p:nvSpPr>
+        <p:spPr>
+          <a:xfrm>
+            <a:off x="4937760" y="6455664"/>
+            <a:ext cx="6110935" cy="292608"/>
+          </a:xfrm>
+          <a:prstGeom prst="rect">
+            <a:avLst/>
+          </a:prstGeom>
+          <a:noFill/>
+          <a:ln/>
+        </p:spPr>
+        <p:txBody>
+          <a:bodyPr wrap="square" lIns="0" tIns="0" rIns="0" bIns="0" rtlCol="0" anchor="ctr"/>
+          <a:lstStyle/>
+          <a:p>
+            <a:pPr indent="0" marL="0">
+              <a:buNone/>
+            </a:pPr>
+            <a:r>
+              <a:rPr lang="en-US" sz="900" dirty="0">
+                <a:solidFill>
+                  <a:srgbClr val="5F6B6D"/>
+                </a:solidFill>
+              </a:rPr>
+              <a:t>Джерела: </a:t>
+            </a:r>
+            <a:pPr indent="0" marL="0">
+              <a:buNone/>
+            </a:pPr>
+            <a:r>
+              <a:rPr lang="en-US" sz="900" u="sng" dirty="0">
+                <a:solidFill>
+                  <a:srgbClr val="5F6B6D"/>
+                </a:solidFill>
+                <a:hlinkClick r:id="rId1" invalidUrl="" action="" tgtFrame="" tooltip="https://bank.gov.ua/admin_uploads/article/Tables_Charts_2026-Q3.xlsx?v=19" history="1" highlightClick="0" endSnd="0">
+                  <a:extLst>
+                    <a:ext uri="{A12FA001-AC4F-418D-AE19-62706E023703}">
+                      <ahyp:hlinkClr xmlns:ahyp="http://schemas.microsoft.com/office/drawing/2018/hyperlinkcolor" val="tx"/>
+                    </a:ext>
+                  </a:extLst>
+                </a:hlinkClick>
+              </a:rPr>
+              <a:t>дані графіків ІЗ</a:t>
+            </a:r>
+            <a:pPr indent="0" marL="0">
+              <a:buNone/>
+            </a:pPr>
+            <a:r>
+              <a:rPr lang="en-US" sz="900" dirty="0">
+                <a:solidFill>
+                  <a:srgbClr val="5F6B6D"/>
+                </a:solidFill>
+              </a:rPr>
+              <a:t> · </a:t>
+            </a:r>
+            <a:pPr indent="0" marL="0">
+              <a:buNone/>
+            </a:pPr>
+            <a:r>
+              <a:rPr lang="en-US" sz="900" u="sng" dirty="0">
+                <a:solidFill>
+                  <a:srgbClr val="5F6B6D"/>
+                </a:solidFill>
+                <a:hlinkClick r:id="rId2" invalidUrl="" action="" tgtFrame="" tooltip="https://bank.gov.ua/ua/open-data/api-dev" history="1" highlightClick="0" endSnd="0">
+                  <a:extLst>
+                    <a:ext uri="{A12FA001-AC4F-418D-AE19-62706E023703}">
+                      <ahyp:hlinkClr xmlns:ahyp="http://schemas.microsoft.com/office/drawing/2018/hyperlinkcolor" val="tx"/>
+                    </a:ext>
+                  </a:extLst>
+                </a:hlinkClick>
+              </a:rPr>
+              <a:t>API НБУ</a:t>
+            </a:r>
+            <a:pPr indent="0" marL="0">
+              <a:buNone/>
+            </a:pPr>
+            <a:r>
+              <a:rPr lang="en-US" sz="900" dirty="0">
+                <a:solidFill>
+                  <a:srgbClr val="5F6B6D"/>
+                </a:solidFill>
+              </a:rPr>
+              <a:t> · </a:t>
+            </a:r>
+            <a:pPr indent="0" marL="0">
+              <a:buNone/>
+            </a:pPr>
+            <a:r>
+              <a:rPr lang="en-US" sz="900" u="sng" dirty="0">
+                <a:solidFill>
+                  <a:srgbClr val="5F6B6D"/>
+                </a:solidFill>
+                <a:hlinkClick r:id="rId3" invalidUrl="" action="" tgtFrame="" tooltip="https://bank.gov.ua/ua/news/all/pidsumki-diskusiyi-chleniv-komitetu-z-monetarnoyi-politiki-natsionalnogo-banku-schodo-rivnya-oblikovoyi-stavki-16-veresnya-2026-roku" history="1" highlightClick="0" endSnd="0">
+                  <a:extLst>
+                    <a:ext uri="{A12FA001-AC4F-418D-AE19-62706E023703}">
+                      <ahyp:hlinkClr xmlns:ahyp="http://schemas.microsoft.com/office/drawing/2018/hyperlinkcolor" val="tx"/>
+                    </a:ext>
+                  </a:extLst>
+                </a:hlinkClick>
+              </a:rPr>
+              <a:t>підсумки дискусії КМП</a:t>
+            </a:r>
+            <a:endParaRPr lang="en-US" sz="900" dirty="0"/>
+          </a:p>
+        </p:txBody>
+      </p:sp>
       <p:pic>
         <p:nvPicPr>
-          <p:cNvPr id="4" name="chart" descr="C:\Users\Lenovo\Documents\GitHub\nbu-challenge-2026\results\figures\ov_rates.png">    </p:cNvPr>
+          <p:cNvPr id="5" name="chart" descr="C:\Users\Lenovo\Documents\GitHub\nbu-challenge-2026\results\figures\ov_rates.png">    </p:cNvPr>
           <p:cNvPicPr>
             <a:picLocks noChangeAspect="1"/>
           </p:cNvPicPr>
           <p:nvPr/>
         </p:nvPicPr>
         <p:blipFill>
-          <a:blip r:embed="rId1"/>
+          <a:blip r:embed="rId4"/>
           <a:stretch>
             <a:fillRect/>
           </a:stretch>
@@ -31293,7 +33768,7 @@
       </p:pic>
       <p:sp>
         <p:nvSpPr>
-          <p:cNvPr id="5" name="num1"/>
+          <p:cNvPr id="6" name="num1"/>
           <p:cNvSpPr/>
           <p:nvPr/>
         </p:nvSpPr>
@@ -31313,7 +33788,7 @@
       </p:sp>
       <p:sp>
         <p:nvSpPr>
-          <p:cNvPr id="6" name="Text 2"/>
+          <p:cNvPr id="7" name="Text 3"/>
           <p:cNvSpPr txBox="1"/>
           <p:nvPr/>
         </p:nvSpPr>
@@ -31349,7 +33824,7 @@
       </p:sp>
       <p:sp>
         <p:nvSpPr>
-          <p:cNvPr id="7" name="point1"/>
+          <p:cNvPr id="8" name="point1"/>
           <p:cNvSpPr txBox="1"/>
           <p:nvPr/>
         </p:nvSpPr>
@@ -31385,7 +33860,7 @@
       </p:sp>
       <p:sp>
         <p:nvSpPr>
-          <p:cNvPr id="8" name="num2"/>
+          <p:cNvPr id="9" name="num2"/>
           <p:cNvSpPr/>
           <p:nvPr/>
         </p:nvSpPr>
@@ -31405,7 +33880,7 @@
       </p:sp>
       <p:sp>
         <p:nvSpPr>
-          <p:cNvPr id="9" name="Text 5"/>
+          <p:cNvPr id="10" name="Text 6"/>
           <p:cNvSpPr txBox="1"/>
           <p:nvPr/>
         </p:nvSpPr>
@@ -31441,7 +33916,7 @@
       </p:sp>
       <p:sp>
         <p:nvSpPr>
-          <p:cNvPr id="10" name="point2"/>
+          <p:cNvPr id="11" name="point2"/>
           <p:cNvSpPr txBox="1"/>
           <p:nvPr/>
         </p:nvSpPr>
@@ -31477,7 +33952,7 @@
       </p:sp>
       <p:sp>
         <p:nvSpPr>
-          <p:cNvPr id="11" name="num3"/>
+          <p:cNvPr id="12" name="num3"/>
           <p:cNvSpPr/>
           <p:nvPr/>
         </p:nvSpPr>
@@ -31497,7 +33972,7 @@
       </p:sp>
       <p:sp>
         <p:nvSpPr>
-          <p:cNvPr id="12" name="Text 8"/>
+          <p:cNvPr id="13" name="Text 9"/>
           <p:cNvSpPr txBox="1"/>
           <p:nvPr/>
         </p:nvSpPr>
@@ -31533,7 +34008,7 @@
       </p:sp>
       <p:sp>
         <p:nvSpPr>
-          <p:cNvPr id="13" name="point3"/>
+          <p:cNvPr id="14" name="point3"/>
           <p:cNvSpPr txBox="1"/>
           <p:nvPr/>
         </p:nvSpPr>
@@ -31681,16 +34156,128 @@
           </a:p>
         </p:txBody>
       </p:sp>
+      <p:sp>
+        <p:nvSpPr>
+          <p:cNvPr id="4" name="sources"/>
+          <p:cNvSpPr txBox="1"/>
+          <p:nvPr/>
+        </p:nvSpPr>
+        <p:spPr>
+          <a:xfrm>
+            <a:off x="4937760" y="6455664"/>
+            <a:ext cx="6110935" cy="292608"/>
+          </a:xfrm>
+          <a:prstGeom prst="rect">
+            <a:avLst/>
+          </a:prstGeom>
+          <a:noFill/>
+          <a:ln/>
+        </p:spPr>
+        <p:txBody>
+          <a:bodyPr wrap="square" lIns="0" tIns="0" rIns="0" bIns="0" rtlCol="0" anchor="ctr"/>
+          <a:lstStyle/>
+          <a:p>
+            <a:pPr indent="0" marL="0">
+              <a:buNone/>
+            </a:pPr>
+            <a:r>
+              <a:rPr lang="en-US" sz="900" dirty="0">
+                <a:solidFill>
+                  <a:srgbClr val="5F6B6D"/>
+                </a:solidFill>
+              </a:rPr>
+              <a:t>Джерела: </a:t>
+            </a:r>
+            <a:pPr indent="0" marL="0">
+              <a:buNone/>
+            </a:pPr>
+            <a:r>
+              <a:rPr lang="en-US" sz="900" u="sng" dirty="0">
+                <a:solidFill>
+                  <a:srgbClr val="5F6B6D"/>
+                </a:solidFill>
+                <a:hlinkClick r:id="rId1" invalidUrl="" action="" tgtFrame="" tooltip="https://bank.gov.ua/ua/news/all/komentar-natsionalnogo-banku-schodo-zmini-realnogo-vvp-u-ii-kvartali-2026-roku" history="1" highlightClick="0" endSnd="0">
+                  <a:extLst>
+                    <a:ext uri="{A12FA001-AC4F-418D-AE19-62706E023703}">
+                      <ahyp:hlinkClr xmlns:ahyp="http://schemas.microsoft.com/office/drawing/2018/hyperlinkcolor" val="tx"/>
+                    </a:ext>
+                  </a:extLst>
+                </a:hlinkClick>
+              </a:rPr>
+              <a:t>коментар НБУ: ВВП II кв.</a:t>
+            </a:r>
+            <a:pPr indent="0" marL="0">
+              <a:buNone/>
+            </a:pPr>
+            <a:r>
+              <a:rPr lang="en-US" sz="900" dirty="0">
+                <a:solidFill>
+                  <a:srgbClr val="5F6B6D"/>
+                </a:solidFill>
+              </a:rPr>
+              <a:t> · </a:t>
+            </a:r>
+            <a:pPr indent="0" marL="0">
+              <a:buNone/>
+            </a:pPr>
+            <a:r>
+              <a:rPr lang="en-US" sz="900" u="sng" dirty="0">
+                <a:solidFill>
+                  <a:srgbClr val="5F6B6D"/>
+                </a:solidFill>
+                <a:hlinkClick r:id="rId2" invalidUrl="" action="" tgtFrame="" tooltip="https://bank.gov.ua/admin_uploads/article/Tables_Charts_2026-Q3.xlsx?v=19" history="1" highlightClick="0" endSnd="0">
+                  <a:extLst>
+                    <a:ext uri="{A12FA001-AC4F-418D-AE19-62706E023703}">
+                      <ahyp:hlinkClr xmlns:ahyp="http://schemas.microsoft.com/office/drawing/2018/hyperlinkcolor" val="tx"/>
+                    </a:ext>
+                  </a:extLst>
+                </a:hlinkClick>
+              </a:rPr>
+              <a:t>дані графіків ІЗ</a:t>
+            </a:r>
+            <a:pPr indent="0" marL="0">
+              <a:buNone/>
+            </a:pPr>
+            <a:r>
+              <a:rPr lang="en-US" sz="900" dirty="0">
+                <a:solidFill>
+                  <a:srgbClr val="5F6B6D"/>
+                </a:solidFill>
+              </a:rPr>
+              <a:t> · </a:t>
+            </a:r>
+            <a:pPr indent="0" marL="0">
+              <a:buNone/>
+            </a:pPr>
+            <a:r>
+              <a:rPr lang="en-US" sz="900" u="sng" dirty="0">
+                <a:solidFill>
+                  <a:srgbClr val="5F6B6D"/>
+                </a:solidFill>
+                <a:hlinkClick r:id="rId3" invalidUrl="" action="" tgtFrame="" tooltip="https://bank.gov.ua/ua/news/all/pidsumki-diskusiyi-chleniv-komitetu-z-monetarnoyi-politiki-natsionalnogo-banku-schodo-rivnya-oblikovoyi-stavki-16-veresnya-2026-roku" history="1" highlightClick="0" endSnd="0">
+                  <a:extLst>
+                    <a:ext uri="{A12FA001-AC4F-418D-AE19-62706E023703}">
+                      <ahyp:hlinkClr xmlns:ahyp="http://schemas.microsoft.com/office/drawing/2018/hyperlinkcolor" val="tx"/>
+                    </a:ext>
+                  </a:extLst>
+                </a:hlinkClick>
+              </a:rPr>
+              <a:t>підсумки дискусії КМП</a:t>
+            </a:r>
+            <a:endParaRPr lang="en-US" sz="900" dirty="0"/>
+          </a:p>
+        </p:txBody>
+      </p:sp>
       <p:pic>
         <p:nvPicPr>
-          <p:cNvPr id="4" name="chart" descr="C:\Users\Lenovo\Documents\GitHub\nbu-challenge-2026\results\figures\ov_activity.png">    </p:cNvPr>
+          <p:cNvPr id="5" name="chart" descr="C:\Users\Lenovo\Documents\GitHub\nbu-challenge-2026\results\figures\ov_activity.png">    </p:cNvPr>
           <p:cNvPicPr>
             <a:picLocks noChangeAspect="1"/>
           </p:cNvPicPr>
           <p:nvPr/>
         </p:nvPicPr>
         <p:blipFill>
-          <a:blip r:embed="rId1"/>
+          <a:blip r:embed="rId4"/>
           <a:stretch>
             <a:fillRect/>
           </a:stretch>
@@ -31707,7 +34294,7 @@
       </p:pic>
       <p:sp>
         <p:nvSpPr>
-          <p:cNvPr id="5" name="num1"/>
+          <p:cNvPr id="6" name="num1"/>
           <p:cNvSpPr/>
           <p:nvPr/>
         </p:nvSpPr>
@@ -31727,7 +34314,7 @@
       </p:sp>
       <p:sp>
         <p:nvSpPr>
-          <p:cNvPr id="6" name="Text 2"/>
+          <p:cNvPr id="7" name="Text 3"/>
           <p:cNvSpPr txBox="1"/>
           <p:nvPr/>
         </p:nvSpPr>
@@ -31763,7 +34350,7 @@
       </p:sp>
       <p:sp>
         <p:nvSpPr>
-          <p:cNvPr id="7" name="point1"/>
+          <p:cNvPr id="8" name="point1"/>
           <p:cNvSpPr txBox="1"/>
           <p:nvPr/>
         </p:nvSpPr>
@@ -31799,7 +34386,7 @@
       </p:sp>
       <p:sp>
         <p:nvSpPr>
-          <p:cNvPr id="8" name="num2"/>
+          <p:cNvPr id="9" name="num2"/>
           <p:cNvSpPr/>
           <p:nvPr/>
         </p:nvSpPr>
@@ -31819,7 +34406,7 @@
       </p:sp>
       <p:sp>
         <p:nvSpPr>
-          <p:cNvPr id="9" name="Text 5"/>
+          <p:cNvPr id="10" name="Text 6"/>
           <p:cNvSpPr txBox="1"/>
           <p:nvPr/>
         </p:nvSpPr>
@@ -31855,7 +34442,7 @@
       </p:sp>
       <p:sp>
         <p:nvSpPr>
-          <p:cNvPr id="10" name="point2"/>
+          <p:cNvPr id="11" name="point2"/>
           <p:cNvSpPr txBox="1"/>
           <p:nvPr/>
         </p:nvSpPr>
@@ -31891,7 +34478,7 @@
       </p:sp>
       <p:sp>
         <p:nvSpPr>
-          <p:cNvPr id="11" name="num3"/>
+          <p:cNvPr id="12" name="num3"/>
           <p:cNvSpPr/>
           <p:nvPr/>
         </p:nvSpPr>
@@ -31911,7 +34498,7 @@
       </p:sp>
       <p:sp>
         <p:nvSpPr>
-          <p:cNvPr id="12" name="Text 8"/>
+          <p:cNvPr id="13" name="Text 9"/>
           <p:cNvSpPr txBox="1"/>
           <p:nvPr/>
         </p:nvSpPr>
@@ -31947,7 +34534,7 @@
       </p:sp>
       <p:sp>
         <p:nvSpPr>
-          <p:cNvPr id="13" name="point3"/>
+          <p:cNvPr id="14" name="point3"/>
           <p:cNvSpPr txBox="1"/>
           <p:nvPr/>
         </p:nvSpPr>
@@ -32095,16 +34682,99 @@
           </a:p>
         </p:txBody>
       </p:sp>
+      <p:sp>
+        <p:nvSpPr>
+          <p:cNvPr id="4" name="sources"/>
+          <p:cNvSpPr txBox="1"/>
+          <p:nvPr/>
+        </p:nvSpPr>
+        <p:spPr>
+          <a:xfrm>
+            <a:off x="4937760" y="6455664"/>
+            <a:ext cx="6110935" cy="292608"/>
+          </a:xfrm>
+          <a:prstGeom prst="rect">
+            <a:avLst/>
+          </a:prstGeom>
+          <a:noFill/>
+          <a:ln/>
+        </p:spPr>
+        <p:txBody>
+          <a:bodyPr wrap="square" lIns="0" tIns="0" rIns="0" bIns="0" rtlCol="0" anchor="ctr"/>
+          <a:lstStyle/>
+          <a:p>
+            <a:pPr indent="0" marL="0">
+              <a:buNone/>
+            </a:pPr>
+            <a:r>
+              <a:rPr lang="en-US" sz="900" dirty="0">
+                <a:solidFill>
+                  <a:srgbClr val="5F6B6D"/>
+                </a:solidFill>
+              </a:rPr>
+              <a:t>Джерела: </a:t>
+            </a:r>
+            <a:pPr indent="0" marL="0">
+              <a:buNone/>
+            </a:pPr>
+            <a:r>
+              <a:rPr lang="en-US" sz="900" u="sng" dirty="0">
+                <a:solidFill>
+                  <a:srgbClr val="5F6B6D"/>
+                </a:solidFill>
+                <a:hlinkClick r:id="rId1" invalidUrl="" action="" tgtFrame="" tooltip="https://bank.gov.ua/ua/open-data/api-dev" history="1" highlightClick="0" endSnd="0">
+                  <a:extLst>
+                    <a:ext uri="{A12FA001-AC4F-418D-AE19-62706E023703}">
+                      <ahyp:hlinkClr xmlns:ahyp="http://schemas.microsoft.com/office/drawing/2018/hyperlinkcolor" val="tx"/>
+                    </a:ext>
+                  </a:extLst>
+                </a:hlinkClick>
+              </a:rPr>
+              <a:t>API НБУ</a:t>
+            </a:r>
+            <a:pPr indent="0" marL="0">
+              <a:buNone/>
+            </a:pPr>
+            <a:r>
+              <a:rPr lang="en-US" sz="900" dirty="0">
+                <a:solidFill>
+                  <a:srgbClr val="5F6B6D"/>
+                </a:solidFill>
+              </a:rPr>
+              <a:t> · </a:t>
+            </a:r>
+            <a:pPr indent="0" marL="0">
+              <a:buNone/>
+            </a:pPr>
+            <a:r>
+              <a:rPr lang="en-US" sz="900" u="sng" dirty="0">
+                <a:solidFill>
+                  <a:srgbClr val="5F6B6D"/>
+                </a:solidFill>
+                <a:hlinkClick r:id="rId2" invalidUrl="" action="" tgtFrame="" tooltip="https://bank.gov.ua/ua/news/all/natsionalniy-bank-ukrayini-pidvischiv-oblikovu-stavku-do-16" history="1" highlightClick="0" endSnd="0">
+                  <a:extLst>
+                    <a:ext uri="{A12FA001-AC4F-418D-AE19-62706E023703}">
+                      <ahyp:hlinkClr xmlns:ahyp="http://schemas.microsoft.com/office/drawing/2018/hyperlinkcolor" val="tx"/>
+                    </a:ext>
+                  </a:extLst>
+                </a:hlinkClick>
+              </a:rPr>
+              <a:t>рішення НБУ 17.09.2026</a:t>
+            </a:r>
+            <a:endParaRPr lang="en-US" sz="900" dirty="0"/>
+          </a:p>
+        </p:txBody>
+      </p:sp>
       <p:pic>
         <p:nvPicPr>
-          <p:cNvPr id="4" name="chart" descr="C:\Users\Lenovo\Documents\GitHub\nbu-challenge-2026\results\figures\ov_fx.png">    </p:cNvPr>
+          <p:cNvPr id="5" name="chart" descr="C:\Users\Lenovo\Documents\GitHub\nbu-challenge-2026\results\figures\ov_fx.png">    </p:cNvPr>
           <p:cNvPicPr>
             <a:picLocks noChangeAspect="1"/>
           </p:cNvPicPr>
           <p:nvPr/>
         </p:nvPicPr>
         <p:blipFill>
-          <a:blip r:embed="rId1"/>
+          <a:blip r:embed="rId3"/>
           <a:stretch>
             <a:fillRect/>
           </a:stretch>
@@ -32121,7 +34791,7 @@
       </p:pic>
       <p:sp>
         <p:nvSpPr>
-          <p:cNvPr id="5" name="num1"/>
+          <p:cNvPr id="6" name="num1"/>
           <p:cNvSpPr/>
           <p:nvPr/>
         </p:nvSpPr>
@@ -32141,7 +34811,7 @@
       </p:sp>
       <p:sp>
         <p:nvSpPr>
-          <p:cNvPr id="6" name="Text 2"/>
+          <p:cNvPr id="7" name="Text 3"/>
           <p:cNvSpPr txBox="1"/>
           <p:nvPr/>
         </p:nvSpPr>
@@ -32177,7 +34847,7 @@
       </p:sp>
       <p:sp>
         <p:nvSpPr>
-          <p:cNvPr id="7" name="point1"/>
+          <p:cNvPr id="8" name="point1"/>
           <p:cNvSpPr txBox="1"/>
           <p:nvPr/>
         </p:nvSpPr>
@@ -32213,7 +34883,7 @@
       </p:sp>
       <p:sp>
         <p:nvSpPr>
-          <p:cNvPr id="8" name="num2"/>
+          <p:cNvPr id="9" name="num2"/>
           <p:cNvSpPr/>
           <p:nvPr/>
         </p:nvSpPr>
@@ -32233,7 +34903,7 @@
       </p:sp>
       <p:sp>
         <p:nvSpPr>
-          <p:cNvPr id="9" name="Text 5"/>
+          <p:cNvPr id="10" name="Text 6"/>
           <p:cNvSpPr txBox="1"/>
           <p:nvPr/>
         </p:nvSpPr>
@@ -32269,7 +34939,7 @@
       </p:sp>
       <p:sp>
         <p:nvSpPr>
-          <p:cNvPr id="10" name="point2"/>
+          <p:cNvPr id="11" name="point2"/>
           <p:cNvSpPr txBox="1"/>
           <p:nvPr/>
         </p:nvSpPr>
@@ -32305,7 +34975,7 @@
       </p:sp>
       <p:sp>
         <p:nvSpPr>
-          <p:cNvPr id="11" name="num3"/>
+          <p:cNvPr id="12" name="num3"/>
           <p:cNvSpPr/>
           <p:nvPr/>
         </p:nvSpPr>
@@ -32325,7 +34995,7 @@
       </p:sp>
       <p:sp>
         <p:nvSpPr>
-          <p:cNvPr id="12" name="Text 8"/>
+          <p:cNvPr id="13" name="Text 9"/>
           <p:cNvSpPr txBox="1"/>
           <p:nvPr/>
         </p:nvSpPr>
@@ -32361,7 +35031,7 @@
       </p:sp>
       <p:sp>
         <p:nvSpPr>
-          <p:cNvPr id="13" name="point3"/>
+          <p:cNvPr id="14" name="point3"/>
           <p:cNvSpPr txBox="1"/>
           <p:nvPr/>
         </p:nvSpPr>
@@ -32509,16 +35179,99 @@
           </a:p>
         </p:txBody>
       </p:sp>
+      <p:sp>
+        <p:nvSpPr>
+          <p:cNvPr id="4" name="sources"/>
+          <p:cNvSpPr txBox="1"/>
+          <p:nvPr/>
+        </p:nvSpPr>
+        <p:spPr>
+          <a:xfrm>
+            <a:off x="4937760" y="6455664"/>
+            <a:ext cx="6110935" cy="292608"/>
+          </a:xfrm>
+          <a:prstGeom prst="rect">
+            <a:avLst/>
+          </a:prstGeom>
+          <a:noFill/>
+          <a:ln/>
+        </p:spPr>
+        <p:txBody>
+          <a:bodyPr wrap="square" lIns="0" tIns="0" rIns="0" bIns="0" rtlCol="0" anchor="ctr"/>
+          <a:lstStyle/>
+          <a:p>
+            <a:pPr indent="0" marL="0">
+              <a:buNone/>
+            </a:pPr>
+            <a:r>
+              <a:rPr lang="en-US" sz="900" dirty="0">
+                <a:solidFill>
+                  <a:srgbClr val="5F6B6D"/>
+                </a:solidFill>
+              </a:rPr>
+              <a:t>Джерела: </a:t>
+            </a:r>
+            <a:pPr indent="0" marL="0">
+              <a:buNone/>
+            </a:pPr>
+            <a:r>
+              <a:rPr lang="en-US" sz="900" u="sng" dirty="0">
+                <a:solidFill>
+                  <a:srgbClr val="5F6B6D"/>
+                </a:solidFill>
+                <a:hlinkClick r:id="rId1" invalidUrl="" action="" tgtFrame="" tooltip="https://bank.gov.ua/admin_uploads/article/Macroeconomic_Forecast_table_2026_07.xlsx?v=19" history="1" highlightClick="0" endSnd="0">
+                  <a:extLst>
+                    <a:ext uri="{A12FA001-AC4F-418D-AE19-62706E023703}">
+                      <ahyp:hlinkClr xmlns:ahyp="http://schemas.microsoft.com/office/drawing/2018/hyperlinkcolor" val="tx"/>
+                    </a:ext>
+                  </a:extLst>
+                </a:hlinkClick>
+              </a:rPr>
+              <a:t>макропрогноз НБУ</a:t>
+            </a:r>
+            <a:pPr indent="0" marL="0">
+              <a:buNone/>
+            </a:pPr>
+            <a:r>
+              <a:rPr lang="en-US" sz="900" dirty="0">
+                <a:solidFill>
+                  <a:srgbClr val="5F6B6D"/>
+                </a:solidFill>
+              </a:rPr>
+              <a:t> · </a:t>
+            </a:r>
+            <a:pPr indent="0" marL="0">
+              <a:buNone/>
+            </a:pPr>
+            <a:r>
+              <a:rPr lang="en-US" sz="900" u="sng" dirty="0">
+                <a:solidFill>
+                  <a:srgbClr val="5F6B6D"/>
+                </a:solidFill>
+                <a:hlinkClick r:id="rId2" invalidUrl="" action="" tgtFrame="" tooltip="https://bank.gov.ua/ua/news/all/rada-mvf-shvalila-pershiy-pereglyad-programi-rozshirenogo-finansuvannya-ta-zatverdila-vidilennya-transhu-obsyagom-690-mln-dol-ssha" history="1" highlightClick="0" endSnd="0">
+                  <a:extLst>
+                    <a:ext uri="{A12FA001-AC4F-418D-AE19-62706E023703}">
+                      <ahyp:hlinkClr xmlns:ahyp="http://schemas.microsoft.com/office/drawing/2018/hyperlinkcolor" val="tx"/>
+                    </a:ext>
+                  </a:extLst>
+                </a:hlinkClick>
+              </a:rPr>
+              <a:t>Рада МВФ: перегляд програми</a:t>
+            </a:r>
+            <a:endParaRPr lang="en-US" sz="900" dirty="0"/>
+          </a:p>
+        </p:txBody>
+      </p:sp>
       <p:pic>
         <p:nvPicPr>
-          <p:cNvPr id="4" name="chart" descr="C:\Users\Lenovo\Documents\GitHub\nbu-challenge-2026\results\figures\ov_fiscal.png">    </p:cNvPr>
+          <p:cNvPr id="5" name="chart" descr="C:\Users\Lenovo\Documents\GitHub\nbu-challenge-2026\results\figures\ov_fiscal.png">    </p:cNvPr>
           <p:cNvPicPr>
             <a:picLocks noChangeAspect="1"/>
           </p:cNvPicPr>
           <p:nvPr/>
         </p:nvPicPr>
         <p:blipFill>
-          <a:blip r:embed="rId1"/>
+          <a:blip r:embed="rId3"/>
           <a:stretch>
             <a:fillRect/>
           </a:stretch>
@@ -32535,7 +35288,7 @@
       </p:pic>
       <p:sp>
         <p:nvSpPr>
-          <p:cNvPr id="5" name="num1"/>
+          <p:cNvPr id="6" name="num1"/>
           <p:cNvSpPr/>
           <p:nvPr/>
         </p:nvSpPr>
@@ -32555,7 +35308,7 @@
       </p:sp>
       <p:sp>
         <p:nvSpPr>
-          <p:cNvPr id="6" name="Text 2"/>
+          <p:cNvPr id="7" name="Text 3"/>
           <p:cNvSpPr txBox="1"/>
           <p:nvPr/>
         </p:nvSpPr>
@@ -32591,7 +35344,7 @@
       </p:sp>
       <p:sp>
         <p:nvSpPr>
-          <p:cNvPr id="7" name="point1"/>
+          <p:cNvPr id="8" name="point1"/>
           <p:cNvSpPr txBox="1"/>
           <p:nvPr/>
         </p:nvSpPr>
@@ -32627,7 +35380,7 @@
       </p:sp>
       <p:sp>
         <p:nvSpPr>
-          <p:cNvPr id="8" name="num2"/>
+          <p:cNvPr id="9" name="num2"/>
           <p:cNvSpPr/>
           <p:nvPr/>
         </p:nvSpPr>
@@ -32647,7 +35400,7 @@
       </p:sp>
       <p:sp>
         <p:nvSpPr>
-          <p:cNvPr id="9" name="Text 5"/>
+          <p:cNvPr id="10" name="Text 6"/>
           <p:cNvSpPr txBox="1"/>
           <p:nvPr/>
         </p:nvSpPr>
@@ -32683,7 +35436,7 @@
       </p:sp>
       <p:sp>
         <p:nvSpPr>
-          <p:cNvPr id="10" name="point2"/>
+          <p:cNvPr id="11" name="point2"/>
           <p:cNvSpPr txBox="1"/>
           <p:nvPr/>
         </p:nvSpPr>
@@ -32719,7 +35472,7 @@
       </p:sp>
       <p:sp>
         <p:nvSpPr>
-          <p:cNvPr id="11" name="num3"/>
+          <p:cNvPr id="12" name="num3"/>
           <p:cNvSpPr/>
           <p:nvPr/>
         </p:nvSpPr>
@@ -32739,7 +35492,7 @@
       </p:sp>
       <p:sp>
         <p:nvSpPr>
-          <p:cNvPr id="12" name="Text 8"/>
+          <p:cNvPr id="13" name="Text 9"/>
           <p:cNvSpPr txBox="1"/>
           <p:nvPr/>
         </p:nvSpPr>
@@ -32775,7 +35528,7 @@
       </p:sp>
       <p:sp>
         <p:nvSpPr>
-          <p:cNvPr id="13" name="point3"/>
+          <p:cNvPr id="14" name="point3"/>
           <p:cNvSpPr txBox="1"/>
           <p:nvPr/>
         </p:nvSpPr>

--- a/presentation/NBU_University_Challenge_2026.pptx
+++ b/presentation/NBU_University_Challenge_2026.pptx
@@ -142,13 +142,13 @@
   <p:extLst>
     <p:ext uri="{521415D9-36F7-43E2-AB2F-B90AF26B5E84}">
       <p14:sectionLst xmlns:p14="http://schemas.microsoft.com/office/powerpoint/2010/main">
-        <p14:section name="Вступ" id="{e0831894-b7ee-9038-675c-d8d064abeef8}">
+        <p14:section name="Вступ" id="{c3a84343-e4de-ad55-f5e4-5f6decfb49c2}">
           <p14:sldIdLst>
             <p14:sldId id="256"/>
             <p14:sldId id="257"/>
           </p14:sldIdLst>
         </p14:section>
-        <p14:section name="Огляд" id="{3dba9ca3-cd20-40bb-bc23-e090ddbca42a}">
+        <p14:section name="Огляд" id="{264103d9-0eb1-4dd5-8e09-ff335c6870c1}">
           <p14:sldIdLst>
             <p14:sldId id="258"/>
             <p14:sldId id="259"/>
@@ -160,7 +160,7 @@
             <p14:sldId id="265"/>
           </p14:sldIdLst>
         </p14:section>
-        <p14:section name="Прогноз" id="{66cfbe85-460e-a078-bcd8-3146f6a59144}">
+        <p14:section name="Прогноз" id="{fd959825-5bed-ae9b-b271-382498d5463d}">
           <p14:sldIdLst>
             <p14:sldId id="266"/>
             <p14:sldId id="267"/>
@@ -174,7 +174,7 @@
             <p14:sldId id="275"/>
           </p14:sldIdLst>
         </p14:section>
-        <p14:section name="Рекомендації" id="{83c03f1c-2b84-b6c6-d491-96ea77c1554c}">
+        <p14:section name="Рекомендації" id="{48fa9ecc-f22a-2ecb-161b-85b2dbb1b275}">
           <p14:sldIdLst>
             <p14:sldId id="276"/>
             <p14:sldId id="277"/>
@@ -186,7 +186,7 @@
             <p14:sldId id="283"/>
           </p14:sldIdLst>
         </p14:section>
-        <p14:section name="Додатки" id="{1a1fb58d-2bc9-40d0-20ba-a65a5c9a91e8}">
+        <p14:section name="Додатки" id="{9c1fb0c8-58d1-3c85-d6de-ecdaf218086f}">
           <p14:sldIdLst>
             <p14:sldId id="284"/>
             <p14:sldId id="285"/>
@@ -602,7 +602,7 @@
           <a:p>
             <a:r>
               <a:rPr lang="en-US" dirty="0"/>
-              <a:t>Добрий день, шановні члени журі. Ми — Команда [назва]. Сьогодні представимо наші рекомендації для засідання Правління НБУ 29 жовтня 2026 року. Усі дані — станом на 7 жовтня.</a:t>
+              <a:t>Добрий день, шановні члени журі. Ми — Команда [назва]. Сьогодні представимо наші рекомендації для засідання Правління НБУ 29 жовтня 2026 року. Усі дані — станом на 20 жовтня.</a:t>
             </a:r>
             <a:endParaRPr lang="en-US" dirty="0"/>
           </a:p>
@@ -1130,7 +1130,7 @@
           <a:p>
             <a:r>
               <a:rPr lang="en-US" dirty="0"/>
-              <a:t>Для найближчих місяців ми будуємо короткостроковий прогноз: трендовий темп цін, сезонність і поправка на дешевше продовольство. Тренд — 0,65% на місяць, тобто близько 8% у річному вимірі. До того ж діє ефект бази: у вересні–грудні 2025 року ціни зросли лише на 1,8%. Тому річна інфляція механічно підніметься до 9,9% у грудні — близько до прогнозу НБУ.</a:t>
+              <a:t>Для найближчих місяців ми будуємо короткостроковий прогноз: трендовий темп цін, сезонність і поправка на разовість вересневого стрибка. Тренд — 0,86% на місяць. До того ж діє ефект бази: у жовтні–грудні 2025 ціни зросли лише на 1,5%. Тому річна інфляція підніметься до 12,1% у грудні — помітно вище, ніж НБУ прогнозував у липні.</a:t>
             </a:r>
             <a:endParaRPr lang="en-US" dirty="0"/>
           </a:p>
@@ -1218,7 +1218,7 @@
           <a:p>
             <a:r>
               <a:rPr lang="en-US" dirty="0"/>
-              <a:t>Базовий прогноз. Нагадаю: ціль НБУ — 5% без діапазону відхилень, і повернути інфляцію до неї треба на горизонті до трьох років. Інфляція досягне піку — близько 9,3% — на початку 2027 року, знизиться до 6,5% наприкінці 2027-го, у 2028-му тимчасово опуститься до 4,2% через дешевшу нафту і з другому кварталі 2029 року стабілізується на 5%. Ставка — 16,5% до середини 2027 року, далі поступово знижується до 10,4% наприкінці 2028-го. Віяло показує, наскільки велика невизначеність: з імовірністю 70% інфляція наприкінці 2027 року буде між 3 і 10%.</a:t>
+              <a:t>Базовий прогноз. Нагадаю: ціль НБУ — 5% без діапазону відхилень, і повернути інфляцію до неї треба на горизонті до трьох років. Інфляція досягне піку — близько 10,7% — на початку 2027 року, знизиться до 6,5% наприкінці 2027-го, у 2028-му тимчасово опуститься до 4,1% через дешевшу нафту і з третьому кварталі 2029 року стабілізується на 5%. Ставка — 17% до середини 2027 року, далі поступово знижується до 10,3% наприкінці 2028-го. Віяло показує, наскільки велика невизначеність: з імовірністю 70% інфляція наприкінці 2027 року буде між 3 і 10%.</a:t>
             </a:r>
             <a:endParaRPr lang="en-US" dirty="0"/>
           </a:p>
@@ -1306,7 +1306,7 @@
           <a:p>
             <a:r>
               <a:rPr lang="en-US" dirty="0"/>
-              <a:t>Важлива відмінність від НБУ — базова інфляція. Ми вважаємо, що вона буде стійкішою: 5,7% наприкінці 2027 року проти 5,1% у НБУ. Причина — перегрітий ринок праці, дорожчі послуги й наслідки атак. Загальна інфляція при цьому близька до НБУ: тарифи й акцизи додають близько 1,7 пункта на рік, а дешевша нафта частково це компенсує. У 2028 році базова інфляція опускається нижче цілі — як і в НБУ. Висновок: підвищити ставку зараз, щоб швидше пом'якшити її пізніше.</a:t>
+              <a:t>Важлива відмінність від НБУ — базова інфляція. Ми вважаємо, що вона буде стійкішою: 5,3% наприкінці 2027 року проти 5,1% у НБУ. Причина — перегрітий ринок праці, дорожчі послуги й наслідки атак. Загальна інфляція при цьому близька до НБУ: тарифи й акцизи додають близько 1,7 пункта на рік, а дешевша нафта частково це компенсує. У 2028 році базова інфляція опускається нижче цілі — як і в НБУ. Висновок: підвищити ставку зараз, щоб швидше пом'якшити її пізніше.</a:t>
             </a:r>
             <a:endParaRPr lang="en-US" dirty="0"/>
           </a:p>
@@ -1394,7 +1394,7 @@
           <a:p>
             <a:r>
               <a:rPr lang="en-US" dirty="0"/>
-              <a:t>Попит ми бачимо слабшим, ніж НБУ: фактично нульове зростання цього року, 0,6% у 2027-му і 1,0% у 2028-му проти 1,8, 2,8 і 3,0% у НБУ. Причини — слабкий третій квартал, атаки, блокада портів і дефіцит кадрів. Реальна ставка вже вища за нейтральну, тобто політика стримувальна, — тому ми не пропонуємо різкого посилення.</a:t>
+              <a:t>Попит ми бачимо слабшим, ніж НБУ: фактично нульове зростання цього року, 0,7% у 2027-му і 0,8% у 2028-му проти 1,8, 2,8 і 3,0% у НБУ. Причини — слабкий третій квартал, атаки, блокада портів і дефіцит кадрів. Реальна ставка вже вища за нейтральну, тобто політика стримувальна, — тому ми не пропонуємо різкого посилення.</a:t>
             </a:r>
             <a:endParaRPr lang="en-US" dirty="0"/>
           </a:p>
@@ -1482,7 +1482,7 @@
           <a:p>
             <a:r>
               <a:rPr lang="en-US" dirty="0"/>
-              <a:t>Ми розглянули чотири ризикові сценарії, розраховані в MATLAB. Найнебезпечніший — дефіцит фінансування: якщо допомога затримається, гривня буде приблизно на 6% слабшою, інфляція зросте до 11,2%, а ставку доведеться підняти до 19,0%. Важка зима з ударами по енергетиці підніме інфляцію до 10,6% і майже зупинить зростання ВВП. Натомість нафта по 120 доларів додає лише 0,5 пункта до піку інфляції, і ставка майже не реагує — це шок першого раунду. Висновок: головний ризик для інфляції — курс і резерви.</a:t>
+              <a:t>Ми розглянули чотири ризикові сценарії, розраховані в MATLAB. Найнебезпечніший — дефіцит фінансування: якщо допомога затримається, гривня буде приблизно на 6% слабшою, інфляція зросте до 12,5%, а ставку доведеться підняти до 19,5%. Важка зима з ударами по енергетиці підніме інфляцію до 12,0% і майже зупинить зростання ВВП. Натомість нафта по 120 доларів додає лише 0,4 пункта до піку інфляції, і ставка майже не реагує — це шок першого раунду. Висновок: головний ризик для інфляції — курс і резерви.</a:t>
             </a:r>
             <a:endParaRPr lang="en-US" dirty="0"/>
           </a:p>
@@ -1570,7 +1570,7 @@
           <a:p>
             <a:r>
               <a:rPr lang="en-US" dirty="0"/>
-              <a:t>Почнемо з головного. Ми пропонуємо три рішення, які працюють як єдиний пакет. Перше — підвищити облікову ставку на 0,5 пункта, до 16,5%, і утримувати її щонайменше до середини 2027 року: інфляція знову прискорюється, у грудні вона сягне майже 10%, а ризики зміщені вгору. Друге — керована гнучкість курсу: допускати поступове послаблення гривні замість того, щоб витрачати близько 5 мільярдів доларів резервів щомісяця. Третє — поставити на паузу наступні кроки валютної лібералізації, доки не відновляться резерви. За такої політики інфляція знизиться до 6,5% наприкінці 2027 року і повернеться до цілі 5% у другому кварталі 2029 року — у межах трирічного горизонту НБУ.</a:t>
+              <a:t>Почнемо з головного. Ми пропонуємо три рішення, які працюють як єдиний пакет. Перше — підвищити облікову ставку на 1 пункт, до 17%, і утримувати її щонайменше до середини 2027 року: у вересні інфляція сягнула 10%, у грудні буде близько 12%, а ризики зміщені вгору. Друге — керована гнучкість курсу: допускати поступове послаблення гривні замість того, щоб витрачати близько 5 мільярдів доларів резервів щомісяця. Третє — поставити на паузу наступні кроки валютної лібералізації, доки не відновляться резерви. За такої політики інфляція знизиться до 6,5% наприкінці 2027 року і повернеться до цілі 5% у третьому кварталі 2029 року — у межах трирічного горизонту НБУ.</a:t>
             </a:r>
             <a:endParaRPr lang="en-US" dirty="0"/>
           </a:p>
@@ -1922,7 +1922,7 @@
           <a:p>
             <a:r>
               <a:rPr lang="en-US" dirty="0"/>
-              <a:t>Ми порівняли чотири варіанти рішення — від зниження до 15,5% до підвищення до 17%. У кожному ставка утримується до середини 2027 року, а далі знижується так, щоб інфляція повернулася саме до 5%. Механічне правило Тейлора для цього не годиться: з ним інфляція наприкінці 2029 року була б лише 4,4%. Критерій — втрати: відхилення інфляції від цілі та розрив ВВП. Кожні 0,5 пункта підвищення зменшують втрати, а оптимум моделі — 16,5%, якщо не реагувати на перший раунд підвищення адмінцін.</a:t>
+              <a:t>Ми порівняли чотири варіанти рішення — від утримання 16% до підвищення до 17,5%. У кожному ставка утримується до середини 2027 року, а далі знижується так, щоб інфляція повернулася саме до 5%. Механічне правило Тейлора для цього не годиться: з ним інфляція наприкінці 2029 року була б лише 4,4%. Критерій — втрати: відхилення інфляції від цілі та розрив ВВП. Кожні 0,5 пункта підвищення зменшують втрати, а оптимум моделі — 16,9%, якщо не реагувати на перший раунд підвищення адмінцін. Тому — 17%.</a:t>
             </a:r>
             <a:endParaRPr lang="en-US" dirty="0"/>
           </a:p>
@@ -2010,7 +2010,7 @@
           <a:p>
             <a:r>
               <a:rPr lang="en-US" dirty="0"/>
-              <a:t>Тому перша рекомендація — підвищити облікову ставку до 16,5%. Чому підвищити: інфляція в грудні сягне майже 10%, базова інфляція стійкіша, ніж очікує НБУ, резерви знижуються, а гнучкіший курс потребує сильного якоря для очікувань. Чому не більше: економіка слабка, а шоки здебільшого з боку пропозиції. Орієнтир: утримувати 16,5% щонайменше до середини 2027 року, далі знижувати — до близько 15,0% наприкінці 2027-го і 10,5% наприкінці 2028-го. Якщо резерви впадуть нижче 43 мільярдів — готові підвищувати далі; якщо базова інфляція опуститься нижче 7% — знижувати швидше.</a:t>
+              <a:t>Тому перша рекомендація — підвищити облікову ставку до 17%. Чому підвищити: інфляція в грудні сягне близько 12%, базова інфляція прискорюється, резерви знижуються, а гнучкіший курс потребує сильного якоря для очікувань. Чому не більше: економіка слабка, а шоки здебільшого з боку пропозиції. Орієнтир: утримувати 17% щонайменше до середини 2027 року, далі знижувати — до близько 15,5% наприкінці 2027-го і 10,5% наприкінці 2028-го. Якщо резерви впадуть нижче 43 мільярдів — готові підвищувати далі; якщо базова інфляція опуститься нижче 7% — знижувати швидше.</a:t>
             </a:r>
             <a:endParaRPr lang="en-US" dirty="0"/>
           </a:p>
@@ -2098,7 +2098,7 @@
           <a:p>
             <a:r>
               <a:rPr lang="en-US" dirty="0"/>
-              <a:t>Друга рекомендація — щодо курсу. НБУ продає близько 5,0 мільярда доларів на місяць, а надходить близько 3,7. Щоб вийти на липневий прогноз НБУ — 69,7 мільярда на кінець року, — потрібно близько 13 мільярдів щомісяця. Якщо ж усе залишиться як влітку, резерви становитимуть 43 мільярди. Тому ми пропонуємо керовану гнучкість: допускати послаблення гривні до 4% на рік, а інтервенції використовувати лише для згладжування. За ставки 16,5% модель показує фактичне послаблення лише близько 1% на рік, хоча ринок чекає більшого. Захищати певний рівень курсу — прямий шлях до втрати резервів.</a:t>
+              <a:t>Друга рекомендація — щодо курсу. НБУ продає близько 5,0 мільярда доларів на місяць, а надходить близько 3,7. Щоб вийти на липневий прогноз НБУ — 69,7 мільярда на кінець року, — потрібно близько 13 мільярдів щомісяця. Якщо ж усе залишиться як влітку, резерви становитимуть 43 мільярди. Тому ми пропонуємо керовану гнучкість: допускати послаблення гривні до 4% на рік, а інтервенції використовувати лише для згладжування. За ставки 17% модель показує фактичне послаблення лише близько 1% на рік, хоча ринок чекає більшого. Захищати певний рівень курсу — прямий шлях до втрати резервів.</a:t>
             </a:r>
             <a:endParaRPr lang="en-US" dirty="0"/>
           </a:p>
@@ -2274,7 +2274,7 @@
           <a:p>
             <a:r>
               <a:rPr lang="en-US" dirty="0"/>
-              <a:t>Усе це має пояснити комунікація. Ключова формула — «ставка — якір, курс — амортизатор»: НБУ підвищує ставку превентивно, гнучкий курс захищає резерви, а гривневі заощадження залишаються вигіднішими за валютні. Чого уникати — обіцянок конкретного курсу і сигналів про швидке зниження ставки. На слайді — наш проєкт пресрелізу.</a:t>
+              <a:t>Усе це має пояснити комунікація. Ключова формула — «ставка — якір, курс — амортизатор»: НБУ підвищує ставку рішуче, гнучкий курс захищає резерви, а гривневі заощадження залишаються вигіднішими за валютні. Чого уникати — обіцянок конкретного курсу і сигналів про швидке зниження ставки. На слайді — наш проєкт пресрелізу.</a:t>
             </a:r>
             <a:endParaRPr lang="en-US" dirty="0"/>
           </a:p>
@@ -2362,7 +2362,7 @@
           <a:p>
             <a:r>
               <a:rPr lang="en-US" dirty="0"/>
-              <a:t>Підсумуємо. Перше — підвищити облікову ставку до 16,5% і утримувати щонайменше до середини 2027 року. Друге — керована гнучкість курсу замість витрачання резервів. Третє — пауза в лібералізації валютних обмежень. За такої політики інфляція повернеться до цілі 5% у другому кварталі 2029 року. Дякуємо за увагу! Будемо раді відповісти на ваші запитання.</a:t>
+              <a:t>Підсумуємо. Перше — підвищити облікову ставку до 17% і утримувати щонайменше до середини 2027 року. Друге — керована гнучкість курсу замість витрачання резервів. Третє — пауза в лібералізації валютних обмежень. За такої політики інфляція повернеться до цілі 5% у третьому кварталі 2029 року. Дякуємо за увагу! Будемо раді відповісти на ваші запитання.</a:t>
             </a:r>
             <a:endParaRPr lang="en-US" dirty="0"/>
           </a:p>
@@ -3066,7 +3066,7 @@
           <a:p>
             <a:r>
               <a:rPr lang="en-US" dirty="0"/>
-              <a:t>Значення базового сценарію в II і IV кварталах (рішення 16,5% у жовтні з утриманням до середини 2027, далі — траєкторія повернення до цілі). Усі квартали — results/tables/baseline_quarterly.csv.</a:t>
+              <a:t>Значення базового сценарію в II і IV кварталах (рішення 17% у жовтні з утриманням до середини 2027, далі — траєкторія повернення до цілі). Усі квартали — results/tables/baseline_quarterly.csv.</a:t>
             </a:r>
             <a:endParaRPr lang="en-US" dirty="0"/>
           </a:p>
@@ -3154,7 +3154,7 @@
           <a:p>
             <a:r>
               <a:rPr lang="en-US" dirty="0"/>
-              <a:t>Усі дані завантажуються скриптами; дата відсічення — 07.10.2026.</a:t>
+              <a:t>Усі дані завантажуються скриптами; дата відсічення — 20.10.2026.</a:t>
             </a:r>
             <a:endParaRPr lang="en-US" dirty="0"/>
           </a:p>
@@ -3330,7 +3330,7 @@
           <a:p>
             <a:r>
               <a:rPr lang="en-US" dirty="0"/>
-              <a:t>Інфляція в серпні прискорилася до 8,1%. Головні рушії — пальне, яке подорожчало майже на 39% за рік, і адмінрегульовані ціни. Але більше нас турбує базова інфляція: вона тримається на рівні 8,1% три місяці поспіль, а послуги дорожчають на 13% через зарплати, оренду й логістику. Стримує лише продовольство: через блокаду Чорного моря зерно й овочі залишаються на внутрішньому ринку.</a:t>
+              <a:t>У вересні інфляція стрибнула до 10% — ціни за місяць зросли на 2,1%. Пальне подорожчало на 46% за рік, атаки на склади й логістику здорожчили доставку. Але більше нас турбує базова інфляція: вона прискорилася до 8,8%, послуги дорожчають на 14%. І навіть продовольство, яке досі стримувало ціни, почало дорожчати.</a:t>
             </a:r>
             <a:endParaRPr lang="en-US" dirty="0"/>
           </a:p>
@@ -7107,7 +7107,7 @@
                 <a:ea typeface="Cambria" pitchFamily="34" charset="-122"/>
                 <a:cs typeface="Cambria" pitchFamily="34" charset="-120"/>
               </a:rPr>
-              <a:t>0,8–1,2 в. п.</a:t>
+              <a:t>0,7–1,0 в. п.</a:t>
             </a:r>
             <a:endParaRPr lang="en-US" sz="3400" dirty="0"/>
           </a:p>
@@ -8792,7 +8792,7 @@
                             <a:schemeClr val="tx1"/>
                           </a:solidFill>
                         </a:rPr>
-                        <a:t>Наукаст: тренд 0,65%/міс + сезонність − 0,1 в. п. (продовольство) → грудень 9,9% р/р</a:t>
+                        <a:t>Наукаст: тренд 0,86%/міс + сезонність − 0,1 в. п. (разові ефекти вересня) → грудень 12,1% р/р</a:t>
                       </a:r>
                       <a:endParaRPr lang="en-US" sz="1200" dirty="0"/>
                     </a:p>
@@ -10678,7 +10678,7 @@
                 <a:ea typeface="Cambria" pitchFamily="34" charset="-122"/>
                 <a:cs typeface="Cambria" pitchFamily="34" charset="-120"/>
               </a:rPr>
-              <a:t>Короткостроковий прогноз: інфляція зросте до ≈9,9% у грудні</a:t>
+              <a:t>Короткостроковий прогноз: інфляція зросте до ≈12,1% у грудні</a:t>
             </a:r>
             <a:endParaRPr lang="en-US" sz="2600" dirty="0"/>
           </a:p>
@@ -10753,7 +10753,7 @@
                 <a:solidFill>
                   <a:srgbClr val="5F6B6D"/>
                 </a:solidFill>
-                <a:hlinkClick r:id="rId2" invalidUrl="" action="" tgtFrame="" tooltip="https://bank.gov.ua/ua/news/all/komentar-natsionalnogo-banku-schodo-rivnya-inflyatsiyi-v-serpni-2026-roku" history="1" highlightClick="0" endSnd="0">
+                <a:hlinkClick r:id="rId2" invalidUrl="" action="" tgtFrame="" tooltip="https://bank.gov.ua/ua/news/all/komentar-natsionalnogo-banku-schodo-rivnya-inflyatsiyi-u-veresni-2026-roku" history="1" highlightClick="0" endSnd="0">
                   <a:extLst>
                     <a:ext uri="{A12FA001-AC4F-418D-AE19-62706E023703}">
                       <ahyp:hlinkClr xmlns:ahyp="http://schemas.microsoft.com/office/drawing/2018/hyperlinkcolor" val="tx"/>
@@ -10761,7 +10761,7 @@
                   </a:extLst>
                 </a:hlinkClick>
               </a:rPr>
-              <a:t>коментар НБУ: інфляція в серпні</a:t>
+              <a:t>коментар НБУ: інфляція у вересні</a:t>
             </a:r>
             <a:endParaRPr lang="en-US" sz="900" dirty="0"/>
           </a:p>
@@ -11204,7 +11204,7 @@
                             <a:schemeClr val="tx1"/>
                           </a:solidFill>
                         </a:rPr>
-                        <a:t>2026-09</a:t>
+                        <a:t>2026-10</a:t>
                       </a:r>
                       <a:endParaRPr lang="en-US" sz="1200" dirty="0"/>
                     </a:p>
@@ -11265,7 +11265,7 @@
                             <a:schemeClr val="tx1"/>
                           </a:solidFill>
                         </a:rPr>
-                        <a:t>0,65</a:t>
+                        <a:t>0,86</a:t>
                       </a:r>
                       <a:endParaRPr lang="en-US" sz="1200" dirty="0"/>
                     </a:p>
@@ -11326,7 +11326,7 @@
                             <a:schemeClr val="tx1"/>
                           </a:solidFill>
                         </a:rPr>
-                        <a:t>−0,01</a:t>
+                        <a:t>0,17</a:t>
                       </a:r>
                       <a:endParaRPr lang="en-US" sz="1200" dirty="0"/>
                     </a:p>
@@ -11448,7 +11448,7 @@
                             <a:schemeClr val="tx1"/>
                           </a:solidFill>
                         </a:rPr>
-                        <a:t>0,55</a:t>
+                        <a:t>0,93</a:t>
                       </a:r>
                       <a:endParaRPr lang="en-US" sz="1200" dirty="0"/>
                     </a:p>
@@ -11509,7 +11509,7 @@
                             <a:schemeClr val="tx1"/>
                           </a:solidFill>
                         </a:rPr>
-                        <a:t>8,3</a:t>
+                        <a:t>10,0</a:t>
                       </a:r>
                       <a:endParaRPr lang="en-US" sz="1200" dirty="0"/>
                     </a:p>
@@ -11572,7 +11572,7 @@
                             <a:schemeClr val="tx1"/>
                           </a:solidFill>
                         </a:rPr>
-                        <a:t>2026-10</a:t>
+                        <a:t>2026-11</a:t>
                       </a:r>
                       <a:endParaRPr lang="en-US" sz="1200" dirty="0"/>
                     </a:p>
@@ -11633,7 +11633,7 @@
                             <a:schemeClr val="tx1"/>
                           </a:solidFill>
                         </a:rPr>
-                        <a:t>0,65</a:t>
+                        <a:t>0,86</a:t>
                       </a:r>
                       <a:endParaRPr lang="en-US" sz="1200" dirty="0"/>
                     </a:p>
@@ -11694,7 +11694,7 @@
                             <a:schemeClr val="tx1"/>
                           </a:solidFill>
                         </a:rPr>
-                        <a:t>0,31</a:t>
+                        <a:t>0,34</a:t>
                       </a:r>
                       <a:endParaRPr lang="en-US" sz="1200" dirty="0"/>
                     </a:p>
@@ -11816,7 +11816,7 @@
                             <a:schemeClr val="tx1"/>
                           </a:solidFill>
                         </a:rPr>
-                        <a:t>0,86</a:t>
+                        <a:t>1,10</a:t>
                       </a:r>
                       <a:endParaRPr lang="en-US" sz="1200" dirty="0"/>
                     </a:p>
@@ -11877,7 +11877,7 @@
                             <a:schemeClr val="tx1"/>
                           </a:solidFill>
                         </a:rPr>
-                        <a:t>8,3</a:t>
+                        <a:t>10,8</a:t>
                       </a:r>
                       <a:endParaRPr lang="en-US" sz="1200" dirty="0"/>
                     </a:p>
@@ -11940,7 +11940,7 @@
                             <a:schemeClr val="tx1"/>
                           </a:solidFill>
                         </a:rPr>
-                        <a:t>2026-11</a:t>
+                        <a:t>2026-12</a:t>
                       </a:r>
                       <a:endParaRPr lang="en-US" sz="1200" dirty="0"/>
                     </a:p>
@@ -12001,7 +12001,7 @@
                             <a:schemeClr val="tx1"/>
                           </a:solidFill>
                         </a:rPr>
-                        <a:t>0,65</a:t>
+                        <a:t>0,86</a:t>
                       </a:r>
                       <a:endParaRPr lang="en-US" sz="1200" dirty="0"/>
                     </a:p>
@@ -12062,7 +12062,7 @@
                             <a:schemeClr val="tx1"/>
                           </a:solidFill>
                         </a:rPr>
-                        <a:t>0,31</a:t>
+                        <a:t>0,61</a:t>
                       </a:r>
                       <a:endParaRPr lang="en-US" sz="1200" dirty="0"/>
                     </a:p>
@@ -12184,7 +12184,7 @@
                             <a:schemeClr val="tx1"/>
                           </a:solidFill>
                         </a:rPr>
-                        <a:t>0,86</a:t>
+                        <a:t>1,36</a:t>
                       </a:r>
                       <a:endParaRPr lang="en-US" sz="1200" dirty="0"/>
                     </a:p>
@@ -12245,7 +12245,7 @@
                             <a:schemeClr val="tx1"/>
                           </a:solidFill>
                         </a:rPr>
-                        <a:t>8,8</a:t>
+                        <a:t>12,1</a:t>
                       </a:r>
                       <a:endParaRPr lang="en-US" sz="1200" dirty="0"/>
                     </a:p>
@@ -12289,374 +12289,6 @@
                     </a:lnB>
                     <a:solidFill>
                       <a:srgbClr val="FFFFFF"/>
-                    </a:solidFill>
-                  </a:tcPr>
-                </a:tc>
-              </a:tr>
-              <a:tr h="329184">
-                <a:tc>
-                  <a:txBody>
-                    <a:bodyPr/>
-                    <a:lstStyle/>
-                    <a:p>
-                      <a:pPr algn="l" indent="0" marL="0">
-                        <a:buNone/>
-                      </a:pPr>
-                      <a:r>
-                        <a:rPr lang="en-US" sz="1200" b="1" dirty="0">
-                          <a:solidFill>
-                            <a:schemeClr val="tx1"/>
-                          </a:solidFill>
-                        </a:rPr>
-                        <a:t>2026-12</a:t>
-                      </a:r>
-                      <a:endParaRPr lang="en-US" sz="1200" dirty="0"/>
-                    </a:p>
-                  </a:txBody>
-                  <a:tcPr marL="63500" marR="63500" marT="38100" marB="38100" anchor="ctr">
-                    <a:lnL w="6350" cap="flat" cmpd="sng" algn="ctr">
-                      <a:solidFill>
-                        <a:srgbClr val="C9D6D3"/>
-                      </a:solidFill>
-                      <a:prstDash val="solid"/>
-                      <a:round/>
-                      <a:headEnd type="none" w="med" len="med"/>
-                      <a:tailEnd type="none" w="med" len="med"/>
-                    </a:lnL>
-                    <a:lnR w="6350" cap="flat" cmpd="sng" algn="ctr">
-                      <a:solidFill>
-                        <a:srgbClr val="C9D6D3"/>
-                      </a:solidFill>
-                      <a:prstDash val="solid"/>
-                      <a:round/>
-                      <a:headEnd type="none" w="med" len="med"/>
-                      <a:tailEnd type="none" w="med" len="med"/>
-                    </a:lnR>
-                    <a:lnT w="6350" cap="flat" cmpd="sng" algn="ctr">
-                      <a:solidFill>
-                        <a:srgbClr val="C9D6D3"/>
-                      </a:solidFill>
-                      <a:prstDash val="solid"/>
-                      <a:round/>
-                      <a:headEnd type="none" w="med" len="med"/>
-                      <a:tailEnd type="none" w="med" len="med"/>
-                    </a:lnT>
-                    <a:lnB w="6350" cap="flat" cmpd="sng" algn="ctr">
-                      <a:solidFill>
-                        <a:srgbClr val="C9D6D3"/>
-                      </a:solidFill>
-                      <a:prstDash val="solid"/>
-                      <a:round/>
-                      <a:headEnd type="none" w="med" len="med"/>
-                      <a:tailEnd type="none" w="med" len="med"/>
-                    </a:lnB>
-                    <a:solidFill>
-                      <a:srgbClr val="EAF1EF"/>
-                    </a:solidFill>
-                  </a:tcPr>
-                </a:tc>
-                <a:tc>
-                  <a:txBody>
-                    <a:bodyPr/>
-                    <a:lstStyle/>
-                    <a:p>
-                      <a:pPr algn="ctr" indent="0" marL="0">
-                        <a:buNone/>
-                      </a:pPr>
-                      <a:r>
-                        <a:rPr lang="en-US" sz="1200" dirty="0">
-                          <a:solidFill>
-                            <a:schemeClr val="tx1"/>
-                          </a:solidFill>
-                        </a:rPr>
-                        <a:t>0,65</a:t>
-                      </a:r>
-                      <a:endParaRPr lang="en-US" sz="1200" dirty="0"/>
-                    </a:p>
-                  </a:txBody>
-                  <a:tcPr marL="63500" marR="63500" marT="38100" marB="38100" anchor="ctr">
-                    <a:lnL w="6350" cap="flat" cmpd="sng" algn="ctr">
-                      <a:solidFill>
-                        <a:srgbClr val="C9D6D3"/>
-                      </a:solidFill>
-                      <a:prstDash val="solid"/>
-                      <a:round/>
-                      <a:headEnd type="none" w="med" len="med"/>
-                      <a:tailEnd type="none" w="med" len="med"/>
-                    </a:lnL>
-                    <a:lnR w="6350" cap="flat" cmpd="sng" algn="ctr">
-                      <a:solidFill>
-                        <a:srgbClr val="C9D6D3"/>
-                      </a:solidFill>
-                      <a:prstDash val="solid"/>
-                      <a:round/>
-                      <a:headEnd type="none" w="med" len="med"/>
-                      <a:tailEnd type="none" w="med" len="med"/>
-                    </a:lnR>
-                    <a:lnT w="6350" cap="flat" cmpd="sng" algn="ctr">
-                      <a:solidFill>
-                        <a:srgbClr val="C9D6D3"/>
-                      </a:solidFill>
-                      <a:prstDash val="solid"/>
-                      <a:round/>
-                      <a:headEnd type="none" w="med" len="med"/>
-                      <a:tailEnd type="none" w="med" len="med"/>
-                    </a:lnT>
-                    <a:lnB w="6350" cap="flat" cmpd="sng" algn="ctr">
-                      <a:solidFill>
-                        <a:srgbClr val="C9D6D3"/>
-                      </a:solidFill>
-                      <a:prstDash val="solid"/>
-                      <a:round/>
-                      <a:headEnd type="none" w="med" len="med"/>
-                      <a:tailEnd type="none" w="med" len="med"/>
-                    </a:lnB>
-                    <a:solidFill>
-                      <a:srgbClr val="EAF1EF"/>
-                    </a:solidFill>
-                  </a:tcPr>
-                </a:tc>
-                <a:tc>
-                  <a:txBody>
-                    <a:bodyPr/>
-                    <a:lstStyle/>
-                    <a:p>
-                      <a:pPr algn="ctr" indent="0" marL="0">
-                        <a:buNone/>
-                      </a:pPr>
-                      <a:r>
-                        <a:rPr lang="en-US" sz="1200" dirty="0">
-                          <a:solidFill>
-                            <a:schemeClr val="tx1"/>
-                          </a:solidFill>
-                        </a:rPr>
-                        <a:t>0,65</a:t>
-                      </a:r>
-                      <a:endParaRPr lang="en-US" sz="1200" dirty="0"/>
-                    </a:p>
-                  </a:txBody>
-                  <a:tcPr marL="63500" marR="63500" marT="38100" marB="38100" anchor="ctr">
-                    <a:lnL w="6350" cap="flat" cmpd="sng" algn="ctr">
-                      <a:solidFill>
-                        <a:srgbClr val="C9D6D3"/>
-                      </a:solidFill>
-                      <a:prstDash val="solid"/>
-                      <a:round/>
-                      <a:headEnd type="none" w="med" len="med"/>
-                      <a:tailEnd type="none" w="med" len="med"/>
-                    </a:lnL>
-                    <a:lnR w="6350" cap="flat" cmpd="sng" algn="ctr">
-                      <a:solidFill>
-                        <a:srgbClr val="C9D6D3"/>
-                      </a:solidFill>
-                      <a:prstDash val="solid"/>
-                      <a:round/>
-                      <a:headEnd type="none" w="med" len="med"/>
-                      <a:tailEnd type="none" w="med" len="med"/>
-                    </a:lnR>
-                    <a:lnT w="6350" cap="flat" cmpd="sng" algn="ctr">
-                      <a:solidFill>
-                        <a:srgbClr val="C9D6D3"/>
-                      </a:solidFill>
-                      <a:prstDash val="solid"/>
-                      <a:round/>
-                      <a:headEnd type="none" w="med" len="med"/>
-                      <a:tailEnd type="none" w="med" len="med"/>
-                    </a:lnT>
-                    <a:lnB w="6350" cap="flat" cmpd="sng" algn="ctr">
-                      <a:solidFill>
-                        <a:srgbClr val="C9D6D3"/>
-                      </a:solidFill>
-                      <a:prstDash val="solid"/>
-                      <a:round/>
-                      <a:headEnd type="none" w="med" len="med"/>
-                      <a:tailEnd type="none" w="med" len="med"/>
-                    </a:lnB>
-                    <a:solidFill>
-                      <a:srgbClr val="EAF1EF"/>
-                    </a:solidFill>
-                  </a:tcPr>
-                </a:tc>
-                <a:tc>
-                  <a:txBody>
-                    <a:bodyPr/>
-                    <a:lstStyle/>
-                    <a:p>
-                      <a:pPr algn="ctr" indent="0" marL="0">
-                        <a:buNone/>
-                      </a:pPr>
-                      <a:r>
-                        <a:rPr lang="en-US" sz="1200" dirty="0">
-                          <a:solidFill>
-                            <a:schemeClr val="tx1"/>
-                          </a:solidFill>
-                        </a:rPr>
-                        <a:t>−0,1</a:t>
-                      </a:r>
-                      <a:endParaRPr lang="en-US" sz="1200" dirty="0"/>
-                    </a:p>
-                  </a:txBody>
-                  <a:tcPr marL="63500" marR="63500" marT="38100" marB="38100" anchor="ctr">
-                    <a:lnL w="6350" cap="flat" cmpd="sng" algn="ctr">
-                      <a:solidFill>
-                        <a:srgbClr val="C9D6D3"/>
-                      </a:solidFill>
-                      <a:prstDash val="solid"/>
-                      <a:round/>
-                      <a:headEnd type="none" w="med" len="med"/>
-                      <a:tailEnd type="none" w="med" len="med"/>
-                    </a:lnL>
-                    <a:lnR w="6350" cap="flat" cmpd="sng" algn="ctr">
-                      <a:solidFill>
-                        <a:srgbClr val="C9D6D3"/>
-                      </a:solidFill>
-                      <a:prstDash val="solid"/>
-                      <a:round/>
-                      <a:headEnd type="none" w="med" len="med"/>
-                      <a:tailEnd type="none" w="med" len="med"/>
-                    </a:lnR>
-                    <a:lnT w="6350" cap="flat" cmpd="sng" algn="ctr">
-                      <a:solidFill>
-                        <a:srgbClr val="C9D6D3"/>
-                      </a:solidFill>
-                      <a:prstDash val="solid"/>
-                      <a:round/>
-                      <a:headEnd type="none" w="med" len="med"/>
-                      <a:tailEnd type="none" w="med" len="med"/>
-                    </a:lnT>
-                    <a:lnB w="6350" cap="flat" cmpd="sng" algn="ctr">
-                      <a:solidFill>
-                        <a:srgbClr val="C9D6D3"/>
-                      </a:solidFill>
-                      <a:prstDash val="solid"/>
-                      <a:round/>
-                      <a:headEnd type="none" w="med" len="med"/>
-                      <a:tailEnd type="none" w="med" len="med"/>
-                    </a:lnB>
-                    <a:solidFill>
-                      <a:srgbClr val="EAF1EF"/>
-                    </a:solidFill>
-                  </a:tcPr>
-                </a:tc>
-                <a:tc>
-                  <a:txBody>
-                    <a:bodyPr/>
-                    <a:lstStyle/>
-                    <a:p>
-                      <a:pPr algn="ctr" indent="0" marL="0">
-                        <a:buNone/>
-                      </a:pPr>
-                      <a:r>
-                        <a:rPr lang="en-US" sz="1200" dirty="0">
-                          <a:solidFill>
-                            <a:schemeClr val="tx1"/>
-                          </a:solidFill>
-                        </a:rPr>
-                        <a:t>1,20</a:t>
-                      </a:r>
-                      <a:endParaRPr lang="en-US" sz="1200" dirty="0"/>
-                    </a:p>
-                  </a:txBody>
-                  <a:tcPr marL="63500" marR="63500" marT="38100" marB="38100" anchor="ctr">
-                    <a:lnL w="6350" cap="flat" cmpd="sng" algn="ctr">
-                      <a:solidFill>
-                        <a:srgbClr val="C9D6D3"/>
-                      </a:solidFill>
-                      <a:prstDash val="solid"/>
-                      <a:round/>
-                      <a:headEnd type="none" w="med" len="med"/>
-                      <a:tailEnd type="none" w="med" len="med"/>
-                    </a:lnL>
-                    <a:lnR w="6350" cap="flat" cmpd="sng" algn="ctr">
-                      <a:solidFill>
-                        <a:srgbClr val="C9D6D3"/>
-                      </a:solidFill>
-                      <a:prstDash val="solid"/>
-                      <a:round/>
-                      <a:headEnd type="none" w="med" len="med"/>
-                      <a:tailEnd type="none" w="med" len="med"/>
-                    </a:lnR>
-                    <a:lnT w="6350" cap="flat" cmpd="sng" algn="ctr">
-                      <a:solidFill>
-                        <a:srgbClr val="C9D6D3"/>
-                      </a:solidFill>
-                      <a:prstDash val="solid"/>
-                      <a:round/>
-                      <a:headEnd type="none" w="med" len="med"/>
-                      <a:tailEnd type="none" w="med" len="med"/>
-                    </a:lnT>
-                    <a:lnB w="6350" cap="flat" cmpd="sng" algn="ctr">
-                      <a:solidFill>
-                        <a:srgbClr val="C9D6D3"/>
-                      </a:solidFill>
-                      <a:prstDash val="solid"/>
-                      <a:round/>
-                      <a:headEnd type="none" w="med" len="med"/>
-                      <a:tailEnd type="none" w="med" len="med"/>
-                    </a:lnB>
-                    <a:solidFill>
-                      <a:srgbClr val="EAF1EF"/>
-                    </a:solidFill>
-                  </a:tcPr>
-                </a:tc>
-                <a:tc>
-                  <a:txBody>
-                    <a:bodyPr/>
-                    <a:lstStyle/>
-                    <a:p>
-                      <a:pPr algn="ctr" indent="0" marL="0">
-                        <a:buNone/>
-                      </a:pPr>
-                      <a:r>
-                        <a:rPr lang="en-US" sz="1200" dirty="0">
-                          <a:solidFill>
-                            <a:schemeClr val="tx1"/>
-                          </a:solidFill>
-                        </a:rPr>
-                        <a:t>9,9</a:t>
-                      </a:r>
-                      <a:endParaRPr lang="en-US" sz="1200" dirty="0"/>
-                    </a:p>
-                  </a:txBody>
-                  <a:tcPr marL="63500" marR="63500" marT="38100" marB="38100" anchor="ctr">
-                    <a:lnL w="6350" cap="flat" cmpd="sng" algn="ctr">
-                      <a:solidFill>
-                        <a:srgbClr val="C9D6D3"/>
-                      </a:solidFill>
-                      <a:prstDash val="solid"/>
-                      <a:round/>
-                      <a:headEnd type="none" w="med" len="med"/>
-                      <a:tailEnd type="none" w="med" len="med"/>
-                    </a:lnL>
-                    <a:lnR w="6350" cap="flat" cmpd="sng" algn="ctr">
-                      <a:solidFill>
-                        <a:srgbClr val="C9D6D3"/>
-                      </a:solidFill>
-                      <a:prstDash val="solid"/>
-                      <a:round/>
-                      <a:headEnd type="none" w="med" len="med"/>
-                      <a:tailEnd type="none" w="med" len="med"/>
-                    </a:lnR>
-                    <a:lnT w="6350" cap="flat" cmpd="sng" algn="ctr">
-                      <a:solidFill>
-                        <a:srgbClr val="C9D6D3"/>
-                      </a:solidFill>
-                      <a:prstDash val="solid"/>
-                      <a:round/>
-                      <a:headEnd type="none" w="med" len="med"/>
-                      <a:tailEnd type="none" w="med" len="med"/>
-                    </a:lnT>
-                    <a:lnB w="6350" cap="flat" cmpd="sng" algn="ctr">
-                      <a:solidFill>
-                        <a:srgbClr val="C9D6D3"/>
-                      </a:solidFill>
-                      <a:prstDash val="solid"/>
-                      <a:round/>
-                      <a:headEnd type="none" w="med" len="med"/>
-                      <a:tailEnd type="none" w="med" len="med"/>
-                    </a:lnB>
-                    <a:solidFill>
-                      <a:srgbClr val="EAF1EF"/>
                     </a:solidFill>
                   </a:tcPr>
                 </a:tc>
@@ -12673,8 +12305,8 @@
         </p:nvSpPr>
         <p:spPr>
           <a:xfrm>
-            <a:off x="7086600" y="3383280"/>
-            <a:ext cx="4647895" cy="2926080"/>
+            <a:off x="7086600" y="3054096"/>
+            <a:ext cx="4647895" cy="3255264"/>
           </a:xfrm>
           <a:prstGeom prst="rect">
             <a:avLst/>
@@ -12699,7 +12331,7 @@
                   <a:schemeClr val="tx1"/>
                 </a:solidFill>
               </a:rPr>
-              <a:t>Ефект бази: у вересні–грудні 2025 ціни зросли лише на 1,8% → річна інфляція механічно зростає</a:t>
+              <a:t>Ефект бази: у жовтні–грудні 2025 ціни зросли лише на 1,5% → річна інфляція механічно зростає</a:t>
             </a:r>
             <a:endParaRPr lang="en-US" sz="1300" dirty="0"/>
           </a:p>
@@ -12717,7 +12349,7 @@
                   <a:schemeClr val="tx1"/>
                 </a:solidFill>
               </a:rPr>
-              <a:t>Тренд 0,65% на місяць (з урахуванням сезонності) — це ≈8% у річному вимірі</a:t>
+              <a:t>Тренд 0,86% на місяць (з урахуванням сезонності) — це ≈11% у річному вимірі; вересневий стрибок частково разовий (−0,1 в. п./міс.)</a:t>
             </a:r>
             <a:endParaRPr lang="en-US" sz="1300" dirty="0"/>
           </a:p>
@@ -12735,7 +12367,7 @@
                   <a:schemeClr val="tx1"/>
                 </a:solidFill>
               </a:rPr>
-              <a:t>Наш прогноз грудня близький до НБУ (10%): тиск пального компенсує дешевше продовольство</a:t>
+              <a:t>Грудень 12,1% — вище липневого прогнозу НБУ (10%): вересень уже вивів інфляцію з його траєкторії</a:t>
             </a:r>
             <a:endParaRPr lang="en-US" sz="1300" dirty="0"/>
           </a:p>
@@ -13048,7 +12680,7 @@
                   <a:schemeClr val="tx1"/>
                 </a:solidFill>
               </a:rPr>
-              <a:t>Пік ≈9,3% у I кв. 2027; 6,5% наприкінці 2027 (НБУ: 6,9%); у 2028 — тимчасово ≈4,2% (дешевша нафта); 5% — з II кв. 2029</a:t>
+              <a:t>Пік ≈10,7% у I кв. 2027; 6,5% наприкінці 2027 (НБУ: 6,9%); у 2028 — тимчасово ≈4,1% (дешевша нафта); 5% — з III кв. 2029</a:t>
             </a:r>
             <a:endParaRPr lang="en-US" sz="1300" dirty="0"/>
           </a:p>
@@ -13140,7 +12772,7 @@
                   <a:schemeClr val="tx1"/>
                 </a:solidFill>
               </a:rPr>
-              <a:t>Ставка: 16,5% до середини 2027 → 15,1% наприкінці 2027 → 10,4% — 2028 → 9,0% — 2029</a:t>
+              <a:t>Ставка: 17% до середини 2027 → 15,5% наприкінці 2027 → 10,3% — 2028 → 9,0% — 2029</a:t>
             </a:r>
             <a:endParaRPr lang="en-US" sz="1300" dirty="0"/>
           </a:p>
@@ -13346,7 +12978,7 @@
                 <a:ea typeface="Cambria" pitchFamily="34" charset="-122"/>
                 <a:cs typeface="Cambria" pitchFamily="34" charset="-120"/>
               </a:rPr>
-              <a:t>Базова інфляція в 2027 стійкіша, ніж у НБУ: 5,7% наприкінці року проти 5,1%</a:t>
+              <a:t>Базова інфляція в 2027 стійкіша, ніж у НБУ: 5,3% наприкінці року проти 5,1%</a:t>
             </a:r>
             <a:endParaRPr lang="en-US" sz="2600" dirty="0"/>
           </a:p>
@@ -13529,7 +13161,7 @@
                   <a:schemeClr val="tx1"/>
                 </a:solidFill>
               </a:rPr>
-              <a:t>2028: базова 3,1% (НБУ 3,3%) — слабкий попит → простір для зниження ставки з II пів. 2027</a:t>
+              <a:t>2028: базова 3,0% (НБУ 3,3%) — слабкий попит → простір для зниження ставки з II пів. 2027</a:t>
             </a:r>
             <a:endParaRPr lang="en-US" sz="1400" dirty="0"/>
           </a:p>
@@ -13547,7 +13179,7 @@
                   <a:schemeClr val="tx1"/>
                 </a:solidFill>
               </a:rPr>
-              <a:t>Висновок: превентивне підвищення зараз, швидше пом'якшення пізніше</a:t>
+              <a:t>Висновок: рішуче підвищення зараз, швидше пом'якшення пізніше</a:t>
             </a:r>
             <a:endParaRPr lang="en-US" sz="1400" dirty="0"/>
           </a:p>
@@ -13661,7 +13293,7 @@
                 <a:ea typeface="Cambria" pitchFamily="34" charset="-122"/>
                 <a:cs typeface="Cambria" pitchFamily="34" charset="-120"/>
               </a:rPr>
-              <a:t>Ми бачимо слабший попит, ніж НБУ: розрив ВВП у 2027 ≈0,2% проти 1,4%</a:t>
+              <a:t>Ми бачимо слабший попит, ніж НБУ: розрив ВВП у 2027 ≈0,3% проти 1,4%</a:t>
             </a:r>
             <a:endParaRPr lang="en-US" sz="2600" dirty="0"/>
           </a:p>
@@ -13861,7 +13493,7 @@
                   <a:schemeClr val="tx1"/>
                 </a:solidFill>
               </a:rPr>
-              <a:t>ВВП: 0,0% / 0,6% / 1,0% у 2026–2028 (НБУ: 1,8 / 2,8 / 3,0%)</a:t>
+              <a:t>ВВП: 0,0% / 0,7% / 0,8% у 2026–2028 (НБУ: 1,8 / 2,8 / 3,0%)</a:t>
             </a:r>
             <a:endParaRPr lang="en-US" sz="1400" dirty="0"/>
           </a:p>
@@ -14627,7 +14259,7 @@
                             <a:schemeClr val="tx1"/>
                           </a:solidFill>
                         </a:rPr>
-                        <a:t>9,3</a:t>
+                        <a:t>10,7</a:t>
                       </a:r>
                       <a:endParaRPr lang="en-US" sz="1200" dirty="0"/>
                     </a:p>
@@ -14749,7 +14381,7 @@
                             <a:schemeClr val="tx1"/>
                           </a:solidFill>
                         </a:rPr>
-                        <a:t>16,5</a:t>
+                        <a:t>17,0</a:t>
                       </a:r>
                       <a:endParaRPr lang="en-US" sz="1200" dirty="0"/>
                     </a:p>
@@ -14810,7 +14442,7 @@
                             <a:schemeClr val="tx1"/>
                           </a:solidFill>
                         </a:rPr>
-                        <a:t>51,9</a:t>
+                        <a:t>51,7</a:t>
                       </a:r>
                       <a:endParaRPr lang="en-US" sz="1200" dirty="0"/>
                     </a:p>
@@ -14871,7 +14503,7 @@
                             <a:schemeClr val="tx1"/>
                           </a:solidFill>
                         </a:rPr>
-                        <a:t>0,6</a:t>
+                        <a:t>0,7</a:t>
                       </a:r>
                       <a:endParaRPr lang="en-US" sz="1200" dirty="0"/>
                     </a:p>
@@ -14995,7 +14627,7 @@
                             <a:schemeClr val="tx1"/>
                           </a:solidFill>
                         </a:rPr>
-                        <a:t>10,6</a:t>
+                        <a:t>12,0</a:t>
                       </a:r>
                       <a:endParaRPr lang="en-US" sz="1200" dirty="0"/>
                     </a:p>
@@ -15117,7 +14749,7 @@
                             <a:schemeClr val="tx1"/>
                           </a:solidFill>
                         </a:rPr>
-                        <a:t>17,3</a:t>
+                        <a:t>17,8</a:t>
                       </a:r>
                       <a:endParaRPr lang="en-US" sz="1200" dirty="0"/>
                     </a:p>
@@ -15178,7 +14810,7 @@
                             <a:schemeClr val="tx1"/>
                           </a:solidFill>
                         </a:rPr>
-                        <a:t>52,1</a:t>
+                        <a:t>51,9</a:t>
                       </a:r>
                       <a:endParaRPr lang="en-US" sz="1200" dirty="0"/>
                     </a:p>
@@ -15239,7 +14871,7 @@
                             <a:schemeClr val="tx1"/>
                           </a:solidFill>
                         </a:rPr>
-                        <a:t>−0,3</a:t>
+                        <a:t>−0,2</a:t>
                       </a:r>
                       <a:endParaRPr lang="en-US" sz="1200" dirty="0"/>
                     </a:p>
@@ -15363,7 +14995,7 @@
                             <a:schemeClr val="tx1"/>
                           </a:solidFill>
                         </a:rPr>
-                        <a:t>11,2</a:t>
+                        <a:t>12,5</a:t>
                       </a:r>
                       <a:endParaRPr lang="en-US" sz="1200" dirty="0"/>
                     </a:p>
@@ -15485,7 +15117,7 @@
                             <a:schemeClr val="tx1"/>
                           </a:solidFill>
                         </a:rPr>
-                        <a:t>19,0</a:t>
+                        <a:t>19,5</a:t>
                       </a:r>
                       <a:endParaRPr lang="en-US" sz="1200" dirty="0"/>
                     </a:p>
@@ -15546,7 +15178,7 @@
                             <a:schemeClr val="tx1"/>
                           </a:solidFill>
                         </a:rPr>
-                        <a:t>55,2</a:t>
+                        <a:t>55,0</a:t>
                       </a:r>
                       <a:endParaRPr lang="en-US" sz="1200" dirty="0"/>
                     </a:p>
@@ -15607,7 +15239,7 @@
                             <a:schemeClr val="tx1"/>
                           </a:solidFill>
                         </a:rPr>
-                        <a:t>0,3</a:t>
+                        <a:t>0,4</a:t>
                       </a:r>
                       <a:endParaRPr lang="en-US" sz="1200" dirty="0"/>
                     </a:p>
@@ -15731,7 +15363,7 @@
                             <a:schemeClr val="tx1"/>
                           </a:solidFill>
                         </a:rPr>
-                        <a:t>8,4</a:t>
+                        <a:t>10,0</a:t>
                       </a:r>
                       <a:endParaRPr lang="en-US" sz="1200" dirty="0"/>
                     </a:p>
@@ -15853,7 +15485,7 @@
                             <a:schemeClr val="tx1"/>
                           </a:solidFill>
                         </a:rPr>
-                        <a:t>16,5</a:t>
+                        <a:t>17,0</a:t>
                       </a:r>
                       <a:endParaRPr lang="en-US" sz="1200" dirty="0"/>
                     </a:p>
@@ -15914,7 +15546,7 @@
                             <a:schemeClr val="tx1"/>
                           </a:solidFill>
                         </a:rPr>
-                        <a:t>51,4</a:t>
+                        <a:t>51,2</a:t>
                       </a:r>
                       <a:endParaRPr lang="en-US" sz="1200" dirty="0"/>
                     </a:p>
@@ -15975,7 +15607,7 @@
                             <a:schemeClr val="tx1"/>
                           </a:solidFill>
                         </a:rPr>
-                        <a:t>1,5</a:t>
+                        <a:t>1,6</a:t>
                       </a:r>
                       <a:endParaRPr lang="en-US" sz="1200" dirty="0"/>
                     </a:p>
@@ -16099,7 +15731,7 @@
                             <a:schemeClr val="tx1"/>
                           </a:solidFill>
                         </a:rPr>
-                        <a:t>9,8</a:t>
+                        <a:t>11,1</a:t>
                       </a:r>
                       <a:endParaRPr lang="en-US" sz="1200" dirty="0"/>
                     </a:p>
@@ -16221,7 +15853,7 @@
                             <a:schemeClr val="tx1"/>
                           </a:solidFill>
                         </a:rPr>
-                        <a:t>16,6</a:t>
+                        <a:t>17,1</a:t>
                       </a:r>
                       <a:endParaRPr lang="en-US" sz="1200" dirty="0"/>
                     </a:p>
@@ -16282,7 +15914,7 @@
                             <a:schemeClr val="tx1"/>
                           </a:solidFill>
                         </a:rPr>
-                        <a:t>51,9</a:t>
+                        <a:t>51,7</a:t>
                       </a:r>
                       <a:endParaRPr lang="en-US" sz="1200" dirty="0"/>
                     </a:p>
@@ -16343,7 +15975,7 @@
                             <a:schemeClr val="tx1"/>
                           </a:solidFill>
                         </a:rPr>
-                        <a:t>0,6</a:t>
+                        <a:t>0,7</a:t>
                       </a:r>
                       <a:endParaRPr lang="en-US" sz="1200" dirty="0"/>
                     </a:p>
@@ -16429,7 +16061,7 @@
                   <a:schemeClr val="tx1"/>
                 </a:solidFill>
               </a:rPr>
-              <a:t>Дефіцит фінансування: гривня на ≈6% слабша (≈55 грн/€) → інфляція до 11%, ставка до ≈19%</a:t>
+              <a:t>Дефіцит фінансування: гривня на ≈6% слабша (≈55 грн/€) → інфляція до 12%, ставка до ≈20%</a:t>
             </a:r>
             <a:endParaRPr lang="en-US" sz="1300" dirty="0"/>
           </a:p>
@@ -16447,7 +16079,7 @@
                   <a:schemeClr val="tx1"/>
                 </a:solidFill>
               </a:rPr>
-              <a:t>Важка зима: інфляція до 10,6%, ставка ≈17,5%, ВВП 2027 — −0,3%</a:t>
+              <a:t>Важка зима: інфляція до 12,0%, ставка ≈18,0%, ВВП 2027 — −0,2%</a:t>
             </a:r>
             <a:endParaRPr lang="en-US" sz="1300" dirty="0"/>
           </a:p>
@@ -16465,7 +16097,7 @@
                   <a:schemeClr val="tx1"/>
                 </a:solidFill>
               </a:rPr>
-              <a:t>Нафта $120: +0,5 в. п. до піку інфляції, ставка майже не змінюється</a:t>
+              <a:t>Нафта $120: +0,4 в. п. до піку інфляції, ставка майже не змінюється</a:t>
             </a:r>
             <a:endParaRPr lang="en-US" sz="1300" dirty="0"/>
           </a:p>
@@ -16597,7 +16229,7 @@
                 <a:ea typeface="Cambria" pitchFamily="34" charset="-122"/>
                 <a:cs typeface="Cambria" pitchFamily="34" charset="-120"/>
               </a:rPr>
-              <a:t>Головне: помірне посилення ставки, гнучкіший курс, пауза в лібералізації</a:t>
+              <a:t>Головне: ставка 17%, гнучкіший курс, пауза в лібералізації</a:t>
             </a:r>
             <a:endParaRPr lang="en-US" sz="2600" dirty="0"/>
           </a:p>
@@ -16777,7 +16409,7 @@
                 <a:ea typeface="Cambria" pitchFamily="34" charset="-122"/>
                 <a:cs typeface="Cambria" pitchFamily="34" charset="-120"/>
               </a:rPr>
-              <a:t>16,5%</a:t>
+              <a:t>17%</a:t>
             </a:r>
             <a:pPr indent="0" marL="0">
               <a:buNone/>
@@ -16788,7 +16420,7 @@
                   <a:srgbClr val="C98A00"/>
                 </a:solidFill>
               </a:rPr>
-              <a:t>  +0,5 в. п.</a:t>
+              <a:t>  +1,0 в. п.</a:t>
             </a:r>
             <a:endParaRPr lang="en-US" sz="4000" dirty="0"/>
           </a:p>
@@ -16968,7 +16600,7 @@
                   <a:schemeClr val="tx1"/>
                 </a:solidFill>
               </a:rPr>
-              <a:t>допускати поступове послаблення; за ставки 16,5% фактичне — ≈1% на рік; інтервенції лише згладжують коливання</a:t>
+              <a:t>допускати поступове послаблення; за ставки 17% фактичне — ≈1% на рік; інтервенції лише згладжують коливання</a:t>
             </a:r>
             <a:endParaRPr lang="en-US" sz="1300" dirty="0"/>
           </a:p>
@@ -17522,7 +17154,7 @@
                             <a:schemeClr val="tx1"/>
                           </a:solidFill>
                         </a:rPr>
-                        <a:t>8,8</a:t>
+                        <a:t>10,4</a:t>
                       </a:r>
                       <a:endParaRPr lang="en-US" sz="1500" dirty="0"/>
                     </a:p>
@@ -17644,7 +17276,7 @@
                             <a:schemeClr val="tx1"/>
                           </a:solidFill>
                         </a:rPr>
-                        <a:t>4,4</a:t>
+                        <a:t>4,3</a:t>
                       </a:r>
                       <a:endParaRPr lang="en-US" sz="1500" dirty="0"/>
                     </a:p>
@@ -17829,7 +17461,7 @@
                             <a:schemeClr val="tx1"/>
                           </a:solidFill>
                         </a:rPr>
-                        <a:t>8,9</a:t>
+                        <a:t>8,5</a:t>
                       </a:r>
                       <a:endParaRPr lang="en-US" sz="1500" dirty="0"/>
                     </a:p>
@@ -17890,7 +17522,7 @@
                             <a:schemeClr val="tx1"/>
                           </a:solidFill>
                         </a:rPr>
-                        <a:t>5,7</a:t>
+                        <a:t>5,3</a:t>
                       </a:r>
                       <a:endParaRPr lang="en-US" sz="1500" dirty="0"/>
                     </a:p>
@@ -17951,7 +17583,7 @@
                             <a:schemeClr val="tx1"/>
                           </a:solidFill>
                         </a:rPr>
-                        <a:t>3,1</a:t>
+                        <a:t>3,0</a:t>
                       </a:r>
                       <a:endParaRPr lang="en-US" sz="1500" dirty="0"/>
                     </a:p>
@@ -18197,7 +17829,7 @@
                             <a:schemeClr val="tx1"/>
                           </a:solidFill>
                         </a:rPr>
-                        <a:t>0,6</a:t>
+                        <a:t>0,7</a:t>
                       </a:r>
                       <a:endParaRPr lang="en-US" sz="1500" dirty="0"/>
                     </a:p>
@@ -18258,7 +17890,7 @@
                             <a:schemeClr val="tx1"/>
                           </a:solidFill>
                         </a:rPr>
-                        <a:t>1,0</a:t>
+                        <a:t>0,8</a:t>
                       </a:r>
                       <a:endParaRPr lang="en-US" sz="1500" dirty="0"/>
                     </a:p>
@@ -18319,7 +17951,7 @@
                             <a:schemeClr val="tx1"/>
                           </a:solidFill>
                         </a:rPr>
-                        <a:t>3,0</a:t>
+                        <a:t>3,1</a:t>
                       </a:r>
                       <a:endParaRPr lang="en-US" sz="1500" dirty="0"/>
                     </a:p>
@@ -18443,7 +18075,7 @@
                             <a:schemeClr val="tx1"/>
                           </a:solidFill>
                         </a:rPr>
-                        <a:t>16,5</a:t>
+                        <a:t>17,0</a:t>
                       </a:r>
                       <a:endParaRPr lang="en-US" sz="1500" dirty="0"/>
                     </a:p>
@@ -18504,7 +18136,7 @@
                             <a:schemeClr val="tx1"/>
                           </a:solidFill>
                         </a:rPr>
-                        <a:t>15,1</a:t>
+                        <a:t>15,5</a:t>
                       </a:r>
                       <a:endParaRPr lang="en-US" sz="1500" dirty="0"/>
                     </a:p>
@@ -18565,7 +18197,7 @@
                             <a:schemeClr val="tx1"/>
                           </a:solidFill>
                         </a:rPr>
-                        <a:t>10,4</a:t>
+                        <a:t>10,3</a:t>
                       </a:r>
                       <a:endParaRPr lang="en-US" sz="1500" dirty="0"/>
                     </a:p>
@@ -18750,7 +18382,7 @@
                             <a:schemeClr val="tx1"/>
                           </a:solidFill>
                         </a:rPr>
-                        <a:t>51,6</a:t>
+                        <a:t>51,5</a:t>
                       </a:r>
                       <a:endParaRPr lang="en-US" sz="1500" dirty="0"/>
                     </a:p>
@@ -18811,7 +18443,7 @@
                             <a:schemeClr val="tx1"/>
                           </a:solidFill>
                         </a:rPr>
-                        <a:t>51,9</a:t>
+                        <a:t>51,7</a:t>
                       </a:r>
                       <a:endParaRPr lang="en-US" sz="1500" dirty="0"/>
                     </a:p>
@@ -18872,7 +18504,7 @@
                             <a:schemeClr val="tx1"/>
                           </a:solidFill>
                         </a:rPr>
-                        <a:t>52,8</a:t>
+                        <a:t>52,6</a:t>
                       </a:r>
                       <a:endParaRPr lang="en-US" sz="1500" dirty="0"/>
                     </a:p>
@@ -18933,7 +18565,7 @@
                             <a:schemeClr val="tx1"/>
                           </a:solidFill>
                         </a:rPr>
-                        <a:t>53,7</a:t>
+                        <a:t>53,5</a:t>
                       </a:r>
                       <a:endParaRPr lang="en-US" sz="1500" dirty="0"/>
                     </a:p>
@@ -19015,7 +18647,7 @@
                   <a:schemeClr val="accent6"/>
                 </a:solidFill>
               </a:rPr>
-              <a:t>* Середнє за квартал (SA); грудень 2026 — 9,9% (наукаст). Ціль НБУ — 5% на горизонті до 3 років; повернення до цілі — II кв. 2029. Дані на 07.10.2026.</a:t>
+              <a:t>* Середнє за квартал (SA); грудень 2026 — 12,1% (наукаст). Ціль НБУ — 5% на горизонті до 3 років; повернення до цілі — III кв. 2029. Дані на 20.10.2026.</a:t>
             </a:r>
             <a:endParaRPr lang="en-US" sz="1100" dirty="0"/>
           </a:p>
@@ -20440,7 +20072,7 @@
                   <a:schemeClr val="accent1"/>
                 </a:solidFill>
               </a:rPr>
-              <a:t>Наша відповідь на питання конкурсу: облікова ставка — 16,5% з утриманням до середини 2027 р.; депсертифікати — зберегти зв'язок зі строковими депозитами; офіційний курс — керована гнучкість (до ≈4% на рік) без захисту рівня; валютні обмеження — серпневий пакет зберегти, III етап — після відновлення резервів.</a:t>
+              <a:t>Наша відповідь на питання конкурсу: облікова ставка — 17% з утриманням до середини 2027 р.; депсертифікати — зберегти зв'язок зі строковими депозитами; офіційний курс — керована гнучкість (до ≈4% на рік) без захисту рівня; валютні обмеження — серпневий пакет зберегти, III етап — після відновлення резервів.</a:t>
             </a:r>
             <a:endParaRPr lang="en-US" sz="1400" dirty="0"/>
           </a:p>
@@ -21019,7 +20651,7 @@
                   <a:schemeClr val="tx1"/>
                 </a:solidFill>
               </a:rPr>
-              <a:t>Ми — за підвищення: нові дані посилили ризики</a:t>
+              <a:t>Вересневий ІСЦ 10,0% — вище прогнозу НБУ: ми — за +1 в. п.</a:t>
             </a:r>
             <a:endParaRPr lang="en-US" sz="1400" dirty="0"/>
           </a:p>
@@ -21630,7 +21262,804 @@
                             <a:schemeClr val="tx1"/>
                           </a:solidFill>
                         </a:rPr>
-                        <a:t>Знизити до 15,5%</a:t>
+                        <a:t>Утримати 16%</a:t>
+                      </a:r>
+                      <a:endParaRPr lang="en-US" sz="1200" dirty="0"/>
+                    </a:p>
+                  </a:txBody>
+                  <a:tcPr marL="63500" marR="63500" marT="38100" marB="38100" anchor="ctr">
+                    <a:lnL w="6350" cap="flat" cmpd="sng" algn="ctr">
+                      <a:solidFill>
+                        <a:srgbClr val="C9D6D3"/>
+                      </a:solidFill>
+                      <a:prstDash val="solid"/>
+                      <a:round/>
+                      <a:headEnd type="none" w="med" len="med"/>
+                      <a:tailEnd type="none" w="med" len="med"/>
+                    </a:lnL>
+                    <a:lnR w="6350" cap="flat" cmpd="sng" algn="ctr">
+                      <a:solidFill>
+                        <a:srgbClr val="C9D6D3"/>
+                      </a:solidFill>
+                      <a:prstDash val="solid"/>
+                      <a:round/>
+                      <a:headEnd type="none" w="med" len="med"/>
+                      <a:tailEnd type="none" w="med" len="med"/>
+                    </a:lnR>
+                    <a:lnT w="6350" cap="flat" cmpd="sng" algn="ctr">
+                      <a:solidFill>
+                        <a:srgbClr val="C9D6D3"/>
+                      </a:solidFill>
+                      <a:prstDash val="solid"/>
+                      <a:round/>
+                      <a:headEnd type="none" w="med" len="med"/>
+                      <a:tailEnd type="none" w="med" len="med"/>
+                    </a:lnT>
+                    <a:lnB w="6350" cap="flat" cmpd="sng" algn="ctr">
+                      <a:solidFill>
+                        <a:srgbClr val="C9D6D3"/>
+                      </a:solidFill>
+                      <a:prstDash val="solid"/>
+                      <a:round/>
+                      <a:headEnd type="none" w="med" len="med"/>
+                      <a:tailEnd type="none" w="med" len="med"/>
+                    </a:lnB>
+                    <a:solidFill>
+                      <a:srgbClr val="FFFFFF"/>
+                    </a:solidFill>
+                  </a:tcPr>
+                </a:tc>
+                <a:tc>
+                  <a:txBody>
+                    <a:bodyPr/>
+                    <a:lstStyle/>
+                    <a:p>
+                      <a:pPr algn="ctr" indent="0" marL="0">
+                        <a:buNone/>
+                      </a:pPr>
+                      <a:r>
+                        <a:rPr lang="en-US" sz="1200" dirty="0">
+                          <a:solidFill>
+                            <a:schemeClr val="tx1"/>
+                          </a:solidFill>
+                        </a:rPr>
+                        <a:t>16,0</a:t>
+                      </a:r>
+                      <a:endParaRPr lang="en-US" sz="1200" dirty="0"/>
+                    </a:p>
+                  </a:txBody>
+                  <a:tcPr marL="63500" marR="63500" marT="38100" marB="38100" anchor="ctr">
+                    <a:lnL w="6350" cap="flat" cmpd="sng" algn="ctr">
+                      <a:solidFill>
+                        <a:srgbClr val="C9D6D3"/>
+                      </a:solidFill>
+                      <a:prstDash val="solid"/>
+                      <a:round/>
+                      <a:headEnd type="none" w="med" len="med"/>
+                      <a:tailEnd type="none" w="med" len="med"/>
+                    </a:lnL>
+                    <a:lnR w="6350" cap="flat" cmpd="sng" algn="ctr">
+                      <a:solidFill>
+                        <a:srgbClr val="C9D6D3"/>
+                      </a:solidFill>
+                      <a:prstDash val="solid"/>
+                      <a:round/>
+                      <a:headEnd type="none" w="med" len="med"/>
+                      <a:tailEnd type="none" w="med" len="med"/>
+                    </a:lnR>
+                    <a:lnT w="6350" cap="flat" cmpd="sng" algn="ctr">
+                      <a:solidFill>
+                        <a:srgbClr val="C9D6D3"/>
+                      </a:solidFill>
+                      <a:prstDash val="solid"/>
+                      <a:round/>
+                      <a:headEnd type="none" w="med" len="med"/>
+                      <a:tailEnd type="none" w="med" len="med"/>
+                    </a:lnT>
+                    <a:lnB w="6350" cap="flat" cmpd="sng" algn="ctr">
+                      <a:solidFill>
+                        <a:srgbClr val="C9D6D3"/>
+                      </a:solidFill>
+                      <a:prstDash val="solid"/>
+                      <a:round/>
+                      <a:headEnd type="none" w="med" len="med"/>
+                      <a:tailEnd type="none" w="med" len="med"/>
+                    </a:lnB>
+                    <a:solidFill>
+                      <a:srgbClr val="FFFFFF"/>
+                    </a:solidFill>
+                  </a:tcPr>
+                </a:tc>
+                <a:tc>
+                  <a:txBody>
+                    <a:bodyPr/>
+                    <a:lstStyle/>
+                    <a:p>
+                      <a:pPr algn="ctr" indent="0" marL="0">
+                        <a:buNone/>
+                      </a:pPr>
+                      <a:r>
+                        <a:rPr lang="en-US" sz="1200" dirty="0">
+                          <a:solidFill>
+                            <a:schemeClr val="tx1"/>
+                          </a:solidFill>
+                        </a:rPr>
+                        <a:t>15,6</a:t>
+                      </a:r>
+                      <a:endParaRPr lang="en-US" sz="1200" dirty="0"/>
+                    </a:p>
+                  </a:txBody>
+                  <a:tcPr marL="63500" marR="63500" marT="38100" marB="38100" anchor="ctr">
+                    <a:lnL w="6350" cap="flat" cmpd="sng" algn="ctr">
+                      <a:solidFill>
+                        <a:srgbClr val="C9D6D3"/>
+                      </a:solidFill>
+                      <a:prstDash val="solid"/>
+                      <a:round/>
+                      <a:headEnd type="none" w="med" len="med"/>
+                      <a:tailEnd type="none" w="med" len="med"/>
+                    </a:lnL>
+                    <a:lnR w="6350" cap="flat" cmpd="sng" algn="ctr">
+                      <a:solidFill>
+                        <a:srgbClr val="C9D6D3"/>
+                      </a:solidFill>
+                      <a:prstDash val="solid"/>
+                      <a:round/>
+                      <a:headEnd type="none" w="med" len="med"/>
+                      <a:tailEnd type="none" w="med" len="med"/>
+                    </a:lnR>
+                    <a:lnT w="6350" cap="flat" cmpd="sng" algn="ctr">
+                      <a:solidFill>
+                        <a:srgbClr val="C9D6D3"/>
+                      </a:solidFill>
+                      <a:prstDash val="solid"/>
+                      <a:round/>
+                      <a:headEnd type="none" w="med" len="med"/>
+                      <a:tailEnd type="none" w="med" len="med"/>
+                    </a:lnT>
+                    <a:lnB w="6350" cap="flat" cmpd="sng" algn="ctr">
+                      <a:solidFill>
+                        <a:srgbClr val="C9D6D3"/>
+                      </a:solidFill>
+                      <a:prstDash val="solid"/>
+                      <a:round/>
+                      <a:headEnd type="none" w="med" len="med"/>
+                      <a:tailEnd type="none" w="med" len="med"/>
+                    </a:lnB>
+                    <a:solidFill>
+                      <a:srgbClr val="FFFFFF"/>
+                    </a:solidFill>
+                  </a:tcPr>
+                </a:tc>
+                <a:tc>
+                  <a:txBody>
+                    <a:bodyPr/>
+                    <a:lstStyle/>
+                    <a:p>
+                      <a:pPr algn="ctr" indent="0" marL="0">
+                        <a:buNone/>
+                      </a:pPr>
+                      <a:r>
+                        <a:rPr lang="en-US" sz="1200" dirty="0">
+                          <a:solidFill>
+                            <a:schemeClr val="tx1"/>
+                          </a:solidFill>
+                        </a:rPr>
+                        <a:t>7,0</a:t>
+                      </a:r>
+                      <a:endParaRPr lang="en-US" sz="1200" dirty="0"/>
+                    </a:p>
+                  </a:txBody>
+                  <a:tcPr marL="63500" marR="63500" marT="38100" marB="38100" anchor="ctr">
+                    <a:lnL w="6350" cap="flat" cmpd="sng" algn="ctr">
+                      <a:solidFill>
+                        <a:srgbClr val="C9D6D3"/>
+                      </a:solidFill>
+                      <a:prstDash val="solid"/>
+                      <a:round/>
+                      <a:headEnd type="none" w="med" len="med"/>
+                      <a:tailEnd type="none" w="med" len="med"/>
+                    </a:lnL>
+                    <a:lnR w="6350" cap="flat" cmpd="sng" algn="ctr">
+                      <a:solidFill>
+                        <a:srgbClr val="C9D6D3"/>
+                      </a:solidFill>
+                      <a:prstDash val="solid"/>
+                      <a:round/>
+                      <a:headEnd type="none" w="med" len="med"/>
+                      <a:tailEnd type="none" w="med" len="med"/>
+                    </a:lnR>
+                    <a:lnT w="6350" cap="flat" cmpd="sng" algn="ctr">
+                      <a:solidFill>
+                        <a:srgbClr val="C9D6D3"/>
+                      </a:solidFill>
+                      <a:prstDash val="solid"/>
+                      <a:round/>
+                      <a:headEnd type="none" w="med" len="med"/>
+                      <a:tailEnd type="none" w="med" len="med"/>
+                    </a:lnT>
+                    <a:lnB w="6350" cap="flat" cmpd="sng" algn="ctr">
+                      <a:solidFill>
+                        <a:srgbClr val="C9D6D3"/>
+                      </a:solidFill>
+                      <a:prstDash val="solid"/>
+                      <a:round/>
+                      <a:headEnd type="none" w="med" len="med"/>
+                      <a:tailEnd type="none" w="med" len="med"/>
+                    </a:lnB>
+                    <a:solidFill>
+                      <a:srgbClr val="FFFFFF"/>
+                    </a:solidFill>
+                  </a:tcPr>
+                </a:tc>
+                <a:tc>
+                  <a:txBody>
+                    <a:bodyPr/>
+                    <a:lstStyle/>
+                    <a:p>
+                      <a:pPr algn="ctr" indent="0" marL="0">
+                        <a:buNone/>
+                      </a:pPr>
+                      <a:r>
+                        <a:rPr lang="en-US" sz="1200" dirty="0">
+                          <a:solidFill>
+                            <a:schemeClr val="tx1"/>
+                          </a:solidFill>
+                        </a:rPr>
+                        <a:t>1,0</a:t>
+                      </a:r>
+                      <a:endParaRPr lang="en-US" sz="1200" dirty="0"/>
+                    </a:p>
+                  </a:txBody>
+                  <a:tcPr marL="63500" marR="63500" marT="38100" marB="38100" anchor="ctr">
+                    <a:lnL w="6350" cap="flat" cmpd="sng" algn="ctr">
+                      <a:solidFill>
+                        <a:srgbClr val="C9D6D3"/>
+                      </a:solidFill>
+                      <a:prstDash val="solid"/>
+                      <a:round/>
+                      <a:headEnd type="none" w="med" len="med"/>
+                      <a:tailEnd type="none" w="med" len="med"/>
+                    </a:lnL>
+                    <a:lnR w="6350" cap="flat" cmpd="sng" algn="ctr">
+                      <a:solidFill>
+                        <a:srgbClr val="C9D6D3"/>
+                      </a:solidFill>
+                      <a:prstDash val="solid"/>
+                      <a:round/>
+                      <a:headEnd type="none" w="med" len="med"/>
+                      <a:tailEnd type="none" w="med" len="med"/>
+                    </a:lnR>
+                    <a:lnT w="6350" cap="flat" cmpd="sng" algn="ctr">
+                      <a:solidFill>
+                        <a:srgbClr val="C9D6D3"/>
+                      </a:solidFill>
+                      <a:prstDash val="solid"/>
+                      <a:round/>
+                      <a:headEnd type="none" w="med" len="med"/>
+                      <a:tailEnd type="none" w="med" len="med"/>
+                    </a:lnT>
+                    <a:lnB w="6350" cap="flat" cmpd="sng" algn="ctr">
+                      <a:solidFill>
+                        <a:srgbClr val="C9D6D3"/>
+                      </a:solidFill>
+                      <a:prstDash val="solid"/>
+                      <a:round/>
+                      <a:headEnd type="none" w="med" len="med"/>
+                      <a:tailEnd type="none" w="med" len="med"/>
+                    </a:lnB>
+                    <a:solidFill>
+                      <a:srgbClr val="FFFFFF"/>
+                    </a:solidFill>
+                  </a:tcPr>
+                </a:tc>
+                <a:tc>
+                  <a:txBody>
+                    <a:bodyPr/>
+                    <a:lstStyle/>
+                    <a:p>
+                      <a:pPr algn="ctr" indent="0" marL="0">
+                        <a:buNone/>
+                      </a:pPr>
+                      <a:r>
+                        <a:rPr lang="en-US" sz="1200" dirty="0">
+                          <a:solidFill>
+                            <a:schemeClr val="tx1"/>
+                          </a:solidFill>
+                        </a:rPr>
+                        <a:t>77,7</a:t>
+                      </a:r>
+                      <a:endParaRPr lang="en-US" sz="1200" dirty="0"/>
+                    </a:p>
+                  </a:txBody>
+                  <a:tcPr marL="63500" marR="63500" marT="38100" marB="38100" anchor="ctr">
+                    <a:lnL w="6350" cap="flat" cmpd="sng" algn="ctr">
+                      <a:solidFill>
+                        <a:srgbClr val="C9D6D3"/>
+                      </a:solidFill>
+                      <a:prstDash val="solid"/>
+                      <a:round/>
+                      <a:headEnd type="none" w="med" len="med"/>
+                      <a:tailEnd type="none" w="med" len="med"/>
+                    </a:lnL>
+                    <a:lnR w="6350" cap="flat" cmpd="sng" algn="ctr">
+                      <a:solidFill>
+                        <a:srgbClr val="C9D6D3"/>
+                      </a:solidFill>
+                      <a:prstDash val="solid"/>
+                      <a:round/>
+                      <a:headEnd type="none" w="med" len="med"/>
+                      <a:tailEnd type="none" w="med" len="med"/>
+                    </a:lnR>
+                    <a:lnT w="6350" cap="flat" cmpd="sng" algn="ctr">
+                      <a:solidFill>
+                        <a:srgbClr val="C9D6D3"/>
+                      </a:solidFill>
+                      <a:prstDash val="solid"/>
+                      <a:round/>
+                      <a:headEnd type="none" w="med" len="med"/>
+                      <a:tailEnd type="none" w="med" len="med"/>
+                    </a:lnT>
+                    <a:lnB w="6350" cap="flat" cmpd="sng" algn="ctr">
+                      <a:solidFill>
+                        <a:srgbClr val="C9D6D3"/>
+                      </a:solidFill>
+                      <a:prstDash val="solid"/>
+                      <a:round/>
+                      <a:headEnd type="none" w="med" len="med"/>
+                      <a:tailEnd type="none" w="med" len="med"/>
+                    </a:lnB>
+                    <a:solidFill>
+                      <a:srgbClr val="FFFFFF"/>
+                    </a:solidFill>
+                  </a:tcPr>
+                </a:tc>
+              </a:tr>
+              <a:tr h="310896">
+                <a:tc>
+                  <a:txBody>
+                    <a:bodyPr/>
+                    <a:lstStyle/>
+                    <a:p>
+                      <a:pPr algn="l" indent="0" marL="0">
+                        <a:buNone/>
+                      </a:pPr>
+                      <a:r>
+                        <a:rPr lang="en-US" sz="1200" b="1" dirty="0">
+                          <a:solidFill>
+                            <a:schemeClr val="tx1"/>
+                          </a:solidFill>
+                        </a:rPr>
+                        <a:t>Підвищити до 16,5%</a:t>
+                      </a:r>
+                      <a:endParaRPr lang="en-US" sz="1200" dirty="0"/>
+                    </a:p>
+                  </a:txBody>
+                  <a:tcPr marL="63500" marR="63500" marT="38100" marB="38100" anchor="ctr">
+                    <a:lnL w="6350" cap="flat" cmpd="sng" algn="ctr">
+                      <a:solidFill>
+                        <a:srgbClr val="C9D6D3"/>
+                      </a:solidFill>
+                      <a:prstDash val="solid"/>
+                      <a:round/>
+                      <a:headEnd type="none" w="med" len="med"/>
+                      <a:tailEnd type="none" w="med" len="med"/>
+                    </a:lnL>
+                    <a:lnR w="6350" cap="flat" cmpd="sng" algn="ctr">
+                      <a:solidFill>
+                        <a:srgbClr val="C9D6D3"/>
+                      </a:solidFill>
+                      <a:prstDash val="solid"/>
+                      <a:round/>
+                      <a:headEnd type="none" w="med" len="med"/>
+                      <a:tailEnd type="none" w="med" len="med"/>
+                    </a:lnR>
+                    <a:lnT w="6350" cap="flat" cmpd="sng" algn="ctr">
+                      <a:solidFill>
+                        <a:srgbClr val="C9D6D3"/>
+                      </a:solidFill>
+                      <a:prstDash val="solid"/>
+                      <a:round/>
+                      <a:headEnd type="none" w="med" len="med"/>
+                      <a:tailEnd type="none" w="med" len="med"/>
+                    </a:lnT>
+                    <a:lnB w="6350" cap="flat" cmpd="sng" algn="ctr">
+                      <a:solidFill>
+                        <a:srgbClr val="C9D6D3"/>
+                      </a:solidFill>
+                      <a:prstDash val="solid"/>
+                      <a:round/>
+                      <a:headEnd type="none" w="med" len="med"/>
+                      <a:tailEnd type="none" w="med" len="med"/>
+                    </a:lnB>
+                    <a:solidFill>
+                      <a:srgbClr val="EAF1EF"/>
+                    </a:solidFill>
+                  </a:tcPr>
+                </a:tc>
+                <a:tc>
+                  <a:txBody>
+                    <a:bodyPr/>
+                    <a:lstStyle/>
+                    <a:p>
+                      <a:pPr algn="ctr" indent="0" marL="0">
+                        <a:buNone/>
+                      </a:pPr>
+                      <a:r>
+                        <a:rPr lang="en-US" sz="1200" dirty="0">
+                          <a:solidFill>
+                            <a:schemeClr val="tx1"/>
+                          </a:solidFill>
+                        </a:rPr>
+                        <a:t>16,5</a:t>
+                      </a:r>
+                      <a:endParaRPr lang="en-US" sz="1200" dirty="0"/>
+                    </a:p>
+                  </a:txBody>
+                  <a:tcPr marL="63500" marR="63500" marT="38100" marB="38100" anchor="ctr">
+                    <a:lnL w="6350" cap="flat" cmpd="sng" algn="ctr">
+                      <a:solidFill>
+                        <a:srgbClr val="C9D6D3"/>
+                      </a:solidFill>
+                      <a:prstDash val="solid"/>
+                      <a:round/>
+                      <a:headEnd type="none" w="med" len="med"/>
+                      <a:tailEnd type="none" w="med" len="med"/>
+                    </a:lnL>
+                    <a:lnR w="6350" cap="flat" cmpd="sng" algn="ctr">
+                      <a:solidFill>
+                        <a:srgbClr val="C9D6D3"/>
+                      </a:solidFill>
+                      <a:prstDash val="solid"/>
+                      <a:round/>
+                      <a:headEnd type="none" w="med" len="med"/>
+                      <a:tailEnd type="none" w="med" len="med"/>
+                    </a:lnR>
+                    <a:lnT w="6350" cap="flat" cmpd="sng" algn="ctr">
+                      <a:solidFill>
+                        <a:srgbClr val="C9D6D3"/>
+                      </a:solidFill>
+                      <a:prstDash val="solid"/>
+                      <a:round/>
+                      <a:headEnd type="none" w="med" len="med"/>
+                      <a:tailEnd type="none" w="med" len="med"/>
+                    </a:lnT>
+                    <a:lnB w="6350" cap="flat" cmpd="sng" algn="ctr">
+                      <a:solidFill>
+                        <a:srgbClr val="C9D6D3"/>
+                      </a:solidFill>
+                      <a:prstDash val="solid"/>
+                      <a:round/>
+                      <a:headEnd type="none" w="med" len="med"/>
+                      <a:tailEnd type="none" w="med" len="med"/>
+                    </a:lnB>
+                    <a:solidFill>
+                      <a:srgbClr val="EAF1EF"/>
+                    </a:solidFill>
+                  </a:tcPr>
+                </a:tc>
+                <a:tc>
+                  <a:txBody>
+                    <a:bodyPr/>
+                    <a:lstStyle/>
+                    <a:p>
+                      <a:pPr algn="ctr" indent="0" marL="0">
+                        <a:buNone/>
+                      </a:pPr>
+                      <a:r>
+                        <a:rPr lang="en-US" sz="1200" dirty="0">
+                          <a:solidFill>
+                            <a:schemeClr val="tx1"/>
+                          </a:solidFill>
+                        </a:rPr>
+                        <a:t>15,5</a:t>
+                      </a:r>
+                      <a:endParaRPr lang="en-US" sz="1200" dirty="0"/>
+                    </a:p>
+                  </a:txBody>
+                  <a:tcPr marL="63500" marR="63500" marT="38100" marB="38100" anchor="ctr">
+                    <a:lnL w="6350" cap="flat" cmpd="sng" algn="ctr">
+                      <a:solidFill>
+                        <a:srgbClr val="C9D6D3"/>
+                      </a:solidFill>
+                      <a:prstDash val="solid"/>
+                      <a:round/>
+                      <a:headEnd type="none" w="med" len="med"/>
+                      <a:tailEnd type="none" w="med" len="med"/>
+                    </a:lnL>
+                    <a:lnR w="6350" cap="flat" cmpd="sng" algn="ctr">
+                      <a:solidFill>
+                        <a:srgbClr val="C9D6D3"/>
+                      </a:solidFill>
+                      <a:prstDash val="solid"/>
+                      <a:round/>
+                      <a:headEnd type="none" w="med" len="med"/>
+                      <a:tailEnd type="none" w="med" len="med"/>
+                    </a:lnR>
+                    <a:lnT w="6350" cap="flat" cmpd="sng" algn="ctr">
+                      <a:solidFill>
+                        <a:srgbClr val="C9D6D3"/>
+                      </a:solidFill>
+                      <a:prstDash val="solid"/>
+                      <a:round/>
+                      <a:headEnd type="none" w="med" len="med"/>
+                      <a:tailEnd type="none" w="med" len="med"/>
+                    </a:lnT>
+                    <a:lnB w="6350" cap="flat" cmpd="sng" algn="ctr">
+                      <a:solidFill>
+                        <a:srgbClr val="C9D6D3"/>
+                      </a:solidFill>
+                      <a:prstDash val="solid"/>
+                      <a:round/>
+                      <a:headEnd type="none" w="med" len="med"/>
+                      <a:tailEnd type="none" w="med" len="med"/>
+                    </a:lnB>
+                    <a:solidFill>
+                      <a:srgbClr val="EAF1EF"/>
+                    </a:solidFill>
+                  </a:tcPr>
+                </a:tc>
+                <a:tc>
+                  <a:txBody>
+                    <a:bodyPr/>
+                    <a:lstStyle/>
+                    <a:p>
+                      <a:pPr algn="ctr" indent="0" marL="0">
+                        <a:buNone/>
+                      </a:pPr>
+                      <a:r>
+                        <a:rPr lang="en-US" sz="1200" dirty="0">
+                          <a:solidFill>
+                            <a:schemeClr val="tx1"/>
+                          </a:solidFill>
+                        </a:rPr>
+                        <a:t>6,7</a:t>
+                      </a:r>
+                      <a:endParaRPr lang="en-US" sz="1200" dirty="0"/>
+                    </a:p>
+                  </a:txBody>
+                  <a:tcPr marL="63500" marR="63500" marT="38100" marB="38100" anchor="ctr">
+                    <a:lnL w="6350" cap="flat" cmpd="sng" algn="ctr">
+                      <a:solidFill>
+                        <a:srgbClr val="C9D6D3"/>
+                      </a:solidFill>
+                      <a:prstDash val="solid"/>
+                      <a:round/>
+                      <a:headEnd type="none" w="med" len="med"/>
+                      <a:tailEnd type="none" w="med" len="med"/>
+                    </a:lnL>
+                    <a:lnR w="6350" cap="flat" cmpd="sng" algn="ctr">
+                      <a:solidFill>
+                        <a:srgbClr val="C9D6D3"/>
+                      </a:solidFill>
+                      <a:prstDash val="solid"/>
+                      <a:round/>
+                      <a:headEnd type="none" w="med" len="med"/>
+                      <a:tailEnd type="none" w="med" len="med"/>
+                    </a:lnR>
+                    <a:lnT w="6350" cap="flat" cmpd="sng" algn="ctr">
+                      <a:solidFill>
+                        <a:srgbClr val="C9D6D3"/>
+                      </a:solidFill>
+                      <a:prstDash val="solid"/>
+                      <a:round/>
+                      <a:headEnd type="none" w="med" len="med"/>
+                      <a:tailEnd type="none" w="med" len="med"/>
+                    </a:lnT>
+                    <a:lnB w="6350" cap="flat" cmpd="sng" algn="ctr">
+                      <a:solidFill>
+                        <a:srgbClr val="C9D6D3"/>
+                      </a:solidFill>
+                      <a:prstDash val="solid"/>
+                      <a:round/>
+                      <a:headEnd type="none" w="med" len="med"/>
+                      <a:tailEnd type="none" w="med" len="med"/>
+                    </a:lnB>
+                    <a:solidFill>
+                      <a:srgbClr val="EAF1EF"/>
+                    </a:solidFill>
+                  </a:tcPr>
+                </a:tc>
+                <a:tc>
+                  <a:txBody>
+                    <a:bodyPr/>
+                    <a:lstStyle/>
+                    <a:p>
+                      <a:pPr algn="ctr" indent="0" marL="0">
+                        <a:buNone/>
+                      </a:pPr>
+                      <a:r>
+                        <a:rPr lang="en-US" sz="1200" dirty="0">
+                          <a:solidFill>
+                            <a:schemeClr val="tx1"/>
+                          </a:solidFill>
+                        </a:rPr>
+                        <a:t>0,9</a:t>
+                      </a:r>
+                      <a:endParaRPr lang="en-US" sz="1200" dirty="0"/>
+                    </a:p>
+                  </a:txBody>
+                  <a:tcPr marL="63500" marR="63500" marT="38100" marB="38100" anchor="ctr">
+                    <a:lnL w="6350" cap="flat" cmpd="sng" algn="ctr">
+                      <a:solidFill>
+                        <a:srgbClr val="C9D6D3"/>
+                      </a:solidFill>
+                      <a:prstDash val="solid"/>
+                      <a:round/>
+                      <a:headEnd type="none" w="med" len="med"/>
+                      <a:tailEnd type="none" w="med" len="med"/>
+                    </a:lnL>
+                    <a:lnR w="6350" cap="flat" cmpd="sng" algn="ctr">
+                      <a:solidFill>
+                        <a:srgbClr val="C9D6D3"/>
+                      </a:solidFill>
+                      <a:prstDash val="solid"/>
+                      <a:round/>
+                      <a:headEnd type="none" w="med" len="med"/>
+                      <a:tailEnd type="none" w="med" len="med"/>
+                    </a:lnR>
+                    <a:lnT w="6350" cap="flat" cmpd="sng" algn="ctr">
+                      <a:solidFill>
+                        <a:srgbClr val="C9D6D3"/>
+                      </a:solidFill>
+                      <a:prstDash val="solid"/>
+                      <a:round/>
+                      <a:headEnd type="none" w="med" len="med"/>
+                      <a:tailEnd type="none" w="med" len="med"/>
+                    </a:lnT>
+                    <a:lnB w="6350" cap="flat" cmpd="sng" algn="ctr">
+                      <a:solidFill>
+                        <a:srgbClr val="C9D6D3"/>
+                      </a:solidFill>
+                      <a:prstDash val="solid"/>
+                      <a:round/>
+                      <a:headEnd type="none" w="med" len="med"/>
+                      <a:tailEnd type="none" w="med" len="med"/>
+                    </a:lnB>
+                    <a:solidFill>
+                      <a:srgbClr val="EAF1EF"/>
+                    </a:solidFill>
+                  </a:tcPr>
+                </a:tc>
+                <a:tc>
+                  <a:txBody>
+                    <a:bodyPr/>
+                    <a:lstStyle/>
+                    <a:p>
+                      <a:pPr algn="ctr" indent="0" marL="0">
+                        <a:buNone/>
+                      </a:pPr>
+                      <a:r>
+                        <a:rPr lang="en-US" sz="1200" dirty="0">
+                          <a:solidFill>
+                            <a:schemeClr val="tx1"/>
+                          </a:solidFill>
+                        </a:rPr>
+                        <a:t>73,6</a:t>
+                      </a:r>
+                      <a:endParaRPr lang="en-US" sz="1200" dirty="0"/>
+                    </a:p>
+                  </a:txBody>
+                  <a:tcPr marL="63500" marR="63500" marT="38100" marB="38100" anchor="ctr">
+                    <a:lnL w="6350" cap="flat" cmpd="sng" algn="ctr">
+                      <a:solidFill>
+                        <a:srgbClr val="C9D6D3"/>
+                      </a:solidFill>
+                      <a:prstDash val="solid"/>
+                      <a:round/>
+                      <a:headEnd type="none" w="med" len="med"/>
+                      <a:tailEnd type="none" w="med" len="med"/>
+                    </a:lnL>
+                    <a:lnR w="6350" cap="flat" cmpd="sng" algn="ctr">
+                      <a:solidFill>
+                        <a:srgbClr val="C9D6D3"/>
+                      </a:solidFill>
+                      <a:prstDash val="solid"/>
+                      <a:round/>
+                      <a:headEnd type="none" w="med" len="med"/>
+                      <a:tailEnd type="none" w="med" len="med"/>
+                    </a:lnR>
+                    <a:lnT w="6350" cap="flat" cmpd="sng" algn="ctr">
+                      <a:solidFill>
+                        <a:srgbClr val="C9D6D3"/>
+                      </a:solidFill>
+                      <a:prstDash val="solid"/>
+                      <a:round/>
+                      <a:headEnd type="none" w="med" len="med"/>
+                      <a:tailEnd type="none" w="med" len="med"/>
+                    </a:lnT>
+                    <a:lnB w="6350" cap="flat" cmpd="sng" algn="ctr">
+                      <a:solidFill>
+                        <a:srgbClr val="C9D6D3"/>
+                      </a:solidFill>
+                      <a:prstDash val="solid"/>
+                      <a:round/>
+                      <a:headEnd type="none" w="med" len="med"/>
+                      <a:tailEnd type="none" w="med" len="med"/>
+                    </a:lnB>
+                    <a:solidFill>
+                      <a:srgbClr val="EAF1EF"/>
+                    </a:solidFill>
+                  </a:tcPr>
+                </a:tc>
+              </a:tr>
+              <a:tr h="310896">
+                <a:tc>
+                  <a:txBody>
+                    <a:bodyPr/>
+                    <a:lstStyle/>
+                    <a:p>
+                      <a:pPr algn="l" indent="0" marL="0">
+                        <a:buNone/>
+                      </a:pPr>
+                      <a:r>
+                        <a:rPr lang="en-US" sz="1200" b="1" dirty="0">
+                          <a:solidFill>
+                            <a:schemeClr val="tx1"/>
+                          </a:solidFill>
+                        </a:rPr>
+                        <a:t>Підвищити до 17% ★</a:t>
+                      </a:r>
+                      <a:endParaRPr lang="en-US" sz="1200" dirty="0"/>
+                    </a:p>
+                  </a:txBody>
+                  <a:tcPr marL="63500" marR="63500" marT="38100" marB="38100" anchor="ctr">
+                    <a:lnL w="6350" cap="flat" cmpd="sng" algn="ctr">
+                      <a:solidFill>
+                        <a:srgbClr val="C9D6D3"/>
+                      </a:solidFill>
+                      <a:prstDash val="solid"/>
+                      <a:round/>
+                      <a:headEnd type="none" w="med" len="med"/>
+                      <a:tailEnd type="none" w="med" len="med"/>
+                    </a:lnL>
+                    <a:lnR w="6350" cap="flat" cmpd="sng" algn="ctr">
+                      <a:solidFill>
+                        <a:srgbClr val="C9D6D3"/>
+                      </a:solidFill>
+                      <a:prstDash val="solid"/>
+                      <a:round/>
+                      <a:headEnd type="none" w="med" len="med"/>
+                      <a:tailEnd type="none" w="med" len="med"/>
+                    </a:lnR>
+                    <a:lnT w="6350" cap="flat" cmpd="sng" algn="ctr">
+                      <a:solidFill>
+                        <a:srgbClr val="C9D6D3"/>
+                      </a:solidFill>
+                      <a:prstDash val="solid"/>
+                      <a:round/>
+                      <a:headEnd type="none" w="med" len="med"/>
+                      <a:tailEnd type="none" w="med" len="med"/>
+                    </a:lnT>
+                    <a:lnB w="6350" cap="flat" cmpd="sng" algn="ctr">
+                      <a:solidFill>
+                        <a:srgbClr val="C9D6D3"/>
+                      </a:solidFill>
+                      <a:prstDash val="solid"/>
+                      <a:round/>
+                      <a:headEnd type="none" w="med" len="med"/>
+                      <a:tailEnd type="none" w="med" len="med"/>
+                    </a:lnB>
+                    <a:solidFill>
+                      <a:srgbClr val="FFFFFF"/>
+                    </a:solidFill>
+                  </a:tcPr>
+                </a:tc>
+                <a:tc>
+                  <a:txBody>
+                    <a:bodyPr/>
+                    <a:lstStyle/>
+                    <a:p>
+                      <a:pPr algn="ctr" indent="0" marL="0">
+                        <a:buNone/>
+                      </a:pPr>
+                      <a:r>
+                        <a:rPr lang="en-US" sz="1200" dirty="0">
+                          <a:solidFill>
+                            <a:schemeClr val="tx1"/>
+                          </a:solidFill>
+                        </a:rPr>
+                        <a:t>17,0</a:t>
                       </a:r>
                       <a:endParaRPr lang="en-US" sz="1200" dirty="0"/>
                     </a:p>
@@ -21752,7 +22181,7 @@
                             <a:schemeClr val="tx1"/>
                           </a:solidFill>
                         </a:rPr>
-                        <a:t>15,2</a:t>
+                        <a:t>6,5</a:t>
                       </a:r>
                       <a:endParaRPr lang="en-US" sz="1200" dirty="0"/>
                     </a:p>
@@ -21813,7 +22242,7 @@
                             <a:schemeClr val="tx1"/>
                           </a:solidFill>
                         </a:rPr>
-                        <a:t>7,0</a:t>
+                        <a:t>0,7</a:t>
                       </a:r>
                       <a:endParaRPr lang="en-US" sz="1200" dirty="0"/>
                     </a:p>
@@ -21874,68 +22303,7 @@
                             <a:schemeClr val="tx1"/>
                           </a:solidFill>
                         </a:rPr>
-                        <a:t>0,9</a:t>
-                      </a:r>
-                      <a:endParaRPr lang="en-US" sz="1200" dirty="0"/>
-                    </a:p>
-                  </a:txBody>
-                  <a:tcPr marL="63500" marR="63500" marT="38100" marB="38100" anchor="ctr">
-                    <a:lnL w="6350" cap="flat" cmpd="sng" algn="ctr">
-                      <a:solidFill>
-                        <a:srgbClr val="C9D6D3"/>
-                      </a:solidFill>
-                      <a:prstDash val="solid"/>
-                      <a:round/>
-                      <a:headEnd type="none" w="med" len="med"/>
-                      <a:tailEnd type="none" w="med" len="med"/>
-                    </a:lnL>
-                    <a:lnR w="6350" cap="flat" cmpd="sng" algn="ctr">
-                      <a:solidFill>
-                        <a:srgbClr val="C9D6D3"/>
-                      </a:solidFill>
-                      <a:prstDash val="solid"/>
-                      <a:round/>
-                      <a:headEnd type="none" w="med" len="med"/>
-                      <a:tailEnd type="none" w="med" len="med"/>
-                    </a:lnR>
-                    <a:lnT w="6350" cap="flat" cmpd="sng" algn="ctr">
-                      <a:solidFill>
-                        <a:srgbClr val="C9D6D3"/>
-                      </a:solidFill>
-                      <a:prstDash val="solid"/>
-                      <a:round/>
-                      <a:headEnd type="none" w="med" len="med"/>
-                      <a:tailEnd type="none" w="med" len="med"/>
-                    </a:lnT>
-                    <a:lnB w="6350" cap="flat" cmpd="sng" algn="ctr">
-                      <a:solidFill>
-                        <a:srgbClr val="C9D6D3"/>
-                      </a:solidFill>
-                      <a:prstDash val="solid"/>
-                      <a:round/>
-                      <a:headEnd type="none" w="med" len="med"/>
-                      <a:tailEnd type="none" w="med" len="med"/>
-                    </a:lnB>
-                    <a:solidFill>
-                      <a:srgbClr val="FFFFFF"/>
-                    </a:solidFill>
-                  </a:tcPr>
-                </a:tc>
-                <a:tc>
-                  <a:txBody>
-                    <a:bodyPr/>
-                    <a:lstStyle/>
-                    <a:p>
-                      <a:pPr algn="ctr" indent="0" marL="0">
-                        <a:buNone/>
-                      </a:pPr>
-                      <a:r>
-                        <a:rPr lang="en-US" sz="1200" dirty="0">
-                          <a:solidFill>
-                            <a:schemeClr val="tx1"/>
-                          </a:solidFill>
-                        </a:rPr>
-                        <a:t>48,3</a:t>
+                        <a:t>69,9</a:t>
                       </a:r>
                       <a:endParaRPr lang="en-US" sz="1200" dirty="0"/>
                     </a:p>
@@ -21998,7 +22366,7 @@
                             <a:schemeClr val="tx1"/>
                           </a:solidFill>
                         </a:rPr>
-                        <a:t>Утримати 16%</a:t>
+                        <a:t>Підвищити до 17,5%</a:t>
                       </a:r>
                       <a:endParaRPr lang="en-US" sz="1200" dirty="0"/>
                     </a:p>
@@ -22059,7 +22427,7 @@
                             <a:schemeClr val="tx1"/>
                           </a:solidFill>
                         </a:rPr>
-                        <a:t>16,0</a:t>
+                        <a:t>17,5</a:t>
                       </a:r>
                       <a:endParaRPr lang="en-US" sz="1200" dirty="0"/>
                     </a:p>
@@ -22120,743 +22488,7 @@
                             <a:schemeClr val="tx1"/>
                           </a:solidFill>
                         </a:rPr>
-                        <a:t>15,2</a:t>
-                      </a:r>
-                      <a:endParaRPr lang="en-US" sz="1200" dirty="0"/>
-                    </a:p>
-                  </a:txBody>
-                  <a:tcPr marL="63500" marR="63500" marT="38100" marB="38100" anchor="ctr">
-                    <a:lnL w="6350" cap="flat" cmpd="sng" algn="ctr">
-                      <a:solidFill>
-                        <a:srgbClr val="C9D6D3"/>
-                      </a:solidFill>
-                      <a:prstDash val="solid"/>
-                      <a:round/>
-                      <a:headEnd type="none" w="med" len="med"/>
-                      <a:tailEnd type="none" w="med" len="med"/>
-                    </a:lnL>
-                    <a:lnR w="6350" cap="flat" cmpd="sng" algn="ctr">
-                      <a:solidFill>
-                        <a:srgbClr val="C9D6D3"/>
-                      </a:solidFill>
-                      <a:prstDash val="solid"/>
-                      <a:round/>
-                      <a:headEnd type="none" w="med" len="med"/>
-                      <a:tailEnd type="none" w="med" len="med"/>
-                    </a:lnR>
-                    <a:lnT w="6350" cap="flat" cmpd="sng" algn="ctr">
-                      <a:solidFill>
-                        <a:srgbClr val="C9D6D3"/>
-                      </a:solidFill>
-                      <a:prstDash val="solid"/>
-                      <a:round/>
-                      <a:headEnd type="none" w="med" len="med"/>
-                      <a:tailEnd type="none" w="med" len="med"/>
-                    </a:lnT>
-                    <a:lnB w="6350" cap="flat" cmpd="sng" algn="ctr">
-                      <a:solidFill>
-                        <a:srgbClr val="C9D6D3"/>
-                      </a:solidFill>
-                      <a:prstDash val="solid"/>
-                      <a:round/>
-                      <a:headEnd type="none" w="med" len="med"/>
-                      <a:tailEnd type="none" w="med" len="med"/>
-                    </a:lnB>
-                    <a:solidFill>
-                      <a:srgbClr val="EAF1EF"/>
-                    </a:solidFill>
-                  </a:tcPr>
-                </a:tc>
-                <a:tc>
-                  <a:txBody>
-                    <a:bodyPr/>
-                    <a:lstStyle/>
-                    <a:p>
-                      <a:pPr algn="ctr" indent="0" marL="0">
-                        <a:buNone/>
-                      </a:pPr>
-                      <a:r>
-                        <a:rPr lang="en-US" sz="1200" dirty="0">
-                          <a:solidFill>
-                            <a:schemeClr val="tx1"/>
-                          </a:solidFill>
-                        </a:rPr>
-                        <a:t>6,8</a:t>
-                      </a:r>
-                      <a:endParaRPr lang="en-US" sz="1200" dirty="0"/>
-                    </a:p>
-                  </a:txBody>
-                  <a:tcPr marL="63500" marR="63500" marT="38100" marB="38100" anchor="ctr">
-                    <a:lnL w="6350" cap="flat" cmpd="sng" algn="ctr">
-                      <a:solidFill>
-                        <a:srgbClr val="C9D6D3"/>
-                      </a:solidFill>
-                      <a:prstDash val="solid"/>
-                      <a:round/>
-                      <a:headEnd type="none" w="med" len="med"/>
-                      <a:tailEnd type="none" w="med" len="med"/>
-                    </a:lnL>
-                    <a:lnR w="6350" cap="flat" cmpd="sng" algn="ctr">
-                      <a:solidFill>
-                        <a:srgbClr val="C9D6D3"/>
-                      </a:solidFill>
-                      <a:prstDash val="solid"/>
-                      <a:round/>
-                      <a:headEnd type="none" w="med" len="med"/>
-                      <a:tailEnd type="none" w="med" len="med"/>
-                    </a:lnR>
-                    <a:lnT w="6350" cap="flat" cmpd="sng" algn="ctr">
-                      <a:solidFill>
-                        <a:srgbClr val="C9D6D3"/>
-                      </a:solidFill>
-                      <a:prstDash val="solid"/>
-                      <a:round/>
-                      <a:headEnd type="none" w="med" len="med"/>
-                      <a:tailEnd type="none" w="med" len="med"/>
-                    </a:lnT>
-                    <a:lnB w="6350" cap="flat" cmpd="sng" algn="ctr">
-                      <a:solidFill>
-                        <a:srgbClr val="C9D6D3"/>
-                      </a:solidFill>
-                      <a:prstDash val="solid"/>
-                      <a:round/>
-                      <a:headEnd type="none" w="med" len="med"/>
-                      <a:tailEnd type="none" w="med" len="med"/>
-                    </a:lnB>
-                    <a:solidFill>
-                      <a:srgbClr val="EAF1EF"/>
-                    </a:solidFill>
-                  </a:tcPr>
-                </a:tc>
-                <a:tc>
-                  <a:txBody>
-                    <a:bodyPr/>
-                    <a:lstStyle/>
-                    <a:p>
-                      <a:pPr algn="ctr" indent="0" marL="0">
-                        <a:buNone/>
-                      </a:pPr>
-                      <a:r>
-                        <a:rPr lang="en-US" sz="1200" dirty="0">
-                          <a:solidFill>
-                            <a:schemeClr val="tx1"/>
-                          </a:solidFill>
-                        </a:rPr>
-                        <a:t>0,8</a:t>
-                      </a:r>
-                      <a:endParaRPr lang="en-US" sz="1200" dirty="0"/>
-                    </a:p>
-                  </a:txBody>
-                  <a:tcPr marL="63500" marR="63500" marT="38100" marB="38100" anchor="ctr">
-                    <a:lnL w="6350" cap="flat" cmpd="sng" algn="ctr">
-                      <a:solidFill>
-                        <a:srgbClr val="C9D6D3"/>
-                      </a:solidFill>
-                      <a:prstDash val="solid"/>
-                      <a:round/>
-                      <a:headEnd type="none" w="med" len="med"/>
-                      <a:tailEnd type="none" w="med" len="med"/>
-                    </a:lnL>
-                    <a:lnR w="6350" cap="flat" cmpd="sng" algn="ctr">
-                      <a:solidFill>
-                        <a:srgbClr val="C9D6D3"/>
-                      </a:solidFill>
-                      <a:prstDash val="solid"/>
-                      <a:round/>
-                      <a:headEnd type="none" w="med" len="med"/>
-                      <a:tailEnd type="none" w="med" len="med"/>
-                    </a:lnR>
-                    <a:lnT w="6350" cap="flat" cmpd="sng" algn="ctr">
-                      <a:solidFill>
-                        <a:srgbClr val="C9D6D3"/>
-                      </a:solidFill>
-                      <a:prstDash val="solid"/>
-                      <a:round/>
-                      <a:headEnd type="none" w="med" len="med"/>
-                      <a:tailEnd type="none" w="med" len="med"/>
-                    </a:lnT>
-                    <a:lnB w="6350" cap="flat" cmpd="sng" algn="ctr">
-                      <a:solidFill>
-                        <a:srgbClr val="C9D6D3"/>
-                      </a:solidFill>
-                      <a:prstDash val="solid"/>
-                      <a:round/>
-                      <a:headEnd type="none" w="med" len="med"/>
-                      <a:tailEnd type="none" w="med" len="med"/>
-                    </a:lnB>
-                    <a:solidFill>
-                      <a:srgbClr val="EAF1EF"/>
-                    </a:solidFill>
-                  </a:tcPr>
-                </a:tc>
-                <a:tc>
-                  <a:txBody>
-                    <a:bodyPr/>
-                    <a:lstStyle/>
-                    <a:p>
-                      <a:pPr algn="ctr" indent="0" marL="0">
-                        <a:buNone/>
-                      </a:pPr>
-                      <a:r>
-                        <a:rPr lang="en-US" sz="1200" dirty="0">
-                          <a:solidFill>
-                            <a:schemeClr val="tx1"/>
-                          </a:solidFill>
-                        </a:rPr>
-                        <a:t>44,8</a:t>
-                      </a:r>
-                      <a:endParaRPr lang="en-US" sz="1200" dirty="0"/>
-                    </a:p>
-                  </a:txBody>
-                  <a:tcPr marL="63500" marR="63500" marT="38100" marB="38100" anchor="ctr">
-                    <a:lnL w="6350" cap="flat" cmpd="sng" algn="ctr">
-                      <a:solidFill>
-                        <a:srgbClr val="C9D6D3"/>
-                      </a:solidFill>
-                      <a:prstDash val="solid"/>
-                      <a:round/>
-                      <a:headEnd type="none" w="med" len="med"/>
-                      <a:tailEnd type="none" w="med" len="med"/>
-                    </a:lnL>
-                    <a:lnR w="6350" cap="flat" cmpd="sng" algn="ctr">
-                      <a:solidFill>
-                        <a:srgbClr val="C9D6D3"/>
-                      </a:solidFill>
-                      <a:prstDash val="solid"/>
-                      <a:round/>
-                      <a:headEnd type="none" w="med" len="med"/>
-                      <a:tailEnd type="none" w="med" len="med"/>
-                    </a:lnR>
-                    <a:lnT w="6350" cap="flat" cmpd="sng" algn="ctr">
-                      <a:solidFill>
-                        <a:srgbClr val="C9D6D3"/>
-                      </a:solidFill>
-                      <a:prstDash val="solid"/>
-                      <a:round/>
-                      <a:headEnd type="none" w="med" len="med"/>
-                      <a:tailEnd type="none" w="med" len="med"/>
-                    </a:lnT>
-                    <a:lnB w="6350" cap="flat" cmpd="sng" algn="ctr">
-                      <a:solidFill>
-                        <a:srgbClr val="C9D6D3"/>
-                      </a:solidFill>
-                      <a:prstDash val="solid"/>
-                      <a:round/>
-                      <a:headEnd type="none" w="med" len="med"/>
-                      <a:tailEnd type="none" w="med" len="med"/>
-                    </a:lnB>
-                    <a:solidFill>
-                      <a:srgbClr val="EAF1EF"/>
-                    </a:solidFill>
-                  </a:tcPr>
-                </a:tc>
-              </a:tr>
-              <a:tr h="310896">
-                <a:tc>
-                  <a:txBody>
-                    <a:bodyPr/>
-                    <a:lstStyle/>
-                    <a:p>
-                      <a:pPr algn="l" indent="0" marL="0">
-                        <a:buNone/>
-                      </a:pPr>
-                      <a:r>
-                        <a:rPr lang="en-US" sz="1200" b="1" dirty="0">
-                          <a:solidFill>
-                            <a:schemeClr val="tx1"/>
-                          </a:solidFill>
-                        </a:rPr>
-                        <a:t>Підвищити до 16,5% ★</a:t>
-                      </a:r>
-                      <a:endParaRPr lang="en-US" sz="1200" dirty="0"/>
-                    </a:p>
-                  </a:txBody>
-                  <a:tcPr marL="63500" marR="63500" marT="38100" marB="38100" anchor="ctr">
-                    <a:lnL w="6350" cap="flat" cmpd="sng" algn="ctr">
-                      <a:solidFill>
-                        <a:srgbClr val="C9D6D3"/>
-                      </a:solidFill>
-                      <a:prstDash val="solid"/>
-                      <a:round/>
-                      <a:headEnd type="none" w="med" len="med"/>
-                      <a:tailEnd type="none" w="med" len="med"/>
-                    </a:lnL>
-                    <a:lnR w="6350" cap="flat" cmpd="sng" algn="ctr">
-                      <a:solidFill>
-                        <a:srgbClr val="C9D6D3"/>
-                      </a:solidFill>
-                      <a:prstDash val="solid"/>
-                      <a:round/>
-                      <a:headEnd type="none" w="med" len="med"/>
-                      <a:tailEnd type="none" w="med" len="med"/>
-                    </a:lnR>
-                    <a:lnT w="6350" cap="flat" cmpd="sng" algn="ctr">
-                      <a:solidFill>
-                        <a:srgbClr val="C9D6D3"/>
-                      </a:solidFill>
-                      <a:prstDash val="solid"/>
-                      <a:round/>
-                      <a:headEnd type="none" w="med" len="med"/>
-                      <a:tailEnd type="none" w="med" len="med"/>
-                    </a:lnT>
-                    <a:lnB w="6350" cap="flat" cmpd="sng" algn="ctr">
-                      <a:solidFill>
-                        <a:srgbClr val="C9D6D3"/>
-                      </a:solidFill>
-                      <a:prstDash val="solid"/>
-                      <a:round/>
-                      <a:headEnd type="none" w="med" len="med"/>
-                      <a:tailEnd type="none" w="med" len="med"/>
-                    </a:lnB>
-                    <a:solidFill>
-                      <a:srgbClr val="FFFFFF"/>
-                    </a:solidFill>
-                  </a:tcPr>
-                </a:tc>
-                <a:tc>
-                  <a:txBody>
-                    <a:bodyPr/>
-                    <a:lstStyle/>
-                    <a:p>
-                      <a:pPr algn="ctr" indent="0" marL="0">
-                        <a:buNone/>
-                      </a:pPr>
-                      <a:r>
-                        <a:rPr lang="en-US" sz="1200" dirty="0">
-                          <a:solidFill>
-                            <a:schemeClr val="tx1"/>
-                          </a:solidFill>
-                        </a:rPr>
-                        <a:t>16,5</a:t>
-                      </a:r>
-                      <a:endParaRPr lang="en-US" sz="1200" dirty="0"/>
-                    </a:p>
-                  </a:txBody>
-                  <a:tcPr marL="63500" marR="63500" marT="38100" marB="38100" anchor="ctr">
-                    <a:lnL w="6350" cap="flat" cmpd="sng" algn="ctr">
-                      <a:solidFill>
-                        <a:srgbClr val="C9D6D3"/>
-                      </a:solidFill>
-                      <a:prstDash val="solid"/>
-                      <a:round/>
-                      <a:headEnd type="none" w="med" len="med"/>
-                      <a:tailEnd type="none" w="med" len="med"/>
-                    </a:lnL>
-                    <a:lnR w="6350" cap="flat" cmpd="sng" algn="ctr">
-                      <a:solidFill>
-                        <a:srgbClr val="C9D6D3"/>
-                      </a:solidFill>
-                      <a:prstDash val="solid"/>
-                      <a:round/>
-                      <a:headEnd type="none" w="med" len="med"/>
-                      <a:tailEnd type="none" w="med" len="med"/>
-                    </a:lnR>
-                    <a:lnT w="6350" cap="flat" cmpd="sng" algn="ctr">
-                      <a:solidFill>
-                        <a:srgbClr val="C9D6D3"/>
-                      </a:solidFill>
-                      <a:prstDash val="solid"/>
-                      <a:round/>
-                      <a:headEnd type="none" w="med" len="med"/>
-                      <a:tailEnd type="none" w="med" len="med"/>
-                    </a:lnT>
-                    <a:lnB w="6350" cap="flat" cmpd="sng" algn="ctr">
-                      <a:solidFill>
-                        <a:srgbClr val="C9D6D3"/>
-                      </a:solidFill>
-                      <a:prstDash val="solid"/>
-                      <a:round/>
-                      <a:headEnd type="none" w="med" len="med"/>
-                      <a:tailEnd type="none" w="med" len="med"/>
-                    </a:lnB>
-                    <a:solidFill>
-                      <a:srgbClr val="FFFFFF"/>
-                    </a:solidFill>
-                  </a:tcPr>
-                </a:tc>
-                <a:tc>
-                  <a:txBody>
-                    <a:bodyPr/>
-                    <a:lstStyle/>
-                    <a:p>
-                      <a:pPr algn="ctr" indent="0" marL="0">
-                        <a:buNone/>
-                      </a:pPr>
-                      <a:r>
-                        <a:rPr lang="en-US" sz="1200" dirty="0">
-                          <a:solidFill>
-                            <a:schemeClr val="tx1"/>
-                          </a:solidFill>
-                        </a:rPr>
-                        <a:t>15,1</a:t>
-                      </a:r>
-                      <a:endParaRPr lang="en-US" sz="1200" dirty="0"/>
-                    </a:p>
-                  </a:txBody>
-                  <a:tcPr marL="63500" marR="63500" marT="38100" marB="38100" anchor="ctr">
-                    <a:lnL w="6350" cap="flat" cmpd="sng" algn="ctr">
-                      <a:solidFill>
-                        <a:srgbClr val="C9D6D3"/>
-                      </a:solidFill>
-                      <a:prstDash val="solid"/>
-                      <a:round/>
-                      <a:headEnd type="none" w="med" len="med"/>
-                      <a:tailEnd type="none" w="med" len="med"/>
-                    </a:lnL>
-                    <a:lnR w="6350" cap="flat" cmpd="sng" algn="ctr">
-                      <a:solidFill>
-                        <a:srgbClr val="C9D6D3"/>
-                      </a:solidFill>
-                      <a:prstDash val="solid"/>
-                      <a:round/>
-                      <a:headEnd type="none" w="med" len="med"/>
-                      <a:tailEnd type="none" w="med" len="med"/>
-                    </a:lnR>
-                    <a:lnT w="6350" cap="flat" cmpd="sng" algn="ctr">
-                      <a:solidFill>
-                        <a:srgbClr val="C9D6D3"/>
-                      </a:solidFill>
-                      <a:prstDash val="solid"/>
-                      <a:round/>
-                      <a:headEnd type="none" w="med" len="med"/>
-                      <a:tailEnd type="none" w="med" len="med"/>
-                    </a:lnT>
-                    <a:lnB w="6350" cap="flat" cmpd="sng" algn="ctr">
-                      <a:solidFill>
-                        <a:srgbClr val="C9D6D3"/>
-                      </a:solidFill>
-                      <a:prstDash val="solid"/>
-                      <a:round/>
-                      <a:headEnd type="none" w="med" len="med"/>
-                      <a:tailEnd type="none" w="med" len="med"/>
-                    </a:lnB>
-                    <a:solidFill>
-                      <a:srgbClr val="FFFFFF"/>
-                    </a:solidFill>
-                  </a:tcPr>
-                </a:tc>
-                <a:tc>
-                  <a:txBody>
-                    <a:bodyPr/>
-                    <a:lstStyle/>
-                    <a:p>
-                      <a:pPr algn="ctr" indent="0" marL="0">
-                        <a:buNone/>
-                      </a:pPr>
-                      <a:r>
-                        <a:rPr lang="en-US" sz="1200" dirty="0">
-                          <a:solidFill>
-                            <a:schemeClr val="tx1"/>
-                          </a:solidFill>
-                        </a:rPr>
-                        <a:t>6,5</a:t>
-                      </a:r>
-                      <a:endParaRPr lang="en-US" sz="1200" dirty="0"/>
-                    </a:p>
-                  </a:txBody>
-                  <a:tcPr marL="63500" marR="63500" marT="38100" marB="38100" anchor="ctr">
-                    <a:lnL w="6350" cap="flat" cmpd="sng" algn="ctr">
-                      <a:solidFill>
-                        <a:srgbClr val="C9D6D3"/>
-                      </a:solidFill>
-                      <a:prstDash val="solid"/>
-                      <a:round/>
-                      <a:headEnd type="none" w="med" len="med"/>
-                      <a:tailEnd type="none" w="med" len="med"/>
-                    </a:lnL>
-                    <a:lnR w="6350" cap="flat" cmpd="sng" algn="ctr">
-                      <a:solidFill>
-                        <a:srgbClr val="C9D6D3"/>
-                      </a:solidFill>
-                      <a:prstDash val="solid"/>
-                      <a:round/>
-                      <a:headEnd type="none" w="med" len="med"/>
-                      <a:tailEnd type="none" w="med" len="med"/>
-                    </a:lnR>
-                    <a:lnT w="6350" cap="flat" cmpd="sng" algn="ctr">
-                      <a:solidFill>
-                        <a:srgbClr val="C9D6D3"/>
-                      </a:solidFill>
-                      <a:prstDash val="solid"/>
-                      <a:round/>
-                      <a:headEnd type="none" w="med" len="med"/>
-                      <a:tailEnd type="none" w="med" len="med"/>
-                    </a:lnT>
-                    <a:lnB w="6350" cap="flat" cmpd="sng" algn="ctr">
-                      <a:solidFill>
-                        <a:srgbClr val="C9D6D3"/>
-                      </a:solidFill>
-                      <a:prstDash val="solid"/>
-                      <a:round/>
-                      <a:headEnd type="none" w="med" len="med"/>
-                      <a:tailEnd type="none" w="med" len="med"/>
-                    </a:lnB>
-                    <a:solidFill>
-                      <a:srgbClr val="FFFFFF"/>
-                    </a:solidFill>
-                  </a:tcPr>
-                </a:tc>
-                <a:tc>
-                  <a:txBody>
-                    <a:bodyPr/>
-                    <a:lstStyle/>
-                    <a:p>
-                      <a:pPr algn="ctr" indent="0" marL="0">
-                        <a:buNone/>
-                      </a:pPr>
-                      <a:r>
-                        <a:rPr lang="en-US" sz="1200" dirty="0">
-                          <a:solidFill>
-                            <a:schemeClr val="tx1"/>
-                          </a:solidFill>
-                        </a:rPr>
-                        <a:t>0,6</a:t>
-                      </a:r>
-                      <a:endParaRPr lang="en-US" sz="1200" dirty="0"/>
-                    </a:p>
-                  </a:txBody>
-                  <a:tcPr marL="63500" marR="63500" marT="38100" marB="38100" anchor="ctr">
-                    <a:lnL w="6350" cap="flat" cmpd="sng" algn="ctr">
-                      <a:solidFill>
-                        <a:srgbClr val="C9D6D3"/>
-                      </a:solidFill>
-                      <a:prstDash val="solid"/>
-                      <a:round/>
-                      <a:headEnd type="none" w="med" len="med"/>
-                      <a:tailEnd type="none" w="med" len="med"/>
-                    </a:lnL>
-                    <a:lnR w="6350" cap="flat" cmpd="sng" algn="ctr">
-                      <a:solidFill>
-                        <a:srgbClr val="C9D6D3"/>
-                      </a:solidFill>
-                      <a:prstDash val="solid"/>
-                      <a:round/>
-                      <a:headEnd type="none" w="med" len="med"/>
-                      <a:tailEnd type="none" w="med" len="med"/>
-                    </a:lnR>
-                    <a:lnT w="6350" cap="flat" cmpd="sng" algn="ctr">
-                      <a:solidFill>
-                        <a:srgbClr val="C9D6D3"/>
-                      </a:solidFill>
-                      <a:prstDash val="solid"/>
-                      <a:round/>
-                      <a:headEnd type="none" w="med" len="med"/>
-                      <a:tailEnd type="none" w="med" len="med"/>
-                    </a:lnT>
-                    <a:lnB w="6350" cap="flat" cmpd="sng" algn="ctr">
-                      <a:solidFill>
-                        <a:srgbClr val="C9D6D3"/>
-                      </a:solidFill>
-                      <a:prstDash val="solid"/>
-                      <a:round/>
-                      <a:headEnd type="none" w="med" len="med"/>
-                      <a:tailEnd type="none" w="med" len="med"/>
-                    </a:lnB>
-                    <a:solidFill>
-                      <a:srgbClr val="FFFFFF"/>
-                    </a:solidFill>
-                  </a:tcPr>
-                </a:tc>
-                <a:tc>
-                  <a:txBody>
-                    <a:bodyPr/>
-                    <a:lstStyle/>
-                    <a:p>
-                      <a:pPr algn="ctr" indent="0" marL="0">
-                        <a:buNone/>
-                      </a:pPr>
-                      <a:r>
-                        <a:rPr lang="en-US" sz="1200" dirty="0">
-                          <a:solidFill>
-                            <a:schemeClr val="tx1"/>
-                          </a:solidFill>
-                        </a:rPr>
-                        <a:t>41,7</a:t>
-                      </a:r>
-                      <a:endParaRPr lang="en-US" sz="1200" dirty="0"/>
-                    </a:p>
-                  </a:txBody>
-                  <a:tcPr marL="63500" marR="63500" marT="38100" marB="38100" anchor="ctr">
-                    <a:lnL w="6350" cap="flat" cmpd="sng" algn="ctr">
-                      <a:solidFill>
-                        <a:srgbClr val="C9D6D3"/>
-                      </a:solidFill>
-                      <a:prstDash val="solid"/>
-                      <a:round/>
-                      <a:headEnd type="none" w="med" len="med"/>
-                      <a:tailEnd type="none" w="med" len="med"/>
-                    </a:lnL>
-                    <a:lnR w="6350" cap="flat" cmpd="sng" algn="ctr">
-                      <a:solidFill>
-                        <a:srgbClr val="C9D6D3"/>
-                      </a:solidFill>
-                      <a:prstDash val="solid"/>
-                      <a:round/>
-                      <a:headEnd type="none" w="med" len="med"/>
-                      <a:tailEnd type="none" w="med" len="med"/>
-                    </a:lnR>
-                    <a:lnT w="6350" cap="flat" cmpd="sng" algn="ctr">
-                      <a:solidFill>
-                        <a:srgbClr val="C9D6D3"/>
-                      </a:solidFill>
-                      <a:prstDash val="solid"/>
-                      <a:round/>
-                      <a:headEnd type="none" w="med" len="med"/>
-                      <a:tailEnd type="none" w="med" len="med"/>
-                    </a:lnT>
-                    <a:lnB w="6350" cap="flat" cmpd="sng" algn="ctr">
-                      <a:solidFill>
-                        <a:srgbClr val="C9D6D3"/>
-                      </a:solidFill>
-                      <a:prstDash val="solid"/>
-                      <a:round/>
-                      <a:headEnd type="none" w="med" len="med"/>
-                      <a:tailEnd type="none" w="med" len="med"/>
-                    </a:lnB>
-                    <a:solidFill>
-                      <a:srgbClr val="FFFFFF"/>
-                    </a:solidFill>
-                  </a:tcPr>
-                </a:tc>
-              </a:tr>
-              <a:tr h="310896">
-                <a:tc>
-                  <a:txBody>
-                    <a:bodyPr/>
-                    <a:lstStyle/>
-                    <a:p>
-                      <a:pPr algn="l" indent="0" marL="0">
-                        <a:buNone/>
-                      </a:pPr>
-                      <a:r>
-                        <a:rPr lang="en-US" sz="1200" b="1" dirty="0">
-                          <a:solidFill>
-                            <a:schemeClr val="tx1"/>
-                          </a:solidFill>
-                        </a:rPr>
-                        <a:t>Підвищити до 17%</a:t>
-                      </a:r>
-                      <a:endParaRPr lang="en-US" sz="1200" dirty="0"/>
-                    </a:p>
-                  </a:txBody>
-                  <a:tcPr marL="63500" marR="63500" marT="38100" marB="38100" anchor="ctr">
-                    <a:lnL w="6350" cap="flat" cmpd="sng" algn="ctr">
-                      <a:solidFill>
-                        <a:srgbClr val="C9D6D3"/>
-                      </a:solidFill>
-                      <a:prstDash val="solid"/>
-                      <a:round/>
-                      <a:headEnd type="none" w="med" len="med"/>
-                      <a:tailEnd type="none" w="med" len="med"/>
-                    </a:lnL>
-                    <a:lnR w="6350" cap="flat" cmpd="sng" algn="ctr">
-                      <a:solidFill>
-                        <a:srgbClr val="C9D6D3"/>
-                      </a:solidFill>
-                      <a:prstDash val="solid"/>
-                      <a:round/>
-                      <a:headEnd type="none" w="med" len="med"/>
-                      <a:tailEnd type="none" w="med" len="med"/>
-                    </a:lnR>
-                    <a:lnT w="6350" cap="flat" cmpd="sng" algn="ctr">
-                      <a:solidFill>
-                        <a:srgbClr val="C9D6D3"/>
-                      </a:solidFill>
-                      <a:prstDash val="solid"/>
-                      <a:round/>
-                      <a:headEnd type="none" w="med" len="med"/>
-                      <a:tailEnd type="none" w="med" len="med"/>
-                    </a:lnT>
-                    <a:lnB w="6350" cap="flat" cmpd="sng" algn="ctr">
-                      <a:solidFill>
-                        <a:srgbClr val="C9D6D3"/>
-                      </a:solidFill>
-                      <a:prstDash val="solid"/>
-                      <a:round/>
-                      <a:headEnd type="none" w="med" len="med"/>
-                      <a:tailEnd type="none" w="med" len="med"/>
-                    </a:lnB>
-                    <a:solidFill>
-                      <a:srgbClr val="EAF1EF"/>
-                    </a:solidFill>
-                  </a:tcPr>
-                </a:tc>
-                <a:tc>
-                  <a:txBody>
-                    <a:bodyPr/>
-                    <a:lstStyle/>
-                    <a:p>
-                      <a:pPr algn="ctr" indent="0" marL="0">
-                        <a:buNone/>
-                      </a:pPr>
-                      <a:r>
-                        <a:rPr lang="en-US" sz="1200" dirty="0">
-                          <a:solidFill>
-                            <a:schemeClr val="tx1"/>
-                          </a:solidFill>
-                        </a:rPr>
-                        <a:t>17,0</a:t>
-                      </a:r>
-                      <a:endParaRPr lang="en-US" sz="1200" dirty="0"/>
-                    </a:p>
-                  </a:txBody>
-                  <a:tcPr marL="63500" marR="63500" marT="38100" marB="38100" anchor="ctr">
-                    <a:lnL w="6350" cap="flat" cmpd="sng" algn="ctr">
-                      <a:solidFill>
-                        <a:srgbClr val="C9D6D3"/>
-                      </a:solidFill>
-                      <a:prstDash val="solid"/>
-                      <a:round/>
-                      <a:headEnd type="none" w="med" len="med"/>
-                      <a:tailEnd type="none" w="med" len="med"/>
-                    </a:lnL>
-                    <a:lnR w="6350" cap="flat" cmpd="sng" algn="ctr">
-                      <a:solidFill>
-                        <a:srgbClr val="C9D6D3"/>
-                      </a:solidFill>
-                      <a:prstDash val="solid"/>
-                      <a:round/>
-                      <a:headEnd type="none" w="med" len="med"/>
-                      <a:tailEnd type="none" w="med" len="med"/>
-                    </a:lnR>
-                    <a:lnT w="6350" cap="flat" cmpd="sng" algn="ctr">
-                      <a:solidFill>
-                        <a:srgbClr val="C9D6D3"/>
-                      </a:solidFill>
-                      <a:prstDash val="solid"/>
-                      <a:round/>
-                      <a:headEnd type="none" w="med" len="med"/>
-                      <a:tailEnd type="none" w="med" len="med"/>
-                    </a:lnT>
-                    <a:lnB w="6350" cap="flat" cmpd="sng" algn="ctr">
-                      <a:solidFill>
-                        <a:srgbClr val="C9D6D3"/>
-                      </a:solidFill>
-                      <a:prstDash val="solid"/>
-                      <a:round/>
-                      <a:headEnd type="none" w="med" len="med"/>
-                      <a:tailEnd type="none" w="med" len="med"/>
-                    </a:lnB>
-                    <a:solidFill>
-                      <a:srgbClr val="EAF1EF"/>
-                    </a:solidFill>
-                  </a:tcPr>
-                </a:tc>
-                <a:tc>
-                  <a:txBody>
-                    <a:bodyPr/>
-                    <a:lstStyle/>
-                    <a:p>
-                      <a:pPr algn="ctr" indent="0" marL="0">
-                        <a:buNone/>
-                      </a:pPr>
-                      <a:r>
-                        <a:rPr lang="en-US" sz="1200" dirty="0">
-                          <a:solidFill>
-                            <a:schemeClr val="tx1"/>
-                          </a:solidFill>
-                        </a:rPr>
-                        <a:t>15,1</a:t>
+                        <a:t>15,5</a:t>
                       </a:r>
                       <a:endParaRPr lang="en-US" sz="1200" dirty="0"/>
                     </a:p>
@@ -22978,7 +22610,7 @@
                             <a:schemeClr val="tx1"/>
                           </a:solidFill>
                         </a:rPr>
-                        <a:t>0,5</a:t>
+                        <a:t>0,6</a:t>
                       </a:r>
                       <a:endParaRPr lang="en-US" sz="1200" dirty="0"/>
                     </a:p>
@@ -23039,7 +22671,7 @@
                             <a:schemeClr val="tx1"/>
                           </a:solidFill>
                         </a:rPr>
-                        <a:t>39,0</a:t>
+                        <a:t>66,5</a:t>
                       </a:r>
                       <a:endParaRPr lang="en-US" sz="1200" dirty="0"/>
                     </a:p>
@@ -23163,7 +22795,7 @@
                             <a:schemeClr val="tx1"/>
                           </a:solidFill>
                         </a:rPr>
-                        <a:t>16,9</a:t>
+                        <a:t>17,3</a:t>
                       </a:r>
                       <a:endParaRPr lang="en-US" sz="1200" dirty="0"/>
                     </a:p>
@@ -23224,7 +22856,7 @@
                             <a:schemeClr val="tx1"/>
                           </a:solidFill>
                         </a:rPr>
-                        <a:t>15,1</a:t>
+                        <a:t>15,5</a:t>
                       </a:r>
                       <a:endParaRPr lang="en-US" sz="1200" dirty="0"/>
                     </a:p>
@@ -23285,7 +22917,7 @@
                             <a:schemeClr val="tx1"/>
                           </a:solidFill>
                         </a:rPr>
-                        <a:t>6,2</a:t>
+                        <a:t>6,1</a:t>
                       </a:r>
                       <a:endParaRPr lang="en-US" sz="1200" dirty="0"/>
                     </a:p>
@@ -23407,7 +23039,7 @@
                             <a:schemeClr val="tx1"/>
                           </a:solidFill>
                         </a:rPr>
-                        <a:t>37,4</a:t>
+                        <a:t>63,9</a:t>
                       </a:r>
                       <a:endParaRPr lang="en-US" sz="1200" dirty="0"/>
                     </a:p>
@@ -23511,7 +23143,7 @@
                   <a:schemeClr val="tx1"/>
                 </a:solidFill>
               </a:rPr>
-              <a:t>Оптимальна ставка зараз: 16,5% без реакції на перший раунд адмінцін (практика ІТ), 16,5–16,9% — залежно від згладжування</a:t>
+              <a:t>Оптимальна ставка зараз: 16,9% без реакції на перший раунд адмінцін (практика ІТ), 16,7–17,3% — залежно від згладжування</a:t>
             </a:r>
             <a:endParaRPr lang="en-US" sz="1300" dirty="0"/>
           </a:p>
@@ -23529,7 +23161,7 @@
                   <a:schemeClr val="tx1"/>
                 </a:solidFill>
               </a:rPr>
-              <a:t>Обираємо 16,5%: поступовість за невизначеності; 17% — якщо з'являться вторинні ефекти тарифів і пального</a:t>
+              <a:t>Обираємо 17% — найближче до оптимуму без реакції на адмінціни; 17,5% — якщо з'являться вторинні ефекти тарифів і пального</a:t>
             </a:r>
             <a:endParaRPr lang="en-US" sz="1300" dirty="0"/>
           </a:p>
@@ -23643,7 +23275,7 @@
                 <a:ea typeface="Cambria" pitchFamily="34" charset="-122"/>
                 <a:cs typeface="Cambria" pitchFamily="34" charset="-120"/>
               </a:rPr>
-              <a:t>Облікова ставка: підвищити до 16,5% і утримувати до середини 2027</a:t>
+              <a:t>Облікова ставка: підвищити до 17% і утримувати до середини 2027</a:t>
             </a:r>
             <a:endParaRPr lang="en-US" sz="2600" dirty="0"/>
           </a:p>
@@ -23823,7 +23455,7 @@
                 <a:ea typeface="Cambria" pitchFamily="34" charset="-122"/>
                 <a:cs typeface="Cambria" pitchFamily="34" charset="-120"/>
               </a:rPr>
-              <a:t>16,5%</a:t>
+              <a:t>17%</a:t>
             </a:r>
             <a:endParaRPr lang="en-US" sz="6600" dirty="0"/>
           </a:p>
@@ -23859,7 +23491,7 @@
                   <a:schemeClr val="bg1"/>
                 </a:solidFill>
               </a:rPr>
-              <a:t>+0,5 в. п. з 30.10.2026</a:t>
+              <a:t>+1,0 в. п. з 30.10.2026</a:t>
             </a:r>
             <a:endParaRPr lang="en-US" sz="1600" dirty="0"/>
           </a:p>
@@ -23938,7 +23570,7 @@
                   <a:schemeClr val="tx1"/>
                 </a:solidFill>
               </a:rPr>
-              <a:t>Інфляція зросте до ≈10% у грудні; ризики зміщені вгору (нафта, тарифи, зарплати, очікування)</a:t>
+              <a:t>Вересень — 10,0%, значно вище прогнозу НБУ; у грудні — ≈12%; ризики зміщені вгору</a:t>
             </a:r>
             <a:endParaRPr lang="en-US" sz="1400" dirty="0"/>
           </a:p>
@@ -23956,7 +23588,7 @@
                   <a:schemeClr val="tx1"/>
                 </a:solidFill>
               </a:rPr>
-              <a:t>Базова інфляція наприкінці 2027 — 5,7% (НБУ: 5,1%): ринок праці перегрітий</a:t>
+              <a:t>Базова інфляція наприкінці 2027 — 5,3% (НБУ: 5,1%): ринок праці перегрітий</a:t>
             </a:r>
             <a:endParaRPr lang="en-US" sz="1400" dirty="0"/>
           </a:p>
@@ -24107,7 +23739,7 @@
                   <a:schemeClr val="tx1"/>
                 </a:solidFill>
               </a:rPr>
-              <a:t>Без реакції на перший раунд адмінцін оптимум моделі — 16,5%</a:t>
+              <a:t>Без реакції на перший раунд адмінцін оптимум моделі — 16,9%</a:t>
             </a:r>
             <a:endParaRPr lang="en-US" sz="1400" dirty="0"/>
           </a:p>
@@ -24186,7 +23818,7 @@
                   <a:schemeClr val="tx1"/>
                 </a:solidFill>
               </a:rPr>
-              <a:t>Утримання 16,5% щонайменше до середини 2027; далі зниження до ≈15,0% наприкінці 2027 і ≈10,5% — 2028: інфляція 5% у 2029</a:t>
+              <a:t>Утримання 17% щонайменше до середини 2027; далі зниження до ≈15,5% наприкінці 2027 і ≈10,5% — 2028: інфляція 5% у 2029</a:t>
             </a:r>
             <a:endParaRPr lang="en-US" sz="1400" dirty="0"/>
           </a:p>
@@ -24204,7 +23836,7 @@
                   <a:schemeClr val="tx1"/>
                 </a:solidFill>
               </a:rPr>
-              <a:t>Підвищення до 17–19% — якщо резерви &lt; $43 млрд і тиск на курс (сценарій дефіциту фінансування)</a:t>
+              <a:t>Подальше підвищення (до ≈20%) — якщо резерви &lt; $43 млрд і тиск на курс (сценарій дефіциту фінансування)</a:t>
             </a:r>
             <a:endParaRPr lang="en-US" sz="1400" dirty="0"/>
           </a:p>
@@ -24548,7 +24180,7 @@
                   <a:schemeClr val="tx1"/>
                 </a:solidFill>
               </a:rPr>
-              <a:t>Ринок чекає ≈47 грн/$ через рік (≈5% послаблення); за ставки 16,5% модель дає ≈1% на рік</a:t>
+              <a:t>Ринок чекає ≈47 грн/$ через рік (≈5% послаблення); за ставки 17% модель дає ≈1% на рік</a:t>
             </a:r>
             <a:endParaRPr lang="en-US" sz="1400" dirty="0"/>
           </a:p>
@@ -25138,7 +24770,7 @@
                   <a:schemeClr val="accent1"/>
                 </a:solidFill>
               </a:rPr>
-              <a:t>Проєкт пресрелізу: «Правління НБУ ухвалило рішення підвищити облікову ставку до 16,5% з огляду на прискорення інфляції, зміщення ризиків угору та зниження міжнародних резервів. НБУ утримуватиме ставку щонайменше до середини 2027 року та допускатиме більшу гнучкість курсу, згладжуючи надмірні коливання».</a:t>
+              <a:t>Проєкт пресрелізу: «Правління НБУ ухвалило рішення підвищити облікову ставку до 17% з огляду на прискорення інфляції, зміщення ризиків угору та зниження міжнародних резервів. НБУ утримуватиме ставку щонайменше до середини 2027 року та допускатиме більшу гнучкість курсу, згладжуючи надмірні коливання».</a:t>
             </a:r>
             <a:endParaRPr lang="en-US" sz="1400" dirty="0"/>
           </a:p>
@@ -25295,7 +24927,7 @@
                   <a:schemeClr val="tx1"/>
                 </a:solidFill>
               </a:rPr>
-              <a:t>НБУ підвищує ставку превентивно, щоб інфляція повернулася до 5% у 2029 році</a:t>
+              <a:t>НБУ підвищує ставку на 1 в. п., щоб інфляція повернулася до 5% у 2029 році</a:t>
             </a:r>
             <a:endParaRPr lang="en-US" sz="1400" dirty="0"/>
           </a:p>
@@ -25488,7 +25120,7 @@
                   <a:schemeClr val="tx1"/>
                 </a:solidFill>
               </a:rPr>
-              <a:t>Утримання 16,5% щонайменше до середини 2027</a:t>
+              <a:t>Утримання 17% щонайменше до середини 2027</a:t>
             </a:r>
             <a:endParaRPr lang="en-US" sz="1400" dirty="0"/>
           </a:p>
@@ -25903,7 +25535,7 @@
                   <a:schemeClr val="bg1"/>
                 </a:solidFill>
               </a:rPr>
-              <a:t>Підвищити облікову ставку до 16,5% та утримувати щонайменше до середини 2027</a:t>
+              <a:t>Підвищити облікову ставку до 17% та утримувати щонайменше до середини 2027</a:t>
             </a:r>
             <a:endParaRPr lang="en-US" sz="2000" dirty="0"/>
           </a:p>
@@ -26179,7 +25811,7 @@
                   <a:schemeClr val="bg1"/>
                 </a:solidFill>
               </a:rPr>
-              <a:t>Базовий прогноз: інфляція ≈9,9% у грудні 2026, 6,5% наприкінці 2027, ціль 5% — II кв. 2029</a:t>
+              <a:t>Базовий прогноз: інфляція ≈12,1% у грудні 2026, 6,5% наприкінці 2027, ціль 5% — III кв. 2029</a:t>
             </a:r>
             <a:endParaRPr lang="en-US" sz="2000" dirty="0"/>
           </a:p>
@@ -28493,7 +28125,7 @@
                   <a:schemeClr val="tx1"/>
                 </a:solidFill>
               </a:rPr>
-              <a:t>Помилка прогнозу ІСЦ на 4 квартали: 0,8–1,2 в. п. (наївний прогноз: 1,2–5,5)</a:t>
+              <a:t>Помилка прогнозу ІСЦ на 4 квартали: 0,7–1,0 в. п. (наївний прогноз: 1,2–5,5)</a:t>
             </a:r>
             <a:endParaRPr lang="en-US" sz="1300" dirty="0"/>
           </a:p>
@@ -29395,7 +29027,7 @@
                             <a:schemeClr val="tx1"/>
                           </a:solidFill>
                         </a:rPr>
-                        <a:t>8,8</a:t>
+                        <a:t>10,4</a:t>
                       </a:r>
                       <a:endParaRPr lang="en-US" sz="1200" dirty="0"/>
                     </a:p>
@@ -29456,7 +29088,7 @@
                             <a:schemeClr val="tx1"/>
                           </a:solidFill>
                         </a:rPr>
-                        <a:t>8,3</a:t>
+                        <a:t>9,4</a:t>
                       </a:r>
                       <a:endParaRPr lang="en-US" sz="1200" dirty="0"/>
                     </a:p>
@@ -29578,7 +29210,7 @@
                             <a:schemeClr val="tx1"/>
                           </a:solidFill>
                         </a:rPr>
-                        <a:t>4,4</a:t>
+                        <a:t>4,2</a:t>
                       </a:r>
                       <a:endParaRPr lang="en-US" sz="1200" dirty="0"/>
                     </a:p>
@@ -29639,7 +29271,7 @@
                             <a:schemeClr val="tx1"/>
                           </a:solidFill>
                         </a:rPr>
-                        <a:t>4,4</a:t>
+                        <a:t>4,3</a:t>
                       </a:r>
                       <a:endParaRPr lang="en-US" sz="1200" dirty="0"/>
                     </a:p>
@@ -29885,7 +29517,7 @@
                             <a:schemeClr val="tx1"/>
                           </a:solidFill>
                         </a:rPr>
-                        <a:t>8,9</a:t>
+                        <a:t>8,5</a:t>
                       </a:r>
                       <a:endParaRPr lang="en-US" sz="1200" dirty="0"/>
                     </a:p>
@@ -29946,7 +29578,7 @@
                             <a:schemeClr val="tx1"/>
                           </a:solidFill>
                         </a:rPr>
-                        <a:t>8,6</a:t>
+                        <a:t>8,0</a:t>
                       </a:r>
                       <a:endParaRPr lang="en-US" sz="1200" dirty="0"/>
                     </a:p>
@@ -30007,7 +29639,7 @@
                             <a:schemeClr val="tx1"/>
                           </a:solidFill>
                         </a:rPr>
-                        <a:t>5,7</a:t>
+                        <a:t>5,3</a:t>
                       </a:r>
                       <a:endParaRPr lang="en-US" sz="1200" dirty="0"/>
                     </a:p>
@@ -30068,7 +29700,7 @@
                             <a:schemeClr val="tx1"/>
                           </a:solidFill>
                         </a:rPr>
-                        <a:t>3,2</a:t>
+                        <a:t>3,0</a:t>
                       </a:r>
                       <a:endParaRPr lang="en-US" sz="1200" dirty="0"/>
                     </a:p>
@@ -30129,7 +29761,7 @@
                             <a:schemeClr val="tx1"/>
                           </a:solidFill>
                         </a:rPr>
-                        <a:t>3,1</a:t>
+                        <a:t>3,0</a:t>
                       </a:r>
                       <a:endParaRPr lang="en-US" sz="1200" dirty="0"/>
                     </a:p>
@@ -30375,7 +30007,68 @@
                             <a:schemeClr val="tx1"/>
                           </a:solidFill>
                         </a:rPr>
-                        <a:t>−0,4</a:t>
+                        <a:t>−0,3</a:t>
+                      </a:r>
+                      <a:endParaRPr lang="en-US" sz="1200" dirty="0"/>
+                    </a:p>
+                  </a:txBody>
+                  <a:tcPr marL="63500" marR="63500" marT="38100" marB="38100" anchor="ctr">
+                    <a:lnL w="6350" cap="flat" cmpd="sng" algn="ctr">
+                      <a:solidFill>
+                        <a:srgbClr val="C9D6D3"/>
+                      </a:solidFill>
+                      <a:prstDash val="solid"/>
+                      <a:round/>
+                      <a:headEnd type="none" w="med" len="med"/>
+                      <a:tailEnd type="none" w="med" len="med"/>
+                    </a:lnL>
+                    <a:lnR w="6350" cap="flat" cmpd="sng" algn="ctr">
+                      <a:solidFill>
+                        <a:srgbClr val="C9D6D3"/>
+                      </a:solidFill>
+                      <a:prstDash val="solid"/>
+                      <a:round/>
+                      <a:headEnd type="none" w="med" len="med"/>
+                      <a:tailEnd type="none" w="med" len="med"/>
+                    </a:lnR>
+                    <a:lnT w="6350" cap="flat" cmpd="sng" algn="ctr">
+                      <a:solidFill>
+                        <a:srgbClr val="C9D6D3"/>
+                      </a:solidFill>
+                      <a:prstDash val="solid"/>
+                      <a:round/>
+                      <a:headEnd type="none" w="med" len="med"/>
+                      <a:tailEnd type="none" w="med" len="med"/>
+                    </a:lnT>
+                    <a:lnB w="6350" cap="flat" cmpd="sng" algn="ctr">
+                      <a:solidFill>
+                        <a:srgbClr val="C9D6D3"/>
+                      </a:solidFill>
+                      <a:prstDash val="solid"/>
+                      <a:round/>
+                      <a:headEnd type="none" w="med" len="med"/>
+                      <a:tailEnd type="none" w="med" len="med"/>
+                    </a:lnB>
+                    <a:solidFill>
+                      <a:srgbClr val="FFFFFF"/>
+                    </a:solidFill>
+                  </a:tcPr>
+                </a:tc>
+                <a:tc>
+                  <a:txBody>
+                    <a:bodyPr/>
+                    <a:lstStyle/>
+                    <a:p>
+                      <a:pPr algn="l" indent="0" marL="0">
+                        <a:buNone/>
+                      </a:pPr>
+                      <a:r>
+                        <a:rPr lang="en-US" sz="1200" dirty="0">
+                          <a:solidFill>
+                            <a:schemeClr val="tx1"/>
+                          </a:solidFill>
+                        </a:rPr>
+                        <a:t>0,7</a:t>
                       </a:r>
                       <a:endParaRPr lang="en-US" sz="1200" dirty="0"/>
                     </a:p>
@@ -30497,68 +30190,7 @@
                             <a:schemeClr val="tx1"/>
                           </a:solidFill>
                         </a:rPr>
-                        <a:t>0,6</a:t>
-                      </a:r>
-                      <a:endParaRPr lang="en-US" sz="1200" dirty="0"/>
-                    </a:p>
-                  </a:txBody>
-                  <a:tcPr marL="63500" marR="63500" marT="38100" marB="38100" anchor="ctr">
-                    <a:lnL w="6350" cap="flat" cmpd="sng" algn="ctr">
-                      <a:solidFill>
-                        <a:srgbClr val="C9D6D3"/>
-                      </a:solidFill>
-                      <a:prstDash val="solid"/>
-                      <a:round/>
-                      <a:headEnd type="none" w="med" len="med"/>
-                      <a:tailEnd type="none" w="med" len="med"/>
-                    </a:lnL>
-                    <a:lnR w="6350" cap="flat" cmpd="sng" algn="ctr">
-                      <a:solidFill>
-                        <a:srgbClr val="C9D6D3"/>
-                      </a:solidFill>
-                      <a:prstDash val="solid"/>
-                      <a:round/>
-                      <a:headEnd type="none" w="med" len="med"/>
-                      <a:tailEnd type="none" w="med" len="med"/>
-                    </a:lnR>
-                    <a:lnT w="6350" cap="flat" cmpd="sng" algn="ctr">
-                      <a:solidFill>
-                        <a:srgbClr val="C9D6D3"/>
-                      </a:solidFill>
-                      <a:prstDash val="solid"/>
-                      <a:round/>
-                      <a:headEnd type="none" w="med" len="med"/>
-                      <a:tailEnd type="none" w="med" len="med"/>
-                    </a:lnT>
-                    <a:lnB w="6350" cap="flat" cmpd="sng" algn="ctr">
-                      <a:solidFill>
-                        <a:srgbClr val="C9D6D3"/>
-                      </a:solidFill>
-                      <a:prstDash val="solid"/>
-                      <a:round/>
-                      <a:headEnd type="none" w="med" len="med"/>
-                      <a:tailEnd type="none" w="med" len="med"/>
-                    </a:lnB>
-                    <a:solidFill>
-                      <a:srgbClr val="FFFFFF"/>
-                    </a:solidFill>
-                  </a:tcPr>
-                </a:tc>
-                <a:tc>
-                  <a:txBody>
-                    <a:bodyPr/>
-                    <a:lstStyle/>
-                    <a:p>
-                      <a:pPr algn="l" indent="0" marL="0">
-                        <a:buNone/>
-                      </a:pPr>
-                      <a:r>
-                        <a:rPr lang="en-US" sz="1200" dirty="0">
-                          <a:solidFill>
-                            <a:schemeClr val="tx1"/>
-                          </a:solidFill>
-                        </a:rPr>
-                        <a:t>0,5</a:t>
+                        <a:t>0,3</a:t>
                       </a:r>
                       <a:endParaRPr lang="en-US" sz="1200" dirty="0"/>
                     </a:p>
@@ -30680,7 +30312,7 @@
                             <a:schemeClr val="tx1"/>
                           </a:solidFill>
                         </a:rPr>
-                        <a:t>3,1</a:t>
+                        <a:t>3,2</a:t>
                       </a:r>
                       <a:endParaRPr lang="en-US" sz="1200" dirty="0"/>
                     </a:p>
@@ -30865,7 +30497,7 @@
                             <a:schemeClr val="tx1"/>
                           </a:solidFill>
                         </a:rPr>
-                        <a:t>16,5</a:t>
+                        <a:t>17,0</a:t>
                       </a:r>
                       <a:endParaRPr lang="en-US" sz="1200" dirty="0"/>
                     </a:p>
@@ -30926,7 +30558,7 @@
                             <a:schemeClr val="tx1"/>
                           </a:solidFill>
                         </a:rPr>
-                        <a:t>16,5</a:t>
+                        <a:t>17,0</a:t>
                       </a:r>
                       <a:endParaRPr lang="en-US" sz="1200" dirty="0"/>
                     </a:p>
@@ -30987,7 +30619,7 @@
                             <a:schemeClr val="tx1"/>
                           </a:solidFill>
                         </a:rPr>
-                        <a:t>15,1</a:t>
+                        <a:t>15,5</a:t>
                       </a:r>
                       <a:endParaRPr lang="en-US" sz="1200" dirty="0"/>
                     </a:p>
@@ -31048,7 +30680,7 @@
                             <a:schemeClr val="tx1"/>
                           </a:solidFill>
                         </a:rPr>
-                        <a:t>12,4</a:t>
+                        <a:t>12,5</a:t>
                       </a:r>
                       <a:endParaRPr lang="en-US" sz="1200" dirty="0"/>
                     </a:p>
@@ -31109,7 +30741,7 @@
                             <a:schemeClr val="tx1"/>
                           </a:solidFill>
                         </a:rPr>
-                        <a:t>10,4</a:t>
+                        <a:t>10,3</a:t>
                       </a:r>
                       <a:endParaRPr lang="en-US" sz="1200" dirty="0"/>
                     </a:p>
@@ -31170,7 +30802,7 @@
                             <a:schemeClr val="tx1"/>
                           </a:solidFill>
                         </a:rPr>
-                        <a:t>9,4</a:t>
+                        <a:t>9,3</a:t>
                       </a:r>
                       <a:endParaRPr lang="en-US" sz="1200" dirty="0"/>
                     </a:p>
@@ -31355,6 +30987,67 @@
                             <a:schemeClr val="tx1"/>
                           </a:solidFill>
                         </a:rPr>
+                        <a:t>51,5</a:t>
+                      </a:r>
+                      <a:endParaRPr lang="en-US" sz="1200" dirty="0"/>
+                    </a:p>
+                  </a:txBody>
+                  <a:tcPr marL="63500" marR="63500" marT="38100" marB="38100" anchor="ctr">
+                    <a:lnL w="6350" cap="flat" cmpd="sng" algn="ctr">
+                      <a:solidFill>
+                        <a:srgbClr val="C9D6D3"/>
+                      </a:solidFill>
+                      <a:prstDash val="solid"/>
+                      <a:round/>
+                      <a:headEnd type="none" w="med" len="med"/>
+                      <a:tailEnd type="none" w="med" len="med"/>
+                    </a:lnL>
+                    <a:lnR w="6350" cap="flat" cmpd="sng" algn="ctr">
+                      <a:solidFill>
+                        <a:srgbClr val="C9D6D3"/>
+                      </a:solidFill>
+                      <a:prstDash val="solid"/>
+                      <a:round/>
+                      <a:headEnd type="none" w="med" len="med"/>
+                      <a:tailEnd type="none" w="med" len="med"/>
+                    </a:lnR>
+                    <a:lnT w="6350" cap="flat" cmpd="sng" algn="ctr">
+                      <a:solidFill>
+                        <a:srgbClr val="C9D6D3"/>
+                      </a:solidFill>
+                      <a:prstDash val="solid"/>
+                      <a:round/>
+                      <a:headEnd type="none" w="med" len="med"/>
+                      <a:tailEnd type="none" w="med" len="med"/>
+                    </a:lnT>
+                    <a:lnB w="6350" cap="flat" cmpd="sng" algn="ctr">
+                      <a:solidFill>
+                        <a:srgbClr val="C9D6D3"/>
+                      </a:solidFill>
+                      <a:prstDash val="solid"/>
+                      <a:round/>
+                      <a:headEnd type="none" w="med" len="med"/>
+                      <a:tailEnd type="none" w="med" len="med"/>
+                    </a:lnB>
+                    <a:solidFill>
+                      <a:srgbClr val="FFFFFF"/>
+                    </a:solidFill>
+                  </a:tcPr>
+                </a:tc>
+                <a:tc>
+                  <a:txBody>
+                    <a:bodyPr/>
+                    <a:lstStyle/>
+                    <a:p>
+                      <a:pPr algn="l" indent="0" marL="0">
+                        <a:buNone/>
+                      </a:pPr>
+                      <a:r>
+                        <a:rPr lang="en-US" sz="1200" dirty="0">
+                          <a:solidFill>
+                            <a:schemeClr val="tx1"/>
+                          </a:solidFill>
+                        </a:rPr>
                         <a:t>51,6</a:t>
                       </a:r>
                       <a:endParaRPr lang="en-US" sz="1200" dirty="0"/>
@@ -31477,7 +31170,7 @@
                             <a:schemeClr val="tx1"/>
                           </a:solidFill>
                         </a:rPr>
-                        <a:t>51,9</a:t>
+                        <a:t>52,0</a:t>
                       </a:r>
                       <a:endParaRPr lang="en-US" sz="1200" dirty="0"/>
                     </a:p>
@@ -31538,7 +31231,7 @@
                             <a:schemeClr val="tx1"/>
                           </a:solidFill>
                         </a:rPr>
-                        <a:t>52,2</a:t>
+                        <a:t>52,6</a:t>
                       </a:r>
                       <a:endParaRPr lang="en-US" sz="1200" dirty="0"/>
                     </a:p>
@@ -31599,7 +31292,7 @@
                             <a:schemeClr val="tx1"/>
                           </a:solidFill>
                         </a:rPr>
-                        <a:t>52,8</a:t>
+                        <a:t>53,1</a:t>
                       </a:r>
                       <a:endParaRPr lang="en-US" sz="1200" dirty="0"/>
                     </a:p>
@@ -31660,68 +31353,7 @@
                             <a:schemeClr val="tx1"/>
                           </a:solidFill>
                         </a:rPr>
-                        <a:t>53,3</a:t>
-                      </a:r>
-                      <a:endParaRPr lang="en-US" sz="1200" dirty="0"/>
-                    </a:p>
-                  </a:txBody>
-                  <a:tcPr marL="63500" marR="63500" marT="38100" marB="38100" anchor="ctr">
-                    <a:lnL w="6350" cap="flat" cmpd="sng" algn="ctr">
-                      <a:solidFill>
-                        <a:srgbClr val="C9D6D3"/>
-                      </a:solidFill>
-                      <a:prstDash val="solid"/>
-                      <a:round/>
-                      <a:headEnd type="none" w="med" len="med"/>
-                      <a:tailEnd type="none" w="med" len="med"/>
-                    </a:lnL>
-                    <a:lnR w="6350" cap="flat" cmpd="sng" algn="ctr">
-                      <a:solidFill>
-                        <a:srgbClr val="C9D6D3"/>
-                      </a:solidFill>
-                      <a:prstDash val="solid"/>
-                      <a:round/>
-                      <a:headEnd type="none" w="med" len="med"/>
-                      <a:tailEnd type="none" w="med" len="med"/>
-                    </a:lnR>
-                    <a:lnT w="6350" cap="flat" cmpd="sng" algn="ctr">
-                      <a:solidFill>
-                        <a:srgbClr val="C9D6D3"/>
-                      </a:solidFill>
-                      <a:prstDash val="solid"/>
-                      <a:round/>
-                      <a:headEnd type="none" w="med" len="med"/>
-                      <a:tailEnd type="none" w="med" len="med"/>
-                    </a:lnT>
-                    <a:lnB w="6350" cap="flat" cmpd="sng" algn="ctr">
-                      <a:solidFill>
-                        <a:srgbClr val="C9D6D3"/>
-                      </a:solidFill>
-                      <a:prstDash val="solid"/>
-                      <a:round/>
-                      <a:headEnd type="none" w="med" len="med"/>
-                      <a:tailEnd type="none" w="med" len="med"/>
-                    </a:lnB>
-                    <a:solidFill>
-                      <a:srgbClr val="FFFFFF"/>
-                    </a:solidFill>
-                  </a:tcPr>
-                </a:tc>
-                <a:tc>
-                  <a:txBody>
-                    <a:bodyPr/>
-                    <a:lstStyle/>
-                    <a:p>
-                      <a:pPr algn="l" indent="0" marL="0">
-                        <a:buNone/>
-                      </a:pPr>
-                      <a:r>
-                        <a:rPr lang="en-US" sz="1200" dirty="0">
-                          <a:solidFill>
-                            <a:schemeClr val="tx1"/>
-                          </a:solidFill>
-                        </a:rPr>
-                        <a:t>53,7</a:t>
+                        <a:t>53,5</a:t>
                       </a:r>
                       <a:endParaRPr lang="en-US" sz="1200" dirty="0"/>
                     </a:p>
@@ -31906,7 +31538,7 @@
                             <a:schemeClr val="tx1"/>
                           </a:solidFill>
                         </a:rPr>
-                        <a:t>0,4</a:t>
+                        <a:t>0,6</a:t>
                       </a:r>
                       <a:endParaRPr lang="en-US" sz="1200" dirty="0"/>
                     </a:p>
@@ -32028,7 +31660,7 @@
                             <a:schemeClr val="tx1"/>
                           </a:solidFill>
                         </a:rPr>
-                        <a:t>−1,0</a:t>
+                        <a:t>−1,1</a:t>
                       </a:r>
                       <a:endParaRPr lang="en-US" sz="1200" dirty="0"/>
                     </a:p>
@@ -32089,7 +31721,7 @@
                             <a:schemeClr val="tx1"/>
                           </a:solidFill>
                         </a:rPr>
-                        <a:t>−0,6</a:t>
+                        <a:t>−0,7</a:t>
                       </a:r>
                       <a:endParaRPr lang="en-US" sz="1200" dirty="0"/>
                     </a:p>
@@ -32211,7 +31843,7 @@
                             <a:schemeClr val="tx1"/>
                           </a:solidFill>
                         </a:rPr>
-                        <a:t>0,2</a:t>
+                        <a:t>0,3</a:t>
                       </a:r>
                       <a:endParaRPr lang="en-US" sz="1200" dirty="0"/>
                     </a:p>
@@ -32659,9 +32291,9 @@
                       </a:pPr>
                       <a:r>
                         <a:rPr lang="en-US" sz="1300" u="sng" dirty="0">
-                          <a:hlinkClick r:id="rId4" invalidUrl="" action="" tgtFrame="" tooltip="https://bank.gov.ua/ua/news/all/komentar-natsionalnogo-banku-schodo-rivnya-inflyatsiyi-v-serpni-2026-roku" history="1" highlightClick="0" endSnd="0"/>
+                          <a:hlinkClick r:id="rId4" invalidUrl="" action="" tgtFrame="" tooltip="https://bank.gov.ua/ua/news/all/komentar-natsionalnogo-banku-schodo-rivnya-inflyatsiyi-u-veresni-2026-roku" history="1" highlightClick="0" endSnd="0"/>
                         </a:rPr>
-                        <a:t>коментар НБУ: інфляція в серпні</a:t>
+                        <a:t>коментар НБУ: інфляція у вересні</a:t>
                       </a:r>
                       <a:endParaRPr lang="en-US" sz="1300" dirty="0"/>
                     </a:p>
@@ -34727,7 +34359,7 @@
                 <a:ea typeface="Cambria" pitchFamily="34" charset="-122"/>
                 <a:cs typeface="Cambria" pitchFamily="34" charset="-120"/>
               </a:rPr>
-              <a:t>Інфляція прискорилася до 8,1%: пальне й тарифи, базова — стабільно висока</a:t>
+              <a:t>Інфляція у вересні — 10,0%: пальне, руйнування логістики, прискорення базової</a:t>
             </a:r>
             <a:endParaRPr lang="en-US" sz="2600" dirty="0"/>
           </a:p>
@@ -34773,7 +34405,7 @@
                 <a:solidFill>
                   <a:srgbClr val="5F6B6D"/>
                 </a:solidFill>
-                <a:hlinkClick r:id="rId1" invalidUrl="" action="" tgtFrame="" tooltip="https://bank.gov.ua/ua/news/all/komentar-natsionalnogo-banku-schodo-rivnya-inflyatsiyi-v-serpni-2026-roku" history="1" highlightClick="0" endSnd="0">
+                <a:hlinkClick r:id="rId1" invalidUrl="" action="" tgtFrame="" tooltip="https://bank.gov.ua/ua/news/all/komentar-natsionalnogo-banku-schodo-rivnya-inflyatsiyi-u-veresni-2026-roku" history="1" highlightClick="0" endSnd="0">
                   <a:extLst>
                     <a:ext uri="{A12FA001-AC4F-418D-AE19-62706E023703}">
                       <ahyp:hlinkClr xmlns:ahyp="http://schemas.microsoft.com/office/drawing/2018/hyperlinkcolor" val="tx"/>
@@ -34781,7 +34413,7 @@
                   </a:extLst>
                 </a:hlinkClick>
               </a:rPr>
-              <a:t>коментар НБУ: інфляція в серпні</a:t>
+              <a:t>коментар НБУ: інфляція у вересні</a:t>
             </a:r>
             <a:pPr indent="0" marL="0">
               <a:buNone/>
@@ -34955,7 +34587,7 @@
                   <a:schemeClr val="tx1"/>
                 </a:solidFill>
               </a:rPr>
-              <a:t>Пальне +38,7% р/р, адмінрегульовані ціни +13,0% (вода, проїзд) — головні рушії серпня</a:t>
+              <a:t>+2,1% за місяць: пальне +46,2% р/р, адмінціни +13,6% (проїзд, вода, алкоголь), атаки на склади й логістику</a:t>
             </a:r>
             <a:endParaRPr lang="en-US" sz="1300" dirty="0"/>
           </a:p>
@@ -35047,7 +34679,7 @@
                   <a:schemeClr val="tx1"/>
                 </a:solidFill>
               </a:rPr>
-              <a:t>Базова інфляція 8,1% три місяці поспіль: послуги +13,4% (зарплати, оренда, логістика)</a:t>
+              <a:t>Базова інфляція 8,8% (з 8,1%): оброблені продукти +10,7%, послуги +13,7% (зарплати, оренда)</a:t>
             </a:r>
             <a:endParaRPr lang="en-US" sz="1300" dirty="0"/>
           </a:p>
@@ -35139,7 +34771,7 @@
                   <a:schemeClr val="tx1"/>
                 </a:solidFill>
               </a:rPr>
-              <a:t>Стримує: сирі продукти +1,0% — блокада Чорного моря тримає зерно й овочі на внутрішньому ринку</a:t>
+              <a:t>Сирі продукти прискорилися до 6,7%: менші врожаї овочів, витрати на транспорт і зберігання</a:t>
             </a:r>
             <a:endParaRPr lang="en-US" sz="1300" dirty="0"/>
           </a:p>

--- a/presentation/NBU_University_Challenge_2026.pptx
+++ b/presentation/NBU_University_Challenge_2026.pptx
@@ -142,13 +142,13 @@
   <p:extLst>
     <p:ext uri="{521415D9-36F7-43E2-AB2F-B90AF26B5E84}">
       <p14:sectionLst xmlns:p14="http://schemas.microsoft.com/office/powerpoint/2010/main">
-        <p14:section name="Вступ" id="{c3a84343-e4de-ad55-f5e4-5f6decfb49c2}">
+        <p14:section name="Вступ" id="{5e3d633c-7805-c495-aed3-f30d20130a56}">
           <p14:sldIdLst>
             <p14:sldId id="256"/>
             <p14:sldId id="257"/>
           </p14:sldIdLst>
         </p14:section>
-        <p14:section name="Огляд" id="{264103d9-0eb1-4dd5-8e09-ff335c6870c1}">
+        <p14:section name="Огляд" id="{8f80531e-ff22-825a-84bd-4b0710a770b5}">
           <p14:sldIdLst>
             <p14:sldId id="258"/>
             <p14:sldId id="259"/>
@@ -160,7 +160,7 @@
             <p14:sldId id="265"/>
           </p14:sldIdLst>
         </p14:section>
-        <p14:section name="Прогноз" id="{fd959825-5bed-ae9b-b271-382498d5463d}">
+        <p14:section name="Прогноз" id="{59a0e602-cffd-7e60-fe02-1cb270535162}">
           <p14:sldIdLst>
             <p14:sldId id="266"/>
             <p14:sldId id="267"/>
@@ -174,7 +174,7 @@
             <p14:sldId id="275"/>
           </p14:sldIdLst>
         </p14:section>
-        <p14:section name="Рекомендації" id="{48fa9ecc-f22a-2ecb-161b-85b2dbb1b275}">
+        <p14:section name="Рекомендації" id="{fb0d92d0-d307-0087-8b90-339077251578}">
           <p14:sldIdLst>
             <p14:sldId id="276"/>
             <p14:sldId id="277"/>
@@ -186,7 +186,7 @@
             <p14:sldId id="283"/>
           </p14:sldIdLst>
         </p14:section>
-        <p14:section name="Додатки" id="{9c1fb0c8-58d1-3c85-d6de-ecdaf218086f}">
+        <p14:section name="Додатки" id="{1ef0dfe4-2b81-7441-5dec-4ce2d34ff554}">
           <p14:sldIdLst>
             <p14:sldId id="284"/>
             <p14:sldId id="285"/>
@@ -1218,7 +1218,7 @@
           <a:p>
             <a:r>
               <a:rPr lang="en-US" dirty="0"/>
-              <a:t>Базовий прогноз. Нагадаю: ціль НБУ — 5% без діапазону відхилень, і повернути інфляцію до неї треба на горизонті до трьох років. Інфляція досягне піку — близько 10,7% — на початку 2027 року, знизиться до 6,5% наприкінці 2027-го, у 2028-му тимчасово опуститься до 4,1% через дешевшу нафту і з третьому кварталі 2029 року стабілізується на 5%. Ставка — 17% до середини 2027 року, далі поступово знижується до 10,3% наприкінці 2028-го. Віяло показує, наскільки велика невизначеність: з імовірністю 70% інфляція наприкінці 2027 року буде між 3 і 10%.</a:t>
+              <a:t>Базовий прогноз. Нагадаю: ціль НБУ — 5% без діапазону відхилень, і повернути інфляцію до неї треба на горизонті до трьох років. Інфляція досягне піку — близько 11,3% — на початку 2027 року, знизиться до 6,7% наприкінці 2027-го, у 2028-му тимчасово опуститься до 4,0% через дешевшу нафту і з третьому кварталі 2029 року стабілізується на 5%. Ставка — 17% до середини 2027 року, далі поступово знижується до 10,3% наприкінці 2028-го. Віяло показує, наскільки велика невизначеність: з імовірністю 70% інфляція наприкінці 2027 року буде між 3 і 10%.</a:t>
             </a:r>
             <a:endParaRPr lang="en-US" dirty="0"/>
           </a:p>
@@ -1306,7 +1306,7 @@
           <a:p>
             <a:r>
               <a:rPr lang="en-US" dirty="0"/>
-              <a:t>Важлива відмінність від НБУ — базова інфляція. Ми вважаємо, що вона буде стійкішою: 5,3% наприкінці 2027 року проти 5,1% у НБУ. Причина — перегрітий ринок праці, дорожчі послуги й наслідки атак. Загальна інфляція при цьому близька до НБУ: тарифи й акцизи додають близько 1,7 пункта на рік, а дешевша нафта частково це компенсує. У 2028 році базова інфляція опускається нижче цілі — як і в НБУ. Висновок: підвищити ставку зараз, щоб швидше пом'якшити її пізніше.</a:t>
+              <a:t>Важлива відмінність від НБУ — базова інфляція. Ми вважаємо, що вона буде стійкішою: 5,4% наприкінці 2027 року проти 5,1% у НБУ. Причина — перегрітий ринок праці, дорожчі послуги й наслідки атак. Загальна інфляція при цьому близька до НБУ: тарифи й акцизи додають близько 1,7 пункта на рік, а дешевша нафта частково це компенсує. У 2028 році базова інфляція опускається нижче цілі — як і в НБУ. Висновок: підвищити ставку зараз, щоб швидше пом'якшити її пізніше.</a:t>
             </a:r>
             <a:endParaRPr lang="en-US" dirty="0"/>
           </a:p>
@@ -1394,7 +1394,7 @@
           <a:p>
             <a:r>
               <a:rPr lang="en-US" dirty="0"/>
-              <a:t>Попит ми бачимо слабшим, ніж НБУ: фактично нульове зростання цього року, 0,7% у 2027-му і 0,8% у 2028-му проти 1,8, 2,8 і 3,0% у НБУ. Причини — слабкий третій квартал, атаки, блокада портів і дефіцит кадрів. Реальна ставка вже вища за нейтральну, тобто політика стримувальна, — тому ми не пропонуємо різкого посилення.</a:t>
+              <a:t>Попит ми бачимо слабшим, ніж НБУ: фактично нульове зростання цього року, 0,7% у 2027-му і 0,8% у 2028-му проти 1,8, 2,8 і 3,0% у НБУ. Причини — слабкий третій квартал, атаки, блокада портів і дефіцит кадрів. Реальна ставка зараз близько 6% — трохи нижче нейтральної. За 17% вона зросте до 9% у другому кварталі 2027-го сама собою, бо інфляція знижуватиметься, — тому одного рішучого кроку достатньо, різкішого посилення не потрібно.</a:t>
             </a:r>
             <a:endParaRPr lang="en-US" dirty="0"/>
           </a:p>
@@ -1482,7 +1482,7 @@
           <a:p>
             <a:r>
               <a:rPr lang="en-US" dirty="0"/>
-              <a:t>Ми розглянули чотири ризикові сценарії, розраховані в MATLAB. Найнебезпечніший — дефіцит фінансування: якщо допомога затримається, гривня буде приблизно на 6% слабшою, інфляція зросте до 12,5%, а ставку доведеться підняти до 19,5%. Важка зима з ударами по енергетиці підніме інфляцію до 12,0% і майже зупинить зростання ВВП. Натомість нафта по 120 доларів додає лише 0,4 пункта до піку інфляції, і ставка майже не реагує — це шок першого раунду. Висновок: головний ризик для інфляції — курс і резерви.</a:t>
+              <a:t>Ми розглянули чотири ризикові сценарії, розраховані в MATLAB. Найнебезпечніший — дефіцит фінансування: якщо допомога затримається, гривня буде приблизно на 6% слабшою, інфляція зросте до 13,3%, а ставку доведеться підняти до 19,6%. Важка зима з ударами по енергетиці підніме інфляцію до 12,7% і майже зупинить зростання ВВП. Натомість нафта по 120 доларів додає лише 0,4 пункта до піку інфляції, і ставка майже не реагує — це шок першого раунду. Висновок: головний ризик для інфляції — курс і резерви.</a:t>
             </a:r>
             <a:endParaRPr lang="en-US" dirty="0"/>
           </a:p>
@@ -1570,7 +1570,7 @@
           <a:p>
             <a:r>
               <a:rPr lang="en-US" dirty="0"/>
-              <a:t>Почнемо з головного. Ми пропонуємо три рішення, які працюють як єдиний пакет. Перше — підвищити облікову ставку на 1 пункт, до 17%, і утримувати її щонайменше до середини 2027 року: у вересні інфляція сягнула 10%, у грудні буде близько 12%, а ризики зміщені вгору. Друге — керована гнучкість курсу: допускати поступове послаблення гривні замість того, щоб витрачати близько 5 мільярдів доларів резервів щомісяця. Третє — поставити на паузу наступні кроки валютної лібералізації, доки не відновляться резерви. За такої політики інфляція знизиться до 6,5% наприкінці 2027 року і повернеться до цілі 5% у третьому кварталі 2029 року — у межах трирічного горизонту НБУ.</a:t>
+              <a:t>Почнемо з головного. Ми пропонуємо три рішення, які працюють як єдиний пакет. Перше — підвищити облікову ставку на 1 пункт, до 17%, і утримувати її щонайменше до середини 2027 року: у вересні інфляція сягнула 10%, у грудні буде близько 12%, а ризики зміщені вгору. Друге — керована гнучкість курсу: допускати поступове послаблення гривні замість того, щоб витрачати близько 5 мільярдів доларів резервів щомісяця. Третє — поставити на паузу наступні кроки валютної лібералізації, доки не відновляться резерви. За такої політики інфляція знизиться до 6,7% у четвертому кварталі 2027 року і повернеться до цілі 5% у третьому кварталі 2029 року — у межах трирічного горизонту НБУ.</a:t>
             </a:r>
             <a:endParaRPr lang="en-US" dirty="0"/>
           </a:p>
@@ -1922,7 +1922,7 @@
           <a:p>
             <a:r>
               <a:rPr lang="en-US" dirty="0"/>
-              <a:t>Ми порівняли чотири варіанти рішення — від утримання 16% до підвищення до 17,5%. У кожному ставка утримується до середини 2027 року, а далі знижується так, щоб інфляція повернулася саме до 5%. Механічне правило Тейлора для цього не годиться: з ним інфляція наприкінці 2029 року була б лише 4,4%. Критерій — втрати: відхилення інфляції від цілі та розрив ВВП. Кожні 0,5 пункта підвищення зменшують втрати, а оптимум моделі — 16,9%, якщо не реагувати на перший раунд підвищення адмінцін. Тому — 17%.</a:t>
+              <a:t>Ми порівняли чотири варіанти рішення — від утримання 16% до підвищення до 17,5%. У кожному ставка утримується до середини 2027 року, а далі знижується так, щоб інфляція повернулася саме до 5%. Механічне правило Тейлора для цього не годиться: з ним інфляція наприкінці 2029 року була б лише 4,4%. Критерій — втрати: відхилення інфляції від цілі, розрив ВВП і різкі зміни ставки. Вища ставка швидше знижує інфляцію, але коштує спаду й різкіших змін ставки, тож найменші втрати — у діапазоні 17–17,5%. Якщо не реагувати на перший раунд підвищення адмінцін, оптимум — 16,9%. Тому — 17%.</a:t>
             </a:r>
             <a:endParaRPr lang="en-US" dirty="0"/>
           </a:p>
@@ -3242,7 +3242,7 @@
           <a:p>
             <a:r>
               <a:rPr lang="en-US" dirty="0"/>
-              <a:t>Зовнішнє середовище стало помітно проінфляційним. Через війну на Близькому Сході нафта Brent у квітні сягала 117 доларів за барель і у вересні знову перевищила 100 — тоді як НБУ в липні закладав 80–85. Ринок очікує здешевлення: ф'ючерси вказують на 83 долари наприкінці 2027 року, і саме цю криву ми беремо в прогноз. Водночас ЄЦБ підвищує ставку, тож простору для пом'якшення в Україні менше.</a:t>
+              <a:t>Зовнішнє середовище стало помітно проінфляційним. Через війну на Близькому Сході нафта Brent у квітні сягала 117 доларів за барель, а у вересні–жовтні знову перевищила 100 — тоді як НБУ в липні закладав 80–85. Ринок очікує здешевлення: ф'ючерси вказують на 87 доларів наприкінці 2027 року, і саме цю криву ми беремо в прогноз. Водночас ЄЦБ підвищує ставку, тож простору для пом'якшення в Україні менше.</a:t>
             </a:r>
             <a:endParaRPr lang="en-US" dirty="0"/>
           </a:p>
@@ -3418,7 +3418,7 @@
           <a:p>
             <a:r>
               <a:rPr lang="en-US" dirty="0"/>
-              <a:t>Інфляційні очікування підвищені: домогосподарства чекають 10–14% — більше, ніж фактична інфляція, а фінансові аналітики підвищили свої очікування до 7,9%. Реальна облікова ставка — близько 7%, тому гривневі депозити й ОВДП поки привабливі. Але депозитні ставки реагують із запізненням, і ризик розбалансування очікувань реальний.</a:t>
+              <a:t>Інфляційні очікування підвищені: домогосподарства чекають 10–14% — більше, ніж фактична інфляція, а фінансові аналітики підвищили свої очікування до 7,9%. А реальна облікова ставка після вересневого стрибка цін знизилася з 7 до 6%: інфляція «з'їла» вересневе підвищення. Депозитні ставки реагують із запізненням, тож ризик розбалансування очікувань реальний.</a:t>
             </a:r>
             <a:endParaRPr lang="en-US" dirty="0"/>
           </a:p>
@@ -5982,7 +5982,7 @@
                   <a:schemeClr val="tx1"/>
                 </a:solidFill>
               </a:rPr>
-              <a:t>Бюджетна декларація 2027–2029: дефіцит держбюджету 17,7% ВВП у 2027 і 11,1% у 2028; уряд закладає інфляцію 8,9% на грудень 2027 (НБУ — 6,9%, ми — 6,5%)</a:t>
+              <a:t>Бюджетна декларація 2027–2029: дефіцит держбюджету 17,7% ВВП у 2027 і 11,1% у 2028; уряд закладає інфляцію 8,9% на грудень 2027 (НБУ — 6,9%, ми — 6,7% у IV кв.)</a:t>
             </a:r>
             <a:endParaRPr lang="en-US" sz="1300" dirty="0"/>
           </a:p>
@@ -7107,7 +7107,7 @@
                 <a:ea typeface="Cambria" pitchFamily="34" charset="-122"/>
                 <a:cs typeface="Cambria" pitchFamily="34" charset="-120"/>
               </a:rPr>
-              <a:t>0,7–1,0 в. п.</a:t>
+              <a:t>0,8–1,0 в. п.</a:t>
             </a:r>
             <a:endParaRPr lang="en-US" sz="3400" dirty="0"/>
           </a:p>
@@ -7143,7 +7143,7 @@
                   <a:schemeClr val="tx1"/>
                 </a:solidFill>
               </a:rPr>
-              <a:t>помилка прогнозу ІСЦ на рік уперед (наївний: 1,2–5,5)</a:t>
+              <a:t>помилка прогнозу ІСЦ на рік уперед (наївний: 1,3–6,1)</a:t>
             </a:r>
             <a:endParaRPr lang="en-US" sz="1400" dirty="0"/>
           </a:p>
@@ -10256,7 +10256,7 @@
                             <a:schemeClr val="tx1"/>
                           </a:solidFill>
                         </a:rPr>
-                        <a:t>Ф'ючерсна крива: $101 (IV кв. 2026) → $83 (кінець 2027) → $76 (кінець 2028)</a:t>
+                        <a:t>Ф'ючерсна крива (20.10): $109 (IV кв. 2026) → $87 (кінець 2027) → $79 (кінець 2028)</a:t>
                       </a:r>
                       <a:endParaRPr lang="en-US" sz="1200" dirty="0"/>
                     </a:p>
@@ -12680,7 +12680,7 @@
                   <a:schemeClr val="tx1"/>
                 </a:solidFill>
               </a:rPr>
-              <a:t>Пік ≈10,7% у I кв. 2027; 6,5% наприкінці 2027 (НБУ: 6,9%); у 2028 — тимчасово ≈4,1% (дешевша нафта); 5% — з III кв. 2029</a:t>
+              <a:t>Пік ≈11,3% у I кв. 2027; 6,7% у IV кв. 2027 (НБУ: 6,9% у грудні); у 2028 — тимчасово ≈4,0% (дешевша нафта); 5% — з III кв. 2029</a:t>
             </a:r>
             <a:endParaRPr lang="en-US" sz="1300" dirty="0"/>
           </a:p>
@@ -12772,7 +12772,7 @@
                   <a:schemeClr val="tx1"/>
                 </a:solidFill>
               </a:rPr>
-              <a:t>Ставка: 17% до середини 2027 → 15,5% наприкінці 2027 → 10,3% — 2028 → 9,0% — 2029</a:t>
+              <a:t>Ставка: 17% до середини 2027 → 15,6% наприкінці 2027 → 10,3% — 2028 → 9,0% — 2029</a:t>
             </a:r>
             <a:endParaRPr lang="en-US" sz="1300" dirty="0"/>
           </a:p>
@@ -12864,7 +12864,7 @@
                   <a:schemeClr val="tx1"/>
                 </a:solidFill>
               </a:rPr>
-              <a:t>Невизначеність велика: з імовірністю 70% інфляція наприкінці 2027 — від 3,2 до 9,9%</a:t>
+              <a:t>Невизначеність велика: з імовірністю 70% інфляція наприкінці 2027 — від 3,2 до 10,3%</a:t>
             </a:r>
             <a:endParaRPr lang="en-US" sz="1300" dirty="0"/>
           </a:p>
@@ -12978,7 +12978,7 @@
                 <a:ea typeface="Cambria" pitchFamily="34" charset="-122"/>
                 <a:cs typeface="Cambria" pitchFamily="34" charset="-120"/>
               </a:rPr>
-              <a:t>Базова інфляція в 2027 стійкіша, ніж у НБУ: 5,3% наприкінці року проти 5,1%</a:t>
+              <a:t>Базова інфляція в 2027 стійкіша, ніж у НБУ: 5,4% наприкінці року проти 5,1%</a:t>
             </a:r>
             <a:endParaRPr lang="en-US" sz="2600" dirty="0"/>
           </a:p>
@@ -13143,7 +13143,7 @@
                   <a:schemeClr val="tx1"/>
                 </a:solidFill>
               </a:rPr>
-              <a:t>Загальна: 6,5% наприкінці 2027 (НБУ 6,9%) — тарифи й акцизи додають ≈1,7 в. п. на рік, дешевша нафта (ф'ючерси) — віднімає</a:t>
+              <a:t>Загальна: 6,7% у IV кв. 2027 (НБУ 6,9% у грудні) — тарифи й акцизи додають ≈1,7 в. п. на рік, дешевша нафта (ф'ючерси) — віднімає</a:t>
             </a:r>
             <a:endParaRPr lang="en-US" sz="1400" dirty="0"/>
           </a:p>
@@ -13529,7 +13529,7 @@
                   <a:schemeClr val="tx1"/>
                 </a:solidFill>
               </a:rPr>
-              <a:t>Реальна ставка (≈7–8%) вища за нейтральну (≈6%) — політика вже стримувальна</a:t>
+              <a:t>Реальна ставка зараз ≈6,2% — нижче нейтральної (≈6,6%); за 17% вона зросте до ≈8,7% у II кв. 2027: політика стає стримувальною в міру зниження інфляції</a:t>
             </a:r>
             <a:endParaRPr lang="en-US" sz="1400" dirty="0"/>
           </a:p>
@@ -14259,7 +14259,7 @@
                             <a:schemeClr val="tx1"/>
                           </a:solidFill>
                         </a:rPr>
-                        <a:t>10,7</a:t>
+                        <a:t>11,3</a:t>
                       </a:r>
                       <a:endParaRPr lang="en-US" sz="1200" dirty="0"/>
                     </a:p>
@@ -14320,7 +14320,7 @@
                             <a:schemeClr val="tx1"/>
                           </a:solidFill>
                         </a:rPr>
-                        <a:t>6,5</a:t>
+                        <a:t>6,7</a:t>
                       </a:r>
                       <a:endParaRPr lang="en-US" sz="1200" dirty="0"/>
                     </a:p>
@@ -14627,7 +14627,7 @@
                             <a:schemeClr val="tx1"/>
                           </a:solidFill>
                         </a:rPr>
-                        <a:t>12,0</a:t>
+                        <a:t>12,7</a:t>
                       </a:r>
                       <a:endParaRPr lang="en-US" sz="1200" dirty="0"/>
                     </a:p>
@@ -14688,7 +14688,7 @@
                             <a:schemeClr val="tx1"/>
                           </a:solidFill>
                         </a:rPr>
-                        <a:t>8,2</a:t>
+                        <a:t>8,5</a:t>
                       </a:r>
                       <a:endParaRPr lang="en-US" sz="1200" dirty="0"/>
                     </a:p>
@@ -14995,7 +14995,7 @@
                             <a:schemeClr val="tx1"/>
                           </a:solidFill>
                         </a:rPr>
-                        <a:t>12,5</a:t>
+                        <a:t>13,3</a:t>
                       </a:r>
                       <a:endParaRPr lang="en-US" sz="1200" dirty="0"/>
                     </a:p>
@@ -15056,7 +15056,7 @@
                             <a:schemeClr val="tx1"/>
                           </a:solidFill>
                         </a:rPr>
-                        <a:t>10,0</a:t>
+                        <a:t>10,5</a:t>
                       </a:r>
                       <a:endParaRPr lang="en-US" sz="1200" dirty="0"/>
                     </a:p>
@@ -15117,7 +15117,7 @@
                             <a:schemeClr val="tx1"/>
                           </a:solidFill>
                         </a:rPr>
-                        <a:t>19,5</a:t>
+                        <a:t>19,6</a:t>
                       </a:r>
                       <a:endParaRPr lang="en-US" sz="1200" dirty="0"/>
                     </a:p>
@@ -15363,7 +15363,7 @@
                             <a:schemeClr val="tx1"/>
                           </a:solidFill>
                         </a:rPr>
-                        <a:t>10,0</a:t>
+                        <a:t>10,5</a:t>
                       </a:r>
                       <a:endParaRPr lang="en-US" sz="1200" dirty="0"/>
                     </a:p>
@@ -15424,7 +15424,7 @@
                             <a:schemeClr val="tx1"/>
                           </a:solidFill>
                         </a:rPr>
-                        <a:t>5,4</a:t>
+                        <a:t>5,5</a:t>
                       </a:r>
                       <a:endParaRPr lang="en-US" sz="1200" dirty="0"/>
                     </a:p>
@@ -15731,7 +15731,7 @@
                             <a:schemeClr val="tx1"/>
                           </a:solidFill>
                         </a:rPr>
-                        <a:t>11,1</a:t>
+                        <a:t>11,7</a:t>
                       </a:r>
                       <a:endParaRPr lang="en-US" sz="1200" dirty="0"/>
                     </a:p>
@@ -15792,7 +15792,7 @@
                             <a:schemeClr val="tx1"/>
                           </a:solidFill>
                         </a:rPr>
-                        <a:t>6,6</a:t>
+                        <a:t>6,8</a:t>
                       </a:r>
                       <a:endParaRPr lang="en-US" sz="1200" dirty="0"/>
                     </a:p>
@@ -16061,7 +16061,7 @@
                   <a:schemeClr val="tx1"/>
                 </a:solidFill>
               </a:rPr>
-              <a:t>Дефіцит фінансування: гривня на ≈6% слабша (≈55 грн/€) → інфляція до 12%, ставка до ≈20%</a:t>
+              <a:t>Дефіцит фінансування: гривня на ≈6% слабша (≈55 грн/€) → інфляція до 13,3%, ставка до 19,6%</a:t>
             </a:r>
             <a:endParaRPr lang="en-US" sz="1300" dirty="0"/>
           </a:p>
@@ -16079,7 +16079,7 @@
                   <a:schemeClr val="tx1"/>
                 </a:solidFill>
               </a:rPr>
-              <a:t>Важка зима: інфляція до 12,0%, ставка ≈18,0%, ВВП 2027 — −0,2%</a:t>
+              <a:t>Важка зима: інфляція до 12,7%, ставка до 17,8%, ВВП 2027 — −0,2%</a:t>
             </a:r>
             <a:endParaRPr lang="en-US" sz="1300" dirty="0"/>
           </a:p>
@@ -17154,7 +17154,7 @@
                             <a:schemeClr val="tx1"/>
                           </a:solidFill>
                         </a:rPr>
-                        <a:t>10,4</a:t>
+                        <a:t>11,0</a:t>
                       </a:r>
                       <a:endParaRPr lang="en-US" sz="1500" dirty="0"/>
                     </a:p>
@@ -17215,7 +17215,7 @@
                             <a:schemeClr val="tx1"/>
                           </a:solidFill>
                         </a:rPr>
-                        <a:t>6,5</a:t>
+                        <a:t>6,7</a:t>
                       </a:r>
                       <a:endParaRPr lang="en-US" sz="1500" dirty="0"/>
                     </a:p>
@@ -17461,7 +17461,7 @@
                             <a:schemeClr val="tx1"/>
                           </a:solidFill>
                         </a:rPr>
-                        <a:t>8,5</a:t>
+                        <a:t>8,9</a:t>
                       </a:r>
                       <a:endParaRPr lang="en-US" sz="1500" dirty="0"/>
                     </a:p>
@@ -17522,7 +17522,7 @@
                             <a:schemeClr val="tx1"/>
                           </a:solidFill>
                         </a:rPr>
-                        <a:t>5,3</a:t>
+                        <a:t>5,4</a:t>
                       </a:r>
                       <a:endParaRPr lang="en-US" sz="1500" dirty="0"/>
                     </a:p>
@@ -18136,7 +18136,7 @@
                             <a:schemeClr val="tx1"/>
                           </a:solidFill>
                         </a:rPr>
-                        <a:t>15,5</a:t>
+                        <a:t>15,6</a:t>
                       </a:r>
                       <a:endParaRPr lang="en-US" sz="1500" dirty="0"/>
                     </a:p>
@@ -18504,7 +18504,7 @@
                             <a:schemeClr val="tx1"/>
                           </a:solidFill>
                         </a:rPr>
-                        <a:t>52,6</a:t>
+                        <a:t>52,5</a:t>
                       </a:r>
                       <a:endParaRPr lang="en-US" sz="1500" dirty="0"/>
                     </a:p>
@@ -18565,7 +18565,7 @@
                             <a:schemeClr val="tx1"/>
                           </a:solidFill>
                         </a:rPr>
-                        <a:t>53,5</a:t>
+                        <a:t>53,4</a:t>
                       </a:r>
                       <a:endParaRPr lang="en-US" sz="1500" dirty="0"/>
                     </a:p>
@@ -20765,7 +20765,7 @@
                 <a:ea typeface="Cambria" pitchFamily="34" charset="-122"/>
                 <a:cs typeface="Cambria" pitchFamily="34" charset="-120"/>
               </a:rPr>
-              <a:t>Варіанти рішення 29 жовтня: кожні +0,5 в. п. знижують втрати</a:t>
+              <a:t>Варіанти рішення 29 жовтня: найменші втрати — 17–17,5%; обираємо 17%</a:t>
             </a:r>
             <a:endParaRPr lang="en-US" sz="2600" dirty="0"/>
           </a:p>
@@ -21384,7 +21384,7 @@
                             <a:schemeClr val="tx1"/>
                           </a:solidFill>
                         </a:rPr>
-                        <a:t>15,6</a:t>
+                        <a:t>15,7</a:t>
                       </a:r>
                       <a:endParaRPr lang="en-US" sz="1200" dirty="0"/>
                     </a:p>
@@ -21445,7 +21445,7 @@
                             <a:schemeClr val="tx1"/>
                           </a:solidFill>
                         </a:rPr>
-                        <a:t>7,0</a:t>
+                        <a:t>7,2</a:t>
                       </a:r>
                       <a:endParaRPr lang="en-US" sz="1200" dirty="0"/>
                     </a:p>
@@ -21567,7 +21567,7 @@
                             <a:schemeClr val="tx1"/>
                           </a:solidFill>
                         </a:rPr>
-                        <a:t>77,7</a:t>
+                        <a:t>122,3</a:t>
                       </a:r>
                       <a:endParaRPr lang="en-US" sz="1200" dirty="0"/>
                     </a:p>
@@ -21752,7 +21752,7 @@
                             <a:schemeClr val="tx1"/>
                           </a:solidFill>
                         </a:rPr>
-                        <a:t>15,5</a:t>
+                        <a:t>15,7</a:t>
                       </a:r>
                       <a:endParaRPr lang="en-US" sz="1200" dirty="0"/>
                     </a:p>
@@ -21813,7 +21813,7 @@
                             <a:schemeClr val="tx1"/>
                           </a:solidFill>
                         </a:rPr>
-                        <a:t>6,7</a:t>
+                        <a:t>6,9</a:t>
                       </a:r>
                       <a:endParaRPr lang="en-US" sz="1200" dirty="0"/>
                     </a:p>
@@ -21874,7 +21874,7 @@
                             <a:schemeClr val="tx1"/>
                           </a:solidFill>
                         </a:rPr>
-                        <a:t>0,9</a:t>
+                        <a:t>0,8</a:t>
                       </a:r>
                       <a:endParaRPr lang="en-US" sz="1200" dirty="0"/>
                     </a:p>
@@ -21935,7 +21935,7 @@
                             <a:schemeClr val="tx1"/>
                           </a:solidFill>
                         </a:rPr>
-                        <a:t>73,6</a:t>
+                        <a:t>118,4</a:t>
                       </a:r>
                       <a:endParaRPr lang="en-US" sz="1200" dirty="0"/>
                     </a:p>
@@ -22120,7 +22120,7 @@
                             <a:schemeClr val="tx1"/>
                           </a:solidFill>
                         </a:rPr>
-                        <a:t>15,5</a:t>
+                        <a:t>15,6</a:t>
                       </a:r>
                       <a:endParaRPr lang="en-US" sz="1200" dirty="0"/>
                     </a:p>
@@ -22181,7 +22181,7 @@
                             <a:schemeClr val="tx1"/>
                           </a:solidFill>
                         </a:rPr>
-                        <a:t>6,5</a:t>
+                        <a:t>6,7</a:t>
                       </a:r>
                       <a:endParaRPr lang="en-US" sz="1200" dirty="0"/>
                     </a:p>
@@ -22303,7 +22303,7 @@
                             <a:schemeClr val="tx1"/>
                           </a:solidFill>
                         </a:rPr>
-                        <a:t>69,9</a:t>
+                        <a:t>115,8</a:t>
                       </a:r>
                       <a:endParaRPr lang="en-US" sz="1200" dirty="0"/>
                     </a:p>
@@ -22488,7 +22488,7 @@
                             <a:schemeClr val="tx1"/>
                           </a:solidFill>
                         </a:rPr>
-                        <a:t>15,5</a:t>
+                        <a:t>15,6</a:t>
                       </a:r>
                       <a:endParaRPr lang="en-US" sz="1200" dirty="0"/>
                     </a:p>
@@ -22549,7 +22549,7 @@
                             <a:schemeClr val="tx1"/>
                           </a:solidFill>
                         </a:rPr>
-                        <a:t>6,3</a:t>
+                        <a:t>6,5</a:t>
                       </a:r>
                       <a:endParaRPr lang="en-US" sz="1200" dirty="0"/>
                     </a:p>
@@ -22671,7 +22671,7 @@
                             <a:schemeClr val="tx1"/>
                           </a:solidFill>
                         </a:rPr>
-                        <a:t>66,5</a:t>
+                        <a:t>114,3</a:t>
                       </a:r>
                       <a:endParaRPr lang="en-US" sz="1200" dirty="0"/>
                     </a:p>
@@ -22795,7 +22795,7 @@
                             <a:schemeClr val="tx1"/>
                           </a:solidFill>
                         </a:rPr>
-                        <a:t>17,3</a:t>
+                        <a:t>17,4</a:t>
                       </a:r>
                       <a:endParaRPr lang="en-US" sz="1200" dirty="0"/>
                     </a:p>
@@ -22856,7 +22856,7 @@
                             <a:schemeClr val="tx1"/>
                           </a:solidFill>
                         </a:rPr>
-                        <a:t>15,5</a:t>
+                        <a:t>15,6</a:t>
                       </a:r>
                       <a:endParaRPr lang="en-US" sz="1200" dirty="0"/>
                     </a:p>
@@ -22917,7 +22917,7 @@
                             <a:schemeClr val="tx1"/>
                           </a:solidFill>
                         </a:rPr>
-                        <a:t>6,1</a:t>
+                        <a:t>6,2</a:t>
                       </a:r>
                       <a:endParaRPr lang="en-US" sz="1200" dirty="0"/>
                     </a:p>
@@ -23039,7 +23039,7 @@
                             <a:schemeClr val="tx1"/>
                           </a:solidFill>
                         </a:rPr>
-                        <a:t>63,9</a:t>
+                        <a:t>112,9</a:t>
                       </a:r>
                       <a:endParaRPr lang="en-US" sz="1200" dirty="0"/>
                     </a:p>
@@ -23125,7 +23125,7 @@
                   <a:schemeClr val="tx1"/>
                 </a:solidFill>
               </a:rPr>
-              <a:t>Після утримання — траєкторія, що повертає інфляцію до 5% на горизонті; за чистим правилом у 2029 було б лише 4,4%</a:t>
+              <a:t>Втрати = відхилення інфляції від 5% + 0,5·розрив ВВП² + різкі зміни ставки: вища ставка швидше знижує інфляцію, але потребує різкіших змін ставки й глибшого спаду</a:t>
             </a:r>
             <a:endParaRPr lang="en-US" sz="1300" dirty="0"/>
           </a:p>
@@ -23143,7 +23143,7 @@
                   <a:schemeClr val="tx1"/>
                 </a:solidFill>
               </a:rPr>
-              <a:t>Оптимальна ставка зараз: 16,9% без реакції на перший раунд адмінцін (практика ІТ), 16,7–17,3% — залежно від згладжування</a:t>
+              <a:t>Найкращий варіант за різної ваги згладжування: 17,5% (λ = 0,5), 17,5% (λ = 1), 17% (λ = 2); оптимальна траєкторія — 16,8–17,4% зараз</a:t>
             </a:r>
             <a:endParaRPr lang="en-US" sz="1300" dirty="0"/>
           </a:p>
@@ -23161,7 +23161,7 @@
                   <a:schemeClr val="tx1"/>
                 </a:solidFill>
               </a:rPr>
-              <a:t>Обираємо 17% — найближче до оптимуму без реакції на адмінціни; 17,5% — якщо з'являться вторинні ефекти тарифів і пального</a:t>
+              <a:t>Без реакції на перший раунд адмінцін (практика ІТ) оптимум — 16,9%: тому 17%; 17,5% — якщо з'являться вторинні ефекти тарифів і пального</a:t>
             </a:r>
             <a:endParaRPr lang="en-US" sz="1300" dirty="0"/>
           </a:p>
@@ -23545,7 +23545,7 @@
         <p:spPr>
           <a:xfrm>
             <a:off x="3931920" y="1709928"/>
-            <a:ext cx="7802575" cy="1336687"/>
+            <a:ext cx="7802575" cy="1231392"/>
           </a:xfrm>
           <a:prstGeom prst="rect">
             <a:avLst/>
@@ -23588,7 +23588,7 @@
                   <a:schemeClr val="tx1"/>
                 </a:solidFill>
               </a:rPr>
-              <a:t>Базова інфляція наприкінці 2027 — 5,3% (НБУ: 5,1%): ринок праці перегрітий</a:t>
+              <a:t>Базова інфляція наприкінці 2027 — 5,4% (НБУ: 5,1%): ринок праці перегрітий</a:t>
             </a:r>
             <a:endParaRPr lang="en-US" sz="1400" dirty="0"/>
           </a:p>
@@ -23638,7 +23638,7 @@
         </p:nvSpPr>
         <p:spPr>
           <a:xfrm>
-            <a:off x="3931920" y="3092335"/>
+            <a:off x="3931920" y="2987040"/>
             <a:ext cx="7802575" cy="347472"/>
           </a:xfrm>
           <a:prstGeom prst="rect">
@@ -23677,8 +23677,8 @@
         </p:nvSpPr>
         <p:spPr>
           <a:xfrm>
-            <a:off x="3931920" y="3476383"/>
-            <a:ext cx="7802575" cy="1020803"/>
+            <a:off x="3931920" y="3371088"/>
+            <a:ext cx="7802575" cy="1231392"/>
           </a:xfrm>
           <a:prstGeom prst="rect">
             <a:avLst/>
@@ -23703,7 +23703,7 @@
                   <a:schemeClr val="tx1"/>
                 </a:solidFill>
               </a:rPr>
-              <a:t>ВВП III кв. скоротився; реальна ставка вже ≈7% — вище нейтральної</a:t>
+              <a:t>ВВП III кв. скоротився; за 17% реальна ставка сама зросте з ≈6,2% до ≈8,7% у II кв. 2027 — у міру зниження інфляції</a:t>
             </a:r>
             <a:endParaRPr lang="en-US" sz="1400" dirty="0"/>
           </a:p>
@@ -23753,7 +23753,7 @@
         </p:nvSpPr>
         <p:spPr>
           <a:xfrm>
-            <a:off x="3931920" y="4542905"/>
+            <a:off x="3931920" y="4648200"/>
             <a:ext cx="7802575" cy="347472"/>
           </a:xfrm>
           <a:prstGeom prst="rect">
@@ -23792,8 +23792,8 @@
         </p:nvSpPr>
         <p:spPr>
           <a:xfrm>
-            <a:off x="3931920" y="4926953"/>
-            <a:ext cx="7802575" cy="1336687"/>
+            <a:off x="3931920" y="5032248"/>
+            <a:ext cx="7802575" cy="1231392"/>
           </a:xfrm>
           <a:prstGeom prst="rect">
             <a:avLst/>
@@ -24524,7 +24524,7 @@
                   <a:schemeClr val="tx1"/>
                 </a:solidFill>
               </a:rPr>
-              <a:t>Пауза для III етапу (капітальні операції, операції населення) до: резерви ≥ $50 млрд (≈4 міс. імпорту), ритмічна допомога, стабільні очікування</a:t>
+              <a:t>Пауза для III етапу (капітальні операції, операції населення) до: резерви ≥ $50 млрд (≈4,5 міс. імпорту), ритмічна допомога, стабільні очікування</a:t>
             </a:r>
             <a:endParaRPr lang="en-US" sz="1400" dirty="0"/>
           </a:p>
@@ -25811,7 +25811,7 @@
                   <a:schemeClr val="bg1"/>
                 </a:solidFill>
               </a:rPr>
-              <a:t>Базовий прогноз: інфляція ≈12,1% у грудні 2026, 6,5% наприкінці 2027, ціль 5% — III кв. 2029</a:t>
+              <a:t>Базовий прогноз: інфляція ≈12,1% у грудні 2026, 6,7% у IV кв. 2027, ціль 5% — III кв. 2029</a:t>
             </a:r>
             <a:endParaRPr lang="en-US" sz="2000" dirty="0"/>
           </a:p>
@@ -26765,7 +26765,7 @@
                 <a:ea typeface="Cambria Math" pitchFamily="34" charset="-122"/>
                 <a:cs typeface="Cambria Math" pitchFamily="34" charset="-120"/>
               </a:rPr>
-              <a:t>iₜ = 0,8·iₜ₋₁ + 0,2·(r̄ₜ + Eπₜ₊₁ + (Eπₜ₊₃ − 5) + 0,5·ŷₜ) + εⁱ</a:t>
+              <a:t>iₜ = 0,8·iₜ₋₁ + 0,2·(r̄ₜ + Eπₜ₊₁ + (Eπₜ₊₃ − π*) + 0,5·ŷₜ) + εⁱ</a:t>
             </a:r>
             <a:endParaRPr lang="en-US" sz="1600" dirty="0"/>
           </a:p>
@@ -26836,7 +26836,7 @@
         <p:spPr>
           <a:xfrm>
             <a:off x="868680" y="5897880"/>
-            <a:ext cx="5090008" cy="411480"/>
+            <a:ext cx="3164738" cy="411480"/>
           </a:xfrm>
           <a:prstGeom prst="rect">
             <a:avLst/>
@@ -26857,7 +26857,7 @@
                   <a:schemeClr val="tx1"/>
                 </a:solidFill>
               </a:rPr>
-              <a:t>Калібрування — шаблон НБУ, Grui &amp; Vdovychenko (2019); вага нафти — наше калібрування</a:t>
+              <a:t>Калібрування — шаблон НБУ (Grui, Vdovychenko, 2019); вага нафти — наша</a:t>
             </a:r>
             <a:endParaRPr lang="en-US" sz="1300" dirty="0"/>
           </a:p>
@@ -26871,7 +26871,7 @@
         </p:nvSpPr>
         <p:spPr>
           <a:xfrm>
-            <a:off x="6233008" y="5916168"/>
+            <a:off x="4307738" y="5916168"/>
             <a:ext cx="310896" cy="310896"/>
           </a:xfrm>
           <a:prstGeom prst="ellipse">
@@ -26891,7 +26891,7 @@
         </p:nvSpPr>
         <p:spPr>
           <a:xfrm>
-            <a:off x="6233008" y="5916168"/>
+            <a:off x="4307738" y="5916168"/>
             <a:ext cx="310896" cy="310896"/>
           </a:xfrm>
           <a:prstGeom prst="rect">
@@ -26927,8 +26927,100 @@
         </p:nvSpPr>
         <p:spPr>
           <a:xfrm>
-            <a:off x="6644488" y="5897880"/>
-            <a:ext cx="5090008" cy="411480"/>
+            <a:off x="4719218" y="5897880"/>
+            <a:ext cx="3164738" cy="411480"/>
+          </a:xfrm>
+          <a:prstGeom prst="rect">
+            <a:avLst/>
+          </a:prstGeom>
+          <a:noFill/>
+          <a:ln/>
+        </p:spPr>
+        <p:txBody>
+          <a:bodyPr wrap="square" lIns="0" tIns="0" rIns="0" bIns="0" rtlCol="0" anchor="t"/>
+          <a:lstStyle/>
+          <a:p>
+            <a:pPr indent="0" marL="0">
+              <a:buNone/>
+            </a:pPr>
+            <a:r>
+              <a:rPr lang="en-US" sz="1300" dirty="0">
+                <a:solidFill>
+                  <a:schemeClr val="tx1"/>
+                </a:solidFill>
+              </a:rPr>
+              <a:t>Темпи в моделі — 100·ln-різниці, на слайдах — % р/р: π* = 4,88 = 5% р/р</a:t>
+            </a:r>
+            <a:endParaRPr lang="en-US" sz="1300" dirty="0"/>
+          </a:p>
+        </p:txBody>
+      </p:sp>
+      <p:sp>
+        <p:nvSpPr>
+          <p:cNvPr id="26" name="num3"/>
+          <p:cNvSpPr/>
+          <p:nvPr/>
+        </p:nvSpPr>
+        <p:spPr>
+          <a:xfrm>
+            <a:off x="8158277" y="5916168"/>
+            <a:ext cx="310896" cy="310896"/>
+          </a:xfrm>
+          <a:prstGeom prst="ellipse">
+            <a:avLst/>
+          </a:prstGeom>
+          <a:solidFill>
+            <a:srgbClr val="C98A00"/>
+          </a:solidFill>
+          <a:ln/>
+        </p:spPr>
+      </p:sp>
+      <p:sp>
+        <p:nvSpPr>
+          <p:cNvPr id="27" name="Text 24"/>
+          <p:cNvSpPr txBox="1"/>
+          <p:nvPr/>
+        </p:nvSpPr>
+        <p:spPr>
+          <a:xfrm>
+            <a:off x="8158277" y="5916168"/>
+            <a:ext cx="310896" cy="310896"/>
+          </a:xfrm>
+          <a:prstGeom prst="rect">
+            <a:avLst/>
+          </a:prstGeom>
+          <a:noFill/>
+          <a:ln/>
+        </p:spPr>
+        <p:txBody>
+          <a:bodyPr wrap="square" lIns="0" tIns="0" rIns="0" bIns="0" rtlCol="0" anchor="ctr"/>
+          <a:lstStyle/>
+          <a:p>
+            <a:pPr algn="ctr" indent="0" marL="0">
+              <a:buNone/>
+            </a:pPr>
+            <a:r>
+              <a:rPr lang="en-US" sz="1200" b="1" dirty="0">
+                <a:solidFill>
+                  <a:schemeClr val="bg1"/>
+                </a:solidFill>
+              </a:rPr>
+              <a:t>3</a:t>
+            </a:r>
+            <a:endParaRPr lang="en-US" sz="1200" dirty="0"/>
+          </a:p>
+        </p:txBody>
+      </p:sp>
+      <p:sp>
+        <p:nvSpPr>
+          <p:cNvPr id="28" name="point3"/>
+          <p:cNvSpPr txBox="1"/>
+          <p:nvPr/>
+        </p:nvSpPr>
+        <p:spPr>
+          <a:xfrm>
+            <a:off x="8569757" y="5897880"/>
+            <a:ext cx="3164738" cy="411480"/>
           </a:xfrm>
           <a:prstGeom prst="rect">
             <a:avLst/>
@@ -28125,7 +28217,7 @@
                   <a:schemeClr val="tx1"/>
                 </a:solidFill>
               </a:rPr>
-              <a:t>Помилка прогнозу ІСЦ на 4 квартали: 0,7–1,0 в. п. (наївний прогноз: 1,2–5,5)</a:t>
+              <a:t>Помилка прогнозу ІСЦ на 4 квартали: 0,8–1,0 в. п. (наївний прогноз: 1,3–6,1)</a:t>
             </a:r>
             <a:endParaRPr lang="en-US" sz="1300" dirty="0"/>
           </a:p>
@@ -29027,7 +29119,7 @@
                             <a:schemeClr val="tx1"/>
                           </a:solidFill>
                         </a:rPr>
-                        <a:t>10,4</a:t>
+                        <a:t>11,0</a:t>
                       </a:r>
                       <a:endParaRPr lang="en-US" sz="1200" dirty="0"/>
                     </a:p>
@@ -29088,7 +29180,7 @@
                             <a:schemeClr val="tx1"/>
                           </a:solidFill>
                         </a:rPr>
-                        <a:t>9,4</a:t>
+                        <a:t>9,9</a:t>
                       </a:r>
                       <a:endParaRPr lang="en-US" sz="1200" dirty="0"/>
                     </a:p>
@@ -29149,7 +29241,7 @@
                             <a:schemeClr val="tx1"/>
                           </a:solidFill>
                         </a:rPr>
-                        <a:t>6,5</a:t>
+                        <a:t>6,7</a:t>
                       </a:r>
                       <a:endParaRPr lang="en-US" sz="1200" dirty="0"/>
                     </a:p>
@@ -29517,7 +29609,7 @@
                             <a:schemeClr val="tx1"/>
                           </a:solidFill>
                         </a:rPr>
-                        <a:t>8,5</a:t>
+                        <a:t>8,9</a:t>
                       </a:r>
                       <a:endParaRPr lang="en-US" sz="1200" dirty="0"/>
                     </a:p>
@@ -29578,7 +29670,7 @@
                             <a:schemeClr val="tx1"/>
                           </a:solidFill>
                         </a:rPr>
-                        <a:t>8,0</a:t>
+                        <a:t>8,3</a:t>
                       </a:r>
                       <a:endParaRPr lang="en-US" sz="1200" dirty="0"/>
                     </a:p>
@@ -29639,7 +29731,7 @@
                             <a:schemeClr val="tx1"/>
                           </a:solidFill>
                         </a:rPr>
-                        <a:t>5,3</a:t>
+                        <a:t>5,5</a:t>
                       </a:r>
                       <a:endParaRPr lang="en-US" sz="1200" dirty="0"/>
                     </a:p>
@@ -30129,7 +30221,7 @@
                             <a:schemeClr val="tx1"/>
                           </a:solidFill>
                         </a:rPr>
-                        <a:t>0,5</a:t>
+                        <a:t>0,4</a:t>
                       </a:r>
                       <a:endParaRPr lang="en-US" sz="1200" dirty="0"/>
                     </a:p>
@@ -30312,7 +30404,7 @@
                             <a:schemeClr val="tx1"/>
                           </a:solidFill>
                         </a:rPr>
-                        <a:t>3,2</a:t>
+                        <a:t>3,3</a:t>
                       </a:r>
                       <a:endParaRPr lang="en-US" sz="1200" dirty="0"/>
                     </a:p>
@@ -30373,7 +30465,7 @@
                             <a:schemeClr val="tx1"/>
                           </a:solidFill>
                         </a:rPr>
-                        <a:t>3,0</a:t>
+                        <a:t>3,1</a:t>
                       </a:r>
                       <a:endParaRPr lang="en-US" sz="1200" dirty="0"/>
                     </a:p>
@@ -30619,7 +30711,7 @@
                             <a:schemeClr val="tx1"/>
                           </a:solidFill>
                         </a:rPr>
-                        <a:t>15,5</a:t>
+                        <a:t>15,6</a:t>
                       </a:r>
                       <a:endParaRPr lang="en-US" sz="1200" dirty="0"/>
                     </a:p>
@@ -30680,7 +30772,7 @@
                             <a:schemeClr val="tx1"/>
                           </a:solidFill>
                         </a:rPr>
-                        <a:t>12,5</a:t>
+                        <a:t>12,6</a:t>
                       </a:r>
                       <a:endParaRPr lang="en-US" sz="1200" dirty="0"/>
                     </a:p>
@@ -31170,7 +31262,7 @@
                             <a:schemeClr val="tx1"/>
                           </a:solidFill>
                         </a:rPr>
-                        <a:t>52,0</a:t>
+                        <a:t>51,9</a:t>
                       </a:r>
                       <a:endParaRPr lang="en-US" sz="1200" dirty="0"/>
                     </a:p>
@@ -31231,7 +31323,7 @@
                             <a:schemeClr val="tx1"/>
                           </a:solidFill>
                         </a:rPr>
-                        <a:t>52,6</a:t>
+                        <a:t>52,5</a:t>
                       </a:r>
                       <a:endParaRPr lang="en-US" sz="1200" dirty="0"/>
                     </a:p>
@@ -31292,7 +31384,7 @@
                             <a:schemeClr val="tx1"/>
                           </a:solidFill>
                         </a:rPr>
-                        <a:t>53,1</a:t>
+                        <a:t>53,0</a:t>
                       </a:r>
                       <a:endParaRPr lang="en-US" sz="1200" dirty="0"/>
                     </a:p>
@@ -31353,7 +31445,7 @@
                             <a:schemeClr val="tx1"/>
                           </a:solidFill>
                         </a:rPr>
-                        <a:t>53,5</a:t>
+                        <a:t>53,4</a:t>
                       </a:r>
                       <a:endParaRPr lang="en-US" sz="1200" dirty="0"/>
                     </a:p>
@@ -31477,7 +31569,7 @@
                             <a:schemeClr val="tx1"/>
                           </a:solidFill>
                         </a:rPr>
-                        <a:t>0,7</a:t>
+                        <a:t>0,8</a:t>
                       </a:r>
                       <a:endParaRPr lang="en-US" sz="1200" dirty="0"/>
                     </a:p>
@@ -31843,7 +31935,7 @@
                             <a:schemeClr val="tx1"/>
                           </a:solidFill>
                         </a:rPr>
-                        <a:t>0,3</a:t>
+                        <a:t>0,2</a:t>
                       </a:r>
                       <a:endParaRPr lang="en-US" sz="1200" dirty="0"/>
                     </a:p>
@@ -33804,7 +33896,7 @@
                 <a:ea typeface="Cambria" pitchFamily="34" charset="-122"/>
                 <a:cs typeface="Cambria" pitchFamily="34" charset="-120"/>
               </a:rPr>
-              <a:t>Зовнішнє середовище стало проінфляційним: нафта ≈$100, ЄЦБ підвищує ставку</a:t>
+              <a:t>Зовнішнє середовище стало проінфляційним: нафта ≈$105, ЄЦБ підвищує ставку</a:t>
             </a:r>
             <a:endParaRPr lang="en-US" sz="2600" dirty="0"/>
           </a:p>
@@ -34061,7 +34153,7 @@
                   <a:schemeClr val="tx1"/>
                 </a:solidFill>
               </a:rPr>
-              <a:t>Війна на Близькому Сході (з 28.02.2026): Brent — пік $117 у квітні, $102 у вересні (НБУ закладав $80–85); ф'ючерси — $83 наприкінці 2027</a:t>
+              <a:t>Війна на Близькому Сході (з 28.02.2026): Brent — пік $117 у квітні, $102 у вересні, ≈$105 у жовтні (НБУ закладав $80–85); ф'ючерси — $87 наприкінці 2027</a:t>
             </a:r>
             <a:endParaRPr lang="en-US" sz="1300" dirty="0"/>
           </a:p>
@@ -34885,7 +34977,7 @@
                 <a:ea typeface="Cambria" pitchFamily="34" charset="-122"/>
                 <a:cs typeface="Cambria" pitchFamily="34" charset="-120"/>
               </a:rPr>
-              <a:t>Очікування підвищені, реальна ставка ≈7% — гривневі активи поки привабливі</a:t>
+              <a:t>Очікування підвищені, а реальна ставка після вересня знизилася до ≈6%</a:t>
             </a:r>
             <a:endParaRPr lang="en-US" sz="2600" dirty="0"/>
           </a:p>
@@ -35113,7 +35205,7 @@
                   <a:schemeClr val="tx1"/>
                 </a:solidFill>
               </a:rPr>
-              <a:t>Очікування домогосподарств 10–14% — вище фактичної інфляції; аналітики підвищили до 7,9%</a:t>
+              <a:t>Очікування домогосподарств 10–14% — вище фактичної інфляції; аналітики підвищили до 7,9% (липень)</a:t>
             </a:r>
             <a:endParaRPr lang="en-US" sz="1300" dirty="0"/>
           </a:p>
@@ -35205,7 +35297,7 @@
                   <a:schemeClr val="tx1"/>
                 </a:solidFill>
               </a:rPr>
-              <a:t>Реальна облікова ставка ≈7 в. п. (ex post); депозитні ставки реагують із лагом</a:t>
+              <a:t>Реальна облікова ставка ≈6,0% (16% − 10,0%) проти ≈7,4% місяцем раніше: інфляція «з'їла» вересневе підвищення; депозитні ставки реагують із лагом</a:t>
             </a:r>
             <a:endParaRPr lang="en-US" sz="1300" dirty="0"/>
           </a:p>

--- a/presentation/NBU_University_Challenge_2026.pptx
+++ b/presentation/NBU_University_Challenge_2026.pptx
@@ -142,13 +142,13 @@
   <p:extLst>
     <p:ext uri="{521415D9-36F7-43E2-AB2F-B90AF26B5E84}">
       <p14:sectionLst xmlns:p14="http://schemas.microsoft.com/office/powerpoint/2010/main">
-        <p14:section name="Вступ" id="{5e3d633c-7805-c495-aed3-f30d20130a56}">
+        <p14:section name="Вступ" id="{887e67ab-2a8c-4b64-706a-41bac988dced}">
           <p14:sldIdLst>
             <p14:sldId id="256"/>
             <p14:sldId id="257"/>
           </p14:sldIdLst>
         </p14:section>
-        <p14:section name="Огляд" id="{8f80531e-ff22-825a-84bd-4b0710a770b5}">
+        <p14:section name="Огляд" id="{174ff0c7-056a-4777-9c63-57f0fbc816c3}">
           <p14:sldIdLst>
             <p14:sldId id="258"/>
             <p14:sldId id="259"/>
@@ -160,7 +160,7 @@
             <p14:sldId id="265"/>
           </p14:sldIdLst>
         </p14:section>
-        <p14:section name="Прогноз" id="{59a0e602-cffd-7e60-fe02-1cb270535162}">
+        <p14:section name="Прогноз" id="{71d4bdcd-d2a2-84e9-76cf-2c263835ce60}">
           <p14:sldIdLst>
             <p14:sldId id="266"/>
             <p14:sldId id="267"/>
@@ -174,7 +174,7 @@
             <p14:sldId id="275"/>
           </p14:sldIdLst>
         </p14:section>
-        <p14:section name="Рекомендації" id="{fb0d92d0-d307-0087-8b90-339077251578}">
+        <p14:section name="Рекомендації" id="{ef552b0c-e924-d8b7-8a43-257da34f2713}">
           <p14:sldIdLst>
             <p14:sldId id="276"/>
             <p14:sldId id="277"/>
@@ -186,7 +186,7 @@
             <p14:sldId id="283"/>
           </p14:sldIdLst>
         </p14:section>
-        <p14:section name="Додатки" id="{1ef0dfe4-2b81-7441-5dec-4ce2d34ff554}">
+        <p14:section name="Додатки" id="{55447dfe-07a7-9791-5fde-4438fd1f7e0f}">
           <p14:sldIdLst>
             <p14:sldId id="284"/>
             <p14:sldId id="285"/>
@@ -866,7 +866,7 @@
           <a:p>
             <a:r>
               <a:rPr lang="en-US" dirty="0"/>
-              <a:t>Тепер — прогноз. Ми взяли квартальну прогнозну модель НБУ, переписали її на Python і розширили. Дані завантажуються автоматично, фільтр Калмана оцінює розриви й тренди, далі — прогноз із судженнями й аналіз політики. Той самий файл моделі ми проганяємо в MATLAB з IRIS: розбіжність — у п'ятому знаку, а графіки сценаріїв у презентації побудовані в MATLAB. На історії модель прогнозує інфляцію значно точніше за наївний прогноз.</a:t>
+              <a:t>Тепер — прогноз. Ми взяли квартальну прогнозну модель НБУ, переписали її на Python і розширили. Дані завантажуються автоматично, фільтр Калмана оцінює розриви й тренди, далі — прогноз із судженнями й аналіз політики. Той самий файл моделі ми проганяємо в MATLAB з IRIS: розбіжність — у п'ятому знаку, а графіки сценаріїв у презентації побудовані в MATLAB.</a:t>
             </a:r>
             <a:endParaRPr lang="en-US" dirty="0"/>
           </a:p>
@@ -1218,7 +1218,7 @@
           <a:p>
             <a:r>
               <a:rPr lang="en-US" dirty="0"/>
-              <a:t>Базовий прогноз. Нагадаю: ціль НБУ — 5% без діапазону відхилень, і повернути інфляцію до неї треба на горизонті до трьох років. Інфляція досягне піку — близько 11,3% — на початку 2027 року, знизиться до 6,7% наприкінці 2027-го, у 2028-му тимчасово опуститься до 4,0% через дешевшу нафту і з третьому кварталі 2029 року стабілізується на 5%. Ставка — 17% до середини 2027 року, далі поступово знижується до 10,3% наприкінці 2028-го. Віяло показує, наскільки велика невизначеність: з імовірністю 70% інфляція наприкінці 2027 року буде між 3 і 10%.</a:t>
+              <a:t>Базовий прогноз. Нагадаю: ціль НБУ — 5% без діапазону відхилень, і повернути інфляцію до неї треба на горизонті до трьох років. У середньому за квартал інфляція досягне піку — близько 11,3% — на початку 2027 року; у місячному вимірі це близько 12% у грудні. Далі вона знизиться до 7,2% у четвертому кварталі 2027-го, у 2028-му коливатиметься біля 5% — до 4,5% у мінімумі — і з другому кварталі 2029 року стабілізується на 5%. Ставка — 17% до середини 2027 року, далі поступово знижується до 10,1% наприкінці 2028-го. Невизначеність велика — це показує віяло.</a:t>
             </a:r>
             <a:endParaRPr lang="en-US" dirty="0"/>
           </a:p>
@@ -1306,7 +1306,7 @@
           <a:p>
             <a:r>
               <a:rPr lang="en-US" dirty="0"/>
-              <a:t>Важлива відмінність від НБУ — базова інфляція. Ми вважаємо, що вона буде стійкішою: 5,4% наприкінці 2027 року проти 5,1% у НБУ. Причина — перегрітий ринок праці, дорожчі послуги й наслідки атак. Загальна інфляція при цьому близька до НБУ: тарифи й акцизи додають близько 1,7 пункта на рік, а дешевша нафта частково це компенсує. У 2028 році базова інфляція опускається нижче цілі — як і в НБУ. Висновок: підвищити ставку зараз, щоб швидше пом'якшити її пізніше.</a:t>
+              <a:t>Важлива відмінність від НБУ — базова інфляція. Ми вважаємо, що вона буде стійкішою: 5,9% наприкінці 2027 року проти 5,1% у НБУ. Причина — перегрітий ринок праці, дорожчі послуги й наслідки атак. Загальна інфляція при цьому близька до НБУ: тарифи й акцизи додають близько 1,7 пункта на рік, а дешевша нафта частково це компенсує. Висновок: підвищити ставку зараз, щоб швидше пом'якшити її пізніше.</a:t>
             </a:r>
             <a:endParaRPr lang="en-US" dirty="0"/>
           </a:p>
@@ -1394,7 +1394,7 @@
           <a:p>
             <a:r>
               <a:rPr lang="en-US" dirty="0"/>
-              <a:t>Попит ми бачимо слабшим, ніж НБУ: фактично нульове зростання цього року, 0,7% у 2027-му і 0,8% у 2028-му проти 1,8, 2,8 і 3,0% у НБУ. Причини — слабкий третій квартал, атаки, блокада портів і дефіцит кадрів. Реальна ставка зараз близько 6% — трохи нижче нейтральної. За 17% вона зросте до 9% у другому кварталі 2027-го сама собою, бо інфляція знижуватиметься, — тому одного рішучого кроку достатньо, різкішого посилення не потрібно.</a:t>
+              <a:t>Попит ми бачимо слабшим, ніж НБУ: фактично нульове зростання цього року, 0,8% у 2027-му і 1,0% у 2028-му проти 1,8, 2,8 і 3,0% у НБУ. Причини — слабкий третій квартал, атаки, блокада портів і дефіцит кадрів. У моделі реальна ставка зараз близька до нейтральної. За 17% вона зросте до 8% у другому кварталі 2027-го сама собою, бо інфляція знижуватиметься, — тому одного рішучого кроку достатньо, різкішого посилення не потрібно.</a:t>
             </a:r>
             <a:endParaRPr lang="en-US" dirty="0"/>
           </a:p>
@@ -1482,7 +1482,7 @@
           <a:p>
             <a:r>
               <a:rPr lang="en-US" dirty="0"/>
-              <a:t>Ми розглянули чотири ризикові сценарії, розраховані в MATLAB. Найнебезпечніший — дефіцит фінансування: якщо допомога затримається, гривня буде приблизно на 6% слабшою, інфляція зросте до 13,3%, а ставку доведеться підняти до 19,6%. Важка зима з ударами по енергетиці підніме інфляцію до 12,7% і майже зупинить зростання ВВП. Натомість нафта по 120 доларів додає лише 0,4 пункта до піку інфляції, і ставка майже не реагує — це шок першого раунду. Висновок: головний ризик для інфляції — курс і резерви.</a:t>
+              <a:t>Ми розглянули чотири ризикові сценарії, розраховані в MATLAB. Найнебезпечніший — дефіцит фінансування: якщо допомога затримається, гривня буде приблизно на 6% слабшою, інфляція зросте до 13,3%, а ставку доведеться підняти до 19,3%. Важка зима з ударами по енергетиці підніме інфляцію до 12,8% і майже зупинить зростання ВВП. Натомість нафта по 120 доларів додає лише 0,4 пункта до піку інфляції, і ставка майже не реагує — це шок першого раунду. Висновок: головний ризик для інфляції — курс і резерви.</a:t>
             </a:r>
             <a:endParaRPr lang="en-US" dirty="0"/>
           </a:p>
@@ -1570,7 +1570,7 @@
           <a:p>
             <a:r>
               <a:rPr lang="en-US" dirty="0"/>
-              <a:t>Почнемо з головного. Ми пропонуємо три рішення, які працюють як єдиний пакет. Перше — підвищити облікову ставку на 1 пункт, до 17%, і утримувати її щонайменше до середини 2027 року: у вересні інфляція сягнула 10%, у грудні буде близько 12%, а ризики зміщені вгору. Друге — керована гнучкість курсу: допускати поступове послаблення гривні замість того, щоб витрачати близько 5 мільярдів доларів резервів щомісяця. Третє — поставити на паузу наступні кроки валютної лібералізації, доки не відновляться резерви. За такої політики інфляція знизиться до 6,7% у четвертому кварталі 2027 року і повернеться до цілі 5% у третьому кварталі 2029 року — у межах трирічного горизонту НБУ.</a:t>
+              <a:t>Почнемо з головного. Ми пропонуємо три рішення, які працюють як єдиний пакет. Перше — підвищити облікову ставку на 1 пункт, до 17%, і утримувати її щонайменше до середини 2027 року: у вересні інфляція сягнула 10%, у грудні буде близько 12%. Друге — не заморожувати курс: з червня гривня стоїть біля 45 за долар, а курс має поглинати шоки. І обмежити обсяги тендерів депсертифікатів, щоб підвищення дійшло до депозитів. Третє — поставити на паузу наступні кроки валютної лібералізації, доки не відновляться резерви. За такої політики інфляція знизиться до 7,2% у четвертому кварталі 2027 року і стабілізується на 5% у другому кварталі 2029 року — у межах трирічного горизонту НБУ.</a:t>
             </a:r>
             <a:endParaRPr lang="en-US" dirty="0"/>
           </a:p>
@@ -1922,7 +1922,7 @@
           <a:p>
             <a:r>
               <a:rPr lang="en-US" dirty="0"/>
-              <a:t>Ми порівняли чотири варіанти рішення — від утримання 16% до підвищення до 17,5%. У кожному ставка утримується до середини 2027 року, а далі знижується так, щоб інфляція повернулася саме до 5%. Механічне правило Тейлора для цього не годиться: з ним інфляція наприкінці 2029 року була б лише 4,4%. Критерій — втрати: відхилення інфляції від цілі, розрив ВВП і різкі зміни ставки. Вища ставка швидше знижує інфляцію, але коштує спаду й різкіших змін ставки, тож найменші втрати — у діапазоні 17–17,5%. Якщо не реагувати на перший раунд підвищення адмінцін, оптимум — 16,9%. Тому — 17%.</a:t>
+              <a:t>Ми порівняли чотири варіанти рішення — від утримання 16% до підвищення до 17,5%. У кожному ставка утримується до середини 2027 року, а далі знижується так, щоб інфляція повернулася саме до 5%. Критерій — втрати: відхилення інфляції від цілі, розрив ВВП і різкі зміни ставки. Адмінціни ми враховуємо наполовину: вони ростуть щороку, але це перший раунд. Утримання 16% — найгірший варіант за будь-яких ваг. Оптимальна траєкторія моделі починається з 17,1%, але між 16,5 і 17,5% різниця втрат мала. Тому крок у пункт ми обираємо за ризиками: якщо гривня слабшатиме, як чекає ринок, інфляція наприкінці 2027 року буде близько 11%, а не 7.</a:t>
             </a:r>
             <a:endParaRPr lang="en-US" dirty="0"/>
           </a:p>
@@ -2010,7 +2010,7 @@
           <a:p>
             <a:r>
               <a:rPr lang="en-US" dirty="0"/>
-              <a:t>Тому перша рекомендація — підвищити облікову ставку до 17%. Чому підвищити: інфляція в грудні сягне близько 12%, базова інфляція прискорюється, резерви знижуються, а гнучкіший курс потребує сильного якоря для очікувань. Чому не більше: економіка слабка, а шоки здебільшого з боку пропозиції. Орієнтир: утримувати 17% щонайменше до середини 2027 року, далі знижувати — до близько 15,5% наприкінці 2027-го і 10,5% наприкінці 2028-го. Якщо резерви впадуть нижче 43 мільярдів — готові підвищувати далі; якщо базова інфляція опуститься нижче 7% — знижувати швидше.</a:t>
+              <a:t>Тому перша рекомендація — підвищити облікову ставку до 17%. Чому підвищити: інфляція в грудні сягне близько 12%, базова інфляція прискорюється, курсові ризики високі, а гнучкіший курс потребує сильного якоря для очікувань. Чому не більше: економіка слабка, а шоки здебільшого з боку пропозиції. Орієнтир: утримувати 17% щонайменше до середини 2027 року, далі знижувати — до близько 14,5% наприкінці 2027-го і 10,0% наприкінці 2028-го. Якщо тиск на курс почне розхитувати очікування — готові підвищувати далі; якщо базова інфляція опуститься нижче 7% — знижувати швидше.</a:t>
             </a:r>
             <a:endParaRPr lang="en-US" dirty="0"/>
           </a:p>
@@ -2098,7 +2098,7 @@
           <a:p>
             <a:r>
               <a:rPr lang="en-US" dirty="0"/>
-              <a:t>Друга рекомендація — щодо курсу. НБУ продає близько 5,0 мільярда доларів на місяць, а надходить близько 3,7. Щоб вийти на липневий прогноз НБУ — 69,7 мільярда на кінець року, — потрібно близько 13 мільярдів щомісяця. Якщо ж усе залишиться як влітку, резерви становитимуть 43 мільярди. Тому ми пропонуємо керовану гнучкість: допускати послаблення гривні до 4% на рік, а інтервенції використовувати лише для згладжування. За ставки 17% модель показує фактичне послаблення лише близько 1% на рік, хоча ринок чекає більшого. Захищати певний рівень курсу — прямий шлях до втрати резервів.</a:t>
+              <a:t>Друга рекомендація — щодо курсу. НБУ продає близько 5,0 мільярда доларів на місяць, а надходить близько 3,7. Якщо так і залишиться, на кінець року резерви становитимуть 43 мільярди. Але продаж валюти здебільшого «доносить» допомогу до ринку, тож резерви визначає її ритм, а не курс. Наша рекомендація щодо курсу інша: не заморожувати його. З червня гривня стоїть біля 44,7 за долар, хоча за рік до того послабилася на 8%. Курс має поглинати шоки, а НБУ — лише згладжувати коливання.</a:t>
             </a:r>
             <a:endParaRPr lang="en-US" dirty="0"/>
           </a:p>
@@ -2274,7 +2274,7 @@
           <a:p>
             <a:r>
               <a:rPr lang="en-US" dirty="0"/>
-              <a:t>Усе це має пояснити комунікація. Ключова формула — «ставка — якір, курс — амортизатор»: НБУ підвищує ставку рішуче, гнучкий курс захищає резерви, а гривневі заощадження залишаються вигіднішими за валютні. Чого уникати — обіцянок конкретного курсу і сигналів про швидке зниження ставки. На слайді — наш проєкт пресрелізу.</a:t>
+              <a:t>Усе це має пояснити комунікація. Ключова формула — «ставка — якір, курс — амортизатор»: НБУ підвищує ставку рішуче, курс не заморожений, а обмежені обсяги депсертифікатів доносять підвищення до депозитних ставок. Чого уникати — обіцянок конкретного курсу і сигналів про швидке зниження ставки. На слайді — наш проєкт пресрелізу.</a:t>
             </a:r>
             <a:endParaRPr lang="en-US" dirty="0"/>
           </a:p>
@@ -2362,7 +2362,7 @@
           <a:p>
             <a:r>
               <a:rPr lang="en-US" dirty="0"/>
-              <a:t>Підсумуємо. Перше — підвищити облікову ставку до 17% і утримувати щонайменше до середини 2027 року. Друге — керована гнучкість курсу замість витрачання резервів. Третє — пауза в лібералізації валютних обмежень. За такої політики інфляція повернеться до цілі 5% у третьому кварталі 2029 року. Дякуємо за увагу! Будемо раді відповісти на ваші запитання.</a:t>
+              <a:t>Підсумуємо. Перше — підвищити облікову ставку до 17% і утримувати щонайменше до середини 2027 року. Друге — не заморожувати курс і обмежити обсяги депсертифікатів. Третє — пауза в лібералізації валютних обмежень. За такої політики інфляція стабілізується на 5% у другому кварталі 2029 року. Дякуємо за увагу! Будемо раді відповісти на ваші запитання.</a:t>
             </a:r>
             <a:endParaRPr lang="en-US" dirty="0"/>
           </a:p>
@@ -3418,7 +3418,7 @@
           <a:p>
             <a:r>
               <a:rPr lang="en-US" dirty="0"/>
-              <a:t>Інфляційні очікування підвищені: домогосподарства чекають 10–14% — більше, ніж фактична інфляція, а фінансові аналітики підвищили свої очікування до 7,9%. А реальна облікова ставка після вересневого стрибка цін знизилася з 7 до 6%: інфляція «з'їла» вересневе підвищення. Депозитні ставки реагують із запізненням, тож ризик розбалансування очікувань реальний.</a:t>
+              <a:t>Інфляційні очікування підвищені: домогосподарства чекають 10–14% — більше, ніж фактична інфляція, а фінансові аналітики підвищили свої очікування до 7,9%. Реальна ставка від очікувань аналітиків — близько 8%, але від фактичної інфляції вона знизилася з 7 до 6%. А великі банки майже не підняли депозитні ставки, тож трансмісія слабка, і ризик розбалансування очікувань реальний.</a:t>
             </a:r>
             <a:endParaRPr lang="en-US" dirty="0"/>
           </a:p>
@@ -3506,7 +3506,7 @@
           <a:p>
             <a:r>
               <a:rPr lang="en-US" dirty="0"/>
-              <a:t>Економіка тим часом сповільнюється. ВВП у другому кварталі зріс лише на 0,4% за рік, а у третьому, за оцінкою КМП, — суттєво гірше прогнозу НБУ. Атаки на енергетику, логістику й порти забирають близько 0,9 пункта зростання. Водночас ринок праці перегрітий: через дефіцит кадрів номінальні зарплати зростають на 25%, реальні — на 17%. Тож навіть за слабкого ВВП тиск на ціни послуг зберігається.</a:t>
+              <a:t>Економіка тим часом сповільнюється. ВВП у другому кварталі зріс лише на 0,4% за рік, а у третьому, за оцінкою КМП, — суттєво гірше прогнозу НБУ. Атаки на енергетику, логістику й порти забирають близько 0,9 пункта зростання. Водночас ринок праці перегрітий: через дефіцит кадрів номінальні зарплати цього року зростають на 21–25%. Тож навіть за слабкого ВВП тиск на ціни послуг зберігається.</a:t>
             </a:r>
             <a:endParaRPr lang="en-US" dirty="0"/>
           </a:p>
@@ -3594,7 +3594,7 @@
           <a:p>
             <a:r>
               <a:rPr lang="en-US" dirty="0"/>
-              <a:t>Найгостріша проблема — валютний ринок. НБУ продає в середньому близько 5,0 мільярда доларів на місяць, у вересні — рекордні 5,5 мільярда. Резерви за два місяці скоротилися з 51,2 до 47,1 мільярда, тоді як НБУ очікував 53,8. Курс стабільний — близько 51,5 гривні за євро, — але ця стабільність купується резервами.</a:t>
+              <a:t>Найгостріша проблема — валютний ринок. НБУ продає в середньому близько 5,0 мільярда доларів на місяць, у вересні — рекордні 5,5 мільярда. Резерви за два місяці скоротилися з 51,2 до 47,1 мільярда, тоді як НБУ очікував 53,8. Але важливо: продаж валюти здебільшого «доносить» допомогу на ринок — у вересні уряд конвертував 3,81 мільярда оборонного траншу. Тож резерви падають через ритм допомоги. А курс із червня фактично заморожений — близько 44,7 гривні за долар.</a:t>
             </a:r>
             <a:endParaRPr lang="en-US" dirty="0"/>
           </a:p>
@@ -5982,7 +5982,7 @@
                   <a:schemeClr val="tx1"/>
                 </a:solidFill>
               </a:rPr>
-              <a:t>Бюджетна декларація 2027–2029: дефіцит держбюджету 17,7% ВВП у 2027 і 11,1% у 2028; уряд закладає інфляцію 8,9% на грудень 2027 (НБУ — 6,9%, ми — 6,7% у IV кв.)</a:t>
+              <a:t>Бюджетна декларація 2027–2029: дефіцит держбюджету 17,7% ВВП у 2027 і 11,1% у 2028; уряд закладає інфляцію 8,9% на грудень 2027 (НБУ — 6,9%, ми — 7,2% у IV кв.)</a:t>
             </a:r>
             <a:endParaRPr lang="en-US" sz="1300" dirty="0"/>
           </a:p>
@@ -12481,7 +12481,7 @@
                 <a:ea typeface="Cambria" pitchFamily="34" charset="-122"/>
                 <a:cs typeface="Cambria" pitchFamily="34" charset="-120"/>
               </a:rPr>
-              <a:t>Інфляція досягне піку на початку 2027 і повернеться до цілі 5% у 2029 — у межах горизонту політики</a:t>
+              <a:t>Інфляція досягне піку на початку 2027 і стабілізується на 5% у 2029 — у межах горизонту політики</a:t>
             </a:r>
             <a:endParaRPr lang="en-US" sz="2600" dirty="0"/>
           </a:p>
@@ -12680,7 +12680,7 @@
                   <a:schemeClr val="tx1"/>
                 </a:solidFill>
               </a:rPr>
-              <a:t>Пік ≈11,3% у I кв. 2027; 6,7% у IV кв. 2027 (НБУ: 6,9% у грудні); у 2028 — тимчасово ≈4,0% (дешевша нафта); 5% — з III кв. 2029</a:t>
+              <a:t>Пік — I кв. 2027: ≈11,3% у середньому за квартал (у грудні — ≈12,1% за місяць); 7,2% у IV кв. 2027 (НБУ: 6,9% у грудні); ≈5% уже в II кв. 2028, у 2028 — тимчасово ≈4,5%; стабільно 5% — з II кв. 2029</a:t>
             </a:r>
             <a:endParaRPr lang="en-US" sz="1300" dirty="0"/>
           </a:p>
@@ -12772,7 +12772,7 @@
                   <a:schemeClr val="tx1"/>
                 </a:solidFill>
               </a:rPr>
-              <a:t>Ставка: 17% до середини 2027 → 15,6% наприкінці 2027 → 10,3% — 2028 → 9,0% — 2029</a:t>
+              <a:t>Ставка: 17% до середини 2027 → 14,7% наприкінці 2027 → 10,1% — 2028 → 9,0% — 2029</a:t>
             </a:r>
             <a:endParaRPr lang="en-US" sz="1300" dirty="0"/>
           </a:p>
@@ -12864,7 +12864,7 @@
                   <a:schemeClr val="tx1"/>
                 </a:solidFill>
               </a:rPr>
-              <a:t>Невизначеність велика: з імовірністю 70% інфляція наприкінці 2027 — від 3,2 до 10,3%</a:t>
+              <a:t>Невизначеність велика: з імовірністю 70% інфляція наприкінці 2027 — від 3,6 до 10,8%</a:t>
             </a:r>
             <a:endParaRPr lang="en-US" sz="1300" dirty="0"/>
           </a:p>
@@ -12978,7 +12978,7 @@
                 <a:ea typeface="Cambria" pitchFamily="34" charset="-122"/>
                 <a:cs typeface="Cambria" pitchFamily="34" charset="-120"/>
               </a:rPr>
-              <a:t>Базова інфляція в 2027 стійкіша, ніж у НБУ: 5,4% наприкінці року проти 5,1%</a:t>
+              <a:t>Базова інфляція в 2027 стійкіша, ніж у НБУ: 5,9% наприкінці року проти 5,1%</a:t>
             </a:r>
             <a:endParaRPr lang="en-US" sz="2600" dirty="0"/>
           </a:p>
@@ -13125,7 +13125,7 @@
                   <a:schemeClr val="tx1"/>
                 </a:solidFill>
               </a:rPr>
-              <a:t>Зарплати +25%, дорожчі послуги, наслідки атак — базова інфляція знижується повільніше, ніж очікує НБУ</a:t>
+              <a:t>Зарплати +21–25%, дорожчі послуги, наслідки атак — базова інфляція знижується повільніше, ніж очікує НБУ</a:t>
             </a:r>
             <a:endParaRPr lang="en-US" sz="1400" dirty="0"/>
           </a:p>
@@ -13143,7 +13143,7 @@
                   <a:schemeClr val="tx1"/>
                 </a:solidFill>
               </a:rPr>
-              <a:t>Загальна: 6,7% у IV кв. 2027 (НБУ 6,9% у грудні) — тарифи й акцизи додають ≈1,7 в. п. на рік, дешевша нафта (ф'ючерси) — віднімає</a:t>
+              <a:t>Загальна: 7,2% у IV кв. 2027 (НБУ 6,9% у грудні) — тарифи й акцизи додають ≈1,7 в. п. на рік, дешевша нафта (ф'ючерси) — віднімає</a:t>
             </a:r>
             <a:endParaRPr lang="en-US" sz="1400" dirty="0"/>
           </a:p>
@@ -13161,7 +13161,7 @@
                   <a:schemeClr val="tx1"/>
                 </a:solidFill>
               </a:rPr>
-              <a:t>2028: базова 3,0% (НБУ 3,3%) — слабкий попит → простір для зниження ставки з II пів. 2027</a:t>
+              <a:t>2028: базова 3,3% (НБУ 3,3%) — слабкий попит → простір для зниження ставки з II пів. 2027</a:t>
             </a:r>
             <a:endParaRPr lang="en-US" sz="1400" dirty="0"/>
           </a:p>
@@ -13293,7 +13293,7 @@
                 <a:ea typeface="Cambria" pitchFamily="34" charset="-122"/>
                 <a:cs typeface="Cambria" pitchFamily="34" charset="-120"/>
               </a:rPr>
-              <a:t>Ми бачимо слабший попит, ніж НБУ: розрив ВВП у 2027 ≈0,3% проти 1,4%</a:t>
+              <a:t>Ми бачимо слабший попит, ніж НБУ: розрив ВВП у 2027 ≈0,4% проти 1,4%</a:t>
             </a:r>
             <a:endParaRPr lang="en-US" sz="2600" dirty="0"/>
           </a:p>
@@ -13493,7 +13493,7 @@
                   <a:schemeClr val="tx1"/>
                 </a:solidFill>
               </a:rPr>
-              <a:t>ВВП: 0,0% / 0,7% / 0,8% у 2026–2028 (НБУ: 1,8 / 2,8 / 3,0%)</a:t>
+              <a:t>ВВП: 0,0% / 0,8% / 1,0% у 2026–2028 (НБУ: 1,8 / 2,8 / 3,0%)</a:t>
             </a:r>
             <a:endParaRPr lang="en-US" sz="1400" dirty="0"/>
           </a:p>
@@ -13529,7 +13529,7 @@
                   <a:schemeClr val="tx1"/>
                 </a:solidFill>
               </a:rPr>
-              <a:t>Реальна ставка зараз ≈6,2% — нижче нейтральної (≈6,6%); за 17% вона зросте до ≈8,7% у II кв. 2027: політика стає стримувальною в міру зниження інфляції</a:t>
+              <a:t>У моделі реальна ставка зараз ≈6,2% — близько нейтральної (≈6,6%); за 17% вона зросте до ≈8,4% у II кв. 2027: політика стає стримувальною в міру зниження інфляції</a:t>
             </a:r>
             <a:endParaRPr lang="en-US" sz="1400" dirty="0"/>
           </a:p>
@@ -14320,7 +14320,7 @@
                             <a:schemeClr val="tx1"/>
                           </a:solidFill>
                         </a:rPr>
-                        <a:t>6,7</a:t>
+                        <a:t>7,2</a:t>
                       </a:r>
                       <a:endParaRPr lang="en-US" sz="1200" dirty="0"/>
                     </a:p>
@@ -14442,7 +14442,7 @@
                             <a:schemeClr val="tx1"/>
                           </a:solidFill>
                         </a:rPr>
-                        <a:t>51,7</a:t>
+                        <a:t>51,9</a:t>
                       </a:r>
                       <a:endParaRPr lang="en-US" sz="1200" dirty="0"/>
                     </a:p>
@@ -14503,7 +14503,7 @@
                             <a:schemeClr val="tx1"/>
                           </a:solidFill>
                         </a:rPr>
-                        <a:t>0,7</a:t>
+                        <a:t>0,8</a:t>
                       </a:r>
                       <a:endParaRPr lang="en-US" sz="1200" dirty="0"/>
                     </a:p>
@@ -14627,7 +14627,7 @@
                             <a:schemeClr val="tx1"/>
                           </a:solidFill>
                         </a:rPr>
-                        <a:t>12,7</a:t>
+                        <a:t>12,8</a:t>
                       </a:r>
                       <a:endParaRPr lang="en-US" sz="1200" dirty="0"/>
                     </a:p>
@@ -14688,7 +14688,7 @@
                             <a:schemeClr val="tx1"/>
                           </a:solidFill>
                         </a:rPr>
-                        <a:t>8,5</a:t>
+                        <a:t>9,0</a:t>
                       </a:r>
                       <a:endParaRPr lang="en-US" sz="1200" dirty="0"/>
                     </a:p>
@@ -14810,7 +14810,7 @@
                             <a:schemeClr val="tx1"/>
                           </a:solidFill>
                         </a:rPr>
-                        <a:t>51,9</a:t>
+                        <a:t>52,1</a:t>
                       </a:r>
                       <a:endParaRPr lang="en-US" sz="1200" dirty="0"/>
                     </a:p>
@@ -14871,7 +14871,7 @@
                             <a:schemeClr val="tx1"/>
                           </a:solidFill>
                         </a:rPr>
-                        <a:t>−0,2</a:t>
+                        <a:t>−0,1</a:t>
                       </a:r>
                       <a:endParaRPr lang="en-US" sz="1200" dirty="0"/>
                     </a:p>
@@ -15056,7 +15056,7 @@
                             <a:schemeClr val="tx1"/>
                           </a:solidFill>
                         </a:rPr>
-                        <a:t>10,5</a:t>
+                        <a:t>10,9</a:t>
                       </a:r>
                       <a:endParaRPr lang="en-US" sz="1200" dirty="0"/>
                     </a:p>
@@ -15117,7 +15117,7 @@
                             <a:schemeClr val="tx1"/>
                           </a:solidFill>
                         </a:rPr>
-                        <a:t>19,6</a:t>
+                        <a:t>19,3</a:t>
                       </a:r>
                       <a:endParaRPr lang="en-US" sz="1200" dirty="0"/>
                     </a:p>
@@ -15178,7 +15178,7 @@
                             <a:schemeClr val="tx1"/>
                           </a:solidFill>
                         </a:rPr>
-                        <a:t>55,0</a:t>
+                        <a:t>55,2</a:t>
                       </a:r>
                       <a:endParaRPr lang="en-US" sz="1200" dirty="0"/>
                     </a:p>
@@ -15239,7 +15239,7 @@
                             <a:schemeClr val="tx1"/>
                           </a:solidFill>
                         </a:rPr>
-                        <a:t>0,4</a:t>
+                        <a:t>0,5</a:t>
                       </a:r>
                       <a:endParaRPr lang="en-US" sz="1200" dirty="0"/>
                     </a:p>
@@ -15424,7 +15424,7 @@
                             <a:schemeClr val="tx1"/>
                           </a:solidFill>
                         </a:rPr>
-                        <a:t>5,5</a:t>
+                        <a:t>5,9</a:t>
                       </a:r>
                       <a:endParaRPr lang="en-US" sz="1200" dirty="0"/>
                     </a:p>
@@ -15546,7 +15546,7 @@
                             <a:schemeClr val="tx1"/>
                           </a:solidFill>
                         </a:rPr>
-                        <a:t>51,2</a:t>
+                        <a:t>51,3</a:t>
                       </a:r>
                       <a:endParaRPr lang="en-US" sz="1200" dirty="0"/>
                     </a:p>
@@ -15607,7 +15607,7 @@
                             <a:schemeClr val="tx1"/>
                           </a:solidFill>
                         </a:rPr>
-                        <a:t>1,6</a:t>
+                        <a:t>1,7</a:t>
                       </a:r>
                       <a:endParaRPr lang="en-US" sz="1200" dirty="0"/>
                     </a:p>
@@ -15731,7 +15731,7 @@
                             <a:schemeClr val="tx1"/>
                           </a:solidFill>
                         </a:rPr>
-                        <a:t>11,7</a:t>
+                        <a:t>11,8</a:t>
                       </a:r>
                       <a:endParaRPr lang="en-US" sz="1200" dirty="0"/>
                     </a:p>
@@ -15792,7 +15792,7 @@
                             <a:schemeClr val="tx1"/>
                           </a:solidFill>
                         </a:rPr>
-                        <a:t>6,8</a:t>
+                        <a:t>7,2</a:t>
                       </a:r>
                       <a:endParaRPr lang="en-US" sz="1200" dirty="0"/>
                     </a:p>
@@ -15914,7 +15914,7 @@
                             <a:schemeClr val="tx1"/>
                           </a:solidFill>
                         </a:rPr>
-                        <a:t>51,7</a:t>
+                        <a:t>51,9</a:t>
                       </a:r>
                       <a:endParaRPr lang="en-US" sz="1200" dirty="0"/>
                     </a:p>
@@ -15975,7 +15975,7 @@
                             <a:schemeClr val="tx1"/>
                           </a:solidFill>
                         </a:rPr>
-                        <a:t>0,7</a:t>
+                        <a:t>0,8</a:t>
                       </a:r>
                       <a:endParaRPr lang="en-US" sz="1200" dirty="0"/>
                     </a:p>
@@ -16061,7 +16061,7 @@
                   <a:schemeClr val="tx1"/>
                 </a:solidFill>
               </a:rPr>
-              <a:t>Дефіцит фінансування: гривня на ≈6% слабша (≈55 грн/€) → інфляція до 13,3%, ставка до 19,6%</a:t>
+              <a:t>Дефіцит фінансування: гривня на ≈6% слабша (≈55 грн/€) → інфляція до 13,3%, ставка до 19,3%</a:t>
             </a:r>
             <a:endParaRPr lang="en-US" sz="1300" dirty="0"/>
           </a:p>
@@ -16079,7 +16079,7 @@
                   <a:schemeClr val="tx1"/>
                 </a:solidFill>
               </a:rPr>
-              <a:t>Важка зима: інфляція до 12,7%, ставка до 17,8%, ВВП 2027 — −0,2%</a:t>
+              <a:t>Важка зима: інфляція до 12,8%, ставка до 17,8%, ВВП 2027 — −0,1%</a:t>
             </a:r>
             <a:endParaRPr lang="en-US" sz="1300" dirty="0"/>
           </a:p>
@@ -16514,7 +16514,7 @@
                   <a:schemeClr val="accent6"/>
                 </a:solidFill>
               </a:rPr>
-              <a:t>КУРС ГРИВНІ ДО ЄВРО</a:t>
+              <a:t>КУРС ГРИВНІ</a:t>
             </a:r>
             <a:endParaRPr lang="en-US" sz="1100" dirty="0"/>
           </a:p>
@@ -16553,7 +16553,7 @@
                 <a:ea typeface="Cambria" pitchFamily="34" charset="-122"/>
                 <a:cs typeface="Cambria" pitchFamily="34" charset="-120"/>
               </a:rPr>
-              <a:t>до 4%</a:t>
+              <a:t>Гнучкий</a:t>
             </a:r>
             <a:pPr indent="0" marL="0">
               <a:buNone/>
@@ -16564,7 +16564,7 @@
                   <a:srgbClr val="C98A00"/>
                 </a:solidFill>
               </a:rPr>
-              <a:t>  на рік</a:t>
+              <a:t>  </a:t>
             </a:r>
             <a:endParaRPr lang="en-US" sz="4000" dirty="0"/>
           </a:p>
@@ -16600,7 +16600,7 @@
                   <a:schemeClr val="tx1"/>
                 </a:solidFill>
               </a:rPr>
-              <a:t>допускати поступове послаблення; за ставки 17% фактичне — ≈1% на рік; інтервенції лише згладжують коливання</a:t>
+              <a:t>з червня ≈44,7 грн/$ без змін; допускати двосторонні коливання, інтервенції лише згладжують; рівень не фіксувати</a:t>
             </a:r>
             <a:endParaRPr lang="en-US" sz="1300" dirty="0"/>
           </a:p>
@@ -17215,7 +17215,7 @@
                             <a:schemeClr val="tx1"/>
                           </a:solidFill>
                         </a:rPr>
-                        <a:t>6,7</a:t>
+                        <a:t>7,2</a:t>
                       </a:r>
                       <a:endParaRPr lang="en-US" sz="1500" dirty="0"/>
                     </a:p>
@@ -17276,7 +17276,7 @@
                             <a:schemeClr val="tx1"/>
                           </a:solidFill>
                         </a:rPr>
-                        <a:t>4,3</a:t>
+                        <a:t>4,7</a:t>
                       </a:r>
                       <a:endParaRPr lang="en-US" sz="1500" dirty="0"/>
                     </a:p>
@@ -17522,7 +17522,7 @@
                             <a:schemeClr val="tx1"/>
                           </a:solidFill>
                         </a:rPr>
-                        <a:t>5,4</a:t>
+                        <a:t>5,9</a:t>
                       </a:r>
                       <a:endParaRPr lang="en-US" sz="1500" dirty="0"/>
                     </a:p>
@@ -17583,7 +17583,7 @@
                             <a:schemeClr val="tx1"/>
                           </a:solidFill>
                         </a:rPr>
-                        <a:t>3,0</a:t>
+                        <a:t>3,3</a:t>
                       </a:r>
                       <a:endParaRPr lang="en-US" sz="1500" dirty="0"/>
                     </a:p>
@@ -17829,7 +17829,7 @@
                             <a:schemeClr val="tx1"/>
                           </a:solidFill>
                         </a:rPr>
-                        <a:t>0,7</a:t>
+                        <a:t>0,8</a:t>
                       </a:r>
                       <a:endParaRPr lang="en-US" sz="1500" dirty="0"/>
                     </a:p>
@@ -17890,7 +17890,7 @@
                             <a:schemeClr val="tx1"/>
                           </a:solidFill>
                         </a:rPr>
-                        <a:t>0,8</a:t>
+                        <a:t>1,0</a:t>
                       </a:r>
                       <a:endParaRPr lang="en-US" sz="1500" dirty="0"/>
                     </a:p>
@@ -17951,7 +17951,7 @@
                             <a:schemeClr val="tx1"/>
                           </a:solidFill>
                         </a:rPr>
-                        <a:t>3,1</a:t>
+                        <a:t>2,9</a:t>
                       </a:r>
                       <a:endParaRPr lang="en-US" sz="1500" dirty="0"/>
                     </a:p>
@@ -18136,7 +18136,7 @@
                             <a:schemeClr val="tx1"/>
                           </a:solidFill>
                         </a:rPr>
-                        <a:t>15,6</a:t>
+                        <a:t>14,7</a:t>
                       </a:r>
                       <a:endParaRPr lang="en-US" sz="1500" dirty="0"/>
                     </a:p>
@@ -18197,7 +18197,7 @@
                             <a:schemeClr val="tx1"/>
                           </a:solidFill>
                         </a:rPr>
-                        <a:t>10,3</a:t>
+                        <a:t>10,1</a:t>
                       </a:r>
                       <a:endParaRPr lang="en-US" sz="1500" dirty="0"/>
                     </a:p>
@@ -18443,7 +18443,7 @@
                             <a:schemeClr val="tx1"/>
                           </a:solidFill>
                         </a:rPr>
-                        <a:t>51,7</a:t>
+                        <a:t>51,9</a:t>
                       </a:r>
                       <a:endParaRPr lang="en-US" sz="1500" dirty="0"/>
                     </a:p>
@@ -18504,7 +18504,7 @@
                             <a:schemeClr val="tx1"/>
                           </a:solidFill>
                         </a:rPr>
-                        <a:t>52,5</a:t>
+                        <a:t>52,9</a:t>
                       </a:r>
                       <a:endParaRPr lang="en-US" sz="1500" dirty="0"/>
                     </a:p>
@@ -18565,7 +18565,7 @@
                             <a:schemeClr val="tx1"/>
                           </a:solidFill>
                         </a:rPr>
-                        <a:t>53,4</a:t>
+                        <a:t>53,8</a:t>
                       </a:r>
                       <a:endParaRPr lang="en-US" sz="1500" dirty="0"/>
                     </a:p>
@@ -18647,7 +18647,7 @@
                   <a:schemeClr val="accent6"/>
                 </a:solidFill>
               </a:rPr>
-              <a:t>* Середнє за квартал (SA); грудень 2026 — 12,1% (наукаст). Ціль НБУ — 5% на горизонті до 3 років; повернення до цілі — III кв. 2029. Дані на 20.10.2026.</a:t>
+              <a:t>* Середнє за квартал (SA); грудень 2026 — 12,1% (наукаст). Ціль НБУ — 5% на горизонті до 3 років; стабілізація на 5% — з II кв. 2029. Дані на 20.10.2026.</a:t>
             </a:r>
             <a:endParaRPr lang="en-US" sz="1100" dirty="0"/>
           </a:p>
@@ -20072,7 +20072,7 @@
                   <a:schemeClr val="accent1"/>
                 </a:solidFill>
               </a:rPr>
-              <a:t>Наша відповідь на питання конкурсу: облікова ставка — 17% з утриманням до середини 2027 р.; депсертифікати — зберегти зв'язок зі строковими депозитами; офіційний курс — керована гнучкість (до ≈4% на рік) без захисту рівня; валютні обмеження — серпневий пакет зберегти, III етап — після відновлення резервів.</a:t>
+              <a:t>Наша відповідь на питання конкурсу: облікова ставка — 17% з утриманням до середини 2027 р.; депсертифікати — обмежити обсяги тендерів, щоб підвищення дійшло до депозитних ставок; офіційний курс — не заморожувати, лише згладжувати коливання; валютні обмеження — серпневий пакет зберегти, III етап — після відновлення резервів.</a:t>
             </a:r>
             <a:endParaRPr lang="en-US" sz="1400" dirty="0"/>
           </a:p>
@@ -20765,7 +20765,7 @@
                 <a:ea typeface="Cambria" pitchFamily="34" charset="-122"/>
                 <a:cs typeface="Cambria" pitchFamily="34" charset="-120"/>
               </a:rPr>
-              <a:t>Варіанти рішення 29 жовтня: найменші втрати — 17–17,5%; обираємо 17%</a:t>
+              <a:t>Варіанти рішення 29 жовтня: утримати 16% — найгірше; між 16,5 і 17,5% різниця мала — крок обираємо за ризиками</a:t>
             </a:r>
             <a:endParaRPr lang="en-US" sz="2600" dirty="0"/>
           </a:p>
@@ -21384,7 +21384,7 @@
                             <a:schemeClr val="tx1"/>
                           </a:solidFill>
                         </a:rPr>
-                        <a:t>15,7</a:t>
+                        <a:t>14,8</a:t>
                       </a:r>
                       <a:endParaRPr lang="en-US" sz="1200" dirty="0"/>
                     </a:p>
@@ -21445,7 +21445,7 @@
                             <a:schemeClr val="tx1"/>
                           </a:solidFill>
                         </a:rPr>
-                        <a:t>7,2</a:t>
+                        <a:t>7,6</a:t>
                       </a:r>
                       <a:endParaRPr lang="en-US" sz="1200" dirty="0"/>
                     </a:p>
@@ -21506,7 +21506,7 @@
                             <a:schemeClr val="tx1"/>
                           </a:solidFill>
                         </a:rPr>
-                        <a:t>1,0</a:t>
+                        <a:t>1,1</a:t>
                       </a:r>
                       <a:endParaRPr lang="en-US" sz="1200" dirty="0"/>
                     </a:p>
@@ -21567,7 +21567,7 @@
                             <a:schemeClr val="tx1"/>
                           </a:solidFill>
                         </a:rPr>
-                        <a:t>122,3</a:t>
+                        <a:t>113,3</a:t>
                       </a:r>
                       <a:endParaRPr lang="en-US" sz="1200" dirty="0"/>
                     </a:p>
@@ -21752,7 +21752,7 @@
                             <a:schemeClr val="tx1"/>
                           </a:solidFill>
                         </a:rPr>
-                        <a:t>15,7</a:t>
+                        <a:t>14,8</a:t>
                       </a:r>
                       <a:endParaRPr lang="en-US" sz="1200" dirty="0"/>
                     </a:p>
@@ -21813,7 +21813,7 @@
                             <a:schemeClr val="tx1"/>
                           </a:solidFill>
                         </a:rPr>
-                        <a:t>6,9</a:t>
+                        <a:t>7,4</a:t>
                       </a:r>
                       <a:endParaRPr lang="en-US" sz="1200" dirty="0"/>
                     </a:p>
@@ -21874,7 +21874,7 @@
                             <a:schemeClr val="tx1"/>
                           </a:solidFill>
                         </a:rPr>
-                        <a:t>0,8</a:t>
+                        <a:t>0,9</a:t>
                       </a:r>
                       <a:endParaRPr lang="en-US" sz="1200" dirty="0"/>
                     </a:p>
@@ -21935,7 +21935,7 @@
                             <a:schemeClr val="tx1"/>
                           </a:solidFill>
                         </a:rPr>
-                        <a:t>118,4</a:t>
+                        <a:t>110,9</a:t>
                       </a:r>
                       <a:endParaRPr lang="en-US" sz="1200" dirty="0"/>
                     </a:p>
@@ -22120,7 +22120,7 @@
                             <a:schemeClr val="tx1"/>
                           </a:solidFill>
                         </a:rPr>
-                        <a:t>15,6</a:t>
+                        <a:t>14,7</a:t>
                       </a:r>
                       <a:endParaRPr lang="en-US" sz="1200" dirty="0"/>
                     </a:p>
@@ -22181,7 +22181,7 @@
                             <a:schemeClr val="tx1"/>
                           </a:solidFill>
                         </a:rPr>
-                        <a:t>6,7</a:t>
+                        <a:t>7,2</a:t>
                       </a:r>
                       <a:endParaRPr lang="en-US" sz="1200" dirty="0"/>
                     </a:p>
@@ -22242,7 +22242,7 @@
                             <a:schemeClr val="tx1"/>
                           </a:solidFill>
                         </a:rPr>
-                        <a:t>0,7</a:t>
+                        <a:t>0,8</a:t>
                       </a:r>
                       <a:endParaRPr lang="en-US" sz="1200" dirty="0"/>
                     </a:p>
@@ -22303,7 +22303,7 @@
                             <a:schemeClr val="tx1"/>
                           </a:solidFill>
                         </a:rPr>
-                        <a:t>115,8</a:t>
+                        <a:t>109,6</a:t>
                       </a:r>
                       <a:endParaRPr lang="en-US" sz="1200" dirty="0"/>
                     </a:p>
@@ -22488,7 +22488,7 @@
                             <a:schemeClr val="tx1"/>
                           </a:solidFill>
                         </a:rPr>
-                        <a:t>15,6</a:t>
+                        <a:t>14,7</a:t>
                       </a:r>
                       <a:endParaRPr lang="en-US" sz="1200" dirty="0"/>
                     </a:p>
@@ -22549,7 +22549,7 @@
                             <a:schemeClr val="tx1"/>
                           </a:solidFill>
                         </a:rPr>
-                        <a:t>6,5</a:t>
+                        <a:t>6,9</a:t>
                       </a:r>
                       <a:endParaRPr lang="en-US" sz="1200" dirty="0"/>
                     </a:p>
@@ -22671,7 +22671,7 @@
                             <a:schemeClr val="tx1"/>
                           </a:solidFill>
                         </a:rPr>
-                        <a:t>114,3</a:t>
+                        <a:t>109,6</a:t>
                       </a:r>
                       <a:endParaRPr lang="en-US" sz="1200" dirty="0"/>
                     </a:p>
@@ -22795,7 +22795,7 @@
                             <a:schemeClr val="tx1"/>
                           </a:solidFill>
                         </a:rPr>
-                        <a:t>17,4</a:t>
+                        <a:t>17,1</a:t>
                       </a:r>
                       <a:endParaRPr lang="en-US" sz="1200" dirty="0"/>
                     </a:p>
@@ -22856,7 +22856,7 @@
                             <a:schemeClr val="tx1"/>
                           </a:solidFill>
                         </a:rPr>
-                        <a:t>15,6</a:t>
+                        <a:t>14,7</a:t>
                       </a:r>
                       <a:endParaRPr lang="en-US" sz="1200" dirty="0"/>
                     </a:p>
@@ -22917,7 +22917,7 @@
                             <a:schemeClr val="tx1"/>
                           </a:solidFill>
                         </a:rPr>
-                        <a:t>6,2</a:t>
+                        <a:t>7,0</a:t>
                       </a:r>
                       <a:endParaRPr lang="en-US" sz="1200" dirty="0"/>
                     </a:p>
@@ -22978,7 +22978,7 @@
                             <a:schemeClr val="tx1"/>
                           </a:solidFill>
                         </a:rPr>
-                        <a:t>0,4</a:t>
+                        <a:t>0,7</a:t>
                       </a:r>
                       <a:endParaRPr lang="en-US" sz="1200" dirty="0"/>
                     </a:p>
@@ -23039,7 +23039,7 @@
                             <a:schemeClr val="tx1"/>
                           </a:solidFill>
                         </a:rPr>
-                        <a:t>112,9</a:t>
+                        <a:t>108,9</a:t>
                       </a:r>
                       <a:endParaRPr lang="en-US" sz="1200" dirty="0"/>
                     </a:p>
@@ -23125,7 +23125,7 @@
                   <a:schemeClr val="tx1"/>
                 </a:solidFill>
               </a:rPr>
-              <a:t>Втрати = відхилення інфляції від 5% + 0,5·розрив ВВП² + різкі зміни ставки: вища ставка швидше знижує інфляцію, але потребує різкіших змін ставки й глибшого спаду</a:t>
+              <a:t>Втрати: відхилення інфляції від 5%, розрив ВВП, різкі зміни ставки; адмінціни — з вагою 50% (вони ростуть щороку, але це перший раунд) — той самий принцип для рішення й усієї траєкторії</a:t>
             </a:r>
             <a:endParaRPr lang="en-US" sz="1300" dirty="0"/>
           </a:p>
@@ -23143,7 +23143,7 @@
                   <a:schemeClr val="tx1"/>
                 </a:solidFill>
               </a:rPr>
-              <a:t>Найкращий варіант за різної ваги згладжування: 17,5% (λ = 0,5), 17,5% (λ = 1), 17% (λ = 2); оптимальна траєкторія — 16,8–17,4% зараз</a:t>
+              <a:t>Оптимальна траєкторія починається з 17,1% (16,5–17,8% залежно від згладжування); найменші втрати серед утримань — 16,5–18%: таблиця не вибирає крок</a:t>
             </a:r>
             <a:endParaRPr lang="en-US" sz="1300" dirty="0"/>
           </a:p>
@@ -23161,7 +23161,7 @@
                   <a:schemeClr val="tx1"/>
                 </a:solidFill>
               </a:rPr>
-              <a:t>Без реакції на перший раунд адмінцін (практика ІТ) оптимум — 16,9%: тому 17%; 17,5% — якщо з'являться вторинні ефекти тарифів і пального</a:t>
+              <a:t>+1 в. п. — через ризики для курсу й очікувань: якщо гривня слабшатиме, як чекає ринок (≈5% на рік), інфляція в IV кв. 2027 — ≈10,5% замість 7,2%</a:t>
             </a:r>
             <a:endParaRPr lang="en-US" sz="1300" dirty="0"/>
           </a:p>
@@ -23545,7 +23545,7 @@
         <p:spPr>
           <a:xfrm>
             <a:off x="3931920" y="1709928"/>
-            <a:ext cx="7802575" cy="1231392"/>
+            <a:ext cx="7802575" cy="1142297"/>
           </a:xfrm>
           <a:prstGeom prst="rect">
             <a:avLst/>
@@ -23588,7 +23588,7 @@
                   <a:schemeClr val="tx1"/>
                 </a:solidFill>
               </a:rPr>
-              <a:t>Базова інфляція наприкінці 2027 — 5,4% (НБУ: 5,1%): ринок праці перегрітий</a:t>
+              <a:t>Базова інфляція наприкінці 2027 — 5,9% (НБУ: 5,1%): ринок праці перегрітий</a:t>
             </a:r>
             <a:endParaRPr lang="en-US" sz="1400" dirty="0"/>
           </a:p>
@@ -23606,7 +23606,7 @@
                   <a:schemeClr val="tx1"/>
                 </a:solidFill>
               </a:rPr>
-              <a:t>Резерви знижуються: потрібна вища привабливість гривні, щоб зменшити попит на валюту</a:t>
+              <a:t>Курс і очікування: якщо гривня слабшатиме, як чекає ринок, інфляція IV кв. 2027 — ≈11%</a:t>
             </a:r>
             <a:endParaRPr lang="en-US" sz="1400" dirty="0"/>
           </a:p>
@@ -23624,7 +23624,7 @@
                   <a:schemeClr val="tx1"/>
                 </a:solidFill>
               </a:rPr>
-              <a:t>Ми рекомендуємо гнучкіший курс — ставка має утримати очікування</a:t>
+              <a:t>Гнучкіший курс потребує сильного якоря — ставка має утримати очікування</a:t>
             </a:r>
             <a:endParaRPr lang="en-US" sz="1400" dirty="0"/>
           </a:p>
@@ -23638,7 +23638,7 @@
         </p:nvSpPr>
         <p:spPr>
           <a:xfrm>
-            <a:off x="3931920" y="2987040"/>
+            <a:off x="3931920" y="2897945"/>
             <a:ext cx="7802575" cy="347472"/>
           </a:xfrm>
           <a:prstGeom prst="rect">
@@ -23677,8 +23677,8 @@
         </p:nvSpPr>
         <p:spPr>
           <a:xfrm>
-            <a:off x="3931920" y="3371088"/>
-            <a:ext cx="7802575" cy="1231392"/>
+            <a:off x="3931920" y="3281993"/>
+            <a:ext cx="7802575" cy="1142297"/>
           </a:xfrm>
           <a:prstGeom prst="rect">
             <a:avLst/>
@@ -23703,7 +23703,7 @@
                   <a:schemeClr val="tx1"/>
                 </a:solidFill>
               </a:rPr>
-              <a:t>ВВП III кв. скоротився; за 17% реальна ставка сама зросте з ≈6,2% до ≈8,7% у II кв. 2027 — у міру зниження інфляції</a:t>
+              <a:t>ВВП III кв. скоротився; за 17% реальна ставка сама зросте з ≈6,2% до ≈8,4% у II кв. 2027 — у міру зниження інфляції</a:t>
             </a:r>
             <a:endParaRPr lang="en-US" sz="1400" dirty="0"/>
           </a:p>
@@ -23721,7 +23721,7 @@
                   <a:schemeClr val="tx1"/>
                 </a:solidFill>
               </a:rPr>
-              <a:t>Шоки здебільшого пропозиції: реагуємо на вторинні ефекти, а не на перший раунд</a:t>
+              <a:t>Оптимальна траєкторія моделі починається з 17,1%; адмінціни враховуємо на 50%</a:t>
             </a:r>
             <a:endParaRPr lang="en-US" sz="1400" dirty="0"/>
           </a:p>
@@ -23739,7 +23739,7 @@
                   <a:schemeClr val="tx1"/>
                 </a:solidFill>
               </a:rPr>
-              <a:t>Без реакції на перший раунд адмінцін оптимум моделі — 16,9%</a:t>
+              <a:t>Підвищення має дійти до депозитів: обмежити обсяги тендерів 3-міс. ДС</a:t>
             </a:r>
             <a:endParaRPr lang="en-US" sz="1400" dirty="0"/>
           </a:p>
@@ -23753,7 +23753,7 @@
         </p:nvSpPr>
         <p:spPr>
           <a:xfrm>
-            <a:off x="3931920" y="4648200"/>
+            <a:off x="3931920" y="4470009"/>
             <a:ext cx="7802575" cy="347472"/>
           </a:xfrm>
           <a:prstGeom prst="rect">
@@ -23792,8 +23792,8 @@
         </p:nvSpPr>
         <p:spPr>
           <a:xfrm>
-            <a:off x="3931920" y="5032248"/>
-            <a:ext cx="7802575" cy="1231392"/>
+            <a:off x="3931920" y="4854057"/>
+            <a:ext cx="7802575" cy="1409583"/>
           </a:xfrm>
           <a:prstGeom prst="rect">
             <a:avLst/>
@@ -23818,7 +23818,7 @@
                   <a:schemeClr val="tx1"/>
                 </a:solidFill>
               </a:rPr>
-              <a:t>Утримання 17% щонайменше до середини 2027; далі зниження до ≈15,5% наприкінці 2027 і ≈10,5% — 2028: інфляція 5% у 2029</a:t>
+              <a:t>Утримання 17% щонайменше до середини 2027; далі зниження до ≈14,5% наприкінці 2027 і ≈10,0% — 2028: інфляція 5% у 2029</a:t>
             </a:r>
             <a:endParaRPr lang="en-US" sz="1400" dirty="0"/>
           </a:p>
@@ -23836,7 +23836,7 @@
                   <a:schemeClr val="tx1"/>
                 </a:solidFill>
               </a:rPr>
-              <a:t>Подальше підвищення (до ≈20%) — якщо резерви &lt; $43 млрд і тиск на курс (сценарій дефіциту фінансування)</a:t>
+              <a:t>Подальше підвищення (до ≈19%) — якщо тиск на курс загрожує очікуванням (зростають девальваційні й інфляційні очікування)</a:t>
             </a:r>
             <a:endParaRPr lang="en-US" sz="1400" dirty="0"/>
           </a:p>
@@ -24014,7 +24014,7 @@
                 <a:solidFill>
                   <a:srgbClr val="5F6B6D"/>
                 </a:solidFill>
-                <a:hlinkClick r:id="rId1" invalidUrl="" action="" tgtFrame="" tooltip="https://bank.gov.ua/ua/open-data/api-dev" history="1" highlightClick="0" endSnd="0">
+                <a:hlinkClick r:id="rId1" invalidUrl="" action="" tgtFrame="" tooltip="https://bank.gov.ua/ua/news/all/mijnarodni-rezervi-stanovili-471-mlrd-dol-ssha-za-pidsumkami-veresnya" history="1" highlightClick="0" endSnd="0">
                   <a:extLst>
                     <a:ext uri="{A12FA001-AC4F-418D-AE19-62706E023703}">
                       <ahyp:hlinkClr xmlns:ahyp="http://schemas.microsoft.com/office/drawing/2018/hyperlinkcolor" val="tx"/>
@@ -24022,7 +24022,7 @@
                   </a:extLst>
                 </a:hlinkClick>
               </a:rPr>
-              <a:t>API НБУ</a:t>
+              <a:t>НБУ: резерви у вересні (USL $3,81 млрд)</a:t>
             </a:r>
             <a:pPr indent="0" marL="0">
               <a:buNone/>
@@ -24043,7 +24043,7 @@
                 <a:solidFill>
                   <a:srgbClr val="5F6B6D"/>
                 </a:solidFill>
-                <a:hlinkClick r:id="rId2" invalidUrl="" action="" tgtFrame="" tooltip="https://bank.gov.ua/admin_uploads/article/Tables_Charts_2026-Q3.xlsx?v=19" history="1" highlightClick="0" endSnd="0">
+                <a:hlinkClick r:id="rId2" invalidUrl="" action="" tgtFrame="" tooltip="https://epravda.com.ua/finances/valyutniy-rinok-ukrajini-rezultati-troh-rokiv-rezhimu-kerovanoji-gnuchkosti-826509/" history="1" highlightClick="0" endSnd="0">
                   <a:extLst>
                     <a:ext uri="{A12FA001-AC4F-418D-AE19-62706E023703}">
                       <ahyp:hlinkClr xmlns:ahyp="http://schemas.microsoft.com/office/drawing/2018/hyperlinkcolor" val="tx"/>
@@ -24051,7 +24051,7 @@
                   </a:extLst>
                 </a:hlinkClick>
               </a:rPr>
-              <a:t>дані графіків ІЗ</a:t>
+              <a:t>А. Пишний: три роки керованої гнучкості</a:t>
             </a:r>
             <a:pPr indent="0" marL="0">
               <a:buNone/>
@@ -24198,7 +24198,7 @@
                   <a:schemeClr val="tx1"/>
                 </a:solidFill>
               </a:rPr>
-              <a:t>Рекомендація: керована гнучкість — допускати послаблення до ≈4% на рік, інтервенції лише згладжують; рівень курсу не захищати</a:t>
+              <a:t>Рекомендація: не заморожувати курс (≈44,7 грн/$ з червня); інтервенції — лише згладжувати. Резерви залежать від ритму допомоги (продаж валюти її «доносить»), тому захищає їх пауза в лібералізації</a:t>
             </a:r>
             <a:endParaRPr lang="en-US" sz="1400" dirty="0"/>
           </a:p>
@@ -24945,7 +24945,7 @@
                   <a:schemeClr val="tx1"/>
                 </a:solidFill>
               </a:rPr>
-              <a:t>Гнучкий курс захищає резерви; НБУ згладжує, але не фіксує курс</a:t>
+              <a:t>Курс не заморожений: НБУ згладжує коливання, але не фіксує рівень</a:t>
             </a:r>
             <a:endParaRPr lang="en-US" sz="1400" dirty="0"/>
           </a:p>
@@ -24963,7 +24963,7 @@
                   <a:schemeClr val="tx1"/>
                 </a:solidFill>
               </a:rPr>
-              <a:t>Гривневі депозити й ОВДП залишаються вигіднішими за валюту з урахуванням інфляції</a:t>
+              <a:t>Обмежені обсяги депсертифікатів — щоб підвищення дійшло до ставок за депозитами</a:t>
             </a:r>
             <a:endParaRPr lang="en-US" sz="1400" dirty="0"/>
           </a:p>
@@ -25627,7 +25627,7 @@
                   <a:schemeClr val="bg1"/>
                 </a:solidFill>
               </a:rPr>
-              <a:t>Керована гнучкість курсу: поступове послаблення гривні замість витрачання резервів</a:t>
+              <a:t>Не заморожувати курс; обмежити обсяги тендерів депсертифікатів, щоб підвищення дійшло до депозитів</a:t>
             </a:r>
             <a:endParaRPr lang="en-US" sz="2000" dirty="0"/>
           </a:p>
@@ -25811,7 +25811,7 @@
                   <a:schemeClr val="bg1"/>
                 </a:solidFill>
               </a:rPr>
-              <a:t>Базовий прогноз: інфляція ≈12,1% у грудні 2026, 6,7% у IV кв. 2027, ціль 5% — III кв. 2029</a:t>
+              <a:t>Базовий прогноз: інфляція ≈12,1% у грудні 2026, 7,2% у IV кв. 2027, стабільно 5% — з II кв. 2029</a:t>
             </a:r>
             <a:endParaRPr lang="en-US" sz="2000" dirty="0"/>
           </a:p>
@@ -29180,7 +29180,7 @@
                             <a:schemeClr val="tx1"/>
                           </a:solidFill>
                         </a:rPr>
-                        <a:t>9,9</a:t>
+                        <a:t>10,1</a:t>
                       </a:r>
                       <a:endParaRPr lang="en-US" sz="1200" dirty="0"/>
                     </a:p>
@@ -29241,7 +29241,7 @@
                             <a:schemeClr val="tx1"/>
                           </a:solidFill>
                         </a:rPr>
-                        <a:t>6,7</a:t>
+                        <a:t>7,2</a:t>
                       </a:r>
                       <a:endParaRPr lang="en-US" sz="1200" dirty="0"/>
                     </a:p>
@@ -29302,7 +29302,7 @@
                             <a:schemeClr val="tx1"/>
                           </a:solidFill>
                         </a:rPr>
-                        <a:t>4,2</a:t>
+                        <a:t>4,8</a:t>
                       </a:r>
                       <a:endParaRPr lang="en-US" sz="1200" dirty="0"/>
                     </a:p>
@@ -29363,7 +29363,7 @@
                             <a:schemeClr val="tx1"/>
                           </a:solidFill>
                         </a:rPr>
-                        <a:t>4,3</a:t>
+                        <a:t>4,7</a:t>
                       </a:r>
                       <a:endParaRPr lang="en-US" sz="1200" dirty="0"/>
                     </a:p>
@@ -29424,7 +29424,7 @@
                             <a:schemeClr val="tx1"/>
                           </a:solidFill>
                         </a:rPr>
-                        <a:t>4,9</a:t>
+                        <a:t>5,0</a:t>
                       </a:r>
                       <a:endParaRPr lang="en-US" sz="1200" dirty="0"/>
                     </a:p>
@@ -29670,7 +29670,7 @@
                             <a:schemeClr val="tx1"/>
                           </a:solidFill>
                         </a:rPr>
-                        <a:t>8,3</a:t>
+                        <a:t>8,5</a:t>
                       </a:r>
                       <a:endParaRPr lang="en-US" sz="1200" dirty="0"/>
                     </a:p>
@@ -29731,7 +29731,7 @@
                             <a:schemeClr val="tx1"/>
                           </a:solidFill>
                         </a:rPr>
-                        <a:t>5,5</a:t>
+                        <a:t>5,9</a:t>
                       </a:r>
                       <a:endParaRPr lang="en-US" sz="1200" dirty="0"/>
                     </a:p>
@@ -29792,7 +29792,7 @@
                             <a:schemeClr val="tx1"/>
                           </a:solidFill>
                         </a:rPr>
-                        <a:t>3,0</a:t>
+                        <a:t>3,5</a:t>
                       </a:r>
                       <a:endParaRPr lang="en-US" sz="1200" dirty="0"/>
                     </a:p>
@@ -29853,7 +29853,7 @@
                             <a:schemeClr val="tx1"/>
                           </a:solidFill>
                         </a:rPr>
-                        <a:t>3,0</a:t>
+                        <a:t>3,4</a:t>
                       </a:r>
                       <a:endParaRPr lang="en-US" sz="1200" dirty="0"/>
                     </a:p>
@@ -29914,7 +29914,7 @@
                             <a:schemeClr val="tx1"/>
                           </a:solidFill>
                         </a:rPr>
-                        <a:t>4,1</a:t>
+                        <a:t>4,2</a:t>
                       </a:r>
                       <a:endParaRPr lang="en-US" sz="1200" dirty="0"/>
                     </a:p>
@@ -30221,7 +30221,7 @@
                             <a:schemeClr val="tx1"/>
                           </a:solidFill>
                         </a:rPr>
-                        <a:t>0,4</a:t>
+                        <a:t>0,6</a:t>
                       </a:r>
                       <a:endParaRPr lang="en-US" sz="1200" dirty="0"/>
                     </a:p>
@@ -30282,7 +30282,7 @@
                             <a:schemeClr val="tx1"/>
                           </a:solidFill>
                         </a:rPr>
-                        <a:t>0,3</a:t>
+                        <a:t>0,6</a:t>
                       </a:r>
                       <a:endParaRPr lang="en-US" sz="1200" dirty="0"/>
                     </a:p>
@@ -30343,7 +30343,7 @@
                             <a:schemeClr val="tx1"/>
                           </a:solidFill>
                         </a:rPr>
-                        <a:t>1,9</a:t>
+                        <a:t>2,0</a:t>
                       </a:r>
                       <a:endParaRPr lang="en-US" sz="1200" dirty="0"/>
                     </a:p>
@@ -30404,7 +30404,7 @@
                             <a:schemeClr val="tx1"/>
                           </a:solidFill>
                         </a:rPr>
-                        <a:t>3,3</a:t>
+                        <a:t>3,0</a:t>
                       </a:r>
                       <a:endParaRPr lang="en-US" sz="1200" dirty="0"/>
                     </a:p>
@@ -30465,7 +30465,7 @@
                             <a:schemeClr val="tx1"/>
                           </a:solidFill>
                         </a:rPr>
-                        <a:t>3,1</a:t>
+                        <a:t>2,8</a:t>
                       </a:r>
                       <a:endParaRPr lang="en-US" sz="1200" dirty="0"/>
                     </a:p>
@@ -30711,7 +30711,7 @@
                             <a:schemeClr val="tx1"/>
                           </a:solidFill>
                         </a:rPr>
-                        <a:t>15,6</a:t>
+                        <a:t>14,7</a:t>
                       </a:r>
                       <a:endParaRPr lang="en-US" sz="1200" dirty="0"/>
                     </a:p>
@@ -30772,7 +30772,7 @@
                             <a:schemeClr val="tx1"/>
                           </a:solidFill>
                         </a:rPr>
-                        <a:t>12,6</a:t>
+                        <a:t>11,9</a:t>
                       </a:r>
                       <a:endParaRPr lang="en-US" sz="1200" dirty="0"/>
                     </a:p>
@@ -30833,7 +30833,7 @@
                             <a:schemeClr val="tx1"/>
                           </a:solidFill>
                         </a:rPr>
-                        <a:t>10,3</a:t>
+                        <a:t>10,1</a:t>
                       </a:r>
                       <a:endParaRPr lang="en-US" sz="1200" dirty="0"/>
                     </a:p>
@@ -30894,7 +30894,7 @@
                             <a:schemeClr val="tx1"/>
                           </a:solidFill>
                         </a:rPr>
-                        <a:t>9,3</a:t>
+                        <a:t>9,4</a:t>
                       </a:r>
                       <a:endParaRPr lang="en-US" sz="1200" dirty="0"/>
                     </a:p>
@@ -31201,7 +31201,7 @@
                             <a:schemeClr val="tx1"/>
                           </a:solidFill>
                         </a:rPr>
-                        <a:t>51,7</a:t>
+                        <a:t>51,9</a:t>
                       </a:r>
                       <a:endParaRPr lang="en-US" sz="1200" dirty="0"/>
                     </a:p>
@@ -31262,7 +31262,7 @@
                             <a:schemeClr val="tx1"/>
                           </a:solidFill>
                         </a:rPr>
-                        <a:t>51,9</a:t>
+                        <a:t>52,3</a:t>
                       </a:r>
                       <a:endParaRPr lang="en-US" sz="1200" dirty="0"/>
                     </a:p>
@@ -31323,68 +31323,7 @@
                             <a:schemeClr val="tx1"/>
                           </a:solidFill>
                         </a:rPr>
-                        <a:t>52,5</a:t>
-                      </a:r>
-                      <a:endParaRPr lang="en-US" sz="1200" dirty="0"/>
-                    </a:p>
-                  </a:txBody>
-                  <a:tcPr marL="63500" marR="63500" marT="38100" marB="38100" anchor="ctr">
-                    <a:lnL w="6350" cap="flat" cmpd="sng" algn="ctr">
-                      <a:solidFill>
-                        <a:srgbClr val="C9D6D3"/>
-                      </a:solidFill>
-                      <a:prstDash val="solid"/>
-                      <a:round/>
-                      <a:headEnd type="none" w="med" len="med"/>
-                      <a:tailEnd type="none" w="med" len="med"/>
-                    </a:lnL>
-                    <a:lnR w="6350" cap="flat" cmpd="sng" algn="ctr">
-                      <a:solidFill>
-                        <a:srgbClr val="C9D6D3"/>
-                      </a:solidFill>
-                      <a:prstDash val="solid"/>
-                      <a:round/>
-                      <a:headEnd type="none" w="med" len="med"/>
-                      <a:tailEnd type="none" w="med" len="med"/>
-                    </a:lnR>
-                    <a:lnT w="6350" cap="flat" cmpd="sng" algn="ctr">
-                      <a:solidFill>
-                        <a:srgbClr val="C9D6D3"/>
-                      </a:solidFill>
-                      <a:prstDash val="solid"/>
-                      <a:round/>
-                      <a:headEnd type="none" w="med" len="med"/>
-                      <a:tailEnd type="none" w="med" len="med"/>
-                    </a:lnT>
-                    <a:lnB w="6350" cap="flat" cmpd="sng" algn="ctr">
-                      <a:solidFill>
-                        <a:srgbClr val="C9D6D3"/>
-                      </a:solidFill>
-                      <a:prstDash val="solid"/>
-                      <a:round/>
-                      <a:headEnd type="none" w="med" len="med"/>
-                      <a:tailEnd type="none" w="med" len="med"/>
-                    </a:lnB>
-                    <a:solidFill>
-                      <a:srgbClr val="FFFFFF"/>
-                    </a:solidFill>
-                  </a:tcPr>
-                </a:tc>
-                <a:tc>
-                  <a:txBody>
-                    <a:bodyPr/>
-                    <a:lstStyle/>
-                    <a:p>
-                      <a:pPr algn="l" indent="0" marL="0">
-                        <a:buNone/>
-                      </a:pPr>
-                      <a:r>
-                        <a:rPr lang="en-US" sz="1200" dirty="0">
-                          <a:solidFill>
-                            <a:schemeClr val="tx1"/>
-                          </a:solidFill>
-                        </a:rPr>
-                        <a:t>53,0</a:t>
+                        <a:t>52,9</a:t>
                       </a:r>
                       <a:endParaRPr lang="en-US" sz="1200" dirty="0"/>
                     </a:p>
@@ -31446,6 +31385,67 @@
                           </a:solidFill>
                         </a:rPr>
                         <a:t>53,4</a:t>
+                      </a:r>
+                      <a:endParaRPr lang="en-US" sz="1200" dirty="0"/>
+                    </a:p>
+                  </a:txBody>
+                  <a:tcPr marL="63500" marR="63500" marT="38100" marB="38100" anchor="ctr">
+                    <a:lnL w="6350" cap="flat" cmpd="sng" algn="ctr">
+                      <a:solidFill>
+                        <a:srgbClr val="C9D6D3"/>
+                      </a:solidFill>
+                      <a:prstDash val="solid"/>
+                      <a:round/>
+                      <a:headEnd type="none" w="med" len="med"/>
+                      <a:tailEnd type="none" w="med" len="med"/>
+                    </a:lnL>
+                    <a:lnR w="6350" cap="flat" cmpd="sng" algn="ctr">
+                      <a:solidFill>
+                        <a:srgbClr val="C9D6D3"/>
+                      </a:solidFill>
+                      <a:prstDash val="solid"/>
+                      <a:round/>
+                      <a:headEnd type="none" w="med" len="med"/>
+                      <a:tailEnd type="none" w="med" len="med"/>
+                    </a:lnR>
+                    <a:lnT w="6350" cap="flat" cmpd="sng" algn="ctr">
+                      <a:solidFill>
+                        <a:srgbClr val="C9D6D3"/>
+                      </a:solidFill>
+                      <a:prstDash val="solid"/>
+                      <a:round/>
+                      <a:headEnd type="none" w="med" len="med"/>
+                      <a:tailEnd type="none" w="med" len="med"/>
+                    </a:lnT>
+                    <a:lnB w="6350" cap="flat" cmpd="sng" algn="ctr">
+                      <a:solidFill>
+                        <a:srgbClr val="C9D6D3"/>
+                      </a:solidFill>
+                      <a:prstDash val="solid"/>
+                      <a:round/>
+                      <a:headEnd type="none" w="med" len="med"/>
+                      <a:tailEnd type="none" w="med" len="med"/>
+                    </a:lnB>
+                    <a:solidFill>
+                      <a:srgbClr val="FFFFFF"/>
+                    </a:solidFill>
+                  </a:tcPr>
+                </a:tc>
+                <a:tc>
+                  <a:txBody>
+                    <a:bodyPr/>
+                    <a:lstStyle/>
+                    <a:p>
+                      <a:pPr algn="l" indent="0" marL="0">
+                        <a:buNone/>
+                      </a:pPr>
+                      <a:r>
+                        <a:rPr lang="en-US" sz="1200" dirty="0">
+                          <a:solidFill>
+                            <a:schemeClr val="tx1"/>
+                          </a:solidFill>
+                        </a:rPr>
+                        <a:t>53,8</a:t>
                       </a:r>
                       <a:endParaRPr lang="en-US" sz="1200" dirty="0"/>
                     </a:p>
@@ -31691,7 +31691,7 @@
                             <a:schemeClr val="tx1"/>
                           </a:solidFill>
                         </a:rPr>
-                        <a:t>−0,4</a:t>
+                        <a:t>−0,2</a:t>
                       </a:r>
                       <a:endParaRPr lang="en-US" sz="1200" dirty="0"/>
                     </a:p>
@@ -31752,7 +31752,7 @@
                             <a:schemeClr val="tx1"/>
                           </a:solidFill>
                         </a:rPr>
-                        <a:t>−1,1</a:t>
+                        <a:t>−0,8</a:t>
                       </a:r>
                       <a:endParaRPr lang="en-US" sz="1200" dirty="0"/>
                     </a:p>
@@ -31813,7 +31813,7 @@
                             <a:schemeClr val="tx1"/>
                           </a:solidFill>
                         </a:rPr>
-                        <a:t>−0,7</a:t>
+                        <a:t>−0,5</a:t>
                       </a:r>
                       <a:endParaRPr lang="en-US" sz="1200" dirty="0"/>
                     </a:p>
@@ -31874,7 +31874,7 @@
                             <a:schemeClr val="tx1"/>
                           </a:solidFill>
                         </a:rPr>
-                        <a:t>−0,1</a:t>
+                        <a:t>0,0</a:t>
                       </a:r>
                       <a:endParaRPr lang="en-US" sz="1200" dirty="0"/>
                     </a:p>
@@ -34977,7 +34977,7 @@
                 <a:ea typeface="Cambria" pitchFamily="34" charset="-122"/>
                 <a:cs typeface="Cambria" pitchFamily="34" charset="-120"/>
               </a:rPr>
-              <a:t>Очікування підвищені, а реальна ставка після вересня знизилася до ≈6%</a:t>
+              <a:t>Очікування підвищені; реальна ставка — 6–8% залежно від методу, і вона знижується</a:t>
             </a:r>
             <a:endParaRPr lang="en-US" sz="2600" dirty="0"/>
           </a:p>
@@ -35297,7 +35297,7 @@
                   <a:schemeClr val="tx1"/>
                 </a:solidFill>
               </a:rPr>
-              <a:t>Реальна облікова ставка ≈6,0% (16% − 10,0%) проти ≈7,4% місяцем раніше: інфляція «з'їла» вересневе підвищення; депозитні ставки реагують із лагом</a:t>
+              <a:t>Реальна ставка: від очікувань аналітиків ≈8,1%, від нашого прогнозу на рік уперед ≈7,0%, від фактичної інфляції ≈6,0% (місяцем раніше — ≈7,4%); депозити реагують слабко</a:t>
             </a:r>
             <a:endParaRPr lang="en-US" sz="1300" dirty="0"/>
           </a:p>
@@ -35503,7 +35503,7 @@
                 <a:ea typeface="Cambria" pitchFamily="34" charset="-122"/>
                 <a:cs typeface="Cambria" pitchFamily="34" charset="-120"/>
               </a:rPr>
-              <a:t>Економіка сповільнюється: ВВП III кв. гірший за прогноз, зарплати +25%</a:t>
+              <a:t>Економіка сповільнюється: ВВП III кв. гірший за прогноз, а зарплати +21–25%</a:t>
             </a:r>
             <a:endParaRPr lang="en-US" sz="2600" dirty="0"/>
           </a:p>
@@ -35915,7 +35915,7 @@
                   <a:schemeClr val="tx1"/>
                 </a:solidFill>
               </a:rPr>
-              <a:t>Дефіцит кадрів: номінальні зарплати +25% р/р у червні, реальні +17% — тиск на ціни послуг</a:t>
+              <a:t>Дефіцит кадрів: номінальні зарплати +21–25% р/р у січні–червні (червень — +25%) — тиск на ціни послуг</a:t>
             </a:r>
             <a:endParaRPr lang="en-US" sz="1300" dirty="0"/>
           </a:p>
@@ -36104,7 +36104,7 @@
                 <a:solidFill>
                   <a:srgbClr val="5F6B6D"/>
                 </a:solidFill>
-                <a:hlinkClick r:id="rId2" invalidUrl="" action="" tgtFrame="" tooltip="https://bank.gov.ua/ua/news/all/natsionalniy-bank-ukrayini-pidvischiv-oblikovu-stavku-do-16" history="1" highlightClick="0" endSnd="0">
+                <a:hlinkClick r:id="rId2" invalidUrl="" action="" tgtFrame="" tooltip="https://bank.gov.ua/ua/news/all/mijnarodni-rezervi-stanovili-471-mlrd-dol-ssha-za-pidsumkami-veresnya" history="1" highlightClick="0" endSnd="0">
                   <a:extLst>
                     <a:ext uri="{A12FA001-AC4F-418D-AE19-62706E023703}">
                       <ahyp:hlinkClr xmlns:ahyp="http://schemas.microsoft.com/office/drawing/2018/hyperlinkcolor" val="tx"/>
@@ -36112,7 +36112,36 @@
                   </a:extLst>
                 </a:hlinkClick>
               </a:rPr>
-              <a:t>рішення НБУ 17.09.2026</a:t>
+              <a:t>НБУ: резерви у вересні (USL $3,81 млрд)</a:t>
+            </a:r>
+            <a:pPr indent="0" marL="0">
+              <a:buNone/>
+            </a:pPr>
+            <a:r>
+              <a:rPr lang="en-US" sz="900" dirty="0">
+                <a:solidFill>
+                  <a:srgbClr val="5F6B6D"/>
+                </a:solidFill>
+              </a:rPr>
+              <a:t> · </a:t>
+            </a:r>
+            <a:pPr indent="0" marL="0">
+              <a:buNone/>
+            </a:pPr>
+            <a:r>
+              <a:rPr lang="en-US" sz="900" u="sng" dirty="0">
+                <a:solidFill>
+                  <a:srgbClr val="5F6B6D"/>
+                </a:solidFill>
+                <a:hlinkClick r:id="rId3" invalidUrl="" action="" tgtFrame="" tooltip="https://epravda.com.ua/finances/valyutniy-rinok-ukrajini-rezultati-troh-rokiv-rezhimu-kerovanoji-gnuchkosti-826509/" history="1" highlightClick="0" endSnd="0">
+                  <a:extLst>
+                    <a:ext uri="{A12FA001-AC4F-418D-AE19-62706E023703}">
+                      <ahyp:hlinkClr xmlns:ahyp="http://schemas.microsoft.com/office/drawing/2018/hyperlinkcolor" val="tx"/>
+                    </a:ext>
+                  </a:extLst>
+                </a:hlinkClick>
+              </a:rPr>
+              <a:t>А. Пишний: три роки керованої гнучкості</a:t>
             </a:r>
             <a:endParaRPr lang="en-US" sz="900" dirty="0"/>
           </a:p>
@@ -36127,7 +36156,7 @@
           <p:nvPr/>
         </p:nvPicPr>
         <p:blipFill>
-          <a:blip r:embed="rId3"/>
+          <a:blip r:embed="rId4"/>
           <a:stretch>
             <a:fillRect/>
           </a:stretch>
@@ -36412,7 +36441,7 @@
                   <a:schemeClr val="tx1"/>
                 </a:solidFill>
               </a:rPr>
-              <a:t>Курс стабільний (≈51,5 грн/€, ≈44,7 грн/$) — ціною резервів</a:t>
+              <a:t>Курс заморожений: ≈44,7 грн/$ з червня (за рік до того — +8%); продаж валюти здебільшого «доносить» допомогу: у вересні уряд конвертував $3,81 млрд оборонного траншу</a:t>
             </a:r>
             <a:endParaRPr lang="en-US" sz="1300" dirty="0"/>
           </a:p>

--- a/presentation/NBU_University_Challenge_2026.pptx
+++ b/presentation/NBU_University_Challenge_2026.pptx
@@ -42,10 +42,9 @@
     <p:sldId id="290" r:id="rId36"/>
     <p:sldId id="291" r:id="rId37"/>
     <p:sldId id="292" r:id="rId38"/>
-    <p:sldId id="293" r:id="rId39"/>
   </p:sldIdLst>
   <p:notesMasterIdLst>
-    <p:notesMasterId r:id="rId40"/>
+    <p:notesMasterId r:id="rId39"/>
   </p:notesMasterIdLst>
   <p:sldSz cx="12192000" cy="6858000"/>
   <p:notesSz cx="6858000" cy="12192000"/>
@@ -144,13 +143,13 @@
   <p:extLst>
     <p:ext uri="{521415D9-36F7-43E2-AB2F-B90AF26B5E84}">
       <p14:sectionLst xmlns:p14="http://schemas.microsoft.com/office/powerpoint/2010/main">
-        <p14:section name="Вступ" id="{a1006d6e-3952-7adb-ca90-c791dd7f6471}">
+        <p14:section name="Вступ" id="{4558f1a8-d001-6588-b31d-c7cc627e8a66}">
           <p14:sldIdLst>
             <p14:sldId id="256"/>
             <p14:sldId id="257"/>
           </p14:sldIdLst>
         </p14:section>
-        <p14:section name="Огляд" id="{68da3b16-8ffe-0de5-0a30-0d27e82ce2d3}">
+        <p14:section name="Огляд" id="{5d68b1f8-c230-f6c9-5904-cb096bf21666}">
           <p14:sldIdLst>
             <p14:sldId id="258"/>
             <p14:sldId id="259"/>
@@ -160,7 +159,7 @@
             <p14:sldId id="263"/>
           </p14:sldIdLst>
         </p14:section>
-        <p14:section name="Прогноз" id="{44eee43b-04b2-90b7-ceea-3900f7b9b737}">
+        <p14:section name="Прогноз" id="{ecf150a5-b719-7fd5-3d60-e41dcaf34b5c}">
           <p14:sldIdLst>
             <p14:sldId id="264"/>
             <p14:sldId id="265"/>
@@ -170,7 +169,7 @@
             <p14:sldId id="269"/>
           </p14:sldIdLst>
         </p14:section>
-        <p14:section name="Рекомендації" id="{6be68f3e-152e-f990-e623-623289603899}">
+        <p14:section name="Рекомендації" id="{bf6b9561-81e6-7807-9efe-eeda79c76b84}">
           <p14:sldIdLst>
             <p14:sldId id="270"/>
             <p14:sldId id="271"/>
@@ -181,7 +180,7 @@
             <p14:sldId id="276"/>
           </p14:sldIdLst>
         </p14:section>
-        <p14:section name="Додатки" id="{e3a3b465-782e-da45-beea-0e6329f9942b}">
+        <p14:section name="Додатки" id="{2fceb1ac-0a6e-2456-0ac7-bb3717483852}">
           <p14:sldIdLst>
             <p14:sldId id="277"/>
             <p14:sldId id="278"/>
@@ -199,7 +198,6 @@
             <p14:sldId id="290"/>
             <p14:sldId id="291"/>
             <p14:sldId id="292"/>
-            <p14:sldId id="293"/>
           </p14:sldIdLst>
         </p14:section>
       </p14:sectionLst>
@@ -606,7 +604,7 @@
           <a:p>
             <a:r>
               <a:rPr lang="en-US" dirty="0"/>
-              <a:t>Добрий день, шановні члени журі. Ми — Команда [назва]. Сьогодні представимо наші рекомендації для засідання Правління НБУ 29 жовтня 2026 року. Усі дані — станом на 20 жовтня.</a:t>
+              <a:t>Добрий день, шановні члени журі. Ми — Команда [назва]. Сьогодні представимо наші рекомендації для засідання Правління НБУ 29 жовтня 2026 року. Усі дані — станом на 24 жовтня.</a:t>
             </a:r>
             <a:endParaRPr lang="en-US" dirty="0"/>
           </a:p>
@@ -694,7 +692,7 @@
           <a:p>
             <a:r>
               <a:rPr lang="en-US" dirty="0"/>
-              <a:t>Тепер — прогноз. Ми взяли квартальну прогнозну модель НБУ, переписали її на Python і розширили. Дані завантажуються автоматично, фільтр Калмана оцінює розриви й тренди, далі — прогноз із судженнями й аналіз політики. Наше розширення — окремо базова й небазова інфляція і канал світових цін на нафту: нафта на 20% дорожча додає 0,3 пункта до інфляції, а ставка реагує слабко. Той самий файл моделі ми проганяємо в MATLAB з IRIS: розбіжність — у п'ятому знаку, а графіки сценаріїв у презентації побудовані в MATLAB.</a:t>
+              <a:t>Тепер — прогноз. Ми взяли квартальну прогнозну модель НБУ, переписали її на Python і розширили. Дані завантажуються автоматично, фільтр Калмана оцінює розриви й тренди, далі — прогноз із судженнями й аналіз політики. Наше розширення — окремо базова й небазова інфляція і канал світових цін на нафту: нафта на 20% дорожча додає 0,3 пункта до інфляції, а ставка реагує слабко. Той самий файл моделі, дані й плани ми проганяємо в MATLAB з IRIS для звірки: розбіжність — у п'ятому знаку.</a:t>
             </a:r>
             <a:endParaRPr lang="en-US" dirty="0"/>
           </a:p>
@@ -782,7 +780,7 @@
           <a:p>
             <a:r>
               <a:rPr lang="en-US" dirty="0"/>
-              <a:t>Для найближчих місяців ми будуємо короткостроковий прогноз: трендовий темп цін, сезонність і поправка на разовість вересневого стрибка. Тренд — 0,97% на місяць. До того ж діє ефект бази: у жовтні–грудні 2025 ціни зросли лише на 1,5%. Тому річна інфляція підніметься до 11,3% у грудні — помітно вище, ніж НБУ прогнозував у липні. Базову інфляцію рахуємо тим самим методом: у грудні — 9,5%.</a:t>
+              <a:t>Для найближчих місяців ми будуємо короткостроковий прогноз: трендовий темп цін, сезонність і поправка на разовість вересневого стрибка. Тренд — 1,19% на місяць. До того ж діє ефект бази: у жовтні–грудні 2025 ціни зросли лише на 1,5%. Тому річна інфляція підніметься до 12,1% у грудні — помітно вище, ніж НБУ прогнозував у липні. Базову інфляцію рахуємо тим самим методом: у грудні — 9,6%.</a:t>
             </a:r>
             <a:endParaRPr lang="en-US" dirty="0"/>
           </a:p>
@@ -870,7 +868,7 @@
           <a:p>
             <a:r>
               <a:rPr lang="en-US" dirty="0"/>
-              <a:t>Базовий прогноз. Нагадаю: ціль НБУ — 5% без діапазону відхилень, і повернути інфляцію до неї треба на горизонті до трьох років. У середньому за квартал інфляція досягне піку — близько 11,1% — на початку 2027 року; у місячному вимірі це близько 11% у грудні. Далі вона знизиться до 6,6% у четвертому кварталі 2027-го, повернеться до близько 5% у 2028 році і далі триматиметься в межах 4,4–5,2%. Базова інфляція в нас стійкіша, ніж у НБУ: 5,4% наприкінці 2027 року проти 5,1% — через перегрітий ринок праці й дорожчі послуги. Ставка — 17% до середини 2027 року, далі поступово знижується до 10,5% наприкінці 2028-го. Невизначеність велика — це показує віяло.</a:t>
+              <a:t>Базовий прогноз. Нагадаю: ціль НБУ — 5% без діапазону відхилень, і повернути інфляцію до неї треба на горизонті до трьох років. У середньому за квартал інфляція досягне піку — близько 11,2% — наприкінці 2026 року; у місячному вимірі це близько 12% у грудні. Далі вона знизиться до 5,4% у четвертому кварталі 2027-го, у 2028 році опуститься нижче цілі — до 3,8–4,8%, бо нафта дешевшає за ф'ючерсами, а попит слабкий, — і стабілізується біля 5% у 2029 році. Базова інфляція в нас нижча, ніж у НБУ: 4,2% у середньому за четвертий квартал 2027 року, у грудневому вимірі — близько 3,7%, проти 5,1% у НБУ. Ставка — 17% до середини 2027 року, далі поступово знижується до 10,5% наприкінці 2028-го. Невизначеність велика — це показує віяло.</a:t>
             </a:r>
             <a:endParaRPr lang="en-US" dirty="0"/>
           </a:p>
@@ -958,7 +956,7 @@
           <a:p>
             <a:r>
               <a:rPr lang="en-US" dirty="0"/>
-              <a:t>Тепер — попит. ВВП ми бачимо слабшим, ніж НБУ в липні: 0,6% цього року, 0,3% у 2027-му і 1,6% у 2028-му. Мінекономіки теж погіршує прогноз — до 0,8–1% на 2027 рік. Але потенціал економіки постраждав ще більше: атаки й дефіцит кадрів. Тому розрив ВВП зараз додатний, і ціни послуг ростуть. Бюджетного стимулу ми не закладаємо: дефіцит скорочується з 35 до 26% ВВП. У 2027 році висока реальна ставка охолоджує попит, і розрив закривається — це ціна повернення інфляції до цілі.</a:t>
+              <a:t>Тепер — попит. ВВП ми бачимо слабшим, ніж НБУ в липні: 0,5% цього року, −0,2% у 2027-му і 2,4% у 2028-му. Мінекономіки теж погіршує прогноз — до 0,8–1% на 2027 рік. Але потенціал економіки постраждав ще більше: атаки й дефіцит кадрів. Тому розрив ВВП зараз додатний, і ціни послуг ростуть. Бюджетного стимулу ми не закладаємо: дефіцит скорочується з 35 до 26% ВВП. У 2027 році висока реальна ставка охолоджує попит, і розрив закривається — це ціна повернення інфляції до цілі.</a:t>
             </a:r>
             <a:endParaRPr lang="en-US" dirty="0"/>
           </a:p>
@@ -1046,7 +1044,7 @@
           <a:p>
             <a:r>
               <a:rPr lang="en-US" dirty="0"/>
-              <a:t>Ми розглянули чотири ризикові сценарії, розраховані в MATLAB. Найнебезпечніший — дефіцит фінансування: якщо допомога затримається, гривня буде приблизно на 6% слабшою, інфляція зросте до 13,1%, а ставку доведеться підняти до 19,3%. Важка зима з ударами по енергетиці підніме інфляцію до 12,5% і майже зупинить зростання ВВП. Натомість нафта по 120 доларів додає лише 0,4 пункта до піку інфляції, і ставка майже не реагує — це шок першого раунду. Головний ризик — курс: якщо гривня слабшатиме так, як чекає ринок, інфляція наприкінці 2027 року сягне близько 12%. Розбалансування очікувань дало б близько 9%, а ПДВ 21% — плюс пів пункта.</a:t>
+              <a:t>Ми розглянули чотири ризикові сценарії. Найнебезпечніший — дефіцит фінансування: якщо допомога затримається, гривня буде приблизно на 6% слабшою, інфляція зросте до 13,0%, а ставку доведеться підняти до 19,3%. Важка зима з ударами по енергетиці підніме інфляцію до 12,4% і майже зупинить зростання ВВП. Натомість нафта по 120 доларів додає лише 0,1 пункта до піку інфляції, і ставка майже не реагує — це шок першого раунду. Ще два ризики для інфляції 2027 року — курс і очікування: якщо гривня слабшатиме так, як чекає ринок, інфляція наприкінці 2027 року буде близько 7% замість 5%, розбалансування очікувань дало б близько 7%, а ПДВ 21% — ще 0,3 пункта до піку.</a:t>
             </a:r>
             <a:endParaRPr lang="en-US" dirty="0"/>
           </a:p>
@@ -1310,7 +1308,7 @@
           <a:p>
             <a:r>
               <a:rPr lang="en-US" dirty="0"/>
-              <a:t>Ми порівняли чотири варіанти рішення — від утримання 16% до підвищення до 17,5%. У кожному ставка утримується до середини 2027 року, а далі знижується так, щоб інфляція повернулася саме до 5%. Критерій — втрати: відхилення інфляції від цілі, розрив ВВП і різкі зміни ставки. Адмінціни ми враховуємо наполовину: вони ростуть щороку, але це перший раунд. Мінімум втрат — від 17 до 18,5% залежно від ваги згладжування, за центральної — 17,5%; оптимальна траєкторія починається з 17,6% і в першому кварталі 2027-го підіймається до 18,1%. Ми перевірили рішення на десяти сценаріях: найменші очікувані втрати — 17 і 17,5%. Тому — пункт зараз і готовність до ще пів пункта, а не півтора пункта одразу.</a:t>
+              <a:t>Ми порівняли чотири варіанти рішення — від утримання 16% до підвищення до 17,5%. У кожному ставка утримується до середини 2027 року, а далі знижується так, щоб інфляція повернулася саме до 5%. Критерій — втрати: відхилення інфляції від цілі, розрив ВВП і різкі зміни ставки. Адмінціни ми враховуємо наполовину: вони ростуть щороку, але це перший раунд. Мінімум втрат — від 16 до 17% залежно від ваги згладжування, за центральної — 16,5%; оптимальна траєкторія починається з 16,9% і в першому кварталі 2027-го підіймається до 16,9%. Ми перевірили рішення на десяти сценаріях: найменші очікувані втрати — на 16,5 і 17%, і 17% — серед них. Тому ми обираємо пункт зараз і готовність до ще пів пункта в грудні, коли буде оновлений прогноз НБУ, а не півтора пункта одразу.</a:t>
             </a:r>
             <a:endParaRPr lang="en-US" dirty="0"/>
           </a:p>
@@ -1398,7 +1396,7 @@
           <a:p>
             <a:r>
               <a:rPr lang="en-US" dirty="0"/>
-              <a:t>Тому перша рекомендація — підвищити облікову ставку до 17%. Чому підвищити: інфляція в грудні сягне близько 11%, базова інфляція прискорюється, курсові ризики високі, а гнучкіший курс потребує сильного якоря для очікувань. Ринок чекає 16,5%, але ризики зміщені вгору, і НБУ вже робив крок у пункт — у січні й березні 2025 року. Чому не більше: економіка слабка, а півтора пункта одразу — надмірний сигнал. Щоб підвищення дійшло до депозитів, обсяги тендерів депсертифікатів варто обмежити. Орієнтир: не знижувати ставку щонайменше до третього кварталу 2027 року, а наступний крок — радше вгору: ще пів пункта в грудні, якщо базова інфляція не сповільниться або посиляться курсові очікування.</a:t>
+              <a:t>Тому перша рекомендація — підвищити облікову ставку до 17%. Чому підвищити: інфляція в грудні сягне близько 12%, базова інфляція прискорюється, курсові ризики високі, а гнучкіший курс потребує сильного якоря для очікувань. Ринок не чекає різкого посилення, але ризики зміщені вгору, і НБУ вже робив крок у пункт — у січні й березні 2025 року. Чому не більше: економіка слабка, а півтора пункта одразу — надмірний сигнал до оновленого прогнозу НБУ. Щоб підвищення дійшло до депозитів, обсяги тендерів депсертифікатів варто обмежити. Орієнтир: не знижувати ставку щонайменше до третього кварталу 2027 року, а наступний крок — радше вгору: ще пів пункта в грудні, якщо базова інфляція не сповільниться або посиляться курсові очікування.</a:t>
             </a:r>
             <a:endParaRPr lang="en-US" dirty="0"/>
           </a:p>
@@ -1486,7 +1484,7 @@
           <a:p>
             <a:r>
               <a:rPr lang="en-US" dirty="0"/>
-              <a:t>Друга рекомендація — щодо курсу. НБУ продає близько 5,0 мільярда доларів на місяць, а надходить близько 3,7. Якщо так і залишиться, на кінець року резерви становитимуть 43 мільярди. Структурно попит на валюту високий: імпорт у 2,6 раза більший за експорт, а офіційне фінансування скоротиться з 87 до 33 мільярдів у 2028 році. Водночас продаж валюти здебільшого «доносить» допомогу до ринку, тож резерви визначає її ритм, а не курс. Наша рекомендація щодо курсу інша: не заморожувати його. З червня гривня стоїть біля 44,7 за долар, хоча за рік до того послабилася на 8%. Курс має поглинати шоки, а НБУ — лише згладжувати коливання.</a:t>
+              <a:t>Друга рекомендація — щодо курсу. НБУ продає близько 5,0 мільярда доларів на місяць, а надходить близько 3,7. Якщо так і залишиться, на кінець року резерви становитимуть 43 мільярди. Структурно попит на валюту високий: імпорт у 2,6 раза більший за експорт, а офіційне фінансування скоротиться з 87 до 33 мільярдів у 2028 році. Водночас продаж валюти здебільшого «доносить» допомогу до ринку, тож резерви визначає її ритм, а не курс. Наша рекомендація щодо курсу інша: не фіксувати його. Чотири місяці гривня стояла біля 44,7 за долар, а в жовтні послабилася до 45,1 — за рік це плюс 8%, і це нормальна робота амортизатора. Курс має поглинати шоки, а НБУ — лише згладжувати коливання.</a:t>
             </a:r>
             <a:endParaRPr lang="en-US" dirty="0"/>
           </a:p>
@@ -1574,7 +1572,7 @@
           <a:p>
             <a:r>
               <a:rPr lang="en-US" dirty="0"/>
-              <a:t>Почнемо з головного. Ми пропонуємо три рішення, які працюють як єдиний пакет. Перше — підвищити облікову ставку на 1 пункт, до 17%, і утримувати її щонайменше до середини 2027 року: у вересні інфляція сягнула 10%, у грудні буде близько 11%. Друге — не заморожувати курс: з червня гривня стоїть біля 45 за долар, а курс має поглинати шоки. І обмежити обсяги тендерів депсертифікатів, щоб підвищення дійшло до депозитів. Третє — поставити на паузу наступні кроки валютної лібералізації, доки не відновляться резерви. За такої політики інфляція знизиться до 6,6% у четвертому кварталі 2027 року і повернеться до близько 5% у 2028 році — у межах трирічного горизонту НБУ.</a:t>
+              <a:t>Почнемо з головного. Ми пропонуємо три рішення, які працюють як єдиний пакет. Перше — підвищити облікову ставку на 1 пункт, до 17%, і утримувати її щонайменше до середини 2027 року: у вересні інфляція сягнула 10%, у грудні буде близько 12%. Друге — не заморожувати курс: у жовтні гривня послабилася до 45,1 за долар, і це правильно — курс має поглинати шоки. І обмежити обсяги тендерів депсертифікатів, щоб підвищення дійшло до депозитів. Третє — поставити на паузу наступні кроки валютної лібералізації, доки не відновляться резерви. За такої політики інфляція знизиться до 5,4% у четвертому кварталі 2027 року і повернеться до цілі у 2029 році — у межах трирічного горизонту НБУ.</a:t>
             </a:r>
             <a:endParaRPr lang="en-US" dirty="0"/>
           </a:p>
@@ -1750,7 +1748,7 @@
           <a:p>
             <a:r>
               <a:rPr lang="en-US" dirty="0"/>
-              <a:t>Підсумуємо. Перше — підвищити облікову ставку до 17% і утримувати щонайменше до середини 2027 року. Друге — не заморожувати курс і обмежити обсяги депсертифікатів. Третє — пауза в лібералізації валютних обмежень. Формула комунікації — «ставка — якір, курс — амортизатор». За такої політики інфляція повернеться до близько 5% у 2028 році. Дякуємо за увагу! Будемо раді відповісти на ваші запитання.</a:t>
+              <a:t>Підсумуємо. Перше — підвищити облікову ставку до 17% і утримувати щонайменше до середини 2027 року. Друге — не заморожувати курс і обмежити обсяги депсертифікатів. Третє — пауза в лібералізації валютних обмежень. Формула комунікації — «ставка — якір, курс — амортизатор». За такої політики інфляція повернеться до цілі у 2029 році. Дякуємо за увагу! Будемо раді відповісти на ваші запитання.</a:t>
             </a:r>
             <a:endParaRPr lang="en-US" dirty="0"/>
           </a:p>
@@ -2014,7 +2012,7 @@
           <a:p>
             <a:r>
               <a:rPr lang="en-US" dirty="0"/>
-              <a:t>Причина — залежність бюджету від допомоги. Дефіцит без грантів — близько 35% ВВП, потреба у зовнішньому фінансуванні — 87 мільярдів доларів, а влітку надходження затрималися. Оборонний кредит USL — водночас бюджетний імпульс для попиту і додатковий попит на валюту. Уряд у Бюджетній декларації закладає інфляцію 8,9% наприкінці 2027 року — вище, ніж НБУ і ми.</a:t>
+              <a:t>Причина — залежність бюджету від допомоги. Дефіцит без грантів — близько 35% ВВП, потреба у зовнішньому фінансуванні — 87 мільярдів доларів, а влітку надходження затрималися. Оборонний кредит USL підтримує попит через локалізацію ОПК і водночас створює попит на валюту, але загалом дефіцит скорочується, тож окремого бюджетного стимулу ми не закладаємо. Уряд у Бюджетній декларації закладає інфляцію 8,9% наприкінці 2027 року — вище, ніж НБУ і ми.</a:t>
             </a:r>
             <a:endParaRPr lang="en-US" dirty="0"/>
           </a:p>
@@ -2102,7 +2100,7 @@
           <a:p>
             <a:r>
               <a:rPr lang="en-US" dirty="0"/>
-              <a:t>Що ми змінили в моделі. У шаблоні одна крива Філіпса для всієї інфляції, тож нафтовий шок дає хибні коливання через курс. Ми розділили інфляцію на базову і небазову: небазові ціни реагують на нафту та курс. Нафта на 20% дорожча — це плюс 0,3 пункта до інфляції впродовж року, ставка зростає лише на 0,2 пункта, а базова інфляція не прискорюється. Без цього каналу модель точно збігається з шаблоном НБУ.</a:t>
+              <a:t>Що ми змінили в моделі. У шаблоні одна крива Філіпса для всієї інфляції, тож нафтовий шок дає хибні коливання через курс. Ми розділили інфляцію на базову і небазову: небазові ціни реагують на нафту та курс. Нафта на 20% дорожча — це плюс 0,3 пункта до інфляції впродовж року, ставка зростає лише на 0,2 пункта, а базова інфляція не прискорюється. Без нафтового каналу функції відгуку моделі збігаються з шаблоном НБУ.</a:t>
             </a:r>
             <a:endParaRPr lang="en-US" dirty="0"/>
           </a:p>
@@ -2278,7 +2276,7 @@
           <a:p>
             <a:r>
               <a:rPr lang="en-US" dirty="0"/>
-              <a:t>Важлива відмінність від НБУ — базова інфляція. Ми вважаємо, що вона буде стійкішою: 5,4% наприкінці 2027 року проти 5,1% у НБУ. Причина — перегрітий ринок праці, дорожчі послуги й наслідки атак. Загальна інфляція при цьому близька до НБУ: тарифи й акцизи додають близько 1,7 пункта на рік, а дешевша нафта частково це компенсує. Висновок: підвищити ставку зараз, щоб швидше пом'якшити її пізніше.</a:t>
+              <a:t>Окремо про базову інфляцію. Наша оцінка на четвертий квартал 2027 року — 4,2% у середньому за квартал, тобто близько 3,7% у грудні, проти 5,1% у НБУ — нижча, ніж у НБУ. У моделі її тримають додатний розрив ВВП, перенесення вересневого шоку витрат і курсу та шок витрат опалювального сезону. Загальна інфляція при цьому близька до НБУ: тарифи й акцизи додають близько 1,7 пункта на рік, а дешевша нафта частково це компенсує. Висновок: підвищити ставку зараз, щоб швидше пом'якшити її пізніше.</a:t>
             </a:r>
             <a:endParaRPr lang="en-US" dirty="0"/>
           </a:p>
@@ -2630,7 +2628,7 @@
           <a:p>
             <a:r>
               <a:rPr lang="en-US" dirty="0"/>
-              <a:t>Розраховано поверх базового сценарію, як і основні сценарії: правило Тейлора реагує на нові шоки. Найсильніший — курс: модель передає послаблення гривні в ціни швидко (перенос у шаблоні — верхня межа: ICU з курсом ≈49 грн/$ чекає 8,2% інфляції наприкінці 2027), тому реальний ефект, імовірно, менший.</a:t>
+              <a:t>Розраховано поверх базового сценарію, як і основні сценарії: правило Тейлора реагує на нові шоки. Найсильніший — курс: модель передає послаблення гривні в ціни швидко (перенос у шаблоні ≈0,75 за рік — верхня межа; в останні роки фактичний перенос був нижчим), тому реальний ефект, імовірно, менший.</a:t>
             </a:r>
             <a:endParaRPr lang="en-US" dirty="0"/>
           </a:p>
@@ -2894,7 +2892,7 @@
           <a:p>
             <a:r>
               <a:rPr lang="en-US" dirty="0"/>
-              <a:t>Чим сильніше НБУ контролює курс (β → 1), тим слабше ставка впливає на курс і інфляцію — валютний канал головний. Функції відгуку розраховано в MATLAB/IRIS.</a:t>
+              <a:t>Чим сильніше НБУ контролює курс (β → 1), тим слабше ставка впливає на курс і інфляцію — валютний канал головний. Функції відгуку побудовано в Python; з вагою нафти 0 вони збігаються з опублікованими MATLAB-результатами шаблону (тест).</a:t>
             </a:r>
             <a:endParaRPr lang="en-US" dirty="0"/>
           </a:p>
@@ -3070,7 +3068,7 @@
           <a:p>
             <a:r>
               <a:rPr lang="en-US" dirty="0"/>
-              <a:t>Лінії — розрахунок у Python, кружки — у MATLAB R2026b з IRIS. Це підтверджує, що наш Python-порт і розширення моделі коректні, а графіки MATLAB у презентації відповідають тим самим цифрам.</a:t>
+              <a:t>Бектест квазіреальний: сезонне згладжування й фільтр бачать лише дані до дати прогнозу, судження й наукасти не використовувалися, зовнішні змінні — фактичні; «факт» — лише опубліковані дані (IV кв. 2026 не оцінюється).</a:t>
             </a:r>
             <a:endParaRPr lang="en-US" dirty="0"/>
           </a:p>
@@ -3158,7 +3156,7 @@
           <a:p>
             <a:r>
               <a:rPr lang="en-US" dirty="0"/>
-              <a:t>Бектест квазіреальний: зовнішні змінні — фактичні, судження не використовувалися.</a:t>
+              <a:t>Значення базового сценарію в II і IV кварталах (рішення 17% у жовтні з утриманням до середини 2027, далі — траєкторія повернення до цілі). Усі квартали — results/tables/baseline_quarterly.csv.</a:t>
             </a:r>
             <a:endParaRPr lang="en-US" dirty="0"/>
           </a:p>
@@ -3246,7 +3244,7 @@
           <a:p>
             <a:r>
               <a:rPr lang="en-US" dirty="0"/>
-              <a:t>Значення базового сценарію в II і IV кварталах (рішення 17% у жовтні з утриманням до середини 2027, далі — траєкторія повернення до цілі). Усі квартали — results/tables/baseline_quarterly.csv.</a:t>
+              <a:t>Усі дані завантажуються скриптами; дата відсічення — 24.10.2026.</a:t>
             </a:r>
             <a:endParaRPr lang="en-US" dirty="0"/>
           </a:p>
@@ -3270,94 +3268,6 @@
             <a:fld id="{F7021451-1387-4CA6-816F-3879F97B5CBC}" type="slidenum">
               <a:rPr lang="en-US"/>
               <a:t>37</a:t>
-            </a:fld>
-            <a:endParaRPr lang="en-US"/>
-          </a:p>
-        </p:txBody>
-      </p:sp>
-    </p:spTree>
-    <p:extLst>
-      <p:ext uri="{BB962C8B-B14F-4D97-AF65-F5344CB8AC3E}">
-        <p14:creationId xmlns:p14="http://schemas.microsoft.com/office/powerpoint/2010/main" val="1024086991"/>
-      </p:ext>
-    </p:extLst>
-  </p:cSld>
-  <p:clrMapOvr>
-    <a:masterClrMapping/>
-  </p:clrMapOvr>
-</p:notes>
-</file>
-
-<file path=ppt/notesSlides/notesSlide38.xml><?xml version="1.0" encoding="utf-8"?>
-<p:notes xmlns:a="http://schemas.openxmlformats.org/drawingml/2006/main" xmlns:r="http://schemas.openxmlformats.org/officeDocument/2006/relationships" xmlns:p="http://schemas.openxmlformats.org/presentationml/2006/main">
-  <p:cSld>
-    <p:spTree>
-      <p:nvGrpSpPr>
-        <p:cNvPr id="1" name=""/>
-        <p:cNvGrpSpPr/>
-        <p:nvPr/>
-      </p:nvGrpSpPr>
-      <p:grpSpPr>
-        <a:xfrm>
-          <a:off x="0" y="0"/>
-          <a:ext cx="0" cy="0"/>
-          <a:chOff x="0" y="0"/>
-          <a:chExt cx="0" cy="0"/>
-        </a:xfrm>
-      </p:grpSpPr>
-      <p:sp>
-        <p:nvSpPr>
-          <p:cNvPr id="2" name="Slide Image Placeholder 1"/>
-          <p:cNvSpPr>
-            <a:spLocks noGrp="1" noRot="1" noChangeAspect="1"/>
-          </p:cNvSpPr>
-          <p:nvPr>
-            <p:ph type="sldImg"/>
-          </p:nvPr>
-        </p:nvSpPr>
-        <p:spPr/>
-      </p:sp>
-      <p:sp>
-        <p:nvSpPr>
-          <p:cNvPr id="3" name="Notes Placeholder 2"/>
-          <p:cNvSpPr>
-            <a:spLocks noGrp="1"/>
-          </p:cNvSpPr>
-          <p:nvPr>
-            <p:ph type="body" idx="1"/>
-          </p:nvPr>
-        </p:nvSpPr>
-        <p:spPr/>
-        <p:txBody>
-          <a:bodyPr/>
-          <a:lstStyle/>
-          <a:p>
-            <a:r>
-              <a:rPr lang="en-US" dirty="0"/>
-              <a:t>Усі дані завантажуються скриптами; дата відсічення — 20.10.2026.</a:t>
-            </a:r>
-            <a:endParaRPr lang="en-US" dirty="0"/>
-          </a:p>
-        </p:txBody>
-      </p:sp>
-      <p:sp>
-        <p:nvSpPr>
-          <p:cNvPr id="4" name="Slide Number Placeholder 3"/>
-          <p:cNvSpPr>
-            <a:spLocks noGrp="1"/>
-          </p:cNvSpPr>
-          <p:nvPr>
-            <p:ph type="sldNum" sz="quarter" idx="10"/>
-          </p:nvPr>
-        </p:nvSpPr>
-        <p:spPr/>
-        <p:txBody>
-          <a:bodyPr/>
-          <a:lstStyle/>
-          <a:p>
-            <a:fld id="{F7021451-1387-4CA6-816F-3879F97B5CBC}" type="slidenum">
-              <a:rPr lang="en-US"/>
-              <a:t>38</a:t>
             </a:fld>
             <a:endParaRPr lang="en-US"/>
           </a:p>
@@ -3422,7 +3332,7 @@
           <a:p>
             <a:r>
               <a:rPr lang="en-US" dirty="0"/>
-              <a:t>Зовнішнє середовище стало помітно проінфляційним. Через війну на Близькому Сході нафта Brent у квітні коштувала в середньому 117 доларів за барель, а у вересні–жовтні знову перевищила 100 — тоді як НБУ в липні закладав 80–85. Ринок очікує здешевлення: ф'ючерси вказують на 87 доларів наприкінці 2027 року, і саме цю криву ми беремо в прогноз. Водночас ЄЦБ підвищує ставку, тож простору для пом'якшення в Україні менше.</a:t>
+              <a:t>Зовнішнє середовище стало помітно проінфляційним. Через війну на Близькому Сході нафта Brent у квітні коштувала в середньому 117 доларів за барель, у вересні — 114, а в жовтні — близько 125 — тоді як НБУ в липні закладав 80–85. Ринок очікує здешевлення: ф'ючерси вказують на 87 доларів наприкінці 2027 року, і саме цю криву ми беремо в прогноз. Водночас ЄЦБ підвищує ставку, тож простору для пом'якшення в Україні менше.</a:t>
             </a:r>
             <a:endParaRPr lang="en-US" dirty="0"/>
           </a:p>
@@ -3686,7 +3596,7 @@
           <a:p>
             <a:r>
               <a:rPr lang="en-US" dirty="0"/>
-              <a:t>Економіка тим часом сповільнюється. ВВП у другому кварталі зріс лише на 0,4% за рік, у третьому — близько 1%, і то завдяки врожаю: це суттєво гірше прогнозу НБУ. Але атаки й дефіцит кадрів б'ють по потенціалу ще сильніше, ніж по попиту. Тому ринок праці перегрітий: номінальні зарплати цього року зростають на 21–25%. Тож навіть за слабкого ВВП тиск на ціни послуг зберігається.</a:t>
+              <a:t>Економіка тим часом сповільнюється. ВВП у другому кварталі зріс лише на 0,4% за рік, у третьому — близько 1%, і то завдяки врожаю: це суттєво гірше прогнозу НБУ. Але атаки й дефіцит кадрів б'ють по потенціалу ще сильніше, ніж по попиту. Ринок праці напружений: номінальні зарплати цього року зростають на 21–25%. Тож навіть за слабкого ВВП тиск на ціни послуг зберігається.</a:t>
             </a:r>
             <a:endParaRPr lang="en-US" dirty="0"/>
           </a:p>
@@ -3774,7 +3684,7 @@
           <a:p>
             <a:r>
               <a:rPr lang="en-US" dirty="0"/>
-              <a:t>Найгостріша проблема — валютний ринок. НБУ продає в середньому близько 5,0 мільярда доларів на місяць, у вересні — рекордні 5,5 мільярда. Резерви за два місяці скоротилися з 51,2 до 47,1 мільярда, тоді як НБУ очікував 53,8. Але важливо: продаж валюти здебільшого «доносить» допомогу на ринок — у вересні уряд конвертував 3,81 мільярда оборонного траншу. Тож резерви падають через ритм допомоги. А курс із червня майже нерухомий — близько 44,7 гривні за долар.</a:t>
+              <a:t>Найгостріша проблема — валютний ринок. НБУ продає в середньому близько 5,0 мільярда доларів на місяць, у вересні — рекордні 5,5 мільярда. Резерви за два місяці скоротилися з 51,2 до 47,1 мільярда, тоді як НБУ очікував 53,8. Але важливо: продаж валюти здебільшого «доносить» допомогу на ринок — у вересні уряд конвертував 3,81 мільярда оборонного траншу. Тож резерви падають через ритм допомоги. Курс чотири місяці стояв біля 44,7 гривні за долар, а в жовтні НБУ допустив послаблення до 45,1.</a:t>
             </a:r>
             <a:endParaRPr lang="en-US" dirty="0"/>
           </a:p>
@@ -6545,7 +6455,7 @@
                 <a:ea typeface="Cambria" pitchFamily="34" charset="-122"/>
                 <a:cs typeface="Cambria" pitchFamily="34" charset="-120"/>
               </a:rPr>
-              <a:t>~1e−5</a:t>
+              <a:t>1e−5*</a:t>
             </a:r>
             <a:endParaRPr lang="en-US" sz="3400" dirty="0"/>
           </a:p>
@@ -6581,7 +6491,7 @@
                   <a:schemeClr val="tx1"/>
                 </a:solidFill>
               </a:rPr>
-              <a:t>розбіжність Python і MATLAB/IRIS: фільтр і всі 5 сценаріїв</a:t>
+              <a:t>розбіжність Python і MATLAB/IRIS на тому самому файлі моделі: фільтр і всі 5 сценаріїв (* звірка від 21.10 на попередніх даних; після оновлення 25.10 run_check.m треба перезапустити)</a:t>
             </a:r>
             <a:endParaRPr lang="en-US" sz="1400" dirty="0"/>
           </a:p>
@@ -6620,7 +6530,7 @@
                 <a:ea typeface="Cambria" pitchFamily="34" charset="-122"/>
                 <a:cs typeface="Cambria" pitchFamily="34" charset="-120"/>
               </a:rPr>
-              <a:t>0,8–1,0 в. п.</a:t>
+              <a:t>0,4–1,8 в. п.</a:t>
             </a:r>
             <a:endParaRPr lang="en-US" sz="3400" dirty="0"/>
           </a:p>
@@ -6656,7 +6566,7 @@
                   <a:schemeClr val="tx1"/>
                 </a:solidFill>
               </a:rPr>
-              <a:t>помилка ІСЦ на рік уперед, 3 прогони 2025 р. із фактичними зовнішніми умовами («без змін»: 1,3–6,1)</a:t>
+              <a:t>помилка ІСЦ на 1–4 кв. уперед, 3 прогони 2025 р. із фактичними зовнішніми умовами («без змін»: 1,3–6,1)</a:t>
             </a:r>
             <a:endParaRPr lang="en-US" sz="1400" dirty="0"/>
           </a:p>
@@ -6833,7 +6743,7 @@
         <p:spPr>
           <a:xfrm>
             <a:off x="4805172" y="5349240"/>
-            <a:ext cx="1220724" cy="365760"/>
+            <a:ext cx="1842516" cy="365760"/>
           </a:xfrm>
           <a:prstGeom prst="roundRect">
             <a:avLst>
@@ -6860,7 +6770,7 @@
         <p:spPr>
           <a:xfrm>
             <a:off x="4805172" y="5349240"/>
-            <a:ext cx="1220724" cy="365760"/>
+            <a:ext cx="1842516" cy="365760"/>
           </a:xfrm>
           <a:prstGeom prst="rect">
             <a:avLst/>
@@ -6881,7 +6791,7 @@
                   <a:schemeClr val="accent1"/>
                 </a:solidFill>
               </a:rPr>
-              <a:t>Наукаст ІСЦ</a:t>
+              <a:t>Наукаст ІСЦ і курсу</a:t>
             </a:r>
             <a:endParaRPr lang="en-US" sz="1200" dirty="0"/>
           </a:p>
@@ -6895,7 +6805,7 @@
         </p:nvSpPr>
         <p:spPr>
           <a:xfrm>
-            <a:off x="6163056" y="5349240"/>
+            <a:off x="6784848" y="5349240"/>
             <a:ext cx="1920240" cy="365760"/>
           </a:xfrm>
           <a:prstGeom prst="roundRect">
@@ -6922,7 +6832,7 @@
         </p:nvSpPr>
         <p:spPr>
           <a:xfrm>
-            <a:off x="6163056" y="5349240"/>
+            <a:off x="6784848" y="5349240"/>
             <a:ext cx="1920240" cy="365760"/>
           </a:xfrm>
           <a:prstGeom prst="rect">
@@ -6958,7 +6868,7 @@
         </p:nvSpPr>
         <p:spPr>
           <a:xfrm>
-            <a:off x="8220456" y="5349240"/>
+            <a:off x="8842248" y="5349240"/>
             <a:ext cx="1531620" cy="365760"/>
           </a:xfrm>
           <a:prstGeom prst="roundRect">
@@ -6985,7 +6895,7 @@
         </p:nvSpPr>
         <p:spPr>
           <a:xfrm>
-            <a:off x="8220456" y="5349240"/>
+            <a:off x="8842248" y="5349240"/>
             <a:ext cx="1531620" cy="365760"/>
           </a:xfrm>
           <a:prstGeom prst="rect">
@@ -7021,7 +6931,7 @@
         </p:nvSpPr>
         <p:spPr>
           <a:xfrm>
-            <a:off x="9889236" y="5349240"/>
+            <a:off x="457200" y="5806440"/>
             <a:ext cx="1687068" cy="365760"/>
           </a:xfrm>
           <a:prstGeom prst="roundRect">
@@ -7048,7 +6958,7 @@
         </p:nvSpPr>
         <p:spPr>
           <a:xfrm>
-            <a:off x="9889236" y="5349240"/>
+            <a:off x="457200" y="5806440"/>
             <a:ext cx="1687068" cy="365760"/>
           </a:xfrm>
           <a:prstGeom prst="rect">
@@ -7084,7 +6994,7 @@
         </p:nvSpPr>
         <p:spPr>
           <a:xfrm>
-            <a:off x="457200" y="5806440"/>
+            <a:off x="2281428" y="5806440"/>
             <a:ext cx="909828" cy="365760"/>
           </a:xfrm>
           <a:prstGeom prst="roundRect">
@@ -7111,7 +7021,7 @@
         </p:nvSpPr>
         <p:spPr>
           <a:xfrm>
-            <a:off x="457200" y="5806440"/>
+            <a:off x="2281428" y="5806440"/>
             <a:ext cx="909828" cy="365760"/>
           </a:xfrm>
           <a:prstGeom prst="rect">
@@ -7147,7 +7057,7 @@
         </p:nvSpPr>
         <p:spPr>
           <a:xfrm>
-            <a:off x="1504188" y="5806440"/>
+            <a:off x="3328416" y="5806440"/>
             <a:ext cx="909828" cy="365760"/>
           </a:xfrm>
           <a:prstGeom prst="roundRect">
@@ -7174,7 +7084,7 @@
         </p:nvSpPr>
         <p:spPr>
           <a:xfrm>
-            <a:off x="1504188" y="5806440"/>
+            <a:off x="3328416" y="5806440"/>
             <a:ext cx="909828" cy="365760"/>
           </a:xfrm>
           <a:prstGeom prst="rect">
@@ -7210,8 +7120,8 @@
         </p:nvSpPr>
         <p:spPr>
           <a:xfrm>
-            <a:off x="2551176" y="5806440"/>
-            <a:ext cx="1220724" cy="365760"/>
+            <a:off x="4375404" y="5806440"/>
+            <a:ext cx="1920240" cy="365760"/>
           </a:xfrm>
           <a:prstGeom prst="roundRect">
             <a:avLst>
@@ -7237,8 +7147,8 @@
         </p:nvSpPr>
         <p:spPr>
           <a:xfrm>
-            <a:off x="2551176" y="5806440"/>
-            <a:ext cx="1220724" cy="365760"/>
+            <a:off x="4375404" y="5806440"/>
+            <a:ext cx="1920240" cy="365760"/>
           </a:xfrm>
           <a:prstGeom prst="rect">
             <a:avLst/>
@@ -7259,7 +7169,7 @@
                   <a:schemeClr val="accent1"/>
                 </a:solidFill>
               </a:rPr>
-              <a:t>MATLAB/IRIS</a:t>
+              <a:t>Звірка з MATLAB/IRIS</a:t>
             </a:r>
             <a:endParaRPr lang="en-US" sz="1200" dirty="0"/>
           </a:p>
@@ -7373,7 +7283,7 @@
                 <a:ea typeface="Cambria" pitchFamily="34" charset="-122"/>
                 <a:cs typeface="Cambria" pitchFamily="34" charset="-120"/>
               </a:rPr>
-              <a:t>Короткостроковий прогноз: інфляція зросте до ≈11,3% у грудні</a:t>
+              <a:t>Короткостроковий прогноз: інфляція зросте до ≈12,1% у грудні</a:t>
             </a:r>
             <a:endParaRPr lang="en-US" sz="2600" dirty="0"/>
           </a:p>
@@ -7464,7 +7374,7 @@
       </p:sp>
       <p:pic>
         <p:nvPicPr>
-          <p:cNvPr id="5" name="chart" descr="C:\Users\Lenovo\Documents\GitHub\nbu-challenge-2026\results\figures\fc_nowcast.png">    </p:cNvPr>
+          <p:cNvPr id="5" name="chart" descr="/home/user/nbu-challenge-2026/results/figures/fc_nowcast.png">    </p:cNvPr>
           <p:cNvPicPr>
             <a:picLocks noChangeAspect="1"/>
           </p:cNvPicPr>
@@ -7479,7 +7389,7 @@
         <p:spPr>
           <a:xfrm>
             <a:off x="457200" y="1325880"/>
-            <a:ext cx="6309360" cy="3406958"/>
+            <a:ext cx="6309360" cy="3388891"/>
           </a:xfrm>
           <a:prstGeom prst="rect">
             <a:avLst/>
@@ -7960,7 +7870,7 @@
                             <a:schemeClr val="tx1"/>
                           </a:solidFill>
                         </a:rPr>
-                        <a:t>0,97</a:t>
+                        <a:t>1,19</a:t>
                       </a:r>
                       <a:endParaRPr lang="en-US" sz="1200" dirty="0"/>
                     </a:p>
@@ -8143,7 +8053,7 @@
                             <a:schemeClr val="tx1"/>
                           </a:solidFill>
                         </a:rPr>
-                        <a:t>1,11</a:t>
+                        <a:t>1,33</a:t>
                       </a:r>
                       <a:endParaRPr lang="en-US" sz="1200" dirty="0"/>
                     </a:p>
@@ -8204,7 +8114,7 @@
                             <a:schemeClr val="tx1"/>
                           </a:solidFill>
                         </a:rPr>
-                        <a:t>10,2</a:t>
+                        <a:t>10,5</a:t>
                       </a:r>
                       <a:endParaRPr lang="en-US" sz="1200" dirty="0"/>
                     </a:p>
@@ -8328,7 +8238,7 @@
                             <a:schemeClr val="tx1"/>
                           </a:solidFill>
                         </a:rPr>
-                        <a:t>0,97</a:t>
+                        <a:t>1,19</a:t>
                       </a:r>
                       <a:endParaRPr lang="en-US" sz="1200" dirty="0"/>
                     </a:p>
@@ -8389,7 +8299,7 @@
                             <a:schemeClr val="tx1"/>
                           </a:solidFill>
                         </a:rPr>
-                        <a:t>0,00</a:t>
+                        <a:t>0,02</a:t>
                       </a:r>
                       <a:endParaRPr lang="en-US" sz="1200" dirty="0"/>
                     </a:p>
@@ -8511,7 +8421,7 @@
                             <a:schemeClr val="tx1"/>
                           </a:solidFill>
                         </a:rPr>
-                        <a:t>0,86</a:t>
+                        <a:t>1,11</a:t>
                       </a:r>
                       <a:endParaRPr lang="en-US" sz="1200" dirty="0"/>
                     </a:p>
@@ -8572,7 +8482,7 @@
                             <a:schemeClr val="tx1"/>
                           </a:solidFill>
                         </a:rPr>
-                        <a:t>10,7</a:t>
+                        <a:t>11,3</a:t>
                       </a:r>
                       <a:endParaRPr lang="en-US" sz="1200" dirty="0"/>
                     </a:p>
@@ -8696,7 +8606,7 @@
                             <a:schemeClr val="tx1"/>
                           </a:solidFill>
                         </a:rPr>
-                        <a:t>0,97</a:t>
+                        <a:t>1,19</a:t>
                       </a:r>
                       <a:endParaRPr lang="en-US" sz="1200" dirty="0"/>
                     </a:p>
@@ -8757,7 +8667,7 @@
                             <a:schemeClr val="tx1"/>
                           </a:solidFill>
                         </a:rPr>
-                        <a:t>−0,17</a:t>
+                        <a:t>−0,16</a:t>
                       </a:r>
                       <a:endParaRPr lang="en-US" sz="1200" dirty="0"/>
                     </a:p>
@@ -8879,7 +8789,7 @@
                             <a:schemeClr val="tx1"/>
                           </a:solidFill>
                         </a:rPr>
-                        <a:t>0,70</a:t>
+                        <a:t>0,93</a:t>
                       </a:r>
                       <a:endParaRPr lang="en-US" sz="1200" dirty="0"/>
                     </a:p>
@@ -8940,7 +8850,7 @@
                             <a:schemeClr val="tx1"/>
                           </a:solidFill>
                         </a:rPr>
-                        <a:t>11,3</a:t>
+                        <a:t>12,1</a:t>
                       </a:r>
                       <a:endParaRPr lang="en-US" sz="1200" dirty="0"/>
                     </a:p>
@@ -9044,7 +8954,7 @@
                   <a:schemeClr val="tx1"/>
                 </a:solidFill>
               </a:rPr>
-              <a:t>Тренд 0,97% на місяць (без сезонності) — це ≈12% у річному вимірі; вересневий стрибок частково разовий (−0,1 в. п./міс.)</a:t>
+              <a:t>Тренд 1,19% на місяць (без сезонності) — це ≈15% у річному вимірі; вересневий стрибок частково разовий (−0,1 в. п./міс.)</a:t>
             </a:r>
             <a:endParaRPr lang="en-US" sz="1300" dirty="0"/>
           </a:p>
@@ -9062,7 +8972,7 @@
                   <a:schemeClr val="tx1"/>
                 </a:solidFill>
               </a:rPr>
-              <a:t>Грудень 11,3% — вище липневого прогнозу НБУ (10%); базова тим самим методом — 9,5% (НБУ: 9,2%)</a:t>
+              <a:t>Грудень 12,1% — вище липневого прогнозу НБУ (10%); базова тим самим методом — 9,6% (НБУ: 9,2%)</a:t>
             </a:r>
             <a:endParaRPr lang="en-US" sz="1300" dirty="0"/>
           </a:p>
@@ -9176,7 +9086,7 @@
                 <a:ea typeface="Cambria" pitchFamily="34" charset="-122"/>
                 <a:cs typeface="Cambria" pitchFamily="34" charset="-120"/>
               </a:rPr>
-              <a:t>Інфляція досягне піку на початку 2027 і повернеться до ≈5% у 2028 — у межах горизонту політики</a:t>
+              <a:t>Інфляція досягне піку наприкінці 2026 і повернеться до цілі у 2029 — у межах горизонту політики</a:t>
             </a:r>
             <a:endParaRPr lang="en-US" sz="2600" dirty="0"/>
           </a:p>
@@ -9267,7 +9177,7 @@
       </p:sp>
       <p:pic>
         <p:nvPicPr>
-          <p:cNvPr id="5" name="chart" descr="C:\Users\Lenovo\Documents\GitHub\nbu-challenge-2026\results\figures\fc_fan.png">    </p:cNvPr>
+          <p:cNvPr id="5" name="chart" descr="/home/user/nbu-challenge-2026/results/figures/fc_fan.png">    </p:cNvPr>
           <p:cNvPicPr>
             <a:picLocks noChangeAspect="1"/>
           </p:cNvPicPr>
@@ -9281,8 +9191,8 @@
         </p:blipFill>
         <p:spPr>
           <a:xfrm>
-            <a:off x="1123245" y="1325880"/>
-            <a:ext cx="9945206" cy="3703320"/>
+            <a:off x="1129919" y="1325880"/>
+            <a:ext cx="9931857" cy="3703320"/>
           </a:xfrm>
           <a:prstGeom prst="rect">
             <a:avLst/>
@@ -9375,7 +9285,7 @@
                   <a:schemeClr val="tx1"/>
                 </a:solidFill>
               </a:rPr>
-              <a:t>Пік — I кв. 2027: ≈11,1% у середньому за квартал (у грудні — ≈11,3% за місяць); 6,6% у IV кв. 2027 (НБУ: 6,9% у грудні); ≈5% — з I кв. 2028, далі 4,4–5,2%</a:t>
+              <a:t>Пік — IV кв. 2026: ≈11,2% у середньому за квартал (у грудні — ≈12,1% за місяць); 5,4% у IV кв. 2027 (НБУ: 6,9% у грудні); нижче 5% — з I кв. 2028, у 2028 — 3,8–4,8% (дешевша нафта, слабкий попит), ≈5% — у 2029</a:t>
             </a:r>
             <a:endParaRPr lang="en-US" sz="1300" dirty="0"/>
           </a:p>
@@ -9467,7 +9377,7 @@
                   <a:schemeClr val="tx1"/>
                 </a:solidFill>
               </a:rPr>
-              <a:t>Ставка: 17% до середини 2027 → 14,8% наприкінці 2027 → 10,5% — 2028 → 9,5% — 2029</a:t>
+              <a:t>Ставка: 17% до середини 2027 → 13,1% наприкінці 2027 → 10,5% — 2028 → 10,5% — 2029</a:t>
             </a:r>
             <a:endParaRPr lang="en-US" sz="1300" dirty="0"/>
           </a:p>
@@ -9559,7 +9469,7 @@
                   <a:schemeClr val="tx1"/>
                 </a:solidFill>
               </a:rPr>
-              <a:t>Невизначеність велика: з імовірністю 70% інфляція наприкінці 2027 — від 3,1 до 10,2%</a:t>
+              <a:t>Невизначеність велика: з імовірністю 70% інфляція наприкінці 2027 — від 2,0 до 9,1%</a:t>
             </a:r>
             <a:endParaRPr lang="en-US" sz="1300" dirty="0"/>
           </a:p>
@@ -9673,7 +9583,7 @@
                 <a:ea typeface="Cambria" pitchFamily="34" charset="-122"/>
                 <a:cs typeface="Cambria" pitchFamily="34" charset="-120"/>
               </a:rPr>
-              <a:t>Економіка слабка, але потенціал постраждав ще більше: розрив ≈1,2% зараз, ≈−0,3% у 2027 (НБУ: 1,4%)</a:t>
+              <a:t>Економіка слабка, але потенціал постраждав ще більше: розрив ≈0,7% зараз, ≈−1,0% у 2027 (НБУ: 1,4%)</a:t>
             </a:r>
             <a:endParaRPr lang="en-US" sz="2600" dirty="0"/>
           </a:p>
@@ -9793,7 +9703,7 @@
       </p:sp>
       <p:pic>
         <p:nvPicPr>
-          <p:cNvPr id="5" name="chart main" descr="C:\Users\Lenovo\Documents\GitHub\nbu-challenge-2026\results\figures\fc_gap_vs_nbu.png">    </p:cNvPr>
+          <p:cNvPr id="5" name="chart main" descr="/home/user/nbu-challenge-2026/results/figures/fc_gap_vs_nbu.png">    </p:cNvPr>
           <p:cNvPicPr>
             <a:picLocks noChangeAspect="1"/>
           </p:cNvPicPr>
@@ -9808,7 +9718,7 @@
         <p:spPr>
           <a:xfrm>
             <a:off x="457200" y="1325880"/>
-            <a:ext cx="4971531" cy="2740914"/>
+            <a:ext cx="4964529" cy="2740914"/>
           </a:xfrm>
           <a:prstGeom prst="rect">
             <a:avLst/>
@@ -9817,7 +9727,7 @@
       </p:pic>
       <p:pic>
         <p:nvPicPr>
-          <p:cNvPr id="6" name="chart side" descr="C:\Users\Lenovo\Documents\GitHub\nbu-challenge-2026\results\figures\fc_trends.png">    </p:cNvPr>
+          <p:cNvPr id="6" name="chart side" descr="/home/user/nbu-challenge-2026/results/figures/fc_trends.png">    </p:cNvPr>
           <p:cNvPicPr>
             <a:picLocks noChangeAspect="1"/>
           </p:cNvPicPr>
@@ -9832,7 +9742,7 @@
         <p:spPr>
           <a:xfrm>
             <a:off x="457200" y="4203954"/>
-            <a:ext cx="6241248" cy="2105406"/>
+            <a:ext cx="6232002" cy="2105406"/>
           </a:xfrm>
           <a:prstGeom prst="rect">
             <a:avLst/>
@@ -9873,7 +9783,7 @@
                   <a:schemeClr val="tx1"/>
                 </a:solidFill>
               </a:rPr>
-              <a:t>ВВП: 0,6% / 0,3% / 1,6% у 2026–2028 (НБУ: 1,8 / 2,8 / 3,0%)</a:t>
+              <a:t>ВВП: 0,5% / −0,2% / 2,4% у 2026–2028 (НБУ: 1,8 / 2,8 / 3,0%)</a:t>
             </a:r>
             <a:endParaRPr lang="en-US" sz="1400" dirty="0"/>
           </a:p>
@@ -10023,7 +9933,7 @@
                 <a:ea typeface="Cambria" pitchFamily="34" charset="-122"/>
                 <a:cs typeface="Cambria" pitchFamily="34" charset="-120"/>
               </a:rPr>
-              <a:t>Сценарії: головні ризики — курс і дефіцит фінансування, а не зима чи нафта</a:t>
+              <a:t>Сценарії: головні ризики — дефіцит фінансування, курс і очікування, а не нафта</a:t>
             </a:r>
             <a:endParaRPr lang="en-US" sz="2600" dirty="0"/>
           </a:p>
@@ -10143,7 +10053,7 @@
       </p:sp>
       <p:pic>
         <p:nvPicPr>
-          <p:cNvPr id="5" name="chart" descr="C:\Users\Lenovo\Documents\GitHub\nbu-challenge-2026\results\figures\ml_scenarios.png">    </p:cNvPr>
+          <p:cNvPr id="5" name="chart" descr="/home/user/nbu-challenge-2026/results/figures/fc_scenarios.png">    </p:cNvPr>
           <p:cNvPicPr>
             <a:picLocks noChangeAspect="1"/>
           </p:cNvPicPr>
@@ -10157,8 +10067,8 @@
         </p:blipFill>
         <p:spPr>
           <a:xfrm>
-            <a:off x="1736038" y="1280160"/>
-            <a:ext cx="8719619" cy="2606040"/>
+            <a:off x="1000344" y="1280160"/>
+            <a:ext cx="10191008" cy="2606040"/>
           </a:xfrm>
           <a:prstGeom prst="rect">
             <a:avLst/>
@@ -10639,7 +10549,7 @@
                             <a:schemeClr val="tx1"/>
                           </a:solidFill>
                         </a:rPr>
-                        <a:t>11,1</a:t>
+                        <a:t>11,2</a:t>
                       </a:r>
                       <a:endParaRPr lang="en-US" sz="1200" dirty="0"/>
                     </a:p>
@@ -10700,7 +10610,7 @@
                             <a:schemeClr val="tx1"/>
                           </a:solidFill>
                         </a:rPr>
-                        <a:t>6,6</a:t>
+                        <a:t>5,4</a:t>
                       </a:r>
                       <a:endParaRPr lang="en-US" sz="1200" dirty="0"/>
                     </a:p>
@@ -10822,7 +10732,7 @@
                             <a:schemeClr val="tx1"/>
                           </a:solidFill>
                         </a:rPr>
-                        <a:t>43,9</a:t>
+                        <a:t>45,6</a:t>
                       </a:r>
                       <a:endParaRPr lang="en-US" sz="1200" dirty="0"/>
                     </a:p>
@@ -10883,7 +10793,7 @@
                             <a:schemeClr val="tx1"/>
                           </a:solidFill>
                         </a:rPr>
-                        <a:t>0,3</a:t>
+                        <a:t>−0,2</a:t>
                       </a:r>
                       <a:endParaRPr lang="en-US" sz="1200" dirty="0"/>
                     </a:p>
@@ -11007,7 +10917,7 @@
                             <a:schemeClr val="tx1"/>
                           </a:solidFill>
                         </a:rPr>
-                        <a:t>12,5</a:t>
+                        <a:t>12,4</a:t>
                       </a:r>
                       <a:endParaRPr lang="en-US" sz="1200" dirty="0"/>
                     </a:p>
@@ -11068,7 +10978,7 @@
                             <a:schemeClr val="tx1"/>
                           </a:solidFill>
                         </a:rPr>
-                        <a:t>8,4</a:t>
+                        <a:t>7,2</a:t>
                       </a:r>
                       <a:endParaRPr lang="en-US" sz="1200" dirty="0"/>
                     </a:p>
@@ -11190,7 +11100,7 @@
                             <a:schemeClr val="tx1"/>
                           </a:solidFill>
                         </a:rPr>
-                        <a:t>44,1</a:t>
+                        <a:t>45,7</a:t>
                       </a:r>
                       <a:endParaRPr lang="en-US" sz="1200" dirty="0"/>
                     </a:p>
@@ -11251,7 +11161,7 @@
                             <a:schemeClr val="tx1"/>
                           </a:solidFill>
                         </a:rPr>
-                        <a:t>−0,6</a:t>
+                        <a:t>−1,1</a:t>
                       </a:r>
                       <a:endParaRPr lang="en-US" sz="1200" dirty="0"/>
                     </a:p>
@@ -11375,7 +11285,7 @@
                             <a:schemeClr val="tx1"/>
                           </a:solidFill>
                         </a:rPr>
-                        <a:t>13,1</a:t>
+                        <a:t>13,0</a:t>
                       </a:r>
                       <a:endParaRPr lang="en-US" sz="1200" dirty="0"/>
                     </a:p>
@@ -11436,7 +11346,7 @@
                             <a:schemeClr val="tx1"/>
                           </a:solidFill>
                         </a:rPr>
-                        <a:t>10,3</a:t>
+                        <a:t>9,1</a:t>
                       </a:r>
                       <a:endParaRPr lang="en-US" sz="1200" dirty="0"/>
                     </a:p>
@@ -11558,7 +11468,7 @@
                             <a:schemeClr val="tx1"/>
                           </a:solidFill>
                         </a:rPr>
-                        <a:t>46,7</a:t>
+                        <a:t>48,5</a:t>
                       </a:r>
                       <a:endParaRPr lang="en-US" sz="1200" dirty="0"/>
                     </a:p>
@@ -11619,7 +11529,7 @@
                             <a:schemeClr val="tx1"/>
                           </a:solidFill>
                         </a:rPr>
-                        <a:t>0,0</a:t>
+                        <a:t>−0,5</a:t>
                       </a:r>
                       <a:endParaRPr lang="en-US" sz="1200" dirty="0"/>
                     </a:p>
@@ -11743,7 +11653,7 @@
                             <a:schemeClr val="tx1"/>
                           </a:solidFill>
                         </a:rPr>
-                        <a:t>10,3</a:t>
+                        <a:t>10,8</a:t>
                       </a:r>
                       <a:endParaRPr lang="en-US" sz="1200" dirty="0"/>
                     </a:p>
@@ -11804,7 +11714,7 @@
                             <a:schemeClr val="tx1"/>
                           </a:solidFill>
                         </a:rPr>
-                        <a:t>5,4</a:t>
+                        <a:t>4,2</a:t>
                       </a:r>
                       <a:endParaRPr lang="en-US" sz="1200" dirty="0"/>
                     </a:p>
@@ -11926,7 +11836,7 @@
                             <a:schemeClr val="tx1"/>
                           </a:solidFill>
                         </a:rPr>
-                        <a:t>43,4</a:t>
+                        <a:t>45,1</a:t>
                       </a:r>
                       <a:endParaRPr lang="en-US" sz="1200" dirty="0"/>
                     </a:p>
@@ -11987,7 +11897,7 @@
                             <a:schemeClr val="tx1"/>
                           </a:solidFill>
                         </a:rPr>
-                        <a:t>1,1</a:t>
+                        <a:t>0,6</a:t>
                       </a:r>
                       <a:endParaRPr lang="en-US" sz="1200" dirty="0"/>
                     </a:p>
@@ -12111,7 +12021,7 @@
                             <a:schemeClr val="tx1"/>
                           </a:solidFill>
                         </a:rPr>
-                        <a:t>11,5</a:t>
+                        <a:t>11,3</a:t>
                       </a:r>
                       <a:endParaRPr lang="en-US" sz="1200" dirty="0"/>
                     </a:p>
@@ -12172,7 +12082,7 @@
                             <a:schemeClr val="tx1"/>
                           </a:solidFill>
                         </a:rPr>
-                        <a:t>6,6</a:t>
+                        <a:t>5,6</a:t>
                       </a:r>
                       <a:endParaRPr lang="en-US" sz="1200" dirty="0"/>
                     </a:p>
@@ -12294,7 +12204,7 @@
                             <a:schemeClr val="tx1"/>
                           </a:solidFill>
                         </a:rPr>
-                        <a:t>43,9</a:t>
+                        <a:t>45,6</a:t>
                       </a:r>
                       <a:endParaRPr lang="en-US" sz="1200" dirty="0"/>
                     </a:p>
@@ -12355,7 +12265,7 @@
                             <a:schemeClr val="tx1"/>
                           </a:solidFill>
                         </a:rPr>
-                        <a:t>0,3</a:t>
+                        <a:t>−0,2</a:t>
                       </a:r>
                       <a:endParaRPr lang="en-US" sz="1200" dirty="0"/>
                     </a:p>
@@ -12441,7 +12351,7 @@
                   <a:schemeClr val="tx1"/>
                 </a:solidFill>
               </a:rPr>
-              <a:t>Дефіцит фінансування: гривня на ≈6% слабша (≈47 грн/$) → інфляція до 13,1%, ставка до 19,3%</a:t>
+              <a:t>Дефіцит фінансування: гривня на ≈6% слабша (≈48 грн/$) → інфляція до 13,0%, ставка до 19,3%</a:t>
             </a:r>
             <a:endParaRPr lang="en-US" sz="1300" dirty="0"/>
           </a:p>
@@ -12459,7 +12369,7 @@
                   <a:schemeClr val="tx1"/>
                 </a:solidFill>
               </a:rPr>
-              <a:t>Важка зима: інфляція до 12,5%, ставка до 17,8%, ВВП 2027 — −0,6%</a:t>
+              <a:t>Важка зима: інфляція до 12,4%, ставка до 17,8%, ВВП 2027 — −1,1%</a:t>
             </a:r>
             <a:endParaRPr lang="en-US" sz="1300" dirty="0"/>
           </a:p>
@@ -12477,7 +12387,7 @@
                   <a:schemeClr val="tx1"/>
                 </a:solidFill>
               </a:rPr>
-              <a:t>Нафта $120: +0,4 в. п. до піку інфляції, ставка майже не змінюється</a:t>
+              <a:t>Нафта $120: +0,1 в. п. до піку інфляції, ставка майже не змінюється</a:t>
             </a:r>
             <a:endParaRPr lang="en-US" sz="1300" dirty="0"/>
           </a:p>
@@ -12495,7 +12405,7 @@
                   <a:schemeClr val="tx1"/>
                 </a:solidFill>
               </a:rPr>
-              <a:t>Ще три ризики (додаток): курс, як чекає ринок → ІСЦ IV кв. 2027 ≈12%; розбалансування очікувань → ≈9%; ПДВ 21% → +0,5 в. п.</a:t>
+              <a:t>Ще три ризики (додаток): курс, як чекає ринок → ІСЦ IV кв. 2027 ≈7%; розбалансування очікувань → ≈7%; ПДВ 21% → +0,3 в. п. до піку</a:t>
             </a:r>
             <a:endParaRPr lang="en-US" sz="1300" dirty="0"/>
           </a:p>
@@ -13626,7 +13536,7 @@
                 <a:ea typeface="Cambria" pitchFamily="34" charset="-122"/>
                 <a:cs typeface="Cambria" pitchFamily="34" charset="-120"/>
               </a:rPr>
-              <a:t>Варіанти рішення: мінімум втрат — 17–18,5% залежно від ваг; обираємо 17% і готові йти далі</a:t>
+              <a:t>Варіанти рішення: мінімум втрат у моделі — 16–17%; обираємо 17% і готові йти далі</a:t>
             </a:r>
             <a:endParaRPr lang="en-US" sz="2600" dirty="0"/>
           </a:p>
@@ -13688,7 +13598,7 @@
       </p:sp>
       <p:pic>
         <p:nvPicPr>
-          <p:cNvPr id="5" name="chart" descr="C:\Users\Lenovo\Documents\GitHub\nbu-challenge-2026\results\figures\fc_policy.png">    </p:cNvPr>
+          <p:cNvPr id="5" name="chart" descr="/home/user/nbu-challenge-2026/results/figures/fc_policy.png">    </p:cNvPr>
           <p:cNvPicPr>
             <a:picLocks noChangeAspect="1"/>
           </p:cNvPicPr>
@@ -13702,8 +13612,8 @@
         </p:blipFill>
         <p:spPr>
           <a:xfrm>
-            <a:off x="1769601" y="1280160"/>
-            <a:ext cx="8652494" cy="2606040"/>
+            <a:off x="1775694" y="1280160"/>
+            <a:ext cx="8640307" cy="2606040"/>
           </a:xfrm>
           <a:prstGeom prst="rect">
             <a:avLst/>
@@ -14245,7 +14155,7 @@
                             <a:schemeClr val="tx1"/>
                           </a:solidFill>
                         </a:rPr>
-                        <a:t>14,9</a:t>
+                        <a:t>13,3</a:t>
                       </a:r>
                       <a:endParaRPr lang="en-US" sz="1200" dirty="0"/>
                     </a:p>
@@ -14306,7 +14216,7 @@
                             <a:schemeClr val="tx1"/>
                           </a:solidFill>
                         </a:rPr>
-                        <a:t>7,1</a:t>
+                        <a:t>5,8</a:t>
                       </a:r>
                       <a:endParaRPr lang="en-US" sz="1200" dirty="0"/>
                     </a:p>
@@ -14367,7 +14277,7 @@
                             <a:schemeClr val="tx1"/>
                           </a:solidFill>
                         </a:rPr>
-                        <a:t>0,6</a:t>
+                        <a:t>0,0</a:t>
                       </a:r>
                       <a:endParaRPr lang="en-US" sz="1200" dirty="0"/>
                     </a:p>
@@ -14428,7 +14338,7 @@
                             <a:schemeClr val="tx1"/>
                           </a:solidFill>
                         </a:rPr>
-                        <a:t>103</a:t>
+                        <a:t>106</a:t>
                       </a:r>
                       <a:endParaRPr lang="en-US" sz="1200" dirty="0"/>
                     </a:p>
@@ -14613,7 +14523,7 @@
                             <a:schemeClr val="tx1"/>
                           </a:solidFill>
                         </a:rPr>
-                        <a:t>14,9</a:t>
+                        <a:t>13,2</a:t>
                       </a:r>
                       <a:endParaRPr lang="en-US" sz="1200" dirty="0"/>
                     </a:p>
@@ -14674,7 +14584,7 @@
                             <a:schemeClr val="tx1"/>
                           </a:solidFill>
                         </a:rPr>
-                        <a:t>6,8</a:t>
+                        <a:t>5,6</a:t>
                       </a:r>
                       <a:endParaRPr lang="en-US" sz="1200" dirty="0"/>
                     </a:p>
@@ -14735,7 +14645,7 @@
                             <a:schemeClr val="tx1"/>
                           </a:solidFill>
                         </a:rPr>
-                        <a:t>0,4</a:t>
+                        <a:t>−0,1</a:t>
                       </a:r>
                       <a:endParaRPr lang="en-US" sz="1200" dirty="0"/>
                     </a:p>
@@ -14796,7 +14706,7 @@
                             <a:schemeClr val="tx1"/>
                           </a:solidFill>
                         </a:rPr>
-                        <a:t>99</a:t>
+                        <a:t>105</a:t>
                       </a:r>
                       <a:endParaRPr lang="en-US" sz="1200" dirty="0"/>
                     </a:p>
@@ -14981,7 +14891,7 @@
                             <a:schemeClr val="tx1"/>
                           </a:solidFill>
                         </a:rPr>
-                        <a:t>14,8</a:t>
+                        <a:t>13,1</a:t>
                       </a:r>
                       <a:endParaRPr lang="en-US" sz="1200" dirty="0"/>
                     </a:p>
@@ -15042,7 +14952,7 @@
                             <a:schemeClr val="tx1"/>
                           </a:solidFill>
                         </a:rPr>
-                        <a:t>6,6</a:t>
+                        <a:t>5,3</a:t>
                       </a:r>
                       <a:endParaRPr lang="en-US" sz="1200" dirty="0"/>
                     </a:p>
@@ -15103,7 +15013,7 @@
                             <a:schemeClr val="tx1"/>
                           </a:solidFill>
                         </a:rPr>
-                        <a:t>0,3</a:t>
+                        <a:t>−0,3</a:t>
                       </a:r>
                       <a:endParaRPr lang="en-US" sz="1200" dirty="0"/>
                     </a:p>
@@ -15164,7 +15074,7 @@
                             <a:schemeClr val="tx1"/>
                           </a:solidFill>
                         </a:rPr>
-                        <a:t>96</a:t>
+                        <a:t>106</a:t>
                       </a:r>
                       <a:endParaRPr lang="en-US" sz="1200" dirty="0"/>
                     </a:p>
@@ -15349,7 +15259,7 @@
                             <a:schemeClr val="tx1"/>
                           </a:solidFill>
                         </a:rPr>
-                        <a:t>14,7</a:t>
+                        <a:t>13,1</a:t>
                       </a:r>
                       <a:endParaRPr lang="en-US" sz="1200" dirty="0"/>
                     </a:p>
@@ -15410,7 +15320,7 @@
                             <a:schemeClr val="tx1"/>
                           </a:solidFill>
                         </a:rPr>
-                        <a:t>6,3</a:t>
+                        <a:t>5,1</a:t>
                       </a:r>
                       <a:endParaRPr lang="en-US" sz="1200" dirty="0"/>
                     </a:p>
@@ -15471,7 +15381,7 @@
                             <a:schemeClr val="tx1"/>
                           </a:solidFill>
                         </a:rPr>
-                        <a:t>0,1</a:t>
+                        <a:t>−0,4</a:t>
                       </a:r>
                       <a:endParaRPr lang="en-US" sz="1200" dirty="0"/>
                     </a:p>
@@ -15532,7 +15442,7 @@
                             <a:schemeClr val="tx1"/>
                           </a:solidFill>
                         </a:rPr>
-                        <a:t>95</a:t>
+                        <a:t>108</a:t>
                       </a:r>
                       <a:endParaRPr lang="en-US" sz="1200" dirty="0"/>
                     </a:p>
@@ -15656,7 +15566,7 @@
                             <a:schemeClr val="tx1"/>
                           </a:solidFill>
                         </a:rPr>
-                        <a:t>17,6</a:t>
+                        <a:t>16,9</a:t>
                       </a:r>
                       <a:endParaRPr lang="en-US" sz="1200" dirty="0"/>
                     </a:p>
@@ -15717,7 +15627,7 @@
                             <a:schemeClr val="tx1"/>
                           </a:solidFill>
                         </a:rPr>
-                        <a:t>14,6</a:t>
+                        <a:t>13,1</a:t>
                       </a:r>
                       <a:endParaRPr lang="en-US" sz="1200" dirty="0"/>
                     </a:p>
@@ -15778,7 +15688,7 @@
                             <a:schemeClr val="tx1"/>
                           </a:solidFill>
                         </a:rPr>
-                        <a:t>6,2</a:t>
+                        <a:t>5,7</a:t>
                       </a:r>
                       <a:endParaRPr lang="en-US" sz="1200" dirty="0"/>
                     </a:p>
@@ -15839,7 +15749,7 @@
                             <a:schemeClr val="tx1"/>
                           </a:solidFill>
                         </a:rPr>
-                        <a:t>0,0</a:t>
+                        <a:t>−0,1</a:t>
                       </a:r>
                       <a:endParaRPr lang="en-US" sz="1200" dirty="0"/>
                     </a:p>
@@ -15900,7 +15810,7 @@
                             <a:schemeClr val="tx1"/>
                           </a:solidFill>
                         </a:rPr>
-                        <a:t>95</a:t>
+                        <a:t>104</a:t>
                       </a:r>
                       <a:endParaRPr lang="en-US" sz="1200" dirty="0"/>
                     </a:p>
@@ -16004,7 +15914,7 @@
                   <a:schemeClr val="tx1"/>
                 </a:solidFill>
               </a:rPr>
-              <a:t>Оптимальна траєкторія: 17,6% зараз (17,0–18,5% залежно від згладжування), ≈18,1% у I кв. 2027</a:t>
+              <a:t>Оптимальна траєкторія: 16,9% зараз (16,4–17,7% залежно від згладжування), ≈16,9% у I кв. 2027</a:t>
             </a:r>
             <a:endParaRPr lang="en-US" sz="1300" dirty="0"/>
           </a:p>
@@ -16022,7 +15932,25 @@
                   <a:schemeClr val="tx1"/>
                 </a:solidFill>
               </a:rPr>
-              <a:t>Під ризиками (10 сценаріїв, два набори ймовірностей) найменші очікувані втрати — 17–17,5%; +1 в. п. зараз і готовність до ще +0,5 — найменш ризикований шлях</a:t>
+              <a:t>Під ризиками (10 сценаріїв, два набори ймовірностей) найменші очікувані втрати — 16,5–17%; 17% — серед них (різниця з мінімумом &lt; 0,5% втрат)</a:t>
+            </a:r>
+            <a:endParaRPr lang="en-US" sz="1300" dirty="0"/>
+          </a:p>
+          <a:p>
+            <a:pPr marL="177800" indent="-177800">
+              <a:spcAft>
+                <a:spcPts val="800"/>
+              </a:spcAft>
+              <a:buSzPct val="100000"/>
+              <a:buChar char="•"/>
+            </a:pPr>
+            <a:r>
+              <a:rPr lang="en-US" sz="1300" dirty="0">
+                <a:solidFill>
+                  <a:schemeClr val="tx1"/>
+                </a:solidFill>
+              </a:rPr>
+              <a:t>Наш вибір — 17% (+1 в. п., найбільший крок НБУ за 2025 р.) і готовність до +0,5 у грудні, коли буде жовтневий прогноз НБУ і дані за жовтень</a:t>
             </a:r>
             <a:endParaRPr lang="en-US" sz="1300" dirty="0"/>
           </a:p>
@@ -16406,7 +16334,7 @@
         <p:spPr>
           <a:xfrm>
             <a:off x="3931920" y="1709928"/>
-            <a:ext cx="7802575" cy="1314123"/>
+            <a:ext cx="7802575" cy="1376172"/>
           </a:xfrm>
           <a:prstGeom prst="rect">
             <a:avLst/>
@@ -16431,7 +16359,7 @@
                   <a:schemeClr val="tx1"/>
                 </a:solidFill>
               </a:rPr>
-              <a:t>Вересень — 10,0%, значно вище прогнозу НБУ; у грудні — ≈11%; ризики зміщені вгору</a:t>
+              <a:t>Вересень — 10,0%, значно вище прогнозу НБУ; у грудні — ≈12%; ризики зміщені вгору</a:t>
             </a:r>
             <a:endParaRPr lang="en-US" sz="1400" dirty="0"/>
           </a:p>
@@ -16449,7 +16377,7 @@
                   <a:schemeClr val="tx1"/>
                 </a:solidFill>
               </a:rPr>
-              <a:t>Базова інфляція наприкінці 2027 — 5,4% (НБУ: 5,1%): ринок праці перегрітий</a:t>
+              <a:t>Базова інфляція прискорилася до 8,8% і за наукастом сягне ≈9,6% у грудні — вторинні ефекти вже є; очікування домогосподарств 10–14%</a:t>
             </a:r>
             <a:endParaRPr lang="en-US" sz="1400" dirty="0"/>
           </a:p>
@@ -16467,7 +16395,7 @@
                   <a:schemeClr val="tx1"/>
                 </a:solidFill>
               </a:rPr>
-              <a:t>Курс: якщо гривня слабшатиме, як чекає ринок, ІСЦ IV кв. 2027 — ≈12%; кожні +0,5 в. п. зараз знижують його на ≈0,3 в. п.</a:t>
+              <a:t>Курс: якщо гривня слабшатиме, як чекає ринок, ІСЦ IV кв. 2027 — ≈7%; кожні +0,5 в. п. зараз знижують його на ≈0,2 в. п.</a:t>
             </a:r>
             <a:endParaRPr lang="en-US" sz="1400" dirty="0"/>
           </a:p>
@@ -16499,7 +16427,7 @@
         </p:nvSpPr>
         <p:spPr>
           <a:xfrm>
-            <a:off x="3931920" y="3069771"/>
+            <a:off x="3931920" y="3131820"/>
             <a:ext cx="7802575" cy="347472"/>
           </a:xfrm>
           <a:prstGeom prst="rect">
@@ -16538,8 +16466,8 @@
         </p:nvSpPr>
         <p:spPr>
           <a:xfrm>
-            <a:off x="3931920" y="3453819"/>
-            <a:ext cx="7802575" cy="1065929"/>
+            <a:off x="3931920" y="3515868"/>
+            <a:ext cx="7802575" cy="1159002"/>
           </a:xfrm>
           <a:prstGeom prst="rect">
             <a:avLst/>
@@ -16564,7 +16492,7 @@
                   <a:schemeClr val="tx1"/>
                 </a:solidFill>
               </a:rPr>
-              <a:t>Модель: оптимум ≈17,6%, під ризиками — 17–17,5%; консенсус (ICU) — 16,5%: ризики зміщені вгору, тож ми рішучіші</a:t>
+              <a:t>Модель: оптимум ≈16,9%, під ризиками — 16,5–17%; ринок (ОВДП, курсові очікування) не чекає різкого посилення — ми рішучіші за ринок, обережніші за модель</a:t>
             </a:r>
             <a:endParaRPr lang="en-US" sz="1400" dirty="0"/>
           </a:p>
@@ -16582,7 +16510,7 @@
                   <a:schemeClr val="tx1"/>
                 </a:solidFill>
               </a:rPr>
-              <a:t>+1 в. п. — як у січні й березні 2025; +1,5 одразу — надмірний сигнал за слабкого ВВП</a:t>
+              <a:t>+1 в. п. — як у січні й березні 2025; +1,5 одразу — надмірний сигнал за слабкого ВВП і до оновленого прогнозу НБУ</a:t>
             </a:r>
             <a:endParaRPr lang="en-US" sz="1400" dirty="0"/>
           </a:p>
@@ -16614,7 +16542,7 @@
         </p:nvSpPr>
         <p:spPr>
           <a:xfrm>
-            <a:off x="3931920" y="4565469"/>
+            <a:off x="3931920" y="4720590"/>
             <a:ext cx="7802575" cy="347472"/>
           </a:xfrm>
           <a:prstGeom prst="rect">
@@ -16653,8 +16581,8 @@
         </p:nvSpPr>
         <p:spPr>
           <a:xfrm>
-            <a:off x="3931920" y="4949517"/>
-            <a:ext cx="7802575" cy="1314123"/>
+            <a:off x="3931920" y="5104638"/>
+            <a:ext cx="7802575" cy="1159002"/>
           </a:xfrm>
           <a:prstGeom prst="rect">
             <a:avLst/>
@@ -16679,7 +16607,7 @@
                   <a:schemeClr val="tx1"/>
                 </a:solidFill>
               </a:rPr>
-              <a:t>Не знижувати щонайменше до III кв. 2027; за базовим прогнозом далі — ≈15,0% наприкінці 2027 і ≈10,5% — 2028</a:t>
+              <a:t>Не знижувати щонайменше до III кв. 2027; за базовим прогнозом далі — ≈13,0% наприкінці 2027 і ≈10,5% — 2028</a:t>
             </a:r>
             <a:endParaRPr lang="en-US" sz="1400" dirty="0"/>
           </a:p>
@@ -16829,7 +16757,7 @@
                 <a:ea typeface="Cambria" pitchFamily="34" charset="-122"/>
                 <a:cs typeface="Cambria" pitchFamily="34" charset="-120"/>
               </a:rPr>
-              <a:t>Курс і резерви: без допомоги резерви наблизяться до 3 місяців імпорту</a:t>
+              <a:t>Курс і резерви: за надходжень липня–вересня резерви на кінець 2026 — $43 млрд (3,8 міс. імпорту)</a:t>
             </a:r>
             <a:endParaRPr lang="en-US" sz="2600" dirty="0"/>
           </a:p>
@@ -16949,7 +16877,7 @@
       </p:sp>
       <p:pic>
         <p:nvPicPr>
-          <p:cNvPr id="5" name="chart" descr="C:\Users\Lenovo\Documents\GitHub\nbu-challenge-2026\results\figures\fc_reserves.png">    </p:cNvPr>
+          <p:cNvPr id="5" name="chart" descr="/home/user/nbu-challenge-2026/results/figures/fc_reserves.png">    </p:cNvPr>
           <p:cNvPicPr>
             <a:picLocks noChangeAspect="1"/>
           </p:cNvPicPr>
@@ -16964,7 +16892,7 @@
         <p:spPr>
           <a:xfrm>
             <a:off x="457200" y="1325880"/>
-            <a:ext cx="7040880" cy="4808281"/>
+            <a:ext cx="7040880" cy="4798040"/>
           </a:xfrm>
           <a:prstGeom prst="rect">
             <a:avLst/>
@@ -17041,7 +16969,7 @@
                   <a:schemeClr val="tx1"/>
                 </a:solidFill>
               </a:rPr>
-              <a:t>Ринок чекає ≈47 грн/$ через рік (≈5% послаблення), модель — ≈1% на рік; якщо правий ринок, ІСЦ IV кв. 2027 — ≈12%</a:t>
+              <a:t>Ринок чекає ≈47 грн/$ через рік (≈5% послаблення); модель — ≈45,3 грн/$ (≈1%; до євро ≈2% на рік); якщо правий ринок, ІСЦ IV кв. 2027 — ≈7%</a:t>
             </a:r>
             <a:endParaRPr lang="en-US" sz="1400" dirty="0"/>
           </a:p>
@@ -17059,7 +16987,7 @@
                   <a:schemeClr val="tx1"/>
                 </a:solidFill>
               </a:rPr>
-              <a:t>Рекомендація: не заморожувати курс (≈44,7 грн/$ з червня); інтервенції — лише згладжувати. Резерви залежать від ритму допомоги (продаж валюти її «доносить»), тому захищає їх пауза в лібералізації</a:t>
+              <a:t>Рекомендація: не фіксувати курс — жовтневе послаблення до 45,08 грн/$ показує, що амортизатор працює; інтервенції — лише згладжувати. Резерви залежать від ритму допомоги (продаж валюти її «доносить»), тому захищає їх пауза в лібералізації</a:t>
             </a:r>
             <a:endParaRPr lang="en-US" sz="1400" dirty="0"/>
           </a:p>
@@ -17400,7 +17328,7 @@
                   <a:schemeClr val="tx1"/>
                 </a:solidFill>
               </a:rPr>
-              <a:t>утримувати щонайменше до середини 2027; далі — зниження; інфляція ≈5% з I кв. 2028</a:t>
+              <a:t>утримувати щонайменше до середини 2027; далі — зниження; інфляція нижче 5% з I кв. 2028, ≈5% у 2029</a:t>
             </a:r>
             <a:endParaRPr lang="en-US" sz="1300" dirty="0"/>
           </a:p>
@@ -17544,7 +17472,7 @@
                   <a:schemeClr val="tx1"/>
                 </a:solidFill>
               </a:rPr>
-              <a:t>з червня ≈44,7 грн/$ без змін; допускати двосторонні коливання, інтервенції лише згладжують; рівень не фіксувати</a:t>
+              <a:t>після плато ≈44,7 грн/$ (червень–вересень) у жовтні — до 45,08 (14.10, історичний мінімум гривні), 25.10 — 45,05; допускати двосторонні коливання, інтервенції лише згладжують; рівень не фіксувати</a:t>
             </a:r>
             <a:endParaRPr lang="en-US" sz="1300" dirty="0"/>
           </a:p>
@@ -18098,7 +18026,7 @@
                             <a:schemeClr val="tx1"/>
                           </a:solidFill>
                         </a:rPr>
-                        <a:t>10,8</a:t>
+                        <a:t>11,2</a:t>
                       </a:r>
                       <a:endParaRPr lang="en-US" sz="1500" dirty="0"/>
                     </a:p>
@@ -18159,7 +18087,7 @@
                             <a:schemeClr val="tx1"/>
                           </a:solidFill>
                         </a:rPr>
-                        <a:t>6,6</a:t>
+                        <a:t>5,4</a:t>
                       </a:r>
                       <a:endParaRPr lang="en-US" sz="1500" dirty="0"/>
                     </a:p>
@@ -18220,7 +18148,7 @@
                             <a:schemeClr val="tx1"/>
                           </a:solidFill>
                         </a:rPr>
-                        <a:t>4,7</a:t>
+                        <a:t>4,8</a:t>
                       </a:r>
                       <a:endParaRPr lang="en-US" sz="1500" dirty="0"/>
                     </a:p>
@@ -18281,7 +18209,7 @@
                             <a:schemeClr val="tx1"/>
                           </a:solidFill>
                         </a:rPr>
-                        <a:t>4,9</a:t>
+                        <a:t>4,8</a:t>
                       </a:r>
                       <a:endParaRPr lang="en-US" sz="1500" dirty="0"/>
                     </a:p>
@@ -18466,7 +18394,7 @@
                             <a:schemeClr val="tx1"/>
                           </a:solidFill>
                         </a:rPr>
-                        <a:t>5,4</a:t>
+                        <a:t>4,2</a:t>
                       </a:r>
                       <a:endParaRPr lang="en-US" sz="1500" dirty="0"/>
                     </a:p>
@@ -18527,7 +18455,7 @@
                             <a:schemeClr val="tx1"/>
                           </a:solidFill>
                         </a:rPr>
-                        <a:t>3,3</a:t>
+                        <a:t>3,4</a:t>
                       </a:r>
                       <a:endParaRPr lang="en-US" sz="1500" dirty="0"/>
                     </a:p>
@@ -18588,7 +18516,7 @@
                             <a:schemeClr val="tx1"/>
                           </a:solidFill>
                         </a:rPr>
-                        <a:t>4,8</a:t>
+                        <a:t>4,7</a:t>
                       </a:r>
                       <a:endParaRPr lang="en-US" sz="1500" dirty="0"/>
                     </a:p>
@@ -18712,7 +18640,7 @@
                             <a:schemeClr val="tx1"/>
                           </a:solidFill>
                         </a:rPr>
-                        <a:t>0,6</a:t>
+                        <a:t>0,5</a:t>
                       </a:r>
                       <a:endParaRPr lang="en-US" sz="1500" dirty="0"/>
                     </a:p>
@@ -18773,7 +18701,7 @@
                             <a:schemeClr val="tx1"/>
                           </a:solidFill>
                         </a:rPr>
-                        <a:t>0,3</a:t>
+                        <a:t>−0,2</a:t>
                       </a:r>
                       <a:endParaRPr lang="en-US" sz="1500" dirty="0"/>
                     </a:p>
@@ -18834,7 +18762,7 @@
                             <a:schemeClr val="tx1"/>
                           </a:solidFill>
                         </a:rPr>
-                        <a:t>1,6</a:t>
+                        <a:t>2,4</a:t>
                       </a:r>
                       <a:endParaRPr lang="en-US" sz="1500" dirty="0"/>
                     </a:p>
@@ -19080,7 +19008,7 @@
                             <a:schemeClr val="tx1"/>
                           </a:solidFill>
                         </a:rPr>
-                        <a:t>14,8</a:t>
+                        <a:t>13,1</a:t>
                       </a:r>
                       <a:endParaRPr lang="en-US" sz="1500" dirty="0"/>
                     </a:p>
@@ -19202,7 +19130,7 @@
                             <a:schemeClr val="tx1"/>
                           </a:solidFill>
                         </a:rPr>
-                        <a:t>9,5</a:t>
+                        <a:t>10,5</a:t>
                       </a:r>
                       <a:endParaRPr lang="en-US" sz="1500" dirty="0"/>
                     </a:p>
@@ -19326,7 +19254,7 @@
                             <a:schemeClr val="tx1"/>
                           </a:solidFill>
                         </a:rPr>
-                        <a:t>44,4</a:t>
+                        <a:t>45,0</a:t>
                       </a:r>
                       <a:endParaRPr lang="en-US" sz="1500" dirty="0"/>
                     </a:p>
@@ -19387,7 +19315,7 @@
                             <a:schemeClr val="tx1"/>
                           </a:solidFill>
                         </a:rPr>
-                        <a:t>43,9</a:t>
+                        <a:t>45,6</a:t>
                       </a:r>
                       <a:endParaRPr lang="en-US" sz="1500" dirty="0"/>
                     </a:p>
@@ -19448,7 +19376,7 @@
                             <a:schemeClr val="tx1"/>
                           </a:solidFill>
                         </a:rPr>
-                        <a:t>44,2</a:t>
+                        <a:t>46,6</a:t>
                       </a:r>
                       <a:endParaRPr lang="en-US" sz="1500" dirty="0"/>
                     </a:p>
@@ -19509,7 +19437,7 @@
                             <a:schemeClr val="tx1"/>
                           </a:solidFill>
                         </a:rPr>
-                        <a:t>44,8</a:t>
+                        <a:t>47,0</a:t>
                       </a:r>
                       <a:endParaRPr lang="en-US" sz="1500" dirty="0"/>
                     </a:p>
@@ -19591,7 +19519,7 @@
                   <a:schemeClr val="accent6"/>
                 </a:solidFill>
               </a:rPr>
-              <a:t>* Середнє за квартал (SA); грудень 2026 — 11,3% (наукаст). ** Модельний курс оптимістичний: ринок чекає ≈47–49 грн/$ — наш головний ризик. ≈5% — з I кв. 2028. Дані на 20.10.2026.</a:t>
+              <a:t>* Середнє за квартал (SA); грудень 2026 — 12,1% (наукаст). ** Грн/€ з моделі ÷ EUR/USD 1,12 (жовтневий рівень); аналітики чекають ≈47 грн/$ через рік — курсовий ризик. Інфляція нижче 5% з I кв. 2028, ≈5% у 2029 (у 2028 — 3,8–4,8%). Дані на 24.10.2026.</a:t>
             </a:r>
             <a:endParaRPr lang="en-US" sz="1100" dirty="0"/>
           </a:p>
@@ -19825,7 +19753,7 @@
       </p:sp>
       <p:pic>
         <p:nvPicPr>
-          <p:cNvPr id="5" name="chart" descr="C:\Users\Lenovo\Documents\GitHub\nbu-challenge-2026\results\figures\ov_fx_households.png">    </p:cNvPr>
+          <p:cNvPr id="5" name="chart" descr="/home/user/nbu-challenge-2026/results/figures/ov_fx_households.png">    </p:cNvPr>
           <p:cNvPicPr>
             <a:picLocks noChangeAspect="1"/>
           </p:cNvPicPr>
@@ -19840,7 +19768,7 @@
         <p:spPr>
           <a:xfrm>
             <a:off x="457200" y="1325880"/>
-            <a:ext cx="6732760" cy="4983480"/>
+            <a:ext cx="7040880" cy="4975330"/>
           </a:xfrm>
           <a:prstGeom prst="rect">
             <a:avLst/>
@@ -20433,7 +20361,7 @@
                   <a:schemeClr val="bg1"/>
                 </a:solidFill>
               </a:rPr>
-              <a:t>Базовий прогноз: інфляція ≈11,3% у грудні 2026, 6,6% у IV кв. 2027, ≈5% — з I кв. 2028</a:t>
+              <a:t>Базовий прогноз: інфляція ≈12,1% у грудні 2026, 5,4% у IV кв. 2027, нижче 5% з I кв. 2028, ≈5% у 2029</a:t>
             </a:r>
             <a:endParaRPr lang="en-US" sz="2000" dirty="0"/>
           </a:p>
@@ -20686,7 +20614,7 @@
       </p:sp>
       <p:pic>
         <p:nvPicPr>
-          <p:cNvPr id="5" name="chart" descr="C:\Users\Lenovo\Documents\GitHub\nbu-challenge-2026\results\figures\ov_bop.png">    </p:cNvPr>
+          <p:cNvPr id="5" name="chart" descr="/home/user/nbu-challenge-2026/results/figures/ov_bop.png">    </p:cNvPr>
           <p:cNvPicPr>
             <a:picLocks noChangeAspect="1"/>
           </p:cNvPicPr>
@@ -20701,7 +20629,7 @@
         <p:spPr>
           <a:xfrm>
             <a:off x="457200" y="1325880"/>
-            <a:ext cx="11277295" cy="3384581"/>
+            <a:ext cx="11277295" cy="3307218"/>
           </a:xfrm>
           <a:prstGeom prst="rect">
             <a:avLst/>
@@ -21212,7 +21140,7 @@
       </p:sp>
       <p:pic>
         <p:nvPicPr>
-          <p:cNvPr id="5" name="chart" descr="C:\Users\Lenovo\Documents\GitHub\nbu-challenge-2026\results\figures\ov_fiscal.png">    </p:cNvPr>
+          <p:cNvPr id="5" name="chart" descr="/home/user/nbu-challenge-2026/results/figures/ov_fiscal.png">    </p:cNvPr>
           <p:cNvPicPr>
             <a:picLocks noChangeAspect="1"/>
           </p:cNvPicPr>
@@ -21226,8 +21154,8 @@
         </p:blipFill>
         <p:spPr>
           <a:xfrm>
-            <a:off x="623042" y="1325880"/>
-            <a:ext cx="10945611" cy="3703320"/>
+            <a:off x="457200" y="1325880"/>
+            <a:ext cx="11277295" cy="3638707"/>
           </a:xfrm>
           <a:prstGeom prst="rect">
             <a:avLst/>
@@ -21412,7 +21340,7 @@
                   <a:schemeClr val="tx1"/>
                 </a:solidFill>
               </a:rPr>
-              <a:t>Бюджетна декларація 2027–2029: дефіцит держбюджету 17,7% ВВП у 2027 і 11,1% у 2028; уряд закладає інфляцію 8,9% на грудень 2027 (НБУ — 6,9%, ми — 6,6% у IV кв.)</a:t>
+              <a:t>Бюджетна декларація 2027–2029: дефіцит держбюджету 17,7% ВВП у 2027 і 11,1% у 2028; уряд закладає інфляцію 8,9% на грудень 2027 (НБУ — 6,9%, ми — 5,4% у IV кв.)</a:t>
             </a:r>
             <a:endParaRPr lang="en-US" sz="1300" dirty="0"/>
           </a:p>
@@ -21738,7 +21666,7 @@
       </p:sp>
       <p:pic>
         <p:nvPicPr>
-          <p:cNvPr id="5" name="chart" descr="C:\Users\Lenovo\Documents\GitHub\nbu-challenge-2026\results\figures\ml_irf_oil.png">    </p:cNvPr>
+          <p:cNvPr id="5" name="chart" descr="/home/user/nbu-challenge-2026/results/figures/irf_res_dl_roil_beta.png">    </p:cNvPr>
           <p:cNvPicPr>
             <a:picLocks noChangeAspect="1"/>
           </p:cNvPicPr>
@@ -21752,8 +21680,8 @@
         </p:blipFill>
         <p:spPr>
           <a:xfrm>
-            <a:off x="457200" y="1325880"/>
-            <a:ext cx="11277295" cy="3158013"/>
+            <a:off x="3102552" y="1325880"/>
+            <a:ext cx="5986592" cy="3703320"/>
           </a:xfrm>
           <a:prstGeom prst="rect">
             <a:avLst/>
@@ -22030,7 +21958,7 @@
                   <a:schemeClr val="tx1"/>
                 </a:solidFill>
               </a:rPr>
-              <a:t>З вагою нафти 0 модель точно збігається з шаблоном НБУ — перевірено тестами і в MATLAB/IRIS</a:t>
+              <a:t>З вагою нафти 0 функції відгуку збігаються з шаблоном НБУ (тест); поділ на базову й небазову інфляцію лишається</a:t>
             </a:r>
             <a:endParaRPr lang="en-US" sz="1300" dirty="0"/>
           </a:p>
@@ -22550,7 +22478,7 @@
                             <a:schemeClr val="tx1"/>
                           </a:solidFill>
                         </a:rPr>
-                        <a:t>Наукаст ІСЦ і базового ІСЦ (тренд + сезонність − 0,1 в. п.): грудень — 11,3% і 9,5% р/р; в IV кв. фіксуємо обидва ряди</a:t>
+                        <a:t>Наукаст ІСЦ і базового ІСЦ (тренд + сезонність − 0,1 в. п.): грудень — 12,1% і 9,6% р/р; в IV кв. фіксуємо обидва ряди</a:t>
                       </a:r>
                       <a:endParaRPr lang="en-US" sz="1200" dirty="0"/>
                     </a:p>
@@ -23831,7 +23759,7 @@
                             <a:schemeClr val="tx1"/>
                           </a:solidFill>
                         </a:rPr>
-                        <a:t>Допустиме послаблення (цільовий темп): 4% у 2027, 3% у 2028; фактичний курс — з моделі (≈1% на рік)</a:t>
+                        <a:t>IV кв. 2026 — за фактом жовтня й останнім курсом (50,4 грн/€); далі допустиме послаблення (цільовий темп) 4% у 2027, 3% у 2028; фактичний — з моделі (≈2% на рік); EUR/USD 1,12 без змін</a:t>
                       </a:r>
                       <a:endParaRPr lang="en-US" sz="1200" dirty="0"/>
                     </a:p>
@@ -23888,9 +23816,9 @@
                       </a:pPr>
                       <a:r>
                         <a:rPr lang="en-US" sz="1200" u="sng" dirty="0">
-                          <a:hlinkClick r:id="rId11" invalidUrl="" action="" tgtFrame="" tooltip="https://bank.gov.ua/admin_uploads/article/Macroeconomic_Forecast_table_2026_07.xlsx?v=19" history="1" highlightClick="0" endSnd="0"/>
+                          <a:hlinkClick r:id="rId11" invalidUrl="" action="" tgtFrame="" tooltip="https://bank.gov.ua/ua/open-data/api-dev" history="1" highlightClick="0" endSnd="0"/>
                         </a:rPr>
-                        <a:t>Макропрогноз НБУ (EUR/USD)</a:t>
+                        <a:t>Офіційний курс НБУ, ЄЦБ</a:t>
                       </a:r>
                       <a:endParaRPr lang="en-US" sz="1200" dirty="0"/>
                     </a:p>
@@ -24014,7 +23942,7 @@
                             <a:schemeClr val="tx1"/>
                           </a:solidFill>
                         </a:rPr>
-                        <a:t>Ф'ючерсна крива (20.10): $109 (IV кв. 2026) → $87 (кінець 2027) → $79 (кінець 2028)</a:t>
+                        <a:t>Спот до вересня; IV кв. 2026 $119 (жовтень — спот, далі ф'ючерс); ф'ючерсна крива (24.10): $87 (кінець 2027) → $79 (кінець 2028)</a:t>
                       </a:r>
                       <a:endParaRPr lang="en-US" sz="1200" dirty="0"/>
                     </a:p>
@@ -24217,7 +24145,7 @@
                             <a:schemeClr val="tx1"/>
                           </a:solidFill>
                         </a:rPr>
-                        <a:t>HICP 3,0 / 2,5 / 2,1%, ВВП 0,9 / 1,4 / 1,5%, ставка ЄЦБ до 3%</a:t>
+                        <a:t>HICP 3,0 / 2,5 / 2,1%, ВВП 0,9 / 1,4 / 1,5%, ставка ЄЦБ ≈3% у 2027–2028</a:t>
                       </a:r>
                       <a:endParaRPr lang="en-US" sz="1200" dirty="0"/>
                     </a:p>
@@ -24436,7 +24364,7 @@
                 <a:ea typeface="Cambria" pitchFamily="34" charset="-122"/>
                 <a:cs typeface="Cambria" pitchFamily="34" charset="-120"/>
               </a:rPr>
-              <a:t>Додаток 5. Базова інфляція в 2027 стійкіша, ніж у НБУ: 5,4% наприкінці року проти 5,1%</a:t>
+              <a:t>Додаток 5. Базова інфляція у 2027 — нижча, ніж у НБУ: 4,2% у IV кв. (≈3,7% у грудні) проти 5,1% у НБУ</a:t>
             </a:r>
             <a:endParaRPr lang="en-US" sz="2600" dirty="0"/>
           </a:p>
@@ -24527,7 +24455,7 @@
       </p:sp>
       <p:pic>
         <p:nvPicPr>
-          <p:cNvPr id="5" name="chart" descr="C:\Users\Lenovo\Documents\GitHub\nbu-challenge-2026\results\figures\fc_core.png">    </p:cNvPr>
+          <p:cNvPr id="5" name="chart" descr="/home/user/nbu-challenge-2026/results/figures/fc_core.png">    </p:cNvPr>
           <p:cNvPicPr>
             <a:picLocks noChangeAspect="1"/>
           </p:cNvPicPr>
@@ -24542,7 +24470,7 @@
         <p:spPr>
           <a:xfrm>
             <a:off x="457200" y="1325880"/>
-            <a:ext cx="7040880" cy="3881792"/>
+            <a:ext cx="7040880" cy="3887267"/>
           </a:xfrm>
           <a:prstGeom prst="rect">
             <a:avLst/>
@@ -24583,7 +24511,7 @@
                   <a:schemeClr val="tx1"/>
                 </a:solidFill>
               </a:rPr>
-              <a:t>Зарплати +21–25%, дорожчі послуги, наслідки атак — базова інфляція знижується повільніше, ніж очікує НБУ</a:t>
+              <a:t>Наша базова — середнє за IV кв., у НБУ — грудень; для порівняння показуємо й грудневий еквівалент (інтерполяція)</a:t>
             </a:r>
             <a:endParaRPr lang="en-US" sz="1400" dirty="0"/>
           </a:p>
@@ -24601,7 +24529,7 @@
                   <a:schemeClr val="tx1"/>
                 </a:solidFill>
               </a:rPr>
-              <a:t>Загальна: 6,6% у IV кв. 2027 (НБУ 6,9% у грудні) — тарифи й акцизи додають ≈1,7 в. п. на рік, дешевша нафта (ф'ючерси) — віднімає</a:t>
+              <a:t>Що її тримає в моделі: додатний розрив ВВП, перенесення вересневого шоку витрат і курсу; у 2027 — шок витрат опалювального сезону (судження за оцінкою НБУ)</a:t>
             </a:r>
             <a:endParaRPr lang="en-US" sz="1400" dirty="0"/>
           </a:p>
@@ -24619,7 +24547,7 @@
                   <a:schemeClr val="tx1"/>
                 </a:solidFill>
               </a:rPr>
-              <a:t>2028: базова 3,3% (НБУ 3,3%) — слабкий попит → простір для зниження ставки з II пів. 2027</a:t>
+              <a:t>Загальна: 5,4% у IV кв. 2027 (НБУ 6,9% у грудні) — тарифи й акцизи додають ≈1,7 в. п. на рік, дешевша нафта (ф'ючерси) — віднімає</a:t>
             </a:r>
             <a:endParaRPr lang="en-US" sz="1400" dirty="0"/>
           </a:p>
@@ -24637,7 +24565,7 @@
                   <a:schemeClr val="tx1"/>
                 </a:solidFill>
               </a:rPr>
-              <a:t>Висновок: рішуче підвищення зараз, швидше пом'якшення пізніше</a:t>
+              <a:t>2028: базова 3,4% (НБУ 3,3%) — слабкий попит → простір для зниження ставки з II пів. 2027</a:t>
             </a:r>
             <a:endParaRPr lang="en-US" sz="1400" dirty="0"/>
           </a:p>
@@ -25991,7 +25919,7 @@
                   <a:schemeClr val="tx1"/>
                 </a:solidFill>
               </a:rPr>
-              <a:t>НБУ підвищує ставку на 1 в. п., щоб інфляція повернулася до ≈5% у 2028 році</a:t>
+              <a:t>НБУ підвищує ставку на 1 в. п., щоб інфляція повернулася до цілі у 2029 році</a:t>
             </a:r>
             <a:endParaRPr lang="en-US" sz="1400" dirty="0"/>
           </a:p>
@@ -27303,7 +27231,7 @@
                             <a:schemeClr val="tx1"/>
                           </a:solidFill>
                         </a:rPr>
-                        <a:t>6,6</a:t>
+                        <a:t>5,4</a:t>
                       </a:r>
                       <a:endParaRPr lang="en-US" sz="1200" dirty="0"/>
                     </a:p>
@@ -27364,7 +27292,7 @@
                             <a:schemeClr val="tx1"/>
                           </a:solidFill>
                         </a:rPr>
-                        <a:t>11,1</a:t>
+                        <a:t>11,2</a:t>
                       </a:r>
                       <a:endParaRPr lang="en-US" sz="1200" dirty="0"/>
                     </a:p>
@@ -27486,7 +27414,7 @@
                             <a:schemeClr val="tx1"/>
                           </a:solidFill>
                         </a:rPr>
-                        <a:t>43,9</a:t>
+                        <a:t>45,6</a:t>
                       </a:r>
                       <a:endParaRPr lang="en-US" sz="1200" dirty="0"/>
                     </a:p>
@@ -27671,7 +27599,7 @@
                             <a:schemeClr val="tx1"/>
                           </a:solidFill>
                         </a:rPr>
-                        <a:t>12,4</a:t>
+                        <a:t>7,2</a:t>
                       </a:r>
                       <a:endParaRPr lang="en-US" sz="1200" dirty="0"/>
                     </a:p>
@@ -27732,7 +27660,7 @@
                             <a:schemeClr val="tx1"/>
                           </a:solidFill>
                         </a:rPr>
-                        <a:t>14,2</a:t>
+                        <a:t>11,4</a:t>
                       </a:r>
                       <a:endParaRPr lang="en-US" sz="1200" dirty="0"/>
                     </a:p>
@@ -27793,7 +27721,7 @@
                             <a:schemeClr val="tx1"/>
                           </a:solidFill>
                         </a:rPr>
-                        <a:t>20,9</a:t>
+                        <a:t>18,0</a:t>
                       </a:r>
                       <a:endParaRPr lang="en-US" sz="1200" dirty="0"/>
                     </a:p>
@@ -27854,7 +27782,7 @@
                             <a:schemeClr val="tx1"/>
                           </a:solidFill>
                         </a:rPr>
-                        <a:t>47,7</a:t>
+                        <a:t>47,1</a:t>
                       </a:r>
                       <a:endParaRPr lang="en-US" sz="1200" dirty="0"/>
                     </a:p>
@@ -28039,7 +27967,7 @@
                             <a:schemeClr val="tx1"/>
                           </a:solidFill>
                         </a:rPr>
-                        <a:t>8,6</a:t>
+                        <a:t>7,4</a:t>
                       </a:r>
                       <a:endParaRPr lang="en-US" sz="1200" dirty="0"/>
                     </a:p>
@@ -28100,7 +28028,7 @@
                             <a:schemeClr val="tx1"/>
                           </a:solidFill>
                         </a:rPr>
-                        <a:t>12,5</a:t>
+                        <a:t>12,4</a:t>
                       </a:r>
                       <a:endParaRPr lang="en-US" sz="1200" dirty="0"/>
                     </a:p>
@@ -28222,7 +28150,7 @@
                             <a:schemeClr val="tx1"/>
                           </a:solidFill>
                         </a:rPr>
-                        <a:t>43,7</a:t>
+                        <a:t>45,3</a:t>
                       </a:r>
                       <a:endParaRPr lang="en-US" sz="1200" dirty="0"/>
                     </a:p>
@@ -28407,7 +28335,7 @@
                             <a:schemeClr val="tx1"/>
                           </a:solidFill>
                         </a:rPr>
-                        <a:t>6,7</a:t>
+                        <a:t>5,6</a:t>
                       </a:r>
                       <a:endParaRPr lang="en-US" sz="1200" dirty="0"/>
                     </a:p>
@@ -28468,7 +28396,7 @@
                             <a:schemeClr val="tx1"/>
                           </a:solidFill>
                         </a:rPr>
-                        <a:t>11,6</a:t>
+                        <a:t>11,5</a:t>
                       </a:r>
                       <a:endParaRPr lang="en-US" sz="1200" dirty="0"/>
                     </a:p>
@@ -28590,7 +28518,7 @@
                             <a:schemeClr val="tx1"/>
                           </a:solidFill>
                         </a:rPr>
-                        <a:t>43,9</a:t>
+                        <a:t>45,6</a:t>
                       </a:r>
                       <a:endParaRPr lang="en-US" sz="1200" dirty="0"/>
                     </a:p>
@@ -28750,7 +28678,7 @@
                 <a:ea typeface="Cambria" pitchFamily="34" charset="-122"/>
                 <a:cs typeface="Cambria" pitchFamily="34" charset="-120"/>
               </a:rPr>
-              <a:t>Додаток 9. Стійкість рішення: під ризиками найменші очікувані втрати — 17–17,5%</a:t>
+              <a:t>Додаток 9. Стійкість рішення: під ризиками найменші очікувані втрати — 16,5–17%</a:t>
             </a:r>
             <a:endParaRPr lang="en-US" sz="2600" dirty="0"/>
           </a:p>
@@ -29353,7 +29281,7 @@
                             <a:schemeClr val="tx1"/>
                           </a:solidFill>
                         </a:rPr>
-                        <a:t>100</a:t>
+                        <a:t>106</a:t>
                       </a:r>
                       <a:endParaRPr lang="en-US" sz="1100" dirty="0"/>
                     </a:p>
@@ -29414,7 +29342,7 @@
                             <a:schemeClr val="tx1"/>
                           </a:solidFill>
                         </a:rPr>
-                        <a:t>98</a:t>
+                        <a:t>105</a:t>
                       </a:r>
                       <a:endParaRPr lang="en-US" sz="1100" dirty="0"/>
                     </a:p>
@@ -29475,7 +29403,7 @@
                             <a:schemeClr val="tx1"/>
                           </a:solidFill>
                         </a:rPr>
-                        <a:t>98</a:t>
+                        <a:t>106</a:t>
                       </a:r>
                       <a:endParaRPr lang="en-US" sz="1100" dirty="0"/>
                     </a:p>
@@ -29536,7 +29464,7 @@
                             <a:schemeClr val="tx1"/>
                           </a:solidFill>
                         </a:rPr>
-                        <a:t>99</a:t>
+                        <a:t>108</a:t>
                       </a:r>
                       <a:endParaRPr lang="en-US" sz="1100" dirty="0"/>
                     </a:p>
@@ -29597,7 +29525,7 @@
                             <a:schemeClr val="tx1"/>
                           </a:solidFill>
                         </a:rPr>
-                        <a:t>102</a:t>
+                        <a:t>112</a:t>
                       </a:r>
                       <a:endParaRPr lang="en-US" sz="1100" dirty="0"/>
                     </a:p>
@@ -29782,7 +29710,7 @@
                             <a:schemeClr val="tx1"/>
                           </a:solidFill>
                         </a:rPr>
-                        <a:t>168</a:t>
+                        <a:t>171</a:t>
                       </a:r>
                       <a:endParaRPr lang="en-US" sz="1100" dirty="0"/>
                     </a:p>
@@ -29843,7 +29771,7 @@
                             <a:schemeClr val="tx1"/>
                           </a:solidFill>
                         </a:rPr>
-                        <a:t>165</a:t>
+                        <a:t>168</a:t>
                       </a:r>
                       <a:endParaRPr lang="en-US" sz="1100" dirty="0"/>
                     </a:p>
@@ -29904,7 +29832,7 @@
                             <a:schemeClr val="tx1"/>
                           </a:solidFill>
                         </a:rPr>
-                        <a:t>163</a:t>
+                        <a:t>167</a:t>
                       </a:r>
                       <a:endParaRPr lang="en-US" sz="1100" dirty="0"/>
                     </a:p>
@@ -29965,7 +29893,7 @@
                             <a:schemeClr val="tx1"/>
                           </a:solidFill>
                         </a:rPr>
-                        <a:t>163</a:t>
+                        <a:t>167</a:t>
                       </a:r>
                       <a:endParaRPr lang="en-US" sz="1100" dirty="0"/>
                     </a:p>
@@ -30026,7 +29954,7 @@
                             <a:schemeClr val="tx1"/>
                           </a:solidFill>
                         </a:rPr>
-                        <a:t>165</a:t>
+                        <a:t>169</a:t>
                       </a:r>
                       <a:endParaRPr lang="en-US" sz="1100" dirty="0"/>
                     </a:p>
@@ -30211,7 +30139,7 @@
                             <a:schemeClr val="tx1"/>
                           </a:solidFill>
                         </a:rPr>
-                        <a:t>230</a:t>
+                        <a:t>211</a:t>
                       </a:r>
                       <a:endParaRPr lang="en-US" sz="1100" dirty="0"/>
                     </a:p>
@@ -30272,7 +30200,7 @@
                             <a:schemeClr val="tx1"/>
                           </a:solidFill>
                         </a:rPr>
-                        <a:t>222</a:t>
+                        <a:t>204</a:t>
                       </a:r>
                       <a:endParaRPr lang="en-US" sz="1100" dirty="0"/>
                     </a:p>
@@ -30333,7 +30261,7 @@
                             <a:schemeClr val="tx1"/>
                           </a:solidFill>
                         </a:rPr>
-                        <a:t>215</a:t>
+                        <a:t>198</a:t>
                       </a:r>
                       <a:endParaRPr lang="en-US" sz="1100" dirty="0"/>
                     </a:p>
@@ -30394,7 +30322,7 @@
                             <a:schemeClr val="tx1"/>
                           </a:solidFill>
                         </a:rPr>
-                        <a:t>210</a:t>
+                        <a:t>193</a:t>
                       </a:r>
                       <a:endParaRPr lang="en-US" sz="1100" dirty="0"/>
                     </a:p>
@@ -30455,7 +30383,7 @@
                             <a:schemeClr val="tx1"/>
                           </a:solidFill>
                         </a:rPr>
-                        <a:t>206</a:t>
+                        <a:t>190</a:t>
                       </a:r>
                       <a:endParaRPr lang="en-US" sz="1100" dirty="0"/>
                     </a:p>
@@ -30640,7 +30568,7 @@
                             <a:schemeClr val="tx1"/>
                           </a:solidFill>
                         </a:rPr>
-                        <a:t>63</a:t>
+                        <a:t>70</a:t>
                       </a:r>
                       <a:endParaRPr lang="en-US" sz="1100" dirty="0"/>
                     </a:p>
@@ -30701,7 +30629,7 @@
                             <a:schemeClr val="tx1"/>
                           </a:solidFill>
                         </a:rPr>
-                        <a:t>62</a:t>
+                        <a:t>71</a:t>
                       </a:r>
                       <a:endParaRPr lang="en-US" sz="1100" dirty="0"/>
                     </a:p>
@@ -30762,7 +30690,7 @@
                             <a:schemeClr val="tx1"/>
                           </a:solidFill>
                         </a:rPr>
-                        <a:t>62</a:t>
+                        <a:t>73</a:t>
                       </a:r>
                       <a:endParaRPr lang="en-US" sz="1100" dirty="0"/>
                     </a:p>
@@ -30823,7 +30751,7 @@
                             <a:schemeClr val="tx1"/>
                           </a:solidFill>
                         </a:rPr>
-                        <a:t>64</a:t>
+                        <a:t>77</a:t>
                       </a:r>
                       <a:endParaRPr lang="en-US" sz="1100" dirty="0"/>
                     </a:p>
@@ -30884,7 +30812,7 @@
                             <a:schemeClr val="tx1"/>
                           </a:solidFill>
                         </a:rPr>
-                        <a:t>68</a:t>
+                        <a:t>82</a:t>
                       </a:r>
                       <a:endParaRPr lang="en-US" sz="1100" dirty="0"/>
                     </a:p>
@@ -31069,7 +30997,7 @@
                             <a:schemeClr val="tx1"/>
                           </a:solidFill>
                         </a:rPr>
-                        <a:t>114</a:t>
+                        <a:t>116</a:t>
                       </a:r>
                       <a:endParaRPr lang="en-US" sz="1100" dirty="0"/>
                     </a:p>
@@ -31130,7 +31058,7 @@
                             <a:schemeClr val="tx1"/>
                           </a:solidFill>
                         </a:rPr>
-                        <a:t>112</a:t>
+                        <a:t>115</a:t>
                       </a:r>
                       <a:endParaRPr lang="en-US" sz="1100" dirty="0"/>
                     </a:p>
@@ -31191,7 +31119,7 @@
                             <a:schemeClr val="tx1"/>
                           </a:solidFill>
                         </a:rPr>
-                        <a:t>112</a:t>
+                        <a:t>115</a:t>
                       </a:r>
                       <a:endParaRPr lang="en-US" sz="1100" dirty="0"/>
                     </a:p>
@@ -31252,7 +31180,7 @@
                             <a:schemeClr val="tx1"/>
                           </a:solidFill>
                         </a:rPr>
-                        <a:t>113</a:t>
+                        <a:t>117</a:t>
                       </a:r>
                       <a:endParaRPr lang="en-US" sz="1100" dirty="0"/>
                     </a:p>
@@ -31313,7 +31241,7 @@
                             <a:schemeClr val="tx1"/>
                           </a:solidFill>
                         </a:rPr>
-                        <a:t>116</a:t>
+                        <a:t>121</a:t>
                       </a:r>
                       <a:endParaRPr lang="en-US" sz="1100" dirty="0"/>
                     </a:p>
@@ -31498,7 +31426,7 @@
                             <a:schemeClr val="tx1"/>
                           </a:solidFill>
                         </a:rPr>
-                        <a:t>340</a:t>
+                        <a:t>119</a:t>
                       </a:r>
                       <a:endParaRPr lang="en-US" sz="1100" dirty="0"/>
                     </a:p>
@@ -31559,7 +31487,7 @@
                             <a:schemeClr val="tx1"/>
                           </a:solidFill>
                         </a:rPr>
-                        <a:t>327</a:t>
+                        <a:t>115</a:t>
                       </a:r>
                       <a:endParaRPr lang="en-US" sz="1100" dirty="0"/>
                     </a:p>
@@ -31620,7 +31548,7 @@
                             <a:schemeClr val="tx1"/>
                           </a:solidFill>
                         </a:rPr>
-                        <a:t>315</a:t>
+                        <a:t>113</a:t>
                       </a:r>
                       <a:endParaRPr lang="en-US" sz="1100" dirty="0"/>
                     </a:p>
@@ -31681,7 +31609,7 @@
                             <a:schemeClr val="tx1"/>
                           </a:solidFill>
                         </a:rPr>
-                        <a:t>304</a:t>
+                        <a:t>111</a:t>
                       </a:r>
                       <a:endParaRPr lang="en-US" sz="1100" dirty="0"/>
                     </a:p>
@@ -31742,7 +31670,7 @@
                             <a:schemeClr val="tx1"/>
                           </a:solidFill>
                         </a:rPr>
-                        <a:t>295</a:t>
+                        <a:t>112</a:t>
                       </a:r>
                       <a:endParaRPr lang="en-US" sz="1100" dirty="0"/>
                     </a:p>
@@ -31927,7 +31855,7 @@
                             <a:schemeClr val="tx1"/>
                           </a:solidFill>
                         </a:rPr>
-                        <a:t>220</a:t>
+                        <a:t>217</a:t>
                       </a:r>
                       <a:endParaRPr lang="en-US" sz="1100" dirty="0"/>
                     </a:p>
@@ -31988,7 +31916,7 @@
                             <a:schemeClr val="tx1"/>
                           </a:solidFill>
                         </a:rPr>
-                        <a:t>217</a:t>
+                        <a:t>213</a:t>
                       </a:r>
                       <a:endParaRPr lang="en-US" sz="1100" dirty="0"/>
                     </a:p>
@@ -32049,7 +31977,7 @@
                             <a:schemeClr val="tx1"/>
                           </a:solidFill>
                         </a:rPr>
-                        <a:t>215</a:t>
+                        <a:t>210</a:t>
                       </a:r>
                       <a:endParaRPr lang="en-US" sz="1100" dirty="0"/>
                     </a:p>
@@ -32110,7 +32038,7 @@
                             <a:schemeClr val="tx1"/>
                           </a:solidFill>
                         </a:rPr>
-                        <a:t>214</a:t>
+                        <a:t>209</a:t>
                       </a:r>
                       <a:endParaRPr lang="en-US" sz="1100" dirty="0"/>
                     </a:p>
@@ -32171,7 +32099,7 @@
                             <a:schemeClr val="tx1"/>
                           </a:solidFill>
                         </a:rPr>
-                        <a:t>215</a:t>
+                        <a:t>210</a:t>
                       </a:r>
                       <a:endParaRPr lang="en-US" sz="1100" dirty="0"/>
                     </a:p>
@@ -32356,7 +32284,7 @@
                             <a:schemeClr val="tx1"/>
                           </a:solidFill>
                         </a:rPr>
-                        <a:t>118</a:t>
+                        <a:t>125</a:t>
                       </a:r>
                       <a:endParaRPr lang="en-US" sz="1100" dirty="0"/>
                     </a:p>
@@ -32417,7 +32345,7 @@
                             <a:schemeClr val="tx1"/>
                           </a:solidFill>
                         </a:rPr>
-                        <a:t>117</a:t>
+                        <a:t>124</a:t>
                       </a:r>
                       <a:endParaRPr lang="en-US" sz="1100" dirty="0"/>
                     </a:p>
@@ -32478,7 +32406,7 @@
                             <a:schemeClr val="tx1"/>
                           </a:solidFill>
                         </a:rPr>
-                        <a:t>117</a:t>
+                        <a:t>125</a:t>
                       </a:r>
                       <a:endParaRPr lang="en-US" sz="1100" dirty="0"/>
                     </a:p>
@@ -32539,7 +32467,7 @@
                             <a:schemeClr val="tx1"/>
                           </a:solidFill>
                         </a:rPr>
-                        <a:t>118</a:t>
+                        <a:t>127</a:t>
                       </a:r>
                       <a:endParaRPr lang="en-US" sz="1100" dirty="0"/>
                     </a:p>
@@ -32600,7 +32528,7 @@
                             <a:schemeClr val="tx1"/>
                           </a:solidFill>
                         </a:rPr>
-                        <a:t>120</a:t>
+                        <a:t>130</a:t>
                       </a:r>
                       <a:endParaRPr lang="en-US" sz="1100" dirty="0"/>
                     </a:p>
@@ -32785,7 +32713,7 @@
                             <a:schemeClr val="tx1"/>
                           </a:solidFill>
                         </a:rPr>
-                        <a:t>93</a:t>
+                        <a:t>105</a:t>
                       </a:r>
                       <a:endParaRPr lang="en-US" sz="1100" dirty="0"/>
                     </a:p>
@@ -32846,7 +32774,7 @@
                             <a:schemeClr val="tx1"/>
                           </a:solidFill>
                         </a:rPr>
-                        <a:t>92</a:t>
+                        <a:t>106</a:t>
                       </a:r>
                       <a:endParaRPr lang="en-US" sz="1100" dirty="0"/>
                     </a:p>
@@ -32907,7 +32835,7 @@
                             <a:schemeClr val="tx1"/>
                           </a:solidFill>
                         </a:rPr>
-                        <a:t>94</a:t>
+                        <a:t>109</a:t>
                       </a:r>
                       <a:endParaRPr lang="en-US" sz="1100" dirty="0"/>
                     </a:p>
@@ -32968,7 +32896,7 @@
                             <a:schemeClr val="tx1"/>
                           </a:solidFill>
                         </a:rPr>
-                        <a:t>96</a:t>
+                        <a:t>112</a:t>
                       </a:r>
                       <a:endParaRPr lang="en-US" sz="1100" dirty="0"/>
                     </a:p>
@@ -33029,7 +32957,7 @@
                             <a:schemeClr val="tx1"/>
                           </a:solidFill>
                         </a:rPr>
-                        <a:t>100</a:t>
+                        <a:t>118</a:t>
                       </a:r>
                       <a:endParaRPr lang="en-US" sz="1100" dirty="0"/>
                     </a:p>
@@ -33214,7 +33142,7 @@
                             <a:schemeClr val="tx1"/>
                           </a:solidFill>
                         </a:rPr>
-                        <a:t>68</a:t>
+                        <a:t>71</a:t>
                       </a:r>
                       <a:endParaRPr lang="en-US" sz="1100" dirty="0"/>
                     </a:p>
@@ -33275,7 +33203,7 @@
                             <a:schemeClr val="tx1"/>
                           </a:solidFill>
                         </a:rPr>
-                        <a:t>66</a:t>
+                        <a:t>70</a:t>
                       </a:r>
                       <a:endParaRPr lang="en-US" sz="1100" dirty="0"/>
                     </a:p>
@@ -33336,7 +33264,7 @@
                             <a:schemeClr val="tx1"/>
                           </a:solidFill>
                         </a:rPr>
-                        <a:t>66</a:t>
+                        <a:t>71</a:t>
                       </a:r>
                       <a:endParaRPr lang="en-US" sz="1100" dirty="0"/>
                     </a:p>
@@ -33397,7 +33325,7 @@
                             <a:schemeClr val="tx1"/>
                           </a:solidFill>
                         </a:rPr>
-                        <a:t>67</a:t>
+                        <a:t>74</a:t>
                       </a:r>
                       <a:endParaRPr lang="en-US" sz="1100" dirty="0"/>
                     </a:p>
@@ -33458,7 +33386,7 @@
                             <a:schemeClr val="tx1"/>
                           </a:solidFill>
                         </a:rPr>
-                        <a:t>69</a:t>
+                        <a:t>78</a:t>
                       </a:r>
                       <a:endParaRPr lang="en-US" sz="1100" dirty="0"/>
                     </a:p>
@@ -33635,7 +33563,7 @@
                             <a:schemeClr val="tx1"/>
                           </a:solidFill>
                         </a:rPr>
-                        <a:t>144</a:t>
+                        <a:t>130</a:t>
                       </a:r>
                       <a:endParaRPr lang="en-US" sz="1100" dirty="0"/>
                     </a:p>
@@ -33696,7 +33624,7 @@
                             <a:schemeClr val="tx1"/>
                           </a:solidFill>
                         </a:rPr>
-                        <a:t>140</a:t>
+                        <a:t>128</a:t>
                       </a:r>
                       <a:endParaRPr lang="en-US" sz="1100" dirty="0"/>
                     </a:p>
@@ -33757,7 +33685,7 @@
                             <a:schemeClr val="tx1"/>
                           </a:solidFill>
                         </a:rPr>
-                        <a:t>139</a:t>
+                        <a:t>128 ●</a:t>
                       </a:r>
                       <a:endParaRPr lang="en-US" sz="1100" dirty="0"/>
                     </a:p>
@@ -33818,7 +33746,7 @@
                             <a:schemeClr val="tx1"/>
                           </a:solidFill>
                         </a:rPr>
-                        <a:t>138 ●</a:t>
+                        <a:t>129</a:t>
                       </a:r>
                       <a:endParaRPr lang="en-US" sz="1100" dirty="0"/>
                     </a:p>
@@ -33879,7 +33807,7 @@
                             <a:schemeClr val="tx1"/>
                           </a:solidFill>
                         </a:rPr>
-                        <a:t>139</a:t>
+                        <a:t>131</a:t>
                       </a:r>
                       <a:endParaRPr lang="en-US" sz="1100" dirty="0"/>
                     </a:p>
@@ -34056,7 +33984,7 @@
                             <a:schemeClr val="tx1"/>
                           </a:solidFill>
                         </a:rPr>
-                        <a:t>127</a:t>
+                        <a:t>120</a:t>
                       </a:r>
                       <a:endParaRPr lang="en-US" sz="1100" dirty="0"/>
                     </a:p>
@@ -34117,7 +34045,7 @@
                             <a:schemeClr val="tx1"/>
                           </a:solidFill>
                         </a:rPr>
-                        <a:t>124</a:t>
+                        <a:t>119 ●</a:t>
                       </a:r>
                       <a:endParaRPr lang="en-US" sz="1100" dirty="0"/>
                     </a:p>
@@ -34178,7 +34106,68 @@
                             <a:schemeClr val="tx1"/>
                           </a:solidFill>
                         </a:rPr>
-                        <a:t>123 ●</a:t>
+                        <a:t>119</a:t>
+                      </a:r>
+                      <a:endParaRPr lang="en-US" sz="1100" dirty="0"/>
+                    </a:p>
+                  </a:txBody>
+                  <a:tcPr marL="63500" marR="63500" marT="38100" marB="38100" anchor="ctr">
+                    <a:lnL w="6350" cap="flat" cmpd="sng" algn="ctr">
+                      <a:solidFill>
+                        <a:srgbClr val="C9D6D3"/>
+                      </a:solidFill>
+                      <a:prstDash val="solid"/>
+                      <a:round/>
+                      <a:headEnd type="none" w="med" len="med"/>
+                      <a:tailEnd type="none" w="med" len="med"/>
+                    </a:lnL>
+                    <a:lnR w="6350" cap="flat" cmpd="sng" algn="ctr">
+                      <a:solidFill>
+                        <a:srgbClr val="C9D6D3"/>
+                      </a:solidFill>
+                      <a:prstDash val="solid"/>
+                      <a:round/>
+                      <a:headEnd type="none" w="med" len="med"/>
+                      <a:tailEnd type="none" w="med" len="med"/>
+                    </a:lnR>
+                    <a:lnT w="6350" cap="flat" cmpd="sng" algn="ctr">
+                      <a:solidFill>
+                        <a:srgbClr val="C9D6D3"/>
+                      </a:solidFill>
+                      <a:prstDash val="solid"/>
+                      <a:round/>
+                      <a:headEnd type="none" w="med" len="med"/>
+                      <a:tailEnd type="none" w="med" len="med"/>
+                    </a:lnT>
+                    <a:lnB w="6350" cap="flat" cmpd="sng" algn="ctr">
+                      <a:solidFill>
+                        <a:srgbClr val="C9D6D3"/>
+                      </a:solidFill>
+                      <a:prstDash val="solid"/>
+                      <a:round/>
+                      <a:headEnd type="none" w="med" len="med"/>
+                      <a:tailEnd type="none" w="med" len="med"/>
+                    </a:lnB>
+                    <a:solidFill>
+                      <a:srgbClr val="EAF1EF"/>
+                    </a:solidFill>
+                  </a:tcPr>
+                </a:tc>
+                <a:tc>
+                  <a:txBody>
+                    <a:bodyPr/>
+                    <a:lstStyle/>
+                    <a:p>
+                      <a:pPr algn="l" indent="0" marL="0">
+                        <a:buNone/>
+                      </a:pPr>
+                      <a:r>
+                        <a:rPr lang="en-US" sz="1100" dirty="0">
+                          <a:solidFill>
+                            <a:schemeClr val="tx1"/>
+                          </a:solidFill>
+                        </a:rPr>
+                        <a:t>120</a:t>
                       </a:r>
                       <a:endParaRPr lang="en-US" sz="1100" dirty="0"/>
                     </a:p>
@@ -34240,67 +34229,6 @@
                           </a:solidFill>
                         </a:rPr>
                         <a:t>123</a:t>
-                      </a:r>
-                      <a:endParaRPr lang="en-US" sz="1100" dirty="0"/>
-                    </a:p>
-                  </a:txBody>
-                  <a:tcPr marL="63500" marR="63500" marT="38100" marB="38100" anchor="ctr">
-                    <a:lnL w="6350" cap="flat" cmpd="sng" algn="ctr">
-                      <a:solidFill>
-                        <a:srgbClr val="C9D6D3"/>
-                      </a:solidFill>
-                      <a:prstDash val="solid"/>
-                      <a:round/>
-                      <a:headEnd type="none" w="med" len="med"/>
-                      <a:tailEnd type="none" w="med" len="med"/>
-                    </a:lnL>
-                    <a:lnR w="6350" cap="flat" cmpd="sng" algn="ctr">
-                      <a:solidFill>
-                        <a:srgbClr val="C9D6D3"/>
-                      </a:solidFill>
-                      <a:prstDash val="solid"/>
-                      <a:round/>
-                      <a:headEnd type="none" w="med" len="med"/>
-                      <a:tailEnd type="none" w="med" len="med"/>
-                    </a:lnR>
-                    <a:lnT w="6350" cap="flat" cmpd="sng" algn="ctr">
-                      <a:solidFill>
-                        <a:srgbClr val="C9D6D3"/>
-                      </a:solidFill>
-                      <a:prstDash val="solid"/>
-                      <a:round/>
-                      <a:headEnd type="none" w="med" len="med"/>
-                      <a:tailEnd type="none" w="med" len="med"/>
-                    </a:lnT>
-                    <a:lnB w="6350" cap="flat" cmpd="sng" algn="ctr">
-                      <a:solidFill>
-                        <a:srgbClr val="C9D6D3"/>
-                      </a:solidFill>
-                      <a:prstDash val="solid"/>
-                      <a:round/>
-                      <a:headEnd type="none" w="med" len="med"/>
-                      <a:tailEnd type="none" w="med" len="med"/>
-                    </a:lnB>
-                    <a:solidFill>
-                      <a:srgbClr val="EAF1EF"/>
-                    </a:solidFill>
-                  </a:tcPr>
-                </a:tc>
-                <a:tc>
-                  <a:txBody>
-                    <a:bodyPr/>
-                    <a:lstStyle/>
-                    <a:p>
-                      <a:pPr algn="l" indent="0" marL="0">
-                        <a:buNone/>
-                      </a:pPr>
-                      <a:r>
-                        <a:rPr lang="en-US" sz="1100" dirty="0">
-                          <a:solidFill>
-                            <a:schemeClr val="tx1"/>
-                          </a:solidFill>
-                        </a:rPr>
-                        <a:t>125</a:t>
                       </a:r>
                       <a:endParaRPr lang="en-US" sz="1100" dirty="0"/>
                     </a:p>
@@ -34477,7 +34405,7 @@
                             <a:schemeClr val="tx1"/>
                           </a:solidFill>
                         </a:rPr>
-                        <a:t>45</a:t>
+                        <a:t>21</a:t>
                       </a:r>
                       <a:endParaRPr lang="en-US" sz="1100" dirty="0"/>
                     </a:p>
@@ -34538,7 +34466,7 @@
                             <a:schemeClr val="tx1"/>
                           </a:solidFill>
                         </a:rPr>
-                        <a:t>31</a:t>
+                        <a:t>14</a:t>
                       </a:r>
                       <a:endParaRPr lang="en-US" sz="1100" dirty="0"/>
                     </a:p>
@@ -34599,7 +34527,7 @@
                             <a:schemeClr val="tx1"/>
                           </a:solidFill>
                         </a:rPr>
-                        <a:t>20</a:t>
+                        <a:t>8</a:t>
                       </a:r>
                       <a:endParaRPr lang="en-US" sz="1100" dirty="0"/>
                     </a:p>
@@ -34660,7 +34588,7 @@
                             <a:schemeClr val="tx1"/>
                           </a:solidFill>
                         </a:rPr>
-                        <a:t>9</a:t>
+                        <a:t>7 ●</a:t>
                       </a:r>
                       <a:endParaRPr lang="en-US" sz="1100" dirty="0"/>
                     </a:p>
@@ -34721,7 +34649,7 @@
                             <a:schemeClr val="tx1"/>
                           </a:solidFill>
                         </a:rPr>
-                        <a:t>8 ●</a:t>
+                        <a:t>12</a:t>
                       </a:r>
                       <a:endParaRPr lang="en-US" sz="1100" dirty="0"/>
                     </a:p>
@@ -35984,7 +35912,7 @@
       </p:sp>
       <p:pic>
         <p:nvPicPr>
-          <p:cNvPr id="5" name="chart" descr="C:\Users\Lenovo\Documents\GitHub\nbu-challenge-2026\results\figures\ml_irf_rate.png">    </p:cNvPr>
+          <p:cNvPr id="5" name="chart" descr="/home/user/nbu-challenge-2026/results/figures/irf_res_ir_tlr_beta.png">    </p:cNvPr>
           <p:cNvPicPr>
             <a:picLocks noChangeAspect="1"/>
           </p:cNvPicPr>
@@ -35998,8 +35926,8 @@
         </p:blipFill>
         <p:spPr>
           <a:xfrm>
-            <a:off x="1236266" y="1325880"/>
-            <a:ext cx="9719163" cy="4983480"/>
+            <a:off x="2067832" y="1325880"/>
+            <a:ext cx="8056031" cy="4983480"/>
           </a:xfrm>
           <a:prstGeom prst="rect">
             <a:avLst/>
@@ -36176,7 +36104,7 @@
       </p:sp>
       <p:pic>
         <p:nvPicPr>
-          <p:cNvPr id="5" name="chart" descr="C:\Users\Lenovo\Documents\GitHub\nbu-challenge-2026\results\figures\fc_rate_drivers.png">    </p:cNvPr>
+          <p:cNvPr id="5" name="chart" descr="/home/user/nbu-challenge-2026/results/figures/fc_rate_drivers.png">    </p:cNvPr>
           <p:cNvPicPr>
             <a:picLocks noChangeAspect="1"/>
           </p:cNvPicPr>
@@ -36191,7 +36119,7 @@
         <p:spPr>
           <a:xfrm>
             <a:off x="457200" y="1325880"/>
-            <a:ext cx="7040880" cy="2947885"/>
+            <a:ext cx="7040880" cy="2951754"/>
           </a:xfrm>
           <a:prstGeom prst="rect">
             <a:avLst/>
@@ -36400,30 +36328,84 @@
                 <a:ea typeface="Cambria" pitchFamily="34" charset="-122"/>
                 <a:cs typeface="Cambria" pitchFamily="34" charset="-120"/>
               </a:rPr>
-              <a:t>Додаток 13. Python і MATLAB/IRIS дають той самий прогноз (розбіжність ~1e−5)</a:t>
+              <a:t>Додаток 13. Бектест: прогноз з даними до III кв. 2025</a:t>
             </a:r>
             <a:endParaRPr lang="en-US" sz="2600" dirty="0"/>
           </a:p>
         </p:txBody>
       </p:sp>
+      <p:sp>
+        <p:nvSpPr>
+          <p:cNvPr id="4" name="sources"/>
+          <p:cNvSpPr txBox="1"/>
+          <p:nvPr/>
+        </p:nvSpPr>
+        <p:spPr>
+          <a:xfrm>
+            <a:off x="4937760" y="6455664"/>
+            <a:ext cx="6110935" cy="292608"/>
+          </a:xfrm>
+          <a:prstGeom prst="rect">
+            <a:avLst/>
+          </a:prstGeom>
+          <a:noFill/>
+          <a:ln/>
+        </p:spPr>
+        <p:txBody>
+          <a:bodyPr wrap="square" lIns="0" tIns="0" rIns="0" bIns="0" rtlCol="0" anchor="ctr"/>
+          <a:lstStyle/>
+          <a:p>
+            <a:pPr indent="0" marL="0">
+              <a:buNone/>
+            </a:pPr>
+            <a:r>
+              <a:rPr lang="en-US" sz="900" dirty="0">
+                <a:solidFill>
+                  <a:srgbClr val="5F6B6D"/>
+                </a:solidFill>
+              </a:rPr>
+              <a:t>Джерела: </a:t>
+            </a:r>
+            <a:pPr indent="0" marL="0">
+              <a:buNone/>
+            </a:pPr>
+            <a:r>
+              <a:rPr lang="en-US" sz="900" u="sng" dirty="0">
+                <a:solidFill>
+                  <a:srgbClr val="5F6B6D"/>
+                </a:solidFill>
+                <a:hlinkClick r:id="rId1" invalidUrl="" action="" tgtFrame="" tooltip="https://bank.gov.ua/ua/open-data/api-dev" history="1" highlightClick="0" endSnd="0">
+                  <a:extLst>
+                    <a:ext uri="{A12FA001-AC4F-418D-AE19-62706E023703}">
+                      <ahyp:hlinkClr xmlns:ahyp="http://schemas.microsoft.com/office/drawing/2018/hyperlinkcolor" val="tx"/>
+                    </a:ext>
+                  </a:extLst>
+                </a:hlinkClick>
+              </a:rPr>
+              <a:t>API НБУ</a:t>
+            </a:r>
+            <a:endParaRPr lang="en-US" sz="900" dirty="0"/>
+          </a:p>
+        </p:txBody>
+      </p:sp>
       <p:pic>
         <p:nvPicPr>
-          <p:cNvPr id="4" name="chart" descr="C:\Users\Lenovo\Documents\GitHub\nbu-challenge-2026\results\figures\fc_matlab_check.png">    </p:cNvPr>
+          <p:cNvPr id="5" name="chart" descr="/home/user/nbu-challenge-2026/results/figures/fc_backtest.png">    </p:cNvPr>
           <p:cNvPicPr>
             <a:picLocks noChangeAspect="1"/>
           </p:cNvPicPr>
           <p:nvPr/>
         </p:nvPicPr>
         <p:blipFill>
-          <a:blip r:embed="rId1"/>
+          <a:blip r:embed="rId2"/>
           <a:stretch>
             <a:fillRect/>
           </a:stretch>
         </p:blipFill>
         <p:spPr>
           <a:xfrm>
-            <a:off x="1240708" y="1325880"/>
-            <a:ext cx="9710280" cy="3703320"/>
+            <a:off x="885120" y="1325880"/>
+            <a:ext cx="10421455" cy="3703320"/>
           </a:xfrm>
           <a:prstGeom prst="rect">
             <a:avLst/>
@@ -36432,7 +36414,7 @@
       </p:pic>
       <p:sp>
         <p:nvSpPr>
-          <p:cNvPr id="5" name="num1"/>
+          <p:cNvPr id="6" name="num1"/>
           <p:cNvSpPr/>
           <p:nvPr/>
         </p:nvSpPr>
@@ -36452,7 +36434,7 @@
       </p:sp>
       <p:sp>
         <p:nvSpPr>
-          <p:cNvPr id="6" name="Text 2"/>
+          <p:cNvPr id="7" name="Text 3"/>
           <p:cNvSpPr txBox="1"/>
           <p:nvPr/>
         </p:nvSpPr>
@@ -36488,7 +36470,7 @@
       </p:sp>
       <p:sp>
         <p:nvSpPr>
-          <p:cNvPr id="7" name="point1"/>
+          <p:cNvPr id="8" name="point1"/>
           <p:cNvSpPr txBox="1"/>
           <p:nvPr/>
         </p:nvSpPr>
@@ -36516,7 +36498,7 @@
                   <a:schemeClr val="tx1"/>
                 </a:solidFill>
               </a:rPr>
-              <a:t>Один файл моделі model/model.model, ті самі дані, параметри й плани всіх 5 сценаріїв</a:t>
+              <a:t>Помилка прогнозу ІСЦ на 1–4 квартали вперед: 0,4–1,8 в. п. («без змін»: 1,3–6,1); лише 3 прогони, зовнішні умови — фактичні, тож це перевірка, а не доказ переваги над НБУ</a:t>
             </a:r>
             <a:endParaRPr lang="en-US" sz="1300" dirty="0"/>
           </a:p>
@@ -36524,7 +36506,7 @@
       </p:sp>
       <p:sp>
         <p:nvSpPr>
-          <p:cNvPr id="8" name="num2"/>
+          <p:cNvPr id="9" name="num2"/>
           <p:cNvSpPr/>
           <p:nvPr/>
         </p:nvSpPr>
@@ -36544,7 +36526,7 @@
       </p:sp>
       <p:sp>
         <p:nvSpPr>
-          <p:cNvPr id="9" name="Text 5"/>
+          <p:cNvPr id="10" name="Text 6"/>
           <p:cNvSpPr txBox="1"/>
           <p:nvPr/>
         </p:nvSpPr>
@@ -36580,7 +36562,7 @@
       </p:sp>
       <p:sp>
         <p:nvSpPr>
-          <p:cNvPr id="10" name="point2"/>
+          <p:cNvPr id="11" name="point2"/>
           <p:cNvSpPr txBox="1"/>
           <p:nvPr/>
         </p:nvSpPr>
@@ -36608,7 +36590,7 @@
                   <a:schemeClr val="tx1"/>
                 </a:solidFill>
               </a:rPr>
-              <a:t>Фільтр Калмана 2016–2026 і прогнози до 2029 збігаються з точністю до округлення</a:t>
+              <a:t>Ставку краще прогнозує «без змін»: НБУ змінює її рідко</a:t>
             </a:r>
             <a:endParaRPr lang="en-US" sz="1300" dirty="0"/>
           </a:p>
@@ -36616,7 +36598,7 @@
       </p:sp>
       <p:sp>
         <p:nvSpPr>
-          <p:cNvPr id="11" name="num3"/>
+          <p:cNvPr id="12" name="num3"/>
           <p:cNvSpPr/>
           <p:nvPr/>
         </p:nvSpPr>
@@ -36636,7 +36618,7 @@
       </p:sp>
       <p:sp>
         <p:nvSpPr>
-          <p:cNvPr id="12" name="Text 8"/>
+          <p:cNvPr id="13" name="Text 9"/>
           <p:cNvSpPr txBox="1"/>
           <p:nvPr/>
         </p:nvSpPr>
@@ -36672,7 +36654,7 @@
       </p:sp>
       <p:sp>
         <p:nvSpPr>
-          <p:cNvPr id="13" name="point3"/>
+          <p:cNvPr id="14" name="point3"/>
           <p:cNvSpPr txBox="1"/>
           <p:nvPr/>
         </p:nvSpPr>
@@ -36700,7 +36682,7 @@
                   <a:schemeClr val="tx1"/>
                 </a:solidFill>
               </a:rPr>
-              <a:t>Збірка однією командою: python build.py → MATLAB → звірка → графіки → презентація</a:t>
+              <a:t>Курс грн/€ модель не прогнозує краще за наївний — залежить від EUR/USD (обмеження моделі)</a:t>
             </a:r>
             <a:endParaRPr lang="en-US" sz="1300" dirty="0"/>
           </a:p>
@@ -36814,483 +36796,15 @@
                 <a:ea typeface="Cambria" pitchFamily="34" charset="-122"/>
                 <a:cs typeface="Cambria" pitchFamily="34" charset="-120"/>
               </a:rPr>
-              <a:t>Додаток 14. Бектест: прогноз з даними до III кв. 2025</a:t>
+              <a:t>Додаток 14. Базовий прогноз по півріччях</a:t>
             </a:r>
             <a:endParaRPr lang="en-US" sz="2600" dirty="0"/>
           </a:p>
         </p:txBody>
       </p:sp>
-      <p:sp>
-        <p:nvSpPr>
-          <p:cNvPr id="4" name="sources"/>
-          <p:cNvSpPr txBox="1"/>
-          <p:nvPr/>
-        </p:nvSpPr>
-        <p:spPr>
-          <a:xfrm>
-            <a:off x="4937760" y="6455664"/>
-            <a:ext cx="6110935" cy="292608"/>
-          </a:xfrm>
-          <a:prstGeom prst="rect">
-            <a:avLst/>
-          </a:prstGeom>
-          <a:noFill/>
-          <a:ln/>
-        </p:spPr>
-        <p:txBody>
-          <a:bodyPr wrap="square" lIns="0" tIns="0" rIns="0" bIns="0" rtlCol="0" anchor="ctr"/>
-          <a:lstStyle/>
-          <a:p>
-            <a:pPr indent="0" marL="0">
-              <a:buNone/>
-            </a:pPr>
-            <a:r>
-              <a:rPr lang="en-US" sz="900" dirty="0">
-                <a:solidFill>
-                  <a:srgbClr val="5F6B6D"/>
-                </a:solidFill>
-              </a:rPr>
-              <a:t>Джерела: </a:t>
-            </a:r>
-            <a:pPr indent="0" marL="0">
-              <a:buNone/>
-            </a:pPr>
-            <a:r>
-              <a:rPr lang="en-US" sz="900" u="sng" dirty="0">
-                <a:solidFill>
-                  <a:srgbClr val="5F6B6D"/>
-                </a:solidFill>
-                <a:hlinkClick r:id="rId1" invalidUrl="" action="" tgtFrame="" tooltip="https://bank.gov.ua/ua/open-data/api-dev" history="1" highlightClick="0" endSnd="0">
-                  <a:extLst>
-                    <a:ext uri="{A12FA001-AC4F-418D-AE19-62706E023703}">
-                      <ahyp:hlinkClr xmlns:ahyp="http://schemas.microsoft.com/office/drawing/2018/hyperlinkcolor" val="tx"/>
-                    </a:ext>
-                  </a:extLst>
-                </a:hlinkClick>
-              </a:rPr>
-              <a:t>API НБУ</a:t>
-            </a:r>
-            <a:endParaRPr lang="en-US" sz="900" dirty="0"/>
-          </a:p>
-        </p:txBody>
-      </p:sp>
-      <p:pic>
-        <p:nvPicPr>
-          <p:cNvPr id="5" name="chart" descr="C:\Users\Lenovo\Documents\GitHub\nbu-challenge-2026\results\figures\fc_backtest.png">    </p:cNvPr>
-          <p:cNvPicPr>
-            <a:picLocks noChangeAspect="1"/>
-          </p:cNvPicPr>
-          <p:nvPr/>
-        </p:nvPicPr>
-        <p:blipFill>
-          <a:blip r:embed="rId2"/>
-          <a:stretch>
-            <a:fillRect/>
-          </a:stretch>
-        </p:blipFill>
-        <p:spPr>
-          <a:xfrm>
-            <a:off x="877770" y="1325880"/>
-            <a:ext cx="10436154" cy="3703320"/>
-          </a:xfrm>
-          <a:prstGeom prst="rect">
-            <a:avLst/>
-          </a:prstGeom>
-        </p:spPr>
-      </p:pic>
-      <p:sp>
-        <p:nvSpPr>
-          <p:cNvPr id="6" name="num1"/>
-          <p:cNvSpPr/>
-          <p:nvPr/>
-        </p:nvSpPr>
-        <p:spPr>
-          <a:xfrm>
-            <a:off x="457200" y="5276088"/>
-            <a:ext cx="310896" cy="310896"/>
-          </a:xfrm>
-          <a:prstGeom prst="ellipse">
-            <a:avLst/>
-          </a:prstGeom>
-          <a:solidFill>
-            <a:srgbClr val="C98A00"/>
-          </a:solidFill>
-          <a:ln/>
-        </p:spPr>
-      </p:sp>
-      <p:sp>
-        <p:nvSpPr>
-          <p:cNvPr id="7" name="Text 3"/>
-          <p:cNvSpPr txBox="1"/>
-          <p:nvPr/>
-        </p:nvSpPr>
-        <p:spPr>
-          <a:xfrm>
-            <a:off x="457200" y="5276088"/>
-            <a:ext cx="310896" cy="310896"/>
-          </a:xfrm>
-          <a:prstGeom prst="rect">
-            <a:avLst/>
-          </a:prstGeom>
-          <a:noFill/>
-          <a:ln/>
-        </p:spPr>
-        <p:txBody>
-          <a:bodyPr wrap="square" lIns="0" tIns="0" rIns="0" bIns="0" rtlCol="0" anchor="ctr"/>
-          <a:lstStyle/>
-          <a:p>
-            <a:pPr algn="ctr" indent="0" marL="0">
-              <a:buNone/>
-            </a:pPr>
-            <a:r>
-              <a:rPr lang="en-US" sz="1200" b="1" dirty="0">
-                <a:solidFill>
-                  <a:schemeClr val="bg1"/>
-                </a:solidFill>
-              </a:rPr>
-              <a:t>1</a:t>
-            </a:r>
-            <a:endParaRPr lang="en-US" sz="1200" dirty="0"/>
-          </a:p>
-        </p:txBody>
-      </p:sp>
-      <p:sp>
-        <p:nvSpPr>
-          <p:cNvPr id="8" name="point1"/>
-          <p:cNvSpPr txBox="1"/>
-          <p:nvPr/>
-        </p:nvSpPr>
-        <p:spPr>
-          <a:xfrm>
-            <a:off x="868680" y="5257800"/>
-            <a:ext cx="3164738" cy="1051560"/>
-          </a:xfrm>
-          <a:prstGeom prst="rect">
-            <a:avLst/>
-          </a:prstGeom>
-          <a:noFill/>
-          <a:ln/>
-        </p:spPr>
-        <p:txBody>
-          <a:bodyPr wrap="square" lIns="0" tIns="0" rIns="0" bIns="0" rtlCol="0" anchor="t"/>
-          <a:lstStyle/>
-          <a:p>
-            <a:pPr indent="0" marL="0">
-              <a:buNone/>
-            </a:pPr>
-            <a:r>
-              <a:rPr lang="en-US" sz="1300" dirty="0">
-                <a:solidFill>
-                  <a:schemeClr val="tx1"/>
-                </a:solidFill>
-              </a:rPr>
-              <a:t>Помилка прогнозу ІСЦ на 4 квартали: 0,8–1,0 в. п. («без змін»: 1,3–6,1); лише 3 прогони, зовнішні умови — фактичні, тож це перевірка, а не доказ переваги над НБУ</a:t>
-            </a:r>
-            <a:endParaRPr lang="en-US" sz="1300" dirty="0"/>
-          </a:p>
-        </p:txBody>
-      </p:sp>
-      <p:sp>
-        <p:nvSpPr>
-          <p:cNvPr id="9" name="num2"/>
-          <p:cNvSpPr/>
-          <p:nvPr/>
-        </p:nvSpPr>
-        <p:spPr>
-          <a:xfrm>
-            <a:off x="4307738" y="5276088"/>
-            <a:ext cx="310896" cy="310896"/>
-          </a:xfrm>
-          <a:prstGeom prst="ellipse">
-            <a:avLst/>
-          </a:prstGeom>
-          <a:solidFill>
-            <a:srgbClr val="C98A00"/>
-          </a:solidFill>
-          <a:ln/>
-        </p:spPr>
-      </p:sp>
-      <p:sp>
-        <p:nvSpPr>
-          <p:cNvPr id="10" name="Text 6"/>
-          <p:cNvSpPr txBox="1"/>
-          <p:nvPr/>
-        </p:nvSpPr>
-        <p:spPr>
-          <a:xfrm>
-            <a:off x="4307738" y="5276088"/>
-            <a:ext cx="310896" cy="310896"/>
-          </a:xfrm>
-          <a:prstGeom prst="rect">
-            <a:avLst/>
-          </a:prstGeom>
-          <a:noFill/>
-          <a:ln/>
-        </p:spPr>
-        <p:txBody>
-          <a:bodyPr wrap="square" lIns="0" tIns="0" rIns="0" bIns="0" rtlCol="0" anchor="ctr"/>
-          <a:lstStyle/>
-          <a:p>
-            <a:pPr algn="ctr" indent="0" marL="0">
-              <a:buNone/>
-            </a:pPr>
-            <a:r>
-              <a:rPr lang="en-US" sz="1200" b="1" dirty="0">
-                <a:solidFill>
-                  <a:schemeClr val="bg1"/>
-                </a:solidFill>
-              </a:rPr>
-              <a:t>2</a:t>
-            </a:r>
-            <a:endParaRPr lang="en-US" sz="1200" dirty="0"/>
-          </a:p>
-        </p:txBody>
-      </p:sp>
-      <p:sp>
-        <p:nvSpPr>
-          <p:cNvPr id="11" name="point2"/>
-          <p:cNvSpPr txBox="1"/>
-          <p:nvPr/>
-        </p:nvSpPr>
-        <p:spPr>
-          <a:xfrm>
-            <a:off x="4719218" y="5257800"/>
-            <a:ext cx="3164738" cy="1051560"/>
-          </a:xfrm>
-          <a:prstGeom prst="rect">
-            <a:avLst/>
-          </a:prstGeom>
-          <a:noFill/>
-          <a:ln/>
-        </p:spPr>
-        <p:txBody>
-          <a:bodyPr wrap="square" lIns="0" tIns="0" rIns="0" bIns="0" rtlCol="0" anchor="t"/>
-          <a:lstStyle/>
-          <a:p>
-            <a:pPr indent="0" marL="0">
-              <a:buNone/>
-            </a:pPr>
-            <a:r>
-              <a:rPr lang="en-US" sz="1300" dirty="0">
-                <a:solidFill>
-                  <a:schemeClr val="tx1"/>
-                </a:solidFill>
-              </a:rPr>
-              <a:t>Ставку краще прогнозує «без змін»: НБУ змінює її рідко</a:t>
-            </a:r>
-            <a:endParaRPr lang="en-US" sz="1300" dirty="0"/>
-          </a:p>
-        </p:txBody>
-      </p:sp>
-      <p:sp>
-        <p:nvSpPr>
-          <p:cNvPr id="12" name="num3"/>
-          <p:cNvSpPr/>
-          <p:nvPr/>
-        </p:nvSpPr>
-        <p:spPr>
-          <a:xfrm>
-            <a:off x="8158277" y="5276088"/>
-            <a:ext cx="310896" cy="310896"/>
-          </a:xfrm>
-          <a:prstGeom prst="ellipse">
-            <a:avLst/>
-          </a:prstGeom>
-          <a:solidFill>
-            <a:srgbClr val="C98A00"/>
-          </a:solidFill>
-          <a:ln/>
-        </p:spPr>
-      </p:sp>
-      <p:sp>
-        <p:nvSpPr>
-          <p:cNvPr id="13" name="Text 9"/>
-          <p:cNvSpPr txBox="1"/>
-          <p:nvPr/>
-        </p:nvSpPr>
-        <p:spPr>
-          <a:xfrm>
-            <a:off x="8158277" y="5276088"/>
-            <a:ext cx="310896" cy="310896"/>
-          </a:xfrm>
-          <a:prstGeom prst="rect">
-            <a:avLst/>
-          </a:prstGeom>
-          <a:noFill/>
-          <a:ln/>
-        </p:spPr>
-        <p:txBody>
-          <a:bodyPr wrap="square" lIns="0" tIns="0" rIns="0" bIns="0" rtlCol="0" anchor="ctr"/>
-          <a:lstStyle/>
-          <a:p>
-            <a:pPr algn="ctr" indent="0" marL="0">
-              <a:buNone/>
-            </a:pPr>
-            <a:r>
-              <a:rPr lang="en-US" sz="1200" b="1" dirty="0">
-                <a:solidFill>
-                  <a:schemeClr val="bg1"/>
-                </a:solidFill>
-              </a:rPr>
-              <a:t>3</a:t>
-            </a:r>
-            <a:endParaRPr lang="en-US" sz="1200" dirty="0"/>
-          </a:p>
-        </p:txBody>
-      </p:sp>
-      <p:sp>
-        <p:nvSpPr>
-          <p:cNvPr id="14" name="point3"/>
-          <p:cNvSpPr txBox="1"/>
-          <p:nvPr/>
-        </p:nvSpPr>
-        <p:spPr>
-          <a:xfrm>
-            <a:off x="8569757" y="5257800"/>
-            <a:ext cx="3164738" cy="1051560"/>
-          </a:xfrm>
-          <a:prstGeom prst="rect">
-            <a:avLst/>
-          </a:prstGeom>
-          <a:noFill/>
-          <a:ln/>
-        </p:spPr>
-        <p:txBody>
-          <a:bodyPr wrap="square" lIns="0" tIns="0" rIns="0" bIns="0" rtlCol="0" anchor="t"/>
-          <a:lstStyle/>
-          <a:p>
-            <a:pPr indent="0" marL="0">
-              <a:buNone/>
-            </a:pPr>
-            <a:r>
-              <a:rPr lang="en-US" sz="1300" dirty="0">
-                <a:solidFill>
-                  <a:schemeClr val="tx1"/>
-                </a:solidFill>
-              </a:rPr>
-              <a:t>Курс грн/€ модель не прогнозує краще за наївний — залежить від EUR/USD (обмеження моделі)</a:t>
-            </a:r>
-            <a:endParaRPr lang="en-US" sz="1300" dirty="0"/>
-          </a:p>
-        </p:txBody>
-      </p:sp>
-      <p:sp>
-        <p:nvSpPr>
-          <p:cNvPr id="25" name="Slide Number Placeholder 0"/>
-          <p:cNvSpPr>
-            <a:spLocks noGrp="1"/>
-          </p:cNvSpPr>
-          <p:nvPr>
-            <p:ph type="sldNum" sz="quarter" idx="4294967295"/>
-          </p:nvPr>
-        </p:nvSpPr>
-        <p:spPr>
-          <a:xfrm>
-            <a:off x="11185855" y="6473952"/>
-            <a:ext cx="548640" cy="274320"/>
-          </a:xfrm>
-          <a:prstGeom prst="rect">
-            <a:avLst/>
-          </a:prstGeom>
-          <a:extLst>
-            <a:ext uri="{C572A759-6A51-4108-AA02-DFA0A04FC94B}">
-              <ma14:wrappingTextBoxFlag xmlns:ma14="http://schemas.microsoft.com/office/mac/drawingml/2011/main" val="0"/>
-            </a:ext>
-          </a:extLst>
-        </p:spPr>
-        <p:txBody>
-          <a:bodyPr/>
-          <a:lstStyle>
-            <a:lvl1pPr>
-              <a:defRPr sz="1000">
-                <a:solidFill>
-                  <a:schemeClr val="accent6"/>
-                </a:solidFill>
-                <a:latin typeface="Calibri"/>
-                <a:ea typeface="Calibri"/>
-                <a:cs typeface="Calibri"/>
-              </a:defRPr>
-            </a:lvl1pPr>
-          </a:lstStyle>
-          <a:p>
-            <a:pPr algn="r"/>
-            <a:fld id="{F7021451-1387-4CA6-816F-3879F97B5CBC}" type="slidenum">
-              <a:rPr b="0" lang="en-US"/>
-              <a:t>36</a:t>
-            </a:fld>
-            <a:endParaRPr lang="en-US"/>
-          </a:p>
-        </p:txBody>
-      </p:sp>
-    </p:spTree>
-  </p:cSld>
-  <p:clrMapOvr>
-    <a:masterClrMapping/>
-  </p:clrMapOvr>
-</p:sld>
-</file>
-
-<file path=ppt/slides/slide37.xml><?xml version="1.0" encoding="utf-8"?>
-<p:sld xmlns:a="http://schemas.openxmlformats.org/drawingml/2006/main" xmlns:r="http://schemas.openxmlformats.org/officeDocument/2006/relationships" xmlns:p="http://schemas.openxmlformats.org/presentationml/2006/main">
-  <p:cSld name="Slide 37">
-    <p:spTree>
-      <p:nvGrpSpPr>
-        <p:cNvPr id="1" name=""/>
-        <p:cNvGrpSpPr/>
-        <p:nvPr/>
-      </p:nvGrpSpPr>
-      <p:grpSpPr>
-        <a:xfrm>
-          <a:off x="0" y="0"/>
-          <a:ext cx="0" cy="0"/>
-          <a:chOff x="0" y="0"/>
-          <a:chExt cx="0" cy="0"/>
-        </a:xfrm>
-      </p:grpSpPr>
-      <p:sp>
-        <p:nvSpPr>
-          <p:cNvPr id="2" name="Text 0"/>
-          <p:cNvSpPr/>
-          <p:nvPr>
-            <p:ph idx="100" type="title" hasCustomPrompt="1"/>
-          </p:nvPr>
-        </p:nvSpPr>
-        <p:spPr>
-          <a:xfrm>
-            <a:off x="457200" y="274320"/>
-            <a:ext cx="11277295" cy="914400"/>
-          </a:xfrm>
-          <a:prstGeom prst="rect">
-            <a:avLst/>
-          </a:prstGeom>
-          <a:noFill/>
-          <a:ln/>
-        </p:spPr>
-        <p:txBody>
-          <a:bodyPr wrap="square" lIns="0" tIns="0" rIns="0" bIns="0" rtlCol="0" anchor="t"/>
-          <a:lstStyle/>
-          <a:p>
-            <a:pPr algn="l" indent="0" marL="0">
-              <a:buNone/>
-            </a:pPr>
-            <a:r>
-              <a:rPr lang="en-US" sz="2600" b="1" dirty="0">
-                <a:solidFill>
-                  <a:schemeClr val="accent1"/>
-                </a:solidFill>
-                <a:latin typeface="Cambria" pitchFamily="34" charset="0"/>
-                <a:ea typeface="Cambria" pitchFamily="34" charset="-122"/>
-                <a:cs typeface="Cambria" pitchFamily="34" charset="-120"/>
-              </a:rPr>
-              <a:t>Додаток 15. Базовий прогноз по півріччях</a:t>
-            </a:r>
-            <a:endParaRPr lang="en-US" sz="2600" dirty="0"/>
-          </a:p>
-        </p:txBody>
-      </p:sp>
       <p:graphicFrame>
         <p:nvGraphicFramePr>
-          <p:cNvPr id="38" name="table"/>
+          <p:cNvPr id="37" name="table"/>
           <p:cNvGraphicFramePr>
             <a:graphicFrameLocks noGrp="1"/>
           </p:cNvGraphicFramePr>
@@ -37886,7 +37400,7 @@
                             <a:schemeClr val="tx1"/>
                           </a:solidFill>
                         </a:rPr>
-                        <a:t>10,8</a:t>
+                        <a:t>11,2</a:t>
                       </a:r>
                       <a:endParaRPr lang="en-US" sz="1200" dirty="0"/>
                     </a:p>
@@ -37947,7 +37461,7 @@
                             <a:schemeClr val="tx1"/>
                           </a:solidFill>
                         </a:rPr>
-                        <a:t>9,7</a:t>
+                        <a:t>9,5</a:t>
                       </a:r>
                       <a:endParaRPr lang="en-US" sz="1200" dirty="0"/>
                     </a:p>
@@ -38008,7 +37522,7 @@
                             <a:schemeClr val="tx1"/>
                           </a:solidFill>
                         </a:rPr>
-                        <a:t>6,6</a:t>
+                        <a:t>5,4</a:t>
                       </a:r>
                       <a:endParaRPr lang="en-US" sz="1200" dirty="0"/>
                     </a:p>
@@ -38069,7 +37583,7 @@
                             <a:schemeClr val="tx1"/>
                           </a:solidFill>
                         </a:rPr>
-                        <a:t>4,4</a:t>
+                        <a:t>3,8</a:t>
                       </a:r>
                       <a:endParaRPr lang="en-US" sz="1200" dirty="0"/>
                     </a:p>
@@ -38130,7 +37644,7 @@
                             <a:schemeClr val="tx1"/>
                           </a:solidFill>
                         </a:rPr>
-                        <a:t>4,7</a:t>
+                        <a:t>4,8</a:t>
                       </a:r>
                       <a:endParaRPr lang="en-US" sz="1200" dirty="0"/>
                     </a:p>
@@ -38191,7 +37705,7 @@
                             <a:schemeClr val="tx1"/>
                           </a:solidFill>
                         </a:rPr>
-                        <a:t>5,1</a:t>
+                        <a:t>5,3</a:t>
                       </a:r>
                       <a:endParaRPr lang="en-US" sz="1200" dirty="0"/>
                     </a:p>
@@ -38252,7 +37766,7 @@
                             <a:schemeClr val="tx1"/>
                           </a:solidFill>
                         </a:rPr>
-                        <a:t>4,9</a:t>
+                        <a:t>4,8</a:t>
                       </a:r>
                       <a:endParaRPr lang="en-US" sz="1200" dirty="0"/>
                     </a:p>
@@ -38437,7 +37951,7 @@
                             <a:schemeClr val="tx1"/>
                           </a:solidFill>
                         </a:rPr>
-                        <a:t>8,5</a:t>
+                        <a:t>7,8</a:t>
                       </a:r>
                       <a:endParaRPr lang="en-US" sz="1200" dirty="0"/>
                     </a:p>
@@ -38498,7 +38012,7 @@
                             <a:schemeClr val="tx1"/>
                           </a:solidFill>
                         </a:rPr>
-                        <a:t>5,4</a:t>
+                        <a:t>4,2</a:t>
                       </a:r>
                       <a:endParaRPr lang="en-US" sz="1200" dirty="0"/>
                     </a:p>
@@ -38559,7 +38073,7 @@
                             <a:schemeClr val="tx1"/>
                           </a:solidFill>
                         </a:rPr>
-                        <a:t>3,1</a:t>
+                        <a:t>2,5</a:t>
                       </a:r>
                       <a:endParaRPr lang="en-US" sz="1200" dirty="0"/>
                     </a:p>
@@ -38620,7 +38134,7 @@
                             <a:schemeClr val="tx1"/>
                           </a:solidFill>
                         </a:rPr>
-                        <a:t>3,3</a:t>
+                        <a:t>3,4</a:t>
                       </a:r>
                       <a:endParaRPr lang="en-US" sz="1200" dirty="0"/>
                     </a:p>
@@ -38681,7 +38195,7 @@
                             <a:schemeClr val="tx1"/>
                           </a:solidFill>
                         </a:rPr>
-                        <a:t>4,3</a:t>
+                        <a:t>4,4</a:t>
                       </a:r>
                       <a:endParaRPr lang="en-US" sz="1200" dirty="0"/>
                     </a:p>
@@ -38742,7 +38256,7 @@
                             <a:schemeClr val="tx1"/>
                           </a:solidFill>
                         </a:rPr>
-                        <a:t>4,8</a:t>
+                        <a:t>4,7</a:t>
                       </a:r>
                       <a:endParaRPr lang="en-US" sz="1200" dirty="0"/>
                     </a:p>
@@ -38866,7 +38380,7 @@
                             <a:schemeClr val="tx1"/>
                           </a:solidFill>
                         </a:rPr>
-                        <a:t>0,8</a:t>
+                        <a:t>0,4</a:t>
                       </a:r>
                       <a:endParaRPr lang="en-US" sz="1200" dirty="0"/>
                     </a:p>
@@ -38927,7 +38441,7 @@
                             <a:schemeClr val="tx1"/>
                           </a:solidFill>
                         </a:rPr>
-                        <a:t>0,7</a:t>
+                        <a:t>0,0</a:t>
                       </a:r>
                       <a:endParaRPr lang="en-US" sz="1200" dirty="0"/>
                     </a:p>
@@ -39049,7 +38563,7 @@
                             <a:schemeClr val="tx1"/>
                           </a:solidFill>
                         </a:rPr>
-                        <a:t>1,2</a:t>
+                        <a:t>2,0</a:t>
                       </a:r>
                       <a:endParaRPr lang="en-US" sz="1200" dirty="0"/>
                     </a:p>
@@ -39110,7 +38624,7 @@
                             <a:schemeClr val="tx1"/>
                           </a:solidFill>
                         </a:rPr>
-                        <a:t>2,9</a:t>
+                        <a:t>3,6</a:t>
                       </a:r>
                       <a:endParaRPr lang="en-US" sz="1200" dirty="0"/>
                     </a:p>
@@ -39232,7 +38746,7 @@
                             <a:schemeClr val="tx1"/>
                           </a:solidFill>
                         </a:rPr>
-                        <a:t>2,9</a:t>
+                        <a:t>2,5</a:t>
                       </a:r>
                       <a:endParaRPr lang="en-US" sz="1200" dirty="0"/>
                     </a:p>
@@ -39478,7 +38992,7 @@
                             <a:schemeClr val="tx1"/>
                           </a:solidFill>
                         </a:rPr>
-                        <a:t>14,8</a:t>
+                        <a:t>13,1</a:t>
                       </a:r>
                       <a:endParaRPr lang="en-US" sz="1200" dirty="0"/>
                     </a:p>
@@ -39539,7 +39053,7 @@
                             <a:schemeClr val="tx1"/>
                           </a:solidFill>
                         </a:rPr>
-                        <a:t>12,1</a:t>
+                        <a:t>11,0</a:t>
                       </a:r>
                       <a:endParaRPr lang="en-US" sz="1200" dirty="0"/>
                     </a:p>
@@ -39661,7 +39175,7 @@
                             <a:schemeClr val="tx1"/>
                           </a:solidFill>
                         </a:rPr>
-                        <a:t>9,8</a:t>
+                        <a:t>10,5</a:t>
                       </a:r>
                       <a:endParaRPr lang="en-US" sz="1200" dirty="0"/>
                     </a:p>
@@ -39722,7 +39236,7 @@
                             <a:schemeClr val="tx1"/>
                           </a:solidFill>
                         </a:rPr>
-                        <a:t>9,5</a:t>
+                        <a:t>10,5</a:t>
                       </a:r>
                       <a:endParaRPr lang="en-US" sz="1200" dirty="0"/>
                     </a:p>
@@ -39846,7 +39360,7 @@
                             <a:schemeClr val="tx1"/>
                           </a:solidFill>
                         </a:rPr>
-                        <a:t>51,5</a:t>
+                        <a:t>50,4</a:t>
                       </a:r>
                       <a:endParaRPr lang="en-US" sz="1200" dirty="0"/>
                     </a:p>
@@ -39907,7 +39421,7 @@
                             <a:schemeClr val="tx1"/>
                           </a:solidFill>
                         </a:rPr>
-                        <a:t>51,6</a:t>
+                        <a:t>50,6</a:t>
                       </a:r>
                       <a:endParaRPr lang="en-US" sz="1200" dirty="0"/>
                     </a:p>
@@ -39968,7 +39482,7 @@
                             <a:schemeClr val="tx1"/>
                           </a:solidFill>
                         </a:rPr>
-                        <a:t>51,8</a:t>
+                        <a:t>51,1</a:t>
                       </a:r>
                       <a:endParaRPr lang="en-US" sz="1200" dirty="0"/>
                     </a:p>
@@ -40029,7 +39543,68 @@
                             <a:schemeClr val="tx1"/>
                           </a:solidFill>
                         </a:rPr>
-                        <a:t>52,1</a:t>
+                        <a:t>51,7</a:t>
+                      </a:r>
+                      <a:endParaRPr lang="en-US" sz="1200" dirty="0"/>
+                    </a:p>
+                  </a:txBody>
+                  <a:tcPr marL="63500" marR="63500" marT="38100" marB="38100" anchor="ctr">
+                    <a:lnL w="6350" cap="flat" cmpd="sng" algn="ctr">
+                      <a:solidFill>
+                        <a:srgbClr val="C9D6D3"/>
+                      </a:solidFill>
+                      <a:prstDash val="solid"/>
+                      <a:round/>
+                      <a:headEnd type="none" w="med" len="med"/>
+                      <a:tailEnd type="none" w="med" len="med"/>
+                    </a:lnL>
+                    <a:lnR w="6350" cap="flat" cmpd="sng" algn="ctr">
+                      <a:solidFill>
+                        <a:srgbClr val="C9D6D3"/>
+                      </a:solidFill>
+                      <a:prstDash val="solid"/>
+                      <a:round/>
+                      <a:headEnd type="none" w="med" len="med"/>
+                      <a:tailEnd type="none" w="med" len="med"/>
+                    </a:lnR>
+                    <a:lnT w="6350" cap="flat" cmpd="sng" algn="ctr">
+                      <a:solidFill>
+                        <a:srgbClr val="C9D6D3"/>
+                      </a:solidFill>
+                      <a:prstDash val="solid"/>
+                      <a:round/>
+                      <a:headEnd type="none" w="med" len="med"/>
+                      <a:tailEnd type="none" w="med" len="med"/>
+                    </a:lnT>
+                    <a:lnB w="6350" cap="flat" cmpd="sng" algn="ctr">
+                      <a:solidFill>
+                        <a:srgbClr val="C9D6D3"/>
+                      </a:solidFill>
+                      <a:prstDash val="solid"/>
+                      <a:round/>
+                      <a:headEnd type="none" w="med" len="med"/>
+                      <a:tailEnd type="none" w="med" len="med"/>
+                    </a:lnB>
+                    <a:solidFill>
+                      <a:srgbClr val="FFFFFF"/>
+                    </a:solidFill>
+                  </a:tcPr>
+                </a:tc>
+                <a:tc>
+                  <a:txBody>
+                    <a:bodyPr/>
+                    <a:lstStyle/>
+                    <a:p>
+                      <a:pPr algn="l" indent="0" marL="0">
+                        <a:buNone/>
+                      </a:pPr>
+                      <a:r>
+                        <a:rPr lang="en-US" sz="1200" dirty="0">
+                          <a:solidFill>
+                            <a:schemeClr val="tx1"/>
+                          </a:solidFill>
+                        </a:rPr>
+                        <a:t>52,3</a:t>
                       </a:r>
                       <a:endParaRPr lang="en-US" sz="1200" dirty="0"/>
                     </a:p>
@@ -40151,68 +39726,7 @@
                             <a:schemeClr val="tx1"/>
                           </a:solidFill>
                         </a:rPr>
-                        <a:t>53,0</a:t>
-                      </a:r>
-                      <a:endParaRPr lang="en-US" sz="1200" dirty="0"/>
-                    </a:p>
-                  </a:txBody>
-                  <a:tcPr marL="63500" marR="63500" marT="38100" marB="38100" anchor="ctr">
-                    <a:lnL w="6350" cap="flat" cmpd="sng" algn="ctr">
-                      <a:solidFill>
-                        <a:srgbClr val="C9D6D3"/>
-                      </a:solidFill>
-                      <a:prstDash val="solid"/>
-                      <a:round/>
-                      <a:headEnd type="none" w="med" len="med"/>
-                      <a:tailEnd type="none" w="med" len="med"/>
-                    </a:lnL>
-                    <a:lnR w="6350" cap="flat" cmpd="sng" algn="ctr">
-                      <a:solidFill>
-                        <a:srgbClr val="C9D6D3"/>
-                      </a:solidFill>
-                      <a:prstDash val="solid"/>
-                      <a:round/>
-                      <a:headEnd type="none" w="med" len="med"/>
-                      <a:tailEnd type="none" w="med" len="med"/>
-                    </a:lnR>
-                    <a:lnT w="6350" cap="flat" cmpd="sng" algn="ctr">
-                      <a:solidFill>
-                        <a:srgbClr val="C9D6D3"/>
-                      </a:solidFill>
-                      <a:prstDash val="solid"/>
-                      <a:round/>
-                      <a:headEnd type="none" w="med" len="med"/>
-                      <a:tailEnd type="none" w="med" len="med"/>
-                    </a:lnT>
-                    <a:lnB w="6350" cap="flat" cmpd="sng" algn="ctr">
-                      <a:solidFill>
-                        <a:srgbClr val="C9D6D3"/>
-                      </a:solidFill>
-                      <a:prstDash val="solid"/>
-                      <a:round/>
-                      <a:headEnd type="none" w="med" len="med"/>
-                      <a:tailEnd type="none" w="med" len="med"/>
-                    </a:lnB>
-                    <a:solidFill>
-                      <a:srgbClr val="FFFFFF"/>
-                    </a:solidFill>
-                  </a:tcPr>
-                </a:tc>
-                <a:tc>
-                  <a:txBody>
-                    <a:bodyPr/>
-                    <a:lstStyle/>
-                    <a:p>
-                      <a:pPr algn="l" indent="0" marL="0">
-                        <a:buNone/>
-                      </a:pPr>
-                      <a:r>
-                        <a:rPr lang="en-US" sz="1200" dirty="0">
-                          <a:solidFill>
-                            <a:schemeClr val="tx1"/>
-                          </a:solidFill>
-                        </a:rPr>
-                        <a:t>53,3</a:t>
+                        <a:t>52,7</a:t>
                       </a:r>
                       <a:endParaRPr lang="en-US" sz="1200" dirty="0"/>
                     </a:p>
@@ -40336,7 +39850,7 @@
                             <a:schemeClr val="tx1"/>
                           </a:solidFill>
                         </a:rPr>
-                        <a:t>44,4</a:t>
+                        <a:t>45,0</a:t>
                       </a:r>
                       <a:endParaRPr lang="en-US" sz="1200" dirty="0"/>
                     </a:p>
@@ -40397,7 +39911,7 @@
                             <a:schemeClr val="tx1"/>
                           </a:solidFill>
                         </a:rPr>
-                        <a:t>43,7</a:t>
+                        <a:t>45,1</a:t>
                       </a:r>
                       <a:endParaRPr lang="en-US" sz="1200" dirty="0"/>
                     </a:p>
@@ -40458,7 +39972,7 @@
                             <a:schemeClr val="tx1"/>
                           </a:solidFill>
                         </a:rPr>
-                        <a:t>43,9</a:t>
+                        <a:t>45,6</a:t>
                       </a:r>
                       <a:endParaRPr lang="en-US" sz="1200" dirty="0"/>
                     </a:p>
@@ -40519,7 +40033,7 @@
                             <a:schemeClr val="tx1"/>
                           </a:solidFill>
                         </a:rPr>
-                        <a:t>43,8</a:t>
+                        <a:t>46,1</a:t>
                       </a:r>
                       <a:endParaRPr lang="en-US" sz="1200" dirty="0"/>
                     </a:p>
@@ -40580,7 +40094,7 @@
                             <a:schemeClr val="tx1"/>
                           </a:solidFill>
                         </a:rPr>
-                        <a:t>44,2</a:t>
+                        <a:t>46,6</a:t>
                       </a:r>
                       <a:endParaRPr lang="en-US" sz="1200" dirty="0"/>
                     </a:p>
@@ -40641,7 +40155,7 @@
                             <a:schemeClr val="tx1"/>
                           </a:solidFill>
                         </a:rPr>
-                        <a:t>44,5</a:t>
+                        <a:t>46,9</a:t>
                       </a:r>
                       <a:endParaRPr lang="en-US" sz="1200" dirty="0"/>
                     </a:p>
@@ -40702,7 +40216,7 @@
                             <a:schemeClr val="tx1"/>
                           </a:solidFill>
                         </a:rPr>
-                        <a:t>44,8</a:t>
+                        <a:t>47,0</a:t>
                       </a:r>
                       <a:endParaRPr lang="en-US" sz="1200" dirty="0"/>
                     </a:p>
@@ -40826,7 +40340,312 @@
                             <a:schemeClr val="tx1"/>
                           </a:solidFill>
                         </a:rPr>
-                        <a:t>1,2</a:t>
+                        <a:t>0,7</a:t>
+                      </a:r>
+                      <a:endParaRPr lang="en-US" sz="1200" dirty="0"/>
+                    </a:p>
+                  </a:txBody>
+                  <a:tcPr marL="63500" marR="63500" marT="38100" marB="38100" anchor="ctr">
+                    <a:lnL w="6350" cap="flat" cmpd="sng" algn="ctr">
+                      <a:solidFill>
+                        <a:srgbClr val="C9D6D3"/>
+                      </a:solidFill>
+                      <a:prstDash val="solid"/>
+                      <a:round/>
+                      <a:headEnd type="none" w="med" len="med"/>
+                      <a:tailEnd type="none" w="med" len="med"/>
+                    </a:lnL>
+                    <a:lnR w="6350" cap="flat" cmpd="sng" algn="ctr">
+                      <a:solidFill>
+                        <a:srgbClr val="C9D6D3"/>
+                      </a:solidFill>
+                      <a:prstDash val="solid"/>
+                      <a:round/>
+                      <a:headEnd type="none" w="med" len="med"/>
+                      <a:tailEnd type="none" w="med" len="med"/>
+                    </a:lnR>
+                    <a:lnT w="6350" cap="flat" cmpd="sng" algn="ctr">
+                      <a:solidFill>
+                        <a:srgbClr val="C9D6D3"/>
+                      </a:solidFill>
+                      <a:prstDash val="solid"/>
+                      <a:round/>
+                      <a:headEnd type="none" w="med" len="med"/>
+                      <a:tailEnd type="none" w="med" len="med"/>
+                    </a:lnT>
+                    <a:lnB w="6350" cap="flat" cmpd="sng" algn="ctr">
+                      <a:solidFill>
+                        <a:srgbClr val="C9D6D3"/>
+                      </a:solidFill>
+                      <a:prstDash val="solid"/>
+                      <a:round/>
+                      <a:headEnd type="none" w="med" len="med"/>
+                      <a:tailEnd type="none" w="med" len="med"/>
+                    </a:lnB>
+                    <a:solidFill>
+                      <a:srgbClr val="FFFFFF"/>
+                    </a:solidFill>
+                  </a:tcPr>
+                </a:tc>
+                <a:tc>
+                  <a:txBody>
+                    <a:bodyPr/>
+                    <a:lstStyle/>
+                    <a:p>
+                      <a:pPr algn="l" indent="0" marL="0">
+                        <a:buNone/>
+                      </a:pPr>
+                      <a:r>
+                        <a:rPr lang="en-US" sz="1200" dirty="0">
+                          <a:solidFill>
+                            <a:schemeClr val="tx1"/>
+                          </a:solidFill>
+                        </a:rPr>
+                        <a:t>−0,9</a:t>
+                      </a:r>
+                      <a:endParaRPr lang="en-US" sz="1200" dirty="0"/>
+                    </a:p>
+                  </a:txBody>
+                  <a:tcPr marL="63500" marR="63500" marT="38100" marB="38100" anchor="ctr">
+                    <a:lnL w="6350" cap="flat" cmpd="sng" algn="ctr">
+                      <a:solidFill>
+                        <a:srgbClr val="C9D6D3"/>
+                      </a:solidFill>
+                      <a:prstDash val="solid"/>
+                      <a:round/>
+                      <a:headEnd type="none" w="med" len="med"/>
+                      <a:tailEnd type="none" w="med" len="med"/>
+                    </a:lnL>
+                    <a:lnR w="6350" cap="flat" cmpd="sng" algn="ctr">
+                      <a:solidFill>
+                        <a:srgbClr val="C9D6D3"/>
+                      </a:solidFill>
+                      <a:prstDash val="solid"/>
+                      <a:round/>
+                      <a:headEnd type="none" w="med" len="med"/>
+                      <a:tailEnd type="none" w="med" len="med"/>
+                    </a:lnR>
+                    <a:lnT w="6350" cap="flat" cmpd="sng" algn="ctr">
+                      <a:solidFill>
+                        <a:srgbClr val="C9D6D3"/>
+                      </a:solidFill>
+                      <a:prstDash val="solid"/>
+                      <a:round/>
+                      <a:headEnd type="none" w="med" len="med"/>
+                      <a:tailEnd type="none" w="med" len="med"/>
+                    </a:lnT>
+                    <a:lnB w="6350" cap="flat" cmpd="sng" algn="ctr">
+                      <a:solidFill>
+                        <a:srgbClr val="C9D6D3"/>
+                      </a:solidFill>
+                      <a:prstDash val="solid"/>
+                      <a:round/>
+                      <a:headEnd type="none" w="med" len="med"/>
+                      <a:tailEnd type="none" w="med" len="med"/>
+                    </a:lnB>
+                    <a:solidFill>
+                      <a:srgbClr val="FFFFFF"/>
+                    </a:solidFill>
+                  </a:tcPr>
+                </a:tc>
+                <a:tc>
+                  <a:txBody>
+                    <a:bodyPr/>
+                    <a:lstStyle/>
+                    <a:p>
+                      <a:pPr algn="l" indent="0" marL="0">
+                        <a:buNone/>
+                      </a:pPr>
+                      <a:r>
+                        <a:rPr lang="en-US" sz="1200" dirty="0">
+                          <a:solidFill>
+                            <a:schemeClr val="tx1"/>
+                          </a:solidFill>
+                        </a:rPr>
+                        <a:t>−1,5</a:t>
+                      </a:r>
+                      <a:endParaRPr lang="en-US" sz="1200" dirty="0"/>
+                    </a:p>
+                  </a:txBody>
+                  <a:tcPr marL="63500" marR="63500" marT="38100" marB="38100" anchor="ctr">
+                    <a:lnL w="6350" cap="flat" cmpd="sng" algn="ctr">
+                      <a:solidFill>
+                        <a:srgbClr val="C9D6D3"/>
+                      </a:solidFill>
+                      <a:prstDash val="solid"/>
+                      <a:round/>
+                      <a:headEnd type="none" w="med" len="med"/>
+                      <a:tailEnd type="none" w="med" len="med"/>
+                    </a:lnL>
+                    <a:lnR w="6350" cap="flat" cmpd="sng" algn="ctr">
+                      <a:solidFill>
+                        <a:srgbClr val="C9D6D3"/>
+                      </a:solidFill>
+                      <a:prstDash val="solid"/>
+                      <a:round/>
+                      <a:headEnd type="none" w="med" len="med"/>
+                      <a:tailEnd type="none" w="med" len="med"/>
+                    </a:lnR>
+                    <a:lnT w="6350" cap="flat" cmpd="sng" algn="ctr">
+                      <a:solidFill>
+                        <a:srgbClr val="C9D6D3"/>
+                      </a:solidFill>
+                      <a:prstDash val="solid"/>
+                      <a:round/>
+                      <a:headEnd type="none" w="med" len="med"/>
+                      <a:tailEnd type="none" w="med" len="med"/>
+                    </a:lnT>
+                    <a:lnB w="6350" cap="flat" cmpd="sng" algn="ctr">
+                      <a:solidFill>
+                        <a:srgbClr val="C9D6D3"/>
+                      </a:solidFill>
+                      <a:prstDash val="solid"/>
+                      <a:round/>
+                      <a:headEnd type="none" w="med" len="med"/>
+                      <a:tailEnd type="none" w="med" len="med"/>
+                    </a:lnB>
+                    <a:solidFill>
+                      <a:srgbClr val="FFFFFF"/>
+                    </a:solidFill>
+                  </a:tcPr>
+                </a:tc>
+                <a:tc>
+                  <a:txBody>
+                    <a:bodyPr/>
+                    <a:lstStyle/>
+                    <a:p>
+                      <a:pPr algn="l" indent="0" marL="0">
+                        <a:buNone/>
+                      </a:pPr>
+                      <a:r>
+                        <a:rPr lang="en-US" sz="1200" dirty="0">
+                          <a:solidFill>
+                            <a:schemeClr val="tx1"/>
+                          </a:solidFill>
+                        </a:rPr>
+                        <a:t>−1,1</a:t>
+                      </a:r>
+                      <a:endParaRPr lang="en-US" sz="1200" dirty="0"/>
+                    </a:p>
+                  </a:txBody>
+                  <a:tcPr marL="63500" marR="63500" marT="38100" marB="38100" anchor="ctr">
+                    <a:lnL w="6350" cap="flat" cmpd="sng" algn="ctr">
+                      <a:solidFill>
+                        <a:srgbClr val="C9D6D3"/>
+                      </a:solidFill>
+                      <a:prstDash val="solid"/>
+                      <a:round/>
+                      <a:headEnd type="none" w="med" len="med"/>
+                      <a:tailEnd type="none" w="med" len="med"/>
+                    </a:lnL>
+                    <a:lnR w="6350" cap="flat" cmpd="sng" algn="ctr">
+                      <a:solidFill>
+                        <a:srgbClr val="C9D6D3"/>
+                      </a:solidFill>
+                      <a:prstDash val="solid"/>
+                      <a:round/>
+                      <a:headEnd type="none" w="med" len="med"/>
+                      <a:tailEnd type="none" w="med" len="med"/>
+                    </a:lnR>
+                    <a:lnT w="6350" cap="flat" cmpd="sng" algn="ctr">
+                      <a:solidFill>
+                        <a:srgbClr val="C9D6D3"/>
+                      </a:solidFill>
+                      <a:prstDash val="solid"/>
+                      <a:round/>
+                      <a:headEnd type="none" w="med" len="med"/>
+                      <a:tailEnd type="none" w="med" len="med"/>
+                    </a:lnT>
+                    <a:lnB w="6350" cap="flat" cmpd="sng" algn="ctr">
+                      <a:solidFill>
+                        <a:srgbClr val="C9D6D3"/>
+                      </a:solidFill>
+                      <a:prstDash val="solid"/>
+                      <a:round/>
+                      <a:headEnd type="none" w="med" len="med"/>
+                      <a:tailEnd type="none" w="med" len="med"/>
+                    </a:lnB>
+                    <a:solidFill>
+                      <a:srgbClr val="FFFFFF"/>
+                    </a:solidFill>
+                  </a:tcPr>
+                </a:tc>
+                <a:tc>
+                  <a:txBody>
+                    <a:bodyPr/>
+                    <a:lstStyle/>
+                    <a:p>
+                      <a:pPr algn="l" indent="0" marL="0">
+                        <a:buNone/>
+                      </a:pPr>
+                      <a:r>
+                        <a:rPr lang="en-US" sz="1200" dirty="0">
+                          <a:solidFill>
+                            <a:schemeClr val="tx1"/>
+                          </a:solidFill>
+                        </a:rPr>
+                        <a:t>−0,3</a:t>
+                      </a:r>
+                      <a:endParaRPr lang="en-US" sz="1200" dirty="0"/>
+                    </a:p>
+                  </a:txBody>
+                  <a:tcPr marL="63500" marR="63500" marT="38100" marB="38100" anchor="ctr">
+                    <a:lnL w="6350" cap="flat" cmpd="sng" algn="ctr">
+                      <a:solidFill>
+                        <a:srgbClr val="C9D6D3"/>
+                      </a:solidFill>
+                      <a:prstDash val="solid"/>
+                      <a:round/>
+                      <a:headEnd type="none" w="med" len="med"/>
+                      <a:tailEnd type="none" w="med" len="med"/>
+                    </a:lnL>
+                    <a:lnR w="6350" cap="flat" cmpd="sng" algn="ctr">
+                      <a:solidFill>
+                        <a:srgbClr val="C9D6D3"/>
+                      </a:solidFill>
+                      <a:prstDash val="solid"/>
+                      <a:round/>
+                      <a:headEnd type="none" w="med" len="med"/>
+                      <a:tailEnd type="none" w="med" len="med"/>
+                    </a:lnR>
+                    <a:lnT w="6350" cap="flat" cmpd="sng" algn="ctr">
+                      <a:solidFill>
+                        <a:srgbClr val="C9D6D3"/>
+                      </a:solidFill>
+                      <a:prstDash val="solid"/>
+                      <a:round/>
+                      <a:headEnd type="none" w="med" len="med"/>
+                      <a:tailEnd type="none" w="med" len="med"/>
+                    </a:lnT>
+                    <a:lnB w="6350" cap="flat" cmpd="sng" algn="ctr">
+                      <a:solidFill>
+                        <a:srgbClr val="C9D6D3"/>
+                      </a:solidFill>
+                      <a:prstDash val="solid"/>
+                      <a:round/>
+                      <a:headEnd type="none" w="med" len="med"/>
+                      <a:tailEnd type="none" w="med" len="med"/>
+                    </a:lnB>
+                    <a:solidFill>
+                      <a:srgbClr val="FFFFFF"/>
+                    </a:solidFill>
+                  </a:tcPr>
+                </a:tc>
+                <a:tc>
+                  <a:txBody>
+                    <a:bodyPr/>
+                    <a:lstStyle/>
+                    <a:p>
+                      <a:pPr algn="l" indent="0" marL="0">
+                        <a:buNone/>
+                      </a:pPr>
+                      <a:r>
+                        <a:rPr lang="en-US" sz="1200" dirty="0">
+                          <a:solidFill>
+                            <a:schemeClr val="tx1"/>
+                          </a:solidFill>
+                        </a:rPr>
+                        <a:t>0,0</a:t>
                       </a:r>
                       <a:endParaRPr lang="en-US" sz="1200" dirty="0"/>
                     </a:p>
@@ -40934,311 +40753,6 @@
                     </a:solidFill>
                   </a:tcPr>
                 </a:tc>
-                <a:tc>
-                  <a:txBody>
-                    <a:bodyPr/>
-                    <a:lstStyle/>
-                    <a:p>
-                      <a:pPr algn="l" indent="0" marL="0">
-                        <a:buNone/>
-                      </a:pPr>
-                      <a:r>
-                        <a:rPr lang="en-US" sz="1200" dirty="0">
-                          <a:solidFill>
-                            <a:schemeClr val="tx1"/>
-                          </a:solidFill>
-                        </a:rPr>
-                        <a:t>−1,1</a:t>
-                      </a:r>
-                      <a:endParaRPr lang="en-US" sz="1200" dirty="0"/>
-                    </a:p>
-                  </a:txBody>
-                  <a:tcPr marL="63500" marR="63500" marT="38100" marB="38100" anchor="ctr">
-                    <a:lnL w="6350" cap="flat" cmpd="sng" algn="ctr">
-                      <a:solidFill>
-                        <a:srgbClr val="C9D6D3"/>
-                      </a:solidFill>
-                      <a:prstDash val="solid"/>
-                      <a:round/>
-                      <a:headEnd type="none" w="med" len="med"/>
-                      <a:tailEnd type="none" w="med" len="med"/>
-                    </a:lnL>
-                    <a:lnR w="6350" cap="flat" cmpd="sng" algn="ctr">
-                      <a:solidFill>
-                        <a:srgbClr val="C9D6D3"/>
-                      </a:solidFill>
-                      <a:prstDash val="solid"/>
-                      <a:round/>
-                      <a:headEnd type="none" w="med" len="med"/>
-                      <a:tailEnd type="none" w="med" len="med"/>
-                    </a:lnR>
-                    <a:lnT w="6350" cap="flat" cmpd="sng" algn="ctr">
-                      <a:solidFill>
-                        <a:srgbClr val="C9D6D3"/>
-                      </a:solidFill>
-                      <a:prstDash val="solid"/>
-                      <a:round/>
-                      <a:headEnd type="none" w="med" len="med"/>
-                      <a:tailEnd type="none" w="med" len="med"/>
-                    </a:lnT>
-                    <a:lnB w="6350" cap="flat" cmpd="sng" algn="ctr">
-                      <a:solidFill>
-                        <a:srgbClr val="C9D6D3"/>
-                      </a:solidFill>
-                      <a:prstDash val="solid"/>
-                      <a:round/>
-                      <a:headEnd type="none" w="med" len="med"/>
-                      <a:tailEnd type="none" w="med" len="med"/>
-                    </a:lnB>
-                    <a:solidFill>
-                      <a:srgbClr val="FFFFFF"/>
-                    </a:solidFill>
-                  </a:tcPr>
-                </a:tc>
-                <a:tc>
-                  <a:txBody>
-                    <a:bodyPr/>
-                    <a:lstStyle/>
-                    <a:p>
-                      <a:pPr algn="l" indent="0" marL="0">
-                        <a:buNone/>
-                      </a:pPr>
-                      <a:r>
-                        <a:rPr lang="en-US" sz="1200" dirty="0">
-                          <a:solidFill>
-                            <a:schemeClr val="tx1"/>
-                          </a:solidFill>
-                        </a:rPr>
-                        <a:t>−1,1</a:t>
-                      </a:r>
-                      <a:endParaRPr lang="en-US" sz="1200" dirty="0"/>
-                    </a:p>
-                  </a:txBody>
-                  <a:tcPr marL="63500" marR="63500" marT="38100" marB="38100" anchor="ctr">
-                    <a:lnL w="6350" cap="flat" cmpd="sng" algn="ctr">
-                      <a:solidFill>
-                        <a:srgbClr val="C9D6D3"/>
-                      </a:solidFill>
-                      <a:prstDash val="solid"/>
-                      <a:round/>
-                      <a:headEnd type="none" w="med" len="med"/>
-                      <a:tailEnd type="none" w="med" len="med"/>
-                    </a:lnL>
-                    <a:lnR w="6350" cap="flat" cmpd="sng" algn="ctr">
-                      <a:solidFill>
-                        <a:srgbClr val="C9D6D3"/>
-                      </a:solidFill>
-                      <a:prstDash val="solid"/>
-                      <a:round/>
-                      <a:headEnd type="none" w="med" len="med"/>
-                      <a:tailEnd type="none" w="med" len="med"/>
-                    </a:lnR>
-                    <a:lnT w="6350" cap="flat" cmpd="sng" algn="ctr">
-                      <a:solidFill>
-                        <a:srgbClr val="C9D6D3"/>
-                      </a:solidFill>
-                      <a:prstDash val="solid"/>
-                      <a:round/>
-                      <a:headEnd type="none" w="med" len="med"/>
-                      <a:tailEnd type="none" w="med" len="med"/>
-                    </a:lnT>
-                    <a:lnB w="6350" cap="flat" cmpd="sng" algn="ctr">
-                      <a:solidFill>
-                        <a:srgbClr val="C9D6D3"/>
-                      </a:solidFill>
-                      <a:prstDash val="solid"/>
-                      <a:round/>
-                      <a:headEnd type="none" w="med" len="med"/>
-                      <a:tailEnd type="none" w="med" len="med"/>
-                    </a:lnB>
-                    <a:solidFill>
-                      <a:srgbClr val="FFFFFF"/>
-                    </a:solidFill>
-                  </a:tcPr>
-                </a:tc>
-                <a:tc>
-                  <a:txBody>
-                    <a:bodyPr/>
-                    <a:lstStyle/>
-                    <a:p>
-                      <a:pPr algn="l" indent="0" marL="0">
-                        <a:buNone/>
-                      </a:pPr>
-                      <a:r>
-                        <a:rPr lang="en-US" sz="1200" dirty="0">
-                          <a:solidFill>
-                            <a:schemeClr val="tx1"/>
-                          </a:solidFill>
-                        </a:rPr>
-                        <a:t>−0,6</a:t>
-                      </a:r>
-                      <a:endParaRPr lang="en-US" sz="1200" dirty="0"/>
-                    </a:p>
-                  </a:txBody>
-                  <a:tcPr marL="63500" marR="63500" marT="38100" marB="38100" anchor="ctr">
-                    <a:lnL w="6350" cap="flat" cmpd="sng" algn="ctr">
-                      <a:solidFill>
-                        <a:srgbClr val="C9D6D3"/>
-                      </a:solidFill>
-                      <a:prstDash val="solid"/>
-                      <a:round/>
-                      <a:headEnd type="none" w="med" len="med"/>
-                      <a:tailEnd type="none" w="med" len="med"/>
-                    </a:lnL>
-                    <a:lnR w="6350" cap="flat" cmpd="sng" algn="ctr">
-                      <a:solidFill>
-                        <a:srgbClr val="C9D6D3"/>
-                      </a:solidFill>
-                      <a:prstDash val="solid"/>
-                      <a:round/>
-                      <a:headEnd type="none" w="med" len="med"/>
-                      <a:tailEnd type="none" w="med" len="med"/>
-                    </a:lnR>
-                    <a:lnT w="6350" cap="flat" cmpd="sng" algn="ctr">
-                      <a:solidFill>
-                        <a:srgbClr val="C9D6D3"/>
-                      </a:solidFill>
-                      <a:prstDash val="solid"/>
-                      <a:round/>
-                      <a:headEnd type="none" w="med" len="med"/>
-                      <a:tailEnd type="none" w="med" len="med"/>
-                    </a:lnT>
-                    <a:lnB w="6350" cap="flat" cmpd="sng" algn="ctr">
-                      <a:solidFill>
-                        <a:srgbClr val="C9D6D3"/>
-                      </a:solidFill>
-                      <a:prstDash val="solid"/>
-                      <a:round/>
-                      <a:headEnd type="none" w="med" len="med"/>
-                      <a:tailEnd type="none" w="med" len="med"/>
-                    </a:lnB>
-                    <a:solidFill>
-                      <a:srgbClr val="FFFFFF"/>
-                    </a:solidFill>
-                  </a:tcPr>
-                </a:tc>
-                <a:tc>
-                  <a:txBody>
-                    <a:bodyPr/>
-                    <a:lstStyle/>
-                    <a:p>
-                      <a:pPr algn="l" indent="0" marL="0">
-                        <a:buNone/>
-                      </a:pPr>
-                      <a:r>
-                        <a:rPr lang="en-US" sz="1200" dirty="0">
-                          <a:solidFill>
-                            <a:schemeClr val="tx1"/>
-                          </a:solidFill>
-                        </a:rPr>
-                        <a:t>−0,1</a:t>
-                      </a:r>
-                      <a:endParaRPr lang="en-US" sz="1200" dirty="0"/>
-                    </a:p>
-                  </a:txBody>
-                  <a:tcPr marL="63500" marR="63500" marT="38100" marB="38100" anchor="ctr">
-                    <a:lnL w="6350" cap="flat" cmpd="sng" algn="ctr">
-                      <a:solidFill>
-                        <a:srgbClr val="C9D6D3"/>
-                      </a:solidFill>
-                      <a:prstDash val="solid"/>
-                      <a:round/>
-                      <a:headEnd type="none" w="med" len="med"/>
-                      <a:tailEnd type="none" w="med" len="med"/>
-                    </a:lnL>
-                    <a:lnR w="6350" cap="flat" cmpd="sng" algn="ctr">
-                      <a:solidFill>
-                        <a:srgbClr val="C9D6D3"/>
-                      </a:solidFill>
-                      <a:prstDash val="solid"/>
-                      <a:round/>
-                      <a:headEnd type="none" w="med" len="med"/>
-                      <a:tailEnd type="none" w="med" len="med"/>
-                    </a:lnR>
-                    <a:lnT w="6350" cap="flat" cmpd="sng" algn="ctr">
-                      <a:solidFill>
-                        <a:srgbClr val="C9D6D3"/>
-                      </a:solidFill>
-                      <a:prstDash val="solid"/>
-                      <a:round/>
-                      <a:headEnd type="none" w="med" len="med"/>
-                      <a:tailEnd type="none" w="med" len="med"/>
-                    </a:lnT>
-                    <a:lnB w="6350" cap="flat" cmpd="sng" algn="ctr">
-                      <a:solidFill>
-                        <a:srgbClr val="C9D6D3"/>
-                      </a:solidFill>
-                      <a:prstDash val="solid"/>
-                      <a:round/>
-                      <a:headEnd type="none" w="med" len="med"/>
-                      <a:tailEnd type="none" w="med" len="med"/>
-                    </a:lnB>
-                    <a:solidFill>
-                      <a:srgbClr val="FFFFFF"/>
-                    </a:solidFill>
-                  </a:tcPr>
-                </a:tc>
-                <a:tc>
-                  <a:txBody>
-                    <a:bodyPr/>
-                    <a:lstStyle/>
-                    <a:p>
-                      <a:pPr algn="l" indent="0" marL="0">
-                        <a:buNone/>
-                      </a:pPr>
-                      <a:r>
-                        <a:rPr lang="en-US" sz="1200" dirty="0">
-                          <a:solidFill>
-                            <a:schemeClr val="tx1"/>
-                          </a:solidFill>
-                        </a:rPr>
-                        <a:t>0,1</a:t>
-                      </a:r>
-                      <a:endParaRPr lang="en-US" sz="1200" dirty="0"/>
-                    </a:p>
-                  </a:txBody>
-                  <a:tcPr marL="63500" marR="63500" marT="38100" marB="38100" anchor="ctr">
-                    <a:lnL w="6350" cap="flat" cmpd="sng" algn="ctr">
-                      <a:solidFill>
-                        <a:srgbClr val="C9D6D3"/>
-                      </a:solidFill>
-                      <a:prstDash val="solid"/>
-                      <a:round/>
-                      <a:headEnd type="none" w="med" len="med"/>
-                      <a:tailEnd type="none" w="med" len="med"/>
-                    </a:lnL>
-                    <a:lnR w="6350" cap="flat" cmpd="sng" algn="ctr">
-                      <a:solidFill>
-                        <a:srgbClr val="C9D6D3"/>
-                      </a:solidFill>
-                      <a:prstDash val="solid"/>
-                      <a:round/>
-                      <a:headEnd type="none" w="med" len="med"/>
-                      <a:tailEnd type="none" w="med" len="med"/>
-                    </a:lnR>
-                    <a:lnT w="6350" cap="flat" cmpd="sng" algn="ctr">
-                      <a:solidFill>
-                        <a:srgbClr val="C9D6D3"/>
-                      </a:solidFill>
-                      <a:prstDash val="solid"/>
-                      <a:round/>
-                      <a:headEnd type="none" w="med" len="med"/>
-                      <a:tailEnd type="none" w="med" len="med"/>
-                    </a:lnT>
-                    <a:lnB w="6350" cap="flat" cmpd="sng" algn="ctr">
-                      <a:solidFill>
-                        <a:srgbClr val="C9D6D3"/>
-                      </a:solidFill>
-                      <a:prstDash val="solid"/>
-                      <a:round/>
-                      <a:headEnd type="none" w="med" len="med"/>
-                      <a:tailEnd type="none" w="med" len="med"/>
-                    </a:lnB>
-                    <a:solidFill>
-                      <a:srgbClr val="FFFFFF"/>
-                    </a:solidFill>
-                  </a:tcPr>
-                </a:tc>
               </a:tr>
             </a:tbl>
           </a:graphicData>
@@ -41286,7 +40800,7 @@
             <a:pPr algn="r"/>
             <a:fld id="{F7021451-1387-4CA6-816F-3879F97B5CBC}" type="slidenum">
               <a:rPr b="0" lang="en-US"/>
-              <a:t>37</a:t>
+              <a:t>36</a:t>
             </a:fld>
             <a:endParaRPr lang="en-US"/>
           </a:p>
@@ -41300,9 +40814,9 @@
 </p:sld>
 </file>
 
-<file path=ppt/slides/slide38.xml><?xml version="1.0" encoding="utf-8"?>
+<file path=ppt/slides/slide37.xml><?xml version="1.0" encoding="utf-8"?>
 <p:sld xmlns:a="http://schemas.openxmlformats.org/drawingml/2006/main" xmlns:r="http://schemas.openxmlformats.org/officeDocument/2006/relationships" xmlns:p="http://schemas.openxmlformats.org/presentationml/2006/main">
-  <p:cSld name="Slide 38">
+  <p:cSld name="Slide 37">
     <p:spTree>
       <p:nvGrpSpPr>
         <p:cNvPr id="1" name=""/>
@@ -41352,7 +40866,7 @@
                 <a:ea typeface="Cambria" pitchFamily="34" charset="-122"/>
                 <a:cs typeface="Cambria" pitchFamily="34" charset="-120"/>
               </a:rPr>
-              <a:t>Додаток 16. Джерела даних</a:t>
+              <a:t>Додаток 15. Джерела даних</a:t>
             </a:r>
             <a:endParaRPr lang="en-US" sz="2600" dirty="0"/>
           </a:p>
@@ -41360,7 +40874,7 @@
       </p:sp>
       <p:graphicFrame>
         <p:nvGraphicFramePr>
-          <p:cNvPr id="39" name="table"/>
+          <p:cNvPr id="38" name="table"/>
           <p:cNvGraphicFramePr>
             <a:graphicFrameLocks noGrp="1"/>
           </p:cNvGraphicFramePr>
@@ -43087,7 +42601,7 @@
             <a:pPr algn="r"/>
             <a:fld id="{F7021451-1387-4CA6-816F-3879F97B5CBC}" type="slidenum">
               <a:rPr b="0" lang="en-US"/>
-              <a:t>38</a:t>
+              <a:t>37</a:t>
             </a:fld>
             <a:endParaRPr lang="en-US"/>
           </a:p>
@@ -43153,7 +42667,7 @@
                 <a:ea typeface="Cambria" pitchFamily="34" charset="-122"/>
                 <a:cs typeface="Cambria" pitchFamily="34" charset="-120"/>
               </a:rPr>
-              <a:t>Зовнішнє середовище стало проінфляційним: нафта ≈$105, ЄЦБ підвищує ставку</a:t>
+              <a:t>Зовнішнє середовище стало проінфляційним: нафта ≈$125, ЄЦБ підвищує ставку</a:t>
             </a:r>
             <a:endParaRPr lang="en-US" sz="2600" dirty="0"/>
           </a:p>
@@ -43302,7 +42816,7 @@
       </p:sp>
       <p:pic>
         <p:nvPicPr>
-          <p:cNvPr id="5" name="chart" descr="C:\Users\Lenovo\Documents\GitHub\nbu-challenge-2026\results\figures\ov_external.png">    </p:cNvPr>
+          <p:cNvPr id="5" name="chart" descr="/home/user/nbu-challenge-2026/results/figures/ov_external.png">    </p:cNvPr>
           <p:cNvPicPr>
             <a:picLocks noChangeAspect="1"/>
           </p:cNvPicPr>
@@ -43316,8 +42830,8 @@
         </p:blipFill>
         <p:spPr>
           <a:xfrm>
-            <a:off x="892449" y="1325880"/>
-            <a:ext cx="10406798" cy="3703320"/>
+            <a:off x="885120" y="1325880"/>
+            <a:ext cx="10421455" cy="3703320"/>
           </a:xfrm>
           <a:prstGeom prst="rect">
             <a:avLst/>
@@ -43410,7 +42924,7 @@
                   <a:schemeClr val="tx1"/>
                 </a:solidFill>
               </a:rPr>
-              <a:t>Війна на Близькому Сході (з 28.02.2026): Brent — в середньому $117 у квітні, $102 у вересні, ≈$105 у жовтні (НБУ закладав $80–85); ф'ючерси — $87 наприкінці 2027</a:t>
+              <a:t>Війна на Близькому Сході (з 28.02.2026): Brent (спот) — в середньому $117 у квітні, $114 у вересні, ≈$125 за 1–20.10 (НБУ закладав $80–85); ф'ючерси — $87 наприкінці 2027</a:t>
             </a:r>
             <a:endParaRPr lang="en-US" sz="1300" dirty="0"/>
           </a:p>
@@ -43502,7 +43016,7 @@
                   <a:schemeClr val="tx1"/>
                 </a:solidFill>
               </a:rPr>
-              <a:t>ЄЦБ підвищив ставку до 2,5% (червень, вересень); ринок закладає ще ≈+0,5 в. п. до кінця 2027</a:t>
+              <a:t>ЄЦБ підвищив ставку до 2,5% (червень, вересень); його технічні припущення — ≈3% у 2027–2028</a:t>
             </a:r>
             <a:endParaRPr lang="en-US" sz="1300" dirty="0"/>
           </a:p>
@@ -43594,7 +43108,7 @@
                   <a:schemeClr val="tx1"/>
                 </a:solidFill>
               </a:rPr>
-              <a:t>Інфляція в єврозоні — пік ≈3,7% наприкінці 2026 (прогноз ЄЦБ: 3,0% / 2,5% / 2,1% у 2026–2028)</a:t>
+              <a:t>Інфляція в єврозоні — 3,8% у вересні; ЄЦБ чекає пік ≈3,6% у IV кв. 2026 і 3,0% / 2,5% / 2,1% у середньому за 2026–2028</a:t>
             </a:r>
             <a:endParaRPr lang="en-US" sz="1300" dirty="0"/>
           </a:p>
@@ -43828,7 +43342,7 @@
       </p:sp>
       <p:pic>
         <p:nvPicPr>
-          <p:cNvPr id="5" name="chart" descr="C:\Users\Lenovo\Documents\GitHub\nbu-challenge-2026\results\figures\ov_inflation.png">    </p:cNvPr>
+          <p:cNvPr id="5" name="chart" descr="/home/user/nbu-challenge-2026/results/figures/ov_inflation.png">    </p:cNvPr>
           <p:cNvPicPr>
             <a:picLocks noChangeAspect="1"/>
           </p:cNvPicPr>
@@ -44354,7 +43868,7 @@
       </p:sp>
       <p:pic>
         <p:nvPicPr>
-          <p:cNvPr id="5" name="chart" descr="C:\Users\Lenovo\Documents\GitHub\nbu-challenge-2026\results\figures\ov_rates.png">    </p:cNvPr>
+          <p:cNvPr id="5" name="chart" descr="/home/user/nbu-challenge-2026/results/figures/ov_rates.png">    </p:cNvPr>
           <p:cNvPicPr>
             <a:picLocks noChangeAspect="1"/>
           </p:cNvPicPr>
@@ -44369,7 +43883,7 @@
         <p:spPr>
           <a:xfrm>
             <a:off x="457200" y="1325880"/>
-            <a:ext cx="11277295" cy="3152840"/>
+            <a:ext cx="11277295" cy="3148596"/>
           </a:xfrm>
           <a:prstGeom prst="rect">
             <a:avLst/>
@@ -44646,7 +44160,7 @@
                   <a:schemeClr val="tx1"/>
                 </a:solidFill>
               </a:rPr>
-              <a:t>ОВДП (06.10): 1 рік — 15,1%, 2,5 року — 16,5%; консенсус ICU — 16,5% до середини 2027: ринок чекає високих ставок, але не різкого посилення; кредити бізнесу +30% р/р (КМП)</a:t>
+              <a:t>ОВДП (06.10): 1 рік — 15,1%, 2,5 року — 16,5% — ринок чекає високих ставок надовго, але не різкого посилення; кредити бізнесу +30% р/р (КМП)</a:t>
             </a:r>
             <a:endParaRPr lang="en-US" sz="1300" dirty="0"/>
           </a:p>
@@ -44880,7 +44394,7 @@
       </p:sp>
       <p:pic>
         <p:nvPicPr>
-          <p:cNvPr id="5" name="chart" descr="C:\Users\Lenovo\Documents\GitHub\nbu-challenge-2026\results\figures\ov_activity.png">    </p:cNvPr>
+          <p:cNvPr id="5" name="chart" descr="/home/user/nbu-challenge-2026/results/figures/ov_activity.png">    </p:cNvPr>
           <p:cNvPicPr>
             <a:picLocks noChangeAspect="1"/>
           </p:cNvPicPr>
@@ -44895,7 +44409,7 @@
         <p:spPr>
           <a:xfrm>
             <a:off x="457200" y="1325880"/>
-            <a:ext cx="11277295" cy="3362322"/>
+            <a:ext cx="11277295" cy="3357182"/>
           </a:xfrm>
           <a:prstGeom prst="rect">
             <a:avLst/>
@@ -45406,7 +44920,7 @@
       </p:sp>
       <p:pic>
         <p:nvPicPr>
-          <p:cNvPr id="5" name="chart" descr="C:\Users\Lenovo\Documents\GitHub\nbu-challenge-2026\results\figures\ov_fx.png">    </p:cNvPr>
+          <p:cNvPr id="5" name="chart" descr="/home/user/nbu-challenge-2026/results/figures/ov_fx.png">    </p:cNvPr>
           <p:cNvPicPr>
             <a:picLocks noChangeAspect="1"/>
           </p:cNvPicPr>
@@ -45421,7 +44935,7 @@
         <p:spPr>
           <a:xfrm>
             <a:off x="457200" y="1325880"/>
-            <a:ext cx="11277295" cy="3327036"/>
+            <a:ext cx="11277295" cy="3144886"/>
           </a:xfrm>
           <a:prstGeom prst="rect">
             <a:avLst/>
@@ -45698,7 +45212,7 @@
                   <a:schemeClr val="tx1"/>
                 </a:solidFill>
               </a:rPr>
-              <a:t>Курс майже нерухомий: ≈44,7 грн/$ з червня (за рік до того — +8%); продаж валюти здебільшого «доносить» допомогу: у вересні уряд конвертував $3,81 млрд оборонного траншу</a:t>
+              <a:t>Курс: ≈44,7 грн/$ з червня по вересень, у жовтні — до 45,08 (14.10, історичний мінімум гривні), 25.10 — 45,05 (за рік — +8%); продаж валюти здебільшого «доносить» допомогу: у вересні уряд конвертував $3,81 млрд оборонного траншу</a:t>
             </a:r>
             <a:endParaRPr lang="en-US" sz="1300" dirty="0"/>
           </a:p>

--- a/presentation/NBU_University_Challenge_2026.pptx
+++ b/presentation/NBU_University_Challenge_2026.pptx
@@ -143,13 +143,13 @@
   <p:extLst>
     <p:ext uri="{521415D9-36F7-43E2-AB2F-B90AF26B5E84}">
       <p14:sectionLst xmlns:p14="http://schemas.microsoft.com/office/powerpoint/2010/main">
-        <p14:section name="Вступ" id="{4558f1a8-d001-6588-b31d-c7cc627e8a66}">
+        <p14:section name="Вступ" id="{fd814b9b-99d5-f460-d3ca-8ead67211083}">
           <p14:sldIdLst>
             <p14:sldId id="256"/>
             <p14:sldId id="257"/>
           </p14:sldIdLst>
         </p14:section>
-        <p14:section name="Огляд" id="{5d68b1f8-c230-f6c9-5904-cb096bf21666}">
+        <p14:section name="Огляд" id="{e7a2319f-80de-8e23-26b3-5f58c1255cf1}">
           <p14:sldIdLst>
             <p14:sldId id="258"/>
             <p14:sldId id="259"/>
@@ -159,7 +159,7 @@
             <p14:sldId id="263"/>
           </p14:sldIdLst>
         </p14:section>
-        <p14:section name="Прогноз" id="{ecf150a5-b719-7fd5-3d60-e41dcaf34b5c}">
+        <p14:section name="Прогноз" id="{a105a47b-e9df-a6d3-c38f-434d83d94cdd}">
           <p14:sldIdLst>
             <p14:sldId id="264"/>
             <p14:sldId id="265"/>
@@ -169,7 +169,7 @@
             <p14:sldId id="269"/>
           </p14:sldIdLst>
         </p14:section>
-        <p14:section name="Рекомендації" id="{bf6b9561-81e6-7807-9efe-eeda79c76b84}">
+        <p14:section name="Рекомендації" id="{0c64c55f-9c8c-554a-6704-3f3696c8f71a}">
           <p14:sldIdLst>
             <p14:sldId id="270"/>
             <p14:sldId id="271"/>
@@ -180,7 +180,7 @@
             <p14:sldId id="276"/>
           </p14:sldIdLst>
         </p14:section>
-        <p14:section name="Додатки" id="{2fceb1ac-0a6e-2456-0ac7-bb3717483852}">
+        <p14:section name="Додатки" id="{5b936bee-cf8a-0b1f-3901-1d633e4edf24}">
           <p14:sldIdLst>
             <p14:sldId id="277"/>
             <p14:sldId id="278"/>
@@ -1044,7 +1044,7 @@
           <a:p>
             <a:r>
               <a:rPr lang="en-US" dirty="0"/>
-              <a:t>Ми розглянули чотири ризикові сценарії. Найнебезпечніший — дефіцит фінансування: якщо допомога затримається, гривня буде приблизно на 6% слабшою, інфляція зросте до 13,0%, а ставку доведеться підняти до 19,3%. Важка зима з ударами по енергетиці підніме інфляцію до 12,4% і майже зупинить зростання ВВП. Натомість нафта по 120 доларів додає лише 0,1 пункта до піку інфляції, і ставка майже не реагує — це шок першого раунду. Ще два ризики для інфляції 2027 року — курс і очікування: якщо гривня слабшатиме так, як чекає ринок, інфляція наприкінці 2027 року буде близько 7% замість 5%, розбалансування очікувань дало б близько 7%, а ПДВ 21% — ще 0,3 пункта до піку.</a:t>
+              <a:t>Ми розглянули чотири ризикові сценарії. Найнебезпечніший — дефіцит фінансування: якщо допомога затримається, гривня буде приблизно на 6% слабшою, інфляція зросте до 13,0%, а ставку доведеться підняти до 19,3%. Важка зима з ударами по енергетиці підніме інфляцію до 12,4% і майже зупинить зростання ВВП. Натомість нафта по 120 доларів додає лише 0,1 пункта до піку інфляції, і ставка майже не реагує — це шок першого раунду. Ще два ризики для інфляції 2027 року — курс і очікування: якщо гривня слабшатиме так, як чекає ринок, інфляція наприкінці 2027 року буде близько 7% замість 5%, розбалансування очікувань дало б близько 7%, а ПДВ 21% — ще 0,7 пункта до піку.</a:t>
             </a:r>
             <a:endParaRPr lang="en-US" dirty="0"/>
           </a:p>
@@ -12405,7 +12405,7 @@
                   <a:schemeClr val="tx1"/>
                 </a:solidFill>
               </a:rPr>
-              <a:t>Ще три ризики (додаток): курс, як чекає ринок → ІСЦ IV кв. 2027 ≈7%; розбалансування очікувань → ≈7%; ПДВ 21% → +0,3 в. п. до піку</a:t>
+              <a:t>Ще три ризики (додаток): курс, як чекає ринок → ІСЦ IV кв. 2027 ≈7%; розбалансування очікувань → ≈7%; ПДВ 21% → +0,7 в. п. до піку</a:t>
             </a:r>
             <a:endParaRPr lang="en-US" sz="1300" dirty="0"/>
           </a:p>
@@ -28335,7 +28335,7 @@
                             <a:schemeClr val="tx1"/>
                           </a:solidFill>
                         </a:rPr>
-                        <a:t>5,6</a:t>
+                        <a:t>5,7</a:t>
                       </a:r>
                       <a:endParaRPr lang="en-US" sz="1200" dirty="0"/>
                     </a:p>
@@ -28396,7 +28396,7 @@
                             <a:schemeClr val="tx1"/>
                           </a:solidFill>
                         </a:rPr>
-                        <a:t>11,5</a:t>
+                        <a:t>11,9</a:t>
                       </a:r>
                       <a:endParaRPr lang="en-US" sz="1200" dirty="0"/>
                     </a:p>
@@ -28457,7 +28457,7 @@
                             <a:schemeClr val="tx1"/>
                           </a:solidFill>
                         </a:rPr>
-                        <a:t>17,1</a:t>
+                        <a:t>17,3</a:t>
                       </a:r>
                       <a:endParaRPr lang="en-US" sz="1200" dirty="0"/>
                     </a:p>
@@ -32284,7 +32284,7 @@
                             <a:schemeClr val="tx1"/>
                           </a:solidFill>
                         </a:rPr>
-                        <a:t>125</a:t>
+                        <a:t>144</a:t>
                       </a:r>
                       <a:endParaRPr lang="en-US" sz="1100" dirty="0"/>
                     </a:p>
@@ -32345,7 +32345,7 @@
                             <a:schemeClr val="tx1"/>
                           </a:solidFill>
                         </a:rPr>
-                        <a:t>124</a:t>
+                        <a:t>143</a:t>
                       </a:r>
                       <a:endParaRPr lang="en-US" sz="1100" dirty="0"/>
                     </a:p>
@@ -32406,7 +32406,7 @@
                             <a:schemeClr val="tx1"/>
                           </a:solidFill>
                         </a:rPr>
-                        <a:t>125</a:t>
+                        <a:t>143</a:t>
                       </a:r>
                       <a:endParaRPr lang="en-US" sz="1100" dirty="0"/>
                     </a:p>
@@ -32467,7 +32467,7 @@
                             <a:schemeClr val="tx1"/>
                           </a:solidFill>
                         </a:rPr>
-                        <a:t>127</a:t>
+                        <a:t>145</a:t>
                       </a:r>
                       <a:endParaRPr lang="en-US" sz="1100" dirty="0"/>
                     </a:p>
@@ -32528,7 +32528,7 @@
                             <a:schemeClr val="tx1"/>
                           </a:solidFill>
                         </a:rPr>
-                        <a:t>130</a:t>
+                        <a:t>148</a:t>
                       </a:r>
                       <a:endParaRPr lang="en-US" sz="1100" dirty="0"/>
                     </a:p>
@@ -33563,129 +33563,7 @@
                             <a:schemeClr val="tx1"/>
                           </a:solidFill>
                         </a:rPr>
-                        <a:t>130</a:t>
-                      </a:r>
-                      <a:endParaRPr lang="en-US" sz="1100" dirty="0"/>
-                    </a:p>
-                  </a:txBody>
-                  <a:tcPr marL="63500" marR="63500" marT="38100" marB="38100" anchor="ctr">
-                    <a:lnL w="6350" cap="flat" cmpd="sng" algn="ctr">
-                      <a:solidFill>
-                        <a:srgbClr val="C9D6D3"/>
-                      </a:solidFill>
-                      <a:prstDash val="solid"/>
-                      <a:round/>
-                      <a:headEnd type="none" w="med" len="med"/>
-                      <a:tailEnd type="none" w="med" len="med"/>
-                    </a:lnL>
-                    <a:lnR w="6350" cap="flat" cmpd="sng" algn="ctr">
-                      <a:solidFill>
-                        <a:srgbClr val="C9D6D3"/>
-                      </a:solidFill>
-                      <a:prstDash val="solid"/>
-                      <a:round/>
-                      <a:headEnd type="none" w="med" len="med"/>
-                      <a:tailEnd type="none" w="med" len="med"/>
-                    </a:lnR>
-                    <a:lnT w="6350" cap="flat" cmpd="sng" algn="ctr">
-                      <a:solidFill>
-                        <a:srgbClr val="C9D6D3"/>
-                      </a:solidFill>
-                      <a:prstDash val="solid"/>
-                      <a:round/>
-                      <a:headEnd type="none" w="med" len="med"/>
-                      <a:tailEnd type="none" w="med" len="med"/>
-                    </a:lnT>
-                    <a:lnB w="6350" cap="flat" cmpd="sng" algn="ctr">
-                      <a:solidFill>
-                        <a:srgbClr val="C9D6D3"/>
-                      </a:solidFill>
-                      <a:prstDash val="solid"/>
-                      <a:round/>
-                      <a:headEnd type="none" w="med" len="med"/>
-                      <a:tailEnd type="none" w="med" len="med"/>
-                    </a:lnB>
-                    <a:solidFill>
-                      <a:srgbClr val="FFFFFF"/>
-                    </a:solidFill>
-                  </a:tcPr>
-                </a:tc>
-                <a:tc>
-                  <a:txBody>
-                    <a:bodyPr/>
-                    <a:lstStyle/>
-                    <a:p>
-                      <a:pPr algn="l" indent="0" marL="0">
-                        <a:buNone/>
-                      </a:pPr>
-                      <a:r>
-                        <a:rPr lang="en-US" sz="1100" dirty="0">
-                          <a:solidFill>
-                            <a:schemeClr val="tx1"/>
-                          </a:solidFill>
-                        </a:rPr>
-                        <a:t>128</a:t>
-                      </a:r>
-                      <a:endParaRPr lang="en-US" sz="1100" dirty="0"/>
-                    </a:p>
-                  </a:txBody>
-                  <a:tcPr marL="63500" marR="63500" marT="38100" marB="38100" anchor="ctr">
-                    <a:lnL w="6350" cap="flat" cmpd="sng" algn="ctr">
-                      <a:solidFill>
-                        <a:srgbClr val="C9D6D3"/>
-                      </a:solidFill>
-                      <a:prstDash val="solid"/>
-                      <a:round/>
-                      <a:headEnd type="none" w="med" len="med"/>
-                      <a:tailEnd type="none" w="med" len="med"/>
-                    </a:lnL>
-                    <a:lnR w="6350" cap="flat" cmpd="sng" algn="ctr">
-                      <a:solidFill>
-                        <a:srgbClr val="C9D6D3"/>
-                      </a:solidFill>
-                      <a:prstDash val="solid"/>
-                      <a:round/>
-                      <a:headEnd type="none" w="med" len="med"/>
-                      <a:tailEnd type="none" w="med" len="med"/>
-                    </a:lnR>
-                    <a:lnT w="6350" cap="flat" cmpd="sng" algn="ctr">
-                      <a:solidFill>
-                        <a:srgbClr val="C9D6D3"/>
-                      </a:solidFill>
-                      <a:prstDash val="solid"/>
-                      <a:round/>
-                      <a:headEnd type="none" w="med" len="med"/>
-                      <a:tailEnd type="none" w="med" len="med"/>
-                    </a:lnT>
-                    <a:lnB w="6350" cap="flat" cmpd="sng" algn="ctr">
-                      <a:solidFill>
-                        <a:srgbClr val="C9D6D3"/>
-                      </a:solidFill>
-                      <a:prstDash val="solid"/>
-                      <a:round/>
-                      <a:headEnd type="none" w="med" len="med"/>
-                      <a:tailEnd type="none" w="med" len="med"/>
-                    </a:lnB>
-                    <a:solidFill>
-                      <a:srgbClr val="FFFFFF"/>
-                    </a:solidFill>
-                  </a:tcPr>
-                </a:tc>
-                <a:tc>
-                  <a:txBody>
-                    <a:bodyPr/>
-                    <a:lstStyle/>
-                    <a:p>
-                      <a:pPr algn="l" indent="0" marL="0">
-                        <a:buNone/>
-                      </a:pPr>
-                      <a:r>
-                        <a:rPr lang="en-US" sz="1100" dirty="0">
-                          <a:solidFill>
-                            <a:schemeClr val="tx1"/>
-                          </a:solidFill>
-                        </a:rPr>
-                        <a:t>128 ●</a:t>
+                        <a:t>131</a:t>
                       </a:r>
                       <a:endParaRPr lang="en-US" sz="1100" dirty="0"/>
                     </a:p>
@@ -33807,7 +33685,129 @@
                             <a:schemeClr val="tx1"/>
                           </a:solidFill>
                         </a:rPr>
-                        <a:t>131</a:t>
+                        <a:t>129 ●</a:t>
+                      </a:r>
+                      <a:endParaRPr lang="en-US" sz="1100" dirty="0"/>
+                    </a:p>
+                  </a:txBody>
+                  <a:tcPr marL="63500" marR="63500" marT="38100" marB="38100" anchor="ctr">
+                    <a:lnL w="6350" cap="flat" cmpd="sng" algn="ctr">
+                      <a:solidFill>
+                        <a:srgbClr val="C9D6D3"/>
+                      </a:solidFill>
+                      <a:prstDash val="solid"/>
+                      <a:round/>
+                      <a:headEnd type="none" w="med" len="med"/>
+                      <a:tailEnd type="none" w="med" len="med"/>
+                    </a:lnL>
+                    <a:lnR w="6350" cap="flat" cmpd="sng" algn="ctr">
+                      <a:solidFill>
+                        <a:srgbClr val="C9D6D3"/>
+                      </a:solidFill>
+                      <a:prstDash val="solid"/>
+                      <a:round/>
+                      <a:headEnd type="none" w="med" len="med"/>
+                      <a:tailEnd type="none" w="med" len="med"/>
+                    </a:lnR>
+                    <a:lnT w="6350" cap="flat" cmpd="sng" algn="ctr">
+                      <a:solidFill>
+                        <a:srgbClr val="C9D6D3"/>
+                      </a:solidFill>
+                      <a:prstDash val="solid"/>
+                      <a:round/>
+                      <a:headEnd type="none" w="med" len="med"/>
+                      <a:tailEnd type="none" w="med" len="med"/>
+                    </a:lnT>
+                    <a:lnB w="6350" cap="flat" cmpd="sng" algn="ctr">
+                      <a:solidFill>
+                        <a:srgbClr val="C9D6D3"/>
+                      </a:solidFill>
+                      <a:prstDash val="solid"/>
+                      <a:round/>
+                      <a:headEnd type="none" w="med" len="med"/>
+                      <a:tailEnd type="none" w="med" len="med"/>
+                    </a:lnB>
+                    <a:solidFill>
+                      <a:srgbClr val="FFFFFF"/>
+                    </a:solidFill>
+                  </a:tcPr>
+                </a:tc>
+                <a:tc>
+                  <a:txBody>
+                    <a:bodyPr/>
+                    <a:lstStyle/>
+                    <a:p>
+                      <a:pPr algn="l" indent="0" marL="0">
+                        <a:buNone/>
+                      </a:pPr>
+                      <a:r>
+                        <a:rPr lang="en-US" sz="1100" dirty="0">
+                          <a:solidFill>
+                            <a:schemeClr val="tx1"/>
+                          </a:solidFill>
+                        </a:rPr>
+                        <a:t>130</a:t>
+                      </a:r>
+                      <a:endParaRPr lang="en-US" sz="1100" dirty="0"/>
+                    </a:p>
+                  </a:txBody>
+                  <a:tcPr marL="63500" marR="63500" marT="38100" marB="38100" anchor="ctr">
+                    <a:lnL w="6350" cap="flat" cmpd="sng" algn="ctr">
+                      <a:solidFill>
+                        <a:srgbClr val="C9D6D3"/>
+                      </a:solidFill>
+                      <a:prstDash val="solid"/>
+                      <a:round/>
+                      <a:headEnd type="none" w="med" len="med"/>
+                      <a:tailEnd type="none" w="med" len="med"/>
+                    </a:lnL>
+                    <a:lnR w="6350" cap="flat" cmpd="sng" algn="ctr">
+                      <a:solidFill>
+                        <a:srgbClr val="C9D6D3"/>
+                      </a:solidFill>
+                      <a:prstDash val="solid"/>
+                      <a:round/>
+                      <a:headEnd type="none" w="med" len="med"/>
+                      <a:tailEnd type="none" w="med" len="med"/>
+                    </a:lnR>
+                    <a:lnT w="6350" cap="flat" cmpd="sng" algn="ctr">
+                      <a:solidFill>
+                        <a:srgbClr val="C9D6D3"/>
+                      </a:solidFill>
+                      <a:prstDash val="solid"/>
+                      <a:round/>
+                      <a:headEnd type="none" w="med" len="med"/>
+                      <a:tailEnd type="none" w="med" len="med"/>
+                    </a:lnT>
+                    <a:lnB w="6350" cap="flat" cmpd="sng" algn="ctr">
+                      <a:solidFill>
+                        <a:srgbClr val="C9D6D3"/>
+                      </a:solidFill>
+                      <a:prstDash val="solid"/>
+                      <a:round/>
+                      <a:headEnd type="none" w="med" len="med"/>
+                      <a:tailEnd type="none" w="med" len="med"/>
+                    </a:lnB>
+                    <a:solidFill>
+                      <a:srgbClr val="FFFFFF"/>
+                    </a:solidFill>
+                  </a:tcPr>
+                </a:tc>
+                <a:tc>
+                  <a:txBody>
+                    <a:bodyPr/>
+                    <a:lstStyle/>
+                    <a:p>
+                      <a:pPr algn="l" indent="0" marL="0">
+                        <a:buNone/>
+                      </a:pPr>
+                      <a:r>
+                        <a:rPr lang="en-US" sz="1100" dirty="0">
+                          <a:solidFill>
+                            <a:schemeClr val="tx1"/>
+                          </a:solidFill>
+                        </a:rPr>
+                        <a:t>132</a:t>
                       </a:r>
                       <a:endParaRPr lang="en-US" sz="1100" dirty="0"/>
                     </a:p>
@@ -33984,7 +33984,7 @@
                             <a:schemeClr val="tx1"/>
                           </a:solidFill>
                         </a:rPr>
-                        <a:t>120</a:t>
+                        <a:t>121</a:t>
                       </a:r>
                       <a:endParaRPr lang="en-US" sz="1100" dirty="0"/>
                     </a:p>
@@ -34045,68 +34045,7 @@
                             <a:schemeClr val="tx1"/>
                           </a:solidFill>
                         </a:rPr>
-                        <a:t>119 ●</a:t>
-                      </a:r>
-                      <a:endParaRPr lang="en-US" sz="1100" dirty="0"/>
-                    </a:p>
-                  </a:txBody>
-                  <a:tcPr marL="63500" marR="63500" marT="38100" marB="38100" anchor="ctr">
-                    <a:lnL w="6350" cap="flat" cmpd="sng" algn="ctr">
-                      <a:solidFill>
-                        <a:srgbClr val="C9D6D3"/>
-                      </a:solidFill>
-                      <a:prstDash val="solid"/>
-                      <a:round/>
-                      <a:headEnd type="none" w="med" len="med"/>
-                      <a:tailEnd type="none" w="med" len="med"/>
-                    </a:lnL>
-                    <a:lnR w="6350" cap="flat" cmpd="sng" algn="ctr">
-                      <a:solidFill>
-                        <a:srgbClr val="C9D6D3"/>
-                      </a:solidFill>
-                      <a:prstDash val="solid"/>
-                      <a:round/>
-                      <a:headEnd type="none" w="med" len="med"/>
-                      <a:tailEnd type="none" w="med" len="med"/>
-                    </a:lnR>
-                    <a:lnT w="6350" cap="flat" cmpd="sng" algn="ctr">
-                      <a:solidFill>
-                        <a:srgbClr val="C9D6D3"/>
-                      </a:solidFill>
-                      <a:prstDash val="solid"/>
-                      <a:round/>
-                      <a:headEnd type="none" w="med" len="med"/>
-                      <a:tailEnd type="none" w="med" len="med"/>
-                    </a:lnT>
-                    <a:lnB w="6350" cap="flat" cmpd="sng" algn="ctr">
-                      <a:solidFill>
-                        <a:srgbClr val="C9D6D3"/>
-                      </a:solidFill>
-                      <a:prstDash val="solid"/>
-                      <a:round/>
-                      <a:headEnd type="none" w="med" len="med"/>
-                      <a:tailEnd type="none" w="med" len="med"/>
-                    </a:lnB>
-                    <a:solidFill>
-                      <a:srgbClr val="EAF1EF"/>
-                    </a:solidFill>
-                  </a:tcPr>
-                </a:tc>
-                <a:tc>
-                  <a:txBody>
-                    <a:bodyPr/>
-                    <a:lstStyle/>
-                    <a:p>
-                      <a:pPr algn="l" indent="0" marL="0">
-                        <a:buNone/>
-                      </a:pPr>
-                      <a:r>
-                        <a:rPr lang="en-US" sz="1100" dirty="0">
-                          <a:solidFill>
-                            <a:schemeClr val="tx1"/>
-                          </a:solidFill>
-                        </a:rPr>
-                        <a:t>119</a:t>
+                        <a:t>120 ●</a:t>
                       </a:r>
                       <a:endParaRPr lang="en-US" sz="1100" dirty="0"/>
                     </a:p>
@@ -34228,7 +34167,68 @@
                             <a:schemeClr val="tx1"/>
                           </a:solidFill>
                         </a:rPr>
-                        <a:t>123</a:t>
+                        <a:t>121</a:t>
+                      </a:r>
+                      <a:endParaRPr lang="en-US" sz="1100" dirty="0"/>
+                    </a:p>
+                  </a:txBody>
+                  <a:tcPr marL="63500" marR="63500" marT="38100" marB="38100" anchor="ctr">
+                    <a:lnL w="6350" cap="flat" cmpd="sng" algn="ctr">
+                      <a:solidFill>
+                        <a:srgbClr val="C9D6D3"/>
+                      </a:solidFill>
+                      <a:prstDash val="solid"/>
+                      <a:round/>
+                      <a:headEnd type="none" w="med" len="med"/>
+                      <a:tailEnd type="none" w="med" len="med"/>
+                    </a:lnL>
+                    <a:lnR w="6350" cap="flat" cmpd="sng" algn="ctr">
+                      <a:solidFill>
+                        <a:srgbClr val="C9D6D3"/>
+                      </a:solidFill>
+                      <a:prstDash val="solid"/>
+                      <a:round/>
+                      <a:headEnd type="none" w="med" len="med"/>
+                      <a:tailEnd type="none" w="med" len="med"/>
+                    </a:lnR>
+                    <a:lnT w="6350" cap="flat" cmpd="sng" algn="ctr">
+                      <a:solidFill>
+                        <a:srgbClr val="C9D6D3"/>
+                      </a:solidFill>
+                      <a:prstDash val="solid"/>
+                      <a:round/>
+                      <a:headEnd type="none" w="med" len="med"/>
+                      <a:tailEnd type="none" w="med" len="med"/>
+                    </a:lnT>
+                    <a:lnB w="6350" cap="flat" cmpd="sng" algn="ctr">
+                      <a:solidFill>
+                        <a:srgbClr val="C9D6D3"/>
+                      </a:solidFill>
+                      <a:prstDash val="solid"/>
+                      <a:round/>
+                      <a:headEnd type="none" w="med" len="med"/>
+                      <a:tailEnd type="none" w="med" len="med"/>
+                    </a:lnB>
+                    <a:solidFill>
+                      <a:srgbClr val="EAF1EF"/>
+                    </a:solidFill>
+                  </a:tcPr>
+                </a:tc>
+                <a:tc>
+                  <a:txBody>
+                    <a:bodyPr/>
+                    <a:lstStyle/>
+                    <a:p>
+                      <a:pPr algn="l" indent="0" marL="0">
+                        <a:buNone/>
+                      </a:pPr>
+                      <a:r>
+                        <a:rPr lang="en-US" sz="1100" dirty="0">
+                          <a:solidFill>
+                            <a:schemeClr val="tx1"/>
+                          </a:solidFill>
+                        </a:rPr>
+                        <a:t>124</a:t>
                       </a:r>
                       <a:endParaRPr lang="en-US" sz="1100" dirty="0"/>
                     </a:p>

--- a/presentation/NBU_University_Challenge_2026.pptx
+++ b/presentation/NBU_University_Challenge_2026.pptx
@@ -143,13 +143,13 @@
   <p:extLst>
     <p:ext uri="{521415D9-36F7-43E2-AB2F-B90AF26B5E84}">
       <p14:sectionLst xmlns:p14="http://schemas.microsoft.com/office/powerpoint/2010/main">
-        <p14:section name="Вступ" id="{fd814b9b-99d5-f460-d3ca-8ead67211083}">
+        <p14:section name="Вступ" id="{1258835f-ef73-c13a-d2fb-a97e60805694}">
           <p14:sldIdLst>
             <p14:sldId id="256"/>
             <p14:sldId id="257"/>
           </p14:sldIdLst>
         </p14:section>
-        <p14:section name="Огляд" id="{e7a2319f-80de-8e23-26b3-5f58c1255cf1}">
+        <p14:section name="Огляд" id="{89c52bbf-46cd-83c4-bdea-056df7c425ea}">
           <p14:sldIdLst>
             <p14:sldId id="258"/>
             <p14:sldId id="259"/>
@@ -159,7 +159,7 @@
             <p14:sldId id="263"/>
           </p14:sldIdLst>
         </p14:section>
-        <p14:section name="Прогноз" id="{a105a47b-e9df-a6d3-c38f-434d83d94cdd}">
+        <p14:section name="Прогноз" id="{91811968-71d9-faab-ba4c-a9100b544bd4}">
           <p14:sldIdLst>
             <p14:sldId id="264"/>
             <p14:sldId id="265"/>
@@ -169,7 +169,7 @@
             <p14:sldId id="269"/>
           </p14:sldIdLst>
         </p14:section>
-        <p14:section name="Рекомендації" id="{0c64c55f-9c8c-554a-6704-3f3696c8f71a}">
+        <p14:section name="Рекомендації" id="{966c67d9-832c-2ad5-5f62-74c412aeddf0}">
           <p14:sldIdLst>
             <p14:sldId id="270"/>
             <p14:sldId id="271"/>
@@ -180,7 +180,7 @@
             <p14:sldId id="276"/>
           </p14:sldIdLst>
         </p14:section>
-        <p14:section name="Додатки" id="{5b936bee-cf8a-0b1f-3901-1d633e4edf24}">
+        <p14:section name="Додатки" id="{38815901-9313-940d-982a-34e125d9ab2b}">
           <p14:sldIdLst>
             <p14:sldId id="277"/>
             <p14:sldId id="278"/>
@@ -604,7 +604,7 @@
           <a:p>
             <a:r>
               <a:rPr lang="en-US" dirty="0"/>
-              <a:t>Добрий день, шановні члени журі. Ми — Команда [назва]. Сьогодні представимо наші рекомендації для засідання Правління НБУ 29 жовтня 2026 року. Усі дані — станом на 24 жовтня.</a:t>
+              <a:t>Добрий день, шановні члени журі. Ми — Команда [назва]. Сьогодні представимо наші рекомендації для засідання Правління НБУ 29 жовтня 2026 року. Усі дані — станом на 25 жовтня.</a:t>
             </a:r>
             <a:endParaRPr lang="en-US" dirty="0"/>
           </a:p>
@@ -868,7 +868,7 @@
           <a:p>
             <a:r>
               <a:rPr lang="en-US" dirty="0"/>
-              <a:t>Базовий прогноз. Нагадаю: ціль НБУ — 5% без діапазону відхилень, і повернути інфляцію до неї треба на горизонті до трьох років. У середньому за квартал інфляція досягне піку — близько 11,2% — наприкінці 2026 року; у місячному вимірі це близько 12% у грудні. Далі вона знизиться до 5,4% у четвертому кварталі 2027-го, у 2028 році опуститься нижче цілі — до 3,8–4,8%, бо нафта дешевшає за ф'ючерсами, а попит слабкий, — і стабілізується біля 5% у 2029 році. Базова інфляція в нас нижча, ніж у НБУ: 4,2% у середньому за четвертий квартал 2027 року, у грудневому вимірі — близько 3,7%, проти 5,1% у НБУ. Ставка — 17% до середини 2027 року, далі поступово знижується до 10,5% наприкінці 2028-го. Невизначеність велика — це показує віяло.</a:t>
+              <a:t>Базовий прогноз. Нагадаю: ціль НБУ — 5% без діапазону відхилень, і повернути інфляцію до неї треба на горизонті до трьох років. У середньому за квартал інфляція досягне піку — близько 11,2% — наприкінці 2026 року; у місячному вимірі це близько 12% у грудні. Далі вона знизиться до 5,4% у четвертому кварталі 2027-го, у 2028 році опуститься нижче цілі — до 3,8–4,8%, бо нафта дешевшає за ф'ючерсами, а попит слабкий, — і стабілізується біля 5% у 2028 році. Базова інфляція в нас нижча, ніж у НБУ: 4,2% у середньому за четвертий квартал 2027 року, у грудневому вимірі — близько 3,7%, проти 5,1% у НБУ. Ставка — 17% до середини 2027 року, далі поступово знижується до 10,5% наприкінці 2028-го. Невизначеність велика — це показує віяло.</a:t>
             </a:r>
             <a:endParaRPr lang="en-US" dirty="0"/>
           </a:p>
@@ -1572,7 +1572,7 @@
           <a:p>
             <a:r>
               <a:rPr lang="en-US" dirty="0"/>
-              <a:t>Почнемо з головного. Ми пропонуємо три рішення, які працюють як єдиний пакет. Перше — підвищити облікову ставку на 1 пункт, до 17%, і утримувати її щонайменше до середини 2027 року: у вересні інфляція сягнула 10%, у грудні буде близько 12%. Друге — не заморожувати курс: у жовтні гривня послабилася до 45,1 за долар, і це правильно — курс має поглинати шоки. І обмежити обсяги тендерів депсертифікатів, щоб підвищення дійшло до депозитів. Третє — поставити на паузу наступні кроки валютної лібералізації, доки не відновляться резерви. За такої політики інфляція знизиться до 5,4% у четвертому кварталі 2027 року і повернеться до цілі у 2029 році — у межах трирічного горизонту НБУ.</a:t>
+              <a:t>Почнемо з головного. Ми пропонуємо три рішення, які працюють як єдиний пакет. Перше — підвищити облікову ставку на 1 пункт, до 17%, і утримувати її щонайменше до середини 2027 року: у вересні інфляція сягнула 10%, у грудні буде близько 12%. Друге — не заморожувати курс: у жовтні гривня послабилася до 45,1 за долар, і це правильно — курс має поглинати шоки. І обмежити обсяги тендерів депсертифікатів, щоб підвищення дійшло до депозитів. Третє — поставити на паузу наступні кроки валютної лібералізації, доки не відновляться резерви. За такої політики інфляція знизиться до 5,4% у четвертому кварталі 2027 року і повернеться до цілі у 2028 році — у межах трирічного горизонту НБУ.</a:t>
             </a:r>
             <a:endParaRPr lang="en-US" dirty="0"/>
           </a:p>
@@ -1748,7 +1748,7 @@
           <a:p>
             <a:r>
               <a:rPr lang="en-US" dirty="0"/>
-              <a:t>Підсумуємо. Перше — підвищити облікову ставку до 17% і утримувати щонайменше до середини 2027 року. Друге — не заморожувати курс і обмежити обсяги депсертифікатів. Третє — пауза в лібералізації валютних обмежень. Формула комунікації — «ставка — якір, курс — амортизатор». За такої політики інфляція повернеться до цілі у 2029 році. Дякуємо за увагу! Будемо раді відповісти на ваші запитання.</a:t>
+              <a:t>Підсумуємо. Перше — підвищити облікову ставку до 17% і утримувати щонайменше до середини 2027 року. Друге — не заморожувати курс і обмежити обсяги депсертифікатів. Третє — пауза в лібералізації валютних обмежень. Формула комунікації — «ставка — якір, курс — амортизатор». За такої політики інфляція повернеться до цілі у 2028 році. Дякуємо за увагу! Будемо раді відповісти на ваші запитання.</a:t>
             </a:r>
             <a:endParaRPr lang="en-US" dirty="0"/>
           </a:p>
@@ -3244,7 +3244,7 @@
           <a:p>
             <a:r>
               <a:rPr lang="en-US" dirty="0"/>
-              <a:t>Усі дані завантажуються скриптами; дата відсічення — 24.10.2026.</a:t>
+              <a:t>Усі дані завантажуються скриптами; дата відсічення — 25.10.2026.</a:t>
             </a:r>
             <a:endParaRPr lang="en-US" dirty="0"/>
           </a:p>
@@ -9086,7 +9086,7 @@
                 <a:ea typeface="Cambria" pitchFamily="34" charset="-122"/>
                 <a:cs typeface="Cambria" pitchFamily="34" charset="-120"/>
               </a:rPr>
-              <a:t>Інфляція досягне піку наприкінці 2026 і повернеться до цілі у 2029 — у межах горизонту політики</a:t>
+              <a:t>Інфляція досягне піку наприкінці 2026 і повернеться до цілі у 2028 — у межах горизонту політики</a:t>
             </a:r>
             <a:endParaRPr lang="en-US" sz="2600" dirty="0"/>
           </a:p>
@@ -9285,7 +9285,7 @@
                   <a:schemeClr val="tx1"/>
                 </a:solidFill>
               </a:rPr>
-              <a:t>Пік — IV кв. 2026: ≈11,2% у середньому за квартал (у грудні — ≈12,1% за місяць); 5,4% у IV кв. 2027 (НБУ: 6,9% у грудні); нижче 5% — з I кв. 2028, у 2028 — 3,8–4,8% (дешевша нафта, слабкий попит), ≈5% — у 2029</a:t>
+              <a:t>Пік — IV кв. 2026: ≈11,2% у середньому за квартал (у грудні — ≈12,1% за місяць); 5,4% у IV кв. 2027 (НБУ: 6,9% у грудні); нижче 5% — з I кв. 2028, у 2028 — 3,8–4,8% (дешевша нафта, слабкий попит), ≈5% — у 2028</a:t>
             </a:r>
             <a:endParaRPr lang="en-US" sz="1300" dirty="0"/>
           </a:p>
@@ -17328,7 +17328,7 @@
                   <a:schemeClr val="tx1"/>
                 </a:solidFill>
               </a:rPr>
-              <a:t>утримувати щонайменше до середини 2027; далі — зниження; інфляція нижче 5% з I кв. 2028, ≈5% у 2029</a:t>
+              <a:t>утримувати щонайменше до середини 2027; далі — зниження; інфляція нижче 5% з I кв. 2028, ≈5% у 2028</a:t>
             </a:r>
             <a:endParaRPr lang="en-US" sz="1300" dirty="0"/>
           </a:p>
@@ -19519,7 +19519,7 @@
                   <a:schemeClr val="accent6"/>
                 </a:solidFill>
               </a:rPr>
-              <a:t>* Середнє за квартал (SA); грудень 2026 — 12,1% (наукаст). ** Грн/€ з моделі ÷ EUR/USD 1,12 (жовтневий рівень); аналітики чекають ≈47 грн/$ через рік — курсовий ризик. Інфляція нижче 5% з I кв. 2028, ≈5% у 2029 (у 2028 — 3,8–4,8%). Дані на 24.10.2026.</a:t>
+              <a:t>* Середнє за квартал (SA); грудень 2026 — 12,1% (наукаст). ** Грн/€ з моделі ÷ EUR/USD 1,12 (жовтневий рівень); аналітики чекають ≈47 грн/$ через рік — курсовий ризик. Інфляція нижче 5% з I кв. 2028, ≈5% у 2028 (у 2028 — 3,8–4,8%). Дані на 25.10.2026.</a:t>
             </a:r>
             <a:endParaRPr lang="en-US" sz="1100" dirty="0"/>
           </a:p>
@@ -20361,7 +20361,7 @@
                   <a:schemeClr val="bg1"/>
                 </a:solidFill>
               </a:rPr>
-              <a:t>Базовий прогноз: інфляція ≈12,1% у грудні 2026, 5,4% у IV кв. 2027, нижче 5% з I кв. 2028, ≈5% у 2029</a:t>
+              <a:t>Базовий прогноз: інфляція ≈12,1% у грудні 2026, 5,4% у IV кв. 2027, нижче 5% з I кв. 2028, ≈5% у 2028</a:t>
             </a:r>
             <a:endParaRPr lang="en-US" sz="2000" dirty="0"/>
           </a:p>
@@ -23942,7 +23942,7 @@
                             <a:schemeClr val="tx1"/>
                           </a:solidFill>
                         </a:rPr>
-                        <a:t>Спот до вересня; IV кв. 2026 $119 (жовтень — спот, далі ф'ючерс); ф'ючерсна крива (24.10): $87 (кінець 2027) → $79 (кінець 2028)</a:t>
+                        <a:t>Спот до вересня; IV кв. 2026 $119 (жовтень — спот, далі ф'ючерс); ф'ючерсна крива (25.10): $87 (кінець 2027) → $79 (кінець 2028)</a:t>
                       </a:r>
                       <a:endParaRPr lang="en-US" sz="1200" dirty="0"/>
                     </a:p>
@@ -25919,7 +25919,7 @@
                   <a:schemeClr val="tx1"/>
                 </a:solidFill>
               </a:rPr>
-              <a:t>НБУ підвищує ставку на 1 в. п., щоб інфляція повернулася до цілі у 2029 році</a:t>
+              <a:t>НБУ підвищує ставку на 1 в. п., щоб інфляція повернулася до цілі у 2028 році</a:t>
             </a:r>
             <a:endParaRPr lang="en-US" sz="1400" dirty="0"/>
           </a:p>

--- a/presentation/NBU_University_Challenge_2026.pptx
+++ b/presentation/NBU_University_Challenge_2026.pptx
@@ -143,13 +143,13 @@
   <p:extLst>
     <p:ext uri="{521415D9-36F7-43E2-AB2F-B90AF26B5E84}">
       <p14:sectionLst xmlns:p14="http://schemas.microsoft.com/office/powerpoint/2010/main">
-        <p14:section name="Вступ" id="{1258835f-ef73-c13a-d2fb-a97e60805694}">
+        <p14:section name="Вступ" id="{70516ca8-4f18-6dd1-d87e-08ed16fec17d}">
           <p14:sldIdLst>
             <p14:sldId id="256"/>
             <p14:sldId id="257"/>
           </p14:sldIdLst>
         </p14:section>
-        <p14:section name="Огляд" id="{89c52bbf-46cd-83c4-bdea-056df7c425ea}">
+        <p14:section name="Огляд" id="{b8c67eba-75f3-1b88-0586-e4d9fa2aa899}">
           <p14:sldIdLst>
             <p14:sldId id="258"/>
             <p14:sldId id="259"/>
@@ -159,7 +159,7 @@
             <p14:sldId id="263"/>
           </p14:sldIdLst>
         </p14:section>
-        <p14:section name="Прогноз" id="{91811968-71d9-faab-ba4c-a9100b544bd4}">
+        <p14:section name="Прогноз" id="{93d7b36d-8584-07e7-e11d-7083c0763036}">
           <p14:sldIdLst>
             <p14:sldId id="264"/>
             <p14:sldId id="265"/>
@@ -169,7 +169,7 @@
             <p14:sldId id="269"/>
           </p14:sldIdLst>
         </p14:section>
-        <p14:section name="Рекомендації" id="{966c67d9-832c-2ad5-5f62-74c412aeddf0}">
+        <p14:section name="Рекомендації" id="{ba3fa065-6b3d-4863-5f85-9e92771b28ce}">
           <p14:sldIdLst>
             <p14:sldId id="270"/>
             <p14:sldId id="271"/>
@@ -180,7 +180,7 @@
             <p14:sldId id="276"/>
           </p14:sldIdLst>
         </p14:section>
-        <p14:section name="Додатки" id="{38815901-9313-940d-982a-34e125d9ab2b}">
+        <p14:section name="Додатки" id="{f7dc8305-adc7-695c-c92c-b19b456b77a7}">
           <p14:sldIdLst>
             <p14:sldId id="277"/>
             <p14:sldId id="278"/>
@@ -692,7 +692,7 @@
           <a:p>
             <a:r>
               <a:rPr lang="en-US" dirty="0"/>
-              <a:t>Тепер — прогноз. Ми взяли квартальну прогнозну модель НБУ, переписали її на Python і розширили. Дані завантажуються автоматично, фільтр Калмана оцінює розриви й тренди, далі — прогноз із судженнями й аналіз політики. Наше розширення — окремо базова й небазова інфляція і канал світових цін на нафту: нафта на 20% дорожча додає 0,3 пункта до інфляції, а ставка реагує слабко. Той самий файл моделі, дані й плани ми проганяємо в MATLAB з IRIS для звірки: розбіжність — у п'ятому знаку.</a:t>
+              <a:t>Тепер — прогноз. Ми взяли квартальну прогнозну модель НБУ, переписали її на Python і розширили. Дані завантажуються автоматично, фільтр Калмана оцінює розриви й тренди, далі — прогноз із судженнями й аналіз політики. Наше розширення — окремо базова й небазова інфляція і канал світових цін на нафту: нафта на 20% дорожча додає 0,3 пункта до інфляції, а ставка реагує слабко. Той самий файл моделі, дані й плани ми проганяємо в MATLAB з IRIS для звірки: на даних до 21 жовтня розбіжність була в п'ятому знаку, після оновлення даних звірку повторимо.</a:t>
             </a:r>
             <a:endParaRPr lang="en-US" dirty="0"/>
           </a:p>
@@ -868,7 +868,7 @@
           <a:p>
             <a:r>
               <a:rPr lang="en-US" dirty="0"/>
-              <a:t>Базовий прогноз. Нагадаю: ціль НБУ — 5% без діапазону відхилень, і повернути інфляцію до неї треба на горизонті до трьох років. У середньому за квартал інфляція досягне піку — близько 11,2% — наприкінці 2026 року; у місячному вимірі це близько 12% у грудні. Далі вона знизиться до 5,4% у четвертому кварталі 2027-го, у 2028 році опуститься нижче цілі — до 3,8–4,8%, бо нафта дешевшає за ф'ючерсами, а попит слабкий, — і стабілізується біля 5% у 2028 році. Базова інфляція в нас нижча, ніж у НБУ: 4,2% у середньому за четвертий квартал 2027 року, у грудневому вимірі — близько 3,7%, проти 5,1% у НБУ. Ставка — 17% до середини 2027 року, далі поступово знижується до 10,5% наприкінці 2028-го. Невизначеність велика — це показує віяло.</a:t>
+              <a:t>Базовий прогноз. Нагадаю: ціль НБУ — 5% без діапазону відхилень, і повернути інфляцію до неї треба на горизонті до трьох років. У середньому за квартал інфляція досягне піку — близько 11,2% — наприкінці 2026 року; у місячному вимірі це близько 12% у грудні. Далі вона знизиться до 5,4% у четвертому кварталі 2027-го, у 2028 році опуститься нижче цілі — до 3,8–4,8%, бо нафта дешевшає за ф'ючерсами, а попит слабкий, — і стабілізується біля 5% у 2029 році. Базова інфляція в нас нижча, ніж у НБУ: 4,2% у середньому за четвертий квартал 2027 року, у грудневому вимірі — близько 3,7%, проти 5,1% у НБУ. Ставка — 17% до середини 2027 року, далі поступово знижується до 10,5% наприкінці 2028-го. Невизначеність велика — це показує віяло.</a:t>
             </a:r>
             <a:endParaRPr lang="en-US" dirty="0"/>
           </a:p>
@@ -1044,7 +1044,7 @@
           <a:p>
             <a:r>
               <a:rPr lang="en-US" dirty="0"/>
-              <a:t>Ми розглянули чотири ризикові сценарії. Найнебезпечніший — дефіцит фінансування: якщо допомога затримається, гривня буде приблизно на 6% слабшою, інфляція зросте до 13,0%, а ставку доведеться підняти до 19,3%. Важка зима з ударами по енергетиці підніме інфляцію до 12,4% і майже зупинить зростання ВВП. Натомість нафта по 120 доларів додає лише 0,1 пункта до піку інфляції, і ставка майже не реагує — це шок першого раунду. Ще два ризики для інфляції 2027 року — курс і очікування: якщо гривня слабшатиме так, як чекає ринок, інфляція наприкінці 2027 року буде близько 7% замість 5%, розбалансування очікувань дало б близько 7%, а ПДВ 21% — ще 0,7 пункта до піку.</a:t>
+              <a:t>Ми розглянули чотири ризикові сценарії. Найнебезпечніший — дефіцит фінансування: якщо допомога затримається, гривня буде приблизно на 6% слабшою, інфляція зросте до 13,0%, а ставку доведеться підняти до 19,3%. Важка зима з ударами по енергетиці підніме інфляцію до 12,4%, а ВВП у 2027 році скоротиться на 1,1%. Натомість нафта, якщо лишиться біля 120 доларів весь 2027 рік замість зниження до 87 за ф'ючерсами, додає 0,6 пункта до інфляції наприкінці 2027 року, і ставка на піку +0,3 в. п. — це переважно шок першого раунду. Ще чотири ризики для інфляції 2027 року — курс, євро, очікування і ПДВ: якщо гривня слабшатиме так, як чекає ринок, інфляція наприкінці 2027 року буде близько 8% замість 5,4%; якби євро знову подорожчав до 1,16 долара, як припускав НБУ в липні, — близько 8%; розбалансування очікувань дало б близько 7%, а ПДВ 21% — ще 0,5 пункта в II кварталі 2027.</a:t>
             </a:r>
             <a:endParaRPr lang="en-US" dirty="0"/>
           </a:p>
@@ -1308,7 +1308,7 @@
           <a:p>
             <a:r>
               <a:rPr lang="en-US" dirty="0"/>
-              <a:t>Ми порівняли чотири варіанти рішення — від утримання 16% до підвищення до 17,5%. У кожному ставка утримується до середини 2027 року, а далі знижується так, щоб інфляція повернулася саме до 5%. Критерій — втрати: відхилення інфляції від цілі, розрив ВВП і різкі зміни ставки. Адмінціни ми враховуємо наполовину: вони ростуть щороку, але це перший раунд. Мінімум втрат — від 16 до 17% залежно від ваги згладжування, за центральної — 16,5%; оптимальна траєкторія починається з 16,9% і в першому кварталі 2027-го підіймається до 16,9%. Ми перевірили рішення на десяти сценаріях: найменші очікувані втрати — на 16,5 і 17%, і 17% — серед них. Тому ми обираємо пункт зараз і готовність до ще пів пункта в грудні, коли буде оновлений прогноз НБУ, а не півтора пункта одразу.</a:t>
+              <a:t>Ми порівняли чотири варіанти рішення — від утримання 16% до підвищення до 17,5%. У кожному ставка утримується до середини 2027 року, а далі знижується так, щоб інфляція повернулася саме до 5%. Критерій — втрати: відхилення інфляції від цілі, розрив ВВП і різкі зміни ставки. Адмінціни ми враховуємо наполовину: вони ростуть щороку, але це перший раунд. Мінімум втрат — від 16 до 17% залежно від ваги згладжування, за центральної — 16,5%; оптимальна траєкторія починається з 16,9%, тримається на цьому рівні в I кв. 2027 і починає знижуватися з II кварталу 2027. За центральних ваг модель майже не розрізняє 16 і 17%, тому крок у пункт ми обґрунтовуємо ризиками. Ми перевірили рішення на одинадцяти сценаріях: найменші очікувані втрати — на 17%, і 17% — серед них. Найчутливіше припущення — курс: без жовтневого зміцнення гривні до євро оптимум був би 17,8%, а якби євро знову подорожчало до 1,16 долара — 18,2%. Тому ми обираємо пункт зараз і готовність до ще пів пункта в грудні, коли буде оновлений прогноз НБУ, а не півтора пункта одразу.</a:t>
             </a:r>
             <a:endParaRPr lang="en-US" dirty="0"/>
           </a:p>
@@ -1396,7 +1396,7 @@
           <a:p>
             <a:r>
               <a:rPr lang="en-US" dirty="0"/>
-              <a:t>Тому перша рекомендація — підвищити облікову ставку до 17%. Чому підвищити: інфляція в грудні сягне близько 12%, базова інфляція прискорюється, курсові ризики високі, а гнучкіший курс потребує сильного якоря для очікувань. Ринок не чекає різкого посилення, але ризики зміщені вгору, і НБУ вже робив крок у пункт — у січні й березні 2025 року. Чому не більше: економіка слабка, а півтора пункта одразу — надмірний сигнал до оновленого прогнозу НБУ. Щоб підвищення дійшло до депозитів, обсяги тендерів депсертифікатів варто обмежити. Орієнтир: не знижувати ставку щонайменше до третього кварталу 2027 року, а наступний крок — радше вгору: ще пів пункта в грудні, якщо базова інфляція не сповільниться або посиляться курсові очікування.</a:t>
+              <a:t>Тому перша рекомендація — підвищити облікову ставку до 17%. Чому підвищити: інфляція в грудні сягне близько 12%, базова інфляція прискорюється, курсові ризики високі, а гнучкіший курс потребує сильного якоря для очікувань. Ринок не чекає різкого посилення, але ризики зміщені вгору, і НБУ вже робив крок у пункт — у січні й березні 2025 року. Чому не більше: економіка слабка, а півтора пункта одразу — надмірний сигнал до оновленого прогнозу НБУ. Щоб підвищення дійшло до депозитів, обсяги тендерів депсертифікатів варто обмежити. Орієнтир: не знижувати ставку щонайменше до третього кварталу 2027 року — це трохи довше, ніж оптимум моделі (II кв. 2027), запас на курсові ризики. А наступний крок — радше вгору: ще пів пункта в грудні, якщо базова інфляція без сезонності не сповільниться нижче приблизно 0,7% на місяць або посиляться курсові очікування.</a:t>
             </a:r>
             <a:endParaRPr lang="en-US" dirty="0"/>
           </a:p>
@@ -1484,7 +1484,7 @@
           <a:p>
             <a:r>
               <a:rPr lang="en-US" dirty="0"/>
-              <a:t>Друга рекомендація — щодо курсу. НБУ продає близько 5,0 мільярда доларів на місяць, а надходить близько 3,7. Якщо так і залишиться, на кінець року резерви становитимуть 43 мільярди. Структурно попит на валюту високий: імпорт у 2,6 раза більший за експорт, а офіційне фінансування скоротиться з 87 до 33 мільярдів у 2028 році. Водночас продаж валюти здебільшого «доносить» допомогу до ринку, тож резерви визначає її ритм, а не курс. Наша рекомендація щодо курсу інша: не фіксувати його. Чотири місяці гривня стояла біля 44,7 за долар, а в жовтні послабилася до 45,1 — за рік це плюс 8%, і це нормальна робота амортизатора. Курс має поглинати шоки, а НБУ — лише згладжувати коливання.</a:t>
+              <a:t>Друга рекомендація — щодо курсу. НБУ продає близько 5,0 мільярда доларів на місяць, а надходить близько 3,7. Якщо так і залишиться, на кінець року резерви становитимуть 43 мільярди. Структурно попит на валюту високий: імпорт у 2,6 раза більший за експорт, а офіційне фінансування скоротиться з 87 до 33 мільярдів у 2028 році. Водночас продаж валюти здебільшого «доносить» допомогу до ринку, тож резерви визначає її ритм, а не курс. Наша рекомендація щодо курсу — не фіксувати його. Чотири місяці гривня стояла біля 44,7 за долар, а в жовтні послабилася до 45,1 — за рік це плюс 8%, і це нормальна робота амортизатора. Курс має поглинати шоки, а НБУ — лише згладжувати коливання.</a:t>
             </a:r>
             <a:endParaRPr lang="en-US" dirty="0"/>
           </a:p>
@@ -1572,7 +1572,7 @@
           <a:p>
             <a:r>
               <a:rPr lang="en-US" dirty="0"/>
-              <a:t>Почнемо з головного. Ми пропонуємо три рішення, які працюють як єдиний пакет. Перше — підвищити облікову ставку на 1 пункт, до 17%, і утримувати її щонайменше до середини 2027 року: у вересні інфляція сягнула 10%, у грудні буде близько 12%. Друге — не заморожувати курс: у жовтні гривня послабилася до 45,1 за долар, і це правильно — курс має поглинати шоки. І обмежити обсяги тендерів депсертифікатів, щоб підвищення дійшло до депозитів. Третє — поставити на паузу наступні кроки валютної лібералізації, доки не відновляться резерви. За такої політики інфляція знизиться до 5,4% у четвертому кварталі 2027 року і повернеться до цілі у 2028 році — у межах трирічного горизонту НБУ.</a:t>
+              <a:t>Почнемо з головного. Ми пропонуємо три рішення, які працюють як єдиний пакет. Перше — підвищити облікову ставку на 1 пункт, до 17%, і утримувати її щонайменше до середини 2027 року: у вересні інфляція сягнула 10%, у грудні буде близько 12%. Друге — не заморожувати курс: у жовтні гривня послабилася до 45,1 за долар, і це правильно — курс має поглинати шоки. І обмежити обсяги тендерів депсертифікатів, щоб підвищення дійшло до депозитів. Третє — поставити на паузу наступні кроки валютної лібералізації, доки не відновляться резерви. За такої політики інфляція знизиться до 5,4% у четвертому кварталі 2027 року і повернеться до цілі на початку 2028 року — у межах трирічного горизонту НБУ; у 2028 році вона буде навіть трохи нижчою за 5%.</a:t>
             </a:r>
             <a:endParaRPr lang="en-US" dirty="0"/>
           </a:p>
@@ -1748,7 +1748,7 @@
           <a:p>
             <a:r>
               <a:rPr lang="en-US" dirty="0"/>
-              <a:t>Підсумуємо. Перше — підвищити облікову ставку до 17% і утримувати щонайменше до середини 2027 року. Друге — не заморожувати курс і обмежити обсяги депсертифікатів. Третє — пауза в лібералізації валютних обмежень. Формула комунікації — «ставка — якір, курс — амортизатор». За такої політики інфляція повернеться до цілі у 2028 році. Дякуємо за увагу! Будемо раді відповісти на ваші запитання.</a:t>
+              <a:t>Підсумуємо. Перше — підвищити облікову ставку до 17% і утримувати щонайменше до середини 2027 року. Друге — не заморожувати курс і обмежити обсяги депсертифікатів. Третє — пауза в лібералізації валютних обмежень. Формула комунікації — «ставка — якір, курс — амортизатор». За такої політики інфляція повернеться до цілі на початку 2028 року і стабілізується біля 5% у 2029-му. Дякуємо за увагу! Будемо раді відповісти на ваші запитання.</a:t>
             </a:r>
             <a:endParaRPr lang="en-US" dirty="0"/>
           </a:p>
@@ -2276,7 +2276,7 @@
           <a:p>
             <a:r>
               <a:rPr lang="en-US" dirty="0"/>
-              <a:t>Окремо про базову інфляцію. Наша оцінка на четвертий квартал 2027 року — 4,2% у середньому за квартал, тобто близько 3,7% у грудні, проти 5,1% у НБУ — нижча, ніж у НБУ. У моделі її тримають додатний розрив ВВП, перенесення вересневого шоку витрат і курсу та шок витрат опалювального сезону. Загальна інфляція при цьому близька до НБУ: тарифи й акцизи додають близько 1,7 пункта на рік, а дешевша нафта частково це компенсує. Висновок: підвищити ставку зараз, щоб швидше пом'якшити її пізніше.</a:t>
+              <a:t>Окремо про базову інфляцію. Наша оцінка на четвертий квартал 2027 року — 4,2% у середньому за квартал, тобто близько 3,7% у грудні, проти 5,1% у НБУ — нижча, ніж у НБУ. У моделі її тримають додатний розрив ВВП, перенесення вересневого шоку витрат і курсу та шок витрат опалювального сезону. Загальна інфляція при цьому нижча за НБУ (5,4 проти 6,9% у грудні): тарифи й акцизи додають близько 1,7 пункта на рік, а дешевша нафта й міцніша гривня до євро віднімають більше. Висновок: підвищити ставку зараз, щоб швидше пом'якшити її пізніше.</a:t>
             </a:r>
             <a:endParaRPr lang="en-US" dirty="0"/>
           </a:p>
@@ -6491,7 +6491,7 @@
                   <a:schemeClr val="tx1"/>
                 </a:solidFill>
               </a:rPr>
-              <a:t>розбіжність Python і MATLAB/IRIS на тому самому файлі моделі: фільтр і всі 5 сценаріїв (* звірка від 21.10 на попередніх даних; після оновлення 25.10 run_check.m треба перезапустити)</a:t>
+              <a:t>розбіжність Python і MATLAB/IRIS на тому самому файлі моделі: фільтр і всі 5 сценаріїв (* звірка від 21.10, до оновлення даних 25.10)</a:t>
             </a:r>
             <a:endParaRPr lang="en-US" sz="1400" dirty="0"/>
           </a:p>
@@ -9086,7 +9086,7 @@
                 <a:ea typeface="Cambria" pitchFamily="34" charset="-122"/>
                 <a:cs typeface="Cambria" pitchFamily="34" charset="-120"/>
               </a:rPr>
-              <a:t>Інфляція досягне піку наприкінці 2026 і повернеться до цілі у 2028 — у межах горизонту політики</a:t>
+              <a:t>Інфляція пройде пік наприкінці 2026 і повернеться до цілі на початку 2028 — у межах горизонту політики</a:t>
             </a:r>
             <a:endParaRPr lang="en-US" sz="2600" dirty="0"/>
           </a:p>
@@ -9285,7 +9285,7 @@
                   <a:schemeClr val="tx1"/>
                 </a:solidFill>
               </a:rPr>
-              <a:t>Пік — IV кв. 2026: ≈11,2% у середньому за квартал (у грудні — ≈12,1% за місяць); 5,4% у IV кв. 2027 (НБУ: 6,9% у грудні); нижче 5% — з I кв. 2028, у 2028 — 3,8–4,8% (дешевша нафта, слабкий попит), ≈5% — у 2028</a:t>
+              <a:t>Пік — IV кв. 2026: ≈11,2% у середньому за квартал (у грудні — ≈12,1% за місяць); 5,4% у IV кв. 2027 (НБУ: 6,9% у грудні); нижче 5% — з I кв. 2028, у 2028 — 3,8–4,8% (дешевша нафта, слабкий попит), ≈5% — у 2029</a:t>
             </a:r>
             <a:endParaRPr lang="en-US" sz="1300" dirty="0"/>
           </a:p>
@@ -9583,7 +9583,7 @@
                 <a:ea typeface="Cambria" pitchFamily="34" charset="-122"/>
                 <a:cs typeface="Cambria" pitchFamily="34" charset="-120"/>
               </a:rPr>
-              <a:t>Економіка слабка, але потенціал постраждав ще більше: розрив ≈0,7% зараз, ≈−1,0% у 2027 (НБУ: 1,4%)</a:t>
+              <a:t>Економіка слабка, але потенціал постраждав ще більше: розрив ≈0,7% у IV кв. 2026, ≈−1,0% у 2027 (НБУ: 1,4%)</a:t>
             </a:r>
             <a:endParaRPr lang="en-US" sz="2600" dirty="0"/>
           </a:p>
@@ -9933,7 +9933,7 @@
                 <a:ea typeface="Cambria" pitchFamily="34" charset="-122"/>
                 <a:cs typeface="Cambria" pitchFamily="34" charset="-120"/>
               </a:rPr>
-              <a:t>Сценарії: головні ризики — дефіцит фінансування, курс і очікування, а не нафта</a:t>
+              <a:t>Сценарії: головні ризики — дефіцит фінансування, зима і курс; нафта ≈$120 весь 2027 — +0,6 в. п.</a:t>
             </a:r>
             <a:endParaRPr lang="en-US" sz="2600" dirty="0"/>
           </a:p>
@@ -12021,7 +12021,7 @@
                             <a:schemeClr val="tx1"/>
                           </a:solidFill>
                         </a:rPr>
-                        <a:t>11,3</a:t>
+                        <a:t>11,2</a:t>
                       </a:r>
                       <a:endParaRPr lang="en-US" sz="1200" dirty="0"/>
                     </a:p>
@@ -12082,7 +12082,7 @@
                             <a:schemeClr val="tx1"/>
                           </a:solidFill>
                         </a:rPr>
-                        <a:t>5,6</a:t>
+                        <a:t>6,0</a:t>
                       </a:r>
                       <a:endParaRPr lang="en-US" sz="1200" dirty="0"/>
                     </a:p>
@@ -12143,7 +12143,7 @@
                             <a:schemeClr val="tx1"/>
                           </a:solidFill>
                         </a:rPr>
-                        <a:t>17,1</a:t>
+                        <a:t>17,3</a:t>
                       </a:r>
                       <a:endParaRPr lang="en-US" sz="1200" dirty="0"/>
                     </a:p>
@@ -12204,7 +12204,7 @@
                             <a:schemeClr val="tx1"/>
                           </a:solidFill>
                         </a:rPr>
-                        <a:t>45,6</a:t>
+                        <a:t>45,5</a:t>
                       </a:r>
                       <a:endParaRPr lang="en-US" sz="1200" dirty="0"/>
                     </a:p>
@@ -12387,7 +12387,7 @@
                   <a:schemeClr val="tx1"/>
                 </a:solidFill>
               </a:rPr>
-              <a:t>Нафта $120: +0,1 в. п. до піку інфляції, ставка майже не змінюється</a:t>
+              <a:t>Нафта ≈$120 протягом 2027 замість ≈$87 за ф'ючерсами: +0,6 в. п. до ІСЦ IV кв. 2027 (пік IV кв. 2026 не змінюється); ставка на піку +0,3 в. п. — переважно перший раунд для цін пального</a:t>
             </a:r>
             <a:endParaRPr lang="en-US" sz="1300" dirty="0"/>
           </a:p>
@@ -12405,7 +12405,7 @@
                   <a:schemeClr val="tx1"/>
                 </a:solidFill>
               </a:rPr>
-              <a:t>Ще три ризики (додаток): курс, як чекає ринок → ІСЦ IV кв. 2027 ≈7%; розбалансування очікувань → ≈7%; ПДВ 21% → +0,7 в. п. до піку</a:t>
+              <a:t>Ще чотири ризики (додаток): курс, як чекає ринок → ІСЦ IV кв. 2027 ≈8%; євро знову 1,16 $ → ІСЦ IV кв. 2027 ≈8%; розбалансування очікувань → ІСЦ IV кв. 2027 ≈7%; ПДВ 21% → +0,5 в. п. (II кв. 2027)</a:t>
             </a:r>
             <a:endParaRPr lang="en-US" sz="1300" dirty="0"/>
           </a:p>
@@ -15896,7 +15896,7 @@
                   <a:schemeClr val="tx1"/>
                 </a:solidFill>
               </a:rPr>
-              <a:t>Втрати: відхилення інфляції від 5%, розрив ВВП, різкі зміни ставки; адмінціни — з вагою 50% (вони ростуть щороку, але це перший раунд) — той самий принцип для рішення й усієї траєкторії</a:t>
+              <a:t>Втрати: відхилення інфляції від 5%, розрив ВВП, різкі зміни ставки; адмінціни — з вагою 50% (перший раунд); усі варіанти — з однаковими шоками наукасту (тому рядок ★ відрізняється від базового прогнозу на соті в. п.)</a:t>
             </a:r>
             <a:endParaRPr lang="en-US" sz="1300" dirty="0"/>
           </a:p>
@@ -15914,7 +15914,7 @@
                   <a:schemeClr val="tx1"/>
                 </a:solidFill>
               </a:rPr>
-              <a:t>Оптимальна траєкторія: 16,9% зараз (16,4–17,7% залежно від згладжування), ≈16,9% у I кв. 2027</a:t>
+              <a:t>Оптимальна траєкторія: 16,9% зараз (16,4–17,7% залежно від згладжування), тримається на цьому рівні в I кв. 2027, зниження — з II кв. 2027; за курсовими припущеннями — 16,9–18,2% (без наукасту курсу 17,8%, євро знову 1,16 $ — 18,2%)</a:t>
             </a:r>
             <a:endParaRPr lang="en-US" sz="1300" dirty="0"/>
           </a:p>
@@ -15932,7 +15932,7 @@
                   <a:schemeClr val="tx1"/>
                 </a:solidFill>
               </a:rPr>
-              <a:t>Під ризиками (10 сценаріїв, два набори ймовірностей) найменші очікувані втрати — 16,5–17%; 17% — серед них (різниця з мінімумом &lt; 0,5% втрат)</a:t>
+              <a:t>За центральних ваг модель майже не розрізняє 16–17% (втрати 106 / 105 / 106); під ризиками (11 сценаріїв) найменші очікувані втрати — 17%, мінімальний жаль — 17,5%</a:t>
             </a:r>
             <a:endParaRPr lang="en-US" sz="1300" dirty="0"/>
           </a:p>
@@ -15950,7 +15950,7 @@
                   <a:schemeClr val="tx1"/>
                 </a:solidFill>
               </a:rPr>
-              <a:t>Наш вибір — 17% (+1 в. п., найбільший крок НБУ за 2025 р.) і готовність до +0,5 у грудні, коли буде жовтневий прогноз НБУ і дані за жовтень</a:t>
+              <a:t>Наш вибір — 17% (усередині модельного діапазону): крок у пункт — через зміщені вгору ризики і прецеденти 2025 р.; готовність до +0,5 у грудні, коли буде прогноз НБУ і дані за жовтень</a:t>
             </a:r>
             <a:endParaRPr lang="en-US" sz="1300" dirty="0"/>
           </a:p>
@@ -16395,7 +16395,7 @@
                   <a:schemeClr val="tx1"/>
                 </a:solidFill>
               </a:rPr>
-              <a:t>Курс: якщо гривня слабшатиме, як чекає ринок, ІСЦ IV кв. 2027 — ≈7%; кожні +0,5 в. п. зараз знижують його на ≈0,2 в. п.</a:t>
+              <a:t>Курс: якщо гривня слабшатиме, як чекає ринок, ІСЦ IV кв. 2027 — ≈8%; кожні +0,5 в. п. зараз знижують його на ≈0,2 в. п.</a:t>
             </a:r>
             <a:endParaRPr lang="en-US" sz="1400" dirty="0"/>
           </a:p>
@@ -16492,7 +16492,7 @@
                   <a:schemeClr val="tx1"/>
                 </a:solidFill>
               </a:rPr>
-              <a:t>Модель: оптимум ≈16,9%, під ризиками — 16,5–17%; ринок (ОВДП, курсові очікування) не чекає різкого посилення — ми рішучіші за ринок, обережніші за модель</a:t>
+              <a:t>Модель: оптимум ≈16,9%, під ризиками — 17%; ринок (ОВДП, курсові очікування) не чекає різкого посилення — ми рішучіші за ринок і усередині модельного діапазону (16,5–18,2%)</a:t>
             </a:r>
             <a:endParaRPr lang="en-US" sz="1400" dirty="0"/>
           </a:p>
@@ -16607,7 +16607,7 @@
                   <a:schemeClr val="tx1"/>
                 </a:solidFill>
               </a:rPr>
-              <a:t>Не знижувати щонайменше до III кв. 2027; за базовим прогнозом далі — ≈13,0% наприкінці 2027 і ≈10,5% — 2028</a:t>
+              <a:t>Не знижувати щонайменше до III кв. 2027 (оптимум моделі починає знижувати з II кв. 2027 — запас на курсові ризики); за базовим прогнозом далі — ≈13,1% наприкінці 2027 і ≈10,5% — 2028</a:t>
             </a:r>
             <a:endParaRPr lang="en-US" sz="1400" dirty="0"/>
           </a:p>
@@ -16625,7 +16625,7 @@
                   <a:schemeClr val="tx1"/>
                 </a:solidFill>
               </a:rPr>
-              <a:t>Наступний крок радше вгору: ще +0,5 у грудні, якщо базова без сезонності ≥ 0,6% м/м або посиляться курсові очікування</a:t>
+              <a:t>Наступний крок радше вгору: ще +0,5 у грудні, якщо базова без сезонності не сповільниться нижче ≈0,7% м/м (зараз ≈0,8%) або посиляться курсові очікування</a:t>
             </a:r>
             <a:endParaRPr lang="en-US" sz="1400" dirty="0"/>
           </a:p>
@@ -16969,7 +16969,7 @@
                   <a:schemeClr val="tx1"/>
                 </a:solidFill>
               </a:rPr>
-              <a:t>Ринок чекає ≈47 грн/$ через рік (≈5% послаблення); модель — ≈45,3 грн/$ (≈1%; до євро ≈2% на рік); якщо правий ринок, ІСЦ IV кв. 2027 — ≈7%</a:t>
+              <a:t>Ринок чекає ≈47 грн/$ через рік (≈5% від жовтневого рівня); модель — ≈45,6 грн/$ у IV кв. 2027 (≈1%; до євро +1,3% за 2027); якщо правий ринок, ІСЦ IV кв. 2027 — ≈8%</a:t>
             </a:r>
             <a:endParaRPr lang="en-US" sz="1400" dirty="0"/>
           </a:p>
@@ -17328,7 +17328,7 @@
                   <a:schemeClr val="tx1"/>
                 </a:solidFill>
               </a:rPr>
-              <a:t>утримувати щонайменше до середини 2027; далі — зниження; інфляція нижче 5% з I кв. 2028, ≈5% у 2028</a:t>
+              <a:t>утримувати щонайменше до середини 2027; далі — зниження; інфляція нижче 5% з I кв. 2028, ≈5% у 2029</a:t>
             </a:r>
             <a:endParaRPr lang="en-US" sz="1300" dirty="0"/>
           </a:p>
@@ -19519,7 +19519,7 @@
                   <a:schemeClr val="accent6"/>
                 </a:solidFill>
               </a:rPr>
-              <a:t>* Середнє за квартал (SA); грудень 2026 — 12,1% (наукаст). ** Грн/€ з моделі ÷ EUR/USD 1,12 (жовтневий рівень); аналітики чекають ≈47 грн/$ через рік — курсовий ризик. Інфляція нижче 5% з I кв. 2028, ≈5% у 2028 (у 2028 — 3,8–4,8%). Дані на 25.10.2026.</a:t>
+              <a:t>* Середнє за квартал (SA); грудень 2026 — 12,1% (наукаст). ** Грн/€ з моделі ÷ EUR/USD 1,12 (жовтневий рівень); аналітики чекають ≈47 грн/$ через рік — курсовий ризик. У 2028 — 3,8–4,8%. Дані на 25.10.2026.</a:t>
             </a:r>
             <a:endParaRPr lang="en-US" sz="1100" dirty="0"/>
           </a:p>
@@ -20361,7 +20361,7 @@
                   <a:schemeClr val="bg1"/>
                 </a:solidFill>
               </a:rPr>
-              <a:t>Базовий прогноз: інфляція ≈12,1% у грудні 2026, 5,4% у IV кв. 2027, нижче 5% з I кв. 2028, ≈5% у 2028</a:t>
+              <a:t>Базовий прогноз: інфляція ≈12,1% у грудні 2026, 5,4% у IV кв. 2027, нижче 5% з I кв. 2028, ≈5% у 2029</a:t>
             </a:r>
             <a:endParaRPr lang="en-US" sz="2000" dirty="0"/>
           </a:p>
@@ -23759,7 +23759,7 @@
                             <a:schemeClr val="tx1"/>
                           </a:solidFill>
                         </a:rPr>
-                        <a:t>IV кв. 2026 — за фактом жовтня й останнім курсом (50,4 грн/€); далі допустиме послаблення (цільовий темп) 4% у 2027, 3% у 2028; фактичний — з моделі (≈2% на рік); EUR/USD 1,12 без змін</a:t>
+                        <a:t>IV кв. 2026 — за фактом жовтня й останнім курсом (50,4 грн/€); далі допустиме послаблення (цільовий темп) 4% у 2027, 3% у 2028; фактичний — з моделі (у 2027 — +1,3%, у середньому ≈1,5% на рік); EUR/USD 1,12 без змін</a:t>
                       </a:r>
                       <a:endParaRPr lang="en-US" sz="1200" dirty="0"/>
                     </a:p>
@@ -24877,7 +24877,7 @@
                   <a:srgbClr val="C0392B"/>
                 </a:solidFill>
               </a:rPr>
-              <a:t>▲ Тривала нафта ≈$100</a:t>
+              <a:t>▲ Нафта ≈$120 весь 2027 (+0,6 в. п.)</a:t>
             </a:r>
             <a:endParaRPr lang="en-US" sz="1300" dirty="0"/>
           </a:p>
@@ -25065,7 +25065,7 @@
                   <a:srgbClr val="1E8449"/>
                 </a:solidFill>
               </a:rPr>
-              <a:t>▼ Зміцнення євро — дешевший імпорт з ЄС</a:t>
+              <a:t>▼ Слабший попит у єврозоні — менший експорт</a:t>
             </a:r>
             <a:endParaRPr lang="en-US" sz="1300" dirty="0"/>
           </a:p>
@@ -25218,6 +25218,23 @@
                 </a:solidFill>
               </a:rPr>
               <a:t>▲ Зарплатна спіраль (дефіцит кадрів)</a:t>
+            </a:r>
+            <a:endParaRPr lang="en-US" sz="1300" dirty="0"/>
+          </a:p>
+          <a:p>
+            <a:pPr indent="0" marL="0">
+              <a:spcAft>
+                <a:spcPts val="400"/>
+              </a:spcAft>
+              <a:buNone/>
+            </a:pPr>
+            <a:r>
+              <a:rPr lang="en-US" sz="1300" b="1" dirty="0">
+                <a:solidFill>
+                  <a:srgbClr val="C0392B"/>
+                </a:solidFill>
+              </a:rPr>
+              <a:t>▲ Євро знову 1,16 $ — гривня до євро слабшає на ≈3%</a:t>
             </a:r>
             <a:endParaRPr lang="en-US" sz="1300" dirty="0"/>
           </a:p>
@@ -25919,7 +25936,7 @@
                   <a:schemeClr val="tx1"/>
                 </a:solidFill>
               </a:rPr>
-              <a:t>НБУ підвищує ставку на 1 в. п., щоб інфляція повернулася до цілі у 2028 році</a:t>
+              <a:t>НБУ підвищує ставку на 1 в. п., щоб інфляція повернулася до цілі на початку 2028 року</a:t>
             </a:r>
             <a:endParaRPr lang="en-US" sz="1400" dirty="0"/>
           </a:p>
@@ -26578,7 +26595,7 @@
                 <a:ea typeface="Cambria" pitchFamily="34" charset="-122"/>
                 <a:cs typeface="Cambria" pitchFamily="34" charset="-120"/>
               </a:rPr>
-              <a:t>Додаток 8. Додаткові ризики: курс, очікування, ПДВ — ставка реагує за правилом</a:t>
+              <a:t>Додаток 8. Додаткові ризики: курс, євро, очікування, ПДВ — ставка реагує за правилом</a:t>
             </a:r>
             <a:endParaRPr lang="en-US" sz="2600" dirty="0"/>
           </a:p>
@@ -27599,7 +27616,7 @@
                             <a:schemeClr val="tx1"/>
                           </a:solidFill>
                         </a:rPr>
-                        <a:t>7,2</a:t>
+                        <a:t>8,4</a:t>
                       </a:r>
                       <a:endParaRPr lang="en-US" sz="1200" dirty="0"/>
                     </a:p>
@@ -27660,7 +27677,7 @@
                             <a:schemeClr val="tx1"/>
                           </a:solidFill>
                         </a:rPr>
-                        <a:t>11,4</a:t>
+                        <a:t>12,2</a:t>
                       </a:r>
                       <a:endParaRPr lang="en-US" sz="1200" dirty="0"/>
                     </a:p>
@@ -27721,7 +27738,7 @@
                             <a:schemeClr val="tx1"/>
                           </a:solidFill>
                         </a:rPr>
-                        <a:t>18,0</a:t>
+                        <a:t>18,9</a:t>
                       </a:r>
                       <a:endParaRPr lang="en-US" sz="1200" dirty="0"/>
                     </a:p>
@@ -27782,7 +27799,7 @@
                             <a:schemeClr val="tx1"/>
                           </a:solidFill>
                         </a:rPr>
-                        <a:t>47,1</a:t>
+                        <a:t>47,7</a:t>
                       </a:r>
                       <a:endParaRPr lang="en-US" sz="1200" dirty="0"/>
                     </a:p>
@@ -27845,7 +27862,7 @@
                             <a:schemeClr val="tx1"/>
                           </a:solidFill>
                         </a:rPr>
-                        <a:t>Розбалансування очікувань</a:t>
+                        <a:t>Євро знову 1,16 $</a:t>
                       </a:r>
                       <a:endParaRPr lang="en-US" sz="1200" dirty="0"/>
                     </a:p>
@@ -27906,7 +27923,7 @@
                             <a:schemeClr val="tx1"/>
                           </a:solidFill>
                         </a:rPr>
-                        <a:t>Базова інфляція вища на 1 в. п. (кв/кв, у річному вимірі) щокварталу 2027 р.</a:t>
+                        <a:t>Євро знову 1,16 $ з I кв. 2027 (припущення НБУ, липень) за того ж грн/$: гривня до євро слабшає на ≈3,4%</a:t>
                       </a:r>
                       <a:endParaRPr lang="en-US" sz="1200" dirty="0"/>
                     </a:p>
@@ -27967,7 +27984,7 @@
                             <a:schemeClr val="tx1"/>
                           </a:solidFill>
                         </a:rPr>
-                        <a:t>7,4</a:t>
+                        <a:t>8,0</a:t>
                       </a:r>
                       <a:endParaRPr lang="en-US" sz="1200" dirty="0"/>
                     </a:p>
@@ -28089,6 +28106,374 @@
                             <a:schemeClr val="tx1"/>
                           </a:solidFill>
                         </a:rPr>
+                        <a:t>18,7</a:t>
+                      </a:r>
+                      <a:endParaRPr lang="en-US" sz="1200" dirty="0"/>
+                    </a:p>
+                  </a:txBody>
+                  <a:tcPr marL="63500" marR="63500" marT="38100" marB="38100" anchor="ctr">
+                    <a:lnL w="6350" cap="flat" cmpd="sng" algn="ctr">
+                      <a:solidFill>
+                        <a:srgbClr val="C9D6D3"/>
+                      </a:solidFill>
+                      <a:prstDash val="solid"/>
+                      <a:round/>
+                      <a:headEnd type="none" w="med" len="med"/>
+                      <a:tailEnd type="none" w="med" len="med"/>
+                    </a:lnL>
+                    <a:lnR w="6350" cap="flat" cmpd="sng" algn="ctr">
+                      <a:solidFill>
+                        <a:srgbClr val="C9D6D3"/>
+                      </a:solidFill>
+                      <a:prstDash val="solid"/>
+                      <a:round/>
+                      <a:headEnd type="none" w="med" len="med"/>
+                      <a:tailEnd type="none" w="med" len="med"/>
+                    </a:lnR>
+                    <a:lnT w="6350" cap="flat" cmpd="sng" algn="ctr">
+                      <a:solidFill>
+                        <a:srgbClr val="C9D6D3"/>
+                      </a:solidFill>
+                      <a:prstDash val="solid"/>
+                      <a:round/>
+                      <a:headEnd type="none" w="med" len="med"/>
+                      <a:tailEnd type="none" w="med" len="med"/>
+                    </a:lnT>
+                    <a:lnB w="6350" cap="flat" cmpd="sng" algn="ctr">
+                      <a:solidFill>
+                        <a:srgbClr val="C9D6D3"/>
+                      </a:solidFill>
+                      <a:prstDash val="solid"/>
+                      <a:round/>
+                      <a:headEnd type="none" w="med" len="med"/>
+                      <a:tailEnd type="none" w="med" len="med"/>
+                    </a:lnB>
+                    <a:solidFill>
+                      <a:srgbClr val="FFFFFF"/>
+                    </a:solidFill>
+                  </a:tcPr>
+                </a:tc>
+                <a:tc>
+                  <a:txBody>
+                    <a:bodyPr/>
+                    <a:lstStyle/>
+                    <a:p>
+                      <a:pPr algn="l" indent="0" marL="0">
+                        <a:buNone/>
+                      </a:pPr>
+                      <a:r>
+                        <a:rPr lang="en-US" sz="1200" dirty="0">
+                          <a:solidFill>
+                            <a:schemeClr val="tx1"/>
+                          </a:solidFill>
+                        </a:rPr>
+                        <a:t>45,6</a:t>
+                      </a:r>
+                      <a:endParaRPr lang="en-US" sz="1200" dirty="0"/>
+                    </a:p>
+                  </a:txBody>
+                  <a:tcPr marL="63500" marR="63500" marT="38100" marB="38100" anchor="ctr">
+                    <a:lnL w="6350" cap="flat" cmpd="sng" algn="ctr">
+                      <a:solidFill>
+                        <a:srgbClr val="C9D6D3"/>
+                      </a:solidFill>
+                      <a:prstDash val="solid"/>
+                      <a:round/>
+                      <a:headEnd type="none" w="med" len="med"/>
+                      <a:tailEnd type="none" w="med" len="med"/>
+                    </a:lnL>
+                    <a:lnR w="6350" cap="flat" cmpd="sng" algn="ctr">
+                      <a:solidFill>
+                        <a:srgbClr val="C9D6D3"/>
+                      </a:solidFill>
+                      <a:prstDash val="solid"/>
+                      <a:round/>
+                      <a:headEnd type="none" w="med" len="med"/>
+                      <a:tailEnd type="none" w="med" len="med"/>
+                    </a:lnR>
+                    <a:lnT w="6350" cap="flat" cmpd="sng" algn="ctr">
+                      <a:solidFill>
+                        <a:srgbClr val="C9D6D3"/>
+                      </a:solidFill>
+                      <a:prstDash val="solid"/>
+                      <a:round/>
+                      <a:headEnd type="none" w="med" len="med"/>
+                      <a:tailEnd type="none" w="med" len="med"/>
+                    </a:lnT>
+                    <a:lnB w="6350" cap="flat" cmpd="sng" algn="ctr">
+                      <a:solidFill>
+                        <a:srgbClr val="C9D6D3"/>
+                      </a:solidFill>
+                      <a:prstDash val="solid"/>
+                      <a:round/>
+                      <a:headEnd type="none" w="med" len="med"/>
+                      <a:tailEnd type="none" w="med" len="med"/>
+                    </a:lnB>
+                    <a:solidFill>
+                      <a:srgbClr val="FFFFFF"/>
+                    </a:solidFill>
+                  </a:tcPr>
+                </a:tc>
+              </a:tr>
+              <a:tr h="502920">
+                <a:tc>
+                  <a:txBody>
+                    <a:bodyPr/>
+                    <a:lstStyle/>
+                    <a:p>
+                      <a:pPr algn="l" indent="0" marL="0">
+                        <a:buNone/>
+                      </a:pPr>
+                      <a:r>
+                        <a:rPr lang="en-US" sz="1200" b="1" dirty="0">
+                          <a:solidFill>
+                            <a:schemeClr val="tx1"/>
+                          </a:solidFill>
+                        </a:rPr>
+                        <a:t>Розбалансування очікувань</a:t>
+                      </a:r>
+                      <a:endParaRPr lang="en-US" sz="1200" dirty="0"/>
+                    </a:p>
+                  </a:txBody>
+                  <a:tcPr marL="63500" marR="63500" marT="38100" marB="38100" anchor="ctr">
+                    <a:lnL w="6350" cap="flat" cmpd="sng" algn="ctr">
+                      <a:solidFill>
+                        <a:srgbClr val="C9D6D3"/>
+                      </a:solidFill>
+                      <a:prstDash val="solid"/>
+                      <a:round/>
+                      <a:headEnd type="none" w="med" len="med"/>
+                      <a:tailEnd type="none" w="med" len="med"/>
+                    </a:lnL>
+                    <a:lnR w="6350" cap="flat" cmpd="sng" algn="ctr">
+                      <a:solidFill>
+                        <a:srgbClr val="C9D6D3"/>
+                      </a:solidFill>
+                      <a:prstDash val="solid"/>
+                      <a:round/>
+                      <a:headEnd type="none" w="med" len="med"/>
+                      <a:tailEnd type="none" w="med" len="med"/>
+                    </a:lnR>
+                    <a:lnT w="6350" cap="flat" cmpd="sng" algn="ctr">
+                      <a:solidFill>
+                        <a:srgbClr val="C9D6D3"/>
+                      </a:solidFill>
+                      <a:prstDash val="solid"/>
+                      <a:round/>
+                      <a:headEnd type="none" w="med" len="med"/>
+                      <a:tailEnd type="none" w="med" len="med"/>
+                    </a:lnT>
+                    <a:lnB w="6350" cap="flat" cmpd="sng" algn="ctr">
+                      <a:solidFill>
+                        <a:srgbClr val="C9D6D3"/>
+                      </a:solidFill>
+                      <a:prstDash val="solid"/>
+                      <a:round/>
+                      <a:headEnd type="none" w="med" len="med"/>
+                      <a:tailEnd type="none" w="med" len="med"/>
+                    </a:lnB>
+                    <a:solidFill>
+                      <a:srgbClr val="EAF1EF"/>
+                    </a:solidFill>
+                  </a:tcPr>
+                </a:tc>
+                <a:tc>
+                  <a:txBody>
+                    <a:bodyPr/>
+                    <a:lstStyle/>
+                    <a:p>
+                      <a:pPr algn="l" indent="0" marL="0">
+                        <a:buNone/>
+                      </a:pPr>
+                      <a:r>
+                        <a:rPr lang="en-US" sz="1200" dirty="0">
+                          <a:solidFill>
+                            <a:schemeClr val="tx1"/>
+                          </a:solidFill>
+                        </a:rPr>
+                        <a:t>Базова інфляція вища на 1 в. п. (кв/кв, у річному вимірі) щокварталу 2027 р.</a:t>
+                      </a:r>
+                      <a:endParaRPr lang="en-US" sz="1200" dirty="0"/>
+                    </a:p>
+                  </a:txBody>
+                  <a:tcPr marL="63500" marR="63500" marT="38100" marB="38100" anchor="ctr">
+                    <a:lnL w="6350" cap="flat" cmpd="sng" algn="ctr">
+                      <a:solidFill>
+                        <a:srgbClr val="C9D6D3"/>
+                      </a:solidFill>
+                      <a:prstDash val="solid"/>
+                      <a:round/>
+                      <a:headEnd type="none" w="med" len="med"/>
+                      <a:tailEnd type="none" w="med" len="med"/>
+                    </a:lnL>
+                    <a:lnR w="6350" cap="flat" cmpd="sng" algn="ctr">
+                      <a:solidFill>
+                        <a:srgbClr val="C9D6D3"/>
+                      </a:solidFill>
+                      <a:prstDash val="solid"/>
+                      <a:round/>
+                      <a:headEnd type="none" w="med" len="med"/>
+                      <a:tailEnd type="none" w="med" len="med"/>
+                    </a:lnR>
+                    <a:lnT w="6350" cap="flat" cmpd="sng" algn="ctr">
+                      <a:solidFill>
+                        <a:srgbClr val="C9D6D3"/>
+                      </a:solidFill>
+                      <a:prstDash val="solid"/>
+                      <a:round/>
+                      <a:headEnd type="none" w="med" len="med"/>
+                      <a:tailEnd type="none" w="med" len="med"/>
+                    </a:lnT>
+                    <a:lnB w="6350" cap="flat" cmpd="sng" algn="ctr">
+                      <a:solidFill>
+                        <a:srgbClr val="C9D6D3"/>
+                      </a:solidFill>
+                      <a:prstDash val="solid"/>
+                      <a:round/>
+                      <a:headEnd type="none" w="med" len="med"/>
+                      <a:tailEnd type="none" w="med" len="med"/>
+                    </a:lnB>
+                    <a:solidFill>
+                      <a:srgbClr val="EAF1EF"/>
+                    </a:solidFill>
+                  </a:tcPr>
+                </a:tc>
+                <a:tc>
+                  <a:txBody>
+                    <a:bodyPr/>
+                    <a:lstStyle/>
+                    <a:p>
+                      <a:pPr algn="l" indent="0" marL="0">
+                        <a:buNone/>
+                      </a:pPr>
+                      <a:r>
+                        <a:rPr lang="en-US" sz="1200" dirty="0">
+                          <a:solidFill>
+                            <a:schemeClr val="tx1"/>
+                          </a:solidFill>
+                        </a:rPr>
+                        <a:t>7,4</a:t>
+                      </a:r>
+                      <a:endParaRPr lang="en-US" sz="1200" dirty="0"/>
+                    </a:p>
+                  </a:txBody>
+                  <a:tcPr marL="63500" marR="63500" marT="38100" marB="38100" anchor="ctr">
+                    <a:lnL w="6350" cap="flat" cmpd="sng" algn="ctr">
+                      <a:solidFill>
+                        <a:srgbClr val="C9D6D3"/>
+                      </a:solidFill>
+                      <a:prstDash val="solid"/>
+                      <a:round/>
+                      <a:headEnd type="none" w="med" len="med"/>
+                      <a:tailEnd type="none" w="med" len="med"/>
+                    </a:lnL>
+                    <a:lnR w="6350" cap="flat" cmpd="sng" algn="ctr">
+                      <a:solidFill>
+                        <a:srgbClr val="C9D6D3"/>
+                      </a:solidFill>
+                      <a:prstDash val="solid"/>
+                      <a:round/>
+                      <a:headEnd type="none" w="med" len="med"/>
+                      <a:tailEnd type="none" w="med" len="med"/>
+                    </a:lnR>
+                    <a:lnT w="6350" cap="flat" cmpd="sng" algn="ctr">
+                      <a:solidFill>
+                        <a:srgbClr val="C9D6D3"/>
+                      </a:solidFill>
+                      <a:prstDash val="solid"/>
+                      <a:round/>
+                      <a:headEnd type="none" w="med" len="med"/>
+                      <a:tailEnd type="none" w="med" len="med"/>
+                    </a:lnT>
+                    <a:lnB w="6350" cap="flat" cmpd="sng" algn="ctr">
+                      <a:solidFill>
+                        <a:srgbClr val="C9D6D3"/>
+                      </a:solidFill>
+                      <a:prstDash val="solid"/>
+                      <a:round/>
+                      <a:headEnd type="none" w="med" len="med"/>
+                      <a:tailEnd type="none" w="med" len="med"/>
+                    </a:lnB>
+                    <a:solidFill>
+                      <a:srgbClr val="EAF1EF"/>
+                    </a:solidFill>
+                  </a:tcPr>
+                </a:tc>
+                <a:tc>
+                  <a:txBody>
+                    <a:bodyPr/>
+                    <a:lstStyle/>
+                    <a:p>
+                      <a:pPr algn="l" indent="0" marL="0">
+                        <a:buNone/>
+                      </a:pPr>
+                      <a:r>
+                        <a:rPr lang="en-US" sz="1200" dirty="0">
+                          <a:solidFill>
+                            <a:schemeClr val="tx1"/>
+                          </a:solidFill>
+                        </a:rPr>
+                        <a:t>12,4</a:t>
+                      </a:r>
+                      <a:endParaRPr lang="en-US" sz="1200" dirty="0"/>
+                    </a:p>
+                  </a:txBody>
+                  <a:tcPr marL="63500" marR="63500" marT="38100" marB="38100" anchor="ctr">
+                    <a:lnL w="6350" cap="flat" cmpd="sng" algn="ctr">
+                      <a:solidFill>
+                        <a:srgbClr val="C9D6D3"/>
+                      </a:solidFill>
+                      <a:prstDash val="solid"/>
+                      <a:round/>
+                      <a:headEnd type="none" w="med" len="med"/>
+                      <a:tailEnd type="none" w="med" len="med"/>
+                    </a:lnL>
+                    <a:lnR w="6350" cap="flat" cmpd="sng" algn="ctr">
+                      <a:solidFill>
+                        <a:srgbClr val="C9D6D3"/>
+                      </a:solidFill>
+                      <a:prstDash val="solid"/>
+                      <a:round/>
+                      <a:headEnd type="none" w="med" len="med"/>
+                      <a:tailEnd type="none" w="med" len="med"/>
+                    </a:lnR>
+                    <a:lnT w="6350" cap="flat" cmpd="sng" algn="ctr">
+                      <a:solidFill>
+                        <a:srgbClr val="C9D6D3"/>
+                      </a:solidFill>
+                      <a:prstDash val="solid"/>
+                      <a:round/>
+                      <a:headEnd type="none" w="med" len="med"/>
+                      <a:tailEnd type="none" w="med" len="med"/>
+                    </a:lnT>
+                    <a:lnB w="6350" cap="flat" cmpd="sng" algn="ctr">
+                      <a:solidFill>
+                        <a:srgbClr val="C9D6D3"/>
+                      </a:solidFill>
+                      <a:prstDash val="solid"/>
+                      <a:round/>
+                      <a:headEnd type="none" w="med" len="med"/>
+                      <a:tailEnd type="none" w="med" len="med"/>
+                    </a:lnB>
+                    <a:solidFill>
+                      <a:srgbClr val="EAF1EF"/>
+                    </a:solidFill>
+                  </a:tcPr>
+                </a:tc>
+                <a:tc>
+                  <a:txBody>
+                    <a:bodyPr/>
+                    <a:lstStyle/>
+                    <a:p>
+                      <a:pPr algn="l" indent="0" marL="0">
+                        <a:buNone/>
+                      </a:pPr>
+                      <a:r>
+                        <a:rPr lang="en-US" sz="1200" dirty="0">
+                          <a:solidFill>
+                            <a:schemeClr val="tx1"/>
+                          </a:solidFill>
+                        </a:rPr>
                         <a:t>18,2</a:t>
                       </a:r>
                       <a:endParaRPr lang="en-US" sz="1200" dirty="0"/>
@@ -28132,7 +28517,7 @@
                       <a:tailEnd type="none" w="med" len="med"/>
                     </a:lnB>
                     <a:solidFill>
-                      <a:srgbClr val="FFFFFF"/>
+                      <a:srgbClr val="EAF1EF"/>
                     </a:solidFill>
                   </a:tcPr>
                 </a:tc>
@@ -28193,7 +28578,7 @@
                       <a:tailEnd type="none" w="med" len="med"/>
                     </a:lnB>
                     <a:solidFill>
-                      <a:srgbClr val="FFFFFF"/>
+                      <a:srgbClr val="EAF1EF"/>
                     </a:solidFill>
                   </a:tcPr>
                 </a:tc>
@@ -28256,7 +28641,7 @@
                       <a:tailEnd type="none" w="med" len="med"/>
                     </a:lnB>
                     <a:solidFill>
-                      <a:srgbClr val="EAF1EF"/>
+                      <a:srgbClr val="FFFFFF"/>
                     </a:solidFill>
                   </a:tcPr>
                 </a:tc>
@@ -28317,7 +28702,7 @@
                       <a:tailEnd type="none" w="med" len="med"/>
                     </a:lnB>
                     <a:solidFill>
-                      <a:srgbClr val="EAF1EF"/>
+                      <a:srgbClr val="FFFFFF"/>
                     </a:solidFill>
                   </a:tcPr>
                 </a:tc>
@@ -28335,7 +28720,7 @@
                             <a:schemeClr val="tx1"/>
                           </a:solidFill>
                         </a:rPr>
-                        <a:t>5,7</a:t>
+                        <a:t>5,6</a:t>
                       </a:r>
                       <a:endParaRPr lang="en-US" sz="1200" dirty="0"/>
                     </a:p>
@@ -28378,7 +28763,7 @@
                       <a:tailEnd type="none" w="med" len="med"/>
                     </a:lnB>
                     <a:solidFill>
-                      <a:srgbClr val="EAF1EF"/>
+                      <a:srgbClr val="FFFFFF"/>
                     </a:solidFill>
                   </a:tcPr>
                 </a:tc>
@@ -28396,7 +28781,7 @@
                             <a:schemeClr val="tx1"/>
                           </a:solidFill>
                         </a:rPr>
-                        <a:t>11,9</a:t>
+                        <a:t>11,5</a:t>
                       </a:r>
                       <a:endParaRPr lang="en-US" sz="1200" dirty="0"/>
                     </a:p>
@@ -28439,7 +28824,7 @@
                       <a:tailEnd type="none" w="med" len="med"/>
                     </a:lnB>
                     <a:solidFill>
-                      <a:srgbClr val="EAF1EF"/>
+                      <a:srgbClr val="FFFFFF"/>
                     </a:solidFill>
                   </a:tcPr>
                 </a:tc>
@@ -28457,7 +28842,7 @@
                             <a:schemeClr val="tx1"/>
                           </a:solidFill>
                         </a:rPr>
-                        <a:t>17,3</a:t>
+                        <a:t>17,1</a:t>
                       </a:r>
                       <a:endParaRPr lang="en-US" sz="1200" dirty="0"/>
                     </a:p>
@@ -28500,7 +28885,7 @@
                       <a:tailEnd type="none" w="med" len="med"/>
                     </a:lnB>
                     <a:solidFill>
-                      <a:srgbClr val="EAF1EF"/>
+                      <a:srgbClr val="FFFFFF"/>
                     </a:solidFill>
                   </a:tcPr>
                 </a:tc>
@@ -28561,7 +28946,7 @@
                       <a:tailEnd type="none" w="med" len="med"/>
                     </a:lnB>
                     <a:solidFill>
-                      <a:srgbClr val="EAF1EF"/>
+                      <a:srgbClr val="FFFFFF"/>
                     </a:solidFill>
                   </a:tcPr>
                 </a:tc>
@@ -28678,7 +29063,7 @@
                 <a:ea typeface="Cambria" pitchFamily="34" charset="-122"/>
                 <a:cs typeface="Cambria" pitchFamily="34" charset="-120"/>
               </a:rPr>
-              <a:t>Додаток 9. Стійкість рішення: під ризиками найменші очікувані втрати — 16,5–17%</a:t>
+              <a:t>Додаток 9. Стійкість рішення: під ризиками найменші очікувані втрати — 17%</a:t>
             </a:r>
             <a:endParaRPr lang="en-US" sz="2600" dirty="0"/>
           </a:p>
@@ -29220,7 +29605,7 @@
                             <a:schemeClr val="tx1"/>
                           </a:solidFill>
                         </a:rPr>
-                        <a:t>33 / 40</a:t>
+                        <a:t>28 / 35</a:t>
                       </a:r>
                       <a:endParaRPr lang="en-US" sz="1100" dirty="0"/>
                     </a:p>
@@ -30997,7 +31382,7 @@
                             <a:schemeClr val="tx1"/>
                           </a:solidFill>
                         </a:rPr>
-                        <a:t>116</a:t>
+                        <a:t>120</a:t>
                       </a:r>
                       <a:endParaRPr lang="en-US" sz="1100" dirty="0"/>
                     </a:p>
@@ -31058,7 +31443,7 @@
                             <a:schemeClr val="tx1"/>
                           </a:solidFill>
                         </a:rPr>
-                        <a:t>115</a:t>
+                        <a:t>118</a:t>
                       </a:r>
                       <a:endParaRPr lang="en-US" sz="1100" dirty="0"/>
                     </a:p>
@@ -31119,7 +31504,7 @@
                             <a:schemeClr val="tx1"/>
                           </a:solidFill>
                         </a:rPr>
-                        <a:t>115</a:t>
+                        <a:t>118</a:t>
                       </a:r>
                       <a:endParaRPr lang="en-US" sz="1100" dirty="0"/>
                     </a:p>
@@ -31180,7 +31565,7 @@
                             <a:schemeClr val="tx1"/>
                           </a:solidFill>
                         </a:rPr>
-                        <a:t>117</a:t>
+                        <a:t>119</a:t>
                       </a:r>
                       <a:endParaRPr lang="en-US" sz="1100" dirty="0"/>
                     </a:p>
@@ -31426,7 +31811,7 @@
                             <a:schemeClr val="tx1"/>
                           </a:solidFill>
                         </a:rPr>
-                        <a:t>119</a:t>
+                        <a:t>166</a:t>
                       </a:r>
                       <a:endParaRPr lang="en-US" sz="1100" dirty="0"/>
                     </a:p>
@@ -31487,7 +31872,7 @@
                             <a:schemeClr val="tx1"/>
                           </a:solidFill>
                         </a:rPr>
-                        <a:t>115</a:t>
+                        <a:t>159</a:t>
                       </a:r>
                       <a:endParaRPr lang="en-US" sz="1100" dirty="0"/>
                     </a:p>
@@ -31548,7 +31933,7 @@
                             <a:schemeClr val="tx1"/>
                           </a:solidFill>
                         </a:rPr>
-                        <a:t>113</a:t>
+                        <a:t>154</a:t>
                       </a:r>
                       <a:endParaRPr lang="en-US" sz="1100" dirty="0"/>
                     </a:p>
@@ -31609,7 +31994,1662 @@
                             <a:schemeClr val="tx1"/>
                           </a:solidFill>
                         </a:rPr>
-                        <a:t>111</a:t>
+                        <a:t>150</a:t>
+                      </a:r>
+                      <a:endParaRPr lang="en-US" sz="1100" dirty="0"/>
+                    </a:p>
+                  </a:txBody>
+                  <a:tcPr marL="63500" marR="63500" marT="38100" marB="38100" anchor="ctr">
+                    <a:lnL w="6350" cap="flat" cmpd="sng" algn="ctr">
+                      <a:solidFill>
+                        <a:srgbClr val="C9D6D3"/>
+                      </a:solidFill>
+                      <a:prstDash val="solid"/>
+                      <a:round/>
+                      <a:headEnd type="none" w="med" len="med"/>
+                      <a:tailEnd type="none" w="med" len="med"/>
+                    </a:lnL>
+                    <a:lnR w="6350" cap="flat" cmpd="sng" algn="ctr">
+                      <a:solidFill>
+                        <a:srgbClr val="C9D6D3"/>
+                      </a:solidFill>
+                      <a:prstDash val="solid"/>
+                      <a:round/>
+                      <a:headEnd type="none" w="med" len="med"/>
+                      <a:tailEnd type="none" w="med" len="med"/>
+                    </a:lnR>
+                    <a:lnT w="6350" cap="flat" cmpd="sng" algn="ctr">
+                      <a:solidFill>
+                        <a:srgbClr val="C9D6D3"/>
+                      </a:solidFill>
+                      <a:prstDash val="solid"/>
+                      <a:round/>
+                      <a:headEnd type="none" w="med" len="med"/>
+                      <a:tailEnd type="none" w="med" len="med"/>
+                    </a:lnT>
+                    <a:lnB w="6350" cap="flat" cmpd="sng" algn="ctr">
+                      <a:solidFill>
+                        <a:srgbClr val="C9D6D3"/>
+                      </a:solidFill>
+                      <a:prstDash val="solid"/>
+                      <a:round/>
+                      <a:headEnd type="none" w="med" len="med"/>
+                      <a:tailEnd type="none" w="med" len="med"/>
+                    </a:lnB>
+                    <a:solidFill>
+                      <a:srgbClr val="EAF1EF"/>
+                    </a:solidFill>
+                  </a:tcPr>
+                </a:tc>
+                <a:tc>
+                  <a:txBody>
+                    <a:bodyPr/>
+                    <a:lstStyle/>
+                    <a:p>
+                      <a:pPr algn="l" indent="0" marL="0">
+                        <a:buNone/>
+                      </a:pPr>
+                      <a:r>
+                        <a:rPr lang="en-US" sz="1100" dirty="0">
+                          <a:solidFill>
+                            <a:schemeClr val="tx1"/>
+                          </a:solidFill>
+                        </a:rPr>
+                        <a:t>147</a:t>
+                      </a:r>
+                      <a:endParaRPr lang="en-US" sz="1100" dirty="0"/>
+                    </a:p>
+                  </a:txBody>
+                  <a:tcPr marL="63500" marR="63500" marT="38100" marB="38100" anchor="ctr">
+                    <a:lnL w="6350" cap="flat" cmpd="sng" algn="ctr">
+                      <a:solidFill>
+                        <a:srgbClr val="C9D6D3"/>
+                      </a:solidFill>
+                      <a:prstDash val="solid"/>
+                      <a:round/>
+                      <a:headEnd type="none" w="med" len="med"/>
+                      <a:tailEnd type="none" w="med" len="med"/>
+                    </a:lnL>
+                    <a:lnR w="6350" cap="flat" cmpd="sng" algn="ctr">
+                      <a:solidFill>
+                        <a:srgbClr val="C9D6D3"/>
+                      </a:solidFill>
+                      <a:prstDash val="solid"/>
+                      <a:round/>
+                      <a:headEnd type="none" w="med" len="med"/>
+                      <a:tailEnd type="none" w="med" len="med"/>
+                    </a:lnR>
+                    <a:lnT w="6350" cap="flat" cmpd="sng" algn="ctr">
+                      <a:solidFill>
+                        <a:srgbClr val="C9D6D3"/>
+                      </a:solidFill>
+                      <a:prstDash val="solid"/>
+                      <a:round/>
+                      <a:headEnd type="none" w="med" len="med"/>
+                      <a:tailEnd type="none" w="med" len="med"/>
+                    </a:lnT>
+                    <a:lnB w="6350" cap="flat" cmpd="sng" algn="ctr">
+                      <a:solidFill>
+                        <a:srgbClr val="C9D6D3"/>
+                      </a:solidFill>
+                      <a:prstDash val="solid"/>
+                      <a:round/>
+                      <a:headEnd type="none" w="med" len="med"/>
+                      <a:tailEnd type="none" w="med" len="med"/>
+                    </a:lnB>
+                    <a:solidFill>
+                      <a:srgbClr val="EAF1EF"/>
+                    </a:solidFill>
+                  </a:tcPr>
+                </a:tc>
+              </a:tr>
+              <a:tr h="274320">
+                <a:tc>
+                  <a:txBody>
+                    <a:bodyPr/>
+                    <a:lstStyle/>
+                    <a:p>
+                      <a:pPr algn="l" indent="0" marL="0">
+                        <a:buNone/>
+                      </a:pPr>
+                      <a:r>
+                        <a:rPr lang="en-US" sz="1100" b="1" dirty="0">
+                          <a:solidFill>
+                            <a:schemeClr val="tx1"/>
+                          </a:solidFill>
+                        </a:rPr>
+                        <a:t>Євро знову 1,16 $</a:t>
+                      </a:r>
+                      <a:endParaRPr lang="en-US" sz="1100" dirty="0"/>
+                    </a:p>
+                  </a:txBody>
+                  <a:tcPr marL="63500" marR="63500" marT="38100" marB="38100" anchor="ctr">
+                    <a:lnL w="6350" cap="flat" cmpd="sng" algn="ctr">
+                      <a:solidFill>
+                        <a:srgbClr val="C9D6D3"/>
+                      </a:solidFill>
+                      <a:prstDash val="solid"/>
+                      <a:round/>
+                      <a:headEnd type="none" w="med" len="med"/>
+                      <a:tailEnd type="none" w="med" len="med"/>
+                    </a:lnL>
+                    <a:lnR w="6350" cap="flat" cmpd="sng" algn="ctr">
+                      <a:solidFill>
+                        <a:srgbClr val="C9D6D3"/>
+                      </a:solidFill>
+                      <a:prstDash val="solid"/>
+                      <a:round/>
+                      <a:headEnd type="none" w="med" len="med"/>
+                      <a:tailEnd type="none" w="med" len="med"/>
+                    </a:lnR>
+                    <a:lnT w="6350" cap="flat" cmpd="sng" algn="ctr">
+                      <a:solidFill>
+                        <a:srgbClr val="C9D6D3"/>
+                      </a:solidFill>
+                      <a:prstDash val="solid"/>
+                      <a:round/>
+                      <a:headEnd type="none" w="med" len="med"/>
+                      <a:tailEnd type="none" w="med" len="med"/>
+                    </a:lnT>
+                    <a:lnB w="6350" cap="flat" cmpd="sng" algn="ctr">
+                      <a:solidFill>
+                        <a:srgbClr val="C9D6D3"/>
+                      </a:solidFill>
+                      <a:prstDash val="solid"/>
+                      <a:round/>
+                      <a:headEnd type="none" w="med" len="med"/>
+                      <a:tailEnd type="none" w="med" len="med"/>
+                    </a:lnB>
+                    <a:solidFill>
+                      <a:srgbClr val="FFFFFF"/>
+                    </a:solidFill>
+                  </a:tcPr>
+                </a:tc>
+                <a:tc>
+                  <a:txBody>
+                    <a:bodyPr/>
+                    <a:lstStyle/>
+                    <a:p>
+                      <a:pPr algn="l" indent="0" marL="0">
+                        <a:buNone/>
+                      </a:pPr>
+                      <a:r>
+                        <a:rPr lang="en-US" sz="1100" dirty="0">
+                          <a:solidFill>
+                            <a:schemeClr val="tx1"/>
+                          </a:solidFill>
+                        </a:rPr>
+                        <a:t>5 / 5</a:t>
+                      </a:r>
+                      <a:endParaRPr lang="en-US" sz="1100" dirty="0"/>
+                    </a:p>
+                  </a:txBody>
+                  <a:tcPr marL="63500" marR="63500" marT="38100" marB="38100" anchor="ctr">
+                    <a:lnL w="6350" cap="flat" cmpd="sng" algn="ctr">
+                      <a:solidFill>
+                        <a:srgbClr val="C9D6D3"/>
+                      </a:solidFill>
+                      <a:prstDash val="solid"/>
+                      <a:round/>
+                      <a:headEnd type="none" w="med" len="med"/>
+                      <a:tailEnd type="none" w="med" len="med"/>
+                    </a:lnL>
+                    <a:lnR w="6350" cap="flat" cmpd="sng" algn="ctr">
+                      <a:solidFill>
+                        <a:srgbClr val="C9D6D3"/>
+                      </a:solidFill>
+                      <a:prstDash val="solid"/>
+                      <a:round/>
+                      <a:headEnd type="none" w="med" len="med"/>
+                      <a:tailEnd type="none" w="med" len="med"/>
+                    </a:lnR>
+                    <a:lnT w="6350" cap="flat" cmpd="sng" algn="ctr">
+                      <a:solidFill>
+                        <a:srgbClr val="C9D6D3"/>
+                      </a:solidFill>
+                      <a:prstDash val="solid"/>
+                      <a:round/>
+                      <a:headEnd type="none" w="med" len="med"/>
+                      <a:tailEnd type="none" w="med" len="med"/>
+                    </a:lnT>
+                    <a:lnB w="6350" cap="flat" cmpd="sng" algn="ctr">
+                      <a:solidFill>
+                        <a:srgbClr val="C9D6D3"/>
+                      </a:solidFill>
+                      <a:prstDash val="solid"/>
+                      <a:round/>
+                      <a:headEnd type="none" w="med" len="med"/>
+                      <a:tailEnd type="none" w="med" len="med"/>
+                    </a:lnB>
+                    <a:solidFill>
+                      <a:srgbClr val="FFFFFF"/>
+                    </a:solidFill>
+                  </a:tcPr>
+                </a:tc>
+                <a:tc>
+                  <a:txBody>
+                    <a:bodyPr/>
+                    <a:lstStyle/>
+                    <a:p>
+                      <a:pPr algn="l" indent="0" marL="0">
+                        <a:buNone/>
+                      </a:pPr>
+                      <a:r>
+                        <a:rPr lang="en-US" sz="1100" dirty="0">
+                          <a:solidFill>
+                            <a:schemeClr val="tx1"/>
+                          </a:solidFill>
+                        </a:rPr>
+                        <a:t>168</a:t>
+                      </a:r>
+                      <a:endParaRPr lang="en-US" sz="1100" dirty="0"/>
+                    </a:p>
+                  </a:txBody>
+                  <a:tcPr marL="63500" marR="63500" marT="38100" marB="38100" anchor="ctr">
+                    <a:lnL w="6350" cap="flat" cmpd="sng" algn="ctr">
+                      <a:solidFill>
+                        <a:srgbClr val="C9D6D3"/>
+                      </a:solidFill>
+                      <a:prstDash val="solid"/>
+                      <a:round/>
+                      <a:headEnd type="none" w="med" len="med"/>
+                      <a:tailEnd type="none" w="med" len="med"/>
+                    </a:lnL>
+                    <a:lnR w="6350" cap="flat" cmpd="sng" algn="ctr">
+                      <a:solidFill>
+                        <a:srgbClr val="C9D6D3"/>
+                      </a:solidFill>
+                      <a:prstDash val="solid"/>
+                      <a:round/>
+                      <a:headEnd type="none" w="med" len="med"/>
+                      <a:tailEnd type="none" w="med" len="med"/>
+                    </a:lnR>
+                    <a:lnT w="6350" cap="flat" cmpd="sng" algn="ctr">
+                      <a:solidFill>
+                        <a:srgbClr val="C9D6D3"/>
+                      </a:solidFill>
+                      <a:prstDash val="solid"/>
+                      <a:round/>
+                      <a:headEnd type="none" w="med" len="med"/>
+                      <a:tailEnd type="none" w="med" len="med"/>
+                    </a:lnT>
+                    <a:lnB w="6350" cap="flat" cmpd="sng" algn="ctr">
+                      <a:solidFill>
+                        <a:srgbClr val="C9D6D3"/>
+                      </a:solidFill>
+                      <a:prstDash val="solid"/>
+                      <a:round/>
+                      <a:headEnd type="none" w="med" len="med"/>
+                      <a:tailEnd type="none" w="med" len="med"/>
+                    </a:lnB>
+                    <a:solidFill>
+                      <a:srgbClr val="FFFFFF"/>
+                    </a:solidFill>
+                  </a:tcPr>
+                </a:tc>
+                <a:tc>
+                  <a:txBody>
+                    <a:bodyPr/>
+                    <a:lstStyle/>
+                    <a:p>
+                      <a:pPr algn="l" indent="0" marL="0">
+                        <a:buNone/>
+                      </a:pPr>
+                      <a:r>
+                        <a:rPr lang="en-US" sz="1100" dirty="0">
+                          <a:solidFill>
+                            <a:schemeClr val="tx1"/>
+                          </a:solidFill>
+                        </a:rPr>
+                        <a:t>162</a:t>
+                      </a:r>
+                      <a:endParaRPr lang="en-US" sz="1100" dirty="0"/>
+                    </a:p>
+                  </a:txBody>
+                  <a:tcPr marL="63500" marR="63500" marT="38100" marB="38100" anchor="ctr">
+                    <a:lnL w="6350" cap="flat" cmpd="sng" algn="ctr">
+                      <a:solidFill>
+                        <a:srgbClr val="C9D6D3"/>
+                      </a:solidFill>
+                      <a:prstDash val="solid"/>
+                      <a:round/>
+                      <a:headEnd type="none" w="med" len="med"/>
+                      <a:tailEnd type="none" w="med" len="med"/>
+                    </a:lnL>
+                    <a:lnR w="6350" cap="flat" cmpd="sng" algn="ctr">
+                      <a:solidFill>
+                        <a:srgbClr val="C9D6D3"/>
+                      </a:solidFill>
+                      <a:prstDash val="solid"/>
+                      <a:round/>
+                      <a:headEnd type="none" w="med" len="med"/>
+                      <a:tailEnd type="none" w="med" len="med"/>
+                    </a:lnR>
+                    <a:lnT w="6350" cap="flat" cmpd="sng" algn="ctr">
+                      <a:solidFill>
+                        <a:srgbClr val="C9D6D3"/>
+                      </a:solidFill>
+                      <a:prstDash val="solid"/>
+                      <a:round/>
+                      <a:headEnd type="none" w="med" len="med"/>
+                      <a:tailEnd type="none" w="med" len="med"/>
+                    </a:lnT>
+                    <a:lnB w="6350" cap="flat" cmpd="sng" algn="ctr">
+                      <a:solidFill>
+                        <a:srgbClr val="C9D6D3"/>
+                      </a:solidFill>
+                      <a:prstDash val="solid"/>
+                      <a:round/>
+                      <a:headEnd type="none" w="med" len="med"/>
+                      <a:tailEnd type="none" w="med" len="med"/>
+                    </a:lnB>
+                    <a:solidFill>
+                      <a:srgbClr val="FFFFFF"/>
+                    </a:solidFill>
+                  </a:tcPr>
+                </a:tc>
+                <a:tc>
+                  <a:txBody>
+                    <a:bodyPr/>
+                    <a:lstStyle/>
+                    <a:p>
+                      <a:pPr algn="l" indent="0" marL="0">
+                        <a:buNone/>
+                      </a:pPr>
+                      <a:r>
+                        <a:rPr lang="en-US" sz="1100" dirty="0">
+                          <a:solidFill>
+                            <a:schemeClr val="tx1"/>
+                          </a:solidFill>
+                        </a:rPr>
+                        <a:t>157</a:t>
+                      </a:r>
+                      <a:endParaRPr lang="en-US" sz="1100" dirty="0"/>
+                    </a:p>
+                  </a:txBody>
+                  <a:tcPr marL="63500" marR="63500" marT="38100" marB="38100" anchor="ctr">
+                    <a:lnL w="6350" cap="flat" cmpd="sng" algn="ctr">
+                      <a:solidFill>
+                        <a:srgbClr val="C9D6D3"/>
+                      </a:solidFill>
+                      <a:prstDash val="solid"/>
+                      <a:round/>
+                      <a:headEnd type="none" w="med" len="med"/>
+                      <a:tailEnd type="none" w="med" len="med"/>
+                    </a:lnL>
+                    <a:lnR w="6350" cap="flat" cmpd="sng" algn="ctr">
+                      <a:solidFill>
+                        <a:srgbClr val="C9D6D3"/>
+                      </a:solidFill>
+                      <a:prstDash val="solid"/>
+                      <a:round/>
+                      <a:headEnd type="none" w="med" len="med"/>
+                      <a:tailEnd type="none" w="med" len="med"/>
+                    </a:lnR>
+                    <a:lnT w="6350" cap="flat" cmpd="sng" algn="ctr">
+                      <a:solidFill>
+                        <a:srgbClr val="C9D6D3"/>
+                      </a:solidFill>
+                      <a:prstDash val="solid"/>
+                      <a:round/>
+                      <a:headEnd type="none" w="med" len="med"/>
+                      <a:tailEnd type="none" w="med" len="med"/>
+                    </a:lnT>
+                    <a:lnB w="6350" cap="flat" cmpd="sng" algn="ctr">
+                      <a:solidFill>
+                        <a:srgbClr val="C9D6D3"/>
+                      </a:solidFill>
+                      <a:prstDash val="solid"/>
+                      <a:round/>
+                      <a:headEnd type="none" w="med" len="med"/>
+                      <a:tailEnd type="none" w="med" len="med"/>
+                    </a:lnB>
+                    <a:solidFill>
+                      <a:srgbClr val="FFFFFF"/>
+                    </a:solidFill>
+                  </a:tcPr>
+                </a:tc>
+                <a:tc>
+                  <a:txBody>
+                    <a:bodyPr/>
+                    <a:lstStyle/>
+                    <a:p>
+                      <a:pPr algn="l" indent="0" marL="0">
+                        <a:buNone/>
+                      </a:pPr>
+                      <a:r>
+                        <a:rPr lang="en-US" sz="1100" dirty="0">
+                          <a:solidFill>
+                            <a:schemeClr val="tx1"/>
+                          </a:solidFill>
+                        </a:rPr>
+                        <a:t>153</a:t>
+                      </a:r>
+                      <a:endParaRPr lang="en-US" sz="1100" dirty="0"/>
+                    </a:p>
+                  </a:txBody>
+                  <a:tcPr marL="63500" marR="63500" marT="38100" marB="38100" anchor="ctr">
+                    <a:lnL w="6350" cap="flat" cmpd="sng" algn="ctr">
+                      <a:solidFill>
+                        <a:srgbClr val="C9D6D3"/>
+                      </a:solidFill>
+                      <a:prstDash val="solid"/>
+                      <a:round/>
+                      <a:headEnd type="none" w="med" len="med"/>
+                      <a:tailEnd type="none" w="med" len="med"/>
+                    </a:lnL>
+                    <a:lnR w="6350" cap="flat" cmpd="sng" algn="ctr">
+                      <a:solidFill>
+                        <a:srgbClr val="C9D6D3"/>
+                      </a:solidFill>
+                      <a:prstDash val="solid"/>
+                      <a:round/>
+                      <a:headEnd type="none" w="med" len="med"/>
+                      <a:tailEnd type="none" w="med" len="med"/>
+                    </a:lnR>
+                    <a:lnT w="6350" cap="flat" cmpd="sng" algn="ctr">
+                      <a:solidFill>
+                        <a:srgbClr val="C9D6D3"/>
+                      </a:solidFill>
+                      <a:prstDash val="solid"/>
+                      <a:round/>
+                      <a:headEnd type="none" w="med" len="med"/>
+                      <a:tailEnd type="none" w="med" len="med"/>
+                    </a:lnT>
+                    <a:lnB w="6350" cap="flat" cmpd="sng" algn="ctr">
+                      <a:solidFill>
+                        <a:srgbClr val="C9D6D3"/>
+                      </a:solidFill>
+                      <a:prstDash val="solid"/>
+                      <a:round/>
+                      <a:headEnd type="none" w="med" len="med"/>
+                      <a:tailEnd type="none" w="med" len="med"/>
+                    </a:lnB>
+                    <a:solidFill>
+                      <a:srgbClr val="FFFFFF"/>
+                    </a:solidFill>
+                  </a:tcPr>
+                </a:tc>
+                <a:tc>
+                  <a:txBody>
+                    <a:bodyPr/>
+                    <a:lstStyle/>
+                    <a:p>
+                      <a:pPr algn="l" indent="0" marL="0">
+                        <a:buNone/>
+                      </a:pPr>
+                      <a:r>
+                        <a:rPr lang="en-US" sz="1100" dirty="0">
+                          <a:solidFill>
+                            <a:schemeClr val="tx1"/>
+                          </a:solidFill>
+                        </a:rPr>
+                        <a:t>151</a:t>
+                      </a:r>
+                      <a:endParaRPr lang="en-US" sz="1100" dirty="0"/>
+                    </a:p>
+                  </a:txBody>
+                  <a:tcPr marL="63500" marR="63500" marT="38100" marB="38100" anchor="ctr">
+                    <a:lnL w="6350" cap="flat" cmpd="sng" algn="ctr">
+                      <a:solidFill>
+                        <a:srgbClr val="C9D6D3"/>
+                      </a:solidFill>
+                      <a:prstDash val="solid"/>
+                      <a:round/>
+                      <a:headEnd type="none" w="med" len="med"/>
+                      <a:tailEnd type="none" w="med" len="med"/>
+                    </a:lnL>
+                    <a:lnR w="6350" cap="flat" cmpd="sng" algn="ctr">
+                      <a:solidFill>
+                        <a:srgbClr val="C9D6D3"/>
+                      </a:solidFill>
+                      <a:prstDash val="solid"/>
+                      <a:round/>
+                      <a:headEnd type="none" w="med" len="med"/>
+                      <a:tailEnd type="none" w="med" len="med"/>
+                    </a:lnR>
+                    <a:lnT w="6350" cap="flat" cmpd="sng" algn="ctr">
+                      <a:solidFill>
+                        <a:srgbClr val="C9D6D3"/>
+                      </a:solidFill>
+                      <a:prstDash val="solid"/>
+                      <a:round/>
+                      <a:headEnd type="none" w="med" len="med"/>
+                      <a:tailEnd type="none" w="med" len="med"/>
+                    </a:lnT>
+                    <a:lnB w="6350" cap="flat" cmpd="sng" algn="ctr">
+                      <a:solidFill>
+                        <a:srgbClr val="C9D6D3"/>
+                      </a:solidFill>
+                      <a:prstDash val="solid"/>
+                      <a:round/>
+                      <a:headEnd type="none" w="med" len="med"/>
+                      <a:tailEnd type="none" w="med" len="med"/>
+                    </a:lnB>
+                    <a:solidFill>
+                      <a:srgbClr val="FFFFFF"/>
+                    </a:solidFill>
+                  </a:tcPr>
+                </a:tc>
+              </a:tr>
+              <a:tr h="274320">
+                <a:tc>
+                  <a:txBody>
+                    <a:bodyPr/>
+                    <a:lstStyle/>
+                    <a:p>
+                      <a:pPr algn="l" indent="0" marL="0">
+                        <a:buNone/>
+                      </a:pPr>
+                      <a:r>
+                        <a:rPr lang="en-US" sz="1100" b="1" dirty="0">
+                          <a:solidFill>
+                            <a:schemeClr val="tx1"/>
+                          </a:solidFill>
+                        </a:rPr>
+                        <a:t>Розбалансування очікувань</a:t>
+                      </a:r>
+                      <a:endParaRPr lang="en-US" sz="1100" dirty="0"/>
+                    </a:p>
+                  </a:txBody>
+                  <a:tcPr marL="63500" marR="63500" marT="38100" marB="38100" anchor="ctr">
+                    <a:lnL w="6350" cap="flat" cmpd="sng" algn="ctr">
+                      <a:solidFill>
+                        <a:srgbClr val="C9D6D3"/>
+                      </a:solidFill>
+                      <a:prstDash val="solid"/>
+                      <a:round/>
+                      <a:headEnd type="none" w="med" len="med"/>
+                      <a:tailEnd type="none" w="med" len="med"/>
+                    </a:lnL>
+                    <a:lnR w="6350" cap="flat" cmpd="sng" algn="ctr">
+                      <a:solidFill>
+                        <a:srgbClr val="C9D6D3"/>
+                      </a:solidFill>
+                      <a:prstDash val="solid"/>
+                      <a:round/>
+                      <a:headEnd type="none" w="med" len="med"/>
+                      <a:tailEnd type="none" w="med" len="med"/>
+                    </a:lnR>
+                    <a:lnT w="6350" cap="flat" cmpd="sng" algn="ctr">
+                      <a:solidFill>
+                        <a:srgbClr val="C9D6D3"/>
+                      </a:solidFill>
+                      <a:prstDash val="solid"/>
+                      <a:round/>
+                      <a:headEnd type="none" w="med" len="med"/>
+                      <a:tailEnd type="none" w="med" len="med"/>
+                    </a:lnT>
+                    <a:lnB w="6350" cap="flat" cmpd="sng" algn="ctr">
+                      <a:solidFill>
+                        <a:srgbClr val="C9D6D3"/>
+                      </a:solidFill>
+                      <a:prstDash val="solid"/>
+                      <a:round/>
+                      <a:headEnd type="none" w="med" len="med"/>
+                      <a:tailEnd type="none" w="med" len="med"/>
+                    </a:lnB>
+                    <a:solidFill>
+                      <a:srgbClr val="EAF1EF"/>
+                    </a:solidFill>
+                  </a:tcPr>
+                </a:tc>
+                <a:tc>
+                  <a:txBody>
+                    <a:bodyPr/>
+                    <a:lstStyle/>
+                    <a:p>
+                      <a:pPr algn="l" indent="0" marL="0">
+                        <a:buNone/>
+                      </a:pPr>
+                      <a:r>
+                        <a:rPr lang="en-US" sz="1100" dirty="0">
+                          <a:solidFill>
+                            <a:schemeClr val="tx1"/>
+                          </a:solidFill>
+                        </a:rPr>
+                        <a:t>8 / 5</a:t>
+                      </a:r>
+                      <a:endParaRPr lang="en-US" sz="1100" dirty="0"/>
+                    </a:p>
+                  </a:txBody>
+                  <a:tcPr marL="63500" marR="63500" marT="38100" marB="38100" anchor="ctr">
+                    <a:lnL w="6350" cap="flat" cmpd="sng" algn="ctr">
+                      <a:solidFill>
+                        <a:srgbClr val="C9D6D3"/>
+                      </a:solidFill>
+                      <a:prstDash val="solid"/>
+                      <a:round/>
+                      <a:headEnd type="none" w="med" len="med"/>
+                      <a:tailEnd type="none" w="med" len="med"/>
+                    </a:lnL>
+                    <a:lnR w="6350" cap="flat" cmpd="sng" algn="ctr">
+                      <a:solidFill>
+                        <a:srgbClr val="C9D6D3"/>
+                      </a:solidFill>
+                      <a:prstDash val="solid"/>
+                      <a:round/>
+                      <a:headEnd type="none" w="med" len="med"/>
+                      <a:tailEnd type="none" w="med" len="med"/>
+                    </a:lnR>
+                    <a:lnT w="6350" cap="flat" cmpd="sng" algn="ctr">
+                      <a:solidFill>
+                        <a:srgbClr val="C9D6D3"/>
+                      </a:solidFill>
+                      <a:prstDash val="solid"/>
+                      <a:round/>
+                      <a:headEnd type="none" w="med" len="med"/>
+                      <a:tailEnd type="none" w="med" len="med"/>
+                    </a:lnT>
+                    <a:lnB w="6350" cap="flat" cmpd="sng" algn="ctr">
+                      <a:solidFill>
+                        <a:srgbClr val="C9D6D3"/>
+                      </a:solidFill>
+                      <a:prstDash val="solid"/>
+                      <a:round/>
+                      <a:headEnd type="none" w="med" len="med"/>
+                      <a:tailEnd type="none" w="med" len="med"/>
+                    </a:lnB>
+                    <a:solidFill>
+                      <a:srgbClr val="EAF1EF"/>
+                    </a:solidFill>
+                  </a:tcPr>
+                </a:tc>
+                <a:tc>
+                  <a:txBody>
+                    <a:bodyPr/>
+                    <a:lstStyle/>
+                    <a:p>
+                      <a:pPr algn="l" indent="0" marL="0">
+                        <a:buNone/>
+                      </a:pPr>
+                      <a:r>
+                        <a:rPr lang="en-US" sz="1100" dirty="0">
+                          <a:solidFill>
+                            <a:schemeClr val="tx1"/>
+                          </a:solidFill>
+                        </a:rPr>
+                        <a:t>217</a:t>
+                      </a:r>
+                      <a:endParaRPr lang="en-US" sz="1100" dirty="0"/>
+                    </a:p>
+                  </a:txBody>
+                  <a:tcPr marL="63500" marR="63500" marT="38100" marB="38100" anchor="ctr">
+                    <a:lnL w="6350" cap="flat" cmpd="sng" algn="ctr">
+                      <a:solidFill>
+                        <a:srgbClr val="C9D6D3"/>
+                      </a:solidFill>
+                      <a:prstDash val="solid"/>
+                      <a:round/>
+                      <a:headEnd type="none" w="med" len="med"/>
+                      <a:tailEnd type="none" w="med" len="med"/>
+                    </a:lnL>
+                    <a:lnR w="6350" cap="flat" cmpd="sng" algn="ctr">
+                      <a:solidFill>
+                        <a:srgbClr val="C9D6D3"/>
+                      </a:solidFill>
+                      <a:prstDash val="solid"/>
+                      <a:round/>
+                      <a:headEnd type="none" w="med" len="med"/>
+                      <a:tailEnd type="none" w="med" len="med"/>
+                    </a:lnR>
+                    <a:lnT w="6350" cap="flat" cmpd="sng" algn="ctr">
+                      <a:solidFill>
+                        <a:srgbClr val="C9D6D3"/>
+                      </a:solidFill>
+                      <a:prstDash val="solid"/>
+                      <a:round/>
+                      <a:headEnd type="none" w="med" len="med"/>
+                      <a:tailEnd type="none" w="med" len="med"/>
+                    </a:lnT>
+                    <a:lnB w="6350" cap="flat" cmpd="sng" algn="ctr">
+                      <a:solidFill>
+                        <a:srgbClr val="C9D6D3"/>
+                      </a:solidFill>
+                      <a:prstDash val="solid"/>
+                      <a:round/>
+                      <a:headEnd type="none" w="med" len="med"/>
+                      <a:tailEnd type="none" w="med" len="med"/>
+                    </a:lnB>
+                    <a:solidFill>
+                      <a:srgbClr val="EAF1EF"/>
+                    </a:solidFill>
+                  </a:tcPr>
+                </a:tc>
+                <a:tc>
+                  <a:txBody>
+                    <a:bodyPr/>
+                    <a:lstStyle/>
+                    <a:p>
+                      <a:pPr algn="l" indent="0" marL="0">
+                        <a:buNone/>
+                      </a:pPr>
+                      <a:r>
+                        <a:rPr lang="en-US" sz="1100" dirty="0">
+                          <a:solidFill>
+                            <a:schemeClr val="tx1"/>
+                          </a:solidFill>
+                        </a:rPr>
+                        <a:t>213</a:t>
+                      </a:r>
+                      <a:endParaRPr lang="en-US" sz="1100" dirty="0"/>
+                    </a:p>
+                  </a:txBody>
+                  <a:tcPr marL="63500" marR="63500" marT="38100" marB="38100" anchor="ctr">
+                    <a:lnL w="6350" cap="flat" cmpd="sng" algn="ctr">
+                      <a:solidFill>
+                        <a:srgbClr val="C9D6D3"/>
+                      </a:solidFill>
+                      <a:prstDash val="solid"/>
+                      <a:round/>
+                      <a:headEnd type="none" w="med" len="med"/>
+                      <a:tailEnd type="none" w="med" len="med"/>
+                    </a:lnL>
+                    <a:lnR w="6350" cap="flat" cmpd="sng" algn="ctr">
+                      <a:solidFill>
+                        <a:srgbClr val="C9D6D3"/>
+                      </a:solidFill>
+                      <a:prstDash val="solid"/>
+                      <a:round/>
+                      <a:headEnd type="none" w="med" len="med"/>
+                      <a:tailEnd type="none" w="med" len="med"/>
+                    </a:lnR>
+                    <a:lnT w="6350" cap="flat" cmpd="sng" algn="ctr">
+                      <a:solidFill>
+                        <a:srgbClr val="C9D6D3"/>
+                      </a:solidFill>
+                      <a:prstDash val="solid"/>
+                      <a:round/>
+                      <a:headEnd type="none" w="med" len="med"/>
+                      <a:tailEnd type="none" w="med" len="med"/>
+                    </a:lnT>
+                    <a:lnB w="6350" cap="flat" cmpd="sng" algn="ctr">
+                      <a:solidFill>
+                        <a:srgbClr val="C9D6D3"/>
+                      </a:solidFill>
+                      <a:prstDash val="solid"/>
+                      <a:round/>
+                      <a:headEnd type="none" w="med" len="med"/>
+                      <a:tailEnd type="none" w="med" len="med"/>
+                    </a:lnB>
+                    <a:solidFill>
+                      <a:srgbClr val="EAF1EF"/>
+                    </a:solidFill>
+                  </a:tcPr>
+                </a:tc>
+                <a:tc>
+                  <a:txBody>
+                    <a:bodyPr/>
+                    <a:lstStyle/>
+                    <a:p>
+                      <a:pPr algn="l" indent="0" marL="0">
+                        <a:buNone/>
+                      </a:pPr>
+                      <a:r>
+                        <a:rPr lang="en-US" sz="1100" dirty="0">
+                          <a:solidFill>
+                            <a:schemeClr val="tx1"/>
+                          </a:solidFill>
+                        </a:rPr>
+                        <a:t>210</a:t>
+                      </a:r>
+                      <a:endParaRPr lang="en-US" sz="1100" dirty="0"/>
+                    </a:p>
+                  </a:txBody>
+                  <a:tcPr marL="63500" marR="63500" marT="38100" marB="38100" anchor="ctr">
+                    <a:lnL w="6350" cap="flat" cmpd="sng" algn="ctr">
+                      <a:solidFill>
+                        <a:srgbClr val="C9D6D3"/>
+                      </a:solidFill>
+                      <a:prstDash val="solid"/>
+                      <a:round/>
+                      <a:headEnd type="none" w="med" len="med"/>
+                      <a:tailEnd type="none" w="med" len="med"/>
+                    </a:lnL>
+                    <a:lnR w="6350" cap="flat" cmpd="sng" algn="ctr">
+                      <a:solidFill>
+                        <a:srgbClr val="C9D6D3"/>
+                      </a:solidFill>
+                      <a:prstDash val="solid"/>
+                      <a:round/>
+                      <a:headEnd type="none" w="med" len="med"/>
+                      <a:tailEnd type="none" w="med" len="med"/>
+                    </a:lnR>
+                    <a:lnT w="6350" cap="flat" cmpd="sng" algn="ctr">
+                      <a:solidFill>
+                        <a:srgbClr val="C9D6D3"/>
+                      </a:solidFill>
+                      <a:prstDash val="solid"/>
+                      <a:round/>
+                      <a:headEnd type="none" w="med" len="med"/>
+                      <a:tailEnd type="none" w="med" len="med"/>
+                    </a:lnT>
+                    <a:lnB w="6350" cap="flat" cmpd="sng" algn="ctr">
+                      <a:solidFill>
+                        <a:srgbClr val="C9D6D3"/>
+                      </a:solidFill>
+                      <a:prstDash val="solid"/>
+                      <a:round/>
+                      <a:headEnd type="none" w="med" len="med"/>
+                      <a:tailEnd type="none" w="med" len="med"/>
+                    </a:lnB>
+                    <a:solidFill>
+                      <a:srgbClr val="EAF1EF"/>
+                    </a:solidFill>
+                  </a:tcPr>
+                </a:tc>
+                <a:tc>
+                  <a:txBody>
+                    <a:bodyPr/>
+                    <a:lstStyle/>
+                    <a:p>
+                      <a:pPr algn="l" indent="0" marL="0">
+                        <a:buNone/>
+                      </a:pPr>
+                      <a:r>
+                        <a:rPr lang="en-US" sz="1100" dirty="0">
+                          <a:solidFill>
+                            <a:schemeClr val="tx1"/>
+                          </a:solidFill>
+                        </a:rPr>
+                        <a:t>209</a:t>
+                      </a:r>
+                      <a:endParaRPr lang="en-US" sz="1100" dirty="0"/>
+                    </a:p>
+                  </a:txBody>
+                  <a:tcPr marL="63500" marR="63500" marT="38100" marB="38100" anchor="ctr">
+                    <a:lnL w="6350" cap="flat" cmpd="sng" algn="ctr">
+                      <a:solidFill>
+                        <a:srgbClr val="C9D6D3"/>
+                      </a:solidFill>
+                      <a:prstDash val="solid"/>
+                      <a:round/>
+                      <a:headEnd type="none" w="med" len="med"/>
+                      <a:tailEnd type="none" w="med" len="med"/>
+                    </a:lnL>
+                    <a:lnR w="6350" cap="flat" cmpd="sng" algn="ctr">
+                      <a:solidFill>
+                        <a:srgbClr val="C9D6D3"/>
+                      </a:solidFill>
+                      <a:prstDash val="solid"/>
+                      <a:round/>
+                      <a:headEnd type="none" w="med" len="med"/>
+                      <a:tailEnd type="none" w="med" len="med"/>
+                    </a:lnR>
+                    <a:lnT w="6350" cap="flat" cmpd="sng" algn="ctr">
+                      <a:solidFill>
+                        <a:srgbClr val="C9D6D3"/>
+                      </a:solidFill>
+                      <a:prstDash val="solid"/>
+                      <a:round/>
+                      <a:headEnd type="none" w="med" len="med"/>
+                      <a:tailEnd type="none" w="med" len="med"/>
+                    </a:lnT>
+                    <a:lnB w="6350" cap="flat" cmpd="sng" algn="ctr">
+                      <a:solidFill>
+                        <a:srgbClr val="C9D6D3"/>
+                      </a:solidFill>
+                      <a:prstDash val="solid"/>
+                      <a:round/>
+                      <a:headEnd type="none" w="med" len="med"/>
+                      <a:tailEnd type="none" w="med" len="med"/>
+                    </a:lnB>
+                    <a:solidFill>
+                      <a:srgbClr val="EAF1EF"/>
+                    </a:solidFill>
+                  </a:tcPr>
+                </a:tc>
+                <a:tc>
+                  <a:txBody>
+                    <a:bodyPr/>
+                    <a:lstStyle/>
+                    <a:p>
+                      <a:pPr algn="l" indent="0" marL="0">
+                        <a:buNone/>
+                      </a:pPr>
+                      <a:r>
+                        <a:rPr lang="en-US" sz="1100" dirty="0">
+                          <a:solidFill>
+                            <a:schemeClr val="tx1"/>
+                          </a:solidFill>
+                        </a:rPr>
+                        <a:t>210</a:t>
+                      </a:r>
+                      <a:endParaRPr lang="en-US" sz="1100" dirty="0"/>
+                    </a:p>
+                  </a:txBody>
+                  <a:tcPr marL="63500" marR="63500" marT="38100" marB="38100" anchor="ctr">
+                    <a:lnL w="6350" cap="flat" cmpd="sng" algn="ctr">
+                      <a:solidFill>
+                        <a:srgbClr val="C9D6D3"/>
+                      </a:solidFill>
+                      <a:prstDash val="solid"/>
+                      <a:round/>
+                      <a:headEnd type="none" w="med" len="med"/>
+                      <a:tailEnd type="none" w="med" len="med"/>
+                    </a:lnL>
+                    <a:lnR w="6350" cap="flat" cmpd="sng" algn="ctr">
+                      <a:solidFill>
+                        <a:srgbClr val="C9D6D3"/>
+                      </a:solidFill>
+                      <a:prstDash val="solid"/>
+                      <a:round/>
+                      <a:headEnd type="none" w="med" len="med"/>
+                      <a:tailEnd type="none" w="med" len="med"/>
+                    </a:lnR>
+                    <a:lnT w="6350" cap="flat" cmpd="sng" algn="ctr">
+                      <a:solidFill>
+                        <a:srgbClr val="C9D6D3"/>
+                      </a:solidFill>
+                      <a:prstDash val="solid"/>
+                      <a:round/>
+                      <a:headEnd type="none" w="med" len="med"/>
+                      <a:tailEnd type="none" w="med" len="med"/>
+                    </a:lnT>
+                    <a:lnB w="6350" cap="flat" cmpd="sng" algn="ctr">
+                      <a:solidFill>
+                        <a:srgbClr val="C9D6D3"/>
+                      </a:solidFill>
+                      <a:prstDash val="solid"/>
+                      <a:round/>
+                      <a:headEnd type="none" w="med" len="med"/>
+                      <a:tailEnd type="none" w="med" len="med"/>
+                    </a:lnB>
+                    <a:solidFill>
+                      <a:srgbClr val="EAF1EF"/>
+                    </a:solidFill>
+                  </a:tcPr>
+                </a:tc>
+              </a:tr>
+              <a:tr h="274320">
+                <a:tc>
+                  <a:txBody>
+                    <a:bodyPr/>
+                    <a:lstStyle/>
+                    <a:p>
+                      <a:pPr algn="l" indent="0" marL="0">
+                        <a:buNone/>
+                      </a:pPr>
+                      <a:r>
+                        <a:rPr lang="en-US" sz="1100" b="1" dirty="0">
+                          <a:solidFill>
+                            <a:schemeClr val="tx1"/>
+                          </a:solidFill>
+                        </a:rPr>
+                        <a:t>ПДВ 21% з 2027</a:t>
+                      </a:r>
+                      <a:endParaRPr lang="en-US" sz="1100" dirty="0"/>
+                    </a:p>
+                  </a:txBody>
+                  <a:tcPr marL="63500" marR="63500" marT="38100" marB="38100" anchor="ctr">
+                    <a:lnL w="6350" cap="flat" cmpd="sng" algn="ctr">
+                      <a:solidFill>
+                        <a:srgbClr val="C9D6D3"/>
+                      </a:solidFill>
+                      <a:prstDash val="solid"/>
+                      <a:round/>
+                      <a:headEnd type="none" w="med" len="med"/>
+                      <a:tailEnd type="none" w="med" len="med"/>
+                    </a:lnL>
+                    <a:lnR w="6350" cap="flat" cmpd="sng" algn="ctr">
+                      <a:solidFill>
+                        <a:srgbClr val="C9D6D3"/>
+                      </a:solidFill>
+                      <a:prstDash val="solid"/>
+                      <a:round/>
+                      <a:headEnd type="none" w="med" len="med"/>
+                      <a:tailEnd type="none" w="med" len="med"/>
+                    </a:lnR>
+                    <a:lnT w="6350" cap="flat" cmpd="sng" algn="ctr">
+                      <a:solidFill>
+                        <a:srgbClr val="C9D6D3"/>
+                      </a:solidFill>
+                      <a:prstDash val="solid"/>
+                      <a:round/>
+                      <a:headEnd type="none" w="med" len="med"/>
+                      <a:tailEnd type="none" w="med" len="med"/>
+                    </a:lnT>
+                    <a:lnB w="6350" cap="flat" cmpd="sng" algn="ctr">
+                      <a:solidFill>
+                        <a:srgbClr val="C9D6D3"/>
+                      </a:solidFill>
+                      <a:prstDash val="solid"/>
+                      <a:round/>
+                      <a:headEnd type="none" w="med" len="med"/>
+                      <a:tailEnd type="none" w="med" len="med"/>
+                    </a:lnB>
+                    <a:solidFill>
+                      <a:srgbClr val="FFFFFF"/>
+                    </a:solidFill>
+                  </a:tcPr>
+                </a:tc>
+                <a:tc>
+                  <a:txBody>
+                    <a:bodyPr/>
+                    <a:lstStyle/>
+                    <a:p>
+                      <a:pPr algn="l" indent="0" marL="0">
+                        <a:buNone/>
+                      </a:pPr>
+                      <a:r>
+                        <a:rPr lang="en-US" sz="1100" dirty="0">
+                          <a:solidFill>
+                            <a:schemeClr val="tx1"/>
+                          </a:solidFill>
+                        </a:rPr>
+                        <a:t>5 / 5</a:t>
+                      </a:r>
+                      <a:endParaRPr lang="en-US" sz="1100" dirty="0"/>
+                    </a:p>
+                  </a:txBody>
+                  <a:tcPr marL="63500" marR="63500" marT="38100" marB="38100" anchor="ctr">
+                    <a:lnL w="6350" cap="flat" cmpd="sng" algn="ctr">
+                      <a:solidFill>
+                        <a:srgbClr val="C9D6D3"/>
+                      </a:solidFill>
+                      <a:prstDash val="solid"/>
+                      <a:round/>
+                      <a:headEnd type="none" w="med" len="med"/>
+                      <a:tailEnd type="none" w="med" len="med"/>
+                    </a:lnL>
+                    <a:lnR w="6350" cap="flat" cmpd="sng" algn="ctr">
+                      <a:solidFill>
+                        <a:srgbClr val="C9D6D3"/>
+                      </a:solidFill>
+                      <a:prstDash val="solid"/>
+                      <a:round/>
+                      <a:headEnd type="none" w="med" len="med"/>
+                      <a:tailEnd type="none" w="med" len="med"/>
+                    </a:lnR>
+                    <a:lnT w="6350" cap="flat" cmpd="sng" algn="ctr">
+                      <a:solidFill>
+                        <a:srgbClr val="C9D6D3"/>
+                      </a:solidFill>
+                      <a:prstDash val="solid"/>
+                      <a:round/>
+                      <a:headEnd type="none" w="med" len="med"/>
+                      <a:tailEnd type="none" w="med" len="med"/>
+                    </a:lnT>
+                    <a:lnB w="6350" cap="flat" cmpd="sng" algn="ctr">
+                      <a:solidFill>
+                        <a:srgbClr val="C9D6D3"/>
+                      </a:solidFill>
+                      <a:prstDash val="solid"/>
+                      <a:round/>
+                      <a:headEnd type="none" w="med" len="med"/>
+                      <a:tailEnd type="none" w="med" len="med"/>
+                    </a:lnB>
+                    <a:solidFill>
+                      <a:srgbClr val="FFFFFF"/>
+                    </a:solidFill>
+                  </a:tcPr>
+                </a:tc>
+                <a:tc>
+                  <a:txBody>
+                    <a:bodyPr/>
+                    <a:lstStyle/>
+                    <a:p>
+                      <a:pPr algn="l" indent="0" marL="0">
+                        <a:buNone/>
+                      </a:pPr>
+                      <a:r>
+                        <a:rPr lang="en-US" sz="1100" dirty="0">
+                          <a:solidFill>
+                            <a:schemeClr val="tx1"/>
+                          </a:solidFill>
+                        </a:rPr>
+                        <a:t>125</a:t>
+                      </a:r>
+                      <a:endParaRPr lang="en-US" sz="1100" dirty="0"/>
+                    </a:p>
+                  </a:txBody>
+                  <a:tcPr marL="63500" marR="63500" marT="38100" marB="38100" anchor="ctr">
+                    <a:lnL w="6350" cap="flat" cmpd="sng" algn="ctr">
+                      <a:solidFill>
+                        <a:srgbClr val="C9D6D3"/>
+                      </a:solidFill>
+                      <a:prstDash val="solid"/>
+                      <a:round/>
+                      <a:headEnd type="none" w="med" len="med"/>
+                      <a:tailEnd type="none" w="med" len="med"/>
+                    </a:lnL>
+                    <a:lnR w="6350" cap="flat" cmpd="sng" algn="ctr">
+                      <a:solidFill>
+                        <a:srgbClr val="C9D6D3"/>
+                      </a:solidFill>
+                      <a:prstDash val="solid"/>
+                      <a:round/>
+                      <a:headEnd type="none" w="med" len="med"/>
+                      <a:tailEnd type="none" w="med" len="med"/>
+                    </a:lnR>
+                    <a:lnT w="6350" cap="flat" cmpd="sng" algn="ctr">
+                      <a:solidFill>
+                        <a:srgbClr val="C9D6D3"/>
+                      </a:solidFill>
+                      <a:prstDash val="solid"/>
+                      <a:round/>
+                      <a:headEnd type="none" w="med" len="med"/>
+                      <a:tailEnd type="none" w="med" len="med"/>
+                    </a:lnT>
+                    <a:lnB w="6350" cap="flat" cmpd="sng" algn="ctr">
+                      <a:solidFill>
+                        <a:srgbClr val="C9D6D3"/>
+                      </a:solidFill>
+                      <a:prstDash val="solid"/>
+                      <a:round/>
+                      <a:headEnd type="none" w="med" len="med"/>
+                      <a:tailEnd type="none" w="med" len="med"/>
+                    </a:lnB>
+                    <a:solidFill>
+                      <a:srgbClr val="FFFFFF"/>
+                    </a:solidFill>
+                  </a:tcPr>
+                </a:tc>
+                <a:tc>
+                  <a:txBody>
+                    <a:bodyPr/>
+                    <a:lstStyle/>
+                    <a:p>
+                      <a:pPr algn="l" indent="0" marL="0">
+                        <a:buNone/>
+                      </a:pPr>
+                      <a:r>
+                        <a:rPr lang="en-US" sz="1100" dirty="0">
+                          <a:solidFill>
+                            <a:schemeClr val="tx1"/>
+                          </a:solidFill>
+                        </a:rPr>
+                        <a:t>124</a:t>
+                      </a:r>
+                      <a:endParaRPr lang="en-US" sz="1100" dirty="0"/>
+                    </a:p>
+                  </a:txBody>
+                  <a:tcPr marL="63500" marR="63500" marT="38100" marB="38100" anchor="ctr">
+                    <a:lnL w="6350" cap="flat" cmpd="sng" algn="ctr">
+                      <a:solidFill>
+                        <a:srgbClr val="C9D6D3"/>
+                      </a:solidFill>
+                      <a:prstDash val="solid"/>
+                      <a:round/>
+                      <a:headEnd type="none" w="med" len="med"/>
+                      <a:tailEnd type="none" w="med" len="med"/>
+                    </a:lnL>
+                    <a:lnR w="6350" cap="flat" cmpd="sng" algn="ctr">
+                      <a:solidFill>
+                        <a:srgbClr val="C9D6D3"/>
+                      </a:solidFill>
+                      <a:prstDash val="solid"/>
+                      <a:round/>
+                      <a:headEnd type="none" w="med" len="med"/>
+                      <a:tailEnd type="none" w="med" len="med"/>
+                    </a:lnR>
+                    <a:lnT w="6350" cap="flat" cmpd="sng" algn="ctr">
+                      <a:solidFill>
+                        <a:srgbClr val="C9D6D3"/>
+                      </a:solidFill>
+                      <a:prstDash val="solid"/>
+                      <a:round/>
+                      <a:headEnd type="none" w="med" len="med"/>
+                      <a:tailEnd type="none" w="med" len="med"/>
+                    </a:lnT>
+                    <a:lnB w="6350" cap="flat" cmpd="sng" algn="ctr">
+                      <a:solidFill>
+                        <a:srgbClr val="C9D6D3"/>
+                      </a:solidFill>
+                      <a:prstDash val="solid"/>
+                      <a:round/>
+                      <a:headEnd type="none" w="med" len="med"/>
+                      <a:tailEnd type="none" w="med" len="med"/>
+                    </a:lnB>
+                    <a:solidFill>
+                      <a:srgbClr val="FFFFFF"/>
+                    </a:solidFill>
+                  </a:tcPr>
+                </a:tc>
+                <a:tc>
+                  <a:txBody>
+                    <a:bodyPr/>
+                    <a:lstStyle/>
+                    <a:p>
+                      <a:pPr algn="l" indent="0" marL="0">
+                        <a:buNone/>
+                      </a:pPr>
+                      <a:r>
+                        <a:rPr lang="en-US" sz="1100" dirty="0">
+                          <a:solidFill>
+                            <a:schemeClr val="tx1"/>
+                          </a:solidFill>
+                        </a:rPr>
+                        <a:t>125</a:t>
+                      </a:r>
+                      <a:endParaRPr lang="en-US" sz="1100" dirty="0"/>
+                    </a:p>
+                  </a:txBody>
+                  <a:tcPr marL="63500" marR="63500" marT="38100" marB="38100" anchor="ctr">
+                    <a:lnL w="6350" cap="flat" cmpd="sng" algn="ctr">
+                      <a:solidFill>
+                        <a:srgbClr val="C9D6D3"/>
+                      </a:solidFill>
+                      <a:prstDash val="solid"/>
+                      <a:round/>
+                      <a:headEnd type="none" w="med" len="med"/>
+                      <a:tailEnd type="none" w="med" len="med"/>
+                    </a:lnL>
+                    <a:lnR w="6350" cap="flat" cmpd="sng" algn="ctr">
+                      <a:solidFill>
+                        <a:srgbClr val="C9D6D3"/>
+                      </a:solidFill>
+                      <a:prstDash val="solid"/>
+                      <a:round/>
+                      <a:headEnd type="none" w="med" len="med"/>
+                      <a:tailEnd type="none" w="med" len="med"/>
+                    </a:lnR>
+                    <a:lnT w="6350" cap="flat" cmpd="sng" algn="ctr">
+                      <a:solidFill>
+                        <a:srgbClr val="C9D6D3"/>
+                      </a:solidFill>
+                      <a:prstDash val="solid"/>
+                      <a:round/>
+                      <a:headEnd type="none" w="med" len="med"/>
+                      <a:tailEnd type="none" w="med" len="med"/>
+                    </a:lnT>
+                    <a:lnB w="6350" cap="flat" cmpd="sng" algn="ctr">
+                      <a:solidFill>
+                        <a:srgbClr val="C9D6D3"/>
+                      </a:solidFill>
+                      <a:prstDash val="solid"/>
+                      <a:round/>
+                      <a:headEnd type="none" w="med" len="med"/>
+                      <a:tailEnd type="none" w="med" len="med"/>
+                    </a:lnB>
+                    <a:solidFill>
+                      <a:srgbClr val="FFFFFF"/>
+                    </a:solidFill>
+                  </a:tcPr>
+                </a:tc>
+                <a:tc>
+                  <a:txBody>
+                    <a:bodyPr/>
+                    <a:lstStyle/>
+                    <a:p>
+                      <a:pPr algn="l" indent="0" marL="0">
+                        <a:buNone/>
+                      </a:pPr>
+                      <a:r>
+                        <a:rPr lang="en-US" sz="1100" dirty="0">
+                          <a:solidFill>
+                            <a:schemeClr val="tx1"/>
+                          </a:solidFill>
+                        </a:rPr>
+                        <a:t>127</a:t>
+                      </a:r>
+                      <a:endParaRPr lang="en-US" sz="1100" dirty="0"/>
+                    </a:p>
+                  </a:txBody>
+                  <a:tcPr marL="63500" marR="63500" marT="38100" marB="38100" anchor="ctr">
+                    <a:lnL w="6350" cap="flat" cmpd="sng" algn="ctr">
+                      <a:solidFill>
+                        <a:srgbClr val="C9D6D3"/>
+                      </a:solidFill>
+                      <a:prstDash val="solid"/>
+                      <a:round/>
+                      <a:headEnd type="none" w="med" len="med"/>
+                      <a:tailEnd type="none" w="med" len="med"/>
+                    </a:lnL>
+                    <a:lnR w="6350" cap="flat" cmpd="sng" algn="ctr">
+                      <a:solidFill>
+                        <a:srgbClr val="C9D6D3"/>
+                      </a:solidFill>
+                      <a:prstDash val="solid"/>
+                      <a:round/>
+                      <a:headEnd type="none" w="med" len="med"/>
+                      <a:tailEnd type="none" w="med" len="med"/>
+                    </a:lnR>
+                    <a:lnT w="6350" cap="flat" cmpd="sng" algn="ctr">
+                      <a:solidFill>
+                        <a:srgbClr val="C9D6D3"/>
+                      </a:solidFill>
+                      <a:prstDash val="solid"/>
+                      <a:round/>
+                      <a:headEnd type="none" w="med" len="med"/>
+                      <a:tailEnd type="none" w="med" len="med"/>
+                    </a:lnT>
+                    <a:lnB w="6350" cap="flat" cmpd="sng" algn="ctr">
+                      <a:solidFill>
+                        <a:srgbClr val="C9D6D3"/>
+                      </a:solidFill>
+                      <a:prstDash val="solid"/>
+                      <a:round/>
+                      <a:headEnd type="none" w="med" len="med"/>
+                      <a:tailEnd type="none" w="med" len="med"/>
+                    </a:lnB>
+                    <a:solidFill>
+                      <a:srgbClr val="FFFFFF"/>
+                    </a:solidFill>
+                  </a:tcPr>
+                </a:tc>
+                <a:tc>
+                  <a:txBody>
+                    <a:bodyPr/>
+                    <a:lstStyle/>
+                    <a:p>
+                      <a:pPr algn="l" indent="0" marL="0">
+                        <a:buNone/>
+                      </a:pPr>
+                      <a:r>
+                        <a:rPr lang="en-US" sz="1100" dirty="0">
+                          <a:solidFill>
+                            <a:schemeClr val="tx1"/>
+                          </a:solidFill>
+                        </a:rPr>
+                        <a:t>130</a:t>
+                      </a:r>
+                      <a:endParaRPr lang="en-US" sz="1100" dirty="0"/>
+                    </a:p>
+                  </a:txBody>
+                  <a:tcPr marL="63500" marR="63500" marT="38100" marB="38100" anchor="ctr">
+                    <a:lnL w="6350" cap="flat" cmpd="sng" algn="ctr">
+                      <a:solidFill>
+                        <a:srgbClr val="C9D6D3"/>
+                      </a:solidFill>
+                      <a:prstDash val="solid"/>
+                      <a:round/>
+                      <a:headEnd type="none" w="med" len="med"/>
+                      <a:tailEnd type="none" w="med" len="med"/>
+                    </a:lnL>
+                    <a:lnR w="6350" cap="flat" cmpd="sng" algn="ctr">
+                      <a:solidFill>
+                        <a:srgbClr val="C9D6D3"/>
+                      </a:solidFill>
+                      <a:prstDash val="solid"/>
+                      <a:round/>
+                      <a:headEnd type="none" w="med" len="med"/>
+                      <a:tailEnd type="none" w="med" len="med"/>
+                    </a:lnR>
+                    <a:lnT w="6350" cap="flat" cmpd="sng" algn="ctr">
+                      <a:solidFill>
+                        <a:srgbClr val="C9D6D3"/>
+                      </a:solidFill>
+                      <a:prstDash val="solid"/>
+                      <a:round/>
+                      <a:headEnd type="none" w="med" len="med"/>
+                      <a:tailEnd type="none" w="med" len="med"/>
+                    </a:lnT>
+                    <a:lnB w="6350" cap="flat" cmpd="sng" algn="ctr">
+                      <a:solidFill>
+                        <a:srgbClr val="C9D6D3"/>
+                      </a:solidFill>
+                      <a:prstDash val="solid"/>
+                      <a:round/>
+                      <a:headEnd type="none" w="med" len="med"/>
+                      <a:tailEnd type="none" w="med" len="med"/>
+                    </a:lnB>
+                    <a:solidFill>
+                      <a:srgbClr val="FFFFFF"/>
+                    </a:solidFill>
+                  </a:tcPr>
+                </a:tc>
+              </a:tr>
+              <a:tr h="274320">
+                <a:tc>
+                  <a:txBody>
+                    <a:bodyPr/>
+                    <a:lstStyle/>
+                    <a:p>
+                      <a:pPr algn="l" indent="0" marL="0">
+                        <a:buNone/>
+                      </a:pPr>
+                      <a:r>
+                        <a:rPr lang="en-US" sz="1100" b="1" dirty="0">
+                          <a:solidFill>
+                            <a:schemeClr val="tx1"/>
+                          </a:solidFill>
+                        </a:rPr>
+                        <a:t>Слабкий попит</a:t>
+                      </a:r>
+                      <a:endParaRPr lang="en-US" sz="1100" dirty="0"/>
+                    </a:p>
+                  </a:txBody>
+                  <a:tcPr marL="63500" marR="63500" marT="38100" marB="38100" anchor="ctr">
+                    <a:lnL w="6350" cap="flat" cmpd="sng" algn="ctr">
+                      <a:solidFill>
+                        <a:srgbClr val="C9D6D3"/>
+                      </a:solidFill>
+                      <a:prstDash val="solid"/>
+                      <a:round/>
+                      <a:headEnd type="none" w="med" len="med"/>
+                      <a:tailEnd type="none" w="med" len="med"/>
+                    </a:lnL>
+                    <a:lnR w="6350" cap="flat" cmpd="sng" algn="ctr">
+                      <a:solidFill>
+                        <a:srgbClr val="C9D6D3"/>
+                      </a:solidFill>
+                      <a:prstDash val="solid"/>
+                      <a:round/>
+                      <a:headEnd type="none" w="med" len="med"/>
+                      <a:tailEnd type="none" w="med" len="med"/>
+                    </a:lnR>
+                    <a:lnT w="6350" cap="flat" cmpd="sng" algn="ctr">
+                      <a:solidFill>
+                        <a:srgbClr val="C9D6D3"/>
+                      </a:solidFill>
+                      <a:prstDash val="solid"/>
+                      <a:round/>
+                      <a:headEnd type="none" w="med" len="med"/>
+                      <a:tailEnd type="none" w="med" len="med"/>
+                    </a:lnT>
+                    <a:lnB w="6350" cap="flat" cmpd="sng" algn="ctr">
+                      <a:solidFill>
+                        <a:srgbClr val="C9D6D3"/>
+                      </a:solidFill>
+                      <a:prstDash val="solid"/>
+                      <a:round/>
+                      <a:headEnd type="none" w="med" len="med"/>
+                      <a:tailEnd type="none" w="med" len="med"/>
+                    </a:lnB>
+                    <a:solidFill>
+                      <a:srgbClr val="EAF1EF"/>
+                    </a:solidFill>
+                  </a:tcPr>
+                </a:tc>
+                <a:tc>
+                  <a:txBody>
+                    <a:bodyPr/>
+                    <a:lstStyle/>
+                    <a:p>
+                      <a:pPr algn="l" indent="0" marL="0">
+                        <a:buNone/>
+                      </a:pPr>
+                      <a:r>
+                        <a:rPr lang="en-US" sz="1100" dirty="0">
+                          <a:solidFill>
+                            <a:schemeClr val="tx1"/>
+                          </a:solidFill>
+                        </a:rPr>
+                        <a:t>8 / 10</a:t>
+                      </a:r>
+                      <a:endParaRPr lang="en-US" sz="1100" dirty="0"/>
+                    </a:p>
+                  </a:txBody>
+                  <a:tcPr marL="63500" marR="63500" marT="38100" marB="38100" anchor="ctr">
+                    <a:lnL w="6350" cap="flat" cmpd="sng" algn="ctr">
+                      <a:solidFill>
+                        <a:srgbClr val="C9D6D3"/>
+                      </a:solidFill>
+                      <a:prstDash val="solid"/>
+                      <a:round/>
+                      <a:headEnd type="none" w="med" len="med"/>
+                      <a:tailEnd type="none" w="med" len="med"/>
+                    </a:lnL>
+                    <a:lnR w="6350" cap="flat" cmpd="sng" algn="ctr">
+                      <a:solidFill>
+                        <a:srgbClr val="C9D6D3"/>
+                      </a:solidFill>
+                      <a:prstDash val="solid"/>
+                      <a:round/>
+                      <a:headEnd type="none" w="med" len="med"/>
+                      <a:tailEnd type="none" w="med" len="med"/>
+                    </a:lnR>
+                    <a:lnT w="6350" cap="flat" cmpd="sng" algn="ctr">
+                      <a:solidFill>
+                        <a:srgbClr val="C9D6D3"/>
+                      </a:solidFill>
+                      <a:prstDash val="solid"/>
+                      <a:round/>
+                      <a:headEnd type="none" w="med" len="med"/>
+                      <a:tailEnd type="none" w="med" len="med"/>
+                    </a:lnT>
+                    <a:lnB w="6350" cap="flat" cmpd="sng" algn="ctr">
+                      <a:solidFill>
+                        <a:srgbClr val="C9D6D3"/>
+                      </a:solidFill>
+                      <a:prstDash val="solid"/>
+                      <a:round/>
+                      <a:headEnd type="none" w="med" len="med"/>
+                      <a:tailEnd type="none" w="med" len="med"/>
+                    </a:lnB>
+                    <a:solidFill>
+                      <a:srgbClr val="EAF1EF"/>
+                    </a:solidFill>
+                  </a:tcPr>
+                </a:tc>
+                <a:tc>
+                  <a:txBody>
+                    <a:bodyPr/>
+                    <a:lstStyle/>
+                    <a:p>
+                      <a:pPr algn="l" indent="0" marL="0">
+                        <a:buNone/>
+                      </a:pPr>
+                      <a:r>
+                        <a:rPr lang="en-US" sz="1100" dirty="0">
+                          <a:solidFill>
+                            <a:schemeClr val="tx1"/>
+                          </a:solidFill>
+                        </a:rPr>
+                        <a:t>105</a:t>
+                      </a:r>
+                      <a:endParaRPr lang="en-US" sz="1100" dirty="0"/>
+                    </a:p>
+                  </a:txBody>
+                  <a:tcPr marL="63500" marR="63500" marT="38100" marB="38100" anchor="ctr">
+                    <a:lnL w="6350" cap="flat" cmpd="sng" algn="ctr">
+                      <a:solidFill>
+                        <a:srgbClr val="C9D6D3"/>
+                      </a:solidFill>
+                      <a:prstDash val="solid"/>
+                      <a:round/>
+                      <a:headEnd type="none" w="med" len="med"/>
+                      <a:tailEnd type="none" w="med" len="med"/>
+                    </a:lnL>
+                    <a:lnR w="6350" cap="flat" cmpd="sng" algn="ctr">
+                      <a:solidFill>
+                        <a:srgbClr val="C9D6D3"/>
+                      </a:solidFill>
+                      <a:prstDash val="solid"/>
+                      <a:round/>
+                      <a:headEnd type="none" w="med" len="med"/>
+                      <a:tailEnd type="none" w="med" len="med"/>
+                    </a:lnR>
+                    <a:lnT w="6350" cap="flat" cmpd="sng" algn="ctr">
+                      <a:solidFill>
+                        <a:srgbClr val="C9D6D3"/>
+                      </a:solidFill>
+                      <a:prstDash val="solid"/>
+                      <a:round/>
+                      <a:headEnd type="none" w="med" len="med"/>
+                      <a:tailEnd type="none" w="med" len="med"/>
+                    </a:lnT>
+                    <a:lnB w="6350" cap="flat" cmpd="sng" algn="ctr">
+                      <a:solidFill>
+                        <a:srgbClr val="C9D6D3"/>
+                      </a:solidFill>
+                      <a:prstDash val="solid"/>
+                      <a:round/>
+                      <a:headEnd type="none" w="med" len="med"/>
+                      <a:tailEnd type="none" w="med" len="med"/>
+                    </a:lnB>
+                    <a:solidFill>
+                      <a:srgbClr val="EAF1EF"/>
+                    </a:solidFill>
+                  </a:tcPr>
+                </a:tc>
+                <a:tc>
+                  <a:txBody>
+                    <a:bodyPr/>
+                    <a:lstStyle/>
+                    <a:p>
+                      <a:pPr algn="l" indent="0" marL="0">
+                        <a:buNone/>
+                      </a:pPr>
+                      <a:r>
+                        <a:rPr lang="en-US" sz="1100" dirty="0">
+                          <a:solidFill>
+                            <a:schemeClr val="tx1"/>
+                          </a:solidFill>
+                        </a:rPr>
+                        <a:t>106</a:t>
+                      </a:r>
+                      <a:endParaRPr lang="en-US" sz="1100" dirty="0"/>
+                    </a:p>
+                  </a:txBody>
+                  <a:tcPr marL="63500" marR="63500" marT="38100" marB="38100" anchor="ctr">
+                    <a:lnL w="6350" cap="flat" cmpd="sng" algn="ctr">
+                      <a:solidFill>
+                        <a:srgbClr val="C9D6D3"/>
+                      </a:solidFill>
+                      <a:prstDash val="solid"/>
+                      <a:round/>
+                      <a:headEnd type="none" w="med" len="med"/>
+                      <a:tailEnd type="none" w="med" len="med"/>
+                    </a:lnL>
+                    <a:lnR w="6350" cap="flat" cmpd="sng" algn="ctr">
+                      <a:solidFill>
+                        <a:srgbClr val="C9D6D3"/>
+                      </a:solidFill>
+                      <a:prstDash val="solid"/>
+                      <a:round/>
+                      <a:headEnd type="none" w="med" len="med"/>
+                      <a:tailEnd type="none" w="med" len="med"/>
+                    </a:lnR>
+                    <a:lnT w="6350" cap="flat" cmpd="sng" algn="ctr">
+                      <a:solidFill>
+                        <a:srgbClr val="C9D6D3"/>
+                      </a:solidFill>
+                      <a:prstDash val="solid"/>
+                      <a:round/>
+                      <a:headEnd type="none" w="med" len="med"/>
+                      <a:tailEnd type="none" w="med" len="med"/>
+                    </a:lnT>
+                    <a:lnB w="6350" cap="flat" cmpd="sng" algn="ctr">
+                      <a:solidFill>
+                        <a:srgbClr val="C9D6D3"/>
+                      </a:solidFill>
+                      <a:prstDash val="solid"/>
+                      <a:round/>
+                      <a:headEnd type="none" w="med" len="med"/>
+                      <a:tailEnd type="none" w="med" len="med"/>
+                    </a:lnB>
+                    <a:solidFill>
+                      <a:srgbClr val="EAF1EF"/>
+                    </a:solidFill>
+                  </a:tcPr>
+                </a:tc>
+                <a:tc>
+                  <a:txBody>
+                    <a:bodyPr/>
+                    <a:lstStyle/>
+                    <a:p>
+                      <a:pPr algn="l" indent="0" marL="0">
+                        <a:buNone/>
+                      </a:pPr>
+                      <a:r>
+                        <a:rPr lang="en-US" sz="1100" dirty="0">
+                          <a:solidFill>
+                            <a:schemeClr val="tx1"/>
+                          </a:solidFill>
+                        </a:rPr>
+                        <a:t>109</a:t>
                       </a:r>
                       <a:endParaRPr lang="en-US" sz="1100" dirty="0"/>
                     </a:p>
@@ -31717,1232 +33757,6 @@
                     </a:solidFill>
                   </a:tcPr>
                 </a:tc>
-              </a:tr>
-              <a:tr h="274320">
-                <a:tc>
-                  <a:txBody>
-                    <a:bodyPr/>
-                    <a:lstStyle/>
-                    <a:p>
-                      <a:pPr algn="l" indent="0" marL="0">
-                        <a:buNone/>
-                      </a:pPr>
-                      <a:r>
-                        <a:rPr lang="en-US" sz="1100" b="1" dirty="0">
-                          <a:solidFill>
-                            <a:schemeClr val="tx1"/>
-                          </a:solidFill>
-                        </a:rPr>
-                        <a:t>Розбалансування очікувань</a:t>
-                      </a:r>
-                      <a:endParaRPr lang="en-US" sz="1100" dirty="0"/>
-                    </a:p>
-                  </a:txBody>
-                  <a:tcPr marL="63500" marR="63500" marT="38100" marB="38100" anchor="ctr">
-                    <a:lnL w="6350" cap="flat" cmpd="sng" algn="ctr">
-                      <a:solidFill>
-                        <a:srgbClr val="C9D6D3"/>
-                      </a:solidFill>
-                      <a:prstDash val="solid"/>
-                      <a:round/>
-                      <a:headEnd type="none" w="med" len="med"/>
-                      <a:tailEnd type="none" w="med" len="med"/>
-                    </a:lnL>
-                    <a:lnR w="6350" cap="flat" cmpd="sng" algn="ctr">
-                      <a:solidFill>
-                        <a:srgbClr val="C9D6D3"/>
-                      </a:solidFill>
-                      <a:prstDash val="solid"/>
-                      <a:round/>
-                      <a:headEnd type="none" w="med" len="med"/>
-                      <a:tailEnd type="none" w="med" len="med"/>
-                    </a:lnR>
-                    <a:lnT w="6350" cap="flat" cmpd="sng" algn="ctr">
-                      <a:solidFill>
-                        <a:srgbClr val="C9D6D3"/>
-                      </a:solidFill>
-                      <a:prstDash val="solid"/>
-                      <a:round/>
-                      <a:headEnd type="none" w="med" len="med"/>
-                      <a:tailEnd type="none" w="med" len="med"/>
-                    </a:lnT>
-                    <a:lnB w="6350" cap="flat" cmpd="sng" algn="ctr">
-                      <a:solidFill>
-                        <a:srgbClr val="C9D6D3"/>
-                      </a:solidFill>
-                      <a:prstDash val="solid"/>
-                      <a:round/>
-                      <a:headEnd type="none" w="med" len="med"/>
-                      <a:tailEnd type="none" w="med" len="med"/>
-                    </a:lnB>
-                    <a:solidFill>
-                      <a:srgbClr val="FFFFFF"/>
-                    </a:solidFill>
-                  </a:tcPr>
-                </a:tc>
-                <a:tc>
-                  <a:txBody>
-                    <a:bodyPr/>
-                    <a:lstStyle/>
-                    <a:p>
-                      <a:pPr algn="l" indent="0" marL="0">
-                        <a:buNone/>
-                      </a:pPr>
-                      <a:r>
-                        <a:rPr lang="en-US" sz="1100" dirty="0">
-                          <a:solidFill>
-                            <a:schemeClr val="tx1"/>
-                          </a:solidFill>
-                        </a:rPr>
-                        <a:t>8 / 5</a:t>
-                      </a:r>
-                      <a:endParaRPr lang="en-US" sz="1100" dirty="0"/>
-                    </a:p>
-                  </a:txBody>
-                  <a:tcPr marL="63500" marR="63500" marT="38100" marB="38100" anchor="ctr">
-                    <a:lnL w="6350" cap="flat" cmpd="sng" algn="ctr">
-                      <a:solidFill>
-                        <a:srgbClr val="C9D6D3"/>
-                      </a:solidFill>
-                      <a:prstDash val="solid"/>
-                      <a:round/>
-                      <a:headEnd type="none" w="med" len="med"/>
-                      <a:tailEnd type="none" w="med" len="med"/>
-                    </a:lnL>
-                    <a:lnR w="6350" cap="flat" cmpd="sng" algn="ctr">
-                      <a:solidFill>
-                        <a:srgbClr val="C9D6D3"/>
-                      </a:solidFill>
-                      <a:prstDash val="solid"/>
-                      <a:round/>
-                      <a:headEnd type="none" w="med" len="med"/>
-                      <a:tailEnd type="none" w="med" len="med"/>
-                    </a:lnR>
-                    <a:lnT w="6350" cap="flat" cmpd="sng" algn="ctr">
-                      <a:solidFill>
-                        <a:srgbClr val="C9D6D3"/>
-                      </a:solidFill>
-                      <a:prstDash val="solid"/>
-                      <a:round/>
-                      <a:headEnd type="none" w="med" len="med"/>
-                      <a:tailEnd type="none" w="med" len="med"/>
-                    </a:lnT>
-                    <a:lnB w="6350" cap="flat" cmpd="sng" algn="ctr">
-                      <a:solidFill>
-                        <a:srgbClr val="C9D6D3"/>
-                      </a:solidFill>
-                      <a:prstDash val="solid"/>
-                      <a:round/>
-                      <a:headEnd type="none" w="med" len="med"/>
-                      <a:tailEnd type="none" w="med" len="med"/>
-                    </a:lnB>
-                    <a:solidFill>
-                      <a:srgbClr val="FFFFFF"/>
-                    </a:solidFill>
-                  </a:tcPr>
-                </a:tc>
-                <a:tc>
-                  <a:txBody>
-                    <a:bodyPr/>
-                    <a:lstStyle/>
-                    <a:p>
-                      <a:pPr algn="l" indent="0" marL="0">
-                        <a:buNone/>
-                      </a:pPr>
-                      <a:r>
-                        <a:rPr lang="en-US" sz="1100" dirty="0">
-                          <a:solidFill>
-                            <a:schemeClr val="tx1"/>
-                          </a:solidFill>
-                        </a:rPr>
-                        <a:t>217</a:t>
-                      </a:r>
-                      <a:endParaRPr lang="en-US" sz="1100" dirty="0"/>
-                    </a:p>
-                  </a:txBody>
-                  <a:tcPr marL="63500" marR="63500" marT="38100" marB="38100" anchor="ctr">
-                    <a:lnL w="6350" cap="flat" cmpd="sng" algn="ctr">
-                      <a:solidFill>
-                        <a:srgbClr val="C9D6D3"/>
-                      </a:solidFill>
-                      <a:prstDash val="solid"/>
-                      <a:round/>
-                      <a:headEnd type="none" w="med" len="med"/>
-                      <a:tailEnd type="none" w="med" len="med"/>
-                    </a:lnL>
-                    <a:lnR w="6350" cap="flat" cmpd="sng" algn="ctr">
-                      <a:solidFill>
-                        <a:srgbClr val="C9D6D3"/>
-                      </a:solidFill>
-                      <a:prstDash val="solid"/>
-                      <a:round/>
-                      <a:headEnd type="none" w="med" len="med"/>
-                      <a:tailEnd type="none" w="med" len="med"/>
-                    </a:lnR>
-                    <a:lnT w="6350" cap="flat" cmpd="sng" algn="ctr">
-                      <a:solidFill>
-                        <a:srgbClr val="C9D6D3"/>
-                      </a:solidFill>
-                      <a:prstDash val="solid"/>
-                      <a:round/>
-                      <a:headEnd type="none" w="med" len="med"/>
-                      <a:tailEnd type="none" w="med" len="med"/>
-                    </a:lnT>
-                    <a:lnB w="6350" cap="flat" cmpd="sng" algn="ctr">
-                      <a:solidFill>
-                        <a:srgbClr val="C9D6D3"/>
-                      </a:solidFill>
-                      <a:prstDash val="solid"/>
-                      <a:round/>
-                      <a:headEnd type="none" w="med" len="med"/>
-                      <a:tailEnd type="none" w="med" len="med"/>
-                    </a:lnB>
-                    <a:solidFill>
-                      <a:srgbClr val="FFFFFF"/>
-                    </a:solidFill>
-                  </a:tcPr>
-                </a:tc>
-                <a:tc>
-                  <a:txBody>
-                    <a:bodyPr/>
-                    <a:lstStyle/>
-                    <a:p>
-                      <a:pPr algn="l" indent="0" marL="0">
-                        <a:buNone/>
-                      </a:pPr>
-                      <a:r>
-                        <a:rPr lang="en-US" sz="1100" dirty="0">
-                          <a:solidFill>
-                            <a:schemeClr val="tx1"/>
-                          </a:solidFill>
-                        </a:rPr>
-                        <a:t>213</a:t>
-                      </a:r>
-                      <a:endParaRPr lang="en-US" sz="1100" dirty="0"/>
-                    </a:p>
-                  </a:txBody>
-                  <a:tcPr marL="63500" marR="63500" marT="38100" marB="38100" anchor="ctr">
-                    <a:lnL w="6350" cap="flat" cmpd="sng" algn="ctr">
-                      <a:solidFill>
-                        <a:srgbClr val="C9D6D3"/>
-                      </a:solidFill>
-                      <a:prstDash val="solid"/>
-                      <a:round/>
-                      <a:headEnd type="none" w="med" len="med"/>
-                      <a:tailEnd type="none" w="med" len="med"/>
-                    </a:lnL>
-                    <a:lnR w="6350" cap="flat" cmpd="sng" algn="ctr">
-                      <a:solidFill>
-                        <a:srgbClr val="C9D6D3"/>
-                      </a:solidFill>
-                      <a:prstDash val="solid"/>
-                      <a:round/>
-                      <a:headEnd type="none" w="med" len="med"/>
-                      <a:tailEnd type="none" w="med" len="med"/>
-                    </a:lnR>
-                    <a:lnT w="6350" cap="flat" cmpd="sng" algn="ctr">
-                      <a:solidFill>
-                        <a:srgbClr val="C9D6D3"/>
-                      </a:solidFill>
-                      <a:prstDash val="solid"/>
-                      <a:round/>
-                      <a:headEnd type="none" w="med" len="med"/>
-                      <a:tailEnd type="none" w="med" len="med"/>
-                    </a:lnT>
-                    <a:lnB w="6350" cap="flat" cmpd="sng" algn="ctr">
-                      <a:solidFill>
-                        <a:srgbClr val="C9D6D3"/>
-                      </a:solidFill>
-                      <a:prstDash val="solid"/>
-                      <a:round/>
-                      <a:headEnd type="none" w="med" len="med"/>
-                      <a:tailEnd type="none" w="med" len="med"/>
-                    </a:lnB>
-                    <a:solidFill>
-                      <a:srgbClr val="FFFFFF"/>
-                    </a:solidFill>
-                  </a:tcPr>
-                </a:tc>
-                <a:tc>
-                  <a:txBody>
-                    <a:bodyPr/>
-                    <a:lstStyle/>
-                    <a:p>
-                      <a:pPr algn="l" indent="0" marL="0">
-                        <a:buNone/>
-                      </a:pPr>
-                      <a:r>
-                        <a:rPr lang="en-US" sz="1100" dirty="0">
-                          <a:solidFill>
-                            <a:schemeClr val="tx1"/>
-                          </a:solidFill>
-                        </a:rPr>
-                        <a:t>210</a:t>
-                      </a:r>
-                      <a:endParaRPr lang="en-US" sz="1100" dirty="0"/>
-                    </a:p>
-                  </a:txBody>
-                  <a:tcPr marL="63500" marR="63500" marT="38100" marB="38100" anchor="ctr">
-                    <a:lnL w="6350" cap="flat" cmpd="sng" algn="ctr">
-                      <a:solidFill>
-                        <a:srgbClr val="C9D6D3"/>
-                      </a:solidFill>
-                      <a:prstDash val="solid"/>
-                      <a:round/>
-                      <a:headEnd type="none" w="med" len="med"/>
-                      <a:tailEnd type="none" w="med" len="med"/>
-                    </a:lnL>
-                    <a:lnR w="6350" cap="flat" cmpd="sng" algn="ctr">
-                      <a:solidFill>
-                        <a:srgbClr val="C9D6D3"/>
-                      </a:solidFill>
-                      <a:prstDash val="solid"/>
-                      <a:round/>
-                      <a:headEnd type="none" w="med" len="med"/>
-                      <a:tailEnd type="none" w="med" len="med"/>
-                    </a:lnR>
-                    <a:lnT w="6350" cap="flat" cmpd="sng" algn="ctr">
-                      <a:solidFill>
-                        <a:srgbClr val="C9D6D3"/>
-                      </a:solidFill>
-                      <a:prstDash val="solid"/>
-                      <a:round/>
-                      <a:headEnd type="none" w="med" len="med"/>
-                      <a:tailEnd type="none" w="med" len="med"/>
-                    </a:lnT>
-                    <a:lnB w="6350" cap="flat" cmpd="sng" algn="ctr">
-                      <a:solidFill>
-                        <a:srgbClr val="C9D6D3"/>
-                      </a:solidFill>
-                      <a:prstDash val="solid"/>
-                      <a:round/>
-                      <a:headEnd type="none" w="med" len="med"/>
-                      <a:tailEnd type="none" w="med" len="med"/>
-                    </a:lnB>
-                    <a:solidFill>
-                      <a:srgbClr val="FFFFFF"/>
-                    </a:solidFill>
-                  </a:tcPr>
-                </a:tc>
-                <a:tc>
-                  <a:txBody>
-                    <a:bodyPr/>
-                    <a:lstStyle/>
-                    <a:p>
-                      <a:pPr algn="l" indent="0" marL="0">
-                        <a:buNone/>
-                      </a:pPr>
-                      <a:r>
-                        <a:rPr lang="en-US" sz="1100" dirty="0">
-                          <a:solidFill>
-                            <a:schemeClr val="tx1"/>
-                          </a:solidFill>
-                        </a:rPr>
-                        <a:t>209</a:t>
-                      </a:r>
-                      <a:endParaRPr lang="en-US" sz="1100" dirty="0"/>
-                    </a:p>
-                  </a:txBody>
-                  <a:tcPr marL="63500" marR="63500" marT="38100" marB="38100" anchor="ctr">
-                    <a:lnL w="6350" cap="flat" cmpd="sng" algn="ctr">
-                      <a:solidFill>
-                        <a:srgbClr val="C9D6D3"/>
-                      </a:solidFill>
-                      <a:prstDash val="solid"/>
-                      <a:round/>
-                      <a:headEnd type="none" w="med" len="med"/>
-                      <a:tailEnd type="none" w="med" len="med"/>
-                    </a:lnL>
-                    <a:lnR w="6350" cap="flat" cmpd="sng" algn="ctr">
-                      <a:solidFill>
-                        <a:srgbClr val="C9D6D3"/>
-                      </a:solidFill>
-                      <a:prstDash val="solid"/>
-                      <a:round/>
-                      <a:headEnd type="none" w="med" len="med"/>
-                      <a:tailEnd type="none" w="med" len="med"/>
-                    </a:lnR>
-                    <a:lnT w="6350" cap="flat" cmpd="sng" algn="ctr">
-                      <a:solidFill>
-                        <a:srgbClr val="C9D6D3"/>
-                      </a:solidFill>
-                      <a:prstDash val="solid"/>
-                      <a:round/>
-                      <a:headEnd type="none" w="med" len="med"/>
-                      <a:tailEnd type="none" w="med" len="med"/>
-                    </a:lnT>
-                    <a:lnB w="6350" cap="flat" cmpd="sng" algn="ctr">
-                      <a:solidFill>
-                        <a:srgbClr val="C9D6D3"/>
-                      </a:solidFill>
-                      <a:prstDash val="solid"/>
-                      <a:round/>
-                      <a:headEnd type="none" w="med" len="med"/>
-                      <a:tailEnd type="none" w="med" len="med"/>
-                    </a:lnB>
-                    <a:solidFill>
-                      <a:srgbClr val="FFFFFF"/>
-                    </a:solidFill>
-                  </a:tcPr>
-                </a:tc>
-                <a:tc>
-                  <a:txBody>
-                    <a:bodyPr/>
-                    <a:lstStyle/>
-                    <a:p>
-                      <a:pPr algn="l" indent="0" marL="0">
-                        <a:buNone/>
-                      </a:pPr>
-                      <a:r>
-                        <a:rPr lang="en-US" sz="1100" dirty="0">
-                          <a:solidFill>
-                            <a:schemeClr val="tx1"/>
-                          </a:solidFill>
-                        </a:rPr>
-                        <a:t>210</a:t>
-                      </a:r>
-                      <a:endParaRPr lang="en-US" sz="1100" dirty="0"/>
-                    </a:p>
-                  </a:txBody>
-                  <a:tcPr marL="63500" marR="63500" marT="38100" marB="38100" anchor="ctr">
-                    <a:lnL w="6350" cap="flat" cmpd="sng" algn="ctr">
-                      <a:solidFill>
-                        <a:srgbClr val="C9D6D3"/>
-                      </a:solidFill>
-                      <a:prstDash val="solid"/>
-                      <a:round/>
-                      <a:headEnd type="none" w="med" len="med"/>
-                      <a:tailEnd type="none" w="med" len="med"/>
-                    </a:lnL>
-                    <a:lnR w="6350" cap="flat" cmpd="sng" algn="ctr">
-                      <a:solidFill>
-                        <a:srgbClr val="C9D6D3"/>
-                      </a:solidFill>
-                      <a:prstDash val="solid"/>
-                      <a:round/>
-                      <a:headEnd type="none" w="med" len="med"/>
-                      <a:tailEnd type="none" w="med" len="med"/>
-                    </a:lnR>
-                    <a:lnT w="6350" cap="flat" cmpd="sng" algn="ctr">
-                      <a:solidFill>
-                        <a:srgbClr val="C9D6D3"/>
-                      </a:solidFill>
-                      <a:prstDash val="solid"/>
-                      <a:round/>
-                      <a:headEnd type="none" w="med" len="med"/>
-                      <a:tailEnd type="none" w="med" len="med"/>
-                    </a:lnT>
-                    <a:lnB w="6350" cap="flat" cmpd="sng" algn="ctr">
-                      <a:solidFill>
-                        <a:srgbClr val="C9D6D3"/>
-                      </a:solidFill>
-                      <a:prstDash val="solid"/>
-                      <a:round/>
-                      <a:headEnd type="none" w="med" len="med"/>
-                      <a:tailEnd type="none" w="med" len="med"/>
-                    </a:lnB>
-                    <a:solidFill>
-                      <a:srgbClr val="FFFFFF"/>
-                    </a:solidFill>
-                  </a:tcPr>
-                </a:tc>
-              </a:tr>
-              <a:tr h="274320">
-                <a:tc>
-                  <a:txBody>
-                    <a:bodyPr/>
-                    <a:lstStyle/>
-                    <a:p>
-                      <a:pPr algn="l" indent="0" marL="0">
-                        <a:buNone/>
-                      </a:pPr>
-                      <a:r>
-                        <a:rPr lang="en-US" sz="1100" b="1" dirty="0">
-                          <a:solidFill>
-                            <a:schemeClr val="tx1"/>
-                          </a:solidFill>
-                        </a:rPr>
-                        <a:t>ПДВ 21% з 2027</a:t>
-                      </a:r>
-                      <a:endParaRPr lang="en-US" sz="1100" dirty="0"/>
-                    </a:p>
-                  </a:txBody>
-                  <a:tcPr marL="63500" marR="63500" marT="38100" marB="38100" anchor="ctr">
-                    <a:lnL w="6350" cap="flat" cmpd="sng" algn="ctr">
-                      <a:solidFill>
-                        <a:srgbClr val="C9D6D3"/>
-                      </a:solidFill>
-                      <a:prstDash val="solid"/>
-                      <a:round/>
-                      <a:headEnd type="none" w="med" len="med"/>
-                      <a:tailEnd type="none" w="med" len="med"/>
-                    </a:lnL>
-                    <a:lnR w="6350" cap="flat" cmpd="sng" algn="ctr">
-                      <a:solidFill>
-                        <a:srgbClr val="C9D6D3"/>
-                      </a:solidFill>
-                      <a:prstDash val="solid"/>
-                      <a:round/>
-                      <a:headEnd type="none" w="med" len="med"/>
-                      <a:tailEnd type="none" w="med" len="med"/>
-                    </a:lnR>
-                    <a:lnT w="6350" cap="flat" cmpd="sng" algn="ctr">
-                      <a:solidFill>
-                        <a:srgbClr val="C9D6D3"/>
-                      </a:solidFill>
-                      <a:prstDash val="solid"/>
-                      <a:round/>
-                      <a:headEnd type="none" w="med" len="med"/>
-                      <a:tailEnd type="none" w="med" len="med"/>
-                    </a:lnT>
-                    <a:lnB w="6350" cap="flat" cmpd="sng" algn="ctr">
-                      <a:solidFill>
-                        <a:srgbClr val="C9D6D3"/>
-                      </a:solidFill>
-                      <a:prstDash val="solid"/>
-                      <a:round/>
-                      <a:headEnd type="none" w="med" len="med"/>
-                      <a:tailEnd type="none" w="med" len="med"/>
-                    </a:lnB>
-                    <a:solidFill>
-                      <a:srgbClr val="EAF1EF"/>
-                    </a:solidFill>
-                  </a:tcPr>
-                </a:tc>
-                <a:tc>
-                  <a:txBody>
-                    <a:bodyPr/>
-                    <a:lstStyle/>
-                    <a:p>
-                      <a:pPr algn="l" indent="0" marL="0">
-                        <a:buNone/>
-                      </a:pPr>
-                      <a:r>
-                        <a:rPr lang="en-US" sz="1100" dirty="0">
-                          <a:solidFill>
-                            <a:schemeClr val="tx1"/>
-                          </a:solidFill>
-                        </a:rPr>
-                        <a:t>5 / 5</a:t>
-                      </a:r>
-                      <a:endParaRPr lang="en-US" sz="1100" dirty="0"/>
-                    </a:p>
-                  </a:txBody>
-                  <a:tcPr marL="63500" marR="63500" marT="38100" marB="38100" anchor="ctr">
-                    <a:lnL w="6350" cap="flat" cmpd="sng" algn="ctr">
-                      <a:solidFill>
-                        <a:srgbClr val="C9D6D3"/>
-                      </a:solidFill>
-                      <a:prstDash val="solid"/>
-                      <a:round/>
-                      <a:headEnd type="none" w="med" len="med"/>
-                      <a:tailEnd type="none" w="med" len="med"/>
-                    </a:lnL>
-                    <a:lnR w="6350" cap="flat" cmpd="sng" algn="ctr">
-                      <a:solidFill>
-                        <a:srgbClr val="C9D6D3"/>
-                      </a:solidFill>
-                      <a:prstDash val="solid"/>
-                      <a:round/>
-                      <a:headEnd type="none" w="med" len="med"/>
-                      <a:tailEnd type="none" w="med" len="med"/>
-                    </a:lnR>
-                    <a:lnT w="6350" cap="flat" cmpd="sng" algn="ctr">
-                      <a:solidFill>
-                        <a:srgbClr val="C9D6D3"/>
-                      </a:solidFill>
-                      <a:prstDash val="solid"/>
-                      <a:round/>
-                      <a:headEnd type="none" w="med" len="med"/>
-                      <a:tailEnd type="none" w="med" len="med"/>
-                    </a:lnT>
-                    <a:lnB w="6350" cap="flat" cmpd="sng" algn="ctr">
-                      <a:solidFill>
-                        <a:srgbClr val="C9D6D3"/>
-                      </a:solidFill>
-                      <a:prstDash val="solid"/>
-                      <a:round/>
-                      <a:headEnd type="none" w="med" len="med"/>
-                      <a:tailEnd type="none" w="med" len="med"/>
-                    </a:lnB>
-                    <a:solidFill>
-                      <a:srgbClr val="EAF1EF"/>
-                    </a:solidFill>
-                  </a:tcPr>
-                </a:tc>
-                <a:tc>
-                  <a:txBody>
-                    <a:bodyPr/>
-                    <a:lstStyle/>
-                    <a:p>
-                      <a:pPr algn="l" indent="0" marL="0">
-                        <a:buNone/>
-                      </a:pPr>
-                      <a:r>
-                        <a:rPr lang="en-US" sz="1100" dirty="0">
-                          <a:solidFill>
-                            <a:schemeClr val="tx1"/>
-                          </a:solidFill>
-                        </a:rPr>
-                        <a:t>144</a:t>
-                      </a:r>
-                      <a:endParaRPr lang="en-US" sz="1100" dirty="0"/>
-                    </a:p>
-                  </a:txBody>
-                  <a:tcPr marL="63500" marR="63500" marT="38100" marB="38100" anchor="ctr">
-                    <a:lnL w="6350" cap="flat" cmpd="sng" algn="ctr">
-                      <a:solidFill>
-                        <a:srgbClr val="C9D6D3"/>
-                      </a:solidFill>
-                      <a:prstDash val="solid"/>
-                      <a:round/>
-                      <a:headEnd type="none" w="med" len="med"/>
-                      <a:tailEnd type="none" w="med" len="med"/>
-                    </a:lnL>
-                    <a:lnR w="6350" cap="flat" cmpd="sng" algn="ctr">
-                      <a:solidFill>
-                        <a:srgbClr val="C9D6D3"/>
-                      </a:solidFill>
-                      <a:prstDash val="solid"/>
-                      <a:round/>
-                      <a:headEnd type="none" w="med" len="med"/>
-                      <a:tailEnd type="none" w="med" len="med"/>
-                    </a:lnR>
-                    <a:lnT w="6350" cap="flat" cmpd="sng" algn="ctr">
-                      <a:solidFill>
-                        <a:srgbClr val="C9D6D3"/>
-                      </a:solidFill>
-                      <a:prstDash val="solid"/>
-                      <a:round/>
-                      <a:headEnd type="none" w="med" len="med"/>
-                      <a:tailEnd type="none" w="med" len="med"/>
-                    </a:lnT>
-                    <a:lnB w="6350" cap="flat" cmpd="sng" algn="ctr">
-                      <a:solidFill>
-                        <a:srgbClr val="C9D6D3"/>
-                      </a:solidFill>
-                      <a:prstDash val="solid"/>
-                      <a:round/>
-                      <a:headEnd type="none" w="med" len="med"/>
-                      <a:tailEnd type="none" w="med" len="med"/>
-                    </a:lnB>
-                    <a:solidFill>
-                      <a:srgbClr val="EAF1EF"/>
-                    </a:solidFill>
-                  </a:tcPr>
-                </a:tc>
-                <a:tc>
-                  <a:txBody>
-                    <a:bodyPr/>
-                    <a:lstStyle/>
-                    <a:p>
-                      <a:pPr algn="l" indent="0" marL="0">
-                        <a:buNone/>
-                      </a:pPr>
-                      <a:r>
-                        <a:rPr lang="en-US" sz="1100" dirty="0">
-                          <a:solidFill>
-                            <a:schemeClr val="tx1"/>
-                          </a:solidFill>
-                        </a:rPr>
-                        <a:t>143</a:t>
-                      </a:r>
-                      <a:endParaRPr lang="en-US" sz="1100" dirty="0"/>
-                    </a:p>
-                  </a:txBody>
-                  <a:tcPr marL="63500" marR="63500" marT="38100" marB="38100" anchor="ctr">
-                    <a:lnL w="6350" cap="flat" cmpd="sng" algn="ctr">
-                      <a:solidFill>
-                        <a:srgbClr val="C9D6D3"/>
-                      </a:solidFill>
-                      <a:prstDash val="solid"/>
-                      <a:round/>
-                      <a:headEnd type="none" w="med" len="med"/>
-                      <a:tailEnd type="none" w="med" len="med"/>
-                    </a:lnL>
-                    <a:lnR w="6350" cap="flat" cmpd="sng" algn="ctr">
-                      <a:solidFill>
-                        <a:srgbClr val="C9D6D3"/>
-                      </a:solidFill>
-                      <a:prstDash val="solid"/>
-                      <a:round/>
-                      <a:headEnd type="none" w="med" len="med"/>
-                      <a:tailEnd type="none" w="med" len="med"/>
-                    </a:lnR>
-                    <a:lnT w="6350" cap="flat" cmpd="sng" algn="ctr">
-                      <a:solidFill>
-                        <a:srgbClr val="C9D6D3"/>
-                      </a:solidFill>
-                      <a:prstDash val="solid"/>
-                      <a:round/>
-                      <a:headEnd type="none" w="med" len="med"/>
-                      <a:tailEnd type="none" w="med" len="med"/>
-                    </a:lnT>
-                    <a:lnB w="6350" cap="flat" cmpd="sng" algn="ctr">
-                      <a:solidFill>
-                        <a:srgbClr val="C9D6D3"/>
-                      </a:solidFill>
-                      <a:prstDash val="solid"/>
-                      <a:round/>
-                      <a:headEnd type="none" w="med" len="med"/>
-                      <a:tailEnd type="none" w="med" len="med"/>
-                    </a:lnB>
-                    <a:solidFill>
-                      <a:srgbClr val="EAF1EF"/>
-                    </a:solidFill>
-                  </a:tcPr>
-                </a:tc>
-                <a:tc>
-                  <a:txBody>
-                    <a:bodyPr/>
-                    <a:lstStyle/>
-                    <a:p>
-                      <a:pPr algn="l" indent="0" marL="0">
-                        <a:buNone/>
-                      </a:pPr>
-                      <a:r>
-                        <a:rPr lang="en-US" sz="1100" dirty="0">
-                          <a:solidFill>
-                            <a:schemeClr val="tx1"/>
-                          </a:solidFill>
-                        </a:rPr>
-                        <a:t>143</a:t>
-                      </a:r>
-                      <a:endParaRPr lang="en-US" sz="1100" dirty="0"/>
-                    </a:p>
-                  </a:txBody>
-                  <a:tcPr marL="63500" marR="63500" marT="38100" marB="38100" anchor="ctr">
-                    <a:lnL w="6350" cap="flat" cmpd="sng" algn="ctr">
-                      <a:solidFill>
-                        <a:srgbClr val="C9D6D3"/>
-                      </a:solidFill>
-                      <a:prstDash val="solid"/>
-                      <a:round/>
-                      <a:headEnd type="none" w="med" len="med"/>
-                      <a:tailEnd type="none" w="med" len="med"/>
-                    </a:lnL>
-                    <a:lnR w="6350" cap="flat" cmpd="sng" algn="ctr">
-                      <a:solidFill>
-                        <a:srgbClr val="C9D6D3"/>
-                      </a:solidFill>
-                      <a:prstDash val="solid"/>
-                      <a:round/>
-                      <a:headEnd type="none" w="med" len="med"/>
-                      <a:tailEnd type="none" w="med" len="med"/>
-                    </a:lnR>
-                    <a:lnT w="6350" cap="flat" cmpd="sng" algn="ctr">
-                      <a:solidFill>
-                        <a:srgbClr val="C9D6D3"/>
-                      </a:solidFill>
-                      <a:prstDash val="solid"/>
-                      <a:round/>
-                      <a:headEnd type="none" w="med" len="med"/>
-                      <a:tailEnd type="none" w="med" len="med"/>
-                    </a:lnT>
-                    <a:lnB w="6350" cap="flat" cmpd="sng" algn="ctr">
-                      <a:solidFill>
-                        <a:srgbClr val="C9D6D3"/>
-                      </a:solidFill>
-                      <a:prstDash val="solid"/>
-                      <a:round/>
-                      <a:headEnd type="none" w="med" len="med"/>
-                      <a:tailEnd type="none" w="med" len="med"/>
-                    </a:lnB>
-                    <a:solidFill>
-                      <a:srgbClr val="EAF1EF"/>
-                    </a:solidFill>
-                  </a:tcPr>
-                </a:tc>
-                <a:tc>
-                  <a:txBody>
-                    <a:bodyPr/>
-                    <a:lstStyle/>
-                    <a:p>
-                      <a:pPr algn="l" indent="0" marL="0">
-                        <a:buNone/>
-                      </a:pPr>
-                      <a:r>
-                        <a:rPr lang="en-US" sz="1100" dirty="0">
-                          <a:solidFill>
-                            <a:schemeClr val="tx1"/>
-                          </a:solidFill>
-                        </a:rPr>
-                        <a:t>145</a:t>
-                      </a:r>
-                      <a:endParaRPr lang="en-US" sz="1100" dirty="0"/>
-                    </a:p>
-                  </a:txBody>
-                  <a:tcPr marL="63500" marR="63500" marT="38100" marB="38100" anchor="ctr">
-                    <a:lnL w="6350" cap="flat" cmpd="sng" algn="ctr">
-                      <a:solidFill>
-                        <a:srgbClr val="C9D6D3"/>
-                      </a:solidFill>
-                      <a:prstDash val="solid"/>
-                      <a:round/>
-                      <a:headEnd type="none" w="med" len="med"/>
-                      <a:tailEnd type="none" w="med" len="med"/>
-                    </a:lnL>
-                    <a:lnR w="6350" cap="flat" cmpd="sng" algn="ctr">
-                      <a:solidFill>
-                        <a:srgbClr val="C9D6D3"/>
-                      </a:solidFill>
-                      <a:prstDash val="solid"/>
-                      <a:round/>
-                      <a:headEnd type="none" w="med" len="med"/>
-                      <a:tailEnd type="none" w="med" len="med"/>
-                    </a:lnR>
-                    <a:lnT w="6350" cap="flat" cmpd="sng" algn="ctr">
-                      <a:solidFill>
-                        <a:srgbClr val="C9D6D3"/>
-                      </a:solidFill>
-                      <a:prstDash val="solid"/>
-                      <a:round/>
-                      <a:headEnd type="none" w="med" len="med"/>
-                      <a:tailEnd type="none" w="med" len="med"/>
-                    </a:lnT>
-                    <a:lnB w="6350" cap="flat" cmpd="sng" algn="ctr">
-                      <a:solidFill>
-                        <a:srgbClr val="C9D6D3"/>
-                      </a:solidFill>
-                      <a:prstDash val="solid"/>
-                      <a:round/>
-                      <a:headEnd type="none" w="med" len="med"/>
-                      <a:tailEnd type="none" w="med" len="med"/>
-                    </a:lnB>
-                    <a:solidFill>
-                      <a:srgbClr val="EAF1EF"/>
-                    </a:solidFill>
-                  </a:tcPr>
-                </a:tc>
-                <a:tc>
-                  <a:txBody>
-                    <a:bodyPr/>
-                    <a:lstStyle/>
-                    <a:p>
-                      <a:pPr algn="l" indent="0" marL="0">
-                        <a:buNone/>
-                      </a:pPr>
-                      <a:r>
-                        <a:rPr lang="en-US" sz="1100" dirty="0">
-                          <a:solidFill>
-                            <a:schemeClr val="tx1"/>
-                          </a:solidFill>
-                        </a:rPr>
-                        <a:t>148</a:t>
-                      </a:r>
-                      <a:endParaRPr lang="en-US" sz="1100" dirty="0"/>
-                    </a:p>
-                  </a:txBody>
-                  <a:tcPr marL="63500" marR="63500" marT="38100" marB="38100" anchor="ctr">
-                    <a:lnL w="6350" cap="flat" cmpd="sng" algn="ctr">
-                      <a:solidFill>
-                        <a:srgbClr val="C9D6D3"/>
-                      </a:solidFill>
-                      <a:prstDash val="solid"/>
-                      <a:round/>
-                      <a:headEnd type="none" w="med" len="med"/>
-                      <a:tailEnd type="none" w="med" len="med"/>
-                    </a:lnL>
-                    <a:lnR w="6350" cap="flat" cmpd="sng" algn="ctr">
-                      <a:solidFill>
-                        <a:srgbClr val="C9D6D3"/>
-                      </a:solidFill>
-                      <a:prstDash val="solid"/>
-                      <a:round/>
-                      <a:headEnd type="none" w="med" len="med"/>
-                      <a:tailEnd type="none" w="med" len="med"/>
-                    </a:lnR>
-                    <a:lnT w="6350" cap="flat" cmpd="sng" algn="ctr">
-                      <a:solidFill>
-                        <a:srgbClr val="C9D6D3"/>
-                      </a:solidFill>
-                      <a:prstDash val="solid"/>
-                      <a:round/>
-                      <a:headEnd type="none" w="med" len="med"/>
-                      <a:tailEnd type="none" w="med" len="med"/>
-                    </a:lnT>
-                    <a:lnB w="6350" cap="flat" cmpd="sng" algn="ctr">
-                      <a:solidFill>
-                        <a:srgbClr val="C9D6D3"/>
-                      </a:solidFill>
-                      <a:prstDash val="solid"/>
-                      <a:round/>
-                      <a:headEnd type="none" w="med" len="med"/>
-                      <a:tailEnd type="none" w="med" len="med"/>
-                    </a:lnB>
-                    <a:solidFill>
-                      <a:srgbClr val="EAF1EF"/>
-                    </a:solidFill>
-                  </a:tcPr>
-                </a:tc>
-              </a:tr>
-              <a:tr h="274320">
-                <a:tc>
-                  <a:txBody>
-                    <a:bodyPr/>
-                    <a:lstStyle/>
-                    <a:p>
-                      <a:pPr algn="l" indent="0" marL="0">
-                        <a:buNone/>
-                      </a:pPr>
-                      <a:r>
-                        <a:rPr lang="en-US" sz="1100" b="1" dirty="0">
-                          <a:solidFill>
-                            <a:schemeClr val="tx1"/>
-                          </a:solidFill>
-                        </a:rPr>
-                        <a:t>Слабкий попит</a:t>
-                      </a:r>
-                      <a:endParaRPr lang="en-US" sz="1100" dirty="0"/>
-                    </a:p>
-                  </a:txBody>
-                  <a:tcPr marL="63500" marR="63500" marT="38100" marB="38100" anchor="ctr">
-                    <a:lnL w="6350" cap="flat" cmpd="sng" algn="ctr">
-                      <a:solidFill>
-                        <a:srgbClr val="C9D6D3"/>
-                      </a:solidFill>
-                      <a:prstDash val="solid"/>
-                      <a:round/>
-                      <a:headEnd type="none" w="med" len="med"/>
-                      <a:tailEnd type="none" w="med" len="med"/>
-                    </a:lnL>
-                    <a:lnR w="6350" cap="flat" cmpd="sng" algn="ctr">
-                      <a:solidFill>
-                        <a:srgbClr val="C9D6D3"/>
-                      </a:solidFill>
-                      <a:prstDash val="solid"/>
-                      <a:round/>
-                      <a:headEnd type="none" w="med" len="med"/>
-                      <a:tailEnd type="none" w="med" len="med"/>
-                    </a:lnR>
-                    <a:lnT w="6350" cap="flat" cmpd="sng" algn="ctr">
-                      <a:solidFill>
-                        <a:srgbClr val="C9D6D3"/>
-                      </a:solidFill>
-                      <a:prstDash val="solid"/>
-                      <a:round/>
-                      <a:headEnd type="none" w="med" len="med"/>
-                      <a:tailEnd type="none" w="med" len="med"/>
-                    </a:lnT>
-                    <a:lnB w="6350" cap="flat" cmpd="sng" algn="ctr">
-                      <a:solidFill>
-                        <a:srgbClr val="C9D6D3"/>
-                      </a:solidFill>
-                      <a:prstDash val="solid"/>
-                      <a:round/>
-                      <a:headEnd type="none" w="med" len="med"/>
-                      <a:tailEnd type="none" w="med" len="med"/>
-                    </a:lnB>
-                    <a:solidFill>
-                      <a:srgbClr val="FFFFFF"/>
-                    </a:solidFill>
-                  </a:tcPr>
-                </a:tc>
-                <a:tc>
-                  <a:txBody>
-                    <a:bodyPr/>
-                    <a:lstStyle/>
-                    <a:p>
-                      <a:pPr algn="l" indent="0" marL="0">
-                        <a:buNone/>
-                      </a:pPr>
-                      <a:r>
-                        <a:rPr lang="en-US" sz="1100" dirty="0">
-                          <a:solidFill>
-                            <a:schemeClr val="tx1"/>
-                          </a:solidFill>
-                        </a:rPr>
-                        <a:t>8 / 10</a:t>
-                      </a:r>
-                      <a:endParaRPr lang="en-US" sz="1100" dirty="0"/>
-                    </a:p>
-                  </a:txBody>
-                  <a:tcPr marL="63500" marR="63500" marT="38100" marB="38100" anchor="ctr">
-                    <a:lnL w="6350" cap="flat" cmpd="sng" algn="ctr">
-                      <a:solidFill>
-                        <a:srgbClr val="C9D6D3"/>
-                      </a:solidFill>
-                      <a:prstDash val="solid"/>
-                      <a:round/>
-                      <a:headEnd type="none" w="med" len="med"/>
-                      <a:tailEnd type="none" w="med" len="med"/>
-                    </a:lnL>
-                    <a:lnR w="6350" cap="flat" cmpd="sng" algn="ctr">
-                      <a:solidFill>
-                        <a:srgbClr val="C9D6D3"/>
-                      </a:solidFill>
-                      <a:prstDash val="solid"/>
-                      <a:round/>
-                      <a:headEnd type="none" w="med" len="med"/>
-                      <a:tailEnd type="none" w="med" len="med"/>
-                    </a:lnR>
-                    <a:lnT w="6350" cap="flat" cmpd="sng" algn="ctr">
-                      <a:solidFill>
-                        <a:srgbClr val="C9D6D3"/>
-                      </a:solidFill>
-                      <a:prstDash val="solid"/>
-                      <a:round/>
-                      <a:headEnd type="none" w="med" len="med"/>
-                      <a:tailEnd type="none" w="med" len="med"/>
-                    </a:lnT>
-                    <a:lnB w="6350" cap="flat" cmpd="sng" algn="ctr">
-                      <a:solidFill>
-                        <a:srgbClr val="C9D6D3"/>
-                      </a:solidFill>
-                      <a:prstDash val="solid"/>
-                      <a:round/>
-                      <a:headEnd type="none" w="med" len="med"/>
-                      <a:tailEnd type="none" w="med" len="med"/>
-                    </a:lnB>
-                    <a:solidFill>
-                      <a:srgbClr val="FFFFFF"/>
-                    </a:solidFill>
-                  </a:tcPr>
-                </a:tc>
-                <a:tc>
-                  <a:txBody>
-                    <a:bodyPr/>
-                    <a:lstStyle/>
-                    <a:p>
-                      <a:pPr algn="l" indent="0" marL="0">
-                        <a:buNone/>
-                      </a:pPr>
-                      <a:r>
-                        <a:rPr lang="en-US" sz="1100" dirty="0">
-                          <a:solidFill>
-                            <a:schemeClr val="tx1"/>
-                          </a:solidFill>
-                        </a:rPr>
-                        <a:t>105</a:t>
-                      </a:r>
-                      <a:endParaRPr lang="en-US" sz="1100" dirty="0"/>
-                    </a:p>
-                  </a:txBody>
-                  <a:tcPr marL="63500" marR="63500" marT="38100" marB="38100" anchor="ctr">
-                    <a:lnL w="6350" cap="flat" cmpd="sng" algn="ctr">
-                      <a:solidFill>
-                        <a:srgbClr val="C9D6D3"/>
-                      </a:solidFill>
-                      <a:prstDash val="solid"/>
-                      <a:round/>
-                      <a:headEnd type="none" w="med" len="med"/>
-                      <a:tailEnd type="none" w="med" len="med"/>
-                    </a:lnL>
-                    <a:lnR w="6350" cap="flat" cmpd="sng" algn="ctr">
-                      <a:solidFill>
-                        <a:srgbClr val="C9D6D3"/>
-                      </a:solidFill>
-                      <a:prstDash val="solid"/>
-                      <a:round/>
-                      <a:headEnd type="none" w="med" len="med"/>
-                      <a:tailEnd type="none" w="med" len="med"/>
-                    </a:lnR>
-                    <a:lnT w="6350" cap="flat" cmpd="sng" algn="ctr">
-                      <a:solidFill>
-                        <a:srgbClr val="C9D6D3"/>
-                      </a:solidFill>
-                      <a:prstDash val="solid"/>
-                      <a:round/>
-                      <a:headEnd type="none" w="med" len="med"/>
-                      <a:tailEnd type="none" w="med" len="med"/>
-                    </a:lnT>
-                    <a:lnB w="6350" cap="flat" cmpd="sng" algn="ctr">
-                      <a:solidFill>
-                        <a:srgbClr val="C9D6D3"/>
-                      </a:solidFill>
-                      <a:prstDash val="solid"/>
-                      <a:round/>
-                      <a:headEnd type="none" w="med" len="med"/>
-                      <a:tailEnd type="none" w="med" len="med"/>
-                    </a:lnB>
-                    <a:solidFill>
-                      <a:srgbClr val="FFFFFF"/>
-                    </a:solidFill>
-                  </a:tcPr>
-                </a:tc>
-                <a:tc>
-                  <a:txBody>
-                    <a:bodyPr/>
-                    <a:lstStyle/>
-                    <a:p>
-                      <a:pPr algn="l" indent="0" marL="0">
-                        <a:buNone/>
-                      </a:pPr>
-                      <a:r>
-                        <a:rPr lang="en-US" sz="1100" dirty="0">
-                          <a:solidFill>
-                            <a:schemeClr val="tx1"/>
-                          </a:solidFill>
-                        </a:rPr>
-                        <a:t>106</a:t>
-                      </a:r>
-                      <a:endParaRPr lang="en-US" sz="1100" dirty="0"/>
-                    </a:p>
-                  </a:txBody>
-                  <a:tcPr marL="63500" marR="63500" marT="38100" marB="38100" anchor="ctr">
-                    <a:lnL w="6350" cap="flat" cmpd="sng" algn="ctr">
-                      <a:solidFill>
-                        <a:srgbClr val="C9D6D3"/>
-                      </a:solidFill>
-                      <a:prstDash val="solid"/>
-                      <a:round/>
-                      <a:headEnd type="none" w="med" len="med"/>
-                      <a:tailEnd type="none" w="med" len="med"/>
-                    </a:lnL>
-                    <a:lnR w="6350" cap="flat" cmpd="sng" algn="ctr">
-                      <a:solidFill>
-                        <a:srgbClr val="C9D6D3"/>
-                      </a:solidFill>
-                      <a:prstDash val="solid"/>
-                      <a:round/>
-                      <a:headEnd type="none" w="med" len="med"/>
-                      <a:tailEnd type="none" w="med" len="med"/>
-                    </a:lnR>
-                    <a:lnT w="6350" cap="flat" cmpd="sng" algn="ctr">
-                      <a:solidFill>
-                        <a:srgbClr val="C9D6D3"/>
-                      </a:solidFill>
-                      <a:prstDash val="solid"/>
-                      <a:round/>
-                      <a:headEnd type="none" w="med" len="med"/>
-                      <a:tailEnd type="none" w="med" len="med"/>
-                    </a:lnT>
-                    <a:lnB w="6350" cap="flat" cmpd="sng" algn="ctr">
-                      <a:solidFill>
-                        <a:srgbClr val="C9D6D3"/>
-                      </a:solidFill>
-                      <a:prstDash val="solid"/>
-                      <a:round/>
-                      <a:headEnd type="none" w="med" len="med"/>
-                      <a:tailEnd type="none" w="med" len="med"/>
-                    </a:lnB>
-                    <a:solidFill>
-                      <a:srgbClr val="FFFFFF"/>
-                    </a:solidFill>
-                  </a:tcPr>
-                </a:tc>
-                <a:tc>
-                  <a:txBody>
-                    <a:bodyPr/>
-                    <a:lstStyle/>
-                    <a:p>
-                      <a:pPr algn="l" indent="0" marL="0">
-                        <a:buNone/>
-                      </a:pPr>
-                      <a:r>
-                        <a:rPr lang="en-US" sz="1100" dirty="0">
-                          <a:solidFill>
-                            <a:schemeClr val="tx1"/>
-                          </a:solidFill>
-                        </a:rPr>
-                        <a:t>109</a:t>
-                      </a:r>
-                      <a:endParaRPr lang="en-US" sz="1100" dirty="0"/>
-                    </a:p>
-                  </a:txBody>
-                  <a:tcPr marL="63500" marR="63500" marT="38100" marB="38100" anchor="ctr">
-                    <a:lnL w="6350" cap="flat" cmpd="sng" algn="ctr">
-                      <a:solidFill>
-                        <a:srgbClr val="C9D6D3"/>
-                      </a:solidFill>
-                      <a:prstDash val="solid"/>
-                      <a:round/>
-                      <a:headEnd type="none" w="med" len="med"/>
-                      <a:tailEnd type="none" w="med" len="med"/>
-                    </a:lnL>
-                    <a:lnR w="6350" cap="flat" cmpd="sng" algn="ctr">
-                      <a:solidFill>
-                        <a:srgbClr val="C9D6D3"/>
-                      </a:solidFill>
-                      <a:prstDash val="solid"/>
-                      <a:round/>
-                      <a:headEnd type="none" w="med" len="med"/>
-                      <a:tailEnd type="none" w="med" len="med"/>
-                    </a:lnR>
-                    <a:lnT w="6350" cap="flat" cmpd="sng" algn="ctr">
-                      <a:solidFill>
-                        <a:srgbClr val="C9D6D3"/>
-                      </a:solidFill>
-                      <a:prstDash val="solid"/>
-                      <a:round/>
-                      <a:headEnd type="none" w="med" len="med"/>
-                      <a:tailEnd type="none" w="med" len="med"/>
-                    </a:lnT>
-                    <a:lnB w="6350" cap="flat" cmpd="sng" algn="ctr">
-                      <a:solidFill>
-                        <a:srgbClr val="C9D6D3"/>
-                      </a:solidFill>
-                      <a:prstDash val="solid"/>
-                      <a:round/>
-                      <a:headEnd type="none" w="med" len="med"/>
-                      <a:tailEnd type="none" w="med" len="med"/>
-                    </a:lnB>
-                    <a:solidFill>
-                      <a:srgbClr val="FFFFFF"/>
-                    </a:solidFill>
-                  </a:tcPr>
-                </a:tc>
-                <a:tc>
-                  <a:txBody>
-                    <a:bodyPr/>
-                    <a:lstStyle/>
-                    <a:p>
-                      <a:pPr algn="l" indent="0" marL="0">
-                        <a:buNone/>
-                      </a:pPr>
-                      <a:r>
-                        <a:rPr lang="en-US" sz="1100" dirty="0">
-                          <a:solidFill>
-                            <a:schemeClr val="tx1"/>
-                          </a:solidFill>
-                        </a:rPr>
-                        <a:t>112</a:t>
-                      </a:r>
-                      <a:endParaRPr lang="en-US" sz="1100" dirty="0"/>
-                    </a:p>
-                  </a:txBody>
-                  <a:tcPr marL="63500" marR="63500" marT="38100" marB="38100" anchor="ctr">
-                    <a:lnL w="6350" cap="flat" cmpd="sng" algn="ctr">
-                      <a:solidFill>
-                        <a:srgbClr val="C9D6D3"/>
-                      </a:solidFill>
-                      <a:prstDash val="solid"/>
-                      <a:round/>
-                      <a:headEnd type="none" w="med" len="med"/>
-                      <a:tailEnd type="none" w="med" len="med"/>
-                    </a:lnL>
-                    <a:lnR w="6350" cap="flat" cmpd="sng" algn="ctr">
-                      <a:solidFill>
-                        <a:srgbClr val="C9D6D3"/>
-                      </a:solidFill>
-                      <a:prstDash val="solid"/>
-                      <a:round/>
-                      <a:headEnd type="none" w="med" len="med"/>
-                      <a:tailEnd type="none" w="med" len="med"/>
-                    </a:lnR>
-                    <a:lnT w="6350" cap="flat" cmpd="sng" algn="ctr">
-                      <a:solidFill>
-                        <a:srgbClr val="C9D6D3"/>
-                      </a:solidFill>
-                      <a:prstDash val="solid"/>
-                      <a:round/>
-                      <a:headEnd type="none" w="med" len="med"/>
-                      <a:tailEnd type="none" w="med" len="med"/>
-                    </a:lnT>
-                    <a:lnB w="6350" cap="flat" cmpd="sng" algn="ctr">
-                      <a:solidFill>
-                        <a:srgbClr val="C9D6D3"/>
-                      </a:solidFill>
-                      <a:prstDash val="solid"/>
-                      <a:round/>
-                      <a:headEnd type="none" w="med" len="med"/>
-                      <a:tailEnd type="none" w="med" len="med"/>
-                    </a:lnB>
-                    <a:solidFill>
-                      <a:srgbClr val="FFFFFF"/>
-                    </a:solidFill>
-                  </a:tcPr>
-                </a:tc>
                 <a:tc>
                   <a:txBody>
                     <a:bodyPr/>
@@ -33000,7 +33814,7 @@
                       <a:tailEnd type="none" w="med" len="med"/>
                     </a:lnB>
                     <a:solidFill>
-                      <a:srgbClr val="FFFFFF"/>
+                      <a:srgbClr val="EAF1EF"/>
                     </a:solidFill>
                   </a:tcPr>
                 </a:tc>
@@ -33063,7 +33877,7 @@
                       <a:tailEnd type="none" w="med" len="med"/>
                     </a:lnB>
                     <a:solidFill>
-                      <a:srgbClr val="EAF1EF"/>
+                      <a:srgbClr val="FFFFFF"/>
                     </a:solidFill>
                   </a:tcPr>
                 </a:tc>
@@ -33124,7 +33938,7 @@
                       <a:tailEnd type="none" w="med" len="med"/>
                     </a:lnB>
                     <a:solidFill>
-                      <a:srgbClr val="EAF1EF"/>
+                      <a:srgbClr val="FFFFFF"/>
                     </a:solidFill>
                   </a:tcPr>
                 </a:tc>
@@ -33185,7 +33999,7 @@
                       <a:tailEnd type="none" w="med" len="med"/>
                     </a:lnB>
                     <a:solidFill>
-                      <a:srgbClr val="EAF1EF"/>
+                      <a:srgbClr val="FFFFFF"/>
                     </a:solidFill>
                   </a:tcPr>
                 </a:tc>
@@ -33246,7 +34060,7 @@
                       <a:tailEnd type="none" w="med" len="med"/>
                     </a:lnB>
                     <a:solidFill>
-                      <a:srgbClr val="EAF1EF"/>
+                      <a:srgbClr val="FFFFFF"/>
                     </a:solidFill>
                   </a:tcPr>
                 </a:tc>
@@ -33307,7 +34121,7 @@
                       <a:tailEnd type="none" w="med" len="med"/>
                     </a:lnB>
                     <a:solidFill>
-                      <a:srgbClr val="EAF1EF"/>
+                      <a:srgbClr val="FFFFFF"/>
                     </a:solidFill>
                   </a:tcPr>
                 </a:tc>
@@ -33368,7 +34182,7 @@
                       <a:tailEnd type="none" w="med" len="med"/>
                     </a:lnB>
                     <a:solidFill>
-                      <a:srgbClr val="EAF1EF"/>
+                      <a:srgbClr val="FFFFFF"/>
                     </a:solidFill>
                   </a:tcPr>
                 </a:tc>
@@ -33429,7 +34243,7 @@
                       <a:tailEnd type="none" w="med" len="med"/>
                     </a:lnB>
                     <a:solidFill>
-                      <a:srgbClr val="EAF1EF"/>
+                      <a:srgbClr val="FFFFFF"/>
                     </a:solidFill>
                   </a:tcPr>
                 </a:tc>
@@ -33492,7 +34306,7 @@
                       <a:tailEnd type="none" w="med" len="med"/>
                     </a:lnB>
                     <a:solidFill>
-                      <a:srgbClr val="FFFFFF"/>
+                      <a:srgbClr val="EAF1EF"/>
                     </a:solidFill>
                   </a:tcPr>
                 </a:tc>
@@ -33545,7 +34359,7 @@
                       <a:tailEnd type="none" w="med" len="med"/>
                     </a:lnB>
                     <a:solidFill>
-                      <a:srgbClr val="FFFFFF"/>
+                      <a:srgbClr val="EAF1EF"/>
                     </a:solidFill>
                   </a:tcPr>
                 </a:tc>
@@ -33563,7 +34377,7 @@
                             <a:schemeClr val="tx1"/>
                           </a:solidFill>
                         </a:rPr>
-                        <a:t>131</a:t>
+                        <a:t>137</a:t>
                       </a:r>
                       <a:endParaRPr lang="en-US" sz="1100" dirty="0"/>
                     </a:p>
@@ -33606,7 +34420,7 @@
                       <a:tailEnd type="none" w="med" len="med"/>
                     </a:lnB>
                     <a:solidFill>
-                      <a:srgbClr val="FFFFFF"/>
+                      <a:srgbClr val="EAF1EF"/>
                     </a:solidFill>
                   </a:tcPr>
                 </a:tc>
@@ -33624,7 +34438,7 @@
                             <a:schemeClr val="tx1"/>
                           </a:solidFill>
                         </a:rPr>
-                        <a:t>129</a:t>
+                        <a:t>134</a:t>
                       </a:r>
                       <a:endParaRPr lang="en-US" sz="1100" dirty="0"/>
                     </a:p>
@@ -33667,7 +34481,7 @@
                       <a:tailEnd type="none" w="med" len="med"/>
                     </a:lnB>
                     <a:solidFill>
-                      <a:srgbClr val="FFFFFF"/>
+                      <a:srgbClr val="EAF1EF"/>
                     </a:solidFill>
                   </a:tcPr>
                 </a:tc>
@@ -33685,7 +34499,7 @@
                             <a:schemeClr val="tx1"/>
                           </a:solidFill>
                         </a:rPr>
-                        <a:t>129 ●</a:t>
+                        <a:t>133 ●</a:t>
                       </a:r>
                       <a:endParaRPr lang="en-US" sz="1100" dirty="0"/>
                     </a:p>
@@ -33728,7 +34542,7 @@
                       <a:tailEnd type="none" w="med" len="med"/>
                     </a:lnB>
                     <a:solidFill>
-                      <a:srgbClr val="FFFFFF"/>
+                      <a:srgbClr val="EAF1EF"/>
                     </a:solidFill>
                   </a:tcPr>
                 </a:tc>
@@ -33746,7 +34560,7 @@
                             <a:schemeClr val="tx1"/>
                           </a:solidFill>
                         </a:rPr>
-                        <a:t>130</a:t>
+                        <a:t>134</a:t>
                       </a:r>
                       <a:endParaRPr lang="en-US" sz="1100" dirty="0"/>
                     </a:p>
@@ -33789,7 +34603,7 @@
                       <a:tailEnd type="none" w="med" len="med"/>
                     </a:lnB>
                     <a:solidFill>
-                      <a:srgbClr val="FFFFFF"/>
+                      <a:srgbClr val="EAF1EF"/>
                     </a:solidFill>
                   </a:tcPr>
                 </a:tc>
@@ -33807,7 +34621,7 @@
                             <a:schemeClr val="tx1"/>
                           </a:solidFill>
                         </a:rPr>
-                        <a:t>132</a:t>
+                        <a:t>136</a:t>
                       </a:r>
                       <a:endParaRPr lang="en-US" sz="1100" dirty="0"/>
                     </a:p>
@@ -33850,7 +34664,7 @@
                       <a:tailEnd type="none" w="med" len="med"/>
                     </a:lnB>
                     <a:solidFill>
-                      <a:srgbClr val="FFFFFF"/>
+                      <a:srgbClr val="EAF1EF"/>
                     </a:solidFill>
                   </a:tcPr>
                 </a:tc>
@@ -33913,7 +34727,7 @@
                       <a:tailEnd type="none" w="med" len="med"/>
                     </a:lnB>
                     <a:solidFill>
-                      <a:srgbClr val="EAF1EF"/>
+                      <a:srgbClr val="FFFFFF"/>
                     </a:solidFill>
                   </a:tcPr>
                 </a:tc>
@@ -33966,7 +34780,7 @@
                       <a:tailEnd type="none" w="med" len="med"/>
                     </a:lnB>
                     <a:solidFill>
-                      <a:srgbClr val="EAF1EF"/>
+                      <a:srgbClr val="FFFFFF"/>
                     </a:solidFill>
                   </a:tcPr>
                 </a:tc>
@@ -33984,7 +34798,7 @@
                             <a:schemeClr val="tx1"/>
                           </a:solidFill>
                         </a:rPr>
-                        <a:t>121</a:t>
+                        <a:t>126</a:t>
                       </a:r>
                       <a:endParaRPr lang="en-US" sz="1100" dirty="0"/>
                     </a:p>
@@ -34027,190 +34841,7 @@
                       <a:tailEnd type="none" w="med" len="med"/>
                     </a:lnB>
                     <a:solidFill>
-                      <a:srgbClr val="EAF1EF"/>
-                    </a:solidFill>
-                  </a:tcPr>
-                </a:tc>
-                <a:tc>
-                  <a:txBody>
-                    <a:bodyPr/>
-                    <a:lstStyle/>
-                    <a:p>
-                      <a:pPr algn="l" indent="0" marL="0">
-                        <a:buNone/>
-                      </a:pPr>
-                      <a:r>
-                        <a:rPr lang="en-US" sz="1100" dirty="0">
-                          <a:solidFill>
-                            <a:schemeClr val="tx1"/>
-                          </a:solidFill>
-                        </a:rPr>
-                        <a:t>120 ●</a:t>
-                      </a:r>
-                      <a:endParaRPr lang="en-US" sz="1100" dirty="0"/>
-                    </a:p>
-                  </a:txBody>
-                  <a:tcPr marL="63500" marR="63500" marT="38100" marB="38100" anchor="ctr">
-                    <a:lnL w="6350" cap="flat" cmpd="sng" algn="ctr">
-                      <a:solidFill>
-                        <a:srgbClr val="C9D6D3"/>
-                      </a:solidFill>
-                      <a:prstDash val="solid"/>
-                      <a:round/>
-                      <a:headEnd type="none" w="med" len="med"/>
-                      <a:tailEnd type="none" w="med" len="med"/>
-                    </a:lnL>
-                    <a:lnR w="6350" cap="flat" cmpd="sng" algn="ctr">
-                      <a:solidFill>
-                        <a:srgbClr val="C9D6D3"/>
-                      </a:solidFill>
-                      <a:prstDash val="solid"/>
-                      <a:round/>
-                      <a:headEnd type="none" w="med" len="med"/>
-                      <a:tailEnd type="none" w="med" len="med"/>
-                    </a:lnR>
-                    <a:lnT w="6350" cap="flat" cmpd="sng" algn="ctr">
-                      <a:solidFill>
-                        <a:srgbClr val="C9D6D3"/>
-                      </a:solidFill>
-                      <a:prstDash val="solid"/>
-                      <a:round/>
-                      <a:headEnd type="none" w="med" len="med"/>
-                      <a:tailEnd type="none" w="med" len="med"/>
-                    </a:lnT>
-                    <a:lnB w="6350" cap="flat" cmpd="sng" algn="ctr">
-                      <a:solidFill>
-                        <a:srgbClr val="C9D6D3"/>
-                      </a:solidFill>
-                      <a:prstDash val="solid"/>
-                      <a:round/>
-                      <a:headEnd type="none" w="med" len="med"/>
-                      <a:tailEnd type="none" w="med" len="med"/>
-                    </a:lnB>
-                    <a:solidFill>
-                      <a:srgbClr val="EAF1EF"/>
-                    </a:solidFill>
-                  </a:tcPr>
-                </a:tc>
-                <a:tc>
-                  <a:txBody>
-                    <a:bodyPr/>
-                    <a:lstStyle/>
-                    <a:p>
-                      <a:pPr algn="l" indent="0" marL="0">
-                        <a:buNone/>
-                      </a:pPr>
-                      <a:r>
-                        <a:rPr lang="en-US" sz="1100" dirty="0">
-                          <a:solidFill>
-                            <a:schemeClr val="tx1"/>
-                          </a:solidFill>
-                        </a:rPr>
-                        <a:t>120</a:t>
-                      </a:r>
-                      <a:endParaRPr lang="en-US" sz="1100" dirty="0"/>
-                    </a:p>
-                  </a:txBody>
-                  <a:tcPr marL="63500" marR="63500" marT="38100" marB="38100" anchor="ctr">
-                    <a:lnL w="6350" cap="flat" cmpd="sng" algn="ctr">
-                      <a:solidFill>
-                        <a:srgbClr val="C9D6D3"/>
-                      </a:solidFill>
-                      <a:prstDash val="solid"/>
-                      <a:round/>
-                      <a:headEnd type="none" w="med" len="med"/>
-                      <a:tailEnd type="none" w="med" len="med"/>
-                    </a:lnL>
-                    <a:lnR w="6350" cap="flat" cmpd="sng" algn="ctr">
-                      <a:solidFill>
-                        <a:srgbClr val="C9D6D3"/>
-                      </a:solidFill>
-                      <a:prstDash val="solid"/>
-                      <a:round/>
-                      <a:headEnd type="none" w="med" len="med"/>
-                      <a:tailEnd type="none" w="med" len="med"/>
-                    </a:lnR>
-                    <a:lnT w="6350" cap="flat" cmpd="sng" algn="ctr">
-                      <a:solidFill>
-                        <a:srgbClr val="C9D6D3"/>
-                      </a:solidFill>
-                      <a:prstDash val="solid"/>
-                      <a:round/>
-                      <a:headEnd type="none" w="med" len="med"/>
-                      <a:tailEnd type="none" w="med" len="med"/>
-                    </a:lnT>
-                    <a:lnB w="6350" cap="flat" cmpd="sng" algn="ctr">
-                      <a:solidFill>
-                        <a:srgbClr val="C9D6D3"/>
-                      </a:solidFill>
-                      <a:prstDash val="solid"/>
-                      <a:round/>
-                      <a:headEnd type="none" w="med" len="med"/>
-                      <a:tailEnd type="none" w="med" len="med"/>
-                    </a:lnB>
-                    <a:solidFill>
-                      <a:srgbClr val="EAF1EF"/>
-                    </a:solidFill>
-                  </a:tcPr>
-                </a:tc>
-                <a:tc>
-                  <a:txBody>
-                    <a:bodyPr/>
-                    <a:lstStyle/>
-                    <a:p>
-                      <a:pPr algn="l" indent="0" marL="0">
-                        <a:buNone/>
-                      </a:pPr>
-                      <a:r>
-                        <a:rPr lang="en-US" sz="1100" dirty="0">
-                          <a:solidFill>
-                            <a:schemeClr val="tx1"/>
-                          </a:solidFill>
-                        </a:rPr>
-                        <a:t>121</a:t>
-                      </a:r>
-                      <a:endParaRPr lang="en-US" sz="1100" dirty="0"/>
-                    </a:p>
-                  </a:txBody>
-                  <a:tcPr marL="63500" marR="63500" marT="38100" marB="38100" anchor="ctr">
-                    <a:lnL w="6350" cap="flat" cmpd="sng" algn="ctr">
-                      <a:solidFill>
-                        <a:srgbClr val="C9D6D3"/>
-                      </a:solidFill>
-                      <a:prstDash val="solid"/>
-                      <a:round/>
-                      <a:headEnd type="none" w="med" len="med"/>
-                      <a:tailEnd type="none" w="med" len="med"/>
-                    </a:lnL>
-                    <a:lnR w="6350" cap="flat" cmpd="sng" algn="ctr">
-                      <a:solidFill>
-                        <a:srgbClr val="C9D6D3"/>
-                      </a:solidFill>
-                      <a:prstDash val="solid"/>
-                      <a:round/>
-                      <a:headEnd type="none" w="med" len="med"/>
-                      <a:tailEnd type="none" w="med" len="med"/>
-                    </a:lnR>
-                    <a:lnT w="6350" cap="flat" cmpd="sng" algn="ctr">
-                      <a:solidFill>
-                        <a:srgbClr val="C9D6D3"/>
-                      </a:solidFill>
-                      <a:prstDash val="solid"/>
-                      <a:round/>
-                      <a:headEnd type="none" w="med" len="med"/>
-                      <a:tailEnd type="none" w="med" len="med"/>
-                    </a:lnT>
-                    <a:lnB w="6350" cap="flat" cmpd="sng" algn="ctr">
-                      <a:solidFill>
-                        <a:srgbClr val="C9D6D3"/>
-                      </a:solidFill>
-                      <a:prstDash val="solid"/>
-                      <a:round/>
-                      <a:headEnd type="none" w="med" len="med"/>
-                      <a:tailEnd type="none" w="med" len="med"/>
-                    </a:lnB>
-                    <a:solidFill>
-                      <a:srgbClr val="EAF1EF"/>
+                      <a:srgbClr val="FFFFFF"/>
                     </a:solidFill>
                   </a:tcPr>
                 </a:tc>
@@ -34271,7 +34902,190 @@
                       <a:tailEnd type="none" w="med" len="med"/>
                     </a:lnB>
                     <a:solidFill>
-                      <a:srgbClr val="EAF1EF"/>
+                      <a:srgbClr val="FFFFFF"/>
+                    </a:solidFill>
+                  </a:tcPr>
+                </a:tc>
+                <a:tc>
+                  <a:txBody>
+                    <a:bodyPr/>
+                    <a:lstStyle/>
+                    <a:p>
+                      <a:pPr algn="l" indent="0" marL="0">
+                        <a:buNone/>
+                      </a:pPr>
+                      <a:r>
+                        <a:rPr lang="en-US" sz="1100" dirty="0">
+                          <a:solidFill>
+                            <a:schemeClr val="tx1"/>
+                          </a:solidFill>
+                        </a:rPr>
+                        <a:t>124 ●</a:t>
+                      </a:r>
+                      <a:endParaRPr lang="en-US" sz="1100" dirty="0"/>
+                    </a:p>
+                  </a:txBody>
+                  <a:tcPr marL="63500" marR="63500" marT="38100" marB="38100" anchor="ctr">
+                    <a:lnL w="6350" cap="flat" cmpd="sng" algn="ctr">
+                      <a:solidFill>
+                        <a:srgbClr val="C9D6D3"/>
+                      </a:solidFill>
+                      <a:prstDash val="solid"/>
+                      <a:round/>
+                      <a:headEnd type="none" w="med" len="med"/>
+                      <a:tailEnd type="none" w="med" len="med"/>
+                    </a:lnL>
+                    <a:lnR w="6350" cap="flat" cmpd="sng" algn="ctr">
+                      <a:solidFill>
+                        <a:srgbClr val="C9D6D3"/>
+                      </a:solidFill>
+                      <a:prstDash val="solid"/>
+                      <a:round/>
+                      <a:headEnd type="none" w="med" len="med"/>
+                      <a:tailEnd type="none" w="med" len="med"/>
+                    </a:lnR>
+                    <a:lnT w="6350" cap="flat" cmpd="sng" algn="ctr">
+                      <a:solidFill>
+                        <a:srgbClr val="C9D6D3"/>
+                      </a:solidFill>
+                      <a:prstDash val="solid"/>
+                      <a:round/>
+                      <a:headEnd type="none" w="med" len="med"/>
+                      <a:tailEnd type="none" w="med" len="med"/>
+                    </a:lnT>
+                    <a:lnB w="6350" cap="flat" cmpd="sng" algn="ctr">
+                      <a:solidFill>
+                        <a:srgbClr val="C9D6D3"/>
+                      </a:solidFill>
+                      <a:prstDash val="solid"/>
+                      <a:round/>
+                      <a:headEnd type="none" w="med" len="med"/>
+                      <a:tailEnd type="none" w="med" len="med"/>
+                    </a:lnB>
+                    <a:solidFill>
+                      <a:srgbClr val="FFFFFF"/>
+                    </a:solidFill>
+                  </a:tcPr>
+                </a:tc>
+                <a:tc>
+                  <a:txBody>
+                    <a:bodyPr/>
+                    <a:lstStyle/>
+                    <a:p>
+                      <a:pPr algn="l" indent="0" marL="0">
+                        <a:buNone/>
+                      </a:pPr>
+                      <a:r>
+                        <a:rPr lang="en-US" sz="1100" dirty="0">
+                          <a:solidFill>
+                            <a:schemeClr val="tx1"/>
+                          </a:solidFill>
+                        </a:rPr>
+                        <a:t>125</a:t>
+                      </a:r>
+                      <a:endParaRPr lang="en-US" sz="1100" dirty="0"/>
+                    </a:p>
+                  </a:txBody>
+                  <a:tcPr marL="63500" marR="63500" marT="38100" marB="38100" anchor="ctr">
+                    <a:lnL w="6350" cap="flat" cmpd="sng" algn="ctr">
+                      <a:solidFill>
+                        <a:srgbClr val="C9D6D3"/>
+                      </a:solidFill>
+                      <a:prstDash val="solid"/>
+                      <a:round/>
+                      <a:headEnd type="none" w="med" len="med"/>
+                      <a:tailEnd type="none" w="med" len="med"/>
+                    </a:lnL>
+                    <a:lnR w="6350" cap="flat" cmpd="sng" algn="ctr">
+                      <a:solidFill>
+                        <a:srgbClr val="C9D6D3"/>
+                      </a:solidFill>
+                      <a:prstDash val="solid"/>
+                      <a:round/>
+                      <a:headEnd type="none" w="med" len="med"/>
+                      <a:tailEnd type="none" w="med" len="med"/>
+                    </a:lnR>
+                    <a:lnT w="6350" cap="flat" cmpd="sng" algn="ctr">
+                      <a:solidFill>
+                        <a:srgbClr val="C9D6D3"/>
+                      </a:solidFill>
+                      <a:prstDash val="solid"/>
+                      <a:round/>
+                      <a:headEnd type="none" w="med" len="med"/>
+                      <a:tailEnd type="none" w="med" len="med"/>
+                    </a:lnT>
+                    <a:lnB w="6350" cap="flat" cmpd="sng" algn="ctr">
+                      <a:solidFill>
+                        <a:srgbClr val="C9D6D3"/>
+                      </a:solidFill>
+                      <a:prstDash val="solid"/>
+                      <a:round/>
+                      <a:headEnd type="none" w="med" len="med"/>
+                      <a:tailEnd type="none" w="med" len="med"/>
+                    </a:lnB>
+                    <a:solidFill>
+                      <a:srgbClr val="FFFFFF"/>
+                    </a:solidFill>
+                  </a:tcPr>
+                </a:tc>
+                <a:tc>
+                  <a:txBody>
+                    <a:bodyPr/>
+                    <a:lstStyle/>
+                    <a:p>
+                      <a:pPr algn="l" indent="0" marL="0">
+                        <a:buNone/>
+                      </a:pPr>
+                      <a:r>
+                        <a:rPr lang="en-US" sz="1100" dirty="0">
+                          <a:solidFill>
+                            <a:schemeClr val="tx1"/>
+                          </a:solidFill>
+                        </a:rPr>
+                        <a:t>127</a:t>
+                      </a:r>
+                      <a:endParaRPr lang="en-US" sz="1100" dirty="0"/>
+                    </a:p>
+                  </a:txBody>
+                  <a:tcPr marL="63500" marR="63500" marT="38100" marB="38100" anchor="ctr">
+                    <a:lnL w="6350" cap="flat" cmpd="sng" algn="ctr">
+                      <a:solidFill>
+                        <a:srgbClr val="C9D6D3"/>
+                      </a:solidFill>
+                      <a:prstDash val="solid"/>
+                      <a:round/>
+                      <a:headEnd type="none" w="med" len="med"/>
+                      <a:tailEnd type="none" w="med" len="med"/>
+                    </a:lnL>
+                    <a:lnR w="6350" cap="flat" cmpd="sng" algn="ctr">
+                      <a:solidFill>
+                        <a:srgbClr val="C9D6D3"/>
+                      </a:solidFill>
+                      <a:prstDash val="solid"/>
+                      <a:round/>
+                      <a:headEnd type="none" w="med" len="med"/>
+                      <a:tailEnd type="none" w="med" len="med"/>
+                    </a:lnR>
+                    <a:lnT w="6350" cap="flat" cmpd="sng" algn="ctr">
+                      <a:solidFill>
+                        <a:srgbClr val="C9D6D3"/>
+                      </a:solidFill>
+                      <a:prstDash val="solid"/>
+                      <a:round/>
+                      <a:headEnd type="none" w="med" len="med"/>
+                      <a:tailEnd type="none" w="med" len="med"/>
+                    </a:lnT>
+                    <a:lnB w="6350" cap="flat" cmpd="sng" algn="ctr">
+                      <a:solidFill>
+                        <a:srgbClr val="C9D6D3"/>
+                      </a:solidFill>
+                      <a:prstDash val="solid"/>
+                      <a:round/>
+                      <a:headEnd type="none" w="med" len="med"/>
+                      <a:tailEnd type="none" w="med" len="med"/>
+                    </a:lnB>
+                    <a:solidFill>
+                      <a:srgbClr val="FFFFFF"/>
                     </a:solidFill>
                   </a:tcPr>
                 </a:tc>
@@ -34334,7 +35148,7 @@
                       <a:tailEnd type="none" w="med" len="med"/>
                     </a:lnB>
                     <a:solidFill>
-                      <a:srgbClr val="FFFFFF"/>
+                      <a:srgbClr val="EAF1EF"/>
                     </a:solidFill>
                   </a:tcPr>
                 </a:tc>
@@ -34387,7 +35201,7 @@
                       <a:tailEnd type="none" w="med" len="med"/>
                     </a:lnB>
                     <a:solidFill>
-                      <a:srgbClr val="FFFFFF"/>
+                      <a:srgbClr val="EAF1EF"/>
                     </a:solidFill>
                   </a:tcPr>
                 </a:tc>
@@ -34448,7 +35262,7 @@
                       <a:tailEnd type="none" w="med" len="med"/>
                     </a:lnB>
                     <a:solidFill>
-                      <a:srgbClr val="FFFFFF"/>
+                      <a:srgbClr val="EAF1EF"/>
                     </a:solidFill>
                   </a:tcPr>
                 </a:tc>
@@ -34509,7 +35323,7 @@
                       <a:tailEnd type="none" w="med" len="med"/>
                     </a:lnB>
                     <a:solidFill>
-                      <a:srgbClr val="FFFFFF"/>
+                      <a:srgbClr val="EAF1EF"/>
                     </a:solidFill>
                   </a:tcPr>
                 </a:tc>
@@ -34570,7 +35384,7 @@
                       <a:tailEnd type="none" w="med" len="med"/>
                     </a:lnB>
                     <a:solidFill>
-                      <a:srgbClr val="FFFFFF"/>
+                      <a:srgbClr val="EAF1EF"/>
                     </a:solidFill>
                   </a:tcPr>
                 </a:tc>
@@ -34631,7 +35445,7 @@
                       <a:tailEnd type="none" w="med" len="med"/>
                     </a:lnB>
                     <a:solidFill>
-                      <a:srgbClr val="FFFFFF"/>
+                      <a:srgbClr val="EAF1EF"/>
                     </a:solidFill>
                   </a:tcPr>
                 </a:tc>
@@ -34692,7 +35506,7 @@
                       <a:tailEnd type="none" w="med" len="med"/>
                     </a:lnB>
                     <a:solidFill>
-                      <a:srgbClr val="FFFFFF"/>
+                      <a:srgbClr val="EAF1EF"/>
                     </a:solidFill>
                   </a:tcPr>
                 </a:tc>
@@ -44388,6 +45202,35 @@
               </a:rPr>
               <a:t>підсумки дискусії КМП</a:t>
             </a:r>
+            <a:pPr indent="0" marL="0">
+              <a:buNone/>
+            </a:pPr>
+            <a:r>
+              <a:rPr lang="en-US" sz="900" dirty="0">
+                <a:solidFill>
+                  <a:srgbClr val="5F6B6D"/>
+                </a:solidFill>
+              </a:rPr>
+              <a:t> · </a:t>
+            </a:r>
+            <a:pPr indent="0" marL="0">
+              <a:buNone/>
+            </a:pPr>
+            <a:r>
+              <a:rPr lang="en-US" sz="900" u="sng" dirty="0">
+                <a:solidFill>
+                  <a:srgbClr val="5F6B6D"/>
+                </a:solidFill>
+                <a:hlinkClick r:id="rId4" invalidUrl="" action="" tgtFrame="" tooltip="https://bank.gov.ua/files/macro/Wages_m.xlsx" history="1" highlightClick="0" endSnd="0">
+                  <a:extLst>
+                    <a:ext uri="{A12FA001-AC4F-418D-AE19-62706E023703}">
+                      <ahyp:hlinkClr xmlns:ahyp="http://schemas.microsoft.com/office/drawing/2018/hyperlinkcolor" val="tx"/>
+                    </a:ext>
+                  </a:extLst>
+                </a:hlinkClick>
+              </a:rPr>
+              <a:t>зарплати (НБУ)</a:t>
+            </a:r>
             <a:endParaRPr lang="en-US" sz="900" dirty="0"/>
           </a:p>
         </p:txBody>
@@ -44401,7 +45244,7 @@
           <p:nvPr/>
         </p:nvPicPr>
         <p:blipFill>
-          <a:blip r:embed="rId4"/>
+          <a:blip r:embed="rId5"/>
           <a:stretch>
             <a:fillRect/>
           </a:stretch>

--- a/presentation/NBU_University_Challenge_2026.pptx
+++ b/presentation/NBU_University_Challenge_2026.pptx
@@ -143,13 +143,13 @@
   <p:extLst>
     <p:ext uri="{521415D9-36F7-43E2-AB2F-B90AF26B5E84}">
       <p14:sectionLst xmlns:p14="http://schemas.microsoft.com/office/powerpoint/2010/main">
-        <p14:section name="Вступ" id="{70516ca8-4f18-6dd1-d87e-08ed16fec17d}">
+        <p14:section name="Вступ" id="{d44c1413-afbd-f58e-261d-f2f181eee8e6}">
           <p14:sldIdLst>
             <p14:sldId id="256"/>
             <p14:sldId id="257"/>
           </p14:sldIdLst>
         </p14:section>
-        <p14:section name="Огляд" id="{b8c67eba-75f3-1b88-0586-e4d9fa2aa899}">
+        <p14:section name="Огляд" id="{b53d3d6a-2f2c-36a6-15cd-696b983510cc}">
           <p14:sldIdLst>
             <p14:sldId id="258"/>
             <p14:sldId id="259"/>
@@ -159,7 +159,7 @@
             <p14:sldId id="263"/>
           </p14:sldIdLst>
         </p14:section>
-        <p14:section name="Прогноз" id="{93d7b36d-8584-07e7-e11d-7083c0763036}">
+        <p14:section name="Прогноз" id="{01db4584-f589-0f1f-db94-ac35b075756f}">
           <p14:sldIdLst>
             <p14:sldId id="264"/>
             <p14:sldId id="265"/>
@@ -169,7 +169,7 @@
             <p14:sldId id="269"/>
           </p14:sldIdLst>
         </p14:section>
-        <p14:section name="Рекомендації" id="{ba3fa065-6b3d-4863-5f85-9e92771b28ce}">
+        <p14:section name="Рекомендації" id="{c28bb0c5-aa9f-d752-d06d-0372990e942b}">
           <p14:sldIdLst>
             <p14:sldId id="270"/>
             <p14:sldId id="271"/>
@@ -180,7 +180,7 @@
             <p14:sldId id="276"/>
           </p14:sldIdLst>
         </p14:section>
-        <p14:section name="Додатки" id="{f7dc8305-adc7-695c-c92c-b19b456b77a7}">
+        <p14:section name="Додатки" id="{f75160f3-cbc4-4145-093d-2979acd6e35e}">
           <p14:sldIdLst>
             <p14:sldId id="277"/>
             <p14:sldId id="278"/>
@@ -1044,7 +1044,7 @@
           <a:p>
             <a:r>
               <a:rPr lang="en-US" dirty="0"/>
-              <a:t>Ми розглянули чотири ризикові сценарії. Найнебезпечніший — дефіцит фінансування: якщо допомога затримається, гривня буде приблизно на 6% слабшою, інфляція зросте до 13,0%, а ставку доведеться підняти до 19,3%. Важка зима з ударами по енергетиці підніме інфляцію до 12,4%, а ВВП у 2027 році скоротиться на 1,1%. Натомість нафта, якщо лишиться біля 120 доларів весь 2027 рік замість зниження до 87 за ф'ючерсами, додає 0,6 пункта до інфляції наприкінці 2027 року, і ставка на піку +0,3 в. п. — це переважно шок першого раунду. Ще чотири ризики для інфляції 2027 року — курс, євро, очікування і ПДВ: якщо гривня слабшатиме так, як чекає ринок, інфляція наприкінці 2027 року буде близько 8% замість 5,4%; якби євро знову подорожчав до 1,16 долара, як припускав НБУ в липні, — близько 8%; розбалансування очікувань дало б близько 7%, а ПДВ 21% — ще 0,5 пункта в II кварталі 2027.</a:t>
+              <a:t>Ми розглянули чотири ризикові сценарії. Найнебезпечніший — дефіцит фінансування: якщо допомога затримається, гривня буде приблизно на 7% слабшою, інфляція зросте до 13,0%, а ставку доведеться підняти до 19,4%. Важка зима з ударами по енергетиці підніме інфляцію до 12,4%, а ВВП у 2027 році скоротиться на 1,1%. Натомість нафта, якщо лишиться біля 120 доларів весь 2027 рік замість зниження до 87 за ф'ючерсами, додає 0,6 пункта до інфляції наприкінці 2027 року, і ставка на піку +0,3 в. п. — це переважно шок першого раунду. Ще чотири ризики для інфляції 2027 року — курс, євро, очікування і ПДВ: якщо гривня слабшатиме так, як чекає ринок, інфляція наприкінці 2027 року буде близько 8% замість 5,4%; якби євро знову подорожчав до 1,16 долара, як припускав НБУ в липні, — близько 8%; розбалансування очікувань дало б близько 7%, а ПДВ 21% — ще 0,5 пункта в II кварталі 2027.</a:t>
             </a:r>
             <a:endParaRPr lang="en-US" dirty="0"/>
           </a:p>
@@ -1396,7 +1396,7 @@
           <a:p>
             <a:r>
               <a:rPr lang="en-US" dirty="0"/>
-              <a:t>Тому перша рекомендація — підвищити облікову ставку до 17%. Чому підвищити: інфляція в грудні сягне близько 12%, базова інфляція прискорюється, курсові ризики високі, а гнучкіший курс потребує сильного якоря для очікувань. Ринок не чекає різкого посилення, але ризики зміщені вгору, і НБУ вже робив крок у пункт — у січні й березні 2025 року. Чому не більше: економіка слабка, а півтора пункта одразу — надмірний сигнал до оновленого прогнозу НБУ. Щоб підвищення дійшло до депозитів, обсяги тендерів депсертифікатів варто обмежити. Орієнтир: не знижувати ставку щонайменше до третього кварталу 2027 року — це трохи довше, ніж оптимум моделі (II кв. 2027), запас на курсові ризики. А наступний крок — радше вгору: ще пів пункта в грудні, якщо базова інфляція без сезонності не сповільниться нижче приблизно 0,7% на місяць або посиляться курсові очікування.</a:t>
+              <a:t>Тому перша рекомендація — підвищити облікову ставку до 17%. Чому підвищити: інфляція в грудні сягне близько 12%, базова інфляція прискорюється, курсові ризики високі, а гнучкіший курс потребує сильного якоря для очікувань. Ринок не чекає різкого посилення, але ризики зміщені вгору, і НБУ вже робив крок у пункт — у січні й березні 2025 року. Чому не більше: економіка слабка, а півтора пункта одразу — надмірний сигнал до оновленого прогнозу НБУ. Щоб підвищення дійшло до депозитів, обсяги тендерів депсертифікатів варто обмежити. Орієнтир: не знижувати ставку щонайменше до третього кварталу 2027 року — це трохи довше, ніж оптимум моделі (II кв. 2027), запас на курсові ризики. А наступний крок — радше вгору: ще пів пункта в грудні, якщо базова інфляція без сезонності не сповільниться нижче приблизно 0,7% на місяць або посиляться курсові очікування. А якщо гривня піде так, як чекає ринок, за 48 гривень, то 17% недостатньо, і ми готові підвищувати до приблизно 19%.</a:t>
             </a:r>
             <a:endParaRPr lang="en-US" dirty="0"/>
           </a:p>
@@ -11346,7 +11346,7 @@
                             <a:schemeClr val="tx1"/>
                           </a:solidFill>
                         </a:rPr>
-                        <a:t>9,1</a:t>
+                        <a:t>9,3</a:t>
                       </a:r>
                       <a:endParaRPr lang="en-US" sz="1200" dirty="0"/>
                     </a:p>
@@ -11407,7 +11407,7 @@
                             <a:schemeClr val="tx1"/>
                           </a:solidFill>
                         </a:rPr>
-                        <a:t>19,3</a:t>
+                        <a:t>19,4</a:t>
                       </a:r>
                       <a:endParaRPr lang="en-US" sz="1200" dirty="0"/>
                     </a:p>
@@ -11468,7 +11468,7 @@
                             <a:schemeClr val="tx1"/>
                           </a:solidFill>
                         </a:rPr>
-                        <a:t>48,5</a:t>
+                        <a:t>48,6</a:t>
                       </a:r>
                       <a:endParaRPr lang="en-US" sz="1200" dirty="0"/>
                     </a:p>
@@ -11529,7 +11529,7 @@
                             <a:schemeClr val="tx1"/>
                           </a:solidFill>
                         </a:rPr>
-                        <a:t>−0,5</a:t>
+                        <a:t>−0,6</a:t>
                       </a:r>
                       <a:endParaRPr lang="en-US" sz="1200" dirty="0"/>
                     </a:p>
@@ -12351,7 +12351,7 @@
                   <a:schemeClr val="tx1"/>
                 </a:solidFill>
               </a:rPr>
-              <a:t>Дефіцит фінансування: гривня на ≈6% слабша (≈48 грн/$) → інфляція до 13,0%, ставка до 19,3%</a:t>
+              <a:t>Дефіцит фінансування: гривня на ≈7% слабша (≈49 грн/$) → інфляція до 13,0%, ставка до 19,4%</a:t>
             </a:r>
             <a:endParaRPr lang="en-US" sz="1300" dirty="0"/>
           </a:p>
@@ -16395,7 +16395,7 @@
                   <a:schemeClr val="tx1"/>
                 </a:solidFill>
               </a:rPr>
-              <a:t>Курс: якщо гривня слабшатиме, як чекає ринок, ІСЦ IV кв. 2027 — ≈8%; кожні +0,5 в. п. зараз знижують його на ≈0,2 в. п.</a:t>
+              <a:t>Курс: якщо гривня піде як чекає ринок (48+ грн/$), ІСЦ IV кв. 2027 — ≈8% і 17% недостатньо — готові підвищувати до ≈19%</a:t>
             </a:r>
             <a:endParaRPr lang="en-US" sz="1400" dirty="0"/>
           </a:p>
@@ -16492,7 +16492,7 @@
                   <a:schemeClr val="tx1"/>
                 </a:solidFill>
               </a:rPr>
-              <a:t>Модель: оптимум ≈16,9%, під ризиками — 17%; ринок (ОВДП, курсові очікування) не чекає різкого посилення — ми рішучіші за ринок і усередині модельного діапазону (16,5–18,2%)</a:t>
+              <a:t>Модель: оптимум ≈16,9%, під ризиками — 17%, за курсовими припущеннями 16,5–18,2% — ми усередині цього діапазону і рішучіші за ринок (ОВДП, очікування)</a:t>
             </a:r>
             <a:endParaRPr lang="en-US" sz="1400" dirty="0"/>
           </a:p>
@@ -16607,7 +16607,7 @@
                   <a:schemeClr val="tx1"/>
                 </a:solidFill>
               </a:rPr>
-              <a:t>Не знижувати щонайменше до III кв. 2027 (оптимум моделі починає знижувати з II кв. 2027 — запас на курсові ризики); за базовим прогнозом далі — ≈13,1% наприкінці 2027 і ≈10,5% — 2028</a:t>
+              <a:t>Не знижувати щонайменше до III кв. 2027 (оптимум моделі — з II кв. 2027; запас на курсові ризики); далі ≈13,1% наприкінці 2027, ≈10,5% — 2028</a:t>
             </a:r>
             <a:endParaRPr lang="en-US" sz="1400" dirty="0"/>
           </a:p>
@@ -16969,7 +16969,25 @@
                   <a:schemeClr val="tx1"/>
                 </a:solidFill>
               </a:rPr>
-              <a:t>Ринок чекає ≈47 грн/$ через рік (≈5% від жовтневого рівня); модель — ≈45,6 грн/$ у IV кв. 2027 (≈1%; до євро +1,3% за 2027); якщо правий ринок, ІСЦ IV кв. 2027 — ≈8%</a:t>
+              <a:t>Модель: ≈45,6 грн/$ у IV кв. 2027 (≈1% до долара) — міцніше за бюджет-2027 (48,3) та ICU (49,2): курс тримає весь шлях ставки (паритет) і керований цільовий курс; перенос у ціни ≈0,75 — верхня межа</a:t>
+            </a:r>
+            <a:endParaRPr lang="en-US" sz="1400" dirty="0"/>
+          </a:p>
+          <a:p>
+            <a:pPr marL="177800" indent="-177800">
+              <a:spcAft>
+                <a:spcPts val="800"/>
+              </a:spcAft>
+              <a:buSzPct val="100000"/>
+              <a:buChar char="•"/>
+            </a:pPr>
+            <a:r>
+              <a:rPr lang="en-US" sz="1400" dirty="0">
+                <a:solidFill>
+                  <a:schemeClr val="tx1"/>
+                </a:solidFill>
+              </a:rPr>
+              <a:t>Якщо правий ринок (48+ грн/$): ІСЦ IV кв. 2027 ≈8%, і 17% недостатньо — готові підвищувати до ≈19%</a:t>
             </a:r>
             <a:endParaRPr lang="en-US" sz="1400" dirty="0"/>
           </a:p>
@@ -30524,7 +30542,7 @@
                             <a:schemeClr val="tx1"/>
                           </a:solidFill>
                         </a:rPr>
-                        <a:t>211</a:t>
+                        <a:t>217</a:t>
                       </a:r>
                       <a:endParaRPr lang="en-US" sz="1100" dirty="0"/>
                     </a:p>
@@ -30585,7 +30603,68 @@
                             <a:schemeClr val="tx1"/>
                           </a:solidFill>
                         </a:rPr>
-                        <a:t>204</a:t>
+                        <a:t>209</a:t>
+                      </a:r>
+                      <a:endParaRPr lang="en-US" sz="1100" dirty="0"/>
+                    </a:p>
+                  </a:txBody>
+                  <a:tcPr marL="63500" marR="63500" marT="38100" marB="38100" anchor="ctr">
+                    <a:lnL w="6350" cap="flat" cmpd="sng" algn="ctr">
+                      <a:solidFill>
+                        <a:srgbClr val="C9D6D3"/>
+                      </a:solidFill>
+                      <a:prstDash val="solid"/>
+                      <a:round/>
+                      <a:headEnd type="none" w="med" len="med"/>
+                      <a:tailEnd type="none" w="med" len="med"/>
+                    </a:lnL>
+                    <a:lnR w="6350" cap="flat" cmpd="sng" algn="ctr">
+                      <a:solidFill>
+                        <a:srgbClr val="C9D6D3"/>
+                      </a:solidFill>
+                      <a:prstDash val="solid"/>
+                      <a:round/>
+                      <a:headEnd type="none" w="med" len="med"/>
+                      <a:tailEnd type="none" w="med" len="med"/>
+                    </a:lnR>
+                    <a:lnT w="6350" cap="flat" cmpd="sng" algn="ctr">
+                      <a:solidFill>
+                        <a:srgbClr val="C9D6D3"/>
+                      </a:solidFill>
+                      <a:prstDash val="solid"/>
+                      <a:round/>
+                      <a:headEnd type="none" w="med" len="med"/>
+                      <a:tailEnd type="none" w="med" len="med"/>
+                    </a:lnT>
+                    <a:lnB w="6350" cap="flat" cmpd="sng" algn="ctr">
+                      <a:solidFill>
+                        <a:srgbClr val="C9D6D3"/>
+                      </a:solidFill>
+                      <a:prstDash val="solid"/>
+                      <a:round/>
+                      <a:headEnd type="none" w="med" len="med"/>
+                      <a:tailEnd type="none" w="med" len="med"/>
+                    </a:lnB>
+                    <a:solidFill>
+                      <a:srgbClr val="FFFFFF"/>
+                    </a:solidFill>
+                  </a:tcPr>
+                </a:tc>
+                <a:tc>
+                  <a:txBody>
+                    <a:bodyPr/>
+                    <a:lstStyle/>
+                    <a:p>
+                      <a:pPr algn="l" indent="0" marL="0">
+                        <a:buNone/>
+                      </a:pPr>
+                      <a:r>
+                        <a:rPr lang="en-US" sz="1100" dirty="0">
+                          <a:solidFill>
+                            <a:schemeClr val="tx1"/>
+                          </a:solidFill>
+                        </a:rPr>
+                        <a:t>203</a:t>
                       </a:r>
                       <a:endParaRPr lang="en-US" sz="1100" dirty="0"/>
                     </a:p>
@@ -30707,68 +30786,7 @@
                             <a:schemeClr val="tx1"/>
                           </a:solidFill>
                         </a:rPr>
-                        <a:t>193</a:t>
-                      </a:r>
-                      <a:endParaRPr lang="en-US" sz="1100" dirty="0"/>
-                    </a:p>
-                  </a:txBody>
-                  <a:tcPr marL="63500" marR="63500" marT="38100" marB="38100" anchor="ctr">
-                    <a:lnL w="6350" cap="flat" cmpd="sng" algn="ctr">
-                      <a:solidFill>
-                        <a:srgbClr val="C9D6D3"/>
-                      </a:solidFill>
-                      <a:prstDash val="solid"/>
-                      <a:round/>
-                      <a:headEnd type="none" w="med" len="med"/>
-                      <a:tailEnd type="none" w="med" len="med"/>
-                    </a:lnL>
-                    <a:lnR w="6350" cap="flat" cmpd="sng" algn="ctr">
-                      <a:solidFill>
-                        <a:srgbClr val="C9D6D3"/>
-                      </a:solidFill>
-                      <a:prstDash val="solid"/>
-                      <a:round/>
-                      <a:headEnd type="none" w="med" len="med"/>
-                      <a:tailEnd type="none" w="med" len="med"/>
-                    </a:lnR>
-                    <a:lnT w="6350" cap="flat" cmpd="sng" algn="ctr">
-                      <a:solidFill>
-                        <a:srgbClr val="C9D6D3"/>
-                      </a:solidFill>
-                      <a:prstDash val="solid"/>
-                      <a:round/>
-                      <a:headEnd type="none" w="med" len="med"/>
-                      <a:tailEnd type="none" w="med" len="med"/>
-                    </a:lnT>
-                    <a:lnB w="6350" cap="flat" cmpd="sng" algn="ctr">
-                      <a:solidFill>
-                        <a:srgbClr val="C9D6D3"/>
-                      </a:solidFill>
-                      <a:prstDash val="solid"/>
-                      <a:round/>
-                      <a:headEnd type="none" w="med" len="med"/>
-                      <a:tailEnd type="none" w="med" len="med"/>
-                    </a:lnB>
-                    <a:solidFill>
-                      <a:srgbClr val="FFFFFF"/>
-                    </a:solidFill>
-                  </a:tcPr>
-                </a:tc>
-                <a:tc>
-                  <a:txBody>
-                    <a:bodyPr/>
-                    <a:lstStyle/>
-                    <a:p>
-                      <a:pPr algn="l" indent="0" marL="0">
-                        <a:buNone/>
-                      </a:pPr>
-                      <a:r>
-                        <a:rPr lang="en-US" sz="1100" dirty="0">
-                          <a:solidFill>
-                            <a:schemeClr val="tx1"/>
-                          </a:solidFill>
-                        </a:rPr>
-                        <a:t>190</a:t>
+                        <a:t>194</a:t>
                       </a:r>
                       <a:endParaRPr lang="en-US" sz="1100" dirty="0"/>
                     </a:p>
@@ -34438,7 +34456,7 @@
                             <a:schemeClr val="tx1"/>
                           </a:solidFill>
                         </a:rPr>
-                        <a:t>134</a:t>
+                        <a:t>135</a:t>
                       </a:r>
                       <a:endParaRPr lang="en-US" sz="1100" dirty="0"/>
                     </a:p>
@@ -34499,7 +34517,7 @@
                             <a:schemeClr val="tx1"/>
                           </a:solidFill>
                         </a:rPr>
-                        <a:t>133 ●</a:t>
+                        <a:t>134 ●</a:t>
                       </a:r>
                       <a:endParaRPr lang="en-US" sz="1100" dirty="0"/>
                     </a:p>
@@ -35219,7 +35237,7 @@
                             <a:schemeClr val="tx1"/>
                           </a:solidFill>
                         </a:rPr>
-                        <a:t>21</a:t>
+                        <a:t>22</a:t>
                       </a:r>
                       <a:endParaRPr lang="en-US" sz="1100" dirty="0"/>
                     </a:p>
@@ -35280,7 +35298,7 @@
                             <a:schemeClr val="tx1"/>
                           </a:solidFill>
                         </a:rPr>
-                        <a:t>14</a:t>
+                        <a:t>15</a:t>
                       </a:r>
                       <a:endParaRPr lang="en-US" sz="1100" dirty="0"/>
                     </a:p>

--- a/presentation/NBU_University_Challenge_2026.pptx
+++ b/presentation/NBU_University_Challenge_2026.pptx
@@ -143,13 +143,13 @@
   <p:extLst>
     <p:ext uri="{521415D9-36F7-43E2-AB2F-B90AF26B5E84}">
       <p14:sectionLst xmlns:p14="http://schemas.microsoft.com/office/powerpoint/2010/main">
-        <p14:section name="Вступ" id="{d44c1413-afbd-f58e-261d-f2f181eee8e6}">
+        <p14:section name="Вступ" id="{3185489a-dcf8-cbd6-ff65-a5293fdee303}">
           <p14:sldIdLst>
             <p14:sldId id="256"/>
             <p14:sldId id="257"/>
           </p14:sldIdLst>
         </p14:section>
-        <p14:section name="Огляд" id="{b53d3d6a-2f2c-36a6-15cd-696b983510cc}">
+        <p14:section name="Огляд" id="{d0ca0b96-f0e7-ff7b-59ad-80a1dc00c379}">
           <p14:sldIdLst>
             <p14:sldId id="258"/>
             <p14:sldId id="259"/>
@@ -159,7 +159,7 @@
             <p14:sldId id="263"/>
           </p14:sldIdLst>
         </p14:section>
-        <p14:section name="Прогноз" id="{01db4584-f589-0f1f-db94-ac35b075756f}">
+        <p14:section name="Прогноз" id="{de4d80d1-2978-b376-6bdb-9f634c08eb13}">
           <p14:sldIdLst>
             <p14:sldId id="264"/>
             <p14:sldId id="265"/>
@@ -169,7 +169,7 @@
             <p14:sldId id="269"/>
           </p14:sldIdLst>
         </p14:section>
-        <p14:section name="Рекомендації" id="{c28bb0c5-aa9f-d752-d06d-0372990e942b}">
+        <p14:section name="Рекомендації" id="{84f4a8c2-2371-6062-3da6-8274c974d72d}">
           <p14:sldIdLst>
             <p14:sldId id="270"/>
             <p14:sldId id="271"/>
@@ -180,7 +180,7 @@
             <p14:sldId id="276"/>
           </p14:sldIdLst>
         </p14:section>
-        <p14:section name="Додатки" id="{f75160f3-cbc4-4145-093d-2979acd6e35e}">
+        <p14:section name="Додатки" id="{8956125a-bd43-ba5e-4a7d-607405d0cd78}">
           <p14:sldIdLst>
             <p14:sldId id="277"/>
             <p14:sldId id="278"/>
@@ -5929,8 +5929,8 @@
         </p:nvSpPr>
         <p:spPr>
           <a:xfrm>
-            <a:off x="640080" y="1581912"/>
-            <a:ext cx="2144954" cy="411480"/>
+            <a:off x="640080" y="1527048"/>
+            <a:ext cx="2144954" cy="502920"/>
           </a:xfrm>
           <a:prstGeom prst="rect">
             <a:avLst/>
@@ -6046,8 +6046,8 @@
         </p:nvSpPr>
         <p:spPr>
           <a:xfrm>
-            <a:off x="3562274" y="1581912"/>
-            <a:ext cx="2144954" cy="411480"/>
+            <a:off x="3562274" y="1527048"/>
+            <a:ext cx="2144954" cy="502920"/>
           </a:xfrm>
           <a:prstGeom prst="rect">
             <a:avLst/>
@@ -6063,7 +6063,7 @@
               <a:buNone/>
             </a:pPr>
             <a:r>
-              <a:rPr lang="en-US" sz="1700" b="1" dirty="0">
+              <a:rPr lang="en-US" sz="1650" b="1" dirty="0">
                 <a:solidFill>
                   <a:schemeClr val="accent1"/>
                 </a:solidFill>
@@ -6073,7 +6073,7 @@
               </a:rPr>
               <a:t>2. Фільтр Калмана</a:t>
             </a:r>
-            <a:endParaRPr lang="en-US" sz="1700" dirty="0"/>
+            <a:endParaRPr lang="en-US" sz="1650" dirty="0"/>
           </a:p>
         </p:txBody>
       </p:sp>
@@ -6163,8 +6163,8 @@
         </p:nvSpPr>
         <p:spPr>
           <a:xfrm>
-            <a:off x="6484468" y="1581912"/>
-            <a:ext cx="2144954" cy="411480"/>
+            <a:off x="6484468" y="1527048"/>
+            <a:ext cx="2144954" cy="502920"/>
           </a:xfrm>
           <a:prstGeom prst="rect">
             <a:avLst/>
@@ -6180,7 +6180,7 @@
               <a:buNone/>
             </a:pPr>
             <a:r>
-              <a:rPr lang="en-US" sz="1700" b="1" dirty="0">
+              <a:rPr lang="en-US" sz="1650" b="1" dirty="0">
                 <a:solidFill>
                   <a:schemeClr val="accent1"/>
                 </a:solidFill>
@@ -6190,7 +6190,7 @@
               </a:rPr>
               <a:t>3. Прогноз із планом</a:t>
             </a:r>
-            <a:endParaRPr lang="en-US" sz="1700" dirty="0"/>
+            <a:endParaRPr lang="en-US" sz="1650" dirty="0"/>
           </a:p>
         </p:txBody>
       </p:sp>
@@ -6280,8 +6280,8 @@
         </p:nvSpPr>
         <p:spPr>
           <a:xfrm>
-            <a:off x="9406661" y="1581912"/>
-            <a:ext cx="2144954" cy="411480"/>
+            <a:off x="9406661" y="1527048"/>
+            <a:ext cx="2144954" cy="502920"/>
           </a:xfrm>
           <a:prstGeom prst="rect">
             <a:avLst/>
@@ -6297,7 +6297,7 @@
               <a:buNone/>
             </a:pPr>
             <a:r>
-              <a:rPr lang="en-US" sz="1700" b="1" dirty="0">
+              <a:rPr lang="en-US" sz="1650" b="1" dirty="0">
                 <a:solidFill>
                   <a:schemeClr val="accent1"/>
                 </a:solidFill>
@@ -6307,7 +6307,7 @@
               </a:rPr>
               <a:t>4. Політика й ризики</a:t>
             </a:r>
-            <a:endParaRPr lang="en-US" sz="1700" dirty="0"/>
+            <a:endParaRPr lang="en-US" sz="1650" dirty="0"/>
           </a:p>
         </p:txBody>
       </p:sp>
@@ -6486,14 +6486,14 @@
               <a:buNone/>
             </a:pPr>
             <a:r>
-              <a:rPr lang="en-US" sz="1400" dirty="0">
+              <a:rPr lang="en-US" sz="1250" dirty="0">
                 <a:solidFill>
                   <a:schemeClr val="tx1"/>
                 </a:solidFill>
               </a:rPr>
               <a:t>розбіжність Python і MATLAB/IRIS на тому самому файлі моделі: фільтр і всі 5 сценаріїв (* звірка від 21.10, до оновлення даних 25.10)</a:t>
             </a:r>
-            <a:endParaRPr lang="en-US" sz="1400" dirty="0"/>
+            <a:endParaRPr lang="en-US" sz="1250" dirty="0"/>
           </a:p>
         </p:txBody>
       </p:sp>
@@ -7389,7 +7389,7 @@
         <p:spPr>
           <a:xfrm>
             <a:off x="457200" y="1325880"/>
-            <a:ext cx="6309360" cy="3388891"/>
+            <a:ext cx="6309360" cy="3417570"/>
           </a:xfrm>
           <a:prstGeom prst="rect">
             <a:avLst/>
@@ -8910,8 +8910,8 @@
         </p:nvSpPr>
         <p:spPr>
           <a:xfrm>
-            <a:off x="7086600" y="3054096"/>
-            <a:ext cx="4647895" cy="3255264"/>
+            <a:off x="7086600" y="2916936"/>
+            <a:ext cx="4647895" cy="3392424"/>
           </a:xfrm>
           <a:prstGeom prst="rect">
             <a:avLst/>
@@ -9086,7 +9086,7 @@
                 <a:ea typeface="Cambria" pitchFamily="34" charset="-122"/>
                 <a:cs typeface="Cambria" pitchFamily="34" charset="-120"/>
               </a:rPr>
-              <a:t>Інфляція пройде пік наприкінці 2026 і повернеться до цілі на початку 2028 — у межах горизонту політики</a:t>
+              <a:t>Інфляція пройде пік наприкінці 2026 і повернеться до цілі на початку 2028 — у межах горизонту</a:t>
             </a:r>
             <a:endParaRPr lang="en-US" sz="2600" dirty="0"/>
           </a:p>
@@ -9191,8 +9191,8 @@
         </p:blipFill>
         <p:spPr>
           <a:xfrm>
-            <a:off x="1129919" y="1325880"/>
-            <a:ext cx="9931857" cy="3703320"/>
+            <a:off x="1143215" y="1325880"/>
+            <a:ext cx="9905266" cy="3703320"/>
           </a:xfrm>
           <a:prstGeom prst="rect">
             <a:avLst/>
@@ -9285,7 +9285,7 @@
                   <a:schemeClr val="tx1"/>
                 </a:solidFill>
               </a:rPr>
-              <a:t>Пік — IV кв. 2026: ≈11,2% у середньому за квартал (у грудні — ≈12,1% за місяць); 5,4% у IV кв. 2027 (НБУ: 6,9% у грудні); нижче 5% — з I кв. 2028, у 2028 — 3,8–4,8% (дешевша нафта, слабкий попит), ≈5% — у 2029</a:t>
+              <a:t>Пік — IV кв. 2026: ≈11,2% за квартал (грудень ≈12,1%); 5,4% у IV кв. 2027 (НБУ 6,9%); у 2028 — 3,8–4,8%, ≈5% — у 2029</a:t>
             </a:r>
             <a:endParaRPr lang="en-US" sz="1300" dirty="0"/>
           </a:p>
@@ -9583,7 +9583,7 @@
                 <a:ea typeface="Cambria" pitchFamily="34" charset="-122"/>
                 <a:cs typeface="Cambria" pitchFamily="34" charset="-120"/>
               </a:rPr>
-              <a:t>Економіка слабка, але потенціал постраждав ще більше: розрив ≈0,7% у IV кв. 2026, ≈−1,0% у 2027 (НБУ: 1,4%)</a:t>
+              <a:t>Економіка слабка, але потенціал постраждав ще більше: розрив ≈0,7% у IV кв. 2026, ≈−1,0% у 2027</a:t>
             </a:r>
             <a:endParaRPr lang="en-US" sz="2600" dirty="0"/>
           </a:p>
@@ -9718,7 +9718,7 @@
         <p:spPr>
           <a:xfrm>
             <a:off x="457200" y="1325880"/>
-            <a:ext cx="4964529" cy="2740914"/>
+            <a:ext cx="4929812" cy="2740914"/>
           </a:xfrm>
           <a:prstGeom prst="rect">
             <a:avLst/>
@@ -9742,7 +9742,7 @@
         <p:spPr>
           <a:xfrm>
             <a:off x="457200" y="4203954"/>
-            <a:ext cx="6232002" cy="2105406"/>
+            <a:ext cx="6141024" cy="2105406"/>
           </a:xfrm>
           <a:prstGeom prst="rect">
             <a:avLst/>
@@ -9784,6 +9784,24 @@
                 </a:solidFill>
               </a:rPr>
               <a:t>ВВП: 0,5% / −0,2% / 2,4% у 2026–2028 (НБУ: 1,8 / 2,8 / 3,0%)</a:t>
+            </a:r>
+            <a:endParaRPr lang="en-US" sz="1400" dirty="0"/>
+          </a:p>
+          <a:p>
+            <a:pPr marL="177800" indent="-177800">
+              <a:spcAft>
+                <a:spcPts val="800"/>
+              </a:spcAft>
+              <a:buSzPct val="100000"/>
+              <a:buChar char="•"/>
+            </a:pPr>
+            <a:r>
+              <a:rPr lang="en-US" sz="1400" dirty="0">
+                <a:solidFill>
+                  <a:schemeClr val="tx1"/>
+                </a:solidFill>
+              </a:rPr>
+              <a:t>Розрив ВВП у 2027: у нас ≈−1,0%, у НБУ +1,4% — ми бачимо слабший попит</a:t>
             </a:r>
             <a:endParaRPr lang="en-US" sz="1400" dirty="0"/>
           </a:p>
@@ -10067,8 +10085,8 @@
         </p:blipFill>
         <p:spPr>
           <a:xfrm>
-            <a:off x="1000344" y="1280160"/>
-            <a:ext cx="10191008" cy="2606040"/>
+            <a:off x="1747099" y="1280160"/>
+            <a:ext cx="8697498" cy="2606040"/>
           </a:xfrm>
           <a:prstGeom prst="rect">
             <a:avLst/>
@@ -10091,21 +10109,21 @@
         </p:nvGraphicFramePr>
         <p:xfrm>
           <a:off x="457200" y="4069080"/>
-          <a:ext cx="7040880" cy="914400"/>
+          <a:ext cx="6675120" cy="914400"/>
         </p:xfrm>
         <a:graphic>
           <a:graphicData uri="http://schemas.openxmlformats.org/drawingml/2006/table">
             <a:tbl>
               <a:tblPr/>
               <a:tblGrid>
-                <a:gridCol w="2651760"/>
-                <a:gridCol w="877824"/>
-                <a:gridCol w="877824"/>
-                <a:gridCol w="877824"/>
-                <a:gridCol w="877824"/>
-                <a:gridCol w="877824"/>
+                <a:gridCol w="2377440"/>
+                <a:gridCol w="859536"/>
+                <a:gridCol w="859536"/>
+                <a:gridCol w="859536"/>
+                <a:gridCol w="859536"/>
+                <a:gridCol w="859536"/>
               </a:tblGrid>
-              <a:tr h="310896">
+              <a:tr h="292608">
                 <a:tc>
                   <a:txBody>
                     <a:bodyPr/>
@@ -10473,7 +10491,7 @@
                   </a:tcPr>
                 </a:tc>
               </a:tr>
-              <a:tr h="310896">
+              <a:tr h="292608">
                 <a:tc>
                   <a:txBody>
                     <a:bodyPr/>
@@ -10841,7 +10859,7 @@
                   </a:tcPr>
                 </a:tc>
               </a:tr>
-              <a:tr h="310896">
+              <a:tr h="292608">
                 <a:tc>
                   <a:txBody>
                     <a:bodyPr/>
@@ -11209,7 +11227,7 @@
                   </a:tcPr>
                 </a:tc>
               </a:tr>
-              <a:tr h="310896">
+              <a:tr h="292608">
                 <a:tc>
                   <a:txBody>
                     <a:bodyPr/>
@@ -11577,7 +11595,7 @@
                   </a:tcPr>
                 </a:tc>
               </a:tr>
-              <a:tr h="310896">
+              <a:tr h="292608">
                 <a:tc>
                   <a:txBody>
                     <a:bodyPr/>
@@ -11945,7 +11963,7 @@
                   </a:tcPr>
                 </a:tc>
               </a:tr>
-              <a:tr h="310896">
+              <a:tr h="292608">
                 <a:tc>
                   <a:txBody>
                     <a:bodyPr/>
@@ -12325,8 +12343,8 @@
         </p:nvSpPr>
         <p:spPr>
           <a:xfrm>
-            <a:off x="7818120" y="4114800"/>
-            <a:ext cx="3916375" cy="2194560"/>
+            <a:off x="7452360" y="4087368"/>
+            <a:ext cx="4282135" cy="2221992"/>
           </a:xfrm>
           <a:prstGeom prst="rect">
             <a:avLst/>
@@ -12346,14 +12364,14 @@
               <a:buChar char="•"/>
             </a:pPr>
             <a:r>
-              <a:rPr lang="en-US" sz="1300" dirty="0">
+              <a:rPr lang="en-US" sz="1250" dirty="0">
                 <a:solidFill>
                   <a:schemeClr val="tx1"/>
                 </a:solidFill>
               </a:rPr>
-              <a:t>Дефіцит фінансування: гривня на ≈7% слабша (≈49 грн/$) → інфляція до 13,0%, ставка до 19,4%</a:t>
-            </a:r>
-            <a:endParaRPr lang="en-US" sz="1300" dirty="0"/>
+              <a:t>Дефіцит фінансування: гривня на ≈7% слабша (≈49 грн/$) → ІСЦ до 13,0%, ставка до 19,4%</a:t>
+            </a:r>
+            <a:endParaRPr lang="en-US" sz="1250" dirty="0"/>
           </a:p>
           <a:p>
             <a:pPr marL="177800" indent="-177800">
@@ -12364,14 +12382,14 @@
               <a:buChar char="•"/>
             </a:pPr>
             <a:r>
-              <a:rPr lang="en-US" sz="1300" dirty="0">
+              <a:rPr lang="en-US" sz="1250" dirty="0">
                 <a:solidFill>
                   <a:schemeClr val="tx1"/>
                 </a:solidFill>
               </a:rPr>
-              <a:t>Важка зима: інфляція до 12,4%, ставка до 17,8%, ВВП 2027 — −1,1%</a:t>
-            </a:r>
-            <a:endParaRPr lang="en-US" sz="1300" dirty="0"/>
+              <a:t>Важка зима: ІСЦ до 12,4%, ставка до 17,8%, ВВП 2027 −1,1%</a:t>
+            </a:r>
+            <a:endParaRPr lang="en-US" sz="1250" dirty="0"/>
           </a:p>
           <a:p>
             <a:pPr marL="177800" indent="-177800">
@@ -12382,14 +12400,14 @@
               <a:buChar char="•"/>
             </a:pPr>
             <a:r>
-              <a:rPr lang="en-US" sz="1300" dirty="0">
+              <a:rPr lang="en-US" sz="1250" dirty="0">
                 <a:solidFill>
                   <a:schemeClr val="tx1"/>
                 </a:solidFill>
               </a:rPr>
-              <a:t>Нафта ≈$120 протягом 2027 замість ≈$87 за ф'ючерсами: +0,6 в. п. до ІСЦ IV кв. 2027 (пік IV кв. 2026 не змінюється); ставка на піку +0,3 в. п. — переважно перший раунд для цін пального</a:t>
-            </a:r>
-            <a:endParaRPr lang="en-US" sz="1300" dirty="0"/>
+              <a:t>Нафта ≈$120 весь 2027 (а не $87): +0,6 в. п. до ІСЦ IV кв. 2027, ставка на піку +0,3 в. п. — перший раунд</a:t>
+            </a:r>
+            <a:endParaRPr lang="en-US" sz="1250" dirty="0"/>
           </a:p>
           <a:p>
             <a:pPr marL="177800" indent="-177800">
@@ -12400,14 +12418,14 @@
               <a:buChar char="•"/>
             </a:pPr>
             <a:r>
-              <a:rPr lang="en-US" sz="1300" dirty="0">
+              <a:rPr lang="en-US" sz="1250" dirty="0">
                 <a:solidFill>
                   <a:schemeClr val="tx1"/>
                 </a:solidFill>
               </a:rPr>
-              <a:t>Ще чотири ризики (додаток): курс, як чекає ринок → ІСЦ IV кв. 2027 ≈8%; євро знову 1,16 $ → ІСЦ IV кв. 2027 ≈8%; розбалансування очікувань → ІСЦ IV кв. 2027 ≈7%; ПДВ 21% → +0,5 в. п. (II кв. 2027)</a:t>
-            </a:r>
-            <a:endParaRPr lang="en-US" sz="1300" dirty="0"/>
+              <a:t>Ще чотири ризики (додаток 8): курс, як чекає ринок → ≈8%; євро знову 1,16 $ → ≈8%; розбалансування очікувань → ≈7%; ПДВ 21% → +0,5 в. п.</a:t>
+            </a:r>
+            <a:endParaRPr lang="en-US" sz="1250" dirty="0"/>
           </a:p>
         </p:txBody>
       </p:sp>
@@ -12691,7 +12709,7 @@
               <a:buNone/>
             </a:pPr>
             <a:r>
-              <a:rPr lang="en-US" sz="900" dirty="0">
+              <a:rPr lang="en-US" sz="850" dirty="0">
                 <a:solidFill>
                   <a:srgbClr val="5F6B6D"/>
                 </a:solidFill>
@@ -12702,7 +12720,7 @@
               <a:buNone/>
             </a:pPr>
             <a:r>
-              <a:rPr lang="en-US" sz="900" u="sng" dirty="0">
+              <a:rPr lang="en-US" sz="850" u="sng" dirty="0">
                 <a:solidFill>
                   <a:srgbClr val="5F6B6D"/>
                 </a:solidFill>
@@ -12720,7 +12738,7 @@
               <a:buNone/>
             </a:pPr>
             <a:r>
-              <a:rPr lang="en-US" sz="900" dirty="0">
+              <a:rPr lang="en-US" sz="850" dirty="0">
                 <a:solidFill>
                   <a:srgbClr val="5F6B6D"/>
                 </a:solidFill>
@@ -12731,7 +12749,7 @@
               <a:buNone/>
             </a:pPr>
             <a:r>
-              <a:rPr lang="en-US" sz="900" u="sng" dirty="0">
+              <a:rPr lang="en-US" sz="850" u="sng" dirty="0">
                 <a:solidFill>
                   <a:srgbClr val="5F6B6D"/>
                 </a:solidFill>
@@ -12749,7 +12767,7 @@
               <a:buNone/>
             </a:pPr>
             <a:r>
-              <a:rPr lang="en-US" sz="900" dirty="0">
+              <a:rPr lang="en-US" sz="850" dirty="0">
                 <a:solidFill>
                   <a:srgbClr val="5F6B6D"/>
                 </a:solidFill>
@@ -12760,7 +12778,7 @@
               <a:buNone/>
             </a:pPr>
             <a:r>
-              <a:rPr lang="en-US" sz="900" u="sng" dirty="0">
+              <a:rPr lang="en-US" sz="850" u="sng" dirty="0">
                 <a:solidFill>
                   <a:srgbClr val="5F6B6D"/>
                 </a:solidFill>
@@ -12778,7 +12796,7 @@
               <a:buNone/>
             </a:pPr>
             <a:r>
-              <a:rPr lang="en-US" sz="900" dirty="0">
+              <a:rPr lang="en-US" sz="850" dirty="0">
                 <a:solidFill>
                   <a:srgbClr val="5F6B6D"/>
                 </a:solidFill>
@@ -12789,7 +12807,7 @@
               <a:buNone/>
             </a:pPr>
             <a:r>
-              <a:rPr lang="en-US" sz="900" u="sng" dirty="0">
+              <a:rPr lang="en-US" sz="850" u="sng" dirty="0">
                 <a:solidFill>
                   <a:srgbClr val="5F6B6D"/>
                 </a:solidFill>
@@ -12803,7 +12821,7 @@
               </a:rPr>
               <a:t>принцип обсягів 3-міс. ДС (НБУ)</a:t>
             </a:r>
-            <a:endParaRPr lang="en-US" sz="900" dirty="0"/>
+            <a:endParaRPr lang="en-US" sz="850" dirty="0"/>
           </a:p>
         </p:txBody>
       </p:sp>
@@ -13612,8 +13630,8 @@
         </p:blipFill>
         <p:spPr>
           <a:xfrm>
-            <a:off x="1775694" y="1280160"/>
-            <a:ext cx="8640307" cy="2606040"/>
+            <a:off x="2413032" y="1280160"/>
+            <a:ext cx="7365632" cy="2590800"/>
           </a:xfrm>
           <a:prstGeom prst="rect">
             <a:avLst/>
@@ -13635,22 +13653,22 @@
           </p:nvPr>
         </p:nvGraphicFramePr>
         <p:xfrm>
-          <a:off x="457200" y="4069080"/>
-          <a:ext cx="7040880" cy="914400"/>
+          <a:off x="457200" y="4053840"/>
+          <a:ext cx="6675120" cy="914400"/>
         </p:xfrm>
         <a:graphic>
           <a:graphicData uri="http://schemas.openxmlformats.org/drawingml/2006/table">
             <a:tbl>
               <a:tblPr/>
               <a:tblGrid>
-                <a:gridCol w="2651760"/>
-                <a:gridCol w="877824"/>
-                <a:gridCol w="877824"/>
-                <a:gridCol w="877824"/>
-                <a:gridCol w="877824"/>
-                <a:gridCol w="877824"/>
+                <a:gridCol w="2377440"/>
+                <a:gridCol w="859536"/>
+                <a:gridCol w="859536"/>
+                <a:gridCol w="859536"/>
+                <a:gridCol w="859536"/>
+                <a:gridCol w="859536"/>
               </a:tblGrid>
-              <a:tr h="310896">
+              <a:tr h="292608">
                 <a:tc>
                   <a:txBody>
                     <a:bodyPr/>
@@ -14018,7 +14036,7 @@
                   </a:tcPr>
                 </a:tc>
               </a:tr>
-              <a:tr h="310896">
+              <a:tr h="292608">
                 <a:tc>
                   <a:txBody>
                     <a:bodyPr/>
@@ -14386,7 +14404,7 @@
                   </a:tcPr>
                 </a:tc>
               </a:tr>
-              <a:tr h="310896">
+              <a:tr h="292608">
                 <a:tc>
                   <a:txBody>
                     <a:bodyPr/>
@@ -14754,7 +14772,7 @@
                   </a:tcPr>
                 </a:tc>
               </a:tr>
-              <a:tr h="310896">
+              <a:tr h="292608">
                 <a:tc>
                   <a:txBody>
                     <a:bodyPr/>
@@ -15122,7 +15140,7 @@
                   </a:tcPr>
                 </a:tc>
               </a:tr>
-              <a:tr h="310896">
+              <a:tr h="292608">
                 <a:tc>
                   <a:txBody>
                     <a:bodyPr/>
@@ -15490,7 +15508,7 @@
                   </a:tcPr>
                 </a:tc>
               </a:tr>
-              <a:tr h="310896">
+              <a:tr h="292608">
                 <a:tc>
                   <a:txBody>
                     <a:bodyPr/>
@@ -15870,8 +15888,8 @@
         </p:nvSpPr>
         <p:spPr>
           <a:xfrm>
-            <a:off x="7818120" y="4114800"/>
-            <a:ext cx="3916375" cy="2194560"/>
+            <a:off x="7452360" y="4072128"/>
+            <a:ext cx="4282135" cy="2237232"/>
           </a:xfrm>
           <a:prstGeom prst="rect">
             <a:avLst/>
@@ -15891,14 +15909,14 @@
               <a:buChar char="•"/>
             </a:pPr>
             <a:r>
-              <a:rPr lang="en-US" sz="1300" dirty="0">
+              <a:rPr lang="en-US" sz="1250" dirty="0">
                 <a:solidFill>
                   <a:schemeClr val="tx1"/>
                 </a:solidFill>
               </a:rPr>
-              <a:t>Втрати: відхилення інфляції від 5%, розрив ВВП, різкі зміни ставки; адмінціни — з вагою 50% (перший раунд); усі варіанти — з однаковими шоками наукасту (тому рядок ★ відрізняється від базового прогнозу на соті в. п.)</a:t>
-            </a:r>
-            <a:endParaRPr lang="en-US" sz="1300" dirty="0"/>
+              <a:t>Втрати: відхилення інфляції від 5%, розрив ВВП, зміни ставки; адмінціни — з вагою 50%</a:t>
+            </a:r>
+            <a:endParaRPr lang="en-US" sz="1250" dirty="0"/>
           </a:p>
           <a:p>
             <a:pPr marL="177800" indent="-177800">
@@ -15909,14 +15927,14 @@
               <a:buChar char="•"/>
             </a:pPr>
             <a:r>
-              <a:rPr lang="en-US" sz="1300" dirty="0">
+              <a:rPr lang="en-US" sz="1250" dirty="0">
                 <a:solidFill>
                   <a:schemeClr val="tx1"/>
                 </a:solidFill>
               </a:rPr>
-              <a:t>Оптимальна траєкторія: 16,9% зараз (16,4–17,7% залежно від згладжування), тримається на цьому рівні в I кв. 2027, зниження — з II кв. 2027; за курсовими припущеннями — 16,9–18,2% (без наукасту курсу 17,8%, євро знову 1,16 $ — 18,2%)</a:t>
-            </a:r>
-            <a:endParaRPr lang="en-US" sz="1300" dirty="0"/>
+              <a:t>Оптимум: 16,9% зараз (16,4–17,7% залежно від згладжування), зниження з II кв. 2027; за курсовими припущеннями — 16,9–18,2%</a:t>
+            </a:r>
+            <a:endParaRPr lang="en-US" sz="1250" dirty="0"/>
           </a:p>
           <a:p>
             <a:pPr marL="177800" indent="-177800">
@@ -15927,14 +15945,14 @@
               <a:buChar char="•"/>
             </a:pPr>
             <a:r>
-              <a:rPr lang="en-US" sz="1300" dirty="0">
+              <a:rPr lang="en-US" sz="1250" dirty="0">
                 <a:solidFill>
                   <a:schemeClr val="tx1"/>
                 </a:solidFill>
               </a:rPr>
-              <a:t>За центральних ваг модель майже не розрізняє 16–17% (втрати 106 / 105 / 106); під ризиками (11 сценаріїв) найменші очікувані втрати — 17%, мінімальний жаль — 17,5%</a:t>
-            </a:r>
-            <a:endParaRPr lang="en-US" sz="1300" dirty="0"/>
+              <a:t>16–17% майже рівні (втрати 106 / 105 / 106); під ризиками (11 сценаріїв) мінімум — 17%, мінімакс жалю — 17,5%</a:t>
+            </a:r>
+            <a:endParaRPr lang="en-US" sz="1250" dirty="0"/>
           </a:p>
           <a:p>
             <a:pPr marL="177800" indent="-177800">
@@ -15945,14 +15963,14 @@
               <a:buChar char="•"/>
             </a:pPr>
             <a:r>
-              <a:rPr lang="en-US" sz="1300" dirty="0">
+              <a:rPr lang="en-US" sz="1250" dirty="0">
                 <a:solidFill>
                   <a:schemeClr val="tx1"/>
                 </a:solidFill>
               </a:rPr>
-              <a:t>Наш вибір — 17% (усередині модельного діапазону): крок у пункт — через зміщені вгору ризики і прецеденти 2025 р.; готовність до +0,5 у грудні, коли буде прогноз НБУ і дані за жовтень</a:t>
-            </a:r>
-            <a:endParaRPr lang="en-US" sz="1300" dirty="0"/>
+              <a:t>Вибір — 17%: усередині модельного діапазону; крок у пункт — через ризики вгору; готові до +0,5 у грудні</a:t>
+            </a:r>
+            <a:endParaRPr lang="en-US" sz="1250" dirty="0"/>
           </a:p>
         </p:txBody>
       </p:sp>
@@ -16295,7 +16313,7 @@
         <p:spPr>
           <a:xfrm>
             <a:off x="3931920" y="1325880"/>
-            <a:ext cx="7802575" cy="347472"/>
+            <a:ext cx="7802575" cy="329184"/>
           </a:xfrm>
           <a:prstGeom prst="rect">
             <a:avLst/>
@@ -16333,8 +16351,8 @@
         </p:nvSpPr>
         <p:spPr>
           <a:xfrm>
-            <a:off x="3931920" y="1709928"/>
-            <a:ext cx="7802575" cy="1376172"/>
+            <a:off x="3931920" y="1673352"/>
+            <a:ext cx="7802575" cy="1409869"/>
           </a:xfrm>
           <a:prstGeom prst="rect">
             <a:avLst/>
@@ -16348,74 +16366,74 @@
           <a:p>
             <a:pPr marL="177800" indent="-177800">
               <a:spcAft>
-                <a:spcPts val="800"/>
+                <a:spcPts val="500"/>
               </a:spcAft>
               <a:buSzPct val="100000"/>
               <a:buChar char="•"/>
             </a:pPr>
             <a:r>
-              <a:rPr lang="en-US" sz="1400" dirty="0">
+              <a:rPr lang="en-US" sz="1250" dirty="0">
                 <a:solidFill>
                   <a:schemeClr val="tx1"/>
                 </a:solidFill>
               </a:rPr>
               <a:t>Вересень — 10,0%, значно вище прогнозу НБУ; у грудні — ≈12%; ризики зміщені вгору</a:t>
             </a:r>
-            <a:endParaRPr lang="en-US" sz="1400" dirty="0"/>
+            <a:endParaRPr lang="en-US" sz="1250" dirty="0"/>
           </a:p>
           <a:p>
             <a:pPr marL="177800" indent="-177800">
               <a:spcAft>
-                <a:spcPts val="800"/>
+                <a:spcPts val="500"/>
               </a:spcAft>
               <a:buSzPct val="100000"/>
               <a:buChar char="•"/>
             </a:pPr>
             <a:r>
-              <a:rPr lang="en-US" sz="1400" dirty="0">
+              <a:rPr lang="en-US" sz="1250" dirty="0">
                 <a:solidFill>
                   <a:schemeClr val="tx1"/>
                 </a:solidFill>
               </a:rPr>
               <a:t>Базова інфляція прискорилася до 8,8% і за наукастом сягне ≈9,6% у грудні — вторинні ефекти вже є; очікування домогосподарств 10–14%</a:t>
             </a:r>
-            <a:endParaRPr lang="en-US" sz="1400" dirty="0"/>
+            <a:endParaRPr lang="en-US" sz="1250" dirty="0"/>
           </a:p>
           <a:p>
             <a:pPr marL="177800" indent="-177800">
               <a:spcAft>
-                <a:spcPts val="800"/>
+                <a:spcPts val="500"/>
               </a:spcAft>
               <a:buSzPct val="100000"/>
               <a:buChar char="•"/>
             </a:pPr>
             <a:r>
-              <a:rPr lang="en-US" sz="1400" dirty="0">
+              <a:rPr lang="en-US" sz="1250" dirty="0">
                 <a:solidFill>
                   <a:schemeClr val="tx1"/>
                 </a:solidFill>
               </a:rPr>
               <a:t>Курс: якщо гривня піде як чекає ринок (48+ грн/$), ІСЦ IV кв. 2027 — ≈8% і 17% недостатньо — готові підвищувати до ≈19%</a:t>
             </a:r>
-            <a:endParaRPr lang="en-US" sz="1400" dirty="0"/>
+            <a:endParaRPr lang="en-US" sz="1250" dirty="0"/>
           </a:p>
           <a:p>
             <a:pPr marL="177800" indent="-177800">
               <a:spcAft>
-                <a:spcPts val="800"/>
+                <a:spcPts val="500"/>
               </a:spcAft>
               <a:buSzPct val="100000"/>
               <a:buChar char="•"/>
             </a:pPr>
             <a:r>
-              <a:rPr lang="en-US" sz="1400" dirty="0">
+              <a:rPr lang="en-US" sz="1250" dirty="0">
                 <a:solidFill>
                   <a:schemeClr val="tx1"/>
                 </a:solidFill>
               </a:rPr>
               <a:t>До депозитів: знизити коефіцієнт використання ліміту 3-міс. ДС (прив'язаного до строкових вкладів)</a:t>
             </a:r>
-            <a:endParaRPr lang="en-US" sz="1400" dirty="0"/>
+            <a:endParaRPr lang="en-US" sz="1250" dirty="0"/>
           </a:p>
         </p:txBody>
       </p:sp>
@@ -16427,8 +16445,8 @@
         </p:nvSpPr>
         <p:spPr>
           <a:xfrm>
-            <a:off x="3931920" y="3131820"/>
-            <a:ext cx="7802575" cy="347472"/>
+            <a:off x="3931920" y="3192949"/>
+            <a:ext cx="7802575" cy="329184"/>
           </a:xfrm>
           <a:prstGeom prst="rect">
             <a:avLst/>
@@ -16466,8 +16484,8 @@
         </p:nvSpPr>
         <p:spPr>
           <a:xfrm>
-            <a:off x="3931920" y="3515868"/>
-            <a:ext cx="7802575" cy="1159002"/>
+            <a:off x="3931920" y="3540421"/>
+            <a:ext cx="7802575" cy="1155869"/>
           </a:xfrm>
           <a:prstGeom prst="rect">
             <a:avLst/>
@@ -16481,56 +16499,56 @@
           <a:p>
             <a:pPr marL="177800" indent="-177800">
               <a:spcAft>
-                <a:spcPts val="800"/>
+                <a:spcPts val="500"/>
               </a:spcAft>
               <a:buSzPct val="100000"/>
               <a:buChar char="•"/>
             </a:pPr>
             <a:r>
-              <a:rPr lang="en-US" sz="1400" dirty="0">
+              <a:rPr lang="en-US" sz="1250" dirty="0">
                 <a:solidFill>
                   <a:schemeClr val="tx1"/>
                 </a:solidFill>
               </a:rPr>
               <a:t>Модель: оптимум ≈16,9%, під ризиками — 17%, за курсовими припущеннями 16,5–18,2% — ми усередині цього діапазону і рішучіші за ринок (ОВДП, очікування)</a:t>
             </a:r>
-            <a:endParaRPr lang="en-US" sz="1400" dirty="0"/>
+            <a:endParaRPr lang="en-US" sz="1250" dirty="0"/>
           </a:p>
           <a:p>
             <a:pPr marL="177800" indent="-177800">
               <a:spcAft>
-                <a:spcPts val="800"/>
+                <a:spcPts val="500"/>
               </a:spcAft>
               <a:buSzPct val="100000"/>
               <a:buChar char="•"/>
             </a:pPr>
             <a:r>
-              <a:rPr lang="en-US" sz="1400" dirty="0">
+              <a:rPr lang="en-US" sz="1250" dirty="0">
                 <a:solidFill>
                   <a:schemeClr val="tx1"/>
                 </a:solidFill>
               </a:rPr>
               <a:t>+1 в. п. — як у січні й березні 2025; +1,5 одразу — надмірний сигнал за слабкого ВВП і до оновленого прогнозу НБУ</a:t>
             </a:r>
-            <a:endParaRPr lang="en-US" sz="1400" dirty="0"/>
+            <a:endParaRPr lang="en-US" sz="1250" dirty="0"/>
           </a:p>
           <a:p>
             <a:pPr marL="177800" indent="-177800">
               <a:spcAft>
-                <a:spcPts val="800"/>
+                <a:spcPts val="500"/>
               </a:spcAft>
               <a:buSzPct val="100000"/>
               <a:buChar char="•"/>
             </a:pPr>
             <a:r>
-              <a:rPr lang="en-US" sz="1400" dirty="0">
+              <a:rPr lang="en-US" sz="1250" dirty="0">
                 <a:solidFill>
                   <a:schemeClr val="tx1"/>
                 </a:solidFill>
               </a:rPr>
               <a:t>16,5% — якби жовтневі дані показали сповільнення базової інфляції і стабільні очікування</a:t>
             </a:r>
-            <a:endParaRPr lang="en-US" sz="1400" dirty="0"/>
+            <a:endParaRPr lang="en-US" sz="1250" dirty="0"/>
           </a:p>
         </p:txBody>
       </p:sp>
@@ -16542,8 +16560,8 @@
         </p:nvSpPr>
         <p:spPr>
           <a:xfrm>
-            <a:off x="3931920" y="4720590"/>
-            <a:ext cx="7802575" cy="347472"/>
+            <a:off x="3931920" y="4806019"/>
+            <a:ext cx="7802575" cy="329184"/>
           </a:xfrm>
           <a:prstGeom prst="rect">
             <a:avLst/>
@@ -16581,8 +16599,8 @@
         </p:nvSpPr>
         <p:spPr>
           <a:xfrm>
-            <a:off x="3931920" y="5104638"/>
-            <a:ext cx="7802575" cy="1159002"/>
+            <a:off x="3931920" y="5153491"/>
+            <a:ext cx="7802575" cy="1155869"/>
           </a:xfrm>
           <a:prstGeom prst="rect">
             <a:avLst/>
@@ -16596,56 +16614,56 @@
           <a:p>
             <a:pPr marL="177800" indent="-177800">
               <a:spcAft>
-                <a:spcPts val="800"/>
+                <a:spcPts val="500"/>
               </a:spcAft>
               <a:buSzPct val="100000"/>
               <a:buChar char="•"/>
             </a:pPr>
             <a:r>
-              <a:rPr lang="en-US" sz="1400" dirty="0">
+              <a:rPr lang="en-US" sz="1250" dirty="0">
                 <a:solidFill>
                   <a:schemeClr val="tx1"/>
                 </a:solidFill>
               </a:rPr>
               <a:t>Не знижувати щонайменше до III кв. 2027 (оптимум моделі — з II кв. 2027; запас на курсові ризики); далі ≈13,1% наприкінці 2027, ≈10,5% — 2028</a:t>
             </a:r>
-            <a:endParaRPr lang="en-US" sz="1400" dirty="0"/>
+            <a:endParaRPr lang="en-US" sz="1250" dirty="0"/>
           </a:p>
           <a:p>
             <a:pPr marL="177800" indent="-177800">
               <a:spcAft>
-                <a:spcPts val="800"/>
+                <a:spcPts val="500"/>
               </a:spcAft>
               <a:buSzPct val="100000"/>
               <a:buChar char="•"/>
             </a:pPr>
             <a:r>
-              <a:rPr lang="en-US" sz="1400" dirty="0">
+              <a:rPr lang="en-US" sz="1250" dirty="0">
                 <a:solidFill>
                   <a:schemeClr val="tx1"/>
                 </a:solidFill>
               </a:rPr>
               <a:t>Наступний крок радше вгору: ще +0,5 у грудні, якщо базова без сезонності не сповільниться нижче ≈0,7% м/м (зараз ≈0,8%) або посиляться курсові очікування</a:t>
             </a:r>
-            <a:endParaRPr lang="en-US" sz="1400" dirty="0"/>
+            <a:endParaRPr lang="en-US" sz="1250" dirty="0"/>
           </a:p>
           <a:p>
             <a:pPr marL="177800" indent="-177800">
               <a:spcAft>
-                <a:spcPts val="800"/>
+                <a:spcPts val="500"/>
               </a:spcAft>
               <a:buSzPct val="100000"/>
               <a:buChar char="•"/>
             </a:pPr>
             <a:r>
-              <a:rPr lang="en-US" sz="1400" dirty="0">
+              <a:rPr lang="en-US" sz="1250" dirty="0">
                 <a:solidFill>
                   <a:schemeClr val="tx1"/>
                 </a:solidFill>
               </a:rPr>
               <a:t>Швидше пом'якшення — якщо базова інфляція &lt; 7% і очікування знижуються</a:t>
             </a:r>
-            <a:endParaRPr lang="en-US" sz="1400" dirty="0"/>
+            <a:endParaRPr lang="en-US" sz="1250" dirty="0"/>
           </a:p>
         </p:txBody>
       </p:sp>
@@ -16892,7 +16910,7 @@
         <p:spPr>
           <a:xfrm>
             <a:off x="457200" y="1325880"/>
-            <a:ext cx="7040880" cy="4798040"/>
+            <a:ext cx="7040880" cy="4275734"/>
           </a:xfrm>
           <a:prstGeom prst="rect">
             <a:avLst/>
@@ -16928,14 +16946,14 @@
               <a:buChar char="•"/>
             </a:pPr>
             <a:r>
-              <a:rPr lang="en-US" sz="1400" dirty="0">
+              <a:rPr lang="en-US" sz="1350" dirty="0">
                 <a:solidFill>
                   <a:schemeClr val="tx1"/>
                 </a:solidFill>
               </a:rPr>
               <a:t>Продаж НБУ ≈$5,0 млрд/міс, надходження ≈$3,7 млрд/міс. НБУ (липень) чекав $69,7 млрд на кінець 2026 — для цього треба ≈$13 млрд/міс</a:t>
             </a:r>
-            <a:endParaRPr lang="en-US" sz="1400" dirty="0"/>
+            <a:endParaRPr lang="en-US" sz="1350" dirty="0"/>
           </a:p>
           <a:p>
             <a:pPr marL="177800" indent="-177800">
@@ -16946,14 +16964,14 @@
               <a:buChar char="•"/>
             </a:pPr>
             <a:r>
-              <a:rPr lang="en-US" sz="1400" dirty="0">
+              <a:rPr lang="en-US" sz="1350" dirty="0">
                 <a:solidFill>
                   <a:schemeClr val="tx1"/>
                 </a:solidFill>
               </a:rPr>
               <a:t>Наші сценарії на кінець 2026: $56 / 43 / 38 млрд = 5,0 / 3,8 / 3,4 міс. імпорту 2027 р.; центральний — $43 млрд, надолуження — якщо Рада ухвалить закони під допомогу</a:t>
             </a:r>
-            <a:endParaRPr lang="en-US" sz="1400" dirty="0"/>
+            <a:endParaRPr lang="en-US" sz="1350" dirty="0"/>
           </a:p>
           <a:p>
             <a:pPr marL="177800" indent="-177800">
@@ -16964,14 +16982,14 @@
               <a:buChar char="•"/>
             </a:pPr>
             <a:r>
-              <a:rPr lang="en-US" sz="1400" dirty="0">
+              <a:rPr lang="en-US" sz="1350" dirty="0">
                 <a:solidFill>
                   <a:schemeClr val="tx1"/>
                 </a:solidFill>
               </a:rPr>
               <a:t>Модель: ≈45,6 грн/$ у IV кв. 2027 (≈1% до долара) — міцніше за бюджет-2027 (48,3) та ICU (49,2): курс тримає весь шлях ставки (паритет) і керований цільовий курс; перенос у ціни ≈0,75 — верхня межа</a:t>
             </a:r>
-            <a:endParaRPr lang="en-US" sz="1400" dirty="0"/>
+            <a:endParaRPr lang="en-US" sz="1350" dirty="0"/>
           </a:p>
           <a:p>
             <a:pPr marL="177800" indent="-177800">
@@ -16982,14 +17000,14 @@
               <a:buChar char="•"/>
             </a:pPr>
             <a:r>
-              <a:rPr lang="en-US" sz="1400" dirty="0">
+              <a:rPr lang="en-US" sz="1350" dirty="0">
                 <a:solidFill>
                   <a:schemeClr val="tx1"/>
                 </a:solidFill>
               </a:rPr>
               <a:t>Якщо правий ринок (48+ грн/$): ІСЦ IV кв. 2027 ≈8%, і 17% недостатньо — готові підвищувати до ≈19%</a:t>
             </a:r>
-            <a:endParaRPr lang="en-US" sz="1400" dirty="0"/>
+            <a:endParaRPr lang="en-US" sz="1350" dirty="0"/>
           </a:p>
           <a:p>
             <a:pPr marL="177800" indent="-177800">
@@ -17000,14 +17018,14 @@
               <a:buChar char="•"/>
             </a:pPr>
             <a:r>
-              <a:rPr lang="en-US" sz="1400" dirty="0">
+              <a:rPr lang="en-US" sz="1350" dirty="0">
                 <a:solidFill>
                   <a:schemeClr val="tx1"/>
                 </a:solidFill>
               </a:rPr>
               <a:t>Рекомендація: не фіксувати курс — жовтневе послаблення до 45,08 грн/$ показує, що амортизатор працює; інтервенції — лише згладжувати. Резерви залежать від ритму допомоги (продаж валюти її «доносить»), тому захищає їх пауза в лібералізації</a:t>
             </a:r>
-            <a:endParaRPr lang="en-US" sz="1400" dirty="0"/>
+            <a:endParaRPr lang="en-US" sz="1350" dirty="0"/>
           </a:p>
         </p:txBody>
       </p:sp>
@@ -17217,11 +17235,11 @@
         <p:spPr>
           <a:xfrm>
             <a:off x="457200" y="1325880"/>
-            <a:ext cx="3576218" cy="2148840"/>
+            <a:ext cx="3576218" cy="2103120"/>
           </a:xfrm>
           <a:prstGeom prst="roundRect">
             <a:avLst>
-              <a:gd name="adj" fmla="val 3404"/>
+              <a:gd name="adj" fmla="val 3478"/>
             </a:avLst>
           </a:prstGeom>
           <a:solidFill>
@@ -17324,7 +17342,7 @@
         </p:nvSpPr>
         <p:spPr>
           <a:xfrm>
-            <a:off x="685800" y="2560320"/>
+            <a:off x="685800" y="2532888"/>
             <a:ext cx="3119018" cy="822960"/>
           </a:xfrm>
           <a:prstGeom prst="rect">
@@ -17361,11 +17379,11 @@
         <p:spPr>
           <a:xfrm>
             <a:off x="4307738" y="1325880"/>
-            <a:ext cx="3576218" cy="2148840"/>
+            <a:ext cx="3576218" cy="2103120"/>
           </a:xfrm>
           <a:prstGeom prst="roundRect">
             <a:avLst>
-              <a:gd name="adj" fmla="val 3404"/>
+              <a:gd name="adj" fmla="val 3478"/>
             </a:avLst>
           </a:prstGeom>
           <a:solidFill>
@@ -17468,7 +17486,7 @@
         </p:nvSpPr>
         <p:spPr>
           <a:xfrm>
-            <a:off x="4536338" y="2560320"/>
+            <a:off x="4536338" y="2532888"/>
             <a:ext cx="3119018" cy="822960"/>
           </a:xfrm>
           <a:prstGeom prst="rect">
@@ -17490,7 +17508,7 @@
                   <a:schemeClr val="tx1"/>
                 </a:solidFill>
               </a:rPr>
-              <a:t>після плато ≈44,7 грн/$ (червень–вересень) у жовтні — до 45,08 (14.10, історичний мінімум гривні), 25.10 — 45,05; допускати двосторонні коливання, інтервенції лише згладжують; рівень не фіксувати</a:t>
+              <a:t>у жовтні гривня послабилася до 45,08 грн/$ — амортизатор працює; рівень не фіксувати, інтервенції лише згладжують</a:t>
             </a:r>
             <a:endParaRPr lang="en-US" sz="1300" dirty="0"/>
           </a:p>
@@ -17505,11 +17523,11 @@
         <p:spPr>
           <a:xfrm>
             <a:off x="8158277" y="1325880"/>
-            <a:ext cx="3576218" cy="2148840"/>
+            <a:ext cx="3576218" cy="2103120"/>
           </a:xfrm>
           <a:prstGeom prst="roundRect">
             <a:avLst>
-              <a:gd name="adj" fmla="val 3404"/>
+              <a:gd name="adj" fmla="val 3478"/>
             </a:avLst>
           </a:prstGeom>
           <a:solidFill>
@@ -17612,7 +17630,7 @@
         </p:nvSpPr>
         <p:spPr>
           <a:xfrm>
-            <a:off x="8386877" y="2560320"/>
+            <a:off x="8386877" y="2532888"/>
             <a:ext cx="3119018" cy="822960"/>
           </a:xfrm>
           <a:prstGeom prst="rect">
@@ -17655,7 +17673,7 @@
           </p:nvPr>
         </p:nvGraphicFramePr>
         <p:xfrm>
-          <a:off x="457200" y="3794760"/>
+          <a:off x="457200" y="3657600"/>
           <a:ext cx="11277295" cy="914400"/>
         </p:xfrm>
         <a:graphic>
@@ -17669,7 +17687,7 @@
                 <a:gridCol w="1996364"/>
                 <a:gridCol w="1996364"/>
               </a:tblGrid>
-              <a:tr h="384048">
+              <a:tr h="347472">
                 <a:tc>
                   <a:txBody>
                     <a:bodyPr/>
@@ -17678,7 +17696,7 @@
                       <a:pPr indent="0" marL="0">
                         <a:buNone/>
                       </a:pPr>
-                      <a:endParaRPr lang="en-US" sz="1500" dirty="0"/>
+                      <a:endParaRPr lang="en-US" sz="1400" dirty="0"/>
                     </a:p>
                   </a:txBody>
                   <a:tcPr marL="63500" marR="63500" marT="38100" marB="38100" anchor="ctr">
@@ -17732,14 +17750,14 @@
                         <a:buNone/>
                       </a:pPr>
                       <a:r>
-                        <a:rPr lang="en-US" sz="1500" b="1" dirty="0">
+                        <a:rPr lang="en-US" sz="1400" b="1" dirty="0">
                           <a:solidFill>
                             <a:schemeClr val="bg1"/>
                           </a:solidFill>
                         </a:rPr>
                         <a:t>IV кв. 2026</a:t>
                       </a:r>
-                      <a:endParaRPr lang="en-US" sz="1500" dirty="0"/>
+                      <a:endParaRPr lang="en-US" sz="1400" dirty="0"/>
                     </a:p>
                   </a:txBody>
                   <a:tcPr marL="63500" marR="63500" marT="38100" marB="38100" anchor="ctr">
@@ -17793,14 +17811,14 @@
                         <a:buNone/>
                       </a:pPr>
                       <a:r>
-                        <a:rPr lang="en-US" sz="1500" b="1" dirty="0">
+                        <a:rPr lang="en-US" sz="1400" b="1" dirty="0">
                           <a:solidFill>
                             <a:schemeClr val="bg1"/>
                           </a:solidFill>
                         </a:rPr>
                         <a:t>IV кв. 2027</a:t>
                       </a:r>
-                      <a:endParaRPr lang="en-US" sz="1500" dirty="0"/>
+                      <a:endParaRPr lang="en-US" sz="1400" dirty="0"/>
                     </a:p>
                   </a:txBody>
                   <a:tcPr marL="63500" marR="63500" marT="38100" marB="38100" anchor="ctr">
@@ -17854,14 +17872,14 @@
                         <a:buNone/>
                       </a:pPr>
                       <a:r>
-                        <a:rPr lang="en-US" sz="1500" b="1" dirty="0">
+                        <a:rPr lang="en-US" sz="1400" b="1" dirty="0">
                           <a:solidFill>
                             <a:schemeClr val="bg1"/>
                           </a:solidFill>
                         </a:rPr>
                         <a:t>IV кв. 2028</a:t>
                       </a:r>
-                      <a:endParaRPr lang="en-US" sz="1500" dirty="0"/>
+                      <a:endParaRPr lang="en-US" sz="1400" dirty="0"/>
                     </a:p>
                   </a:txBody>
                   <a:tcPr marL="63500" marR="63500" marT="38100" marB="38100" anchor="ctr">
@@ -17915,14 +17933,14 @@
                         <a:buNone/>
                       </a:pPr>
                       <a:r>
-                        <a:rPr lang="en-US" sz="1500" b="1" dirty="0">
+                        <a:rPr lang="en-US" sz="1400" b="1" dirty="0">
                           <a:solidFill>
                             <a:schemeClr val="bg1"/>
                           </a:solidFill>
                         </a:rPr>
                         <a:t>IV кв. 2029</a:t>
                       </a:r>
-                      <a:endParaRPr lang="en-US" sz="1500" dirty="0"/>
+                      <a:endParaRPr lang="en-US" sz="1400" dirty="0"/>
                     </a:p>
                   </a:txBody>
                   <a:tcPr marL="63500" marR="63500" marT="38100" marB="38100" anchor="ctr">
@@ -17968,7 +17986,7 @@
                   </a:tcPr>
                 </a:tc>
               </a:tr>
-              <a:tr h="384048">
+              <a:tr h="347472">
                 <a:tc>
                   <a:txBody>
                     <a:bodyPr/>
@@ -17978,14 +17996,14 @@
                         <a:buNone/>
                       </a:pPr>
                       <a:r>
-                        <a:rPr lang="en-US" sz="1500" b="1" dirty="0">
+                        <a:rPr lang="en-US" sz="1400" b="1" dirty="0">
                           <a:solidFill>
                             <a:schemeClr val="tx1"/>
                           </a:solidFill>
                         </a:rPr>
                         <a:t>ІСЦ, % р/р*</a:t>
                       </a:r>
-                      <a:endParaRPr lang="en-US" sz="1500" dirty="0"/>
+                      <a:endParaRPr lang="en-US" sz="1400" dirty="0"/>
                     </a:p>
                   </a:txBody>
                   <a:tcPr marL="63500" marR="63500" marT="38100" marB="38100" anchor="ctr">
@@ -18039,14 +18057,14 @@
                         <a:buNone/>
                       </a:pPr>
                       <a:r>
-                        <a:rPr lang="en-US" sz="1500" dirty="0">
+                        <a:rPr lang="en-US" sz="1400" dirty="0">
                           <a:solidFill>
                             <a:schemeClr val="tx1"/>
                           </a:solidFill>
                         </a:rPr>
                         <a:t>11,2</a:t>
                       </a:r>
-                      <a:endParaRPr lang="en-US" sz="1500" dirty="0"/>
+                      <a:endParaRPr lang="en-US" sz="1400" dirty="0"/>
                     </a:p>
                   </a:txBody>
                   <a:tcPr marL="63500" marR="63500" marT="38100" marB="38100" anchor="ctr">
@@ -18100,14 +18118,14 @@
                         <a:buNone/>
                       </a:pPr>
                       <a:r>
-                        <a:rPr lang="en-US" sz="1500" dirty="0">
+                        <a:rPr lang="en-US" sz="1400" dirty="0">
                           <a:solidFill>
                             <a:schemeClr val="tx1"/>
                           </a:solidFill>
                         </a:rPr>
                         <a:t>5,4</a:t>
                       </a:r>
-                      <a:endParaRPr lang="en-US" sz="1500" dirty="0"/>
+                      <a:endParaRPr lang="en-US" sz="1400" dirty="0"/>
                     </a:p>
                   </a:txBody>
                   <a:tcPr marL="63500" marR="63500" marT="38100" marB="38100" anchor="ctr">
@@ -18161,14 +18179,14 @@
                         <a:buNone/>
                       </a:pPr>
                       <a:r>
-                        <a:rPr lang="en-US" sz="1500" dirty="0">
+                        <a:rPr lang="en-US" sz="1400" dirty="0">
                           <a:solidFill>
                             <a:schemeClr val="tx1"/>
                           </a:solidFill>
                         </a:rPr>
                         <a:t>4,8</a:t>
                       </a:r>
-                      <a:endParaRPr lang="en-US" sz="1500" dirty="0"/>
+                      <a:endParaRPr lang="en-US" sz="1400" dirty="0"/>
                     </a:p>
                   </a:txBody>
                   <a:tcPr marL="63500" marR="63500" marT="38100" marB="38100" anchor="ctr">
@@ -18222,14 +18240,14 @@
                         <a:buNone/>
                       </a:pPr>
                       <a:r>
-                        <a:rPr lang="en-US" sz="1500" dirty="0">
+                        <a:rPr lang="en-US" sz="1400" dirty="0">
                           <a:solidFill>
                             <a:schemeClr val="tx1"/>
                           </a:solidFill>
                         </a:rPr>
                         <a:t>4,8</a:t>
                       </a:r>
-                      <a:endParaRPr lang="en-US" sz="1500" dirty="0"/>
+                      <a:endParaRPr lang="en-US" sz="1400" dirty="0"/>
                     </a:p>
                   </a:txBody>
                   <a:tcPr marL="63500" marR="63500" marT="38100" marB="38100" anchor="ctr">
@@ -18275,7 +18293,7 @@
                   </a:tcPr>
                 </a:tc>
               </a:tr>
-              <a:tr h="384048">
+              <a:tr h="347472">
                 <a:tc>
                   <a:txBody>
                     <a:bodyPr/>
@@ -18285,14 +18303,14 @@
                         <a:buNone/>
                       </a:pPr>
                       <a:r>
-                        <a:rPr lang="en-US" sz="1500" b="1" dirty="0">
+                        <a:rPr lang="en-US" sz="1400" b="1" dirty="0">
                           <a:solidFill>
                             <a:schemeClr val="tx1"/>
                           </a:solidFill>
                         </a:rPr>
                         <a:t>Базова інфляція, % р/р*</a:t>
                       </a:r>
-                      <a:endParaRPr lang="en-US" sz="1500" dirty="0"/>
+                      <a:endParaRPr lang="en-US" sz="1400" dirty="0"/>
                     </a:p>
                   </a:txBody>
                   <a:tcPr marL="63500" marR="63500" marT="38100" marB="38100" anchor="ctr">
@@ -18346,14 +18364,14 @@
                         <a:buNone/>
                       </a:pPr>
                       <a:r>
-                        <a:rPr lang="en-US" sz="1500" dirty="0">
+                        <a:rPr lang="en-US" sz="1400" dirty="0">
                           <a:solidFill>
                             <a:schemeClr val="tx1"/>
                           </a:solidFill>
                         </a:rPr>
                         <a:t>9,3</a:t>
                       </a:r>
-                      <a:endParaRPr lang="en-US" sz="1500" dirty="0"/>
+                      <a:endParaRPr lang="en-US" sz="1400" dirty="0"/>
                     </a:p>
                   </a:txBody>
                   <a:tcPr marL="63500" marR="63500" marT="38100" marB="38100" anchor="ctr">
@@ -18407,14 +18425,14 @@
                         <a:buNone/>
                       </a:pPr>
                       <a:r>
-                        <a:rPr lang="en-US" sz="1500" dirty="0">
+                        <a:rPr lang="en-US" sz="1400" dirty="0">
                           <a:solidFill>
                             <a:schemeClr val="tx1"/>
                           </a:solidFill>
                         </a:rPr>
                         <a:t>4,2</a:t>
                       </a:r>
-                      <a:endParaRPr lang="en-US" sz="1500" dirty="0"/>
+                      <a:endParaRPr lang="en-US" sz="1400" dirty="0"/>
                     </a:p>
                   </a:txBody>
                   <a:tcPr marL="63500" marR="63500" marT="38100" marB="38100" anchor="ctr">
@@ -18468,14 +18486,14 @@
                         <a:buNone/>
                       </a:pPr>
                       <a:r>
-                        <a:rPr lang="en-US" sz="1500" dirty="0">
+                        <a:rPr lang="en-US" sz="1400" dirty="0">
                           <a:solidFill>
                             <a:schemeClr val="tx1"/>
                           </a:solidFill>
                         </a:rPr>
                         <a:t>3,4</a:t>
                       </a:r>
-                      <a:endParaRPr lang="en-US" sz="1500" dirty="0"/>
+                      <a:endParaRPr lang="en-US" sz="1400" dirty="0"/>
                     </a:p>
                   </a:txBody>
                   <a:tcPr marL="63500" marR="63500" marT="38100" marB="38100" anchor="ctr">
@@ -18529,14 +18547,14 @@
                         <a:buNone/>
                       </a:pPr>
                       <a:r>
-                        <a:rPr lang="en-US" sz="1500" dirty="0">
+                        <a:rPr lang="en-US" sz="1400" dirty="0">
                           <a:solidFill>
                             <a:schemeClr val="tx1"/>
                           </a:solidFill>
                         </a:rPr>
                         <a:t>4,7</a:t>
                       </a:r>
-                      <a:endParaRPr lang="en-US" sz="1500" dirty="0"/>
+                      <a:endParaRPr lang="en-US" sz="1400" dirty="0"/>
                     </a:p>
                   </a:txBody>
                   <a:tcPr marL="63500" marR="63500" marT="38100" marB="38100" anchor="ctr">
@@ -18582,7 +18600,7 @@
                   </a:tcPr>
                 </a:tc>
               </a:tr>
-              <a:tr h="384048">
+              <a:tr h="347472">
                 <a:tc>
                   <a:txBody>
                     <a:bodyPr/>
@@ -18592,14 +18610,14 @@
                         <a:buNone/>
                       </a:pPr>
                       <a:r>
-                        <a:rPr lang="en-US" sz="1500" b="1" dirty="0">
+                        <a:rPr lang="en-US" sz="1400" b="1" dirty="0">
                           <a:solidFill>
                             <a:schemeClr val="tx1"/>
                           </a:solidFill>
                         </a:rPr>
                         <a:t>Реальний ВВП, % (рік)</a:t>
                       </a:r>
-                      <a:endParaRPr lang="en-US" sz="1500" dirty="0"/>
+                      <a:endParaRPr lang="en-US" sz="1400" dirty="0"/>
                     </a:p>
                   </a:txBody>
                   <a:tcPr marL="63500" marR="63500" marT="38100" marB="38100" anchor="ctr">
@@ -18653,14 +18671,14 @@
                         <a:buNone/>
                       </a:pPr>
                       <a:r>
-                        <a:rPr lang="en-US" sz="1500" dirty="0">
+                        <a:rPr lang="en-US" sz="1400" dirty="0">
                           <a:solidFill>
                             <a:schemeClr val="tx1"/>
                           </a:solidFill>
                         </a:rPr>
                         <a:t>0,5</a:t>
                       </a:r>
-                      <a:endParaRPr lang="en-US" sz="1500" dirty="0"/>
+                      <a:endParaRPr lang="en-US" sz="1400" dirty="0"/>
                     </a:p>
                   </a:txBody>
                   <a:tcPr marL="63500" marR="63500" marT="38100" marB="38100" anchor="ctr">
@@ -18714,14 +18732,14 @@
                         <a:buNone/>
                       </a:pPr>
                       <a:r>
-                        <a:rPr lang="en-US" sz="1500" dirty="0">
+                        <a:rPr lang="en-US" sz="1400" dirty="0">
                           <a:solidFill>
                             <a:schemeClr val="tx1"/>
                           </a:solidFill>
                         </a:rPr>
                         <a:t>−0,2</a:t>
                       </a:r>
-                      <a:endParaRPr lang="en-US" sz="1500" dirty="0"/>
+                      <a:endParaRPr lang="en-US" sz="1400" dirty="0"/>
                     </a:p>
                   </a:txBody>
                   <a:tcPr marL="63500" marR="63500" marT="38100" marB="38100" anchor="ctr">
@@ -18775,14 +18793,14 @@
                         <a:buNone/>
                       </a:pPr>
                       <a:r>
-                        <a:rPr lang="en-US" sz="1500" dirty="0">
+                        <a:rPr lang="en-US" sz="1400" dirty="0">
                           <a:solidFill>
                             <a:schemeClr val="tx1"/>
                           </a:solidFill>
                         </a:rPr>
                         <a:t>2,4</a:t>
                       </a:r>
-                      <a:endParaRPr lang="en-US" sz="1500" dirty="0"/>
+                      <a:endParaRPr lang="en-US" sz="1400" dirty="0"/>
                     </a:p>
                   </a:txBody>
                   <a:tcPr marL="63500" marR="63500" marT="38100" marB="38100" anchor="ctr">
@@ -18836,14 +18854,14 @@
                         <a:buNone/>
                       </a:pPr>
                       <a:r>
-                        <a:rPr lang="en-US" sz="1500" dirty="0">
+                        <a:rPr lang="en-US" sz="1400" dirty="0">
                           <a:solidFill>
                             <a:schemeClr val="tx1"/>
                           </a:solidFill>
                         </a:rPr>
                         <a:t>3,2</a:t>
                       </a:r>
-                      <a:endParaRPr lang="en-US" sz="1500" dirty="0"/>
+                      <a:endParaRPr lang="en-US" sz="1400" dirty="0"/>
                     </a:p>
                   </a:txBody>
                   <a:tcPr marL="63500" marR="63500" marT="38100" marB="38100" anchor="ctr">
@@ -18889,7 +18907,7 @@
                   </a:tcPr>
                 </a:tc>
               </a:tr>
-              <a:tr h="384048">
+              <a:tr h="347472">
                 <a:tc>
                   <a:txBody>
                     <a:bodyPr/>
@@ -18899,14 +18917,14 @@
                         <a:buNone/>
                       </a:pPr>
                       <a:r>
-                        <a:rPr lang="en-US" sz="1500" b="1" dirty="0">
+                        <a:rPr lang="en-US" sz="1400" b="1" dirty="0">
                           <a:solidFill>
                             <a:schemeClr val="tx1"/>
                           </a:solidFill>
                         </a:rPr>
                         <a:t>Облікова ставка, %</a:t>
                       </a:r>
-                      <a:endParaRPr lang="en-US" sz="1500" dirty="0"/>
+                      <a:endParaRPr lang="en-US" sz="1400" dirty="0"/>
                     </a:p>
                   </a:txBody>
                   <a:tcPr marL="63500" marR="63500" marT="38100" marB="38100" anchor="ctr">
@@ -18960,14 +18978,14 @@
                         <a:buNone/>
                       </a:pPr>
                       <a:r>
-                        <a:rPr lang="en-US" sz="1500" dirty="0">
+                        <a:rPr lang="en-US" sz="1400" dirty="0">
                           <a:solidFill>
                             <a:schemeClr val="tx1"/>
                           </a:solidFill>
                         </a:rPr>
                         <a:t>17,0</a:t>
                       </a:r>
-                      <a:endParaRPr lang="en-US" sz="1500" dirty="0"/>
+                      <a:endParaRPr lang="en-US" sz="1400" dirty="0"/>
                     </a:p>
                   </a:txBody>
                   <a:tcPr marL="63500" marR="63500" marT="38100" marB="38100" anchor="ctr">
@@ -19021,14 +19039,14 @@
                         <a:buNone/>
                       </a:pPr>
                       <a:r>
-                        <a:rPr lang="en-US" sz="1500" dirty="0">
+                        <a:rPr lang="en-US" sz="1400" dirty="0">
                           <a:solidFill>
                             <a:schemeClr val="tx1"/>
                           </a:solidFill>
                         </a:rPr>
                         <a:t>13,1</a:t>
                       </a:r>
-                      <a:endParaRPr lang="en-US" sz="1500" dirty="0"/>
+                      <a:endParaRPr lang="en-US" sz="1400" dirty="0"/>
                     </a:p>
                   </a:txBody>
                   <a:tcPr marL="63500" marR="63500" marT="38100" marB="38100" anchor="ctr">
@@ -19082,14 +19100,14 @@
                         <a:buNone/>
                       </a:pPr>
                       <a:r>
-                        <a:rPr lang="en-US" sz="1500" dirty="0">
+                        <a:rPr lang="en-US" sz="1400" dirty="0">
                           <a:solidFill>
                             <a:schemeClr val="tx1"/>
                           </a:solidFill>
                         </a:rPr>
                         <a:t>10,5</a:t>
                       </a:r>
-                      <a:endParaRPr lang="en-US" sz="1500" dirty="0"/>
+                      <a:endParaRPr lang="en-US" sz="1400" dirty="0"/>
                     </a:p>
                   </a:txBody>
                   <a:tcPr marL="63500" marR="63500" marT="38100" marB="38100" anchor="ctr">
@@ -19143,14 +19161,14 @@
                         <a:buNone/>
                       </a:pPr>
                       <a:r>
-                        <a:rPr lang="en-US" sz="1500" dirty="0">
+                        <a:rPr lang="en-US" sz="1400" dirty="0">
                           <a:solidFill>
                             <a:schemeClr val="tx1"/>
                           </a:solidFill>
                         </a:rPr>
                         <a:t>10,5</a:t>
                       </a:r>
-                      <a:endParaRPr lang="en-US" sz="1500" dirty="0"/>
+                      <a:endParaRPr lang="en-US" sz="1400" dirty="0"/>
                     </a:p>
                   </a:txBody>
                   <a:tcPr marL="63500" marR="63500" marT="38100" marB="38100" anchor="ctr">
@@ -19196,7 +19214,7 @@
                   </a:tcPr>
                 </a:tc>
               </a:tr>
-              <a:tr h="384048">
+              <a:tr h="347472">
                 <a:tc>
                   <a:txBody>
                     <a:bodyPr/>
@@ -19206,14 +19224,14 @@
                         <a:buNone/>
                       </a:pPr>
                       <a:r>
-                        <a:rPr lang="en-US" sz="1500" b="1" dirty="0">
+                        <a:rPr lang="en-US" sz="1400" b="1" dirty="0">
                           <a:solidFill>
                             <a:schemeClr val="tx1"/>
                           </a:solidFill>
                         </a:rPr>
                         <a:t>Курс, грн/$ (модель)**</a:t>
                       </a:r>
-                      <a:endParaRPr lang="en-US" sz="1500" dirty="0"/>
+                      <a:endParaRPr lang="en-US" sz="1400" dirty="0"/>
                     </a:p>
                   </a:txBody>
                   <a:tcPr marL="63500" marR="63500" marT="38100" marB="38100" anchor="ctr">
@@ -19267,14 +19285,14 @@
                         <a:buNone/>
                       </a:pPr>
                       <a:r>
-                        <a:rPr lang="en-US" sz="1500" dirty="0">
+                        <a:rPr lang="en-US" sz="1400" dirty="0">
                           <a:solidFill>
                             <a:schemeClr val="tx1"/>
                           </a:solidFill>
                         </a:rPr>
                         <a:t>45,0</a:t>
                       </a:r>
-                      <a:endParaRPr lang="en-US" sz="1500" dirty="0"/>
+                      <a:endParaRPr lang="en-US" sz="1400" dirty="0"/>
                     </a:p>
                   </a:txBody>
                   <a:tcPr marL="63500" marR="63500" marT="38100" marB="38100" anchor="ctr">
@@ -19328,14 +19346,14 @@
                         <a:buNone/>
                       </a:pPr>
                       <a:r>
-                        <a:rPr lang="en-US" sz="1500" dirty="0">
+                        <a:rPr lang="en-US" sz="1400" dirty="0">
                           <a:solidFill>
                             <a:schemeClr val="tx1"/>
                           </a:solidFill>
                         </a:rPr>
                         <a:t>45,6</a:t>
                       </a:r>
-                      <a:endParaRPr lang="en-US" sz="1500" dirty="0"/>
+                      <a:endParaRPr lang="en-US" sz="1400" dirty="0"/>
                     </a:p>
                   </a:txBody>
                   <a:tcPr marL="63500" marR="63500" marT="38100" marB="38100" anchor="ctr">
@@ -19389,14 +19407,14 @@
                         <a:buNone/>
                       </a:pPr>
                       <a:r>
-                        <a:rPr lang="en-US" sz="1500" dirty="0">
+                        <a:rPr lang="en-US" sz="1400" dirty="0">
                           <a:solidFill>
                             <a:schemeClr val="tx1"/>
                           </a:solidFill>
                         </a:rPr>
                         <a:t>46,6</a:t>
                       </a:r>
-                      <a:endParaRPr lang="en-US" sz="1500" dirty="0"/>
+                      <a:endParaRPr lang="en-US" sz="1400" dirty="0"/>
                     </a:p>
                   </a:txBody>
                   <a:tcPr marL="63500" marR="63500" marT="38100" marB="38100" anchor="ctr">
@@ -19450,14 +19468,14 @@
                         <a:buNone/>
                       </a:pPr>
                       <a:r>
-                        <a:rPr lang="en-US" sz="1500" dirty="0">
+                        <a:rPr lang="en-US" sz="1400" dirty="0">
                           <a:solidFill>
                             <a:schemeClr val="tx1"/>
                           </a:solidFill>
                         </a:rPr>
                         <a:t>47,0</a:t>
                       </a:r>
-                      <a:endParaRPr lang="en-US" sz="1500" dirty="0"/>
+                      <a:endParaRPr lang="en-US" sz="1400" dirty="0"/>
                     </a:p>
                   </a:txBody>
                   <a:tcPr marL="63500" marR="63500" marT="38100" marB="38100" anchor="ctr">
@@ -19515,8 +19533,8 @@
         </p:nvSpPr>
         <p:spPr>
           <a:xfrm>
-            <a:off x="457200" y="6281928"/>
-            <a:ext cx="11277295" cy="502920"/>
+            <a:off x="457200" y="5852160"/>
+            <a:ext cx="11277295" cy="457200"/>
           </a:xfrm>
           <a:prstGeom prst="rect">
             <a:avLst/>
@@ -19786,7 +19804,7 @@
         <p:spPr>
           <a:xfrm>
             <a:off x="457200" y="1325880"/>
-            <a:ext cx="7040880" cy="4975330"/>
+            <a:ext cx="6606008" cy="4983480"/>
           </a:xfrm>
           <a:prstGeom prst="rect">
             <a:avLst/>
@@ -20541,7 +20559,7 @@
                 <a:ea typeface="Cambria" pitchFamily="34" charset="-122"/>
                 <a:cs typeface="Cambria" pitchFamily="34" charset="-120"/>
               </a:rPr>
-              <a:t>Додаток 1. Платіжний баланс: імпорт у 2,6 раза більший за експорт — розрив покривають позики партнерів</a:t>
+              <a:t>Додаток 1. Платіжний баланс: імпорт у 2,6 раза більший за експорт, розрив покривають партнери</a:t>
             </a:r>
             <a:endParaRPr lang="en-US" sz="2600" dirty="0"/>
           </a:p>
@@ -20647,7 +20665,7 @@
         <p:spPr>
           <a:xfrm>
             <a:off x="457200" y="1325880"/>
-            <a:ext cx="11277295" cy="3307218"/>
+            <a:ext cx="11277295" cy="3207137"/>
           </a:xfrm>
           <a:prstGeom prst="rect">
             <a:avLst/>
@@ -21172,8 +21190,8 @@
         </p:blipFill>
         <p:spPr>
           <a:xfrm>
-            <a:off x="457200" y="1325880"/>
-            <a:ext cx="11277295" cy="3638707"/>
+            <a:off x="957491" y="1325880"/>
+            <a:ext cx="10276713" cy="3703320"/>
           </a:xfrm>
           <a:prstGeom prst="rect">
             <a:avLst/>
@@ -21564,7 +21582,7 @@
                 <a:ea typeface="Cambria" pitchFamily="34" charset="-122"/>
                 <a:cs typeface="Cambria" pitchFamily="34" charset="-120"/>
               </a:rPr>
-              <a:t>Додаток 3. Наше розширення QPM: нафта змінює небазові ціни, а ставка на нафтовий шок реагує слабко</a:t>
+              <a:t>Додаток 3. Наше розширення QPM: нафта змінює небазові ціни, а ставка на неї реагує слабко</a:t>
             </a:r>
             <a:endParaRPr lang="en-US" sz="2600" dirty="0"/>
           </a:p>
@@ -22231,9 +22249,9 @@
             <a:tbl>
               <a:tblPr/>
               <a:tblGrid>
-                <a:gridCol w="2194560"/>
-                <a:gridCol w="6858000"/>
-                <a:gridCol w="2221992"/>
+                <a:gridCol w="2011680"/>
+                <a:gridCol w="6492240"/>
+                <a:gridCol w="2770632"/>
               </a:tblGrid>
               <a:tr h="402336">
                 <a:tc>
@@ -23470,7 +23488,7 @@
                         <a:rPr lang="en-US" sz="1200" u="sng" dirty="0">
                           <a:hlinkClick r:id="rId9" invalidUrl="" action="" tgtFrame="" tooltip="https://bank.gov.ua/admin_uploads/article/Macroeconomic_Forecast_table_2026_07.xlsx?v=19" history="1" highlightClick="0" endSnd="0"/>
                         </a:rPr>
-                        <a:t>НБУ, припущення макропрогнозу, липень 2026</a:t>
+                        <a:t>НБУ, макропрогноз липень 2026</a:t>
                       </a:r>
                       <a:endParaRPr lang="en-US" sz="1200" dirty="0"/>
                     </a:p>
@@ -24382,7 +24400,7 @@
                 <a:ea typeface="Cambria" pitchFamily="34" charset="-122"/>
                 <a:cs typeface="Cambria" pitchFamily="34" charset="-120"/>
               </a:rPr>
-              <a:t>Додаток 5. Базова інфляція у 2027 — нижча, ніж у НБУ: 4,2% у IV кв. (≈3,7% у грудні) проти 5,1% у НБУ</a:t>
+              <a:t>Додаток 5. Базова інфляція у 2027 — нижча, ніж у НБУ: 4,2% у IV кв. (≈3,7% у грудні) проти 5,1%</a:t>
             </a:r>
             <a:endParaRPr lang="en-US" sz="2600" dirty="0"/>
           </a:p>
@@ -24488,7 +24506,7 @@
         <p:spPr>
           <a:xfrm>
             <a:off x="457200" y="1325880"/>
-            <a:ext cx="7040880" cy="3887267"/>
+            <a:ext cx="7040880" cy="3920117"/>
           </a:xfrm>
           <a:prstGeom prst="rect">
             <a:avLst/>
@@ -36568,7 +36586,7 @@
                   <a:schemeClr val="tx1"/>
                 </a:solidFill>
               </a:rPr>
-              <a:t>Тренди й розриви — фільтр Калмана, 2016–2026; злам 2022: шок потенційного ВВП, розрив −18% у II кв.</a:t>
+              <a:t>Тренди й розриви — фільтр Калмана, 2016–2026; 2022 — шок потенційного ВВП</a:t>
             </a:r>
             <a:endParaRPr lang="en-US" sz="1300" dirty="0"/>
           </a:p>
@@ -36951,7 +36969,7 @@
         <p:spPr>
           <a:xfrm>
             <a:off x="457200" y="1325880"/>
-            <a:ext cx="7040880" cy="2951754"/>
+            <a:ext cx="7040880" cy="2928542"/>
           </a:xfrm>
           <a:prstGeom prst="rect">
             <a:avLst/>
@@ -37236,8 +37254,8 @@
         </p:blipFill>
         <p:spPr>
           <a:xfrm>
-            <a:off x="885120" y="1325880"/>
-            <a:ext cx="10421455" cy="3703320"/>
+            <a:off x="1430505" y="1325880"/>
+            <a:ext cx="9330685" cy="3703320"/>
           </a:xfrm>
           <a:prstGeom prst="rect">
             <a:avLst/>
@@ -43662,8 +43680,8 @@
         </p:blipFill>
         <p:spPr>
           <a:xfrm>
-            <a:off x="885120" y="1325880"/>
-            <a:ext cx="10421455" cy="3703320"/>
+            <a:off x="457200" y="1325880"/>
+            <a:ext cx="11277295" cy="3645280"/>
           </a:xfrm>
           <a:prstGeom prst="rect">
             <a:avLst/>
@@ -44188,8 +44206,8 @@
         </p:blipFill>
         <p:spPr>
           <a:xfrm>
-            <a:off x="877770" y="1325880"/>
-            <a:ext cx="10436154" cy="3703320"/>
+            <a:off x="921559" y="1325880"/>
+            <a:ext cx="10348578" cy="3703320"/>
           </a:xfrm>
           <a:prstGeom prst="rect">
             <a:avLst/>
@@ -44715,7 +44733,7 @@
         <p:spPr>
           <a:xfrm>
             <a:off x="457200" y="1325880"/>
-            <a:ext cx="11277295" cy="3148596"/>
+            <a:ext cx="11277295" cy="3516671"/>
           </a:xfrm>
           <a:prstGeom prst="rect">
             <a:avLst/>
@@ -45106,7 +45124,7 @@
                 <a:ea typeface="Cambria" pitchFamily="34" charset="-122"/>
                 <a:cs typeface="Cambria" pitchFamily="34" charset="-120"/>
               </a:rPr>
-              <a:t>Активність: врожай підтримав III кв., але промисловість і логістика слабкі, а зарплати +21–25%</a:t>
+              <a:t>Активність: врожай підтримав III кв., промисловість і логістика слабкі, зарплати +21–25%</a:t>
             </a:r>
             <a:endParaRPr lang="en-US" sz="2600" dirty="0"/>
           </a:p>
@@ -45270,7 +45288,7 @@
         <p:spPr>
           <a:xfrm>
             <a:off x="457200" y="1325880"/>
-            <a:ext cx="11277295" cy="3357182"/>
+            <a:ext cx="11277295" cy="3530284"/>
           </a:xfrm>
           <a:prstGeom prst="rect">
             <a:avLst/>
@@ -45795,8 +45813,8 @@
         </p:blipFill>
         <p:spPr>
           <a:xfrm>
-            <a:off x="457200" y="1325880"/>
-            <a:ext cx="11277295" cy="3144886"/>
+            <a:off x="612085" y="1325880"/>
+            <a:ext cx="10967525" cy="3703320"/>
           </a:xfrm>
           <a:prstGeom prst="rect">
             <a:avLst/>
@@ -46073,7 +46091,7 @@
                   <a:schemeClr val="tx1"/>
                 </a:solidFill>
               </a:rPr>
-              <a:t>Курс: ≈44,7 грн/$ з червня по вересень, у жовтні — до 45,08 (14.10, історичний мінімум гривні), 25.10 — 45,05 (за рік — +8%); продаж валюти здебільшого «доносить» допомогу: у вересні уряд конвертував $3,81 млрд оборонного траншу</a:t>
+              <a:t>Курс: ≈44,7 грн/$ у червні–вересні, у жовтні — до 45,08 (14.10, історичний мінімум гривні), 25.10 — 45,05; продаж валюти «доносить» допомогу: у вересні уряд конвертував $3,81 млрд траншу</a:t>
             </a:r>
             <a:endParaRPr lang="en-US" sz="1300" dirty="0"/>
           </a:p>
